--- a/Presentation/FYP_NguyenTuan_Presentation.pptx
+++ b/Presentation/FYP_NguyenTuan_Presentation.pptx
@@ -4,9 +4,14 @@
   <p:sldMasterIdLst>
     <p:sldMasterId id="2147483863" r:id="rId1"/>
   </p:sldMasterIdLst>
+  <p:notesMasterIdLst>
+    <p:notesMasterId r:id="rId6"/>
+  </p:notesMasterIdLst>
   <p:sldIdLst>
     <p:sldId id="256" r:id="rId2"/>
     <p:sldId id="257" r:id="rId3"/>
+    <p:sldId id="258" r:id="rId4"/>
+    <p:sldId id="259" r:id="rId5"/>
   </p:sldIdLst>
   <p:sldSz cx="12192000" cy="6858000"/>
   <p:notesSz cx="6858000" cy="9144000"/>
@@ -105,7 +110,3832 @@
       </a:defRPr>
     </a:lvl9pPr>
   </p:defaultTextStyle>
+  <p:extLst>
+    <p:ext uri="{EFAFB233-063F-42B5-8137-9DF3F51BA10A}">
+      <p15:sldGuideLst xmlns:p15="http://schemas.microsoft.com/office/powerpoint/2012/main"/>
+    </p:ext>
+  </p:extLst>
 </p:presentation>
+</file>
+
+<file path=ppt/diagrams/colors1.xml><?xml version="1.0" encoding="utf-8"?>
+<dgm:colorsDef xmlns:dgm="http://schemas.openxmlformats.org/drawingml/2006/diagram" xmlns:a="http://schemas.openxmlformats.org/drawingml/2006/main" uniqueId="urn:microsoft.com/office/officeart/2005/8/colors/accent1_2">
+  <dgm:title val=""/>
+  <dgm:desc val=""/>
+  <dgm:catLst>
+    <dgm:cat type="accent1" pri="11200"/>
+  </dgm:catLst>
+  <dgm:styleLbl name="node0">
+    <dgm:fillClrLst meth="repeat">
+      <a:schemeClr val="accent1"/>
+    </dgm:fillClrLst>
+    <dgm:linClrLst meth="repeat">
+      <a:schemeClr val="lt1"/>
+    </dgm:linClrLst>
+    <dgm:effectClrLst/>
+    <dgm:txLinClrLst/>
+    <dgm:txFillClrLst/>
+    <dgm:txEffectClrLst/>
+  </dgm:styleLbl>
+  <dgm:styleLbl name="alignNode1">
+    <dgm:fillClrLst meth="repeat">
+      <a:schemeClr val="accent1"/>
+    </dgm:fillClrLst>
+    <dgm:linClrLst meth="repeat">
+      <a:schemeClr val="accent1"/>
+    </dgm:linClrLst>
+    <dgm:effectClrLst/>
+    <dgm:txLinClrLst/>
+    <dgm:txFillClrLst/>
+    <dgm:txEffectClrLst/>
+  </dgm:styleLbl>
+  <dgm:styleLbl name="node1">
+    <dgm:fillClrLst meth="repeat">
+      <a:schemeClr val="accent1"/>
+    </dgm:fillClrLst>
+    <dgm:linClrLst meth="repeat">
+      <a:schemeClr val="lt1"/>
+    </dgm:linClrLst>
+    <dgm:effectClrLst/>
+    <dgm:txLinClrLst/>
+    <dgm:txFillClrLst/>
+    <dgm:txEffectClrLst/>
+  </dgm:styleLbl>
+  <dgm:styleLbl name="lnNode1">
+    <dgm:fillClrLst meth="repeat">
+      <a:schemeClr val="accent1"/>
+    </dgm:fillClrLst>
+    <dgm:linClrLst meth="repeat">
+      <a:schemeClr val="lt1"/>
+    </dgm:linClrLst>
+    <dgm:effectClrLst/>
+    <dgm:txLinClrLst/>
+    <dgm:txFillClrLst/>
+    <dgm:txEffectClrLst/>
+  </dgm:styleLbl>
+  <dgm:styleLbl name="vennNode1">
+    <dgm:fillClrLst meth="repeat">
+      <a:schemeClr val="accent1">
+        <a:alpha val="50000"/>
+      </a:schemeClr>
+    </dgm:fillClrLst>
+    <dgm:linClrLst meth="repeat">
+      <a:schemeClr val="lt1"/>
+    </dgm:linClrLst>
+    <dgm:effectClrLst/>
+    <dgm:txLinClrLst/>
+    <dgm:txFillClrLst/>
+    <dgm:txEffectClrLst/>
+  </dgm:styleLbl>
+  <dgm:styleLbl name="node2">
+    <dgm:fillClrLst meth="repeat">
+      <a:schemeClr val="accent1"/>
+    </dgm:fillClrLst>
+    <dgm:linClrLst meth="repeat">
+      <a:schemeClr val="lt1"/>
+    </dgm:linClrLst>
+    <dgm:effectClrLst/>
+    <dgm:txLinClrLst/>
+    <dgm:txFillClrLst/>
+    <dgm:txEffectClrLst/>
+  </dgm:styleLbl>
+  <dgm:styleLbl name="node3">
+    <dgm:fillClrLst meth="repeat">
+      <a:schemeClr val="accent1"/>
+    </dgm:fillClrLst>
+    <dgm:linClrLst meth="repeat">
+      <a:schemeClr val="lt1"/>
+    </dgm:linClrLst>
+    <dgm:effectClrLst/>
+    <dgm:txLinClrLst/>
+    <dgm:txFillClrLst/>
+    <dgm:txEffectClrLst/>
+  </dgm:styleLbl>
+  <dgm:styleLbl name="node4">
+    <dgm:fillClrLst meth="repeat">
+      <a:schemeClr val="accent1"/>
+    </dgm:fillClrLst>
+    <dgm:linClrLst meth="repeat">
+      <a:schemeClr val="lt1"/>
+    </dgm:linClrLst>
+    <dgm:effectClrLst/>
+    <dgm:txLinClrLst/>
+    <dgm:txFillClrLst/>
+    <dgm:txEffectClrLst/>
+  </dgm:styleLbl>
+  <dgm:styleLbl name="fgImgPlace1">
+    <dgm:fillClrLst meth="repeat">
+      <a:schemeClr val="accent1">
+        <a:tint val="50000"/>
+      </a:schemeClr>
+    </dgm:fillClrLst>
+    <dgm:linClrLst meth="repeat">
+      <a:schemeClr val="lt1"/>
+    </dgm:linClrLst>
+    <dgm:effectClrLst/>
+    <dgm:txLinClrLst/>
+    <dgm:txFillClrLst meth="repeat">
+      <a:schemeClr val="lt1"/>
+    </dgm:txFillClrLst>
+    <dgm:txEffectClrLst/>
+  </dgm:styleLbl>
+  <dgm:styleLbl name="alignImgPlace1">
+    <dgm:fillClrLst meth="repeat">
+      <a:schemeClr val="accent1">
+        <a:tint val="50000"/>
+      </a:schemeClr>
+    </dgm:fillClrLst>
+    <dgm:linClrLst meth="repeat">
+      <a:schemeClr val="lt1"/>
+    </dgm:linClrLst>
+    <dgm:effectClrLst/>
+    <dgm:txLinClrLst/>
+    <dgm:txFillClrLst meth="repeat">
+      <a:schemeClr val="lt1"/>
+    </dgm:txFillClrLst>
+    <dgm:txEffectClrLst/>
+  </dgm:styleLbl>
+  <dgm:styleLbl name="bgImgPlace1">
+    <dgm:fillClrLst meth="repeat">
+      <a:schemeClr val="accent1">
+        <a:tint val="50000"/>
+      </a:schemeClr>
+    </dgm:fillClrLst>
+    <dgm:linClrLst meth="repeat">
+      <a:schemeClr val="lt1"/>
+    </dgm:linClrLst>
+    <dgm:effectClrLst/>
+    <dgm:txLinClrLst/>
+    <dgm:txFillClrLst meth="repeat">
+      <a:schemeClr val="lt1"/>
+    </dgm:txFillClrLst>
+    <dgm:txEffectClrLst/>
+  </dgm:styleLbl>
+  <dgm:styleLbl name="sibTrans2D1">
+    <dgm:fillClrLst meth="repeat">
+      <a:schemeClr val="accent1">
+        <a:tint val="60000"/>
+      </a:schemeClr>
+    </dgm:fillClrLst>
+    <dgm:linClrLst meth="repeat">
+      <a:schemeClr val="accent1">
+        <a:tint val="60000"/>
+      </a:schemeClr>
+    </dgm:linClrLst>
+    <dgm:effectClrLst/>
+    <dgm:txLinClrLst/>
+    <dgm:txFillClrLst/>
+    <dgm:txEffectClrLst/>
+  </dgm:styleLbl>
+  <dgm:styleLbl name="fgSibTrans2D1">
+    <dgm:fillClrLst meth="repeat">
+      <a:schemeClr val="accent1">
+        <a:tint val="60000"/>
+      </a:schemeClr>
+    </dgm:fillClrLst>
+    <dgm:linClrLst meth="repeat">
+      <a:schemeClr val="accent1">
+        <a:tint val="60000"/>
+      </a:schemeClr>
+    </dgm:linClrLst>
+    <dgm:effectClrLst/>
+    <dgm:txLinClrLst/>
+    <dgm:txFillClrLst/>
+    <dgm:txEffectClrLst/>
+  </dgm:styleLbl>
+  <dgm:styleLbl name="bgSibTrans2D1">
+    <dgm:fillClrLst meth="repeat">
+      <a:schemeClr val="accent1">
+        <a:tint val="60000"/>
+      </a:schemeClr>
+    </dgm:fillClrLst>
+    <dgm:linClrLst meth="repeat">
+      <a:schemeClr val="accent1">
+        <a:tint val="60000"/>
+      </a:schemeClr>
+    </dgm:linClrLst>
+    <dgm:effectClrLst/>
+    <dgm:txLinClrLst/>
+    <dgm:txFillClrLst/>
+    <dgm:txEffectClrLst/>
+  </dgm:styleLbl>
+  <dgm:styleLbl name="sibTrans1D1">
+    <dgm:fillClrLst meth="repeat">
+      <a:schemeClr val="accent1"/>
+    </dgm:fillClrLst>
+    <dgm:linClrLst meth="repeat">
+      <a:schemeClr val="accent1"/>
+    </dgm:linClrLst>
+    <dgm:effectClrLst/>
+    <dgm:txLinClrLst/>
+    <dgm:txFillClrLst meth="repeat">
+      <a:schemeClr val="tx1"/>
+    </dgm:txFillClrLst>
+    <dgm:txEffectClrLst/>
+  </dgm:styleLbl>
+  <dgm:styleLbl name="callout">
+    <dgm:fillClrLst meth="repeat">
+      <a:schemeClr val="accent1"/>
+    </dgm:fillClrLst>
+    <dgm:linClrLst meth="repeat">
+      <a:schemeClr val="accent1">
+        <a:tint val="50000"/>
+      </a:schemeClr>
+    </dgm:linClrLst>
+    <dgm:effectClrLst/>
+    <dgm:txLinClrLst/>
+    <dgm:txFillClrLst meth="repeat">
+      <a:schemeClr val="tx1"/>
+    </dgm:txFillClrLst>
+    <dgm:txEffectClrLst/>
+  </dgm:styleLbl>
+  <dgm:styleLbl name="asst0">
+    <dgm:fillClrLst meth="repeat">
+      <a:schemeClr val="accent1"/>
+    </dgm:fillClrLst>
+    <dgm:linClrLst meth="repeat">
+      <a:schemeClr val="lt1"/>
+    </dgm:linClrLst>
+    <dgm:effectClrLst/>
+    <dgm:txLinClrLst/>
+    <dgm:txFillClrLst/>
+    <dgm:txEffectClrLst/>
+  </dgm:styleLbl>
+  <dgm:styleLbl name="asst1">
+    <dgm:fillClrLst meth="repeat">
+      <a:schemeClr val="accent1"/>
+    </dgm:fillClrLst>
+    <dgm:linClrLst meth="repeat">
+      <a:schemeClr val="lt1"/>
+    </dgm:linClrLst>
+    <dgm:effectClrLst/>
+    <dgm:txLinClrLst/>
+    <dgm:txFillClrLst/>
+    <dgm:txEffectClrLst/>
+  </dgm:styleLbl>
+  <dgm:styleLbl name="asst2">
+    <dgm:fillClrLst meth="repeat">
+      <a:schemeClr val="accent1"/>
+    </dgm:fillClrLst>
+    <dgm:linClrLst meth="repeat">
+      <a:schemeClr val="lt1"/>
+    </dgm:linClrLst>
+    <dgm:effectClrLst/>
+    <dgm:txLinClrLst/>
+    <dgm:txFillClrLst/>
+    <dgm:txEffectClrLst/>
+  </dgm:styleLbl>
+  <dgm:styleLbl name="asst3">
+    <dgm:fillClrLst meth="repeat">
+      <a:schemeClr val="accent1"/>
+    </dgm:fillClrLst>
+    <dgm:linClrLst meth="repeat">
+      <a:schemeClr val="lt1"/>
+    </dgm:linClrLst>
+    <dgm:effectClrLst/>
+    <dgm:txLinClrLst/>
+    <dgm:txFillClrLst/>
+    <dgm:txEffectClrLst/>
+  </dgm:styleLbl>
+  <dgm:styleLbl name="asst4">
+    <dgm:fillClrLst meth="repeat">
+      <a:schemeClr val="accent1"/>
+    </dgm:fillClrLst>
+    <dgm:linClrLst meth="repeat">
+      <a:schemeClr val="lt1"/>
+    </dgm:linClrLst>
+    <dgm:effectClrLst/>
+    <dgm:txLinClrLst/>
+    <dgm:txFillClrLst/>
+    <dgm:txEffectClrLst/>
+  </dgm:styleLbl>
+  <dgm:styleLbl name="parChTrans2D1">
+    <dgm:fillClrLst meth="repeat">
+      <a:schemeClr val="accent1">
+        <a:tint val="60000"/>
+      </a:schemeClr>
+    </dgm:fillClrLst>
+    <dgm:linClrLst meth="repeat">
+      <a:schemeClr val="accent1">
+        <a:tint val="60000"/>
+      </a:schemeClr>
+    </dgm:linClrLst>
+    <dgm:effectClrLst/>
+    <dgm:txLinClrLst/>
+    <dgm:txFillClrLst meth="repeat">
+      <a:schemeClr val="lt1"/>
+    </dgm:txFillClrLst>
+    <dgm:txEffectClrLst/>
+  </dgm:styleLbl>
+  <dgm:styleLbl name="parChTrans2D2">
+    <dgm:fillClrLst meth="repeat">
+      <a:schemeClr val="accent1"/>
+    </dgm:fillClrLst>
+    <dgm:linClrLst meth="repeat">
+      <a:schemeClr val="accent1"/>
+    </dgm:linClrLst>
+    <dgm:effectClrLst/>
+    <dgm:txLinClrLst/>
+    <dgm:txFillClrLst meth="repeat">
+      <a:schemeClr val="lt1"/>
+    </dgm:txFillClrLst>
+    <dgm:txEffectClrLst/>
+  </dgm:styleLbl>
+  <dgm:styleLbl name="parChTrans2D3">
+    <dgm:fillClrLst meth="repeat">
+      <a:schemeClr val="accent1"/>
+    </dgm:fillClrLst>
+    <dgm:linClrLst meth="repeat">
+      <a:schemeClr val="accent1"/>
+    </dgm:linClrLst>
+    <dgm:effectClrLst/>
+    <dgm:txLinClrLst/>
+    <dgm:txFillClrLst meth="repeat">
+      <a:schemeClr val="lt1"/>
+    </dgm:txFillClrLst>
+    <dgm:txEffectClrLst/>
+  </dgm:styleLbl>
+  <dgm:styleLbl name="parChTrans2D4">
+    <dgm:fillClrLst meth="repeat">
+      <a:schemeClr val="accent1"/>
+    </dgm:fillClrLst>
+    <dgm:linClrLst meth="repeat">
+      <a:schemeClr val="accent1"/>
+    </dgm:linClrLst>
+    <dgm:effectClrLst/>
+    <dgm:txLinClrLst/>
+    <dgm:txFillClrLst meth="repeat">
+      <a:schemeClr val="lt1"/>
+    </dgm:txFillClrLst>
+    <dgm:txEffectClrLst/>
+  </dgm:styleLbl>
+  <dgm:styleLbl name="parChTrans1D1">
+    <dgm:fillClrLst meth="repeat">
+      <a:schemeClr val="accent1"/>
+    </dgm:fillClrLst>
+    <dgm:linClrLst meth="repeat">
+      <a:schemeClr val="accent1">
+        <a:shade val="60000"/>
+      </a:schemeClr>
+    </dgm:linClrLst>
+    <dgm:effectClrLst/>
+    <dgm:txLinClrLst/>
+    <dgm:txFillClrLst meth="repeat">
+      <a:schemeClr val="tx1"/>
+    </dgm:txFillClrLst>
+    <dgm:txEffectClrLst/>
+  </dgm:styleLbl>
+  <dgm:styleLbl name="parChTrans1D2">
+    <dgm:fillClrLst meth="repeat">
+      <a:schemeClr val="accent1"/>
+    </dgm:fillClrLst>
+    <dgm:linClrLst meth="repeat">
+      <a:schemeClr val="accent1">
+        <a:shade val="60000"/>
+      </a:schemeClr>
+    </dgm:linClrLst>
+    <dgm:effectClrLst/>
+    <dgm:txLinClrLst/>
+    <dgm:txFillClrLst meth="repeat">
+      <a:schemeClr val="tx1"/>
+    </dgm:txFillClrLst>
+    <dgm:txEffectClrLst/>
+  </dgm:styleLbl>
+  <dgm:styleLbl name="parChTrans1D3">
+    <dgm:fillClrLst meth="repeat">
+      <a:schemeClr val="accent1"/>
+    </dgm:fillClrLst>
+    <dgm:linClrLst meth="repeat">
+      <a:schemeClr val="accent1">
+        <a:shade val="80000"/>
+      </a:schemeClr>
+    </dgm:linClrLst>
+    <dgm:effectClrLst/>
+    <dgm:txLinClrLst/>
+    <dgm:txFillClrLst meth="repeat">
+      <a:schemeClr val="tx1"/>
+    </dgm:txFillClrLst>
+    <dgm:txEffectClrLst/>
+  </dgm:styleLbl>
+  <dgm:styleLbl name="parChTrans1D4">
+    <dgm:fillClrLst meth="repeat">
+      <a:schemeClr val="accent1"/>
+    </dgm:fillClrLst>
+    <dgm:linClrLst meth="repeat">
+      <a:schemeClr val="accent1">
+        <a:shade val="80000"/>
+      </a:schemeClr>
+    </dgm:linClrLst>
+    <dgm:effectClrLst/>
+    <dgm:txLinClrLst/>
+    <dgm:txFillClrLst meth="repeat">
+      <a:schemeClr val="tx1"/>
+    </dgm:txFillClrLst>
+    <dgm:txEffectClrLst/>
+  </dgm:styleLbl>
+  <dgm:styleLbl name="fgAcc1">
+    <dgm:fillClrLst meth="repeat">
+      <a:schemeClr val="lt1">
+        <a:alpha val="90000"/>
+      </a:schemeClr>
+    </dgm:fillClrLst>
+    <dgm:linClrLst meth="repeat">
+      <a:schemeClr val="accent1"/>
+    </dgm:linClrLst>
+    <dgm:effectClrLst/>
+    <dgm:txLinClrLst/>
+    <dgm:txFillClrLst meth="repeat">
+      <a:schemeClr val="dk1"/>
+    </dgm:txFillClrLst>
+    <dgm:txEffectClrLst/>
+  </dgm:styleLbl>
+  <dgm:styleLbl name="conFgAcc1">
+    <dgm:fillClrLst meth="repeat">
+      <a:schemeClr val="lt1">
+        <a:alpha val="90000"/>
+      </a:schemeClr>
+    </dgm:fillClrLst>
+    <dgm:linClrLst meth="repeat">
+      <a:schemeClr val="accent1"/>
+    </dgm:linClrLst>
+    <dgm:effectClrLst/>
+    <dgm:txLinClrLst/>
+    <dgm:txFillClrLst meth="repeat">
+      <a:schemeClr val="dk1"/>
+    </dgm:txFillClrLst>
+    <dgm:txEffectClrLst/>
+  </dgm:styleLbl>
+  <dgm:styleLbl name="alignAcc1">
+    <dgm:fillClrLst meth="repeat">
+      <a:schemeClr val="lt1">
+        <a:alpha val="90000"/>
+      </a:schemeClr>
+    </dgm:fillClrLst>
+    <dgm:linClrLst meth="repeat">
+      <a:schemeClr val="accent1"/>
+    </dgm:linClrLst>
+    <dgm:effectClrLst/>
+    <dgm:txLinClrLst/>
+    <dgm:txFillClrLst meth="repeat">
+      <a:schemeClr val="dk1"/>
+    </dgm:txFillClrLst>
+    <dgm:txEffectClrLst/>
+  </dgm:styleLbl>
+  <dgm:styleLbl name="trAlignAcc1">
+    <dgm:fillClrLst meth="repeat">
+      <a:schemeClr val="lt1">
+        <a:alpha val="40000"/>
+      </a:schemeClr>
+    </dgm:fillClrLst>
+    <dgm:linClrLst meth="repeat">
+      <a:schemeClr val="accent1"/>
+    </dgm:linClrLst>
+    <dgm:effectClrLst/>
+    <dgm:txLinClrLst/>
+    <dgm:txFillClrLst meth="repeat">
+      <a:schemeClr val="dk1"/>
+    </dgm:txFillClrLst>
+    <dgm:txEffectClrLst/>
+  </dgm:styleLbl>
+  <dgm:styleLbl name="bgAcc1">
+    <dgm:fillClrLst meth="repeat">
+      <a:schemeClr val="lt1">
+        <a:alpha val="90000"/>
+      </a:schemeClr>
+    </dgm:fillClrLst>
+    <dgm:linClrLst meth="repeat">
+      <a:schemeClr val="accent1"/>
+    </dgm:linClrLst>
+    <dgm:effectClrLst/>
+    <dgm:txLinClrLst/>
+    <dgm:txFillClrLst meth="repeat">
+      <a:schemeClr val="dk1"/>
+    </dgm:txFillClrLst>
+    <dgm:txEffectClrLst/>
+  </dgm:styleLbl>
+  <dgm:styleLbl name="solidFgAcc1">
+    <dgm:fillClrLst meth="repeat">
+      <a:schemeClr val="lt1"/>
+    </dgm:fillClrLst>
+    <dgm:linClrLst meth="repeat">
+      <a:schemeClr val="accent1"/>
+    </dgm:linClrLst>
+    <dgm:effectClrLst/>
+    <dgm:txLinClrLst/>
+    <dgm:txFillClrLst meth="repeat">
+      <a:schemeClr val="dk1"/>
+    </dgm:txFillClrLst>
+    <dgm:txEffectClrLst/>
+  </dgm:styleLbl>
+  <dgm:styleLbl name="solidAlignAcc1">
+    <dgm:fillClrLst meth="repeat">
+      <a:schemeClr val="lt1"/>
+    </dgm:fillClrLst>
+    <dgm:linClrLst meth="repeat">
+      <a:schemeClr val="accent1"/>
+    </dgm:linClrLst>
+    <dgm:effectClrLst/>
+    <dgm:txLinClrLst/>
+    <dgm:txFillClrLst meth="repeat">
+      <a:schemeClr val="dk1"/>
+    </dgm:txFillClrLst>
+    <dgm:txEffectClrLst/>
+  </dgm:styleLbl>
+  <dgm:styleLbl name="solidBgAcc1">
+    <dgm:fillClrLst meth="repeat">
+      <a:schemeClr val="lt1"/>
+    </dgm:fillClrLst>
+    <dgm:linClrLst meth="repeat">
+      <a:schemeClr val="accent1"/>
+    </dgm:linClrLst>
+    <dgm:effectClrLst/>
+    <dgm:txLinClrLst/>
+    <dgm:txFillClrLst meth="repeat">
+      <a:schemeClr val="dk1"/>
+    </dgm:txFillClrLst>
+    <dgm:txEffectClrLst/>
+  </dgm:styleLbl>
+  <dgm:styleLbl name="fgAccFollowNode1">
+    <dgm:fillClrLst meth="repeat">
+      <a:schemeClr val="accent1">
+        <a:alpha val="90000"/>
+        <a:tint val="40000"/>
+      </a:schemeClr>
+    </dgm:fillClrLst>
+    <dgm:linClrLst meth="repeat">
+      <a:schemeClr val="accent1">
+        <a:alpha val="90000"/>
+        <a:tint val="40000"/>
+      </a:schemeClr>
+    </dgm:linClrLst>
+    <dgm:effectClrLst/>
+    <dgm:txLinClrLst/>
+    <dgm:txFillClrLst meth="repeat">
+      <a:schemeClr val="dk1"/>
+    </dgm:txFillClrLst>
+    <dgm:txEffectClrLst/>
+  </dgm:styleLbl>
+  <dgm:styleLbl name="alignAccFollowNode1">
+    <dgm:fillClrLst meth="repeat">
+      <a:schemeClr val="accent1">
+        <a:alpha val="90000"/>
+        <a:tint val="40000"/>
+      </a:schemeClr>
+    </dgm:fillClrLst>
+    <dgm:linClrLst meth="repeat">
+      <a:schemeClr val="accent1">
+        <a:alpha val="90000"/>
+        <a:tint val="40000"/>
+      </a:schemeClr>
+    </dgm:linClrLst>
+    <dgm:effectClrLst/>
+    <dgm:txLinClrLst/>
+    <dgm:txFillClrLst meth="repeat">
+      <a:schemeClr val="dk1"/>
+    </dgm:txFillClrLst>
+    <dgm:txEffectClrLst/>
+  </dgm:styleLbl>
+  <dgm:styleLbl name="bgAccFollowNode1">
+    <dgm:fillClrLst meth="repeat">
+      <a:schemeClr val="accent1">
+        <a:alpha val="90000"/>
+        <a:tint val="40000"/>
+      </a:schemeClr>
+    </dgm:fillClrLst>
+    <dgm:linClrLst meth="repeat">
+      <a:schemeClr val="accent1">
+        <a:alpha val="90000"/>
+        <a:tint val="40000"/>
+      </a:schemeClr>
+    </dgm:linClrLst>
+    <dgm:effectClrLst/>
+    <dgm:txLinClrLst/>
+    <dgm:txFillClrLst meth="repeat">
+      <a:schemeClr val="dk1"/>
+    </dgm:txFillClrLst>
+    <dgm:txEffectClrLst/>
+  </dgm:styleLbl>
+  <dgm:styleLbl name="fgAcc0">
+    <dgm:fillClrLst meth="repeat">
+      <a:schemeClr val="lt1">
+        <a:alpha val="90000"/>
+      </a:schemeClr>
+    </dgm:fillClrLst>
+    <dgm:linClrLst meth="repeat">
+      <a:schemeClr val="accent1"/>
+    </dgm:linClrLst>
+    <dgm:effectClrLst/>
+    <dgm:txLinClrLst/>
+    <dgm:txFillClrLst meth="repeat">
+      <a:schemeClr val="dk1"/>
+    </dgm:txFillClrLst>
+    <dgm:txEffectClrLst/>
+  </dgm:styleLbl>
+  <dgm:styleLbl name="fgAcc2">
+    <dgm:fillClrLst meth="repeat">
+      <a:schemeClr val="lt1">
+        <a:alpha val="90000"/>
+      </a:schemeClr>
+    </dgm:fillClrLst>
+    <dgm:linClrLst meth="repeat">
+      <a:schemeClr val="accent1"/>
+    </dgm:linClrLst>
+    <dgm:effectClrLst/>
+    <dgm:txLinClrLst/>
+    <dgm:txFillClrLst meth="repeat">
+      <a:schemeClr val="dk1"/>
+    </dgm:txFillClrLst>
+    <dgm:txEffectClrLst/>
+  </dgm:styleLbl>
+  <dgm:styleLbl name="fgAcc3">
+    <dgm:fillClrLst meth="repeat">
+      <a:schemeClr val="lt1">
+        <a:alpha val="90000"/>
+      </a:schemeClr>
+    </dgm:fillClrLst>
+    <dgm:linClrLst meth="repeat">
+      <a:schemeClr val="accent1"/>
+    </dgm:linClrLst>
+    <dgm:effectClrLst/>
+    <dgm:txLinClrLst/>
+    <dgm:txFillClrLst meth="repeat">
+      <a:schemeClr val="dk1"/>
+    </dgm:txFillClrLst>
+    <dgm:txEffectClrLst/>
+  </dgm:styleLbl>
+  <dgm:styleLbl name="fgAcc4">
+    <dgm:fillClrLst meth="repeat">
+      <a:schemeClr val="lt1">
+        <a:alpha val="90000"/>
+      </a:schemeClr>
+    </dgm:fillClrLst>
+    <dgm:linClrLst meth="repeat">
+      <a:schemeClr val="accent1"/>
+    </dgm:linClrLst>
+    <dgm:effectClrLst/>
+    <dgm:txLinClrLst/>
+    <dgm:txFillClrLst meth="repeat">
+      <a:schemeClr val="dk1"/>
+    </dgm:txFillClrLst>
+    <dgm:txEffectClrLst/>
+  </dgm:styleLbl>
+  <dgm:styleLbl name="bgShp">
+    <dgm:fillClrLst meth="repeat">
+      <a:schemeClr val="accent1">
+        <a:tint val="40000"/>
+      </a:schemeClr>
+    </dgm:fillClrLst>
+    <dgm:linClrLst meth="repeat">
+      <a:schemeClr val="accent1"/>
+    </dgm:linClrLst>
+    <dgm:effectClrLst/>
+    <dgm:txLinClrLst/>
+    <dgm:txFillClrLst meth="repeat">
+      <a:schemeClr val="dk1"/>
+    </dgm:txFillClrLst>
+    <dgm:txEffectClrLst/>
+  </dgm:styleLbl>
+  <dgm:styleLbl name="dkBgShp">
+    <dgm:fillClrLst meth="repeat">
+      <a:schemeClr val="accent1">
+        <a:shade val="80000"/>
+      </a:schemeClr>
+    </dgm:fillClrLst>
+    <dgm:linClrLst meth="repeat">
+      <a:schemeClr val="accent1"/>
+    </dgm:linClrLst>
+    <dgm:effectClrLst/>
+    <dgm:txLinClrLst/>
+    <dgm:txFillClrLst meth="repeat">
+      <a:schemeClr val="lt1"/>
+    </dgm:txFillClrLst>
+    <dgm:txEffectClrLst/>
+  </dgm:styleLbl>
+  <dgm:styleLbl name="trBgShp">
+    <dgm:fillClrLst meth="repeat">
+      <a:schemeClr val="accent1">
+        <a:tint val="50000"/>
+        <a:alpha val="40000"/>
+      </a:schemeClr>
+    </dgm:fillClrLst>
+    <dgm:linClrLst meth="repeat">
+      <a:schemeClr val="accent1"/>
+    </dgm:linClrLst>
+    <dgm:effectClrLst/>
+    <dgm:txLinClrLst/>
+    <dgm:txFillClrLst meth="repeat">
+      <a:schemeClr val="lt1"/>
+    </dgm:txFillClrLst>
+    <dgm:txEffectClrLst/>
+  </dgm:styleLbl>
+  <dgm:styleLbl name="fgShp">
+    <dgm:fillClrLst meth="repeat">
+      <a:schemeClr val="accent1">
+        <a:tint val="60000"/>
+      </a:schemeClr>
+    </dgm:fillClrLst>
+    <dgm:linClrLst meth="repeat">
+      <a:schemeClr val="lt1"/>
+    </dgm:linClrLst>
+    <dgm:effectClrLst/>
+    <dgm:txLinClrLst/>
+    <dgm:txFillClrLst meth="repeat">
+      <a:schemeClr val="dk1"/>
+    </dgm:txFillClrLst>
+    <dgm:txEffectClrLst/>
+  </dgm:styleLbl>
+  <dgm:styleLbl name="revTx">
+    <dgm:fillClrLst meth="repeat">
+      <a:schemeClr val="lt1">
+        <a:alpha val="0"/>
+      </a:schemeClr>
+    </dgm:fillClrLst>
+    <dgm:linClrLst meth="repeat">
+      <a:schemeClr val="dk1">
+        <a:alpha val="0"/>
+      </a:schemeClr>
+    </dgm:linClrLst>
+    <dgm:effectClrLst/>
+    <dgm:txLinClrLst/>
+    <dgm:txFillClrLst meth="repeat">
+      <a:schemeClr val="tx1"/>
+    </dgm:txFillClrLst>
+    <dgm:txEffectClrLst/>
+  </dgm:styleLbl>
+</dgm:colorsDef>
+</file>
+
+<file path=ppt/diagrams/data1.xml><?xml version="1.0" encoding="utf-8"?>
+<dgm:dataModel xmlns:dgm="http://schemas.openxmlformats.org/drawingml/2006/diagram" xmlns:a="http://schemas.openxmlformats.org/drawingml/2006/main">
+  <dgm:ptLst>
+    <dgm:pt modelId="{F46F1668-4786-49EE-8EBC-94635B62F98D}" type="doc">
+      <dgm:prSet loTypeId="urn:microsoft.com/office/officeart/2005/8/layout/hierarchy1" loCatId="hierarchy" qsTypeId="urn:microsoft.com/office/officeart/2005/8/quickstyle/simple1" qsCatId="simple" csTypeId="urn:microsoft.com/office/officeart/2005/8/colors/accent1_2" csCatId="accent1" phldr="1"/>
+      <dgm:spPr/>
+      <dgm:t>
+        <a:bodyPr/>
+        <a:lstStyle/>
+        <a:p>
+          <a:endParaRPr lang="en-US"/>
+        </a:p>
+      </dgm:t>
+    </dgm:pt>
+    <dgm:pt modelId="{6C392DF3-853A-4983-B34B-FA698DCC44D6}">
+      <dgm:prSet/>
+      <dgm:spPr/>
+      <dgm:t>
+        <a:bodyPr/>
+        <a:lstStyle/>
+        <a:p>
+          <a:r>
+            <a:rPr lang="en-US" dirty="0"/>
+            <a:t>Introduction</a:t>
+          </a:r>
+        </a:p>
+      </dgm:t>
+    </dgm:pt>
+    <dgm:pt modelId="{4E04BA09-F03A-4132-9A7B-BA966DDD2217}" type="parTrans" cxnId="{56F94A7A-5322-4316-AD89-7D2F00A5EE09}">
+      <dgm:prSet/>
+      <dgm:spPr/>
+      <dgm:t>
+        <a:bodyPr/>
+        <a:lstStyle/>
+        <a:p>
+          <a:endParaRPr lang="en-US"/>
+        </a:p>
+      </dgm:t>
+    </dgm:pt>
+    <dgm:pt modelId="{FB0482E8-4B8D-4545-A5C3-9E38B92525FA}" type="sibTrans" cxnId="{56F94A7A-5322-4316-AD89-7D2F00A5EE09}">
+      <dgm:prSet/>
+      <dgm:spPr/>
+      <dgm:t>
+        <a:bodyPr/>
+        <a:lstStyle/>
+        <a:p>
+          <a:endParaRPr lang="en-US"/>
+        </a:p>
+      </dgm:t>
+    </dgm:pt>
+    <dgm:pt modelId="{7A3CAF09-89CE-4087-8A8A-00AD97D3FB24}">
+      <dgm:prSet/>
+      <dgm:spPr/>
+      <dgm:t>
+        <a:bodyPr/>
+        <a:lstStyle/>
+        <a:p>
+          <a:r>
+            <a:rPr lang="en-US" dirty="0"/>
+            <a:t>Literature Review</a:t>
+          </a:r>
+        </a:p>
+      </dgm:t>
+    </dgm:pt>
+    <dgm:pt modelId="{1BD86D96-1F6D-47E7-A1B3-04CF3458634D}" type="parTrans" cxnId="{784EF82B-BAAD-469F-9CAA-161BC6E5B5F1}">
+      <dgm:prSet/>
+      <dgm:spPr/>
+      <dgm:t>
+        <a:bodyPr/>
+        <a:lstStyle/>
+        <a:p>
+          <a:endParaRPr lang="en-US"/>
+        </a:p>
+      </dgm:t>
+    </dgm:pt>
+    <dgm:pt modelId="{0CE0C50F-6FB0-4CAF-A25A-CC2672EB8E6C}" type="sibTrans" cxnId="{784EF82B-BAAD-469F-9CAA-161BC6E5B5F1}">
+      <dgm:prSet/>
+      <dgm:spPr/>
+      <dgm:t>
+        <a:bodyPr/>
+        <a:lstStyle/>
+        <a:p>
+          <a:endParaRPr lang="en-US"/>
+        </a:p>
+      </dgm:t>
+    </dgm:pt>
+    <dgm:pt modelId="{9E34A830-0085-4DBE-B8AE-8622CFB72BEA}">
+      <dgm:prSet/>
+      <dgm:spPr/>
+      <dgm:t>
+        <a:bodyPr/>
+        <a:lstStyle/>
+        <a:p>
+          <a:r>
+            <a:rPr lang="en-US" dirty="0"/>
+            <a:t>TCT Architecture</a:t>
+          </a:r>
+        </a:p>
+      </dgm:t>
+    </dgm:pt>
+    <dgm:pt modelId="{3D23B6C7-F7C5-437B-8FAD-FA5522E22697}" type="parTrans" cxnId="{2E4AEF4C-4567-471A-BA59-6B333ED96976}">
+      <dgm:prSet/>
+      <dgm:spPr/>
+      <dgm:t>
+        <a:bodyPr/>
+        <a:lstStyle/>
+        <a:p>
+          <a:endParaRPr lang="en-US"/>
+        </a:p>
+      </dgm:t>
+    </dgm:pt>
+    <dgm:pt modelId="{84BD5997-2D8F-4FD3-A26A-A45C713BF79C}" type="sibTrans" cxnId="{2E4AEF4C-4567-471A-BA59-6B333ED96976}">
+      <dgm:prSet/>
+      <dgm:spPr/>
+      <dgm:t>
+        <a:bodyPr/>
+        <a:lstStyle/>
+        <a:p>
+          <a:endParaRPr lang="en-US"/>
+        </a:p>
+      </dgm:t>
+    </dgm:pt>
+    <dgm:pt modelId="{B7D448E4-D35C-4FC9-98F3-FD0C217FE932}">
+      <dgm:prSet/>
+      <dgm:spPr/>
+      <dgm:t>
+        <a:bodyPr/>
+        <a:lstStyle/>
+        <a:p>
+          <a:r>
+            <a:rPr lang="en-US" dirty="0"/>
+            <a:t>Experiments</a:t>
+          </a:r>
+        </a:p>
+      </dgm:t>
+    </dgm:pt>
+    <dgm:pt modelId="{A643C5E8-1A9F-423C-9BD0-143EA206A3F4}" type="parTrans" cxnId="{07A4281C-B0DC-4E15-87BA-C1C610788E32}">
+      <dgm:prSet/>
+      <dgm:spPr/>
+      <dgm:t>
+        <a:bodyPr/>
+        <a:lstStyle/>
+        <a:p>
+          <a:endParaRPr lang="en-US"/>
+        </a:p>
+      </dgm:t>
+    </dgm:pt>
+    <dgm:pt modelId="{740A130C-BFBF-4EBF-A4C1-977A915A46E7}" type="sibTrans" cxnId="{07A4281C-B0DC-4E15-87BA-C1C610788E32}">
+      <dgm:prSet/>
+      <dgm:spPr/>
+      <dgm:t>
+        <a:bodyPr/>
+        <a:lstStyle/>
+        <a:p>
+          <a:endParaRPr lang="en-US"/>
+        </a:p>
+      </dgm:t>
+    </dgm:pt>
+    <dgm:pt modelId="{A45CE270-3AAF-4979-A581-EC4A3EB9E88D}">
+      <dgm:prSet/>
+      <dgm:spPr/>
+      <dgm:t>
+        <a:bodyPr/>
+        <a:lstStyle/>
+        <a:p>
+          <a:r>
+            <a:rPr lang="en-US" dirty="0"/>
+            <a:t>Contributions and Future Directions</a:t>
+          </a:r>
+        </a:p>
+      </dgm:t>
+    </dgm:pt>
+    <dgm:pt modelId="{2FE405CC-285A-434B-BC71-B46CD5F71018}" type="parTrans" cxnId="{ABDE0752-06BA-4636-BCB1-304600C32384}">
+      <dgm:prSet/>
+      <dgm:spPr/>
+      <dgm:t>
+        <a:bodyPr/>
+        <a:lstStyle/>
+        <a:p>
+          <a:endParaRPr lang="en-US"/>
+        </a:p>
+      </dgm:t>
+    </dgm:pt>
+    <dgm:pt modelId="{CCDAF1A2-828B-4D8D-BE75-7B9601A01BB8}" type="sibTrans" cxnId="{ABDE0752-06BA-4636-BCB1-304600C32384}">
+      <dgm:prSet/>
+      <dgm:spPr/>
+      <dgm:t>
+        <a:bodyPr/>
+        <a:lstStyle/>
+        <a:p>
+          <a:endParaRPr lang="en-US"/>
+        </a:p>
+      </dgm:t>
+    </dgm:pt>
+    <dgm:pt modelId="{C6DA7C71-2489-4F42-963C-E28CB6E48095}" type="pres">
+      <dgm:prSet presAssocID="{F46F1668-4786-49EE-8EBC-94635B62F98D}" presName="hierChild1" presStyleCnt="0">
+        <dgm:presLayoutVars>
+          <dgm:chPref val="1"/>
+          <dgm:dir/>
+          <dgm:animOne val="branch"/>
+          <dgm:animLvl val="lvl"/>
+          <dgm:resizeHandles/>
+        </dgm:presLayoutVars>
+      </dgm:prSet>
+      <dgm:spPr/>
+    </dgm:pt>
+    <dgm:pt modelId="{CE5CD56B-F1E4-254E-8DCA-0D0FA1965D1C}" type="pres">
+      <dgm:prSet presAssocID="{6C392DF3-853A-4983-B34B-FA698DCC44D6}" presName="hierRoot1" presStyleCnt="0"/>
+      <dgm:spPr/>
+    </dgm:pt>
+    <dgm:pt modelId="{A8584874-52DE-7D49-A047-976D5E92C70D}" type="pres">
+      <dgm:prSet presAssocID="{6C392DF3-853A-4983-B34B-FA698DCC44D6}" presName="composite" presStyleCnt="0"/>
+      <dgm:spPr/>
+    </dgm:pt>
+    <dgm:pt modelId="{36BF2225-AE22-314B-AF2D-55228814F298}" type="pres">
+      <dgm:prSet presAssocID="{6C392DF3-853A-4983-B34B-FA698DCC44D6}" presName="background" presStyleLbl="node0" presStyleIdx="0" presStyleCnt="5"/>
+      <dgm:spPr/>
+    </dgm:pt>
+    <dgm:pt modelId="{4B64EEEB-0D9F-344A-BC29-E0FE1AE9120E}" type="pres">
+      <dgm:prSet presAssocID="{6C392DF3-853A-4983-B34B-FA698DCC44D6}" presName="text" presStyleLbl="fgAcc0" presStyleIdx="0" presStyleCnt="5">
+        <dgm:presLayoutVars>
+          <dgm:chPref val="3"/>
+        </dgm:presLayoutVars>
+      </dgm:prSet>
+      <dgm:spPr/>
+    </dgm:pt>
+    <dgm:pt modelId="{F0207811-F6D6-8843-B1AF-A58F09B64E40}" type="pres">
+      <dgm:prSet presAssocID="{6C392DF3-853A-4983-B34B-FA698DCC44D6}" presName="hierChild2" presStyleCnt="0"/>
+      <dgm:spPr/>
+    </dgm:pt>
+    <dgm:pt modelId="{80FF5771-6F0D-5146-B43D-B5EA0AEA780D}" type="pres">
+      <dgm:prSet presAssocID="{7A3CAF09-89CE-4087-8A8A-00AD97D3FB24}" presName="hierRoot1" presStyleCnt="0"/>
+      <dgm:spPr/>
+    </dgm:pt>
+    <dgm:pt modelId="{46EA9D36-013E-7747-8C05-65C748CD8947}" type="pres">
+      <dgm:prSet presAssocID="{7A3CAF09-89CE-4087-8A8A-00AD97D3FB24}" presName="composite" presStyleCnt="0"/>
+      <dgm:spPr/>
+    </dgm:pt>
+    <dgm:pt modelId="{B3BA8365-D843-DB44-9342-3EA7CAFA27C7}" type="pres">
+      <dgm:prSet presAssocID="{7A3CAF09-89CE-4087-8A8A-00AD97D3FB24}" presName="background" presStyleLbl="node0" presStyleIdx="1" presStyleCnt="5"/>
+      <dgm:spPr/>
+    </dgm:pt>
+    <dgm:pt modelId="{2AA862F7-F98C-0C41-BAFE-D002CD2FAC9E}" type="pres">
+      <dgm:prSet presAssocID="{7A3CAF09-89CE-4087-8A8A-00AD97D3FB24}" presName="text" presStyleLbl="fgAcc0" presStyleIdx="1" presStyleCnt="5">
+        <dgm:presLayoutVars>
+          <dgm:chPref val="3"/>
+        </dgm:presLayoutVars>
+      </dgm:prSet>
+      <dgm:spPr/>
+    </dgm:pt>
+    <dgm:pt modelId="{B52A9E15-3AAB-2643-92B0-47526ED319BC}" type="pres">
+      <dgm:prSet presAssocID="{7A3CAF09-89CE-4087-8A8A-00AD97D3FB24}" presName="hierChild2" presStyleCnt="0"/>
+      <dgm:spPr/>
+    </dgm:pt>
+    <dgm:pt modelId="{9F697780-A044-E544-ACB6-DAB9599AB66D}" type="pres">
+      <dgm:prSet presAssocID="{9E34A830-0085-4DBE-B8AE-8622CFB72BEA}" presName="hierRoot1" presStyleCnt="0"/>
+      <dgm:spPr/>
+    </dgm:pt>
+    <dgm:pt modelId="{6597D490-4C58-DC4B-BBAC-6619E55CB213}" type="pres">
+      <dgm:prSet presAssocID="{9E34A830-0085-4DBE-B8AE-8622CFB72BEA}" presName="composite" presStyleCnt="0"/>
+      <dgm:spPr/>
+    </dgm:pt>
+    <dgm:pt modelId="{0D6D2B9E-40F5-234A-83E0-C92322AA872D}" type="pres">
+      <dgm:prSet presAssocID="{9E34A830-0085-4DBE-B8AE-8622CFB72BEA}" presName="background" presStyleLbl="node0" presStyleIdx="2" presStyleCnt="5"/>
+      <dgm:spPr/>
+    </dgm:pt>
+    <dgm:pt modelId="{D2EBED80-8A3C-A545-8213-CA0EA282634E}" type="pres">
+      <dgm:prSet presAssocID="{9E34A830-0085-4DBE-B8AE-8622CFB72BEA}" presName="text" presStyleLbl="fgAcc0" presStyleIdx="2" presStyleCnt="5">
+        <dgm:presLayoutVars>
+          <dgm:chPref val="3"/>
+        </dgm:presLayoutVars>
+      </dgm:prSet>
+      <dgm:spPr/>
+    </dgm:pt>
+    <dgm:pt modelId="{4AA97A98-35CF-2244-8D39-16A64EF351E0}" type="pres">
+      <dgm:prSet presAssocID="{9E34A830-0085-4DBE-B8AE-8622CFB72BEA}" presName="hierChild2" presStyleCnt="0"/>
+      <dgm:spPr/>
+    </dgm:pt>
+    <dgm:pt modelId="{6CFBE8F8-F2E5-0542-A0AF-830865796367}" type="pres">
+      <dgm:prSet presAssocID="{B7D448E4-D35C-4FC9-98F3-FD0C217FE932}" presName="hierRoot1" presStyleCnt="0"/>
+      <dgm:spPr/>
+    </dgm:pt>
+    <dgm:pt modelId="{EB73D22B-CFB2-E642-9B75-003B4780592C}" type="pres">
+      <dgm:prSet presAssocID="{B7D448E4-D35C-4FC9-98F3-FD0C217FE932}" presName="composite" presStyleCnt="0"/>
+      <dgm:spPr/>
+    </dgm:pt>
+    <dgm:pt modelId="{2EAE4AEB-41BD-0E4E-B186-0B4CC87AD595}" type="pres">
+      <dgm:prSet presAssocID="{B7D448E4-D35C-4FC9-98F3-FD0C217FE932}" presName="background" presStyleLbl="node0" presStyleIdx="3" presStyleCnt="5"/>
+      <dgm:spPr/>
+    </dgm:pt>
+    <dgm:pt modelId="{0CF1CBF2-421F-B646-91D1-2B6854447566}" type="pres">
+      <dgm:prSet presAssocID="{B7D448E4-D35C-4FC9-98F3-FD0C217FE932}" presName="text" presStyleLbl="fgAcc0" presStyleIdx="3" presStyleCnt="5">
+        <dgm:presLayoutVars>
+          <dgm:chPref val="3"/>
+        </dgm:presLayoutVars>
+      </dgm:prSet>
+      <dgm:spPr/>
+    </dgm:pt>
+    <dgm:pt modelId="{C6509B7E-09DF-EC43-8A7B-54508E2A9171}" type="pres">
+      <dgm:prSet presAssocID="{B7D448E4-D35C-4FC9-98F3-FD0C217FE932}" presName="hierChild2" presStyleCnt="0"/>
+      <dgm:spPr/>
+    </dgm:pt>
+    <dgm:pt modelId="{A9DF3CE1-A2E0-9E48-8049-BCD5675C491D}" type="pres">
+      <dgm:prSet presAssocID="{A45CE270-3AAF-4979-A581-EC4A3EB9E88D}" presName="hierRoot1" presStyleCnt="0"/>
+      <dgm:spPr/>
+    </dgm:pt>
+    <dgm:pt modelId="{E5970852-FF4D-B644-AFBF-9C5E07419EC0}" type="pres">
+      <dgm:prSet presAssocID="{A45CE270-3AAF-4979-A581-EC4A3EB9E88D}" presName="composite" presStyleCnt="0"/>
+      <dgm:spPr/>
+    </dgm:pt>
+    <dgm:pt modelId="{A1A7C6F4-DE72-6A45-9699-5BC45B5DC225}" type="pres">
+      <dgm:prSet presAssocID="{A45CE270-3AAF-4979-A581-EC4A3EB9E88D}" presName="background" presStyleLbl="node0" presStyleIdx="4" presStyleCnt="5"/>
+      <dgm:spPr/>
+    </dgm:pt>
+    <dgm:pt modelId="{7FC1DD06-56ED-9A49-8332-09B3E3A4776C}" type="pres">
+      <dgm:prSet presAssocID="{A45CE270-3AAF-4979-A581-EC4A3EB9E88D}" presName="text" presStyleLbl="fgAcc0" presStyleIdx="4" presStyleCnt="5">
+        <dgm:presLayoutVars>
+          <dgm:chPref val="3"/>
+        </dgm:presLayoutVars>
+      </dgm:prSet>
+      <dgm:spPr/>
+    </dgm:pt>
+    <dgm:pt modelId="{5CB21571-B228-D747-A8B2-54EB5842AE02}" type="pres">
+      <dgm:prSet presAssocID="{A45CE270-3AAF-4979-A581-EC4A3EB9E88D}" presName="hierChild2" presStyleCnt="0"/>
+      <dgm:spPr/>
+    </dgm:pt>
+  </dgm:ptLst>
+  <dgm:cxnLst>
+    <dgm:cxn modelId="{9EC15F05-9564-0141-8821-C4BAB3F810F4}" type="presOf" srcId="{7A3CAF09-89CE-4087-8A8A-00AD97D3FB24}" destId="{2AA862F7-F98C-0C41-BAFE-D002CD2FAC9E}" srcOrd="0" destOrd="0" presId="urn:microsoft.com/office/officeart/2005/8/layout/hierarchy1"/>
+    <dgm:cxn modelId="{01225014-3BE0-034D-9F07-7A497BD4A719}" type="presOf" srcId="{F46F1668-4786-49EE-8EBC-94635B62F98D}" destId="{C6DA7C71-2489-4F42-963C-E28CB6E48095}" srcOrd="0" destOrd="0" presId="urn:microsoft.com/office/officeart/2005/8/layout/hierarchy1"/>
+    <dgm:cxn modelId="{07A4281C-B0DC-4E15-87BA-C1C610788E32}" srcId="{F46F1668-4786-49EE-8EBC-94635B62F98D}" destId="{B7D448E4-D35C-4FC9-98F3-FD0C217FE932}" srcOrd="3" destOrd="0" parTransId="{A643C5E8-1A9F-423C-9BD0-143EA206A3F4}" sibTransId="{740A130C-BFBF-4EBF-A4C1-977A915A46E7}"/>
+    <dgm:cxn modelId="{3C63D328-97A1-994D-9DBE-D6824F108C00}" type="presOf" srcId="{A45CE270-3AAF-4979-A581-EC4A3EB9E88D}" destId="{7FC1DD06-56ED-9A49-8332-09B3E3A4776C}" srcOrd="0" destOrd="0" presId="urn:microsoft.com/office/officeart/2005/8/layout/hierarchy1"/>
+    <dgm:cxn modelId="{784EF82B-BAAD-469F-9CAA-161BC6E5B5F1}" srcId="{F46F1668-4786-49EE-8EBC-94635B62F98D}" destId="{7A3CAF09-89CE-4087-8A8A-00AD97D3FB24}" srcOrd="1" destOrd="0" parTransId="{1BD86D96-1F6D-47E7-A1B3-04CF3458634D}" sibTransId="{0CE0C50F-6FB0-4CAF-A25A-CC2672EB8E6C}"/>
+    <dgm:cxn modelId="{7A840639-F150-8B43-AE5B-C5D5A931CAA8}" type="presOf" srcId="{6C392DF3-853A-4983-B34B-FA698DCC44D6}" destId="{4B64EEEB-0D9F-344A-BC29-E0FE1AE9120E}" srcOrd="0" destOrd="0" presId="urn:microsoft.com/office/officeart/2005/8/layout/hierarchy1"/>
+    <dgm:cxn modelId="{2E4AEF4C-4567-471A-BA59-6B333ED96976}" srcId="{F46F1668-4786-49EE-8EBC-94635B62F98D}" destId="{9E34A830-0085-4DBE-B8AE-8622CFB72BEA}" srcOrd="2" destOrd="0" parTransId="{3D23B6C7-F7C5-437B-8FAD-FA5522E22697}" sibTransId="{84BD5997-2D8F-4FD3-A26A-A45C713BF79C}"/>
+    <dgm:cxn modelId="{ABDE0752-06BA-4636-BCB1-304600C32384}" srcId="{F46F1668-4786-49EE-8EBC-94635B62F98D}" destId="{A45CE270-3AAF-4979-A581-EC4A3EB9E88D}" srcOrd="4" destOrd="0" parTransId="{2FE405CC-285A-434B-BC71-B46CD5F71018}" sibTransId="{CCDAF1A2-828B-4D8D-BE75-7B9601A01BB8}"/>
+    <dgm:cxn modelId="{14DD3268-6F92-A849-9C82-B817016DA893}" type="presOf" srcId="{9E34A830-0085-4DBE-B8AE-8622CFB72BEA}" destId="{D2EBED80-8A3C-A545-8213-CA0EA282634E}" srcOrd="0" destOrd="0" presId="urn:microsoft.com/office/officeart/2005/8/layout/hierarchy1"/>
+    <dgm:cxn modelId="{56F94A7A-5322-4316-AD89-7D2F00A5EE09}" srcId="{F46F1668-4786-49EE-8EBC-94635B62F98D}" destId="{6C392DF3-853A-4983-B34B-FA698DCC44D6}" srcOrd="0" destOrd="0" parTransId="{4E04BA09-F03A-4132-9A7B-BA966DDD2217}" sibTransId="{FB0482E8-4B8D-4545-A5C3-9E38B92525FA}"/>
+    <dgm:cxn modelId="{0B2676E2-C7ED-2646-AC49-FC5DBF9BDB64}" type="presOf" srcId="{B7D448E4-D35C-4FC9-98F3-FD0C217FE932}" destId="{0CF1CBF2-421F-B646-91D1-2B6854447566}" srcOrd="0" destOrd="0" presId="urn:microsoft.com/office/officeart/2005/8/layout/hierarchy1"/>
+    <dgm:cxn modelId="{548AA75E-3966-F647-B054-37D71CABF6E0}" type="presParOf" srcId="{C6DA7C71-2489-4F42-963C-E28CB6E48095}" destId="{CE5CD56B-F1E4-254E-8DCA-0D0FA1965D1C}" srcOrd="0" destOrd="0" presId="urn:microsoft.com/office/officeart/2005/8/layout/hierarchy1"/>
+    <dgm:cxn modelId="{8AE474FB-A4A9-A54F-A0B1-DAF6FA16678D}" type="presParOf" srcId="{CE5CD56B-F1E4-254E-8DCA-0D0FA1965D1C}" destId="{A8584874-52DE-7D49-A047-976D5E92C70D}" srcOrd="0" destOrd="0" presId="urn:microsoft.com/office/officeart/2005/8/layout/hierarchy1"/>
+    <dgm:cxn modelId="{00931ECF-1EA1-E741-9D6E-52354BCF5095}" type="presParOf" srcId="{A8584874-52DE-7D49-A047-976D5E92C70D}" destId="{36BF2225-AE22-314B-AF2D-55228814F298}" srcOrd="0" destOrd="0" presId="urn:microsoft.com/office/officeart/2005/8/layout/hierarchy1"/>
+    <dgm:cxn modelId="{8050AC1D-7912-5B43-A54C-02C7C5E8D390}" type="presParOf" srcId="{A8584874-52DE-7D49-A047-976D5E92C70D}" destId="{4B64EEEB-0D9F-344A-BC29-E0FE1AE9120E}" srcOrd="1" destOrd="0" presId="urn:microsoft.com/office/officeart/2005/8/layout/hierarchy1"/>
+    <dgm:cxn modelId="{0E40CCA9-EBEB-A048-848C-9D3AB72D07E9}" type="presParOf" srcId="{CE5CD56B-F1E4-254E-8DCA-0D0FA1965D1C}" destId="{F0207811-F6D6-8843-B1AF-A58F09B64E40}" srcOrd="1" destOrd="0" presId="urn:microsoft.com/office/officeart/2005/8/layout/hierarchy1"/>
+    <dgm:cxn modelId="{3F86DD10-0A8D-B545-A97F-EA0AF063AB79}" type="presParOf" srcId="{C6DA7C71-2489-4F42-963C-E28CB6E48095}" destId="{80FF5771-6F0D-5146-B43D-B5EA0AEA780D}" srcOrd="1" destOrd="0" presId="urn:microsoft.com/office/officeart/2005/8/layout/hierarchy1"/>
+    <dgm:cxn modelId="{C20ED35A-A8C5-2446-BB38-14D4D8A87525}" type="presParOf" srcId="{80FF5771-6F0D-5146-B43D-B5EA0AEA780D}" destId="{46EA9D36-013E-7747-8C05-65C748CD8947}" srcOrd="0" destOrd="0" presId="urn:microsoft.com/office/officeart/2005/8/layout/hierarchy1"/>
+    <dgm:cxn modelId="{0E40A92A-66B5-2E42-8076-CCDEF8E8AACD}" type="presParOf" srcId="{46EA9D36-013E-7747-8C05-65C748CD8947}" destId="{B3BA8365-D843-DB44-9342-3EA7CAFA27C7}" srcOrd="0" destOrd="0" presId="urn:microsoft.com/office/officeart/2005/8/layout/hierarchy1"/>
+    <dgm:cxn modelId="{3BB35B97-19DB-6445-A826-5F64DAF2F780}" type="presParOf" srcId="{46EA9D36-013E-7747-8C05-65C748CD8947}" destId="{2AA862F7-F98C-0C41-BAFE-D002CD2FAC9E}" srcOrd="1" destOrd="0" presId="urn:microsoft.com/office/officeart/2005/8/layout/hierarchy1"/>
+    <dgm:cxn modelId="{CBAB30C2-EC3E-1C46-B20D-1AB133BA4A0B}" type="presParOf" srcId="{80FF5771-6F0D-5146-B43D-B5EA0AEA780D}" destId="{B52A9E15-3AAB-2643-92B0-47526ED319BC}" srcOrd="1" destOrd="0" presId="urn:microsoft.com/office/officeart/2005/8/layout/hierarchy1"/>
+    <dgm:cxn modelId="{439476F9-3596-1E4D-A4C6-26BF9A1DFA1B}" type="presParOf" srcId="{C6DA7C71-2489-4F42-963C-E28CB6E48095}" destId="{9F697780-A044-E544-ACB6-DAB9599AB66D}" srcOrd="2" destOrd="0" presId="urn:microsoft.com/office/officeart/2005/8/layout/hierarchy1"/>
+    <dgm:cxn modelId="{80DFBB73-F681-F34C-BBFD-797185147CF7}" type="presParOf" srcId="{9F697780-A044-E544-ACB6-DAB9599AB66D}" destId="{6597D490-4C58-DC4B-BBAC-6619E55CB213}" srcOrd="0" destOrd="0" presId="urn:microsoft.com/office/officeart/2005/8/layout/hierarchy1"/>
+    <dgm:cxn modelId="{FEE6AD60-0891-AC44-9DE9-2553DDBA7FC1}" type="presParOf" srcId="{6597D490-4C58-DC4B-BBAC-6619E55CB213}" destId="{0D6D2B9E-40F5-234A-83E0-C92322AA872D}" srcOrd="0" destOrd="0" presId="urn:microsoft.com/office/officeart/2005/8/layout/hierarchy1"/>
+    <dgm:cxn modelId="{25304580-A198-0A44-AF58-BE20BAB26451}" type="presParOf" srcId="{6597D490-4C58-DC4B-BBAC-6619E55CB213}" destId="{D2EBED80-8A3C-A545-8213-CA0EA282634E}" srcOrd="1" destOrd="0" presId="urn:microsoft.com/office/officeart/2005/8/layout/hierarchy1"/>
+    <dgm:cxn modelId="{F2C253A3-F87C-634D-BE1F-3D0FB866276E}" type="presParOf" srcId="{9F697780-A044-E544-ACB6-DAB9599AB66D}" destId="{4AA97A98-35CF-2244-8D39-16A64EF351E0}" srcOrd="1" destOrd="0" presId="urn:microsoft.com/office/officeart/2005/8/layout/hierarchy1"/>
+    <dgm:cxn modelId="{7CF76448-F399-9B40-A829-D15417C2CA47}" type="presParOf" srcId="{C6DA7C71-2489-4F42-963C-E28CB6E48095}" destId="{6CFBE8F8-F2E5-0542-A0AF-830865796367}" srcOrd="3" destOrd="0" presId="urn:microsoft.com/office/officeart/2005/8/layout/hierarchy1"/>
+    <dgm:cxn modelId="{7B146F86-DC01-A048-AFCD-A4FD95A97113}" type="presParOf" srcId="{6CFBE8F8-F2E5-0542-A0AF-830865796367}" destId="{EB73D22B-CFB2-E642-9B75-003B4780592C}" srcOrd="0" destOrd="0" presId="urn:microsoft.com/office/officeart/2005/8/layout/hierarchy1"/>
+    <dgm:cxn modelId="{49739F32-0310-884C-97C3-BE438451E3D0}" type="presParOf" srcId="{EB73D22B-CFB2-E642-9B75-003B4780592C}" destId="{2EAE4AEB-41BD-0E4E-B186-0B4CC87AD595}" srcOrd="0" destOrd="0" presId="urn:microsoft.com/office/officeart/2005/8/layout/hierarchy1"/>
+    <dgm:cxn modelId="{DFC919BA-8351-604A-AB30-9BECD0C71531}" type="presParOf" srcId="{EB73D22B-CFB2-E642-9B75-003B4780592C}" destId="{0CF1CBF2-421F-B646-91D1-2B6854447566}" srcOrd="1" destOrd="0" presId="urn:microsoft.com/office/officeart/2005/8/layout/hierarchy1"/>
+    <dgm:cxn modelId="{EF6AAB75-8919-D049-9C7B-5C35E2774CE3}" type="presParOf" srcId="{6CFBE8F8-F2E5-0542-A0AF-830865796367}" destId="{C6509B7E-09DF-EC43-8A7B-54508E2A9171}" srcOrd="1" destOrd="0" presId="urn:microsoft.com/office/officeart/2005/8/layout/hierarchy1"/>
+    <dgm:cxn modelId="{44305411-8959-EA4D-B7C9-FD4ED7D679CB}" type="presParOf" srcId="{C6DA7C71-2489-4F42-963C-E28CB6E48095}" destId="{A9DF3CE1-A2E0-9E48-8049-BCD5675C491D}" srcOrd="4" destOrd="0" presId="urn:microsoft.com/office/officeart/2005/8/layout/hierarchy1"/>
+    <dgm:cxn modelId="{B16A0AC8-95EC-FF4E-B424-2BFE9E3FBA1D}" type="presParOf" srcId="{A9DF3CE1-A2E0-9E48-8049-BCD5675C491D}" destId="{E5970852-FF4D-B644-AFBF-9C5E07419EC0}" srcOrd="0" destOrd="0" presId="urn:microsoft.com/office/officeart/2005/8/layout/hierarchy1"/>
+    <dgm:cxn modelId="{0CD52DCD-0B0E-7C4A-900F-C0CE1943BDDC}" type="presParOf" srcId="{E5970852-FF4D-B644-AFBF-9C5E07419EC0}" destId="{A1A7C6F4-DE72-6A45-9699-5BC45B5DC225}" srcOrd="0" destOrd="0" presId="urn:microsoft.com/office/officeart/2005/8/layout/hierarchy1"/>
+    <dgm:cxn modelId="{D5B2360F-0060-F044-B0C2-129CF885A73B}" type="presParOf" srcId="{E5970852-FF4D-B644-AFBF-9C5E07419EC0}" destId="{7FC1DD06-56ED-9A49-8332-09B3E3A4776C}" srcOrd="1" destOrd="0" presId="urn:microsoft.com/office/officeart/2005/8/layout/hierarchy1"/>
+    <dgm:cxn modelId="{0D3C81A6-64DB-4A4A-ABD3-5372A2F27FC7}" type="presParOf" srcId="{A9DF3CE1-A2E0-9E48-8049-BCD5675C491D}" destId="{5CB21571-B228-D747-A8B2-54EB5842AE02}" srcOrd="1" destOrd="0" presId="urn:microsoft.com/office/officeart/2005/8/layout/hierarchy1"/>
+  </dgm:cxnLst>
+  <dgm:bg/>
+  <dgm:whole/>
+  <dgm:extLst>
+    <a:ext uri="http://schemas.microsoft.com/office/drawing/2008/diagram">
+      <dsp:dataModelExt xmlns:dsp="http://schemas.microsoft.com/office/drawing/2008/diagram" relId="rId6" minVer="http://schemas.openxmlformats.org/drawingml/2006/diagram"/>
+    </a:ext>
+  </dgm:extLst>
+</dgm:dataModel>
+</file>
+
+<file path=ppt/diagrams/drawing1.xml><?xml version="1.0" encoding="utf-8"?>
+<dsp:drawing xmlns:dgm="http://schemas.openxmlformats.org/drawingml/2006/diagram" xmlns:dsp="http://schemas.microsoft.com/office/drawing/2008/diagram" xmlns:a="http://schemas.openxmlformats.org/drawingml/2006/main">
+  <dsp:spTree>
+    <dsp:nvGrpSpPr>
+      <dsp:cNvPr id="0" name=""/>
+      <dsp:cNvGrpSpPr/>
+    </dsp:nvGrpSpPr>
+    <dsp:grpSpPr/>
+    <dsp:sp modelId="{36BF2225-AE22-314B-AF2D-55228814F298}">
+      <dsp:nvSpPr>
+        <dsp:cNvPr id="0" name=""/>
+        <dsp:cNvSpPr/>
+      </dsp:nvSpPr>
+      <dsp:spPr>
+        <a:xfrm>
+          <a:off x="3654" y="1210702"/>
+          <a:ext cx="1780750" cy="1130776"/>
+        </a:xfrm>
+        <a:prstGeom prst="roundRect">
+          <a:avLst>
+            <a:gd name="adj" fmla="val 10000"/>
+          </a:avLst>
+        </a:prstGeom>
+        <a:solidFill>
+          <a:schemeClr val="accent1">
+            <a:hueOff val="0"/>
+            <a:satOff val="0"/>
+            <a:lumOff val="0"/>
+            <a:alphaOff val="0"/>
+          </a:schemeClr>
+        </a:solidFill>
+        <a:ln w="12700" cap="flat" cmpd="sng" algn="ctr">
+          <a:solidFill>
+            <a:schemeClr val="lt1">
+              <a:hueOff val="0"/>
+              <a:satOff val="0"/>
+              <a:lumOff val="0"/>
+              <a:alphaOff val="0"/>
+            </a:schemeClr>
+          </a:solidFill>
+          <a:prstDash val="solid"/>
+          <a:miter lim="800000"/>
+        </a:ln>
+        <a:effectLst/>
+      </dsp:spPr>
+      <dsp:style>
+        <a:lnRef idx="2">
+          <a:scrgbClr r="0" g="0" b="0"/>
+        </a:lnRef>
+        <a:fillRef idx="1">
+          <a:scrgbClr r="0" g="0" b="0"/>
+        </a:fillRef>
+        <a:effectRef idx="0">
+          <a:scrgbClr r="0" g="0" b="0"/>
+        </a:effectRef>
+        <a:fontRef idx="minor">
+          <a:schemeClr val="lt1"/>
+        </a:fontRef>
+      </dsp:style>
+    </dsp:sp>
+    <dsp:sp modelId="{4B64EEEB-0D9F-344A-BC29-E0FE1AE9120E}">
+      <dsp:nvSpPr>
+        <dsp:cNvPr id="0" name=""/>
+        <dsp:cNvSpPr/>
+      </dsp:nvSpPr>
+      <dsp:spPr>
+        <a:xfrm>
+          <a:off x="201515" y="1398670"/>
+          <a:ext cx="1780750" cy="1130776"/>
+        </a:xfrm>
+        <a:prstGeom prst="roundRect">
+          <a:avLst>
+            <a:gd name="adj" fmla="val 10000"/>
+          </a:avLst>
+        </a:prstGeom>
+        <a:solidFill>
+          <a:schemeClr val="lt1">
+            <a:alpha val="90000"/>
+            <a:hueOff val="0"/>
+            <a:satOff val="0"/>
+            <a:lumOff val="0"/>
+            <a:alphaOff val="0"/>
+          </a:schemeClr>
+        </a:solidFill>
+        <a:ln w="12700" cap="flat" cmpd="sng" algn="ctr">
+          <a:solidFill>
+            <a:schemeClr val="accent1">
+              <a:hueOff val="0"/>
+              <a:satOff val="0"/>
+              <a:lumOff val="0"/>
+              <a:alphaOff val="0"/>
+            </a:schemeClr>
+          </a:solidFill>
+          <a:prstDash val="solid"/>
+          <a:miter lim="800000"/>
+        </a:ln>
+        <a:effectLst/>
+      </dsp:spPr>
+      <dsp:style>
+        <a:lnRef idx="2">
+          <a:scrgbClr r="0" g="0" b="0"/>
+        </a:lnRef>
+        <a:fillRef idx="1">
+          <a:scrgbClr r="0" g="0" b="0"/>
+        </a:fillRef>
+        <a:effectRef idx="0">
+          <a:scrgbClr r="0" g="0" b="0"/>
+        </a:effectRef>
+        <a:fontRef idx="minor"/>
+      </dsp:style>
+      <dsp:txBody>
+        <a:bodyPr spcFirstLastPara="0" vert="horz" wrap="square" lIns="76200" tIns="76200" rIns="76200" bIns="76200" numCol="1" spcCol="1270" anchor="ctr" anchorCtr="0">
+          <a:noAutofit/>
+        </a:bodyPr>
+        <a:lstStyle/>
+        <a:p>
+          <a:pPr marL="0" lvl="0" indent="0" algn="ctr" defTabSz="889000">
+            <a:lnSpc>
+              <a:spcPct val="90000"/>
+            </a:lnSpc>
+            <a:spcBef>
+              <a:spcPct val="0"/>
+            </a:spcBef>
+            <a:spcAft>
+              <a:spcPct val="35000"/>
+            </a:spcAft>
+            <a:buNone/>
+          </a:pPr>
+          <a:r>
+            <a:rPr lang="en-US" sz="2000" kern="1200" dirty="0"/>
+            <a:t>Introduction</a:t>
+          </a:r>
+        </a:p>
+      </dsp:txBody>
+      <dsp:txXfrm>
+        <a:off x="234634" y="1431789"/>
+        <a:ext cx="1714512" cy="1064538"/>
+      </dsp:txXfrm>
+    </dsp:sp>
+    <dsp:sp modelId="{B3BA8365-D843-DB44-9342-3EA7CAFA27C7}">
+      <dsp:nvSpPr>
+        <dsp:cNvPr id="0" name=""/>
+        <dsp:cNvSpPr/>
+      </dsp:nvSpPr>
+      <dsp:spPr>
+        <a:xfrm>
+          <a:off x="2180127" y="1210702"/>
+          <a:ext cx="1780750" cy="1130776"/>
+        </a:xfrm>
+        <a:prstGeom prst="roundRect">
+          <a:avLst>
+            <a:gd name="adj" fmla="val 10000"/>
+          </a:avLst>
+        </a:prstGeom>
+        <a:solidFill>
+          <a:schemeClr val="accent1">
+            <a:hueOff val="0"/>
+            <a:satOff val="0"/>
+            <a:lumOff val="0"/>
+            <a:alphaOff val="0"/>
+          </a:schemeClr>
+        </a:solidFill>
+        <a:ln w="12700" cap="flat" cmpd="sng" algn="ctr">
+          <a:solidFill>
+            <a:schemeClr val="lt1">
+              <a:hueOff val="0"/>
+              <a:satOff val="0"/>
+              <a:lumOff val="0"/>
+              <a:alphaOff val="0"/>
+            </a:schemeClr>
+          </a:solidFill>
+          <a:prstDash val="solid"/>
+          <a:miter lim="800000"/>
+        </a:ln>
+        <a:effectLst/>
+      </dsp:spPr>
+      <dsp:style>
+        <a:lnRef idx="2">
+          <a:scrgbClr r="0" g="0" b="0"/>
+        </a:lnRef>
+        <a:fillRef idx="1">
+          <a:scrgbClr r="0" g="0" b="0"/>
+        </a:fillRef>
+        <a:effectRef idx="0">
+          <a:scrgbClr r="0" g="0" b="0"/>
+        </a:effectRef>
+        <a:fontRef idx="minor">
+          <a:schemeClr val="lt1"/>
+        </a:fontRef>
+      </dsp:style>
+    </dsp:sp>
+    <dsp:sp modelId="{2AA862F7-F98C-0C41-BAFE-D002CD2FAC9E}">
+      <dsp:nvSpPr>
+        <dsp:cNvPr id="0" name=""/>
+        <dsp:cNvSpPr/>
+      </dsp:nvSpPr>
+      <dsp:spPr>
+        <a:xfrm>
+          <a:off x="2377988" y="1398670"/>
+          <a:ext cx="1780750" cy="1130776"/>
+        </a:xfrm>
+        <a:prstGeom prst="roundRect">
+          <a:avLst>
+            <a:gd name="adj" fmla="val 10000"/>
+          </a:avLst>
+        </a:prstGeom>
+        <a:solidFill>
+          <a:schemeClr val="lt1">
+            <a:alpha val="90000"/>
+            <a:hueOff val="0"/>
+            <a:satOff val="0"/>
+            <a:lumOff val="0"/>
+            <a:alphaOff val="0"/>
+          </a:schemeClr>
+        </a:solidFill>
+        <a:ln w="12700" cap="flat" cmpd="sng" algn="ctr">
+          <a:solidFill>
+            <a:schemeClr val="accent1">
+              <a:hueOff val="0"/>
+              <a:satOff val="0"/>
+              <a:lumOff val="0"/>
+              <a:alphaOff val="0"/>
+            </a:schemeClr>
+          </a:solidFill>
+          <a:prstDash val="solid"/>
+          <a:miter lim="800000"/>
+        </a:ln>
+        <a:effectLst/>
+      </dsp:spPr>
+      <dsp:style>
+        <a:lnRef idx="2">
+          <a:scrgbClr r="0" g="0" b="0"/>
+        </a:lnRef>
+        <a:fillRef idx="1">
+          <a:scrgbClr r="0" g="0" b="0"/>
+        </a:fillRef>
+        <a:effectRef idx="0">
+          <a:scrgbClr r="0" g="0" b="0"/>
+        </a:effectRef>
+        <a:fontRef idx="minor"/>
+      </dsp:style>
+      <dsp:txBody>
+        <a:bodyPr spcFirstLastPara="0" vert="horz" wrap="square" lIns="76200" tIns="76200" rIns="76200" bIns="76200" numCol="1" spcCol="1270" anchor="ctr" anchorCtr="0">
+          <a:noAutofit/>
+        </a:bodyPr>
+        <a:lstStyle/>
+        <a:p>
+          <a:pPr marL="0" lvl="0" indent="0" algn="ctr" defTabSz="889000">
+            <a:lnSpc>
+              <a:spcPct val="90000"/>
+            </a:lnSpc>
+            <a:spcBef>
+              <a:spcPct val="0"/>
+            </a:spcBef>
+            <a:spcAft>
+              <a:spcPct val="35000"/>
+            </a:spcAft>
+            <a:buNone/>
+          </a:pPr>
+          <a:r>
+            <a:rPr lang="en-US" sz="2000" kern="1200" dirty="0"/>
+            <a:t>Literature Review</a:t>
+          </a:r>
+        </a:p>
+      </dsp:txBody>
+      <dsp:txXfrm>
+        <a:off x="2411107" y="1431789"/>
+        <a:ext cx="1714512" cy="1064538"/>
+      </dsp:txXfrm>
+    </dsp:sp>
+    <dsp:sp modelId="{0D6D2B9E-40F5-234A-83E0-C92322AA872D}">
+      <dsp:nvSpPr>
+        <dsp:cNvPr id="0" name=""/>
+        <dsp:cNvSpPr/>
+      </dsp:nvSpPr>
+      <dsp:spPr>
+        <a:xfrm>
+          <a:off x="4356600" y="1210702"/>
+          <a:ext cx="1780750" cy="1130776"/>
+        </a:xfrm>
+        <a:prstGeom prst="roundRect">
+          <a:avLst>
+            <a:gd name="adj" fmla="val 10000"/>
+          </a:avLst>
+        </a:prstGeom>
+        <a:solidFill>
+          <a:schemeClr val="accent1">
+            <a:hueOff val="0"/>
+            <a:satOff val="0"/>
+            <a:lumOff val="0"/>
+            <a:alphaOff val="0"/>
+          </a:schemeClr>
+        </a:solidFill>
+        <a:ln w="12700" cap="flat" cmpd="sng" algn="ctr">
+          <a:solidFill>
+            <a:schemeClr val="lt1">
+              <a:hueOff val="0"/>
+              <a:satOff val="0"/>
+              <a:lumOff val="0"/>
+              <a:alphaOff val="0"/>
+            </a:schemeClr>
+          </a:solidFill>
+          <a:prstDash val="solid"/>
+          <a:miter lim="800000"/>
+        </a:ln>
+        <a:effectLst/>
+      </dsp:spPr>
+      <dsp:style>
+        <a:lnRef idx="2">
+          <a:scrgbClr r="0" g="0" b="0"/>
+        </a:lnRef>
+        <a:fillRef idx="1">
+          <a:scrgbClr r="0" g="0" b="0"/>
+        </a:fillRef>
+        <a:effectRef idx="0">
+          <a:scrgbClr r="0" g="0" b="0"/>
+        </a:effectRef>
+        <a:fontRef idx="minor">
+          <a:schemeClr val="lt1"/>
+        </a:fontRef>
+      </dsp:style>
+    </dsp:sp>
+    <dsp:sp modelId="{D2EBED80-8A3C-A545-8213-CA0EA282634E}">
+      <dsp:nvSpPr>
+        <dsp:cNvPr id="0" name=""/>
+        <dsp:cNvSpPr/>
+      </dsp:nvSpPr>
+      <dsp:spPr>
+        <a:xfrm>
+          <a:off x="4554461" y="1398670"/>
+          <a:ext cx="1780750" cy="1130776"/>
+        </a:xfrm>
+        <a:prstGeom prst="roundRect">
+          <a:avLst>
+            <a:gd name="adj" fmla="val 10000"/>
+          </a:avLst>
+        </a:prstGeom>
+        <a:solidFill>
+          <a:schemeClr val="lt1">
+            <a:alpha val="90000"/>
+            <a:hueOff val="0"/>
+            <a:satOff val="0"/>
+            <a:lumOff val="0"/>
+            <a:alphaOff val="0"/>
+          </a:schemeClr>
+        </a:solidFill>
+        <a:ln w="12700" cap="flat" cmpd="sng" algn="ctr">
+          <a:solidFill>
+            <a:schemeClr val="accent1">
+              <a:hueOff val="0"/>
+              <a:satOff val="0"/>
+              <a:lumOff val="0"/>
+              <a:alphaOff val="0"/>
+            </a:schemeClr>
+          </a:solidFill>
+          <a:prstDash val="solid"/>
+          <a:miter lim="800000"/>
+        </a:ln>
+        <a:effectLst/>
+      </dsp:spPr>
+      <dsp:style>
+        <a:lnRef idx="2">
+          <a:scrgbClr r="0" g="0" b="0"/>
+        </a:lnRef>
+        <a:fillRef idx="1">
+          <a:scrgbClr r="0" g="0" b="0"/>
+        </a:fillRef>
+        <a:effectRef idx="0">
+          <a:scrgbClr r="0" g="0" b="0"/>
+        </a:effectRef>
+        <a:fontRef idx="minor"/>
+      </dsp:style>
+      <dsp:txBody>
+        <a:bodyPr spcFirstLastPara="0" vert="horz" wrap="square" lIns="76200" tIns="76200" rIns="76200" bIns="76200" numCol="1" spcCol="1270" anchor="ctr" anchorCtr="0">
+          <a:noAutofit/>
+        </a:bodyPr>
+        <a:lstStyle/>
+        <a:p>
+          <a:pPr marL="0" lvl="0" indent="0" algn="ctr" defTabSz="889000">
+            <a:lnSpc>
+              <a:spcPct val="90000"/>
+            </a:lnSpc>
+            <a:spcBef>
+              <a:spcPct val="0"/>
+            </a:spcBef>
+            <a:spcAft>
+              <a:spcPct val="35000"/>
+            </a:spcAft>
+            <a:buNone/>
+          </a:pPr>
+          <a:r>
+            <a:rPr lang="en-US" sz="2000" kern="1200" dirty="0"/>
+            <a:t>TCT Architecture</a:t>
+          </a:r>
+        </a:p>
+      </dsp:txBody>
+      <dsp:txXfrm>
+        <a:off x="4587580" y="1431789"/>
+        <a:ext cx="1714512" cy="1064538"/>
+      </dsp:txXfrm>
+    </dsp:sp>
+    <dsp:sp modelId="{2EAE4AEB-41BD-0E4E-B186-0B4CC87AD595}">
+      <dsp:nvSpPr>
+        <dsp:cNvPr id="0" name=""/>
+        <dsp:cNvSpPr/>
+      </dsp:nvSpPr>
+      <dsp:spPr>
+        <a:xfrm>
+          <a:off x="6533073" y="1210702"/>
+          <a:ext cx="1780750" cy="1130776"/>
+        </a:xfrm>
+        <a:prstGeom prst="roundRect">
+          <a:avLst>
+            <a:gd name="adj" fmla="val 10000"/>
+          </a:avLst>
+        </a:prstGeom>
+        <a:solidFill>
+          <a:schemeClr val="accent1">
+            <a:hueOff val="0"/>
+            <a:satOff val="0"/>
+            <a:lumOff val="0"/>
+            <a:alphaOff val="0"/>
+          </a:schemeClr>
+        </a:solidFill>
+        <a:ln w="12700" cap="flat" cmpd="sng" algn="ctr">
+          <a:solidFill>
+            <a:schemeClr val="lt1">
+              <a:hueOff val="0"/>
+              <a:satOff val="0"/>
+              <a:lumOff val="0"/>
+              <a:alphaOff val="0"/>
+            </a:schemeClr>
+          </a:solidFill>
+          <a:prstDash val="solid"/>
+          <a:miter lim="800000"/>
+        </a:ln>
+        <a:effectLst/>
+      </dsp:spPr>
+      <dsp:style>
+        <a:lnRef idx="2">
+          <a:scrgbClr r="0" g="0" b="0"/>
+        </a:lnRef>
+        <a:fillRef idx="1">
+          <a:scrgbClr r="0" g="0" b="0"/>
+        </a:fillRef>
+        <a:effectRef idx="0">
+          <a:scrgbClr r="0" g="0" b="0"/>
+        </a:effectRef>
+        <a:fontRef idx="minor">
+          <a:schemeClr val="lt1"/>
+        </a:fontRef>
+      </dsp:style>
+    </dsp:sp>
+    <dsp:sp modelId="{0CF1CBF2-421F-B646-91D1-2B6854447566}">
+      <dsp:nvSpPr>
+        <dsp:cNvPr id="0" name=""/>
+        <dsp:cNvSpPr/>
+      </dsp:nvSpPr>
+      <dsp:spPr>
+        <a:xfrm>
+          <a:off x="6730934" y="1398670"/>
+          <a:ext cx="1780750" cy="1130776"/>
+        </a:xfrm>
+        <a:prstGeom prst="roundRect">
+          <a:avLst>
+            <a:gd name="adj" fmla="val 10000"/>
+          </a:avLst>
+        </a:prstGeom>
+        <a:solidFill>
+          <a:schemeClr val="lt1">
+            <a:alpha val="90000"/>
+            <a:hueOff val="0"/>
+            <a:satOff val="0"/>
+            <a:lumOff val="0"/>
+            <a:alphaOff val="0"/>
+          </a:schemeClr>
+        </a:solidFill>
+        <a:ln w="12700" cap="flat" cmpd="sng" algn="ctr">
+          <a:solidFill>
+            <a:schemeClr val="accent1">
+              <a:hueOff val="0"/>
+              <a:satOff val="0"/>
+              <a:lumOff val="0"/>
+              <a:alphaOff val="0"/>
+            </a:schemeClr>
+          </a:solidFill>
+          <a:prstDash val="solid"/>
+          <a:miter lim="800000"/>
+        </a:ln>
+        <a:effectLst/>
+      </dsp:spPr>
+      <dsp:style>
+        <a:lnRef idx="2">
+          <a:scrgbClr r="0" g="0" b="0"/>
+        </a:lnRef>
+        <a:fillRef idx="1">
+          <a:scrgbClr r="0" g="0" b="0"/>
+        </a:fillRef>
+        <a:effectRef idx="0">
+          <a:scrgbClr r="0" g="0" b="0"/>
+        </a:effectRef>
+        <a:fontRef idx="minor"/>
+      </dsp:style>
+      <dsp:txBody>
+        <a:bodyPr spcFirstLastPara="0" vert="horz" wrap="square" lIns="76200" tIns="76200" rIns="76200" bIns="76200" numCol="1" spcCol="1270" anchor="ctr" anchorCtr="0">
+          <a:noAutofit/>
+        </a:bodyPr>
+        <a:lstStyle/>
+        <a:p>
+          <a:pPr marL="0" lvl="0" indent="0" algn="ctr" defTabSz="889000">
+            <a:lnSpc>
+              <a:spcPct val="90000"/>
+            </a:lnSpc>
+            <a:spcBef>
+              <a:spcPct val="0"/>
+            </a:spcBef>
+            <a:spcAft>
+              <a:spcPct val="35000"/>
+            </a:spcAft>
+            <a:buNone/>
+          </a:pPr>
+          <a:r>
+            <a:rPr lang="en-US" sz="2000" kern="1200" dirty="0"/>
+            <a:t>Experiments</a:t>
+          </a:r>
+        </a:p>
+      </dsp:txBody>
+      <dsp:txXfrm>
+        <a:off x="6764053" y="1431789"/>
+        <a:ext cx="1714512" cy="1064538"/>
+      </dsp:txXfrm>
+    </dsp:sp>
+    <dsp:sp modelId="{A1A7C6F4-DE72-6A45-9699-5BC45B5DC225}">
+      <dsp:nvSpPr>
+        <dsp:cNvPr id="0" name=""/>
+        <dsp:cNvSpPr/>
+      </dsp:nvSpPr>
+      <dsp:spPr>
+        <a:xfrm>
+          <a:off x="8709545" y="1210702"/>
+          <a:ext cx="1780750" cy="1130776"/>
+        </a:xfrm>
+        <a:prstGeom prst="roundRect">
+          <a:avLst>
+            <a:gd name="adj" fmla="val 10000"/>
+          </a:avLst>
+        </a:prstGeom>
+        <a:solidFill>
+          <a:schemeClr val="accent1">
+            <a:hueOff val="0"/>
+            <a:satOff val="0"/>
+            <a:lumOff val="0"/>
+            <a:alphaOff val="0"/>
+          </a:schemeClr>
+        </a:solidFill>
+        <a:ln w="12700" cap="flat" cmpd="sng" algn="ctr">
+          <a:solidFill>
+            <a:schemeClr val="lt1">
+              <a:hueOff val="0"/>
+              <a:satOff val="0"/>
+              <a:lumOff val="0"/>
+              <a:alphaOff val="0"/>
+            </a:schemeClr>
+          </a:solidFill>
+          <a:prstDash val="solid"/>
+          <a:miter lim="800000"/>
+        </a:ln>
+        <a:effectLst/>
+      </dsp:spPr>
+      <dsp:style>
+        <a:lnRef idx="2">
+          <a:scrgbClr r="0" g="0" b="0"/>
+        </a:lnRef>
+        <a:fillRef idx="1">
+          <a:scrgbClr r="0" g="0" b="0"/>
+        </a:fillRef>
+        <a:effectRef idx="0">
+          <a:scrgbClr r="0" g="0" b="0"/>
+        </a:effectRef>
+        <a:fontRef idx="minor">
+          <a:schemeClr val="lt1"/>
+        </a:fontRef>
+      </dsp:style>
+    </dsp:sp>
+    <dsp:sp modelId="{7FC1DD06-56ED-9A49-8332-09B3E3A4776C}">
+      <dsp:nvSpPr>
+        <dsp:cNvPr id="0" name=""/>
+        <dsp:cNvSpPr/>
+      </dsp:nvSpPr>
+      <dsp:spPr>
+        <a:xfrm>
+          <a:off x="8907407" y="1398670"/>
+          <a:ext cx="1780750" cy="1130776"/>
+        </a:xfrm>
+        <a:prstGeom prst="roundRect">
+          <a:avLst>
+            <a:gd name="adj" fmla="val 10000"/>
+          </a:avLst>
+        </a:prstGeom>
+        <a:solidFill>
+          <a:schemeClr val="lt1">
+            <a:alpha val="90000"/>
+            <a:hueOff val="0"/>
+            <a:satOff val="0"/>
+            <a:lumOff val="0"/>
+            <a:alphaOff val="0"/>
+          </a:schemeClr>
+        </a:solidFill>
+        <a:ln w="12700" cap="flat" cmpd="sng" algn="ctr">
+          <a:solidFill>
+            <a:schemeClr val="accent1">
+              <a:hueOff val="0"/>
+              <a:satOff val="0"/>
+              <a:lumOff val="0"/>
+              <a:alphaOff val="0"/>
+            </a:schemeClr>
+          </a:solidFill>
+          <a:prstDash val="solid"/>
+          <a:miter lim="800000"/>
+        </a:ln>
+        <a:effectLst/>
+      </dsp:spPr>
+      <dsp:style>
+        <a:lnRef idx="2">
+          <a:scrgbClr r="0" g="0" b="0"/>
+        </a:lnRef>
+        <a:fillRef idx="1">
+          <a:scrgbClr r="0" g="0" b="0"/>
+        </a:fillRef>
+        <a:effectRef idx="0">
+          <a:scrgbClr r="0" g="0" b="0"/>
+        </a:effectRef>
+        <a:fontRef idx="minor"/>
+      </dsp:style>
+      <dsp:txBody>
+        <a:bodyPr spcFirstLastPara="0" vert="horz" wrap="square" lIns="76200" tIns="76200" rIns="76200" bIns="76200" numCol="1" spcCol="1270" anchor="ctr" anchorCtr="0">
+          <a:noAutofit/>
+        </a:bodyPr>
+        <a:lstStyle/>
+        <a:p>
+          <a:pPr marL="0" lvl="0" indent="0" algn="ctr" defTabSz="889000">
+            <a:lnSpc>
+              <a:spcPct val="90000"/>
+            </a:lnSpc>
+            <a:spcBef>
+              <a:spcPct val="0"/>
+            </a:spcBef>
+            <a:spcAft>
+              <a:spcPct val="35000"/>
+            </a:spcAft>
+            <a:buNone/>
+          </a:pPr>
+          <a:r>
+            <a:rPr lang="en-US" sz="2000" kern="1200" dirty="0"/>
+            <a:t>Contributions and Future Directions</a:t>
+          </a:r>
+        </a:p>
+      </dsp:txBody>
+      <dsp:txXfrm>
+        <a:off x="8940526" y="1431789"/>
+        <a:ext cx="1714512" cy="1064538"/>
+      </dsp:txXfrm>
+    </dsp:sp>
+  </dsp:spTree>
+</dsp:drawing>
+</file>
+
+<file path=ppt/diagrams/layout1.xml><?xml version="1.0" encoding="utf-8"?>
+<dgm:layoutDef xmlns:dgm="http://schemas.openxmlformats.org/drawingml/2006/diagram" xmlns:a="http://schemas.openxmlformats.org/drawingml/2006/main" uniqueId="urn:microsoft.com/office/officeart/2005/8/layout/hierarchy1">
+  <dgm:title val=""/>
+  <dgm:desc val=""/>
+  <dgm:catLst>
+    <dgm:cat type="hierarchy" pri="2000"/>
+  </dgm:catLst>
+  <dgm:sampData>
+    <dgm:dataModel>
+      <dgm:ptLst>
+        <dgm:pt modelId="0" type="doc"/>
+        <dgm:pt modelId="1">
+          <dgm:prSet phldr="1"/>
+        </dgm:pt>
+        <dgm:pt modelId="2">
+          <dgm:prSet phldr="1"/>
+        </dgm:pt>
+        <dgm:pt modelId="21">
+          <dgm:prSet phldr="1"/>
+        </dgm:pt>
+        <dgm:pt modelId="22">
+          <dgm:prSet phldr="1"/>
+        </dgm:pt>
+        <dgm:pt modelId="3">
+          <dgm:prSet phldr="1"/>
+        </dgm:pt>
+        <dgm:pt modelId="31">
+          <dgm:prSet phldr="1"/>
+        </dgm:pt>
+      </dgm:ptLst>
+      <dgm:cxnLst>
+        <dgm:cxn modelId="4" srcId="0" destId="1" srcOrd="0" destOrd="0"/>
+        <dgm:cxn modelId="5" srcId="1" destId="2" srcOrd="0" destOrd="0"/>
+        <dgm:cxn modelId="6" srcId="1" destId="3" srcOrd="1" destOrd="0"/>
+        <dgm:cxn modelId="23" srcId="2" destId="21" srcOrd="0" destOrd="0"/>
+        <dgm:cxn modelId="24" srcId="2" destId="22" srcOrd="1" destOrd="0"/>
+        <dgm:cxn modelId="33" srcId="3" destId="31" srcOrd="0" destOrd="0"/>
+      </dgm:cxnLst>
+      <dgm:bg/>
+      <dgm:whole/>
+    </dgm:dataModel>
+  </dgm:sampData>
+  <dgm:styleData>
+    <dgm:dataModel>
+      <dgm:ptLst>
+        <dgm:pt modelId="0" type="doc"/>
+        <dgm:pt modelId="1"/>
+        <dgm:pt modelId="11"/>
+        <dgm:pt modelId="12"/>
+      </dgm:ptLst>
+      <dgm:cxnLst>
+        <dgm:cxn modelId="2" srcId="0" destId="1" srcOrd="0" destOrd="0"/>
+        <dgm:cxn modelId="13" srcId="1" destId="11" srcOrd="0" destOrd="0"/>
+        <dgm:cxn modelId="14" srcId="1" destId="12" srcOrd="1" destOrd="0"/>
+      </dgm:cxnLst>
+      <dgm:bg/>
+      <dgm:whole/>
+    </dgm:dataModel>
+  </dgm:styleData>
+  <dgm:clrData>
+    <dgm:dataModel>
+      <dgm:ptLst>
+        <dgm:pt modelId="0" type="doc"/>
+        <dgm:pt modelId="1"/>
+        <dgm:pt modelId="2"/>
+        <dgm:pt modelId="21"/>
+        <dgm:pt modelId="211"/>
+        <dgm:pt modelId="3"/>
+        <dgm:pt modelId="31"/>
+        <dgm:pt modelId="311"/>
+      </dgm:ptLst>
+      <dgm:cxnLst>
+        <dgm:cxn modelId="4" srcId="0" destId="1" srcOrd="0" destOrd="0"/>
+        <dgm:cxn modelId="5" srcId="1" destId="2" srcOrd="0" destOrd="0"/>
+        <dgm:cxn modelId="6" srcId="1" destId="3" srcOrd="1" destOrd="0"/>
+        <dgm:cxn modelId="23" srcId="2" destId="21" srcOrd="0" destOrd="0"/>
+        <dgm:cxn modelId="24" srcId="21" destId="211" srcOrd="0" destOrd="0"/>
+        <dgm:cxn modelId="33" srcId="3" destId="31" srcOrd="0" destOrd="0"/>
+        <dgm:cxn modelId="34" srcId="31" destId="311" srcOrd="0" destOrd="0"/>
+      </dgm:cxnLst>
+      <dgm:bg/>
+      <dgm:whole/>
+    </dgm:dataModel>
+  </dgm:clrData>
+  <dgm:layoutNode name="hierChild1">
+    <dgm:varLst>
+      <dgm:chPref val="1"/>
+      <dgm:dir/>
+      <dgm:animOne val="branch"/>
+      <dgm:animLvl val="lvl"/>
+      <dgm:resizeHandles/>
+    </dgm:varLst>
+    <dgm:choose name="Name0">
+      <dgm:if name="Name1" func="var" arg="dir" op="equ" val="norm">
+        <dgm:alg type="hierChild">
+          <dgm:param type="linDir" val="fromL"/>
+        </dgm:alg>
+      </dgm:if>
+      <dgm:else name="Name2">
+        <dgm:alg type="hierChild">
+          <dgm:param type="linDir" val="fromR"/>
+        </dgm:alg>
+      </dgm:else>
+    </dgm:choose>
+    <dgm:shape xmlns:r="http://schemas.openxmlformats.org/officeDocument/2006/relationships" r:blip="">
+      <dgm:adjLst/>
+    </dgm:shape>
+    <dgm:presOf/>
+    <dgm:constrLst>
+      <dgm:constr type="primFontSz" for="des" ptType="node" op="equ" val="65"/>
+      <dgm:constr type="w" for="des" forName="composite" refType="w"/>
+      <dgm:constr type="h" for="des" forName="composite" refType="w" refFor="des" refForName="composite" fact="0.667"/>
+      <dgm:constr type="w" for="des" forName="composite2" refType="w" refFor="des" refForName="composite"/>
+      <dgm:constr type="h" for="des" forName="composite2" refType="h" refFor="des" refForName="composite"/>
+      <dgm:constr type="w" for="des" forName="composite3" refType="w" refFor="des" refForName="composite"/>
+      <dgm:constr type="h" for="des" forName="composite3" refType="h" refFor="des" refForName="composite"/>
+      <dgm:constr type="w" for="des" forName="composite4" refType="w" refFor="des" refForName="composite"/>
+      <dgm:constr type="h" for="des" forName="composite4" refType="h" refFor="des" refForName="composite"/>
+      <dgm:constr type="w" for="des" forName="composite5" refType="w" refFor="des" refForName="composite"/>
+      <dgm:constr type="h" for="des" forName="composite5" refType="h" refFor="des" refForName="composite"/>
+      <dgm:constr type="sibSp" refType="w" refFor="des" refForName="composite" fact="0.1"/>
+      <dgm:constr type="sibSp" for="des" forName="hierChild2" refType="sibSp"/>
+      <dgm:constr type="sibSp" for="des" forName="hierChild3" refType="sibSp"/>
+      <dgm:constr type="sibSp" for="des" forName="hierChild4" refType="sibSp"/>
+      <dgm:constr type="sibSp" for="des" forName="hierChild5" refType="sibSp"/>
+      <dgm:constr type="sibSp" for="des" forName="hierChild6" refType="sibSp"/>
+      <dgm:constr type="sp" for="des" forName="hierRoot1" refType="h" refFor="des" refForName="composite" fact="0.25"/>
+      <dgm:constr type="sp" for="des" forName="hierRoot2" refType="sp" refFor="des" refForName="hierRoot1"/>
+      <dgm:constr type="sp" for="des" forName="hierRoot3" refType="sp" refFor="des" refForName="hierRoot1"/>
+      <dgm:constr type="sp" for="des" forName="hierRoot4" refType="sp" refFor="des" refForName="hierRoot1"/>
+      <dgm:constr type="sp" for="des" forName="hierRoot5" refType="sp" refFor="des" refForName="hierRoot1"/>
+    </dgm:constrLst>
+    <dgm:ruleLst/>
+    <dgm:forEach name="Name3" axis="ch">
+      <dgm:forEach name="Name4" axis="self" ptType="node">
+        <dgm:layoutNode name="hierRoot1">
+          <dgm:alg type="hierRoot"/>
+          <dgm:shape xmlns:r="http://schemas.openxmlformats.org/officeDocument/2006/relationships" r:blip="">
+            <dgm:adjLst/>
+          </dgm:shape>
+          <dgm:presOf/>
+          <dgm:constrLst>
+            <dgm:constr type="bendDist" for="des" ptType="parTrans" refType="sp" fact="0.5"/>
+          </dgm:constrLst>
+          <dgm:ruleLst/>
+          <dgm:layoutNode name="composite">
+            <dgm:alg type="composite"/>
+            <dgm:shape xmlns:r="http://schemas.openxmlformats.org/officeDocument/2006/relationships" r:blip="">
+              <dgm:adjLst/>
+            </dgm:shape>
+            <dgm:presOf/>
+            <dgm:constrLst>
+              <dgm:constr type="w" for="ch" forName="background" refType="w" fact="0.9"/>
+              <dgm:constr type="h" for="ch" forName="background" refType="w" refFor="ch" refForName="background" fact="0.635"/>
+              <dgm:constr type="t" for="ch" forName="background"/>
+              <dgm:constr type="l" for="ch" forName="background"/>
+              <dgm:constr type="w" for="ch" forName="text" refType="w" fact="0.9"/>
+              <dgm:constr type="h" for="ch" forName="text" refType="w" refFor="ch" refForName="text" fact="0.635"/>
+              <dgm:constr type="t" for="ch" forName="text" refType="w" fact="0.095"/>
+              <dgm:constr type="l" for="ch" forName="text" refType="w" fact="0.1"/>
+            </dgm:constrLst>
+            <dgm:ruleLst/>
+            <dgm:layoutNode name="background" styleLbl="node0" moveWith="text">
+              <dgm:alg type="sp"/>
+              <dgm:shape xmlns:r="http://schemas.openxmlformats.org/officeDocument/2006/relationships" type="roundRect" r:blip="">
+                <dgm:adjLst>
+                  <dgm:adj idx="1" val="0.1"/>
+                </dgm:adjLst>
+              </dgm:shape>
+              <dgm:presOf/>
+              <dgm:constrLst/>
+              <dgm:ruleLst/>
+            </dgm:layoutNode>
+            <dgm:layoutNode name="text" styleLbl="fgAcc0">
+              <dgm:varLst>
+                <dgm:chPref val="3"/>
+              </dgm:varLst>
+              <dgm:alg type="tx"/>
+              <dgm:shape xmlns:r="http://schemas.openxmlformats.org/officeDocument/2006/relationships" type="roundRect" r:blip="">
+                <dgm:adjLst>
+                  <dgm:adj idx="1" val="0.1"/>
+                </dgm:adjLst>
+              </dgm:shape>
+              <dgm:presOf axis="self"/>
+              <dgm:constrLst>
+                <dgm:constr type="tMarg" refType="primFontSz" fact="0.3"/>
+                <dgm:constr type="bMarg" refType="primFontSz" fact="0.3"/>
+                <dgm:constr type="lMarg" refType="primFontSz" fact="0.3"/>
+                <dgm:constr type="rMarg" refType="primFontSz" fact="0.3"/>
+              </dgm:constrLst>
+              <dgm:ruleLst>
+                <dgm:rule type="primFontSz" val="5" fact="NaN" max="NaN"/>
+              </dgm:ruleLst>
+            </dgm:layoutNode>
+          </dgm:layoutNode>
+          <dgm:layoutNode name="hierChild2">
+            <dgm:choose name="Name5">
+              <dgm:if name="Name6" func="var" arg="dir" op="equ" val="norm">
+                <dgm:alg type="hierChild">
+                  <dgm:param type="linDir" val="fromL"/>
+                </dgm:alg>
+              </dgm:if>
+              <dgm:else name="Name7">
+                <dgm:alg type="hierChild">
+                  <dgm:param type="linDir" val="fromR"/>
+                </dgm:alg>
+              </dgm:else>
+            </dgm:choose>
+            <dgm:shape xmlns:r="http://schemas.openxmlformats.org/officeDocument/2006/relationships" r:blip="">
+              <dgm:adjLst/>
+            </dgm:shape>
+            <dgm:presOf/>
+            <dgm:constrLst/>
+            <dgm:ruleLst/>
+            <dgm:forEach name="Name8" axis="ch">
+              <dgm:forEach name="Name9" axis="self" ptType="parTrans" cnt="1">
+                <dgm:layoutNode name="Name10">
+                  <dgm:alg type="conn">
+                    <dgm:param type="dim" val="1D"/>
+                    <dgm:param type="endSty" val="noArr"/>
+                    <dgm:param type="connRout" val="bend"/>
+                    <dgm:param type="bendPt" val="end"/>
+                    <dgm:param type="begPts" val="bCtr"/>
+                    <dgm:param type="endPts" val="tCtr"/>
+                    <dgm:param type="srcNode" val="background"/>
+                    <dgm:param type="dstNode" val="background2"/>
+                  </dgm:alg>
+                  <dgm:shape xmlns:r="http://schemas.openxmlformats.org/officeDocument/2006/relationships" type="conn" r:blip="" zOrderOff="-999">
+                    <dgm:adjLst/>
+                  </dgm:shape>
+                  <dgm:presOf axis="self"/>
+                  <dgm:constrLst>
+                    <dgm:constr type="begPad"/>
+                    <dgm:constr type="endPad"/>
+                  </dgm:constrLst>
+                  <dgm:ruleLst/>
+                </dgm:layoutNode>
+              </dgm:forEach>
+              <dgm:forEach name="Name11" axis="self" ptType="node">
+                <dgm:layoutNode name="hierRoot2">
+                  <dgm:alg type="hierRoot"/>
+                  <dgm:shape xmlns:r="http://schemas.openxmlformats.org/officeDocument/2006/relationships" r:blip="">
+                    <dgm:adjLst/>
+                  </dgm:shape>
+                  <dgm:presOf/>
+                  <dgm:constrLst>
+                    <dgm:constr type="bendDist" for="des" ptType="parTrans" refType="sp" fact="0.5"/>
+                  </dgm:constrLst>
+                  <dgm:ruleLst/>
+                  <dgm:layoutNode name="composite2">
+                    <dgm:alg type="composite"/>
+                    <dgm:shape xmlns:r="http://schemas.openxmlformats.org/officeDocument/2006/relationships" r:blip="">
+                      <dgm:adjLst/>
+                    </dgm:shape>
+                    <dgm:presOf/>
+                    <dgm:constrLst>
+                      <dgm:constr type="w" for="ch" forName="background2" refType="w" fact="0.9"/>
+                      <dgm:constr type="h" for="ch" forName="background2" refType="w" refFor="ch" refForName="background2" fact="0.635"/>
+                      <dgm:constr type="t" for="ch" forName="background2"/>
+                      <dgm:constr type="l" for="ch" forName="background2"/>
+                      <dgm:constr type="w" for="ch" forName="text2" refType="w" fact="0.9"/>
+                      <dgm:constr type="h" for="ch" forName="text2" refType="w" refFor="ch" refForName="text2" fact="0.635"/>
+                      <dgm:constr type="t" for="ch" forName="text2" refType="w" fact="0.095"/>
+                      <dgm:constr type="l" for="ch" forName="text2" refType="w" fact="0.1"/>
+                    </dgm:constrLst>
+                    <dgm:ruleLst/>
+                    <dgm:layoutNode name="background2" moveWith="text2">
+                      <dgm:alg type="sp"/>
+                      <dgm:shape xmlns:r="http://schemas.openxmlformats.org/officeDocument/2006/relationships" type="roundRect" r:blip="">
+                        <dgm:adjLst>
+                          <dgm:adj idx="1" val="0.1"/>
+                        </dgm:adjLst>
+                      </dgm:shape>
+                      <dgm:presOf/>
+                      <dgm:constrLst/>
+                      <dgm:ruleLst/>
+                    </dgm:layoutNode>
+                    <dgm:layoutNode name="text2" styleLbl="fgAcc2">
+                      <dgm:varLst>
+                        <dgm:chPref val="3"/>
+                      </dgm:varLst>
+                      <dgm:alg type="tx"/>
+                      <dgm:shape xmlns:r="http://schemas.openxmlformats.org/officeDocument/2006/relationships" type="roundRect" r:blip="">
+                        <dgm:adjLst>
+                          <dgm:adj idx="1" val="0.1"/>
+                        </dgm:adjLst>
+                      </dgm:shape>
+                      <dgm:presOf axis="self"/>
+                      <dgm:constrLst>
+                        <dgm:constr type="tMarg" refType="primFontSz" fact="0.3"/>
+                        <dgm:constr type="bMarg" refType="primFontSz" fact="0.3"/>
+                        <dgm:constr type="lMarg" refType="primFontSz" fact="0.3"/>
+                        <dgm:constr type="rMarg" refType="primFontSz" fact="0.3"/>
+                      </dgm:constrLst>
+                      <dgm:ruleLst>
+                        <dgm:rule type="primFontSz" val="5" fact="NaN" max="NaN"/>
+                      </dgm:ruleLst>
+                    </dgm:layoutNode>
+                  </dgm:layoutNode>
+                  <dgm:layoutNode name="hierChild3">
+                    <dgm:choose name="Name12">
+                      <dgm:if name="Name13" func="var" arg="dir" op="equ" val="norm">
+                        <dgm:alg type="hierChild">
+                          <dgm:param type="linDir" val="fromL"/>
+                        </dgm:alg>
+                      </dgm:if>
+                      <dgm:else name="Name14">
+                        <dgm:alg type="hierChild">
+                          <dgm:param type="linDir" val="fromR"/>
+                        </dgm:alg>
+                      </dgm:else>
+                    </dgm:choose>
+                    <dgm:shape xmlns:r="http://schemas.openxmlformats.org/officeDocument/2006/relationships" r:blip="">
+                      <dgm:adjLst/>
+                    </dgm:shape>
+                    <dgm:presOf/>
+                    <dgm:constrLst/>
+                    <dgm:ruleLst/>
+                    <dgm:forEach name="Name15" axis="ch">
+                      <dgm:forEach name="Name16" axis="self" ptType="parTrans" cnt="1">
+                        <dgm:layoutNode name="Name17">
+                          <dgm:alg type="conn">
+                            <dgm:param type="dim" val="1D"/>
+                            <dgm:param type="endSty" val="noArr"/>
+                            <dgm:param type="connRout" val="bend"/>
+                            <dgm:param type="bendPt" val="end"/>
+                            <dgm:param type="begPts" val="bCtr"/>
+                            <dgm:param type="endPts" val="tCtr"/>
+                            <dgm:param type="srcNode" val="background2"/>
+                            <dgm:param type="dstNode" val="background3"/>
+                          </dgm:alg>
+                          <dgm:shape xmlns:r="http://schemas.openxmlformats.org/officeDocument/2006/relationships" type="conn" r:blip="" zOrderOff="-999">
+                            <dgm:adjLst/>
+                          </dgm:shape>
+                          <dgm:presOf axis="self"/>
+                          <dgm:constrLst>
+                            <dgm:constr type="begPad"/>
+                            <dgm:constr type="endPad"/>
+                          </dgm:constrLst>
+                          <dgm:ruleLst/>
+                        </dgm:layoutNode>
+                      </dgm:forEach>
+                      <dgm:forEach name="Name18" axis="self" ptType="node">
+                        <dgm:layoutNode name="hierRoot3">
+                          <dgm:alg type="hierRoot"/>
+                          <dgm:shape xmlns:r="http://schemas.openxmlformats.org/officeDocument/2006/relationships" r:blip="">
+                            <dgm:adjLst/>
+                          </dgm:shape>
+                          <dgm:presOf/>
+                          <dgm:constrLst>
+                            <dgm:constr type="bendDist" for="des" ptType="parTrans" refType="sp" fact="0.5"/>
+                          </dgm:constrLst>
+                          <dgm:ruleLst/>
+                          <dgm:layoutNode name="composite3">
+                            <dgm:alg type="composite"/>
+                            <dgm:shape xmlns:r="http://schemas.openxmlformats.org/officeDocument/2006/relationships" r:blip="">
+                              <dgm:adjLst/>
+                            </dgm:shape>
+                            <dgm:presOf/>
+                            <dgm:constrLst>
+                              <dgm:constr type="w" for="ch" forName="background3" refType="w" fact="0.9"/>
+                              <dgm:constr type="h" for="ch" forName="background3" refType="w" refFor="ch" refForName="background3" fact="0.635"/>
+                              <dgm:constr type="t" for="ch" forName="background3"/>
+                              <dgm:constr type="l" for="ch" forName="background3"/>
+                              <dgm:constr type="w" for="ch" forName="text3" refType="w" fact="0.9"/>
+                              <dgm:constr type="h" for="ch" forName="text3" refType="w" refFor="ch" refForName="text3" fact="0.635"/>
+                              <dgm:constr type="t" for="ch" forName="text3" refType="w" fact="0.095"/>
+                              <dgm:constr type="l" for="ch" forName="text3" refType="w" fact="0.1"/>
+                            </dgm:constrLst>
+                            <dgm:ruleLst/>
+                            <dgm:layoutNode name="background3" moveWith="text3">
+                              <dgm:alg type="sp"/>
+                              <dgm:shape xmlns:r="http://schemas.openxmlformats.org/officeDocument/2006/relationships" type="roundRect" r:blip="">
+                                <dgm:adjLst>
+                                  <dgm:adj idx="1" val="0.1"/>
+                                </dgm:adjLst>
+                              </dgm:shape>
+                              <dgm:presOf/>
+                              <dgm:constrLst/>
+                              <dgm:ruleLst/>
+                            </dgm:layoutNode>
+                            <dgm:layoutNode name="text3" styleLbl="fgAcc3">
+                              <dgm:varLst>
+                                <dgm:chPref val="3"/>
+                              </dgm:varLst>
+                              <dgm:alg type="tx"/>
+                              <dgm:shape xmlns:r="http://schemas.openxmlformats.org/officeDocument/2006/relationships" type="roundRect" r:blip="">
+                                <dgm:adjLst>
+                                  <dgm:adj idx="1" val="0.1"/>
+                                </dgm:adjLst>
+                              </dgm:shape>
+                              <dgm:presOf axis="self"/>
+                              <dgm:constrLst>
+                                <dgm:constr type="tMarg" refType="primFontSz" fact="0.3"/>
+                                <dgm:constr type="bMarg" refType="primFontSz" fact="0.3"/>
+                                <dgm:constr type="lMarg" refType="primFontSz" fact="0.3"/>
+                                <dgm:constr type="rMarg" refType="primFontSz" fact="0.3"/>
+                              </dgm:constrLst>
+                              <dgm:ruleLst>
+                                <dgm:rule type="primFontSz" val="5" fact="NaN" max="NaN"/>
+                              </dgm:ruleLst>
+                            </dgm:layoutNode>
+                          </dgm:layoutNode>
+                          <dgm:layoutNode name="hierChild4">
+                            <dgm:choose name="Name19">
+                              <dgm:if name="Name20" func="var" arg="dir" op="equ" val="norm">
+                                <dgm:alg type="hierChild">
+                                  <dgm:param type="linDir" val="fromL"/>
+                                </dgm:alg>
+                              </dgm:if>
+                              <dgm:else name="Name21">
+                                <dgm:alg type="hierChild">
+                                  <dgm:param type="linDir" val="fromR"/>
+                                </dgm:alg>
+                              </dgm:else>
+                            </dgm:choose>
+                            <dgm:shape xmlns:r="http://schemas.openxmlformats.org/officeDocument/2006/relationships" r:blip="">
+                              <dgm:adjLst/>
+                            </dgm:shape>
+                            <dgm:presOf/>
+                            <dgm:constrLst/>
+                            <dgm:ruleLst/>
+                            <dgm:forEach name="repeat" axis="ch">
+                              <dgm:forEach name="Name22" axis="self" ptType="parTrans" cnt="1">
+                                <dgm:layoutNode name="Name23">
+                                  <dgm:choose name="Name24">
+                                    <dgm:if name="Name25" axis="self" func="depth" op="lte" val="4">
+                                      <dgm:alg type="conn">
+                                        <dgm:param type="dim" val="1D"/>
+                                        <dgm:param type="endSty" val="noArr"/>
+                                        <dgm:param type="connRout" val="bend"/>
+                                        <dgm:param type="bendPt" val="end"/>
+                                        <dgm:param type="begPts" val="bCtr"/>
+                                        <dgm:param type="endPts" val="tCtr"/>
+                                        <dgm:param type="srcNode" val="background3"/>
+                                        <dgm:param type="dstNode" val="background4"/>
+                                      </dgm:alg>
+                                    </dgm:if>
+                                    <dgm:else name="Name26">
+                                      <dgm:alg type="conn">
+                                        <dgm:param type="dim" val="1D"/>
+                                        <dgm:param type="endSty" val="noArr"/>
+                                        <dgm:param type="connRout" val="bend"/>
+                                        <dgm:param type="bendPt" val="end"/>
+                                        <dgm:param type="begPts" val="bCtr"/>
+                                        <dgm:param type="endPts" val="tCtr"/>
+                                        <dgm:param type="srcNode" val="background4"/>
+                                        <dgm:param type="dstNode" val="background4"/>
+                                      </dgm:alg>
+                                    </dgm:else>
+                                  </dgm:choose>
+                                  <dgm:shape xmlns:r="http://schemas.openxmlformats.org/officeDocument/2006/relationships" type="conn" r:blip="" zOrderOff="-999">
+                                    <dgm:adjLst/>
+                                  </dgm:shape>
+                                  <dgm:presOf axis="self"/>
+                                  <dgm:constrLst>
+                                    <dgm:constr type="begPad"/>
+                                    <dgm:constr type="endPad"/>
+                                  </dgm:constrLst>
+                                  <dgm:ruleLst/>
+                                </dgm:layoutNode>
+                              </dgm:forEach>
+                              <dgm:forEach name="Name27" axis="self" ptType="node">
+                                <dgm:layoutNode name="hierRoot4">
+                                  <dgm:alg type="hierRoot"/>
+                                  <dgm:shape xmlns:r="http://schemas.openxmlformats.org/officeDocument/2006/relationships" r:blip="">
+                                    <dgm:adjLst/>
+                                  </dgm:shape>
+                                  <dgm:presOf/>
+                                  <dgm:constrLst>
+                                    <dgm:constr type="bendDist" for="des" ptType="parTrans" refType="sp" fact="0.5"/>
+                                  </dgm:constrLst>
+                                  <dgm:ruleLst/>
+                                  <dgm:layoutNode name="composite4">
+                                    <dgm:alg type="composite"/>
+                                    <dgm:shape xmlns:r="http://schemas.openxmlformats.org/officeDocument/2006/relationships" r:blip="">
+                                      <dgm:adjLst/>
+                                    </dgm:shape>
+                                    <dgm:presOf/>
+                                    <dgm:constrLst>
+                                      <dgm:constr type="w" for="ch" forName="background4" refType="w" fact="0.9"/>
+                                      <dgm:constr type="h" for="ch" forName="background4" refType="w" refFor="ch" refForName="background4" fact="0.635"/>
+                                      <dgm:constr type="t" for="ch" forName="background4"/>
+                                      <dgm:constr type="l" for="ch" forName="background4"/>
+                                      <dgm:constr type="w" for="ch" forName="text4" refType="w" fact="0.9"/>
+                                      <dgm:constr type="h" for="ch" forName="text4" refType="w" refFor="ch" refForName="text4" fact="0.635"/>
+                                      <dgm:constr type="t" for="ch" forName="text4" refType="w" fact="0.095"/>
+                                      <dgm:constr type="l" for="ch" forName="text4" refType="w" fact="0.1"/>
+                                    </dgm:constrLst>
+                                    <dgm:ruleLst/>
+                                    <dgm:layoutNode name="background4" moveWith="text4">
+                                      <dgm:alg type="sp"/>
+                                      <dgm:shape xmlns:r="http://schemas.openxmlformats.org/officeDocument/2006/relationships" type="roundRect" r:blip="">
+                                        <dgm:adjLst>
+                                          <dgm:adj idx="1" val="0.1"/>
+                                        </dgm:adjLst>
+                                      </dgm:shape>
+                                      <dgm:presOf/>
+                                      <dgm:constrLst/>
+                                      <dgm:ruleLst/>
+                                    </dgm:layoutNode>
+                                    <dgm:layoutNode name="text4" styleLbl="fgAcc4">
+                                      <dgm:varLst>
+                                        <dgm:chPref val="3"/>
+                                      </dgm:varLst>
+                                      <dgm:alg type="tx"/>
+                                      <dgm:shape xmlns:r="http://schemas.openxmlformats.org/officeDocument/2006/relationships" type="roundRect" r:blip="">
+                                        <dgm:adjLst>
+                                          <dgm:adj idx="1" val="0.1"/>
+                                        </dgm:adjLst>
+                                      </dgm:shape>
+                                      <dgm:presOf axis="self"/>
+                                      <dgm:constrLst>
+                                        <dgm:constr type="tMarg" refType="primFontSz" fact="0.3"/>
+                                        <dgm:constr type="bMarg" refType="primFontSz" fact="0.3"/>
+                                        <dgm:constr type="lMarg" refType="primFontSz" fact="0.3"/>
+                                        <dgm:constr type="rMarg" refType="primFontSz" fact="0.3"/>
+                                      </dgm:constrLst>
+                                      <dgm:ruleLst>
+                                        <dgm:rule type="primFontSz" val="5" fact="NaN" max="NaN"/>
+                                      </dgm:ruleLst>
+                                    </dgm:layoutNode>
+                                  </dgm:layoutNode>
+                                  <dgm:layoutNode name="hierChild5">
+                                    <dgm:choose name="Name28">
+                                      <dgm:if name="Name29" func="var" arg="dir" op="equ" val="norm">
+                                        <dgm:alg type="hierChild">
+                                          <dgm:param type="linDir" val="fromL"/>
+                                        </dgm:alg>
+                                      </dgm:if>
+                                      <dgm:else name="Name30">
+                                        <dgm:alg type="hierChild">
+                                          <dgm:param type="linDir" val="fromR"/>
+                                        </dgm:alg>
+                                      </dgm:else>
+                                    </dgm:choose>
+                                    <dgm:shape xmlns:r="http://schemas.openxmlformats.org/officeDocument/2006/relationships" r:blip="">
+                                      <dgm:adjLst/>
+                                    </dgm:shape>
+                                    <dgm:presOf/>
+                                    <dgm:constrLst/>
+                                    <dgm:ruleLst/>
+                                    <dgm:forEach name="Name31" ref="repeat"/>
+                                  </dgm:layoutNode>
+                                </dgm:layoutNode>
+                              </dgm:forEach>
+                            </dgm:forEach>
+                          </dgm:layoutNode>
+                        </dgm:layoutNode>
+                      </dgm:forEach>
+                    </dgm:forEach>
+                  </dgm:layoutNode>
+                </dgm:layoutNode>
+              </dgm:forEach>
+            </dgm:forEach>
+          </dgm:layoutNode>
+        </dgm:layoutNode>
+      </dgm:forEach>
+    </dgm:forEach>
+  </dgm:layoutNode>
+</dgm:layoutDef>
+</file>
+
+<file path=ppt/diagrams/quickStyle1.xml><?xml version="1.0" encoding="utf-8"?>
+<dgm:styleDef xmlns:dgm="http://schemas.openxmlformats.org/drawingml/2006/diagram" xmlns:a="http://schemas.openxmlformats.org/drawingml/2006/main" uniqueId="urn:microsoft.com/office/officeart/2005/8/quickstyle/simple1">
+  <dgm:title val=""/>
+  <dgm:desc val=""/>
+  <dgm:catLst>
+    <dgm:cat type="simple" pri="10100"/>
+  </dgm:catLst>
+  <dgm:scene3d>
+    <a:camera prst="orthographicFront"/>
+    <a:lightRig rig="threePt" dir="t"/>
+  </dgm:scene3d>
+  <dgm:styleLbl name="node0">
+    <dgm:scene3d>
+      <a:camera prst="orthographicFront"/>
+      <a:lightRig rig="threePt" dir="t"/>
+    </dgm:scene3d>
+    <dgm:sp3d/>
+    <dgm:txPr/>
+    <dgm:style>
+      <a:lnRef idx="2">
+        <a:scrgbClr r="0" g="0" b="0"/>
+      </a:lnRef>
+      <a:fillRef idx="1">
+        <a:scrgbClr r="0" g="0" b="0"/>
+      </a:fillRef>
+      <a:effectRef idx="0">
+        <a:scrgbClr r="0" g="0" b="0"/>
+      </a:effectRef>
+      <a:fontRef idx="minor">
+        <a:schemeClr val="lt1"/>
+      </a:fontRef>
+    </dgm:style>
+  </dgm:styleLbl>
+  <dgm:styleLbl name="lnNode1">
+    <dgm:scene3d>
+      <a:camera prst="orthographicFront"/>
+      <a:lightRig rig="threePt" dir="t"/>
+    </dgm:scene3d>
+    <dgm:sp3d/>
+    <dgm:txPr/>
+    <dgm:style>
+      <a:lnRef idx="2">
+        <a:scrgbClr r="0" g="0" b="0"/>
+      </a:lnRef>
+      <a:fillRef idx="1">
+        <a:scrgbClr r="0" g="0" b="0"/>
+      </a:fillRef>
+      <a:effectRef idx="0">
+        <a:scrgbClr r="0" g="0" b="0"/>
+      </a:effectRef>
+      <a:fontRef idx="minor">
+        <a:schemeClr val="lt1"/>
+      </a:fontRef>
+    </dgm:style>
+  </dgm:styleLbl>
+  <dgm:styleLbl name="vennNode1">
+    <dgm:scene3d>
+      <a:camera prst="orthographicFront"/>
+      <a:lightRig rig="threePt" dir="t"/>
+    </dgm:scene3d>
+    <dgm:sp3d/>
+    <dgm:txPr/>
+    <dgm:style>
+      <a:lnRef idx="2">
+        <a:scrgbClr r="0" g="0" b="0"/>
+      </a:lnRef>
+      <a:fillRef idx="1">
+        <a:scrgbClr r="0" g="0" b="0"/>
+      </a:fillRef>
+      <a:effectRef idx="0">
+        <a:scrgbClr r="0" g="0" b="0"/>
+      </a:effectRef>
+      <a:fontRef idx="minor">
+        <a:schemeClr val="tx1"/>
+      </a:fontRef>
+    </dgm:style>
+  </dgm:styleLbl>
+  <dgm:styleLbl name="alignNode1">
+    <dgm:scene3d>
+      <a:camera prst="orthographicFront"/>
+      <a:lightRig rig="threePt" dir="t"/>
+    </dgm:scene3d>
+    <dgm:sp3d/>
+    <dgm:txPr/>
+    <dgm:style>
+      <a:lnRef idx="2">
+        <a:scrgbClr r="0" g="0" b="0"/>
+      </a:lnRef>
+      <a:fillRef idx="1">
+        <a:scrgbClr r="0" g="0" b="0"/>
+      </a:fillRef>
+      <a:effectRef idx="0">
+        <a:scrgbClr r="0" g="0" b="0"/>
+      </a:effectRef>
+      <a:fontRef idx="minor">
+        <a:schemeClr val="lt1"/>
+      </a:fontRef>
+    </dgm:style>
+  </dgm:styleLbl>
+  <dgm:styleLbl name="node1">
+    <dgm:scene3d>
+      <a:camera prst="orthographicFront"/>
+      <a:lightRig rig="threePt" dir="t"/>
+    </dgm:scene3d>
+    <dgm:sp3d/>
+    <dgm:txPr/>
+    <dgm:style>
+      <a:lnRef idx="2">
+        <a:scrgbClr r="0" g="0" b="0"/>
+      </a:lnRef>
+      <a:fillRef idx="1">
+        <a:scrgbClr r="0" g="0" b="0"/>
+      </a:fillRef>
+      <a:effectRef idx="0">
+        <a:scrgbClr r="0" g="0" b="0"/>
+      </a:effectRef>
+      <a:fontRef idx="minor">
+        <a:schemeClr val="lt1"/>
+      </a:fontRef>
+    </dgm:style>
+  </dgm:styleLbl>
+  <dgm:styleLbl name="node2">
+    <dgm:scene3d>
+      <a:camera prst="orthographicFront"/>
+      <a:lightRig rig="threePt" dir="t"/>
+    </dgm:scene3d>
+    <dgm:sp3d/>
+    <dgm:txPr/>
+    <dgm:style>
+      <a:lnRef idx="2">
+        <a:scrgbClr r="0" g="0" b="0"/>
+      </a:lnRef>
+      <a:fillRef idx="1">
+        <a:scrgbClr r="0" g="0" b="0"/>
+      </a:fillRef>
+      <a:effectRef idx="0">
+        <a:scrgbClr r="0" g="0" b="0"/>
+      </a:effectRef>
+      <a:fontRef idx="minor">
+        <a:schemeClr val="lt1"/>
+      </a:fontRef>
+    </dgm:style>
+  </dgm:styleLbl>
+  <dgm:styleLbl name="node3">
+    <dgm:scene3d>
+      <a:camera prst="orthographicFront"/>
+      <a:lightRig rig="threePt" dir="t"/>
+    </dgm:scene3d>
+    <dgm:sp3d/>
+    <dgm:txPr/>
+    <dgm:style>
+      <a:lnRef idx="2">
+        <a:scrgbClr r="0" g="0" b="0"/>
+      </a:lnRef>
+      <a:fillRef idx="1">
+        <a:scrgbClr r="0" g="0" b="0"/>
+      </a:fillRef>
+      <a:effectRef idx="0">
+        <a:scrgbClr r="0" g="0" b="0"/>
+      </a:effectRef>
+      <a:fontRef idx="minor">
+        <a:schemeClr val="lt1"/>
+      </a:fontRef>
+    </dgm:style>
+  </dgm:styleLbl>
+  <dgm:styleLbl name="node4">
+    <dgm:scene3d>
+      <a:camera prst="orthographicFront"/>
+      <a:lightRig rig="threePt" dir="t"/>
+    </dgm:scene3d>
+    <dgm:sp3d/>
+    <dgm:txPr/>
+    <dgm:style>
+      <a:lnRef idx="2">
+        <a:scrgbClr r="0" g="0" b="0"/>
+      </a:lnRef>
+      <a:fillRef idx="1">
+        <a:scrgbClr r="0" g="0" b="0"/>
+      </a:fillRef>
+      <a:effectRef idx="0">
+        <a:scrgbClr r="0" g="0" b="0"/>
+      </a:effectRef>
+      <a:fontRef idx="minor">
+        <a:schemeClr val="lt1"/>
+      </a:fontRef>
+    </dgm:style>
+  </dgm:styleLbl>
+  <dgm:styleLbl name="fgImgPlace1">
+    <dgm:scene3d>
+      <a:camera prst="orthographicFront"/>
+      <a:lightRig rig="threePt" dir="t"/>
+    </dgm:scene3d>
+    <dgm:sp3d/>
+    <dgm:txPr/>
+    <dgm:style>
+      <a:lnRef idx="2">
+        <a:scrgbClr r="0" g="0" b="0"/>
+      </a:lnRef>
+      <a:fillRef idx="1">
+        <a:scrgbClr r="0" g="0" b="0"/>
+      </a:fillRef>
+      <a:effectRef idx="0">
+        <a:scrgbClr r="0" g="0" b="0"/>
+      </a:effectRef>
+      <a:fontRef idx="minor"/>
+    </dgm:style>
+  </dgm:styleLbl>
+  <dgm:styleLbl name="alignImgPlace1">
+    <dgm:scene3d>
+      <a:camera prst="orthographicFront"/>
+      <a:lightRig rig="threePt" dir="t"/>
+    </dgm:scene3d>
+    <dgm:sp3d/>
+    <dgm:txPr/>
+    <dgm:style>
+      <a:lnRef idx="2">
+        <a:scrgbClr r="0" g="0" b="0"/>
+      </a:lnRef>
+      <a:fillRef idx="1">
+        <a:scrgbClr r="0" g="0" b="0"/>
+      </a:fillRef>
+      <a:effectRef idx="0">
+        <a:scrgbClr r="0" g="0" b="0"/>
+      </a:effectRef>
+      <a:fontRef idx="minor"/>
+    </dgm:style>
+  </dgm:styleLbl>
+  <dgm:styleLbl name="bgImgPlace1">
+    <dgm:scene3d>
+      <a:camera prst="orthographicFront"/>
+      <a:lightRig rig="threePt" dir="t"/>
+    </dgm:scene3d>
+    <dgm:sp3d/>
+    <dgm:txPr/>
+    <dgm:style>
+      <a:lnRef idx="2">
+        <a:scrgbClr r="0" g="0" b="0"/>
+      </a:lnRef>
+      <a:fillRef idx="1">
+        <a:scrgbClr r="0" g="0" b="0"/>
+      </a:fillRef>
+      <a:effectRef idx="0">
+        <a:scrgbClr r="0" g="0" b="0"/>
+      </a:effectRef>
+      <a:fontRef idx="minor"/>
+    </dgm:style>
+  </dgm:styleLbl>
+  <dgm:styleLbl name="sibTrans2D1">
+    <dgm:scene3d>
+      <a:camera prst="orthographicFront"/>
+      <a:lightRig rig="threePt" dir="t"/>
+    </dgm:scene3d>
+    <dgm:sp3d/>
+    <dgm:txPr/>
+    <dgm:style>
+      <a:lnRef idx="0">
+        <a:scrgbClr r="0" g="0" b="0"/>
+      </a:lnRef>
+      <a:fillRef idx="1">
+        <a:scrgbClr r="0" g="0" b="0"/>
+      </a:fillRef>
+      <a:effectRef idx="0">
+        <a:scrgbClr r="0" g="0" b="0"/>
+      </a:effectRef>
+      <a:fontRef idx="minor">
+        <a:schemeClr val="lt1"/>
+      </a:fontRef>
+    </dgm:style>
+  </dgm:styleLbl>
+  <dgm:styleLbl name="fgSibTrans2D1">
+    <dgm:scene3d>
+      <a:camera prst="orthographicFront"/>
+      <a:lightRig rig="threePt" dir="t"/>
+    </dgm:scene3d>
+    <dgm:sp3d/>
+    <dgm:txPr/>
+    <dgm:style>
+      <a:lnRef idx="0">
+        <a:scrgbClr r="0" g="0" b="0"/>
+      </a:lnRef>
+      <a:fillRef idx="1">
+        <a:scrgbClr r="0" g="0" b="0"/>
+      </a:fillRef>
+      <a:effectRef idx="0">
+        <a:scrgbClr r="0" g="0" b="0"/>
+      </a:effectRef>
+      <a:fontRef idx="minor">
+        <a:schemeClr val="lt1"/>
+      </a:fontRef>
+    </dgm:style>
+  </dgm:styleLbl>
+  <dgm:styleLbl name="bgSibTrans2D1">
+    <dgm:scene3d>
+      <a:camera prst="orthographicFront"/>
+      <a:lightRig rig="threePt" dir="t"/>
+    </dgm:scene3d>
+    <dgm:sp3d/>
+    <dgm:txPr/>
+    <dgm:style>
+      <a:lnRef idx="0">
+        <a:scrgbClr r="0" g="0" b="0"/>
+      </a:lnRef>
+      <a:fillRef idx="1">
+        <a:scrgbClr r="0" g="0" b="0"/>
+      </a:fillRef>
+      <a:effectRef idx="0">
+        <a:scrgbClr r="0" g="0" b="0"/>
+      </a:effectRef>
+      <a:fontRef idx="minor">
+        <a:schemeClr val="lt1"/>
+      </a:fontRef>
+    </dgm:style>
+  </dgm:styleLbl>
+  <dgm:styleLbl name="sibTrans1D1">
+    <dgm:scene3d>
+      <a:camera prst="orthographicFront"/>
+      <a:lightRig rig="threePt" dir="t"/>
+    </dgm:scene3d>
+    <dgm:sp3d/>
+    <dgm:txPr/>
+    <dgm:style>
+      <a:lnRef idx="1">
+        <a:scrgbClr r="0" g="0" b="0"/>
+      </a:lnRef>
+      <a:fillRef idx="0">
+        <a:scrgbClr r="0" g="0" b="0"/>
+      </a:fillRef>
+      <a:effectRef idx="0">
+        <a:scrgbClr r="0" g="0" b="0"/>
+      </a:effectRef>
+      <a:fontRef idx="minor"/>
+    </dgm:style>
+  </dgm:styleLbl>
+  <dgm:styleLbl name="callout">
+    <dgm:scene3d>
+      <a:camera prst="orthographicFront"/>
+      <a:lightRig rig="threePt" dir="t"/>
+    </dgm:scene3d>
+    <dgm:sp3d/>
+    <dgm:txPr/>
+    <dgm:style>
+      <a:lnRef idx="2">
+        <a:scrgbClr r="0" g="0" b="0"/>
+      </a:lnRef>
+      <a:fillRef idx="1">
+        <a:scrgbClr r="0" g="0" b="0"/>
+      </a:fillRef>
+      <a:effectRef idx="0">
+        <a:scrgbClr r="0" g="0" b="0"/>
+      </a:effectRef>
+      <a:fontRef idx="minor"/>
+    </dgm:style>
+  </dgm:styleLbl>
+  <dgm:styleLbl name="asst0">
+    <dgm:scene3d>
+      <a:camera prst="orthographicFront"/>
+      <a:lightRig rig="threePt" dir="t"/>
+    </dgm:scene3d>
+    <dgm:sp3d/>
+    <dgm:txPr/>
+    <dgm:style>
+      <a:lnRef idx="2">
+        <a:scrgbClr r="0" g="0" b="0"/>
+      </a:lnRef>
+      <a:fillRef idx="1">
+        <a:scrgbClr r="0" g="0" b="0"/>
+      </a:fillRef>
+      <a:effectRef idx="0">
+        <a:scrgbClr r="0" g="0" b="0"/>
+      </a:effectRef>
+      <a:fontRef idx="minor">
+        <a:schemeClr val="lt1"/>
+      </a:fontRef>
+    </dgm:style>
+  </dgm:styleLbl>
+  <dgm:styleLbl name="asst1">
+    <dgm:scene3d>
+      <a:camera prst="orthographicFront"/>
+      <a:lightRig rig="threePt" dir="t"/>
+    </dgm:scene3d>
+    <dgm:sp3d/>
+    <dgm:txPr/>
+    <dgm:style>
+      <a:lnRef idx="2">
+        <a:scrgbClr r="0" g="0" b="0"/>
+      </a:lnRef>
+      <a:fillRef idx="1">
+        <a:scrgbClr r="0" g="0" b="0"/>
+      </a:fillRef>
+      <a:effectRef idx="0">
+        <a:scrgbClr r="0" g="0" b="0"/>
+      </a:effectRef>
+      <a:fontRef idx="minor">
+        <a:schemeClr val="lt1"/>
+      </a:fontRef>
+    </dgm:style>
+  </dgm:styleLbl>
+  <dgm:styleLbl name="asst2">
+    <dgm:scene3d>
+      <a:camera prst="orthographicFront"/>
+      <a:lightRig rig="threePt" dir="t"/>
+    </dgm:scene3d>
+    <dgm:sp3d/>
+    <dgm:txPr/>
+    <dgm:style>
+      <a:lnRef idx="2">
+        <a:scrgbClr r="0" g="0" b="0"/>
+      </a:lnRef>
+      <a:fillRef idx="1">
+        <a:scrgbClr r="0" g="0" b="0"/>
+      </a:fillRef>
+      <a:effectRef idx="0">
+        <a:scrgbClr r="0" g="0" b="0"/>
+      </a:effectRef>
+      <a:fontRef idx="minor">
+        <a:schemeClr val="lt1"/>
+      </a:fontRef>
+    </dgm:style>
+  </dgm:styleLbl>
+  <dgm:styleLbl name="asst3">
+    <dgm:scene3d>
+      <a:camera prst="orthographicFront"/>
+      <a:lightRig rig="threePt" dir="t"/>
+    </dgm:scene3d>
+    <dgm:sp3d/>
+    <dgm:txPr/>
+    <dgm:style>
+      <a:lnRef idx="2">
+        <a:scrgbClr r="0" g="0" b="0"/>
+      </a:lnRef>
+      <a:fillRef idx="1">
+        <a:scrgbClr r="0" g="0" b="0"/>
+      </a:fillRef>
+      <a:effectRef idx="0">
+        <a:scrgbClr r="0" g="0" b="0"/>
+      </a:effectRef>
+      <a:fontRef idx="minor">
+        <a:schemeClr val="lt1"/>
+      </a:fontRef>
+    </dgm:style>
+  </dgm:styleLbl>
+  <dgm:styleLbl name="asst4">
+    <dgm:scene3d>
+      <a:camera prst="orthographicFront"/>
+      <a:lightRig rig="threePt" dir="t"/>
+    </dgm:scene3d>
+    <dgm:sp3d/>
+    <dgm:txPr/>
+    <dgm:style>
+      <a:lnRef idx="2">
+        <a:scrgbClr r="0" g="0" b="0"/>
+      </a:lnRef>
+      <a:fillRef idx="1">
+        <a:scrgbClr r="0" g="0" b="0"/>
+      </a:fillRef>
+      <a:effectRef idx="0">
+        <a:scrgbClr r="0" g="0" b="0"/>
+      </a:effectRef>
+      <a:fontRef idx="minor">
+        <a:schemeClr val="lt1"/>
+      </a:fontRef>
+    </dgm:style>
+  </dgm:styleLbl>
+  <dgm:styleLbl name="parChTrans2D1">
+    <dgm:scene3d>
+      <a:camera prst="orthographicFront"/>
+      <a:lightRig rig="threePt" dir="t"/>
+    </dgm:scene3d>
+    <dgm:sp3d/>
+    <dgm:txPr/>
+    <dgm:style>
+      <a:lnRef idx="2">
+        <a:scrgbClr r="0" g="0" b="0"/>
+      </a:lnRef>
+      <a:fillRef idx="1">
+        <a:scrgbClr r="0" g="0" b="0"/>
+      </a:fillRef>
+      <a:effectRef idx="0">
+        <a:scrgbClr r="0" g="0" b="0"/>
+      </a:effectRef>
+      <a:fontRef idx="minor">
+        <a:schemeClr val="lt1"/>
+      </a:fontRef>
+    </dgm:style>
+  </dgm:styleLbl>
+  <dgm:styleLbl name="parChTrans2D2">
+    <dgm:scene3d>
+      <a:camera prst="orthographicFront"/>
+      <a:lightRig rig="threePt" dir="t"/>
+    </dgm:scene3d>
+    <dgm:sp3d/>
+    <dgm:txPr/>
+    <dgm:style>
+      <a:lnRef idx="2">
+        <a:scrgbClr r="0" g="0" b="0"/>
+      </a:lnRef>
+      <a:fillRef idx="1">
+        <a:scrgbClr r="0" g="0" b="0"/>
+      </a:fillRef>
+      <a:effectRef idx="0">
+        <a:scrgbClr r="0" g="0" b="0"/>
+      </a:effectRef>
+      <a:fontRef idx="minor">
+        <a:schemeClr val="lt1"/>
+      </a:fontRef>
+    </dgm:style>
+  </dgm:styleLbl>
+  <dgm:styleLbl name="parChTrans2D3">
+    <dgm:scene3d>
+      <a:camera prst="orthographicFront"/>
+      <a:lightRig rig="threePt" dir="t"/>
+    </dgm:scene3d>
+    <dgm:sp3d/>
+    <dgm:txPr/>
+    <dgm:style>
+      <a:lnRef idx="2">
+        <a:scrgbClr r="0" g="0" b="0"/>
+      </a:lnRef>
+      <a:fillRef idx="1">
+        <a:scrgbClr r="0" g="0" b="0"/>
+      </a:fillRef>
+      <a:effectRef idx="0">
+        <a:scrgbClr r="0" g="0" b="0"/>
+      </a:effectRef>
+      <a:fontRef idx="minor">
+        <a:schemeClr val="lt1"/>
+      </a:fontRef>
+    </dgm:style>
+  </dgm:styleLbl>
+  <dgm:styleLbl name="parChTrans2D4">
+    <dgm:scene3d>
+      <a:camera prst="orthographicFront"/>
+      <a:lightRig rig="threePt" dir="t"/>
+    </dgm:scene3d>
+    <dgm:sp3d/>
+    <dgm:txPr/>
+    <dgm:style>
+      <a:lnRef idx="2">
+        <a:scrgbClr r="0" g="0" b="0"/>
+      </a:lnRef>
+      <a:fillRef idx="1">
+        <a:scrgbClr r="0" g="0" b="0"/>
+      </a:fillRef>
+      <a:effectRef idx="0">
+        <a:scrgbClr r="0" g="0" b="0"/>
+      </a:effectRef>
+      <a:fontRef idx="minor">
+        <a:schemeClr val="lt1"/>
+      </a:fontRef>
+    </dgm:style>
+  </dgm:styleLbl>
+  <dgm:styleLbl name="parChTrans1D1">
+    <dgm:scene3d>
+      <a:camera prst="orthographicFront"/>
+      <a:lightRig rig="threePt" dir="t"/>
+    </dgm:scene3d>
+    <dgm:sp3d/>
+    <dgm:txPr/>
+    <dgm:style>
+      <a:lnRef idx="2">
+        <a:scrgbClr r="0" g="0" b="0"/>
+      </a:lnRef>
+      <a:fillRef idx="0">
+        <a:scrgbClr r="0" g="0" b="0"/>
+      </a:fillRef>
+      <a:effectRef idx="0">
+        <a:scrgbClr r="0" g="0" b="0"/>
+      </a:effectRef>
+      <a:fontRef idx="minor"/>
+    </dgm:style>
+  </dgm:styleLbl>
+  <dgm:styleLbl name="parChTrans1D2">
+    <dgm:scene3d>
+      <a:camera prst="orthographicFront"/>
+      <a:lightRig rig="threePt" dir="t"/>
+    </dgm:scene3d>
+    <dgm:sp3d/>
+    <dgm:txPr/>
+    <dgm:style>
+      <a:lnRef idx="2">
+        <a:scrgbClr r="0" g="0" b="0"/>
+      </a:lnRef>
+      <a:fillRef idx="0">
+        <a:scrgbClr r="0" g="0" b="0"/>
+      </a:fillRef>
+      <a:effectRef idx="0">
+        <a:scrgbClr r="0" g="0" b="0"/>
+      </a:effectRef>
+      <a:fontRef idx="minor"/>
+    </dgm:style>
+  </dgm:styleLbl>
+  <dgm:styleLbl name="parChTrans1D3">
+    <dgm:scene3d>
+      <a:camera prst="orthographicFront"/>
+      <a:lightRig rig="threePt" dir="t"/>
+    </dgm:scene3d>
+    <dgm:sp3d/>
+    <dgm:txPr/>
+    <dgm:style>
+      <a:lnRef idx="2">
+        <a:scrgbClr r="0" g="0" b="0"/>
+      </a:lnRef>
+      <a:fillRef idx="0">
+        <a:scrgbClr r="0" g="0" b="0"/>
+      </a:fillRef>
+      <a:effectRef idx="0">
+        <a:scrgbClr r="0" g="0" b="0"/>
+      </a:effectRef>
+      <a:fontRef idx="minor"/>
+    </dgm:style>
+  </dgm:styleLbl>
+  <dgm:styleLbl name="parChTrans1D4">
+    <dgm:scene3d>
+      <a:camera prst="orthographicFront"/>
+      <a:lightRig rig="threePt" dir="t"/>
+    </dgm:scene3d>
+    <dgm:sp3d/>
+    <dgm:txPr/>
+    <dgm:style>
+      <a:lnRef idx="2">
+        <a:scrgbClr r="0" g="0" b="0"/>
+      </a:lnRef>
+      <a:fillRef idx="0">
+        <a:scrgbClr r="0" g="0" b="0"/>
+      </a:fillRef>
+      <a:effectRef idx="0">
+        <a:scrgbClr r="0" g="0" b="0"/>
+      </a:effectRef>
+      <a:fontRef idx="minor"/>
+    </dgm:style>
+  </dgm:styleLbl>
+  <dgm:styleLbl name="fgAcc1">
+    <dgm:scene3d>
+      <a:camera prst="orthographicFront"/>
+      <a:lightRig rig="threePt" dir="t"/>
+    </dgm:scene3d>
+    <dgm:sp3d/>
+    <dgm:txPr/>
+    <dgm:style>
+      <a:lnRef idx="2">
+        <a:scrgbClr r="0" g="0" b="0"/>
+      </a:lnRef>
+      <a:fillRef idx="1">
+        <a:scrgbClr r="0" g="0" b="0"/>
+      </a:fillRef>
+      <a:effectRef idx="0">
+        <a:scrgbClr r="0" g="0" b="0"/>
+      </a:effectRef>
+      <a:fontRef idx="minor"/>
+    </dgm:style>
+  </dgm:styleLbl>
+  <dgm:styleLbl name="conFgAcc1">
+    <dgm:scene3d>
+      <a:camera prst="orthographicFront"/>
+      <a:lightRig rig="threePt" dir="t"/>
+    </dgm:scene3d>
+    <dgm:sp3d/>
+    <dgm:txPr/>
+    <dgm:style>
+      <a:lnRef idx="2">
+        <a:scrgbClr r="0" g="0" b="0"/>
+      </a:lnRef>
+      <a:fillRef idx="1">
+        <a:scrgbClr r="0" g="0" b="0"/>
+      </a:fillRef>
+      <a:effectRef idx="0">
+        <a:scrgbClr r="0" g="0" b="0"/>
+      </a:effectRef>
+      <a:fontRef idx="minor"/>
+    </dgm:style>
+  </dgm:styleLbl>
+  <dgm:styleLbl name="alignAcc1">
+    <dgm:scene3d>
+      <a:camera prst="orthographicFront"/>
+      <a:lightRig rig="threePt" dir="t"/>
+    </dgm:scene3d>
+    <dgm:sp3d/>
+    <dgm:txPr/>
+    <dgm:style>
+      <a:lnRef idx="2">
+        <a:scrgbClr r="0" g="0" b="0"/>
+      </a:lnRef>
+      <a:fillRef idx="1">
+        <a:scrgbClr r="0" g="0" b="0"/>
+      </a:fillRef>
+      <a:effectRef idx="0">
+        <a:scrgbClr r="0" g="0" b="0"/>
+      </a:effectRef>
+      <a:fontRef idx="minor"/>
+    </dgm:style>
+  </dgm:styleLbl>
+  <dgm:styleLbl name="trAlignAcc1">
+    <dgm:scene3d>
+      <a:camera prst="orthographicFront"/>
+      <a:lightRig rig="threePt" dir="t"/>
+    </dgm:scene3d>
+    <dgm:sp3d/>
+    <dgm:txPr/>
+    <dgm:style>
+      <a:lnRef idx="1">
+        <a:scrgbClr r="0" g="0" b="0"/>
+      </a:lnRef>
+      <a:fillRef idx="1">
+        <a:scrgbClr r="0" g="0" b="0"/>
+      </a:fillRef>
+      <a:effectRef idx="0">
+        <a:scrgbClr r="0" g="0" b="0"/>
+      </a:effectRef>
+      <a:fontRef idx="minor"/>
+    </dgm:style>
+  </dgm:styleLbl>
+  <dgm:styleLbl name="bgAcc1">
+    <dgm:scene3d>
+      <a:camera prst="orthographicFront"/>
+      <a:lightRig rig="threePt" dir="t"/>
+    </dgm:scene3d>
+    <dgm:sp3d/>
+    <dgm:txPr/>
+    <dgm:style>
+      <a:lnRef idx="2">
+        <a:scrgbClr r="0" g="0" b="0"/>
+      </a:lnRef>
+      <a:fillRef idx="1">
+        <a:scrgbClr r="0" g="0" b="0"/>
+      </a:fillRef>
+      <a:effectRef idx="0">
+        <a:scrgbClr r="0" g="0" b="0"/>
+      </a:effectRef>
+      <a:fontRef idx="minor"/>
+    </dgm:style>
+  </dgm:styleLbl>
+  <dgm:styleLbl name="solidFgAcc1">
+    <dgm:scene3d>
+      <a:camera prst="orthographicFront"/>
+      <a:lightRig rig="threePt" dir="t"/>
+    </dgm:scene3d>
+    <dgm:sp3d/>
+    <dgm:txPr/>
+    <dgm:style>
+      <a:lnRef idx="2">
+        <a:scrgbClr r="0" g="0" b="0"/>
+      </a:lnRef>
+      <a:fillRef idx="1">
+        <a:scrgbClr r="0" g="0" b="0"/>
+      </a:fillRef>
+      <a:effectRef idx="0">
+        <a:scrgbClr r="0" g="0" b="0"/>
+      </a:effectRef>
+      <a:fontRef idx="minor"/>
+    </dgm:style>
+  </dgm:styleLbl>
+  <dgm:styleLbl name="solidAlignAcc1">
+    <dgm:scene3d>
+      <a:camera prst="orthographicFront"/>
+      <a:lightRig rig="threePt" dir="t"/>
+    </dgm:scene3d>
+    <dgm:sp3d/>
+    <dgm:txPr/>
+    <dgm:style>
+      <a:lnRef idx="2">
+        <a:scrgbClr r="0" g="0" b="0"/>
+      </a:lnRef>
+      <a:fillRef idx="1">
+        <a:scrgbClr r="0" g="0" b="0"/>
+      </a:fillRef>
+      <a:effectRef idx="0">
+        <a:scrgbClr r="0" g="0" b="0"/>
+      </a:effectRef>
+      <a:fontRef idx="minor"/>
+    </dgm:style>
+  </dgm:styleLbl>
+  <dgm:styleLbl name="solidBgAcc1">
+    <dgm:scene3d>
+      <a:camera prst="orthographicFront"/>
+      <a:lightRig rig="threePt" dir="t"/>
+    </dgm:scene3d>
+    <dgm:sp3d/>
+    <dgm:txPr/>
+    <dgm:style>
+      <a:lnRef idx="2">
+        <a:scrgbClr r="0" g="0" b="0"/>
+      </a:lnRef>
+      <a:fillRef idx="1">
+        <a:scrgbClr r="0" g="0" b="0"/>
+      </a:fillRef>
+      <a:effectRef idx="0">
+        <a:scrgbClr r="0" g="0" b="0"/>
+      </a:effectRef>
+      <a:fontRef idx="minor"/>
+    </dgm:style>
+  </dgm:styleLbl>
+  <dgm:styleLbl name="fgAccFollowNode1">
+    <dgm:scene3d>
+      <a:camera prst="orthographicFront"/>
+      <a:lightRig rig="threePt" dir="t"/>
+    </dgm:scene3d>
+    <dgm:sp3d/>
+    <dgm:txPr/>
+    <dgm:style>
+      <a:lnRef idx="2">
+        <a:scrgbClr r="0" g="0" b="0"/>
+      </a:lnRef>
+      <a:fillRef idx="1">
+        <a:scrgbClr r="0" g="0" b="0"/>
+      </a:fillRef>
+      <a:effectRef idx="0">
+        <a:scrgbClr r="0" g="0" b="0"/>
+      </a:effectRef>
+      <a:fontRef idx="minor"/>
+    </dgm:style>
+  </dgm:styleLbl>
+  <dgm:styleLbl name="alignAccFollowNode1">
+    <dgm:scene3d>
+      <a:camera prst="orthographicFront"/>
+      <a:lightRig rig="threePt" dir="t"/>
+    </dgm:scene3d>
+    <dgm:sp3d/>
+    <dgm:txPr/>
+    <dgm:style>
+      <a:lnRef idx="2">
+        <a:scrgbClr r="0" g="0" b="0"/>
+      </a:lnRef>
+      <a:fillRef idx="1">
+        <a:scrgbClr r="0" g="0" b="0"/>
+      </a:fillRef>
+      <a:effectRef idx="0">
+        <a:scrgbClr r="0" g="0" b="0"/>
+      </a:effectRef>
+      <a:fontRef idx="minor"/>
+    </dgm:style>
+  </dgm:styleLbl>
+  <dgm:styleLbl name="bgAccFollowNode1">
+    <dgm:scene3d>
+      <a:camera prst="orthographicFront"/>
+      <a:lightRig rig="threePt" dir="t"/>
+    </dgm:scene3d>
+    <dgm:sp3d/>
+    <dgm:txPr/>
+    <dgm:style>
+      <a:lnRef idx="2">
+        <a:scrgbClr r="0" g="0" b="0"/>
+      </a:lnRef>
+      <a:fillRef idx="1">
+        <a:scrgbClr r="0" g="0" b="0"/>
+      </a:fillRef>
+      <a:effectRef idx="0">
+        <a:scrgbClr r="0" g="0" b="0"/>
+      </a:effectRef>
+      <a:fontRef idx="minor"/>
+    </dgm:style>
+  </dgm:styleLbl>
+  <dgm:styleLbl name="fgAcc0">
+    <dgm:scene3d>
+      <a:camera prst="orthographicFront"/>
+      <a:lightRig rig="threePt" dir="t"/>
+    </dgm:scene3d>
+    <dgm:sp3d/>
+    <dgm:txPr/>
+    <dgm:style>
+      <a:lnRef idx="2">
+        <a:scrgbClr r="0" g="0" b="0"/>
+      </a:lnRef>
+      <a:fillRef idx="1">
+        <a:scrgbClr r="0" g="0" b="0"/>
+      </a:fillRef>
+      <a:effectRef idx="0">
+        <a:scrgbClr r="0" g="0" b="0"/>
+      </a:effectRef>
+      <a:fontRef idx="minor"/>
+    </dgm:style>
+  </dgm:styleLbl>
+  <dgm:styleLbl name="fgAcc2">
+    <dgm:scene3d>
+      <a:camera prst="orthographicFront"/>
+      <a:lightRig rig="threePt" dir="t"/>
+    </dgm:scene3d>
+    <dgm:sp3d/>
+    <dgm:txPr/>
+    <dgm:style>
+      <a:lnRef idx="2">
+        <a:scrgbClr r="0" g="0" b="0"/>
+      </a:lnRef>
+      <a:fillRef idx="1">
+        <a:scrgbClr r="0" g="0" b="0"/>
+      </a:fillRef>
+      <a:effectRef idx="0">
+        <a:scrgbClr r="0" g="0" b="0"/>
+      </a:effectRef>
+      <a:fontRef idx="minor"/>
+    </dgm:style>
+  </dgm:styleLbl>
+  <dgm:styleLbl name="fgAcc3">
+    <dgm:scene3d>
+      <a:camera prst="orthographicFront"/>
+      <a:lightRig rig="threePt" dir="t"/>
+    </dgm:scene3d>
+    <dgm:sp3d/>
+    <dgm:txPr/>
+    <dgm:style>
+      <a:lnRef idx="2">
+        <a:scrgbClr r="0" g="0" b="0"/>
+      </a:lnRef>
+      <a:fillRef idx="1">
+        <a:scrgbClr r="0" g="0" b="0"/>
+      </a:fillRef>
+      <a:effectRef idx="0">
+        <a:scrgbClr r="0" g="0" b="0"/>
+      </a:effectRef>
+      <a:fontRef idx="minor"/>
+    </dgm:style>
+  </dgm:styleLbl>
+  <dgm:styleLbl name="fgAcc4">
+    <dgm:scene3d>
+      <a:camera prst="orthographicFront"/>
+      <a:lightRig rig="threePt" dir="t"/>
+    </dgm:scene3d>
+    <dgm:sp3d/>
+    <dgm:txPr/>
+    <dgm:style>
+      <a:lnRef idx="2">
+        <a:scrgbClr r="0" g="0" b="0"/>
+      </a:lnRef>
+      <a:fillRef idx="1">
+        <a:scrgbClr r="0" g="0" b="0"/>
+      </a:fillRef>
+      <a:effectRef idx="0">
+        <a:scrgbClr r="0" g="0" b="0"/>
+      </a:effectRef>
+      <a:fontRef idx="minor"/>
+    </dgm:style>
+  </dgm:styleLbl>
+  <dgm:styleLbl name="bgShp">
+    <dgm:scene3d>
+      <a:camera prst="orthographicFront"/>
+      <a:lightRig rig="threePt" dir="t"/>
+    </dgm:scene3d>
+    <dgm:sp3d/>
+    <dgm:txPr/>
+    <dgm:style>
+      <a:lnRef idx="0">
+        <a:scrgbClr r="0" g="0" b="0"/>
+      </a:lnRef>
+      <a:fillRef idx="1">
+        <a:scrgbClr r="0" g="0" b="0"/>
+      </a:fillRef>
+      <a:effectRef idx="0">
+        <a:scrgbClr r="0" g="0" b="0"/>
+      </a:effectRef>
+      <a:fontRef idx="minor"/>
+    </dgm:style>
+  </dgm:styleLbl>
+  <dgm:styleLbl name="dkBgShp">
+    <dgm:scene3d>
+      <a:camera prst="orthographicFront"/>
+      <a:lightRig rig="threePt" dir="t"/>
+    </dgm:scene3d>
+    <dgm:sp3d/>
+    <dgm:txPr/>
+    <dgm:style>
+      <a:lnRef idx="0">
+        <a:scrgbClr r="0" g="0" b="0"/>
+      </a:lnRef>
+      <a:fillRef idx="1">
+        <a:scrgbClr r="0" g="0" b="0"/>
+      </a:fillRef>
+      <a:effectRef idx="0">
+        <a:scrgbClr r="0" g="0" b="0"/>
+      </a:effectRef>
+      <a:fontRef idx="minor"/>
+    </dgm:style>
+  </dgm:styleLbl>
+  <dgm:styleLbl name="trBgShp">
+    <dgm:scene3d>
+      <a:camera prst="orthographicFront"/>
+      <a:lightRig rig="threePt" dir="t"/>
+    </dgm:scene3d>
+    <dgm:sp3d/>
+    <dgm:txPr/>
+    <dgm:style>
+      <a:lnRef idx="0">
+        <a:scrgbClr r="0" g="0" b="0"/>
+      </a:lnRef>
+      <a:fillRef idx="1">
+        <a:scrgbClr r="0" g="0" b="0"/>
+      </a:fillRef>
+      <a:effectRef idx="0">
+        <a:scrgbClr r="0" g="0" b="0"/>
+      </a:effectRef>
+      <a:fontRef idx="minor"/>
+    </dgm:style>
+  </dgm:styleLbl>
+  <dgm:styleLbl name="fgShp">
+    <dgm:scene3d>
+      <a:camera prst="orthographicFront"/>
+      <a:lightRig rig="threePt" dir="t"/>
+    </dgm:scene3d>
+    <dgm:sp3d/>
+    <dgm:txPr/>
+    <dgm:style>
+      <a:lnRef idx="2">
+        <a:scrgbClr r="0" g="0" b="0"/>
+      </a:lnRef>
+      <a:fillRef idx="1">
+        <a:scrgbClr r="0" g="0" b="0"/>
+      </a:fillRef>
+      <a:effectRef idx="0">
+        <a:scrgbClr r="0" g="0" b="0"/>
+      </a:effectRef>
+      <a:fontRef idx="minor"/>
+    </dgm:style>
+  </dgm:styleLbl>
+  <dgm:styleLbl name="revTx">
+    <dgm:scene3d>
+      <a:camera prst="orthographicFront"/>
+      <a:lightRig rig="threePt" dir="t"/>
+    </dgm:scene3d>
+    <dgm:sp3d/>
+    <dgm:txPr/>
+    <dgm:style>
+      <a:lnRef idx="0">
+        <a:scrgbClr r="0" g="0" b="0"/>
+      </a:lnRef>
+      <a:fillRef idx="0">
+        <a:scrgbClr r="0" g="0" b="0"/>
+      </a:fillRef>
+      <a:effectRef idx="0">
+        <a:scrgbClr r="0" g="0" b="0"/>
+      </a:effectRef>
+      <a:fontRef idx="minor"/>
+    </dgm:style>
+  </dgm:styleLbl>
+</dgm:styleDef>
+</file>
+
+<file path=ppt/notesMasters/notesMaster1.xml><?xml version="1.0" encoding="utf-8"?>
+<p:notesMaster xmlns:a="http://schemas.openxmlformats.org/drawingml/2006/main" xmlns:r="http://schemas.openxmlformats.org/officeDocument/2006/relationships" xmlns:p="http://schemas.openxmlformats.org/presentationml/2006/main">
+  <p:cSld>
+    <p:bg>
+      <p:bgRef idx="1001">
+        <a:schemeClr val="bg1"/>
+      </p:bgRef>
+    </p:bg>
+    <p:spTree>
+      <p:nvGrpSpPr>
+        <p:cNvPr id="1" name=""/>
+        <p:cNvGrpSpPr/>
+        <p:nvPr/>
+      </p:nvGrpSpPr>
+      <p:grpSpPr>
+        <a:xfrm>
+          <a:off x="0" y="0"/>
+          <a:ext cx="0" cy="0"/>
+          <a:chOff x="0" y="0"/>
+          <a:chExt cx="0" cy="0"/>
+        </a:xfrm>
+      </p:grpSpPr>
+      <p:sp>
+        <p:nvSpPr>
+          <p:cNvPr id="2" name="Header Placeholder 1"/>
+          <p:cNvSpPr>
+            <a:spLocks noGrp="1"/>
+          </p:cNvSpPr>
+          <p:nvPr>
+            <p:ph type="hdr" sz="quarter"/>
+          </p:nvPr>
+        </p:nvSpPr>
+        <p:spPr>
+          <a:xfrm>
+            <a:off x="0" y="0"/>
+            <a:ext cx="2971800" cy="458788"/>
+          </a:xfrm>
+          <a:prstGeom prst="rect">
+            <a:avLst/>
+          </a:prstGeom>
+        </p:spPr>
+        <p:txBody>
+          <a:bodyPr vert="horz" lIns="91440" tIns="45720" rIns="91440" bIns="45720" rtlCol="0"/>
+          <a:lstStyle>
+            <a:lvl1pPr algn="l">
+              <a:defRPr sz="1200"/>
+            </a:lvl1pPr>
+          </a:lstStyle>
+          <a:p>
+            <a:endParaRPr lang="en-US"/>
+          </a:p>
+        </p:txBody>
+      </p:sp>
+      <p:sp>
+        <p:nvSpPr>
+          <p:cNvPr id="3" name="Date Placeholder 2"/>
+          <p:cNvSpPr>
+            <a:spLocks noGrp="1"/>
+          </p:cNvSpPr>
+          <p:nvPr>
+            <p:ph type="dt" idx="1"/>
+          </p:nvPr>
+        </p:nvSpPr>
+        <p:spPr>
+          <a:xfrm>
+            <a:off x="3884613" y="0"/>
+            <a:ext cx="2971800" cy="458788"/>
+          </a:xfrm>
+          <a:prstGeom prst="rect">
+            <a:avLst/>
+          </a:prstGeom>
+        </p:spPr>
+        <p:txBody>
+          <a:bodyPr vert="horz" lIns="91440" tIns="45720" rIns="91440" bIns="45720" rtlCol="0"/>
+          <a:lstStyle>
+            <a:lvl1pPr algn="r">
+              <a:defRPr sz="1200"/>
+            </a:lvl1pPr>
+          </a:lstStyle>
+          <a:p>
+            <a:fld id="{9A9C0C59-185E-874E-8468-6092D83992DA}" type="datetimeFigureOut">
+              <a:rPr lang="en-US" smtClean="0"/>
+              <a:t>4/1/26</a:t>
+            </a:fld>
+            <a:endParaRPr lang="en-US"/>
+          </a:p>
+        </p:txBody>
+      </p:sp>
+      <p:sp>
+        <p:nvSpPr>
+          <p:cNvPr id="4" name="Slide Image Placeholder 3"/>
+          <p:cNvSpPr>
+            <a:spLocks noGrp="1" noRot="1" noChangeAspect="1"/>
+          </p:cNvSpPr>
+          <p:nvPr>
+            <p:ph type="sldImg" idx="2"/>
+          </p:nvPr>
+        </p:nvSpPr>
+        <p:spPr>
+          <a:xfrm>
+            <a:off x="685800" y="1143000"/>
+            <a:ext cx="5486400" cy="3086100"/>
+          </a:xfrm>
+          <a:prstGeom prst="rect">
+            <a:avLst/>
+          </a:prstGeom>
+          <a:noFill/>
+          <a:ln w="12700">
+            <a:solidFill>
+              <a:prstClr val="black"/>
+            </a:solidFill>
+          </a:ln>
+        </p:spPr>
+        <p:txBody>
+          <a:bodyPr vert="horz" lIns="91440" tIns="45720" rIns="91440" bIns="45720" rtlCol="0" anchor="ctr"/>
+          <a:lstStyle/>
+          <a:p>
+            <a:endParaRPr lang="en-US"/>
+          </a:p>
+        </p:txBody>
+      </p:sp>
+      <p:sp>
+        <p:nvSpPr>
+          <p:cNvPr id="5" name="Notes Placeholder 4"/>
+          <p:cNvSpPr>
+            <a:spLocks noGrp="1"/>
+          </p:cNvSpPr>
+          <p:nvPr>
+            <p:ph type="body" sz="quarter" idx="3"/>
+          </p:nvPr>
+        </p:nvSpPr>
+        <p:spPr>
+          <a:xfrm>
+            <a:off x="685800" y="4400550"/>
+            <a:ext cx="5486400" cy="3600450"/>
+          </a:xfrm>
+          <a:prstGeom prst="rect">
+            <a:avLst/>
+          </a:prstGeom>
+        </p:spPr>
+        <p:txBody>
+          <a:bodyPr vert="horz" lIns="91440" tIns="45720" rIns="91440" bIns="45720" rtlCol="0"/>
+          <a:lstStyle/>
+          <a:p>
+            <a:pPr lvl="0"/>
+            <a:r>
+              <a:rPr lang="en-GB"/>
+              <a:t>Click to edit Master text styles</a:t>
+            </a:r>
+          </a:p>
+          <a:p>
+            <a:pPr lvl="1"/>
+            <a:r>
+              <a:rPr lang="en-GB"/>
+              <a:t>Second level</a:t>
+            </a:r>
+          </a:p>
+          <a:p>
+            <a:pPr lvl="2"/>
+            <a:r>
+              <a:rPr lang="en-GB"/>
+              <a:t>Third level</a:t>
+            </a:r>
+          </a:p>
+          <a:p>
+            <a:pPr lvl="3"/>
+            <a:r>
+              <a:rPr lang="en-GB"/>
+              <a:t>Fourth level</a:t>
+            </a:r>
+          </a:p>
+          <a:p>
+            <a:pPr lvl="4"/>
+            <a:r>
+              <a:rPr lang="en-GB"/>
+              <a:t>Fifth level</a:t>
+            </a:r>
+            <a:endParaRPr lang="en-US"/>
+          </a:p>
+        </p:txBody>
+      </p:sp>
+      <p:sp>
+        <p:nvSpPr>
+          <p:cNvPr id="6" name="Footer Placeholder 5"/>
+          <p:cNvSpPr>
+            <a:spLocks noGrp="1"/>
+          </p:cNvSpPr>
+          <p:nvPr>
+            <p:ph type="ftr" sz="quarter" idx="4"/>
+          </p:nvPr>
+        </p:nvSpPr>
+        <p:spPr>
+          <a:xfrm>
+            <a:off x="0" y="8685213"/>
+            <a:ext cx="2971800" cy="458787"/>
+          </a:xfrm>
+          <a:prstGeom prst="rect">
+            <a:avLst/>
+          </a:prstGeom>
+        </p:spPr>
+        <p:txBody>
+          <a:bodyPr vert="horz" lIns="91440" tIns="45720" rIns="91440" bIns="45720" rtlCol="0" anchor="b"/>
+          <a:lstStyle>
+            <a:lvl1pPr algn="l">
+              <a:defRPr sz="1200"/>
+            </a:lvl1pPr>
+          </a:lstStyle>
+          <a:p>
+            <a:endParaRPr lang="en-US"/>
+          </a:p>
+        </p:txBody>
+      </p:sp>
+      <p:sp>
+        <p:nvSpPr>
+          <p:cNvPr id="7" name="Slide Number Placeholder 6"/>
+          <p:cNvSpPr>
+            <a:spLocks noGrp="1"/>
+          </p:cNvSpPr>
+          <p:nvPr>
+            <p:ph type="sldNum" sz="quarter" idx="5"/>
+          </p:nvPr>
+        </p:nvSpPr>
+        <p:spPr>
+          <a:xfrm>
+            <a:off x="3884613" y="8685213"/>
+            <a:ext cx="2971800" cy="458787"/>
+          </a:xfrm>
+          <a:prstGeom prst="rect">
+            <a:avLst/>
+          </a:prstGeom>
+        </p:spPr>
+        <p:txBody>
+          <a:bodyPr vert="horz" lIns="91440" tIns="45720" rIns="91440" bIns="45720" rtlCol="0" anchor="b"/>
+          <a:lstStyle>
+            <a:lvl1pPr algn="r">
+              <a:defRPr sz="1200"/>
+            </a:lvl1pPr>
+          </a:lstStyle>
+          <a:p>
+            <a:fld id="{7332F5B2-8E9E-A043-910C-D623E320FEF5}" type="slidenum">
+              <a:rPr lang="en-US" smtClean="0"/>
+              <a:t>‹#›</a:t>
+            </a:fld>
+            <a:endParaRPr lang="en-US"/>
+          </a:p>
+        </p:txBody>
+      </p:sp>
+    </p:spTree>
+    <p:extLst>
+      <p:ext uri="{BB962C8B-B14F-4D97-AF65-F5344CB8AC3E}">
+        <p14:creationId xmlns:p14="http://schemas.microsoft.com/office/powerpoint/2010/main" val="2712966134"/>
+      </p:ext>
+    </p:extLst>
+  </p:cSld>
+  <p:clrMap bg1="lt1" tx1="dk1" bg2="lt2" tx2="dk2" accent1="accent1" accent2="accent2" accent3="accent3" accent4="accent4" accent5="accent5" accent6="accent6" hlink="hlink" folHlink="folHlink"/>
+  <p:notesStyle>
+    <a:lvl1pPr marL="0" algn="l" defTabSz="914400" rtl="0" eaLnBrk="1" latinLnBrk="0" hangingPunct="1">
+      <a:defRPr sz="1200" kern="1200">
+        <a:solidFill>
+          <a:schemeClr val="tx1"/>
+        </a:solidFill>
+        <a:latin typeface="+mn-lt"/>
+        <a:ea typeface="+mn-ea"/>
+        <a:cs typeface="+mn-cs"/>
+      </a:defRPr>
+    </a:lvl1pPr>
+    <a:lvl2pPr marL="457200" algn="l" defTabSz="914400" rtl="0" eaLnBrk="1" latinLnBrk="0" hangingPunct="1">
+      <a:defRPr sz="1200" kern="1200">
+        <a:solidFill>
+          <a:schemeClr val="tx1"/>
+        </a:solidFill>
+        <a:latin typeface="+mn-lt"/>
+        <a:ea typeface="+mn-ea"/>
+        <a:cs typeface="+mn-cs"/>
+      </a:defRPr>
+    </a:lvl2pPr>
+    <a:lvl3pPr marL="914400" algn="l" defTabSz="914400" rtl="0" eaLnBrk="1" latinLnBrk="0" hangingPunct="1">
+      <a:defRPr sz="1200" kern="1200">
+        <a:solidFill>
+          <a:schemeClr val="tx1"/>
+        </a:solidFill>
+        <a:latin typeface="+mn-lt"/>
+        <a:ea typeface="+mn-ea"/>
+        <a:cs typeface="+mn-cs"/>
+      </a:defRPr>
+    </a:lvl3pPr>
+    <a:lvl4pPr marL="1371600" algn="l" defTabSz="914400" rtl="0" eaLnBrk="1" latinLnBrk="0" hangingPunct="1">
+      <a:defRPr sz="1200" kern="1200">
+        <a:solidFill>
+          <a:schemeClr val="tx1"/>
+        </a:solidFill>
+        <a:latin typeface="+mn-lt"/>
+        <a:ea typeface="+mn-ea"/>
+        <a:cs typeface="+mn-cs"/>
+      </a:defRPr>
+    </a:lvl4pPr>
+    <a:lvl5pPr marL="1828800" algn="l" defTabSz="914400" rtl="0" eaLnBrk="1" latinLnBrk="0" hangingPunct="1">
+      <a:defRPr sz="1200" kern="1200">
+        <a:solidFill>
+          <a:schemeClr val="tx1"/>
+        </a:solidFill>
+        <a:latin typeface="+mn-lt"/>
+        <a:ea typeface="+mn-ea"/>
+        <a:cs typeface="+mn-cs"/>
+      </a:defRPr>
+    </a:lvl5pPr>
+    <a:lvl6pPr marL="2286000" algn="l" defTabSz="914400" rtl="0" eaLnBrk="1" latinLnBrk="0" hangingPunct="1">
+      <a:defRPr sz="1200" kern="1200">
+        <a:solidFill>
+          <a:schemeClr val="tx1"/>
+        </a:solidFill>
+        <a:latin typeface="+mn-lt"/>
+        <a:ea typeface="+mn-ea"/>
+        <a:cs typeface="+mn-cs"/>
+      </a:defRPr>
+    </a:lvl6pPr>
+    <a:lvl7pPr marL="2743200" algn="l" defTabSz="914400" rtl="0" eaLnBrk="1" latinLnBrk="0" hangingPunct="1">
+      <a:defRPr sz="1200" kern="1200">
+        <a:solidFill>
+          <a:schemeClr val="tx1"/>
+        </a:solidFill>
+        <a:latin typeface="+mn-lt"/>
+        <a:ea typeface="+mn-ea"/>
+        <a:cs typeface="+mn-cs"/>
+      </a:defRPr>
+    </a:lvl7pPr>
+    <a:lvl8pPr marL="3200400" algn="l" defTabSz="914400" rtl="0" eaLnBrk="1" latinLnBrk="0" hangingPunct="1">
+      <a:defRPr sz="1200" kern="1200">
+        <a:solidFill>
+          <a:schemeClr val="tx1"/>
+        </a:solidFill>
+        <a:latin typeface="+mn-lt"/>
+        <a:ea typeface="+mn-ea"/>
+        <a:cs typeface="+mn-cs"/>
+      </a:defRPr>
+    </a:lvl8pPr>
+    <a:lvl9pPr marL="3657600" algn="l" defTabSz="914400" rtl="0" eaLnBrk="1" latinLnBrk="0" hangingPunct="1">
+      <a:defRPr sz="1200" kern="1200">
+        <a:solidFill>
+          <a:schemeClr val="tx1"/>
+        </a:solidFill>
+        <a:latin typeface="+mn-lt"/>
+        <a:ea typeface="+mn-ea"/>
+        <a:cs typeface="+mn-cs"/>
+      </a:defRPr>
+    </a:lvl9pPr>
+  </p:notesStyle>
+</p:notesMaster>
+</file>
+
+<file path=ppt/notesSlides/notesSlide1.xml><?xml version="1.0" encoding="utf-8"?>
+<p:notes xmlns:a="http://schemas.openxmlformats.org/drawingml/2006/main" xmlns:r="http://schemas.openxmlformats.org/officeDocument/2006/relationships" xmlns:p="http://schemas.openxmlformats.org/presentationml/2006/main">
+  <p:cSld>
+    <p:spTree>
+      <p:nvGrpSpPr>
+        <p:cNvPr id="1" name=""/>
+        <p:cNvGrpSpPr/>
+        <p:nvPr/>
+      </p:nvGrpSpPr>
+      <p:grpSpPr>
+        <a:xfrm>
+          <a:off x="0" y="0"/>
+          <a:ext cx="0" cy="0"/>
+          <a:chOff x="0" y="0"/>
+          <a:chExt cx="0" cy="0"/>
+        </a:xfrm>
+      </p:grpSpPr>
+      <p:sp>
+        <p:nvSpPr>
+          <p:cNvPr id="2" name="Slide Image Placeholder 1"/>
+          <p:cNvSpPr>
+            <a:spLocks noGrp="1" noRot="1" noChangeAspect="1"/>
+          </p:cNvSpPr>
+          <p:nvPr>
+            <p:ph type="sldImg"/>
+          </p:nvPr>
+        </p:nvSpPr>
+        <p:spPr/>
+      </p:sp>
+      <p:sp>
+        <p:nvSpPr>
+          <p:cNvPr id="3" name="Notes Placeholder 2"/>
+          <p:cNvSpPr>
+            <a:spLocks noGrp="1"/>
+          </p:cNvSpPr>
+          <p:nvPr>
+            <p:ph type="body" idx="1"/>
+          </p:nvPr>
+        </p:nvSpPr>
+        <p:spPr/>
+        <p:txBody>
+          <a:bodyPr/>
+          <a:lstStyle/>
+          <a:p>
+            <a:endParaRPr lang="en-US" dirty="0"/>
+          </a:p>
+        </p:txBody>
+      </p:sp>
+      <p:sp>
+        <p:nvSpPr>
+          <p:cNvPr id="4" name="Slide Number Placeholder 3"/>
+          <p:cNvSpPr>
+            <a:spLocks noGrp="1"/>
+          </p:cNvSpPr>
+          <p:nvPr>
+            <p:ph type="sldNum" sz="quarter" idx="5"/>
+          </p:nvPr>
+        </p:nvSpPr>
+        <p:spPr/>
+        <p:txBody>
+          <a:bodyPr/>
+          <a:lstStyle/>
+          <a:p>
+            <a:fld id="{7332F5B2-8E9E-A043-910C-D623E320FEF5}" type="slidenum">
+              <a:rPr lang="en-US" smtClean="0"/>
+              <a:t>4</a:t>
+            </a:fld>
+            <a:endParaRPr lang="en-US"/>
+          </a:p>
+        </p:txBody>
+      </p:sp>
+    </p:spTree>
+    <p:extLst>
+      <p:ext uri="{BB962C8B-B14F-4D97-AF65-F5344CB8AC3E}">
+        <p14:creationId xmlns:p14="http://schemas.microsoft.com/office/powerpoint/2010/main" val="2023858777"/>
+      </p:ext>
+    </p:extLst>
+  </p:cSld>
+  <p:clrMapOvr>
+    <a:masterClrMapping/>
+  </p:clrMapOvr>
+</p:notes>
 </file>
 
 <file path=ppt/slideLayouts/slideLayout1.xml><?xml version="1.0" encoding="utf-8"?>
@@ -261,7 +4091,7 @@
           <a:p>
             <a:fld id="{D1D1EADE-8E88-4C7C-8AC5-FB148DE4940E}" type="datetime1">
               <a:rPr lang="en-US" smtClean="0"/>
-              <a:t>3/25/26</a:t>
+              <a:t>4/1/26</a:t>
             </a:fld>
             <a:endParaRPr lang="en-US"/>
           </a:p>
@@ -461,7 +4291,7 @@
           <a:p>
             <a:fld id="{EC3C8B9C-477D-492A-96AD-1FC2CC997A73}" type="datetime1">
               <a:rPr lang="en-US" smtClean="0"/>
-              <a:t>3/25/26</a:t>
+              <a:t>4/1/26</a:t>
             </a:fld>
             <a:endParaRPr lang="en-US"/>
           </a:p>
@@ -671,7 +4501,7 @@
           <a:p>
             <a:fld id="{42D3AED5-E26D-4E29-B1B3-7847B6779594}" type="datetime1">
               <a:rPr lang="en-US" smtClean="0"/>
-              <a:t>3/25/26</a:t>
+              <a:t>4/1/26</a:t>
             </a:fld>
             <a:endParaRPr lang="en-US"/>
           </a:p>
@@ -871,7 +4701,7 @@
           <a:p>
             <a:fld id="{157B6794-849E-4626-908B-D15793550EFB}" type="datetime1">
               <a:rPr lang="en-US" smtClean="0"/>
-              <a:t>3/25/26</a:t>
+              <a:t>4/1/26</a:t>
             </a:fld>
             <a:endParaRPr lang="en-US"/>
           </a:p>
@@ -1147,7 +4977,7 @@
           <a:p>
             <a:fld id="{63DB64E7-5594-42A3-ADBF-E95A7ACEAD64}" type="datetime1">
               <a:rPr lang="en-US" smtClean="0"/>
-              <a:t>3/25/26</a:t>
+              <a:t>4/1/26</a:t>
             </a:fld>
             <a:endParaRPr lang="en-US"/>
           </a:p>
@@ -1420,7 +5250,7 @@
           <a:p>
             <a:fld id="{18462B0B-D248-4FFB-8695-AD7FA4B1284A}" type="datetime1">
               <a:rPr lang="en-US" smtClean="0"/>
-              <a:t>3/25/26</a:t>
+              <a:t>4/1/26</a:t>
             </a:fld>
             <a:endParaRPr lang="en-US"/>
           </a:p>
@@ -1843,7 +5673,7 @@
           <a:p>
             <a:fld id="{D0378EFB-9159-4510-B73F-4F0409ADE937}" type="datetime1">
               <a:rPr lang="en-US" smtClean="0"/>
-              <a:t>3/25/26</a:t>
+              <a:t>4/1/26</a:t>
             </a:fld>
             <a:endParaRPr lang="en-US"/>
           </a:p>
@@ -1985,7 +5815,7 @@
           <a:p>
             <a:fld id="{89BC9412-2452-4BED-A324-9D8C115361AD}" type="datetime1">
               <a:rPr lang="en-US" smtClean="0"/>
-              <a:t>3/25/26</a:t>
+              <a:t>4/1/26</a:t>
             </a:fld>
             <a:endParaRPr lang="en-US"/>
           </a:p>
@@ -2098,7 +5928,7 @@
           <a:p>
             <a:fld id="{F5318F62-D251-40E8-A23C-F4CFE9FEAB41}" type="datetime1">
               <a:rPr lang="en-US" smtClean="0"/>
-              <a:t>3/25/26</a:t>
+              <a:t>4/1/26</a:t>
             </a:fld>
             <a:endParaRPr lang="en-US"/>
           </a:p>
@@ -2411,7 +6241,7 @@
           <a:p>
             <a:fld id="{44F76144-149E-4874-93A5-554A0357CF82}" type="datetime1">
               <a:rPr lang="en-US" smtClean="0"/>
-              <a:t>3/25/26</a:t>
+              <a:t>4/1/26</a:t>
             </a:fld>
             <a:endParaRPr lang="en-US"/>
           </a:p>
@@ -2704,7 +6534,7 @@
           <a:p>
             <a:fld id="{50BA65D8-0540-4835-AE5C-25D29DBA01BE}" type="datetime1">
               <a:rPr lang="en-US" smtClean="0"/>
-              <a:t>3/25/26</a:t>
+              <a:t>4/1/26</a:t>
             </a:fld>
             <a:endParaRPr lang="en-US"/>
           </a:p>
@@ -2946,7 +6776,7 @@
           <a:p>
             <a:fld id="{E31BA835-12AC-4E8F-955A-EA3F4DE2791F}" type="datetime1">
               <a:rPr lang="en-US" smtClean="0"/>
-              <a:t>3/25/26</a:t>
+              <a:t>4/1/26</a:t>
             </a:fld>
             <a:endParaRPr lang="en-US"/>
           </a:p>
@@ -3824,6 +7654,14 @@
 <file path=ppt/slides/slide2.xml><?xml version="1.0" encoding="utf-8"?>
 <p:sld xmlns:a="http://schemas.openxmlformats.org/drawingml/2006/main" xmlns:r="http://schemas.openxmlformats.org/officeDocument/2006/relationships" xmlns:p="http://schemas.openxmlformats.org/presentationml/2006/main">
   <p:cSld>
+    <p:bg>
+      <p:bgPr>
+        <a:solidFill>
+          <a:schemeClr val="bg1"/>
+        </a:solidFill>
+        <a:effectLst/>
+      </p:bgPr>
+    </p:bg>
     <p:spTree>
       <p:nvGrpSpPr>
         <p:cNvPr id="1" name=""/>
@@ -3838,6 +7676,82 @@
           <a:chExt cx="0" cy="0"/>
         </a:xfrm>
       </p:grpSpPr>
+      <p:sp useBgFill="1">
+        <p:nvSpPr>
+          <p:cNvPr id="9" name="Rectangle 8">
+            <a:extLst>
+              <a:ext uri="{FF2B5EF4-FFF2-40B4-BE49-F238E27FC236}">
+                <a16:creationId xmlns:a16="http://schemas.microsoft.com/office/drawing/2014/main" id="{F68B2C62-7648-4430-90D5-AE0F252AF113}"/>
+              </a:ext>
+              <a:ext uri="{C183D7F6-B498-43B3-948B-1728B52AA6E4}">
+                <adec:decorative xmlns:adec="http://schemas.microsoft.com/office/drawing/2017/decorative" val="1"/>
+              </a:ext>
+            </a:extLst>
+          </p:cNvPr>
+          <p:cNvSpPr>
+            <a:spLocks noGrp="1" noRot="1" noChangeAspect="1" noMove="1" noResize="1" noEditPoints="1" noAdjustHandles="1" noChangeArrowheads="1" noChangeShapeType="1" noTextEdit="1"/>
+          </p:cNvSpPr>
+          <p:nvPr>
+            <p:extLst>
+              <p:ext uri="{386F3935-93C4-4BCD-93E2-E3B085C9AB24}">
+                <p16:designElem xmlns:p16="http://schemas.microsoft.com/office/powerpoint/2015/main" val="1"/>
+              </p:ext>
+            </p:extLst>
+          </p:nvPr>
+        </p:nvSpPr>
+        <p:spPr>
+          <a:xfrm>
+            <a:off x="0" y="0"/>
+            <a:ext cx="12192000" cy="6858000"/>
+          </a:xfrm>
+          <a:prstGeom prst="rect">
+            <a:avLst/>
+          </a:prstGeom>
+          <a:ln w="12700" cap="flat" cmpd="sng" algn="ctr">
+            <a:noFill/>
+            <a:prstDash val="solid"/>
+            <a:miter lim="800000"/>
+          </a:ln>
+          <a:effectLst/>
+          <a:extLst>
+            <a:ext uri="{91240B29-F687-4F45-9708-019B960494DF}">
+              <a14:hiddenLine xmlns:a14="http://schemas.microsoft.com/office/drawing/2010/main" w="12700" cap="flat" cmpd="sng" algn="ctr">
+                <a:solidFill>
+                  <a:schemeClr val="accent1">
+                    <a:shade val="50000"/>
+                  </a:schemeClr>
+                </a:solidFill>
+                <a:prstDash val="solid"/>
+                <a:miter lim="800000"/>
+              </a14:hiddenLine>
+            </a:ext>
+          </a:extLst>
+        </p:spPr>
+        <p:style>
+          <a:lnRef idx="2">
+            <a:schemeClr val="accent1">
+              <a:shade val="50000"/>
+            </a:schemeClr>
+          </a:lnRef>
+          <a:fillRef idx="1">
+            <a:schemeClr val="accent1"/>
+          </a:fillRef>
+          <a:effectRef idx="0">
+            <a:schemeClr val="accent1"/>
+          </a:effectRef>
+          <a:fontRef idx="minor">
+            <a:schemeClr val="lt1"/>
+          </a:fontRef>
+        </p:style>
+        <p:txBody>
+          <a:bodyPr rtlCol="0" anchor="ctr"/>
+          <a:lstStyle/>
+          <a:p>
+            <a:pPr algn="ctr"/>
+            <a:endParaRPr lang="en-US"/>
+          </a:p>
+        </p:txBody>
+      </p:sp>
       <p:sp>
         <p:nvSpPr>
           <p:cNvPr id="2" name="Title 1">
@@ -3854,21 +7768,406 @@
             <p:ph type="title"/>
           </p:nvPr>
         </p:nvSpPr>
-        <p:spPr/>
+        <p:spPr>
+          <a:xfrm>
+            <a:off x="700087" y="909638"/>
+            <a:ext cx="10691813" cy="1155618"/>
+          </a:xfrm>
+        </p:spPr>
         <p:txBody>
-          <a:bodyPr/>
+          <a:bodyPr>
+            <a:normAutofit/>
+          </a:bodyPr>
           <a:lstStyle/>
           <a:p>
+            <a:r>
+              <a:rPr lang="en-US" dirty="0"/>
+              <a:t>Outline</a:t>
+            </a:r>
+          </a:p>
+        </p:txBody>
+      </p:sp>
+      <p:cxnSp>
+        <p:nvCxnSpPr>
+          <p:cNvPr id="11" name="Straight Connector 10">
+            <a:extLst>
+              <a:ext uri="{FF2B5EF4-FFF2-40B4-BE49-F238E27FC236}">
+                <a16:creationId xmlns:a16="http://schemas.microsoft.com/office/drawing/2014/main" id="{AAD0195E-7F27-4D06-9427-0C121D721A14}"/>
+              </a:ext>
+              <a:ext uri="{C183D7F6-B498-43B3-948B-1728B52AA6E4}">
+                <adec:decorative xmlns:adec="http://schemas.microsoft.com/office/drawing/2017/decorative" val="1"/>
+              </a:ext>
+            </a:extLst>
+          </p:cNvPr>
+          <p:cNvCxnSpPr>
+            <a:cxnSpLocks noGrp="1" noRot="1" noChangeAspect="1" noMove="1" noResize="1" noEditPoints="1" noAdjustHandles="1" noChangeArrowheads="1" noChangeShapeType="1"/>
+          </p:cNvCxnSpPr>
+          <p:nvPr>
+            <p:extLst>
+              <p:ext uri="{386F3935-93C4-4BCD-93E2-E3B085C9AB24}">
+                <p16:designElem xmlns:p16="http://schemas.microsoft.com/office/powerpoint/2015/main" val="1"/>
+              </p:ext>
+            </p:extLst>
+          </p:nvPr>
+        </p:nvCxnSpPr>
+        <p:spPr>
+          <a:xfrm>
+            <a:off x="800100" y="723900"/>
+            <a:ext cx="10591800" cy="0"/>
+          </a:xfrm>
+          <a:prstGeom prst="line">
+            <a:avLst/>
+          </a:prstGeom>
+          <a:ln w="44450">
+            <a:solidFill>
+              <a:schemeClr val="tx1"/>
+            </a:solidFill>
+          </a:ln>
+        </p:spPr>
+        <p:style>
+          <a:lnRef idx="1">
+            <a:schemeClr val="accent1"/>
+          </a:lnRef>
+          <a:fillRef idx="0">
+            <a:schemeClr val="accent1"/>
+          </a:fillRef>
+          <a:effectRef idx="0">
+            <a:schemeClr val="accent1"/>
+          </a:effectRef>
+          <a:fontRef idx="minor">
+            <a:schemeClr val="tx1"/>
+          </a:fontRef>
+        </p:style>
+      </p:cxnSp>
+      <p:cxnSp>
+        <p:nvCxnSpPr>
+          <p:cNvPr id="13" name="Straight Connector 12">
+            <a:extLst>
+              <a:ext uri="{FF2B5EF4-FFF2-40B4-BE49-F238E27FC236}">
+                <a16:creationId xmlns:a16="http://schemas.microsoft.com/office/drawing/2014/main" id="{9D74C2FC-3228-4FC1-B97B-87AD35508D91}"/>
+              </a:ext>
+              <a:ext uri="{C183D7F6-B498-43B3-948B-1728B52AA6E4}">
+                <adec:decorative xmlns:adec="http://schemas.microsoft.com/office/drawing/2017/decorative" val="1"/>
+              </a:ext>
+            </a:extLst>
+          </p:cNvPr>
+          <p:cNvCxnSpPr>
+            <a:cxnSpLocks noGrp="1" noRot="1" noChangeAspect="1" noMove="1" noResize="1" noEditPoints="1" noAdjustHandles="1" noChangeArrowheads="1" noChangeShapeType="1"/>
+          </p:cNvCxnSpPr>
+          <p:nvPr>
+            <p:extLst>
+              <p:ext uri="{386F3935-93C4-4BCD-93E2-E3B085C9AB24}">
+                <p16:designElem xmlns:p16="http://schemas.microsoft.com/office/powerpoint/2015/main" val="1"/>
+              </p:ext>
+            </p:extLst>
+          </p:nvPr>
+        </p:nvCxnSpPr>
+        <p:spPr>
+          <a:xfrm>
+            <a:off x="800100" y="6142781"/>
+            <a:ext cx="10591800" cy="0"/>
+          </a:xfrm>
+          <a:prstGeom prst="line">
+            <a:avLst/>
+          </a:prstGeom>
+          <a:ln w="12700">
+            <a:solidFill>
+              <a:schemeClr val="tx1"/>
+            </a:solidFill>
+          </a:ln>
+        </p:spPr>
+        <p:style>
+          <a:lnRef idx="1">
+            <a:schemeClr val="accent1"/>
+          </a:lnRef>
+          <a:fillRef idx="0">
+            <a:schemeClr val="accent1"/>
+          </a:fillRef>
+          <a:effectRef idx="0">
+            <a:schemeClr val="accent1"/>
+          </a:effectRef>
+          <a:fontRef idx="minor">
+            <a:schemeClr val="tx1"/>
+          </a:fontRef>
+        </p:style>
+      </p:cxnSp>
+      <p:graphicFrame>
+        <p:nvGraphicFramePr>
+          <p:cNvPr id="5" name="Content Placeholder 2">
+            <a:extLst>
+              <a:ext uri="{FF2B5EF4-FFF2-40B4-BE49-F238E27FC236}">
+                <a16:creationId xmlns:a16="http://schemas.microsoft.com/office/drawing/2014/main" id="{EBE66955-A8B7-B0B1-56F3-79EF1233B771}"/>
+              </a:ext>
+            </a:extLst>
+          </p:cNvPr>
+          <p:cNvGraphicFramePr>
+            <a:graphicFrameLocks noGrp="1"/>
+          </p:cNvGraphicFramePr>
+          <p:nvPr>
+            <p:ph idx="1"/>
+            <p:extLst>
+              <p:ext uri="{D42A27DB-BD31-4B8C-83A1-F6EECF244321}">
+                <p14:modId xmlns:p14="http://schemas.microsoft.com/office/powerpoint/2010/main" val="568538646"/>
+              </p:ext>
+            </p:extLst>
+          </p:nvPr>
+        </p:nvGraphicFramePr>
+        <p:xfrm>
+          <a:off x="700088" y="2222500"/>
+          <a:ext cx="10691812" cy="3740150"/>
+        </p:xfrm>
+        <a:graphic>
+          <a:graphicData uri="http://schemas.openxmlformats.org/drawingml/2006/diagram">
+            <dgm:relIds xmlns:dgm="http://schemas.openxmlformats.org/drawingml/2006/diagram" xmlns:r="http://schemas.openxmlformats.org/officeDocument/2006/relationships" r:dm="rId2" r:lo="rId3" r:qs="rId4" r:cs="rId5"/>
+          </a:graphicData>
+        </a:graphic>
+      </p:graphicFrame>
+    </p:spTree>
+    <p:extLst>
+      <p:ext uri="{BB962C8B-B14F-4D97-AF65-F5344CB8AC3E}">
+        <p14:creationId xmlns:p14="http://schemas.microsoft.com/office/powerpoint/2010/main" val="422132486"/>
+      </p:ext>
+    </p:extLst>
+  </p:cSld>
+  <p:clrMapOvr>
+    <a:masterClrMapping/>
+  </p:clrMapOvr>
+</p:sld>
+</file>
+
+<file path=ppt/slides/slide3.xml><?xml version="1.0" encoding="utf-8"?>
+<p:sld xmlns:a="http://schemas.openxmlformats.org/drawingml/2006/main" xmlns:r="http://schemas.openxmlformats.org/officeDocument/2006/relationships" xmlns:p="http://schemas.openxmlformats.org/presentationml/2006/main">
+  <p:cSld>
+    <p:bg>
+      <p:bgPr>
+        <a:solidFill>
+          <a:schemeClr val="bg1"/>
+        </a:solidFill>
+        <a:effectLst/>
+      </p:bgPr>
+    </p:bg>
+    <p:spTree>
+      <p:nvGrpSpPr>
+        <p:cNvPr id="1" name=""/>
+        <p:cNvGrpSpPr/>
+        <p:nvPr/>
+      </p:nvGrpSpPr>
+      <p:grpSpPr>
+        <a:xfrm>
+          <a:off x="0" y="0"/>
+          <a:ext cx="0" cy="0"/>
+          <a:chOff x="0" y="0"/>
+          <a:chExt cx="0" cy="0"/>
+        </a:xfrm>
+      </p:grpSpPr>
+      <p:sp useBgFill="1">
+        <p:nvSpPr>
+          <p:cNvPr id="24" name="Rectangle 23">
+            <a:extLst>
+              <a:ext uri="{FF2B5EF4-FFF2-40B4-BE49-F238E27FC236}">
+                <a16:creationId xmlns:a16="http://schemas.microsoft.com/office/drawing/2014/main" id="{E49D7415-2F11-44C2-B6AA-13A25B6814B9}"/>
+              </a:ext>
+              <a:ext uri="{C183D7F6-B498-43B3-948B-1728B52AA6E4}">
+                <adec:decorative xmlns:adec="http://schemas.microsoft.com/office/drawing/2017/decorative" val="1"/>
+              </a:ext>
+            </a:extLst>
+          </p:cNvPr>
+          <p:cNvSpPr>
+            <a:spLocks noGrp="1" noRot="1" noChangeAspect="1" noMove="1" noResize="1" noEditPoints="1" noAdjustHandles="1" noChangeArrowheads="1" noChangeShapeType="1" noTextEdit="1"/>
+          </p:cNvSpPr>
+          <p:nvPr>
+            <p:extLst>
+              <p:ext uri="{386F3935-93C4-4BCD-93E2-E3B085C9AB24}">
+                <p16:designElem xmlns:p16="http://schemas.microsoft.com/office/powerpoint/2015/main" val="1"/>
+              </p:ext>
+            </p:extLst>
+          </p:nvPr>
+        </p:nvSpPr>
+        <p:spPr>
+          <a:xfrm>
+            <a:off x="0" y="0"/>
+            <a:ext cx="12192000" cy="6858000"/>
+          </a:xfrm>
+          <a:prstGeom prst="rect">
+            <a:avLst/>
+          </a:prstGeom>
+          <a:ln w="12700" cap="flat" cmpd="sng" algn="ctr">
+            <a:noFill/>
+            <a:prstDash val="solid"/>
+            <a:miter lim="800000"/>
+          </a:ln>
+          <a:effectLst/>
+          <a:extLst>
+            <a:ext uri="{91240B29-F687-4F45-9708-019B960494DF}">
+              <a14:hiddenLine xmlns:a14="http://schemas.microsoft.com/office/drawing/2010/main" w="12700" cap="flat" cmpd="sng" algn="ctr">
+                <a:solidFill>
+                  <a:schemeClr val="accent1">
+                    <a:shade val="50000"/>
+                  </a:schemeClr>
+                </a:solidFill>
+                <a:prstDash val="solid"/>
+                <a:miter lim="800000"/>
+              </a14:hiddenLine>
+            </a:ext>
+          </a:extLst>
+        </p:spPr>
+        <p:style>
+          <a:lnRef idx="2">
+            <a:schemeClr val="accent1">
+              <a:shade val="50000"/>
+            </a:schemeClr>
+          </a:lnRef>
+          <a:fillRef idx="1">
+            <a:schemeClr val="accent1"/>
+          </a:fillRef>
+          <a:effectRef idx="0">
+            <a:schemeClr val="accent1"/>
+          </a:effectRef>
+          <a:fontRef idx="minor">
+            <a:schemeClr val="lt1"/>
+          </a:fontRef>
+        </p:style>
+        <p:txBody>
+          <a:bodyPr rtlCol="0" anchor="ctr"/>
+          <a:lstStyle/>
+          <a:p>
+            <a:pPr algn="ctr"/>
             <a:endParaRPr lang="en-US"/>
           </a:p>
         </p:txBody>
       </p:sp>
       <p:sp>
         <p:nvSpPr>
-          <p:cNvPr id="3" name="Content Placeholder 2">
+          <p:cNvPr id="2" name="Title 1">
             <a:extLst>
               <a:ext uri="{FF2B5EF4-FFF2-40B4-BE49-F238E27FC236}">
-                <a16:creationId xmlns:a16="http://schemas.microsoft.com/office/drawing/2014/main" id="{1A4D93EB-6F8A-8730-CEA1-CA387EC39812}"/>
+                <a16:creationId xmlns:a16="http://schemas.microsoft.com/office/drawing/2014/main" id="{146D98B9-1A16-30CF-9960-E943BE1D9AC8}"/>
+              </a:ext>
+            </a:extLst>
+          </p:cNvPr>
+          <p:cNvSpPr>
+            <a:spLocks noGrp="1"/>
+          </p:cNvSpPr>
+          <p:nvPr>
+            <p:ph type="title"/>
+          </p:nvPr>
+        </p:nvSpPr>
+        <p:spPr>
+          <a:xfrm>
+            <a:off x="704088" y="914400"/>
+            <a:ext cx="10687812" cy="798194"/>
+          </a:xfrm>
+        </p:spPr>
+        <p:txBody>
+          <a:bodyPr>
+            <a:normAutofit/>
+          </a:bodyPr>
+          <a:lstStyle/>
+          <a:p>
+            <a:r>
+              <a:rPr lang="en-US" dirty="0"/>
+              <a:t>Introduction – Outline</a:t>
+            </a:r>
+          </a:p>
+        </p:txBody>
+      </p:sp>
+      <p:cxnSp>
+        <p:nvCxnSpPr>
+          <p:cNvPr id="26" name="Straight Connector 25">
+            <a:extLst>
+              <a:ext uri="{FF2B5EF4-FFF2-40B4-BE49-F238E27FC236}">
+                <a16:creationId xmlns:a16="http://schemas.microsoft.com/office/drawing/2014/main" id="{D2E57F3D-33BE-4306-87E6-245763719516}"/>
+              </a:ext>
+              <a:ext uri="{C183D7F6-B498-43B3-948B-1728B52AA6E4}">
+                <adec:decorative xmlns:adec="http://schemas.microsoft.com/office/drawing/2017/decorative" val="1"/>
+              </a:ext>
+            </a:extLst>
+          </p:cNvPr>
+          <p:cNvCxnSpPr>
+            <a:cxnSpLocks noGrp="1" noRot="1" noChangeAspect="1" noMove="1" noResize="1" noEditPoints="1" noAdjustHandles="1" noChangeArrowheads="1" noChangeShapeType="1"/>
+          </p:cNvCxnSpPr>
+          <p:nvPr>
+            <p:extLst>
+              <p:ext uri="{386F3935-93C4-4BCD-93E2-E3B085C9AB24}">
+                <p16:designElem xmlns:p16="http://schemas.microsoft.com/office/powerpoint/2015/main" val="1"/>
+              </p:ext>
+            </p:extLst>
+          </p:nvPr>
+        </p:nvCxnSpPr>
+        <p:spPr>
+          <a:xfrm>
+            <a:off x="804672" y="723900"/>
+            <a:ext cx="10588752" cy="0"/>
+          </a:xfrm>
+          <a:prstGeom prst="line">
+            <a:avLst/>
+          </a:prstGeom>
+          <a:ln w="44450">
+            <a:solidFill>
+              <a:schemeClr val="tx1"/>
+            </a:solidFill>
+          </a:ln>
+        </p:spPr>
+        <p:style>
+          <a:lnRef idx="1">
+            <a:schemeClr val="accent1"/>
+          </a:lnRef>
+          <a:fillRef idx="0">
+            <a:schemeClr val="accent1"/>
+          </a:fillRef>
+          <a:effectRef idx="0">
+            <a:schemeClr val="accent1"/>
+          </a:effectRef>
+          <a:fontRef idx="minor">
+            <a:schemeClr val="tx1"/>
+          </a:fontRef>
+        </p:style>
+      </p:cxnSp>
+      <p:pic>
+        <p:nvPicPr>
+          <p:cNvPr id="18" name="Graphic 17" descr="Magnifying glass">
+            <a:extLst>
+              <a:ext uri="{FF2B5EF4-FFF2-40B4-BE49-F238E27FC236}">
+                <a16:creationId xmlns:a16="http://schemas.microsoft.com/office/drawing/2014/main" id="{731A55FF-5C2E-9E12-0AD3-2B4BA4335227}"/>
+              </a:ext>
+            </a:extLst>
+          </p:cNvPr>
+          <p:cNvPicPr>
+            <a:picLocks noChangeAspect="1"/>
+          </p:cNvPicPr>
+          <p:nvPr/>
+        </p:nvPicPr>
+        <p:blipFill>
+          <a:blip>
+            <a:extLst>
+              <a:ext uri="{28A0092B-C50C-407E-A947-70E740481C1C}">
+                <a14:useLocalDpi xmlns:a14="http://schemas.microsoft.com/office/drawing/2010/main" val="0"/>
+              </a:ext>
+              <a:ext uri="{96DAC541-7B7A-43D3-8B79-37D633B846F1}">
+                <asvg:svgBlip xmlns:asvg="http://schemas.microsoft.com/office/drawing/2016/SVG/main" r:embed="rId2"/>
+              </a:ext>
+            </a:extLst>
+          </a:blip>
+          <a:stretch>
+            <a:fillRect/>
+          </a:stretch>
+        </p:blipFill>
+        <p:spPr>
+          <a:xfrm>
+            <a:off x="1766381" y="1869439"/>
+            <a:ext cx="4139625" cy="4139625"/>
+          </a:xfrm>
+          <a:prstGeom prst="rect">
+            <a:avLst/>
+          </a:prstGeom>
+        </p:spPr>
+      </p:pic>
+      <p:sp>
+        <p:nvSpPr>
+          <p:cNvPr id="23" name="Content Placeholder 2">
+            <a:extLst>
+              <a:ext uri="{FF2B5EF4-FFF2-40B4-BE49-F238E27FC236}">
+                <a16:creationId xmlns:a16="http://schemas.microsoft.com/office/drawing/2014/main" id="{EEA7A7DF-3A39-BF71-9A49-069E4E06B922}"/>
               </a:ext>
             </a:extLst>
           </p:cNvPr>
@@ -3879,19 +8178,458 @@
             <p:ph idx="1"/>
           </p:nvPr>
         </p:nvSpPr>
-        <p:spPr/>
+        <p:spPr>
+          <a:xfrm>
+            <a:off x="7200900" y="1849121"/>
+            <a:ext cx="4191001" cy="4139626"/>
+          </a:xfrm>
+        </p:spPr>
         <p:txBody>
-          <a:bodyPr/>
+          <a:bodyPr anchor="b">
+            <a:normAutofit/>
+          </a:bodyPr>
           <a:lstStyle/>
           <a:p>
-            <a:endParaRPr lang="en-US"/>
+            <a:pPr algn="just"/>
+            <a:r>
+              <a:rPr lang="en-US" dirty="0"/>
+              <a:t>Visual search problems.</a:t>
+            </a:r>
+          </a:p>
+          <a:p>
+            <a:pPr algn="just"/>
+            <a:r>
+              <a:rPr lang="en-US" dirty="0"/>
+              <a:t>The current model is limited to the context image and neglects the target image.</a:t>
+            </a:r>
+          </a:p>
+          <a:p>
+            <a:pPr algn="just"/>
+            <a:r>
+              <a:rPr lang="en-US" dirty="0"/>
+              <a:t>Recognition task-based rather than an attention-map-based model.</a:t>
+            </a:r>
+          </a:p>
+          <a:p>
+            <a:endParaRPr lang="en-US" dirty="0"/>
+          </a:p>
+          <a:p>
+            <a:pPr marL="0" indent="0" algn="just">
+              <a:buNone/>
+            </a:pPr>
+            <a:r>
+              <a:rPr lang="en-US" dirty="0"/>
+              <a:t>=&gt; Propose a new attention-map-based visual search model mimicking human search </a:t>
+            </a:r>
+            <a:r>
+              <a:rPr lang="en-US" dirty="0" err="1"/>
+              <a:t>behaviour</a:t>
+            </a:r>
+            <a:endParaRPr lang="en-US" dirty="0"/>
           </a:p>
         </p:txBody>
       </p:sp>
+      <p:cxnSp>
+        <p:nvCxnSpPr>
+          <p:cNvPr id="28" name="Straight Connector 27">
+            <a:extLst>
+              <a:ext uri="{FF2B5EF4-FFF2-40B4-BE49-F238E27FC236}">
+                <a16:creationId xmlns:a16="http://schemas.microsoft.com/office/drawing/2014/main" id="{8E0104E4-99BC-494F-8342-F250828E574F}"/>
+              </a:ext>
+              <a:ext uri="{C183D7F6-B498-43B3-948B-1728B52AA6E4}">
+                <adec:decorative xmlns:adec="http://schemas.microsoft.com/office/drawing/2017/decorative" val="1"/>
+              </a:ext>
+            </a:extLst>
+          </p:cNvPr>
+          <p:cNvCxnSpPr>
+            <a:cxnSpLocks noGrp="1" noRot="1" noChangeAspect="1" noMove="1" noResize="1" noEditPoints="1" noAdjustHandles="1" noChangeArrowheads="1" noChangeShapeType="1"/>
+          </p:cNvCxnSpPr>
+          <p:nvPr>
+            <p:extLst>
+              <p:ext uri="{386F3935-93C4-4BCD-93E2-E3B085C9AB24}">
+                <p16:designElem xmlns:p16="http://schemas.microsoft.com/office/powerpoint/2015/main" val="1"/>
+              </p:ext>
+            </p:extLst>
+          </p:nvPr>
+        </p:nvCxnSpPr>
+        <p:spPr>
+          <a:xfrm>
+            <a:off x="809065" y="6145599"/>
+            <a:ext cx="10582835" cy="0"/>
+          </a:xfrm>
+          <a:prstGeom prst="line">
+            <a:avLst/>
+          </a:prstGeom>
+          <a:ln w="12700">
+            <a:solidFill>
+              <a:schemeClr val="tx1"/>
+            </a:solidFill>
+          </a:ln>
+        </p:spPr>
+        <p:style>
+          <a:lnRef idx="1">
+            <a:schemeClr val="accent1"/>
+          </a:lnRef>
+          <a:fillRef idx="0">
+            <a:schemeClr val="accent1"/>
+          </a:fillRef>
+          <a:effectRef idx="0">
+            <a:schemeClr val="accent1"/>
+          </a:effectRef>
+          <a:fontRef idx="minor">
+            <a:schemeClr val="tx1"/>
+          </a:fontRef>
+        </p:style>
+      </p:cxnSp>
     </p:spTree>
     <p:extLst>
       <p:ext uri="{BB962C8B-B14F-4D97-AF65-F5344CB8AC3E}">
-        <p14:creationId xmlns:p14="http://schemas.microsoft.com/office/powerpoint/2010/main" val="422132486"/>
+        <p14:creationId xmlns:p14="http://schemas.microsoft.com/office/powerpoint/2010/main" val="1173481380"/>
+      </p:ext>
+    </p:extLst>
+  </p:cSld>
+  <p:clrMapOvr>
+    <a:masterClrMapping/>
+  </p:clrMapOvr>
+</p:sld>
+</file>
+
+<file path=ppt/slides/slide4.xml><?xml version="1.0" encoding="utf-8"?>
+<p:sld xmlns:a="http://schemas.openxmlformats.org/drawingml/2006/main" xmlns:r="http://schemas.openxmlformats.org/officeDocument/2006/relationships" xmlns:p="http://schemas.openxmlformats.org/presentationml/2006/main">
+  <p:cSld>
+    <p:bg>
+      <p:bgPr>
+        <a:solidFill>
+          <a:schemeClr val="bg1"/>
+        </a:solidFill>
+        <a:effectLst/>
+      </p:bgPr>
+    </p:bg>
+    <p:spTree>
+      <p:nvGrpSpPr>
+        <p:cNvPr id="1" name=""/>
+        <p:cNvGrpSpPr/>
+        <p:nvPr/>
+      </p:nvGrpSpPr>
+      <p:grpSpPr>
+        <a:xfrm>
+          <a:off x="0" y="0"/>
+          <a:ext cx="0" cy="0"/>
+          <a:chOff x="0" y="0"/>
+          <a:chExt cx="0" cy="0"/>
+        </a:xfrm>
+      </p:grpSpPr>
+      <p:sp useBgFill="1">
+        <p:nvSpPr>
+          <p:cNvPr id="10" name="Rectangle 9">
+            <a:extLst>
+              <a:ext uri="{FF2B5EF4-FFF2-40B4-BE49-F238E27FC236}">
+                <a16:creationId xmlns:a16="http://schemas.microsoft.com/office/drawing/2014/main" id="{E49D7415-2F11-44C2-B6AA-13A25B6814B9}"/>
+              </a:ext>
+              <a:ext uri="{C183D7F6-B498-43B3-948B-1728B52AA6E4}">
+                <adec:decorative xmlns:adec="http://schemas.microsoft.com/office/drawing/2017/decorative" val="1"/>
+              </a:ext>
+            </a:extLst>
+          </p:cNvPr>
+          <p:cNvSpPr>
+            <a:spLocks noGrp="1" noRot="1" noChangeAspect="1" noMove="1" noResize="1" noEditPoints="1" noAdjustHandles="1" noChangeArrowheads="1" noChangeShapeType="1" noTextEdit="1"/>
+          </p:cNvSpPr>
+          <p:nvPr>
+            <p:extLst>
+              <p:ext uri="{386F3935-93C4-4BCD-93E2-E3B085C9AB24}">
+                <p16:designElem xmlns:p16="http://schemas.microsoft.com/office/powerpoint/2015/main" val="1"/>
+              </p:ext>
+            </p:extLst>
+          </p:nvPr>
+        </p:nvSpPr>
+        <p:spPr>
+          <a:xfrm>
+            <a:off x="0" y="0"/>
+            <a:ext cx="12192000" cy="6858000"/>
+          </a:xfrm>
+          <a:prstGeom prst="rect">
+            <a:avLst/>
+          </a:prstGeom>
+          <a:ln w="12700" cap="flat" cmpd="sng" algn="ctr">
+            <a:noFill/>
+            <a:prstDash val="solid"/>
+            <a:miter lim="800000"/>
+          </a:ln>
+          <a:effectLst/>
+          <a:extLst>
+            <a:ext uri="{91240B29-F687-4F45-9708-019B960494DF}">
+              <a14:hiddenLine xmlns:a14="http://schemas.microsoft.com/office/drawing/2010/main" w="12700" cap="flat" cmpd="sng" algn="ctr">
+                <a:solidFill>
+                  <a:schemeClr val="accent1">
+                    <a:shade val="50000"/>
+                  </a:schemeClr>
+                </a:solidFill>
+                <a:prstDash val="solid"/>
+                <a:miter lim="800000"/>
+              </a14:hiddenLine>
+            </a:ext>
+          </a:extLst>
+        </p:spPr>
+        <p:style>
+          <a:lnRef idx="2">
+            <a:schemeClr val="accent1">
+              <a:shade val="50000"/>
+            </a:schemeClr>
+          </a:lnRef>
+          <a:fillRef idx="1">
+            <a:schemeClr val="accent1"/>
+          </a:fillRef>
+          <a:effectRef idx="0">
+            <a:schemeClr val="accent1"/>
+          </a:effectRef>
+          <a:fontRef idx="minor">
+            <a:schemeClr val="lt1"/>
+          </a:fontRef>
+        </p:style>
+        <p:txBody>
+          <a:bodyPr rtlCol="0" anchor="ctr"/>
+          <a:lstStyle/>
+          <a:p>
+            <a:pPr algn="ctr"/>
+            <a:endParaRPr lang="en-US"/>
+          </a:p>
+        </p:txBody>
+      </p:sp>
+      <p:sp>
+        <p:nvSpPr>
+          <p:cNvPr id="2" name="Title 1">
+            <a:extLst>
+              <a:ext uri="{FF2B5EF4-FFF2-40B4-BE49-F238E27FC236}">
+                <a16:creationId xmlns:a16="http://schemas.microsoft.com/office/drawing/2014/main" id="{7BAE86DC-9DE3-59F0-64C0-A9E00547EF52}"/>
+              </a:ext>
+            </a:extLst>
+          </p:cNvPr>
+          <p:cNvSpPr>
+            <a:spLocks noGrp="1"/>
+          </p:cNvSpPr>
+          <p:nvPr>
+            <p:ph type="title"/>
+          </p:nvPr>
+        </p:nvSpPr>
+        <p:spPr>
+          <a:xfrm>
+            <a:off x="700088" y="909637"/>
+            <a:ext cx="6400800" cy="1307592"/>
+          </a:xfrm>
+        </p:spPr>
+        <p:txBody>
+          <a:bodyPr>
+            <a:normAutofit/>
+          </a:bodyPr>
+          <a:lstStyle/>
+          <a:p>
+            <a:pPr>
+              <a:lnSpc>
+                <a:spcPct val="90000"/>
+              </a:lnSpc>
+            </a:pPr>
+            <a:r>
+              <a:rPr lang="en-US" dirty="0"/>
+              <a:t>Introduction – Visual search</a:t>
+            </a:r>
+            <a:endParaRPr lang="en-US"/>
+          </a:p>
+        </p:txBody>
+      </p:sp>
+      <p:cxnSp>
+        <p:nvCxnSpPr>
+          <p:cNvPr id="12" name="Straight Connector 11">
+            <a:extLst>
+              <a:ext uri="{FF2B5EF4-FFF2-40B4-BE49-F238E27FC236}">
+                <a16:creationId xmlns:a16="http://schemas.microsoft.com/office/drawing/2014/main" id="{8E813B4C-6731-0B72-5252-A79AB0E20B58}"/>
+              </a:ext>
+              <a:ext uri="{C183D7F6-B498-43B3-948B-1728B52AA6E4}">
+                <adec:decorative xmlns:adec="http://schemas.microsoft.com/office/drawing/2017/decorative" val="1"/>
+              </a:ext>
+            </a:extLst>
+          </p:cNvPr>
+          <p:cNvCxnSpPr>
+            <a:cxnSpLocks noGrp="1" noRot="1" noChangeAspect="1" noMove="1" noResize="1" noEditPoints="1" noAdjustHandles="1" noChangeArrowheads="1" noChangeShapeType="1"/>
+          </p:cNvCxnSpPr>
+          <p:nvPr>
+            <p:extLst>
+              <p:ext uri="{386F3935-93C4-4BCD-93E2-E3B085C9AB24}">
+                <p16:designElem xmlns:p16="http://schemas.microsoft.com/office/powerpoint/2015/main" val="1"/>
+              </p:ext>
+            </p:extLst>
+          </p:nvPr>
+        </p:nvCxnSpPr>
+        <p:spPr>
+          <a:xfrm>
+            <a:off x="804672" y="723900"/>
+            <a:ext cx="10588752" cy="0"/>
+          </a:xfrm>
+          <a:prstGeom prst="line">
+            <a:avLst/>
+          </a:prstGeom>
+          <a:ln w="44450">
+            <a:solidFill>
+              <a:schemeClr val="tx1"/>
+            </a:solidFill>
+          </a:ln>
+        </p:spPr>
+        <p:style>
+          <a:lnRef idx="1">
+            <a:schemeClr val="accent1"/>
+          </a:lnRef>
+          <a:fillRef idx="0">
+            <a:schemeClr val="accent1"/>
+          </a:fillRef>
+          <a:effectRef idx="0">
+            <a:schemeClr val="accent1"/>
+          </a:effectRef>
+          <a:fontRef idx="minor">
+            <a:schemeClr val="tx1"/>
+          </a:fontRef>
+        </p:style>
+      </p:cxnSp>
+      <p:sp>
+        <p:nvSpPr>
+          <p:cNvPr id="3" name="Content Placeholder 2">
+            <a:extLst>
+              <a:ext uri="{FF2B5EF4-FFF2-40B4-BE49-F238E27FC236}">
+                <a16:creationId xmlns:a16="http://schemas.microsoft.com/office/drawing/2014/main" id="{B2BE3309-7229-AD07-B211-200BDB8042E7}"/>
+              </a:ext>
+            </a:extLst>
+          </p:cNvPr>
+          <p:cNvSpPr>
+            <a:spLocks noGrp="1"/>
+          </p:cNvSpPr>
+          <p:nvPr>
+            <p:ph idx="1"/>
+          </p:nvPr>
+        </p:nvSpPr>
+        <p:spPr>
+          <a:xfrm>
+            <a:off x="700088" y="2221992"/>
+            <a:ext cx="6400800" cy="3739896"/>
+          </a:xfrm>
+        </p:spPr>
+        <p:txBody>
+          <a:bodyPr>
+            <a:normAutofit/>
+          </a:bodyPr>
+          <a:lstStyle/>
+          <a:p>
+            <a:pPr algn="just"/>
+            <a:r>
+              <a:rPr lang="en-US" dirty="0"/>
+              <a:t>Definition: A process of locating a target in a search scene, display, images, etc. that contain multiple distractors (Treisman &amp; </a:t>
+            </a:r>
+            <a:r>
+              <a:rPr lang="en-US" dirty="0" err="1"/>
+              <a:t>Gelade</a:t>
+            </a:r>
+            <a:r>
+              <a:rPr lang="en-US" dirty="0"/>
+              <a:t>, 1980).</a:t>
+            </a:r>
+          </a:p>
+          <a:p>
+            <a:endParaRPr lang="en-US" dirty="0"/>
+          </a:p>
+        </p:txBody>
+      </p:sp>
+      <p:pic>
+        <p:nvPicPr>
+          <p:cNvPr id="7" name="Graphic 6" descr="Target Audience">
+            <a:extLst>
+              <a:ext uri="{FF2B5EF4-FFF2-40B4-BE49-F238E27FC236}">
+                <a16:creationId xmlns:a16="http://schemas.microsoft.com/office/drawing/2014/main" id="{B7A6BA6B-6776-2D3F-0F3F-65819E0113A1}"/>
+              </a:ext>
+            </a:extLst>
+          </p:cNvPr>
+          <p:cNvPicPr>
+            <a:picLocks noChangeAspect="1"/>
+          </p:cNvPicPr>
+          <p:nvPr/>
+        </p:nvPicPr>
+        <p:blipFill>
+          <a:blip>
+            <a:extLst>
+              <a:ext uri="{28A0092B-C50C-407E-A947-70E740481C1C}">
+                <a14:useLocalDpi xmlns:a14="http://schemas.microsoft.com/office/drawing/2010/main" val="0"/>
+              </a:ext>
+              <a:ext uri="{96DAC541-7B7A-43D3-8B79-37D633B846F1}">
+                <asvg:svgBlip xmlns:asvg="http://schemas.microsoft.com/office/drawing/2016/SVG/main" r:embed="rId3"/>
+              </a:ext>
+            </a:extLst>
+          </a:blip>
+          <a:stretch>
+            <a:fillRect/>
+          </a:stretch>
+        </p:blipFill>
+        <p:spPr>
+          <a:xfrm>
+            <a:off x="7487920" y="2102261"/>
+            <a:ext cx="3903980" cy="3903980"/>
+          </a:xfrm>
+          <a:prstGeom prst="rect">
+            <a:avLst/>
+          </a:prstGeom>
+        </p:spPr>
+      </p:pic>
+      <p:cxnSp>
+        <p:nvCxnSpPr>
+          <p:cNvPr id="14" name="Straight Connector 13">
+            <a:extLst>
+              <a:ext uri="{FF2B5EF4-FFF2-40B4-BE49-F238E27FC236}">
+                <a16:creationId xmlns:a16="http://schemas.microsoft.com/office/drawing/2014/main" id="{6E0E8146-6E65-2E6C-0C86-547E3C925406}"/>
+              </a:ext>
+              <a:ext uri="{C183D7F6-B498-43B3-948B-1728B52AA6E4}">
+                <adec:decorative xmlns:adec="http://schemas.microsoft.com/office/drawing/2017/decorative" val="1"/>
+              </a:ext>
+            </a:extLst>
+          </p:cNvPr>
+          <p:cNvCxnSpPr>
+            <a:cxnSpLocks noGrp="1" noRot="1" noChangeAspect="1" noMove="1" noResize="1" noEditPoints="1" noAdjustHandles="1" noChangeArrowheads="1" noChangeShapeType="1"/>
+          </p:cNvCxnSpPr>
+          <p:nvPr>
+            <p:extLst>
+              <p:ext uri="{386F3935-93C4-4BCD-93E2-E3B085C9AB24}">
+                <p16:designElem xmlns:p16="http://schemas.microsoft.com/office/powerpoint/2015/main" val="1"/>
+              </p:ext>
+            </p:extLst>
+          </p:nvPr>
+        </p:nvCxnSpPr>
+        <p:spPr>
+          <a:xfrm>
+            <a:off x="809065" y="6145599"/>
+            <a:ext cx="10582835" cy="0"/>
+          </a:xfrm>
+          <a:prstGeom prst="line">
+            <a:avLst/>
+          </a:prstGeom>
+          <a:ln w="12700">
+            <a:solidFill>
+              <a:schemeClr val="tx1"/>
+            </a:solidFill>
+          </a:ln>
+        </p:spPr>
+        <p:style>
+          <a:lnRef idx="1">
+            <a:schemeClr val="accent1"/>
+          </a:lnRef>
+          <a:fillRef idx="0">
+            <a:schemeClr val="accent1"/>
+          </a:fillRef>
+          <a:effectRef idx="0">
+            <a:schemeClr val="accent1"/>
+          </a:effectRef>
+          <a:fontRef idx="minor">
+            <a:schemeClr val="tx1"/>
+          </a:fontRef>
+        </p:style>
+      </p:cxnSp>
+    </p:spTree>
+    <p:extLst>
+      <p:ext uri="{BB962C8B-B14F-4D97-AF65-F5344CB8AC3E}">
+        <p14:creationId xmlns:p14="http://schemas.microsoft.com/office/powerpoint/2010/main" val="3410865117"/>
       </p:ext>
     </p:extLst>
   </p:cSld>
@@ -4146,4 +8884,319 @@
     </a:ext>
   </a:extLst>
 </a:theme>
+</file>
+
+<file path=ppt/theme/theme2.xml><?xml version="1.0" encoding="utf-8"?>
+<a:theme xmlns:a="http://schemas.openxmlformats.org/drawingml/2006/main" name="Office Theme">
+  <a:themeElements>
+    <a:clrScheme name="Office">
+      <a:dk1>
+        <a:sysClr val="windowText" lastClr="000000"/>
+      </a:dk1>
+      <a:lt1>
+        <a:sysClr val="window" lastClr="FFFFFF"/>
+      </a:lt1>
+      <a:dk2>
+        <a:srgbClr val="0E2841"/>
+      </a:dk2>
+      <a:lt2>
+        <a:srgbClr val="E8E8E8"/>
+      </a:lt2>
+      <a:accent1>
+        <a:srgbClr val="156082"/>
+      </a:accent1>
+      <a:accent2>
+        <a:srgbClr val="E97132"/>
+      </a:accent2>
+      <a:accent3>
+        <a:srgbClr val="196B24"/>
+      </a:accent3>
+      <a:accent4>
+        <a:srgbClr val="0F9ED5"/>
+      </a:accent4>
+      <a:accent5>
+        <a:srgbClr val="A02B93"/>
+      </a:accent5>
+      <a:accent6>
+        <a:srgbClr val="4EA72E"/>
+      </a:accent6>
+      <a:hlink>
+        <a:srgbClr val="467886"/>
+      </a:hlink>
+      <a:folHlink>
+        <a:srgbClr val="96607D"/>
+      </a:folHlink>
+    </a:clrScheme>
+    <a:fontScheme name="Office">
+      <a:majorFont>
+        <a:latin typeface="Aptos Display" panose="02110004020202020204"/>
+        <a:ea typeface=""/>
+        <a:cs typeface=""/>
+        <a:font script="Jpan" typeface="游ゴシック Light"/>
+        <a:font script="Hang" typeface="맑은 고딕"/>
+        <a:font script="Hans" typeface="等线 Light"/>
+        <a:font script="Hant" typeface="新細明體"/>
+        <a:font script="Arab" typeface="Times New Roman"/>
+        <a:font script="Hebr" typeface="Times New Roman"/>
+        <a:font script="Thai" typeface="Angsana New"/>
+        <a:font script="Ethi" typeface="Nyala"/>
+        <a:font script="Beng" typeface="Vrinda"/>
+        <a:font script="Gujr" typeface="Shruti"/>
+        <a:font script="Khmr" typeface="MoolBoran"/>
+        <a:font script="Knda" typeface="Tunga"/>
+        <a:font script="Guru" typeface="Raavi"/>
+        <a:font script="Cans" typeface="Euphemia"/>
+        <a:font script="Cher" typeface="Plantagenet Cherokee"/>
+        <a:font script="Yiii" typeface="Microsoft Yi Baiti"/>
+        <a:font script="Tibt" typeface="Microsoft Himalaya"/>
+        <a:font script="Thaa" typeface="MV Boli"/>
+        <a:font script="Deva" typeface="Mangal"/>
+        <a:font script="Telu" typeface="Gautami"/>
+        <a:font script="Taml" typeface="Latha"/>
+        <a:font script="Syrc" typeface="Estrangelo Edessa"/>
+        <a:font script="Orya" typeface="Kalinga"/>
+        <a:font script="Mlym" typeface="Kartika"/>
+        <a:font script="Laoo" typeface="DokChampa"/>
+        <a:font script="Sinh" typeface="Iskoola Pota"/>
+        <a:font script="Mong" typeface="Mongolian Baiti"/>
+        <a:font script="Viet" typeface="Times New Roman"/>
+        <a:font script="Uigh" typeface="Microsoft Uighur"/>
+        <a:font script="Geor" typeface="Sylfaen"/>
+        <a:font script="Armn" typeface="Arial"/>
+        <a:font script="Bugi" typeface="Leelawadee UI"/>
+        <a:font script="Bopo" typeface="Microsoft JhengHei"/>
+        <a:font script="Java" typeface="Javanese Text"/>
+        <a:font script="Lisu" typeface="Segoe UI"/>
+        <a:font script="Mymr" typeface="Myanmar Text"/>
+        <a:font script="Nkoo" typeface="Ebrima"/>
+        <a:font script="Olck" typeface="Nirmala UI"/>
+        <a:font script="Osma" typeface="Ebrima"/>
+        <a:font script="Phag" typeface="Phagspa"/>
+        <a:font script="Syrn" typeface="Estrangelo Edessa"/>
+        <a:font script="Syrj" typeface="Estrangelo Edessa"/>
+        <a:font script="Syre" typeface="Estrangelo Edessa"/>
+        <a:font script="Sora" typeface="Nirmala UI"/>
+        <a:font script="Tale" typeface="Microsoft Tai Le"/>
+        <a:font script="Talu" typeface="Microsoft New Tai Lue"/>
+        <a:font script="Tfng" typeface="Ebrima"/>
+      </a:majorFont>
+      <a:minorFont>
+        <a:latin typeface="Aptos" panose="02110004020202020204"/>
+        <a:ea typeface=""/>
+        <a:cs typeface=""/>
+        <a:font script="Jpan" typeface="游ゴシック"/>
+        <a:font script="Hang" typeface="맑은 고딕"/>
+        <a:font script="Hans" typeface="等线"/>
+        <a:font script="Hant" typeface="新細明體"/>
+        <a:font script="Arab" typeface="Arial"/>
+        <a:font script="Hebr" typeface="Arial"/>
+        <a:font script="Thai" typeface="Cordia New"/>
+        <a:font script="Ethi" typeface="Nyala"/>
+        <a:font script="Beng" typeface="Vrinda"/>
+        <a:font script="Gujr" typeface="Shruti"/>
+        <a:font script="Khmr" typeface="DaunPenh"/>
+        <a:font script="Knda" typeface="Tunga"/>
+        <a:font script="Guru" typeface="Raavi"/>
+        <a:font script="Cans" typeface="Euphemia"/>
+        <a:font script="Cher" typeface="Plantagenet Cherokee"/>
+        <a:font script="Yiii" typeface="Microsoft Yi Baiti"/>
+        <a:font script="Tibt" typeface="Microsoft Himalaya"/>
+        <a:font script="Thaa" typeface="MV Boli"/>
+        <a:font script="Deva" typeface="Mangal"/>
+        <a:font script="Telu" typeface="Gautami"/>
+        <a:font script="Taml" typeface="Latha"/>
+        <a:font script="Syrc" typeface="Estrangelo Edessa"/>
+        <a:font script="Orya" typeface="Kalinga"/>
+        <a:font script="Mlym" typeface="Kartika"/>
+        <a:font script="Laoo" typeface="DokChampa"/>
+        <a:font script="Sinh" typeface="Iskoola Pota"/>
+        <a:font script="Mong" typeface="Mongolian Baiti"/>
+        <a:font script="Viet" typeface="Arial"/>
+        <a:font script="Uigh" typeface="Microsoft Uighur"/>
+        <a:font script="Geor" typeface="Sylfaen"/>
+        <a:font script="Armn" typeface="Arial"/>
+        <a:font script="Bugi" typeface="Leelawadee UI"/>
+        <a:font script="Bopo" typeface="Microsoft JhengHei"/>
+        <a:font script="Java" typeface="Javanese Text"/>
+        <a:font script="Lisu" typeface="Segoe UI"/>
+        <a:font script="Mymr" typeface="Myanmar Text"/>
+        <a:font script="Nkoo" typeface="Ebrima"/>
+        <a:font script="Olck" typeface="Nirmala UI"/>
+        <a:font script="Osma" typeface="Ebrima"/>
+        <a:font script="Phag" typeface="Phagspa"/>
+        <a:font script="Syrn" typeface="Estrangelo Edessa"/>
+        <a:font script="Syrj" typeface="Estrangelo Edessa"/>
+        <a:font script="Syre" typeface="Estrangelo Edessa"/>
+        <a:font script="Sora" typeface="Nirmala UI"/>
+        <a:font script="Tale" typeface="Microsoft Tai Le"/>
+        <a:font script="Talu" typeface="Microsoft New Tai Lue"/>
+        <a:font script="Tfng" typeface="Ebrima"/>
+      </a:minorFont>
+    </a:fontScheme>
+    <a:fmtScheme name="Office">
+      <a:fillStyleLst>
+        <a:solidFill>
+          <a:schemeClr val="phClr"/>
+        </a:solidFill>
+        <a:gradFill rotWithShape="1">
+          <a:gsLst>
+            <a:gs pos="0">
+              <a:schemeClr val="phClr">
+                <a:lumMod val="110000"/>
+                <a:satMod val="105000"/>
+                <a:tint val="67000"/>
+              </a:schemeClr>
+            </a:gs>
+            <a:gs pos="50000">
+              <a:schemeClr val="phClr">
+                <a:lumMod val="105000"/>
+                <a:satMod val="103000"/>
+                <a:tint val="73000"/>
+              </a:schemeClr>
+            </a:gs>
+            <a:gs pos="100000">
+              <a:schemeClr val="phClr">
+                <a:lumMod val="105000"/>
+                <a:satMod val="109000"/>
+                <a:tint val="81000"/>
+              </a:schemeClr>
+            </a:gs>
+          </a:gsLst>
+          <a:lin ang="5400000" scaled="0"/>
+        </a:gradFill>
+        <a:gradFill rotWithShape="1">
+          <a:gsLst>
+            <a:gs pos="0">
+              <a:schemeClr val="phClr">
+                <a:satMod val="103000"/>
+                <a:lumMod val="102000"/>
+                <a:tint val="94000"/>
+              </a:schemeClr>
+            </a:gs>
+            <a:gs pos="50000">
+              <a:schemeClr val="phClr">
+                <a:satMod val="110000"/>
+                <a:lumMod val="100000"/>
+                <a:shade val="100000"/>
+              </a:schemeClr>
+            </a:gs>
+            <a:gs pos="100000">
+              <a:schemeClr val="phClr">
+                <a:lumMod val="99000"/>
+                <a:satMod val="120000"/>
+                <a:shade val="78000"/>
+              </a:schemeClr>
+            </a:gs>
+          </a:gsLst>
+          <a:lin ang="5400000" scaled="0"/>
+        </a:gradFill>
+      </a:fillStyleLst>
+      <a:lnStyleLst>
+        <a:ln w="12700" cap="flat" cmpd="sng" algn="ctr">
+          <a:solidFill>
+            <a:schemeClr val="phClr"/>
+          </a:solidFill>
+          <a:prstDash val="solid"/>
+          <a:miter lim="800000"/>
+        </a:ln>
+        <a:ln w="19050" cap="flat" cmpd="sng" algn="ctr">
+          <a:solidFill>
+            <a:schemeClr val="phClr"/>
+          </a:solidFill>
+          <a:prstDash val="solid"/>
+          <a:miter lim="800000"/>
+        </a:ln>
+        <a:ln w="25400" cap="flat" cmpd="sng" algn="ctr">
+          <a:solidFill>
+            <a:schemeClr val="phClr"/>
+          </a:solidFill>
+          <a:prstDash val="solid"/>
+          <a:miter lim="800000"/>
+        </a:ln>
+      </a:lnStyleLst>
+      <a:effectStyleLst>
+        <a:effectStyle>
+          <a:effectLst/>
+        </a:effectStyle>
+        <a:effectStyle>
+          <a:effectLst/>
+        </a:effectStyle>
+        <a:effectStyle>
+          <a:effectLst>
+            <a:outerShdw blurRad="57150" dist="19050" dir="5400000" algn="ctr" rotWithShape="0">
+              <a:srgbClr val="000000">
+                <a:alpha val="63000"/>
+              </a:srgbClr>
+            </a:outerShdw>
+          </a:effectLst>
+        </a:effectStyle>
+      </a:effectStyleLst>
+      <a:bgFillStyleLst>
+        <a:solidFill>
+          <a:schemeClr val="phClr"/>
+        </a:solidFill>
+        <a:solidFill>
+          <a:schemeClr val="phClr">
+            <a:tint val="95000"/>
+            <a:satMod val="170000"/>
+          </a:schemeClr>
+        </a:solidFill>
+        <a:gradFill rotWithShape="1">
+          <a:gsLst>
+            <a:gs pos="0">
+              <a:schemeClr val="phClr">
+                <a:tint val="93000"/>
+                <a:satMod val="150000"/>
+                <a:shade val="98000"/>
+                <a:lumMod val="102000"/>
+              </a:schemeClr>
+            </a:gs>
+            <a:gs pos="50000">
+              <a:schemeClr val="phClr">
+                <a:tint val="98000"/>
+                <a:satMod val="130000"/>
+                <a:shade val="90000"/>
+                <a:lumMod val="103000"/>
+              </a:schemeClr>
+            </a:gs>
+            <a:gs pos="100000">
+              <a:schemeClr val="phClr">
+                <a:shade val="63000"/>
+                <a:satMod val="120000"/>
+              </a:schemeClr>
+            </a:gs>
+          </a:gsLst>
+          <a:lin ang="5400000" scaled="0"/>
+        </a:gradFill>
+      </a:bgFillStyleLst>
+    </a:fmtScheme>
+  </a:themeElements>
+  <a:objectDefaults>
+    <a:lnDef>
+      <a:spPr/>
+      <a:bodyPr/>
+      <a:lstStyle/>
+      <a:style>
+        <a:lnRef idx="2">
+          <a:schemeClr val="accent1"/>
+        </a:lnRef>
+        <a:fillRef idx="0">
+          <a:schemeClr val="accent1"/>
+        </a:fillRef>
+        <a:effectRef idx="1">
+          <a:schemeClr val="accent1"/>
+        </a:effectRef>
+        <a:fontRef idx="minor">
+          <a:schemeClr val="tx1"/>
+        </a:fontRef>
+      </a:style>
+    </a:lnDef>
+  </a:objectDefaults>
+  <a:extraClrSchemeLst/>
+  <a:extLst>
+    <a:ext uri="{05A4C25C-085E-4340-85A3-A5531E510DB2}">
+      <thm15:themeFamily xmlns:thm15="http://schemas.microsoft.com/office/thememl/2012/main" name="Office Theme" id="{2E142A2C-CD16-42D6-873A-C26D2A0506FA}" vid="{1BDDFF52-6CD6-40A5-AB3C-68EB2F1E4D0A}"/>
+    </a:ext>
+  </a:extLst>
+</a:theme>
 </file>
--- a/Presentation/FYP_NguyenTuan_Presentation.pptx
+++ b/Presentation/FYP_NguyenTuan_Presentation.pptx
@@ -5,13 +5,15 @@
     <p:sldMasterId id="2147483863" r:id="rId1"/>
   </p:sldMasterIdLst>
   <p:notesMasterIdLst>
-    <p:notesMasterId r:id="rId6"/>
+    <p:notesMasterId r:id="rId8"/>
   </p:notesMasterIdLst>
   <p:sldIdLst>
     <p:sldId id="256" r:id="rId2"/>
     <p:sldId id="257" r:id="rId3"/>
     <p:sldId id="258" r:id="rId4"/>
     <p:sldId id="259" r:id="rId5"/>
+    <p:sldId id="260" r:id="rId6"/>
+    <p:sldId id="261" r:id="rId7"/>
   </p:sldIdLst>
   <p:sldSz cx="12192000" cy="6858000"/>
   <p:notesSz cx="6858000" cy="9144000"/>
@@ -3586,7 +3588,7 @@
           <a:p>
             <a:fld id="{9A9C0C59-185E-874E-8468-6092D83992DA}" type="datetimeFigureOut">
               <a:rPr lang="en-US" smtClean="0"/>
-              <a:t>4/1/26</a:t>
+              <a:t>4/2/26</a:t>
             </a:fld>
             <a:endParaRPr lang="en-US"/>
           </a:p>
@@ -4091,7 +4093,7 @@
           <a:p>
             <a:fld id="{D1D1EADE-8E88-4C7C-8AC5-FB148DE4940E}" type="datetime1">
               <a:rPr lang="en-US" smtClean="0"/>
-              <a:t>4/1/26</a:t>
+              <a:t>4/2/26</a:t>
             </a:fld>
             <a:endParaRPr lang="en-US"/>
           </a:p>
@@ -4291,7 +4293,7 @@
           <a:p>
             <a:fld id="{EC3C8B9C-477D-492A-96AD-1FC2CC997A73}" type="datetime1">
               <a:rPr lang="en-US" smtClean="0"/>
-              <a:t>4/1/26</a:t>
+              <a:t>4/2/26</a:t>
             </a:fld>
             <a:endParaRPr lang="en-US"/>
           </a:p>
@@ -4501,7 +4503,7 @@
           <a:p>
             <a:fld id="{42D3AED5-E26D-4E29-B1B3-7847B6779594}" type="datetime1">
               <a:rPr lang="en-US" smtClean="0"/>
-              <a:t>4/1/26</a:t>
+              <a:t>4/2/26</a:t>
             </a:fld>
             <a:endParaRPr lang="en-US"/>
           </a:p>
@@ -4701,7 +4703,7 @@
           <a:p>
             <a:fld id="{157B6794-849E-4626-908B-D15793550EFB}" type="datetime1">
               <a:rPr lang="en-US" smtClean="0"/>
-              <a:t>4/1/26</a:t>
+              <a:t>4/2/26</a:t>
             </a:fld>
             <a:endParaRPr lang="en-US"/>
           </a:p>
@@ -4977,7 +4979,7 @@
           <a:p>
             <a:fld id="{63DB64E7-5594-42A3-ADBF-E95A7ACEAD64}" type="datetime1">
               <a:rPr lang="en-US" smtClean="0"/>
-              <a:t>4/1/26</a:t>
+              <a:t>4/2/26</a:t>
             </a:fld>
             <a:endParaRPr lang="en-US"/>
           </a:p>
@@ -5250,7 +5252,7 @@
           <a:p>
             <a:fld id="{18462B0B-D248-4FFB-8695-AD7FA4B1284A}" type="datetime1">
               <a:rPr lang="en-US" smtClean="0"/>
-              <a:t>4/1/26</a:t>
+              <a:t>4/2/26</a:t>
             </a:fld>
             <a:endParaRPr lang="en-US"/>
           </a:p>
@@ -5673,7 +5675,7 @@
           <a:p>
             <a:fld id="{D0378EFB-9159-4510-B73F-4F0409ADE937}" type="datetime1">
               <a:rPr lang="en-US" smtClean="0"/>
-              <a:t>4/1/26</a:t>
+              <a:t>4/2/26</a:t>
             </a:fld>
             <a:endParaRPr lang="en-US"/>
           </a:p>
@@ -5815,7 +5817,7 @@
           <a:p>
             <a:fld id="{89BC9412-2452-4BED-A324-9D8C115361AD}" type="datetime1">
               <a:rPr lang="en-US" smtClean="0"/>
-              <a:t>4/1/26</a:t>
+              <a:t>4/2/26</a:t>
             </a:fld>
             <a:endParaRPr lang="en-US"/>
           </a:p>
@@ -5928,7 +5930,7 @@
           <a:p>
             <a:fld id="{F5318F62-D251-40E8-A23C-F4CFE9FEAB41}" type="datetime1">
               <a:rPr lang="en-US" smtClean="0"/>
-              <a:t>4/1/26</a:t>
+              <a:t>4/2/26</a:t>
             </a:fld>
             <a:endParaRPr lang="en-US"/>
           </a:p>
@@ -6241,7 +6243,7 @@
           <a:p>
             <a:fld id="{44F76144-149E-4874-93A5-554A0357CF82}" type="datetime1">
               <a:rPr lang="en-US" smtClean="0"/>
-              <a:t>4/1/26</a:t>
+              <a:t>4/2/26</a:t>
             </a:fld>
             <a:endParaRPr lang="en-US"/>
           </a:p>
@@ -6534,7 +6536,7 @@
           <a:p>
             <a:fld id="{50BA65D8-0540-4835-AE5C-25D29DBA01BE}" type="datetime1">
               <a:rPr lang="en-US" smtClean="0"/>
-              <a:t>4/1/26</a:t>
+              <a:t>4/2/26</a:t>
             </a:fld>
             <a:endParaRPr lang="en-US"/>
           </a:p>
@@ -6776,7 +6778,7 @@
           <a:p>
             <a:fld id="{E31BA835-12AC-4E8F-955A-EA3F4DE2791F}" type="datetime1">
               <a:rPr lang="en-US" smtClean="0"/>
-              <a:t>4/1/26</a:t>
+              <a:t>4/2/26</a:t>
             </a:fld>
             <a:endParaRPr lang="en-US"/>
           </a:p>
@@ -8630,6 +8632,609 @@
     <p:extLst>
       <p:ext uri="{BB962C8B-B14F-4D97-AF65-F5344CB8AC3E}">
         <p14:creationId xmlns:p14="http://schemas.microsoft.com/office/powerpoint/2010/main" val="3410865117"/>
+      </p:ext>
+    </p:extLst>
+  </p:cSld>
+  <p:clrMapOvr>
+    <a:masterClrMapping/>
+  </p:clrMapOvr>
+</p:sld>
+</file>
+
+<file path=ppt/slides/slide5.xml><?xml version="1.0" encoding="utf-8"?>
+<p:sld xmlns:a="http://schemas.openxmlformats.org/drawingml/2006/main" xmlns:r="http://schemas.openxmlformats.org/officeDocument/2006/relationships" xmlns:p="http://schemas.openxmlformats.org/presentationml/2006/main">
+  <p:cSld>
+    <p:bg>
+      <p:bgPr>
+        <a:solidFill>
+          <a:schemeClr val="bg1"/>
+        </a:solidFill>
+        <a:effectLst/>
+      </p:bgPr>
+    </p:bg>
+    <p:spTree>
+      <p:nvGrpSpPr>
+        <p:cNvPr id="1" name=""/>
+        <p:cNvGrpSpPr/>
+        <p:nvPr/>
+      </p:nvGrpSpPr>
+      <p:grpSpPr>
+        <a:xfrm>
+          <a:off x="0" y="0"/>
+          <a:ext cx="0" cy="0"/>
+          <a:chOff x="0" y="0"/>
+          <a:chExt cx="0" cy="0"/>
+        </a:xfrm>
+      </p:grpSpPr>
+      <p:sp useBgFill="1">
+        <p:nvSpPr>
+          <p:cNvPr id="46" name="Rectangle 45">
+            <a:extLst>
+              <a:ext uri="{FF2B5EF4-FFF2-40B4-BE49-F238E27FC236}">
+                <a16:creationId xmlns:a16="http://schemas.microsoft.com/office/drawing/2014/main" id="{5F710FDB-0919-493E-8539-8240C23F1EB2}"/>
+              </a:ext>
+              <a:ext uri="{C183D7F6-B498-43B3-948B-1728B52AA6E4}">
+                <adec:decorative xmlns:adec="http://schemas.microsoft.com/office/drawing/2017/decorative" val="1"/>
+              </a:ext>
+            </a:extLst>
+          </p:cNvPr>
+          <p:cNvSpPr>
+            <a:spLocks noGrp="1" noRot="1" noChangeAspect="1" noMove="1" noResize="1" noEditPoints="1" noAdjustHandles="1" noChangeArrowheads="1" noChangeShapeType="1" noTextEdit="1"/>
+          </p:cNvSpPr>
+          <p:nvPr>
+            <p:extLst>
+              <p:ext uri="{386F3935-93C4-4BCD-93E2-E3B085C9AB24}">
+                <p16:designElem xmlns:p16="http://schemas.microsoft.com/office/powerpoint/2015/main" val="1"/>
+              </p:ext>
+            </p:extLst>
+          </p:nvPr>
+        </p:nvSpPr>
+        <p:spPr>
+          <a:xfrm>
+            <a:off x="0" y="0"/>
+            <a:ext cx="12192000" cy="6858000"/>
+          </a:xfrm>
+          <a:prstGeom prst="rect">
+            <a:avLst/>
+          </a:prstGeom>
+          <a:ln w="12700" cap="flat" cmpd="sng" algn="ctr">
+            <a:noFill/>
+            <a:prstDash val="solid"/>
+            <a:miter lim="800000"/>
+          </a:ln>
+          <a:effectLst/>
+          <a:extLst>
+            <a:ext uri="{91240B29-F687-4F45-9708-019B960494DF}">
+              <a14:hiddenLine xmlns:a14="http://schemas.microsoft.com/office/drawing/2010/main" w="12700" cap="flat" cmpd="sng" algn="ctr">
+                <a:solidFill>
+                  <a:schemeClr val="accent1">
+                    <a:shade val="50000"/>
+                  </a:schemeClr>
+                </a:solidFill>
+                <a:prstDash val="solid"/>
+                <a:miter lim="800000"/>
+              </a14:hiddenLine>
+            </a:ext>
+          </a:extLst>
+        </p:spPr>
+        <p:style>
+          <a:lnRef idx="2">
+            <a:schemeClr val="accent1">
+              <a:shade val="50000"/>
+            </a:schemeClr>
+          </a:lnRef>
+          <a:fillRef idx="1">
+            <a:schemeClr val="accent1"/>
+          </a:fillRef>
+          <a:effectRef idx="0">
+            <a:schemeClr val="accent1"/>
+          </a:effectRef>
+          <a:fontRef idx="minor">
+            <a:schemeClr val="lt1"/>
+          </a:fontRef>
+        </p:style>
+        <p:txBody>
+          <a:bodyPr rtlCol="0" anchor="ctr"/>
+          <a:lstStyle/>
+          <a:p>
+            <a:pPr marL="0" marR="0" lvl="0" indent="0" algn="ctr" defTabSz="914400" rtl="0" eaLnBrk="1" fontAlgn="auto" latinLnBrk="0" hangingPunct="1">
+              <a:lnSpc>
+                <a:spcPct val="100000"/>
+              </a:lnSpc>
+              <a:spcBef>
+                <a:spcPts val="0"/>
+              </a:spcBef>
+              <a:spcAft>
+                <a:spcPts val="0"/>
+              </a:spcAft>
+              <a:buClrTx/>
+              <a:buSzTx/>
+              <a:buFontTx/>
+              <a:buNone/>
+              <a:tabLst/>
+              <a:defRPr/>
+            </a:pPr>
+            <a:endParaRPr kumimoji="0" lang="en-US" sz="1800" b="0" i="0" u="none" strike="noStrike" kern="1200" cap="none" spc="0" normalizeH="0" baseline="0" noProof="0">
+              <a:ln>
+                <a:noFill/>
+              </a:ln>
+              <a:solidFill>
+                <a:srgbClr val="FFFFFF"/>
+              </a:solidFill>
+              <a:effectLst/>
+              <a:uLnTx/>
+              <a:uFillTx/>
+              <a:latin typeface="Calisto MT"/>
+              <a:ea typeface="+mn-ea"/>
+              <a:cs typeface="+mn-cs"/>
+            </a:endParaRPr>
+          </a:p>
+        </p:txBody>
+      </p:sp>
+      <p:cxnSp>
+        <p:nvCxnSpPr>
+          <p:cNvPr id="48" name="Straight Connector 47">
+            <a:extLst>
+              <a:ext uri="{FF2B5EF4-FFF2-40B4-BE49-F238E27FC236}">
+                <a16:creationId xmlns:a16="http://schemas.microsoft.com/office/drawing/2014/main" id="{22F20000-FD86-48F6-9363-FEC90C932DCD}"/>
+              </a:ext>
+              <a:ext uri="{C183D7F6-B498-43B3-948B-1728B52AA6E4}">
+                <adec:decorative xmlns:adec="http://schemas.microsoft.com/office/drawing/2017/decorative" val="1"/>
+              </a:ext>
+            </a:extLst>
+          </p:cNvPr>
+          <p:cNvCxnSpPr>
+            <a:cxnSpLocks noGrp="1" noRot="1" noChangeAspect="1" noMove="1" noResize="1" noEditPoints="1" noAdjustHandles="1" noChangeArrowheads="1" noChangeShapeType="1"/>
+          </p:cNvCxnSpPr>
+          <p:nvPr>
+            <p:extLst>
+              <p:ext uri="{386F3935-93C4-4BCD-93E2-E3B085C9AB24}">
+                <p16:designElem xmlns:p16="http://schemas.microsoft.com/office/powerpoint/2015/main" val="1"/>
+              </p:ext>
+            </p:extLst>
+          </p:nvPr>
+        </p:nvCxnSpPr>
+        <p:spPr>
+          <a:xfrm>
+            <a:off x="800100" y="723900"/>
+            <a:ext cx="10591800" cy="0"/>
+          </a:xfrm>
+          <a:prstGeom prst="line">
+            <a:avLst/>
+          </a:prstGeom>
+          <a:ln w="44450">
+            <a:solidFill>
+              <a:schemeClr val="tx1"/>
+            </a:solidFill>
+          </a:ln>
+        </p:spPr>
+        <p:style>
+          <a:lnRef idx="1">
+            <a:schemeClr val="accent1"/>
+          </a:lnRef>
+          <a:fillRef idx="0">
+            <a:schemeClr val="accent1"/>
+          </a:fillRef>
+          <a:effectRef idx="0">
+            <a:schemeClr val="accent1"/>
+          </a:effectRef>
+          <a:fontRef idx="minor">
+            <a:schemeClr val="tx1"/>
+          </a:fontRef>
+        </p:style>
+      </p:cxnSp>
+      <p:cxnSp>
+        <p:nvCxnSpPr>
+          <p:cNvPr id="50" name="Straight Connector 49">
+            <a:extLst>
+              <a:ext uri="{FF2B5EF4-FFF2-40B4-BE49-F238E27FC236}">
+                <a16:creationId xmlns:a16="http://schemas.microsoft.com/office/drawing/2014/main" id="{872AE332-6ACA-45BE-875F-91A291D4A40D}"/>
+              </a:ext>
+              <a:ext uri="{C183D7F6-B498-43B3-948B-1728B52AA6E4}">
+                <adec:decorative xmlns:adec="http://schemas.microsoft.com/office/drawing/2017/decorative" val="1"/>
+              </a:ext>
+            </a:extLst>
+          </p:cNvPr>
+          <p:cNvCxnSpPr>
+            <a:cxnSpLocks noGrp="1" noRot="1" noChangeAspect="1" noMove="1" noResize="1" noEditPoints="1" noAdjustHandles="1" noChangeArrowheads="1" noChangeShapeType="1"/>
+          </p:cNvCxnSpPr>
+          <p:nvPr>
+            <p:extLst>
+              <p:ext uri="{386F3935-93C4-4BCD-93E2-E3B085C9AB24}">
+                <p16:designElem xmlns:p16="http://schemas.microsoft.com/office/powerpoint/2015/main" val="1"/>
+              </p:ext>
+            </p:extLst>
+          </p:nvPr>
+        </p:nvCxnSpPr>
+        <p:spPr>
+          <a:xfrm>
+            <a:off x="800100" y="6142781"/>
+            <a:ext cx="10591800" cy="0"/>
+          </a:xfrm>
+          <a:prstGeom prst="line">
+            <a:avLst/>
+          </a:prstGeom>
+          <a:ln w="12700">
+            <a:solidFill>
+              <a:schemeClr val="tx1"/>
+            </a:solidFill>
+          </a:ln>
+        </p:spPr>
+        <p:style>
+          <a:lnRef idx="1">
+            <a:schemeClr val="accent1"/>
+          </a:lnRef>
+          <a:fillRef idx="0">
+            <a:schemeClr val="accent1"/>
+          </a:fillRef>
+          <a:effectRef idx="0">
+            <a:schemeClr val="accent1"/>
+          </a:effectRef>
+          <a:fontRef idx="minor">
+            <a:schemeClr val="tx1"/>
+          </a:fontRef>
+        </p:style>
+      </p:cxnSp>
+      <p:sp>
+        <p:nvSpPr>
+          <p:cNvPr id="2" name="Title 1">
+            <a:extLst>
+              <a:ext uri="{FF2B5EF4-FFF2-40B4-BE49-F238E27FC236}">
+                <a16:creationId xmlns:a16="http://schemas.microsoft.com/office/drawing/2014/main" id="{D3EC9672-E538-3B1A-3564-BF01BFC2C276}"/>
+              </a:ext>
+            </a:extLst>
+          </p:cNvPr>
+          <p:cNvSpPr>
+            <a:spLocks noGrp="1"/>
+          </p:cNvSpPr>
+          <p:nvPr>
+            <p:ph type="title"/>
+          </p:nvPr>
+        </p:nvSpPr>
+        <p:spPr>
+          <a:xfrm>
+            <a:off x="702129" y="914760"/>
+            <a:ext cx="3678485" cy="3543764"/>
+          </a:xfrm>
+        </p:spPr>
+        <p:txBody>
+          <a:bodyPr>
+            <a:normAutofit/>
+          </a:bodyPr>
+          <a:lstStyle/>
+          <a:p>
+            <a:r>
+              <a:rPr lang="en-US" sz="3700"/>
+              <a:t>Introduction - Contributions</a:t>
+            </a:r>
+          </a:p>
+        </p:txBody>
+      </p:sp>
+      <p:sp>
+        <p:nvSpPr>
+          <p:cNvPr id="51" name="Content Placeholder 2">
+            <a:extLst>
+              <a:ext uri="{FF2B5EF4-FFF2-40B4-BE49-F238E27FC236}">
+                <a16:creationId xmlns:a16="http://schemas.microsoft.com/office/drawing/2014/main" id="{650ED078-3BCA-D05D-0D3C-3CFAA967BD88}"/>
+              </a:ext>
+            </a:extLst>
+          </p:cNvPr>
+          <p:cNvSpPr>
+            <a:spLocks noGrp="1"/>
+          </p:cNvSpPr>
+          <p:nvPr>
+            <p:ph idx="1"/>
+          </p:nvPr>
+        </p:nvSpPr>
+        <p:spPr>
+          <a:xfrm>
+            <a:off x="4773168" y="993228"/>
+            <a:ext cx="6720840" cy="4935981"/>
+          </a:xfrm>
+        </p:spPr>
+        <p:txBody>
+          <a:bodyPr>
+            <a:normAutofit/>
+          </a:bodyPr>
+          <a:lstStyle/>
+          <a:p>
+            <a:pPr>
+              <a:lnSpc>
+                <a:spcPct val="100000"/>
+              </a:lnSpc>
+            </a:pPr>
+            <a:r>
+              <a:rPr lang="en-US" sz="1700"/>
+              <a:t>Examine </a:t>
+            </a:r>
+            <a:r>
+              <a:rPr lang="en-US" sz="1700" b="1"/>
+              <a:t>I</a:t>
+            </a:r>
+            <a:r>
+              <a:rPr lang="en-US" sz="1700"/>
+              <a:t>nvariant </a:t>
+            </a:r>
+            <a:r>
+              <a:rPr lang="en-US" sz="1700" b="1"/>
+              <a:t>V</a:t>
+            </a:r>
+            <a:r>
+              <a:rPr lang="en-US" sz="1700"/>
+              <a:t>isual </a:t>
+            </a:r>
+            <a:r>
+              <a:rPr lang="en-US" sz="1700" b="1"/>
+              <a:t>S</a:t>
+            </a:r>
+            <a:r>
+              <a:rPr lang="en-US" sz="1700"/>
+              <a:t>earch </a:t>
+            </a:r>
+            <a:r>
+              <a:rPr lang="en-US" sz="1700" b="1"/>
+              <a:t>N</a:t>
+            </a:r>
+            <a:r>
+              <a:rPr lang="en-US" sz="1700"/>
+              <a:t>etwork (</a:t>
+            </a:r>
+            <a:r>
+              <a:rPr lang="en-US" sz="1700" b="1"/>
+              <a:t>IVSN</a:t>
+            </a:r>
+            <a:r>
+              <a:rPr lang="en-US" sz="1700"/>
+              <a:t>) (Zhang et al., 2018) as an inspiration for building a computational top-down visual search model.</a:t>
+            </a:r>
+          </a:p>
+          <a:p>
+            <a:pPr>
+              <a:lnSpc>
+                <a:spcPct val="100000"/>
+              </a:lnSpc>
+            </a:pPr>
+            <a:endParaRPr lang="en-US" sz="1700"/>
+          </a:p>
+          <a:p>
+            <a:pPr>
+              <a:lnSpc>
+                <a:spcPct val="100000"/>
+              </a:lnSpc>
+            </a:pPr>
+            <a:r>
+              <a:rPr lang="en-US" sz="1700"/>
+              <a:t>Introducing different augmentation methods on the COCO-Search18 dataset (</a:t>
+            </a:r>
+            <a:r>
+              <a:rPr lang="en-SG" sz="1700"/>
+              <a:t>Yang et al., 2020</a:t>
+            </a:r>
+            <a:r>
+              <a:rPr lang="en-US" sz="1700"/>
+              <a:t>) to train the </a:t>
+            </a:r>
+            <a:r>
+              <a:rPr lang="en-SG" sz="1700" b="1"/>
+              <a:t>C</a:t>
+            </a:r>
+            <a:r>
+              <a:rPr lang="en-SG" sz="1700"/>
+              <a:t>ontext-aware </a:t>
+            </a:r>
+            <a:r>
+              <a:rPr lang="en-SG" sz="1700" b="1"/>
+              <a:t>R</a:t>
+            </a:r>
+            <a:r>
+              <a:rPr lang="en-SG" sz="1700"/>
+              <a:t>ecognition </a:t>
+            </a:r>
+            <a:r>
+              <a:rPr lang="en-SG" sz="1700" b="1"/>
+              <a:t>T</a:t>
+            </a:r>
+            <a:r>
+              <a:rPr lang="en-SG" sz="1700"/>
+              <a:t>ransformer </a:t>
+            </a:r>
+            <a:r>
+              <a:rPr lang="en-SG" sz="1700" b="1"/>
+              <a:t>Net</a:t>
+            </a:r>
+            <a:r>
+              <a:rPr lang="en-SG" sz="1700"/>
+              <a:t>work</a:t>
+            </a:r>
+            <a:r>
+              <a:rPr lang="en-US" sz="1700"/>
+              <a:t> (</a:t>
+            </a:r>
+            <a:r>
+              <a:rPr lang="en-US" sz="1700" b="1" err="1"/>
+              <a:t>CRTNet</a:t>
+            </a:r>
+            <a:r>
+              <a:rPr lang="en-US" sz="1700"/>
+              <a:t>) </a:t>
+            </a:r>
+            <a:r>
+              <a:rPr lang="en-SG" sz="1700"/>
+              <a:t>(</a:t>
+            </a:r>
+            <a:r>
+              <a:rPr lang="en-SG" sz="1700" err="1"/>
+              <a:t>Bomatter</a:t>
+            </a:r>
+            <a:r>
+              <a:rPr lang="en-SG" sz="1700"/>
+              <a:t> et al., 2021) for the visual search task.</a:t>
+            </a:r>
+          </a:p>
+          <a:p>
+            <a:pPr>
+              <a:lnSpc>
+                <a:spcPct val="100000"/>
+              </a:lnSpc>
+            </a:pPr>
+            <a:endParaRPr lang="en-SG" sz="1700"/>
+          </a:p>
+          <a:p>
+            <a:pPr>
+              <a:lnSpc>
+                <a:spcPct val="100000"/>
+              </a:lnSpc>
+            </a:pPr>
+            <a:r>
+              <a:rPr lang="en-SG" sz="1700"/>
+              <a:t>Propose a modified </a:t>
+            </a:r>
+            <a:r>
+              <a:rPr lang="en-SG" sz="1700" err="1"/>
+              <a:t>CRTNet</a:t>
+            </a:r>
+            <a:r>
+              <a:rPr lang="en-SG" sz="1700"/>
+              <a:t> architecture for global modulation in the </a:t>
+            </a:r>
+            <a:r>
+              <a:rPr lang="en-SG" sz="1700" b="1"/>
+              <a:t>T</a:t>
+            </a:r>
+            <a:r>
+              <a:rPr lang="en-SG" sz="1700"/>
+              <a:t>arget and </a:t>
+            </a:r>
+            <a:r>
+              <a:rPr lang="en-SG" sz="1700" b="1"/>
+              <a:t>C</a:t>
+            </a:r>
+            <a:r>
+              <a:rPr lang="en-SG" sz="1700"/>
+              <a:t>ontext-aware </a:t>
+            </a:r>
+            <a:r>
+              <a:rPr lang="en-SG" sz="1700" b="1"/>
+              <a:t>T</a:t>
+            </a:r>
+            <a:r>
+              <a:rPr lang="en-SG" sz="1700"/>
+              <a:t>ransformer (</a:t>
+            </a:r>
+            <a:r>
+              <a:rPr lang="en-SG" sz="1700" b="1"/>
+              <a:t>TCT</a:t>
+            </a:r>
+            <a:r>
+              <a:rPr lang="en-SG" sz="1700"/>
+              <a:t>) visual search model.</a:t>
+            </a:r>
+          </a:p>
+          <a:p>
+            <a:pPr>
+              <a:lnSpc>
+                <a:spcPct val="100000"/>
+              </a:lnSpc>
+            </a:pPr>
+            <a:endParaRPr lang="en-SG" sz="1700"/>
+          </a:p>
+          <a:p>
+            <a:pPr>
+              <a:lnSpc>
+                <a:spcPct val="100000"/>
+              </a:lnSpc>
+            </a:pPr>
+            <a:r>
+              <a:rPr lang="en-SG" sz="1700"/>
+              <a:t>Assess TCT visual search model on different benchmark datasets</a:t>
+            </a:r>
+          </a:p>
+        </p:txBody>
+      </p:sp>
+    </p:spTree>
+    <p:extLst>
+      <p:ext uri="{BB962C8B-B14F-4D97-AF65-F5344CB8AC3E}">
+        <p14:creationId xmlns:p14="http://schemas.microsoft.com/office/powerpoint/2010/main" val="3200024145"/>
+      </p:ext>
+    </p:extLst>
+  </p:cSld>
+  <p:clrMapOvr>
+    <a:masterClrMapping/>
+  </p:clrMapOvr>
+</p:sld>
+</file>
+
+<file path=ppt/slides/slide6.xml><?xml version="1.0" encoding="utf-8"?>
+<p:sld xmlns:a="http://schemas.openxmlformats.org/drawingml/2006/main" xmlns:r="http://schemas.openxmlformats.org/officeDocument/2006/relationships" xmlns:p="http://schemas.openxmlformats.org/presentationml/2006/main">
+  <p:cSld>
+    <p:spTree>
+      <p:nvGrpSpPr>
+        <p:cNvPr id="1" name=""/>
+        <p:cNvGrpSpPr/>
+        <p:nvPr/>
+      </p:nvGrpSpPr>
+      <p:grpSpPr>
+        <a:xfrm>
+          <a:off x="0" y="0"/>
+          <a:ext cx="0" cy="0"/>
+          <a:chOff x="0" y="0"/>
+          <a:chExt cx="0" cy="0"/>
+        </a:xfrm>
+      </p:grpSpPr>
+      <p:sp>
+        <p:nvSpPr>
+          <p:cNvPr id="2" name="Title 1">
+            <a:extLst>
+              <a:ext uri="{FF2B5EF4-FFF2-40B4-BE49-F238E27FC236}">
+                <a16:creationId xmlns:a16="http://schemas.microsoft.com/office/drawing/2014/main" id="{12E2D8E1-3E24-9B82-7B52-9A309A1BC9E5}"/>
+              </a:ext>
+            </a:extLst>
+          </p:cNvPr>
+          <p:cNvSpPr>
+            <a:spLocks noGrp="1"/>
+          </p:cNvSpPr>
+          <p:nvPr>
+            <p:ph type="title"/>
+          </p:nvPr>
+        </p:nvSpPr>
+        <p:spPr/>
+        <p:txBody>
+          <a:bodyPr/>
+          <a:lstStyle/>
+          <a:p>
+            <a:endParaRPr lang="en-US"/>
+          </a:p>
+        </p:txBody>
+      </p:sp>
+      <p:sp>
+        <p:nvSpPr>
+          <p:cNvPr id="3" name="Content Placeholder 2">
+            <a:extLst>
+              <a:ext uri="{FF2B5EF4-FFF2-40B4-BE49-F238E27FC236}">
+                <a16:creationId xmlns:a16="http://schemas.microsoft.com/office/drawing/2014/main" id="{221350DF-5ADA-2E28-E0C7-E6A7B263B478}"/>
+              </a:ext>
+            </a:extLst>
+          </p:cNvPr>
+          <p:cNvSpPr>
+            <a:spLocks noGrp="1"/>
+          </p:cNvSpPr>
+          <p:nvPr>
+            <p:ph idx="1"/>
+          </p:nvPr>
+        </p:nvSpPr>
+        <p:spPr/>
+        <p:txBody>
+          <a:bodyPr/>
+          <a:lstStyle/>
+          <a:p>
+            <a:endParaRPr lang="en-US"/>
+          </a:p>
+        </p:txBody>
+      </p:sp>
+    </p:spTree>
+    <p:extLst>
+      <p:ext uri="{BB962C8B-B14F-4D97-AF65-F5344CB8AC3E}">
+        <p14:creationId xmlns:p14="http://schemas.microsoft.com/office/powerpoint/2010/main" val="2645356358"/>
       </p:ext>
     </p:extLst>
   </p:cSld>

--- a/Presentation/FYP_NguyenTuan_Presentation.pptx
+++ b/Presentation/FYP_NguyenTuan_Presentation.pptx
@@ -3620,7 +3620,7 @@
           <a:p>
             <a:fld id="{9A9C0C59-185E-874E-8468-6092D83992DA}" type="datetimeFigureOut">
               <a:rPr lang="en-US" smtClean="0"/>
-              <a:t>4/11/26</a:t>
+              <a:t>4/15/26</a:t>
             </a:fld>
             <a:endParaRPr lang="en-US"/>
           </a:p>
@@ -7341,7 +7341,7 @@
           <a:p>
             <a:fld id="{D1D1EADE-8E88-4C7C-8AC5-FB148DE4940E}" type="datetime1">
               <a:rPr lang="en-US" smtClean="0"/>
-              <a:t>4/11/26</a:t>
+              <a:t>4/15/26</a:t>
             </a:fld>
             <a:endParaRPr lang="en-US"/>
           </a:p>
@@ -7541,7 +7541,7 @@
           <a:p>
             <a:fld id="{EC3C8B9C-477D-492A-96AD-1FC2CC997A73}" type="datetime1">
               <a:rPr lang="en-US" smtClean="0"/>
-              <a:t>4/11/26</a:t>
+              <a:t>4/15/26</a:t>
             </a:fld>
             <a:endParaRPr lang="en-US"/>
           </a:p>
@@ -7751,7 +7751,7 @@
           <a:p>
             <a:fld id="{42D3AED5-E26D-4E29-B1B3-7847B6779594}" type="datetime1">
               <a:rPr lang="en-US" smtClean="0"/>
-              <a:t>4/11/26</a:t>
+              <a:t>4/15/26</a:t>
             </a:fld>
             <a:endParaRPr lang="en-US"/>
           </a:p>
@@ -7951,7 +7951,7 @@
           <a:p>
             <a:fld id="{157B6794-849E-4626-908B-D15793550EFB}" type="datetime1">
               <a:rPr lang="en-US" smtClean="0"/>
-              <a:t>4/11/26</a:t>
+              <a:t>4/15/26</a:t>
             </a:fld>
             <a:endParaRPr lang="en-US"/>
           </a:p>
@@ -8227,7 +8227,7 @@
           <a:p>
             <a:fld id="{63DB64E7-5594-42A3-ADBF-E95A7ACEAD64}" type="datetime1">
               <a:rPr lang="en-US" smtClean="0"/>
-              <a:t>4/11/26</a:t>
+              <a:t>4/15/26</a:t>
             </a:fld>
             <a:endParaRPr lang="en-US"/>
           </a:p>
@@ -8500,7 +8500,7 @@
           <a:p>
             <a:fld id="{18462B0B-D248-4FFB-8695-AD7FA4B1284A}" type="datetime1">
               <a:rPr lang="en-US" smtClean="0"/>
-              <a:t>4/11/26</a:t>
+              <a:t>4/15/26</a:t>
             </a:fld>
             <a:endParaRPr lang="en-US"/>
           </a:p>
@@ -8923,7 +8923,7 @@
           <a:p>
             <a:fld id="{D0378EFB-9159-4510-B73F-4F0409ADE937}" type="datetime1">
               <a:rPr lang="en-US" smtClean="0"/>
-              <a:t>4/11/26</a:t>
+              <a:t>4/15/26</a:t>
             </a:fld>
             <a:endParaRPr lang="en-US"/>
           </a:p>
@@ -9065,7 +9065,7 @@
           <a:p>
             <a:fld id="{89BC9412-2452-4BED-A324-9D8C115361AD}" type="datetime1">
               <a:rPr lang="en-US" smtClean="0"/>
-              <a:t>4/11/26</a:t>
+              <a:t>4/15/26</a:t>
             </a:fld>
             <a:endParaRPr lang="en-US"/>
           </a:p>
@@ -9178,7 +9178,7 @@
           <a:p>
             <a:fld id="{F5318F62-D251-40E8-A23C-F4CFE9FEAB41}" type="datetime1">
               <a:rPr lang="en-US" smtClean="0"/>
-              <a:t>4/11/26</a:t>
+              <a:t>4/15/26</a:t>
             </a:fld>
             <a:endParaRPr lang="en-US"/>
           </a:p>
@@ -9491,7 +9491,7 @@
           <a:p>
             <a:fld id="{44F76144-149E-4874-93A5-554A0357CF82}" type="datetime1">
               <a:rPr lang="en-US" smtClean="0"/>
-              <a:t>4/11/26</a:t>
+              <a:t>4/15/26</a:t>
             </a:fld>
             <a:endParaRPr lang="en-US"/>
           </a:p>
@@ -9784,7 +9784,7 @@
           <a:p>
             <a:fld id="{50BA65D8-0540-4835-AE5C-25D29DBA01BE}" type="datetime1">
               <a:rPr lang="en-US" smtClean="0"/>
-              <a:t>4/11/26</a:t>
+              <a:t>4/15/26</a:t>
             </a:fld>
             <a:endParaRPr lang="en-US"/>
           </a:p>
@@ -10026,7 +10026,7 @@
           <a:p>
             <a:fld id="{E31BA835-12AC-4E8F-955A-EA3F4DE2791F}" type="datetime1">
               <a:rPr lang="en-US" smtClean="0"/>
-              <a:t>4/11/26</a:t>
+              <a:t>4/15/26</a:t>
             </a:fld>
             <a:endParaRPr lang="en-US"/>
           </a:p>
@@ -16528,13 +16528,13 @@
   <p:clrMapOvr>
     <a:masterClrMapping/>
   </p:clrMapOvr>
-  <mc:AlternateContent xmlns:mc="http://schemas.openxmlformats.org/markup-compatibility/2006">
-    <mc:Choice xmlns:p159="http://schemas.microsoft.com/office/powerpoint/2015/09/main" Requires="p159">
+  <mc:AlternateContent xmlns:mc="http://schemas.openxmlformats.org/markup-compatibility/2006" xmlns:p159="http://schemas.microsoft.com/office/powerpoint/2015/09/main">
+    <mc:Choice Requires="p159">
       <p:transition>
         <p159:morph option="byObject"/>
       </p:transition>
     </mc:Choice>
-    <mc:Fallback>
+    <mc:Fallback xmlns="">
       <p:transition>
         <p:fade/>
       </p:transition>
@@ -17481,13 +17481,13 @@
   <p:clrMapOvr>
     <a:masterClrMapping/>
   </p:clrMapOvr>
-  <mc:AlternateContent xmlns:mc="http://schemas.openxmlformats.org/markup-compatibility/2006">
-    <mc:Choice xmlns:p159="http://schemas.microsoft.com/office/powerpoint/2015/09/main" Requires="p159">
+  <mc:AlternateContent xmlns:mc="http://schemas.openxmlformats.org/markup-compatibility/2006" xmlns:p159="http://schemas.microsoft.com/office/powerpoint/2015/09/main">
+    <mc:Choice Requires="p159">
       <p:transition>
         <p159:morph option="byObject"/>
       </p:transition>
     </mc:Choice>
-    <mc:Fallback>
+    <mc:Fallback xmlns="">
       <p:transition>
         <p:fade/>
       </p:transition>
@@ -18150,13 +18150,13 @@
   <p:clrMapOvr>
     <a:masterClrMapping/>
   </p:clrMapOvr>
-  <mc:AlternateContent xmlns:mc="http://schemas.openxmlformats.org/markup-compatibility/2006">
-    <mc:Choice xmlns:p159="http://schemas.microsoft.com/office/powerpoint/2015/09/main" Requires="p159">
+  <mc:AlternateContent xmlns:mc="http://schemas.openxmlformats.org/markup-compatibility/2006" xmlns:p159="http://schemas.microsoft.com/office/powerpoint/2015/09/main">
+    <mc:Choice Requires="p159">
       <p:transition>
         <p159:morph option="byObject"/>
       </p:transition>
     </mc:Choice>
-    <mc:Fallback>
+    <mc:Fallback xmlns="">
       <p:transition>
         <p:fade/>
       </p:transition>
@@ -18819,13 +18819,13 @@
   <p:clrMapOvr>
     <a:masterClrMapping/>
   </p:clrMapOvr>
-  <mc:AlternateContent xmlns:mc="http://schemas.openxmlformats.org/markup-compatibility/2006">
-    <mc:Choice xmlns:p159="http://schemas.microsoft.com/office/powerpoint/2015/09/main" Requires="p159">
+  <mc:AlternateContent xmlns:mc="http://schemas.openxmlformats.org/markup-compatibility/2006" xmlns:p159="http://schemas.microsoft.com/office/powerpoint/2015/09/main">
+    <mc:Choice Requires="p159">
       <p:transition>
         <p159:morph option="byObject"/>
       </p:transition>
     </mc:Choice>
-    <mc:Fallback>
+    <mc:Fallback xmlns="">
       <p:transition>
         <p:fade/>
       </p:transition>
@@ -19488,13 +19488,13 @@
   <p:clrMapOvr>
     <a:masterClrMapping/>
   </p:clrMapOvr>
-  <mc:AlternateContent xmlns:mc="http://schemas.openxmlformats.org/markup-compatibility/2006">
-    <mc:Choice xmlns:p159="http://schemas.microsoft.com/office/powerpoint/2015/09/main" Requires="p159">
+  <mc:AlternateContent xmlns:mc="http://schemas.openxmlformats.org/markup-compatibility/2006" xmlns:p159="http://schemas.microsoft.com/office/powerpoint/2015/09/main">
+    <mc:Choice Requires="p159">
       <p:transition>
         <p159:morph option="byObject"/>
       </p:transition>
     </mc:Choice>
-    <mc:Fallback>
+    <mc:Fallback xmlns="">
       <p:transition>
         <p:fade/>
       </p:transition>
@@ -20157,13 +20157,13 @@
   <p:clrMapOvr>
     <a:masterClrMapping/>
   </p:clrMapOvr>
-  <mc:AlternateContent xmlns:mc="http://schemas.openxmlformats.org/markup-compatibility/2006">
-    <mc:Choice xmlns:p159="http://schemas.microsoft.com/office/powerpoint/2015/09/main" Requires="p159">
+  <mc:AlternateContent xmlns:mc="http://schemas.openxmlformats.org/markup-compatibility/2006" xmlns:p159="http://schemas.microsoft.com/office/powerpoint/2015/09/main">
+    <mc:Choice Requires="p159">
       <p:transition>
         <p159:morph option="byObject"/>
       </p:transition>
     </mc:Choice>
-    <mc:Fallback>
+    <mc:Fallback xmlns="">
       <p:transition>
         <p:fade/>
       </p:transition>
@@ -20826,13 +20826,13 @@
   <p:clrMapOvr>
     <a:masterClrMapping/>
   </p:clrMapOvr>
-  <mc:AlternateContent xmlns:mc="http://schemas.openxmlformats.org/markup-compatibility/2006">
-    <mc:Choice xmlns:p159="http://schemas.microsoft.com/office/powerpoint/2015/09/main" Requires="p159">
+  <mc:AlternateContent xmlns:mc="http://schemas.openxmlformats.org/markup-compatibility/2006" xmlns:p159="http://schemas.microsoft.com/office/powerpoint/2015/09/main">
+    <mc:Choice Requires="p159">
       <p:transition>
         <p159:morph option="byObject"/>
       </p:transition>
     </mc:Choice>
-    <mc:Fallback>
+    <mc:Fallback xmlns="">
       <p:transition>
         <p:fade/>
       </p:transition>
@@ -28446,13 +28446,13 @@
   <p:clrMapOvr>
     <a:masterClrMapping/>
   </p:clrMapOvr>
-  <mc:AlternateContent xmlns:mc="http://schemas.openxmlformats.org/markup-compatibility/2006">
-    <mc:Choice xmlns:p159="http://schemas.microsoft.com/office/powerpoint/2015/09/main" Requires="p159">
+  <mc:AlternateContent xmlns:mc="http://schemas.openxmlformats.org/markup-compatibility/2006" xmlns:p159="http://schemas.microsoft.com/office/powerpoint/2015/09/main">
+    <mc:Choice Requires="p159">
       <p:transition>
         <p159:morph option="byObject"/>
       </p:transition>
     </mc:Choice>
-    <mc:Fallback>
+    <mc:Fallback xmlns="">
       <p:transition>
         <p:fade/>
       </p:transition>
@@ -28711,13 +28711,13 @@
   <p:clrMapOvr>
     <a:masterClrMapping/>
   </p:clrMapOvr>
-  <mc:AlternateContent xmlns:mc="http://schemas.openxmlformats.org/markup-compatibility/2006">
-    <mc:Choice xmlns:p159="http://schemas.microsoft.com/office/powerpoint/2015/09/main" Requires="p159">
+  <mc:AlternateContent xmlns:mc="http://schemas.openxmlformats.org/markup-compatibility/2006" xmlns:p159="http://schemas.microsoft.com/office/powerpoint/2015/09/main">
+    <mc:Choice Requires="p159">
       <p:transition>
         <p159:morph option="byObject"/>
       </p:transition>
     </mc:Choice>
-    <mc:Fallback>
+    <mc:Fallback xmlns="">
       <p:transition>
         <p:fade/>
       </p:transition>
@@ -30002,6 +30002,68 @@
           </a:prstGeom>
         </p:spPr>
       </p:pic>
+      <p:sp>
+        <p:nvSpPr>
+          <p:cNvPr id="9" name="TextBox 8">
+            <a:extLst>
+              <a:ext uri="{FF2B5EF4-FFF2-40B4-BE49-F238E27FC236}">
+                <a16:creationId xmlns:a16="http://schemas.microsoft.com/office/drawing/2014/main" id="{663EA239-8A0C-C0BD-3DBD-EB9EAC46B865}"/>
+              </a:ext>
+            </a:extLst>
+          </p:cNvPr>
+          <p:cNvSpPr txBox="1"/>
+          <p:nvPr/>
+        </p:nvSpPr>
+        <p:spPr>
+          <a:xfrm>
+            <a:off x="892454" y="3868902"/>
+            <a:ext cx="3837333" cy="1754326"/>
+          </a:xfrm>
+          <a:prstGeom prst="rect">
+            <a:avLst/>
+          </a:prstGeom>
+          <a:noFill/>
+        </p:spPr>
+        <p:txBody>
+          <a:bodyPr wrap="none" rtlCol="0">
+            <a:spAutoFit/>
+          </a:bodyPr>
+          <a:lstStyle/>
+          <a:p>
+            <a:r>
+              <a:rPr lang="en-US" dirty="0"/>
+              <a:t>Solution:</a:t>
+            </a:r>
+          </a:p>
+          <a:p>
+            <a:r>
+              <a:rPr lang="en-US" dirty="0"/>
+              <a:t>Added a Light-weight Attention layer</a:t>
+            </a:r>
+          </a:p>
+          <a:p>
+            <a:endParaRPr lang="en-US" dirty="0"/>
+          </a:p>
+          <a:p>
+            <a:r>
+              <a:rPr lang="en-US" dirty="0"/>
+              <a:t>Query:   Target token</a:t>
+            </a:r>
+          </a:p>
+          <a:p>
+            <a:r>
+              <a:rPr lang="en-US" dirty="0"/>
+              <a:t>Key:       Context PE</a:t>
+            </a:r>
+          </a:p>
+          <a:p>
+            <a:r>
+              <a:rPr lang="en-US" dirty="0"/>
+              <a:t>Value:    Context PE</a:t>
+            </a:r>
+          </a:p>
+        </p:txBody>
+      </p:sp>
     </p:spTree>
     <p:extLst>
       <p:ext uri="{BB962C8B-B14F-4D97-AF65-F5344CB8AC3E}">
@@ -30103,10 +30165,10 @@
       </p:sp>
       <p:grpSp>
         <p:nvGrpSpPr>
-          <p:cNvPr id="27" name="Group 26">
-            <a:extLst>
-              <a:ext uri="{FF2B5EF4-FFF2-40B4-BE49-F238E27FC236}">
-                <a16:creationId xmlns:a16="http://schemas.microsoft.com/office/drawing/2014/main" id="{8BD543AB-B2C7-06D3-5170-CDB516CC0897}"/>
+          <p:cNvPr id="32" name="Group 31">
+            <a:extLst>
+              <a:ext uri="{FF2B5EF4-FFF2-40B4-BE49-F238E27FC236}">
+                <a16:creationId xmlns:a16="http://schemas.microsoft.com/office/drawing/2014/main" id="{4D0DDF95-E95B-21F1-FAB2-B5C20F08E272}"/>
               </a:ext>
             </a:extLst>
           </p:cNvPr>
@@ -30115,18 +30177,170 @@
         </p:nvGrpSpPr>
         <p:grpSpPr>
           <a:xfrm>
-            <a:off x="1319582" y="3827339"/>
-            <a:ext cx="1078665" cy="1096665"/>
-            <a:chOff x="1153751" y="2704228"/>
-            <a:chExt cx="1074757" cy="1113735"/>
+            <a:off x="3673394" y="2489510"/>
+            <a:ext cx="1001428" cy="598310"/>
+            <a:chOff x="2493871" y="2168278"/>
+            <a:chExt cx="1001428" cy="598310"/>
+          </a:xfrm>
+        </p:grpSpPr>
+        <p:sp>
+          <p:nvSpPr>
+            <p:cNvPr id="28" name="Rectangle 27">
+              <a:extLst>
+                <a:ext uri="{FF2B5EF4-FFF2-40B4-BE49-F238E27FC236}">
+                  <a16:creationId xmlns:a16="http://schemas.microsoft.com/office/drawing/2014/main" id="{C4512132-A9A9-268C-DE7D-5D8DE9670610}"/>
+                </a:ext>
+              </a:extLst>
+            </p:cNvPr>
+            <p:cNvSpPr/>
+            <p:nvPr/>
+          </p:nvSpPr>
+          <p:spPr>
+            <a:xfrm>
+              <a:off x="2860194" y="2496532"/>
+              <a:ext cx="268782" cy="270056"/>
+            </a:xfrm>
+            <a:prstGeom prst="rect">
+              <a:avLst/>
+            </a:prstGeom>
+            <a:solidFill>
+              <a:srgbClr val="0070C0"/>
+            </a:solidFill>
+            <a:ln w="19050" cap="flat" cmpd="sng" algn="ctr">
+              <a:solidFill>
+                <a:srgbClr val="FF0000"/>
+              </a:solidFill>
+              <a:prstDash val="solid"/>
+              <a:miter lim="800000"/>
+            </a:ln>
+            <a:effectLst/>
+          </p:spPr>
+          <p:style>
+            <a:lnRef idx="2">
+              <a:schemeClr val="accent1">
+                <a:shade val="50000"/>
+              </a:schemeClr>
+            </a:lnRef>
+            <a:fillRef idx="1">
+              <a:schemeClr val="accent1"/>
+            </a:fillRef>
+            <a:effectRef idx="0">
+              <a:schemeClr val="accent1"/>
+            </a:effectRef>
+            <a:fontRef idx="minor">
+              <a:schemeClr val="lt1"/>
+            </a:fontRef>
+          </p:style>
+          <p:txBody>
+            <a:bodyPr rtlCol="0" anchor="ctr"/>
+            <a:lstStyle/>
+            <a:p>
+              <a:pPr algn="ctr"/>
+              <a:endParaRPr lang="en-US" dirty="0"/>
+            </a:p>
+          </p:txBody>
+        </p:sp>
+        <p:sp>
+          <p:nvSpPr>
+            <p:cNvPr id="29" name="TextBox 28">
+              <a:extLst>
+                <a:ext uri="{FF2B5EF4-FFF2-40B4-BE49-F238E27FC236}">
+                  <a16:creationId xmlns:a16="http://schemas.microsoft.com/office/drawing/2014/main" id="{65E2607D-8C60-B45D-B8E3-435E31CCB800}"/>
+                </a:ext>
+              </a:extLst>
+            </p:cNvPr>
+            <p:cNvSpPr txBox="1"/>
+            <p:nvPr/>
+          </p:nvSpPr>
+          <p:spPr>
+            <a:xfrm>
+              <a:off x="2493871" y="2168278"/>
+              <a:ext cx="1001428" cy="276999"/>
+            </a:xfrm>
+            <a:prstGeom prst="rect">
+              <a:avLst/>
+            </a:prstGeom>
+            <a:noFill/>
+          </p:spPr>
+          <p:txBody>
+            <a:bodyPr wrap="none" rtlCol="0">
+              <a:spAutoFit/>
+            </a:bodyPr>
+            <a:lstStyle/>
+            <a:p>
+              <a:r>
+                <a:rPr lang="en-US" sz="1200" dirty="0"/>
+                <a:t>Target token</a:t>
+              </a:r>
+            </a:p>
+          </p:txBody>
+        </p:sp>
+      </p:grpSp>
+      <p:sp>
+        <p:nvSpPr>
+          <p:cNvPr id="30" name="TextBox 29">
+            <a:extLst>
+              <a:ext uri="{FF2B5EF4-FFF2-40B4-BE49-F238E27FC236}">
+                <a16:creationId xmlns:a16="http://schemas.microsoft.com/office/drawing/2014/main" id="{9C45E769-5FBC-AA3C-1E49-5D30F8E6F97C}"/>
+              </a:ext>
+            </a:extLst>
+          </p:cNvPr>
+          <p:cNvSpPr txBox="1"/>
+          <p:nvPr/>
+        </p:nvSpPr>
+        <p:spPr>
+          <a:xfrm>
+            <a:off x="1728419" y="2494241"/>
+            <a:ext cx="1690271" cy="276999"/>
+          </a:xfrm>
+          <a:prstGeom prst="rect">
+            <a:avLst/>
+          </a:prstGeom>
+          <a:noFill/>
+        </p:spPr>
+        <p:txBody>
+          <a:bodyPr wrap="none" rtlCol="0">
+            <a:spAutoFit/>
+          </a:bodyPr>
+          <a:lstStyle/>
+          <a:p>
+            <a:r>
+              <a:rPr lang="en-US" sz="1200" dirty="0" err="1"/>
+              <a:t>Bbox</a:t>
+            </a:r>
+            <a:r>
+              <a:rPr lang="en-US" sz="1200" dirty="0"/>
+              <a:t> coordinates (1, 1)</a:t>
+            </a:r>
+          </a:p>
+        </p:txBody>
+      </p:sp>
+      <p:grpSp>
+        <p:nvGrpSpPr>
+          <p:cNvPr id="118" name="Group 117">
+            <a:extLst>
+              <a:ext uri="{FF2B5EF4-FFF2-40B4-BE49-F238E27FC236}">
+                <a16:creationId xmlns:a16="http://schemas.microsoft.com/office/drawing/2014/main" id="{3F48024D-0F1D-D3DE-BAEC-0A8AAE518964}"/>
+              </a:ext>
+            </a:extLst>
+          </p:cNvPr>
+          <p:cNvGrpSpPr/>
+          <p:nvPr/>
+        </p:nvGrpSpPr>
+        <p:grpSpPr>
+          <a:xfrm>
+            <a:off x="309642" y="2489510"/>
+            <a:ext cx="1378326" cy="1437845"/>
+            <a:chOff x="309642" y="2489510"/>
+            <a:chExt cx="1378326" cy="1437845"/>
           </a:xfrm>
         </p:grpSpPr>
         <p:grpSp>
           <p:nvGrpSpPr>
-            <p:cNvPr id="21" name="Group 20">
+            <p:cNvPr id="27" name="Group 26">
               <a:extLst>
                 <a:ext uri="{FF2B5EF4-FFF2-40B4-BE49-F238E27FC236}">
-                  <a16:creationId xmlns:a16="http://schemas.microsoft.com/office/drawing/2014/main" id="{7866C77A-309C-66E4-83CE-6230544BE397}"/>
+                  <a16:creationId xmlns:a16="http://schemas.microsoft.com/office/drawing/2014/main" id="{8BD543AB-B2C7-06D3-5170-CDB516CC0897}"/>
                 </a:ext>
               </a:extLst>
             </p:cNvPr>
@@ -30135,532 +30349,780 @@
           </p:nvGrpSpPr>
           <p:grpSpPr>
             <a:xfrm>
-              <a:off x="1425082" y="2981585"/>
-              <a:ext cx="803426" cy="823852"/>
-              <a:chOff x="1474361" y="3912410"/>
-              <a:chExt cx="1240974" cy="1357045"/>
+              <a:off x="377805" y="2830690"/>
+              <a:ext cx="1078665" cy="1096665"/>
+              <a:chOff x="1153751" y="2704228"/>
+              <a:chExt cx="1074757" cy="1113735"/>
             </a:xfrm>
           </p:grpSpPr>
-          <p:sp>
-            <p:nvSpPr>
-              <p:cNvPr id="7" name="Rectangle 6">
+          <p:grpSp>
+            <p:nvGrpSpPr>
+              <p:cNvPr id="21" name="Group 20">
                 <a:extLst>
                   <a:ext uri="{FF2B5EF4-FFF2-40B4-BE49-F238E27FC236}">
-                    <a16:creationId xmlns:a16="http://schemas.microsoft.com/office/drawing/2014/main" id="{F5AC68AA-7E3A-FB4E-6D42-8D57CF5D2711}"/>
+                    <a16:creationId xmlns:a16="http://schemas.microsoft.com/office/drawing/2014/main" id="{7866C77A-309C-66E4-83CE-6230544BE397}"/>
                   </a:ext>
                 </a:extLst>
               </p:cNvPr>
-              <p:cNvSpPr/>
+              <p:cNvGrpSpPr/>
+              <p:nvPr/>
+            </p:nvGrpSpPr>
+            <p:grpSpPr>
+              <a:xfrm>
+                <a:off x="1425082" y="2981585"/>
+                <a:ext cx="803426" cy="823852"/>
+                <a:chOff x="1474361" y="3912410"/>
+                <a:chExt cx="1240974" cy="1357045"/>
+              </a:xfrm>
+            </p:grpSpPr>
+            <p:sp>
+              <p:nvSpPr>
+                <p:cNvPr id="7" name="Rectangle 6">
+                  <a:extLst>
+                    <a:ext uri="{FF2B5EF4-FFF2-40B4-BE49-F238E27FC236}">
+                      <a16:creationId xmlns:a16="http://schemas.microsoft.com/office/drawing/2014/main" id="{F5AC68AA-7E3A-FB4E-6D42-8D57CF5D2711}"/>
+                    </a:ext>
+                  </a:extLst>
+                </p:cNvPr>
+                <p:cNvSpPr/>
+                <p:nvPr/>
+              </p:nvSpPr>
+              <p:spPr>
+                <a:xfrm>
+                  <a:off x="1474361" y="3914178"/>
+                  <a:ext cx="413658" cy="451759"/>
+                </a:xfrm>
+                <a:prstGeom prst="rect">
+                  <a:avLst/>
+                </a:prstGeom>
+                <a:solidFill>
+                  <a:srgbClr val="0070C0"/>
+                </a:solidFill>
+                <a:ln w="19050" cap="flat" cmpd="sng" algn="ctr">
+                  <a:solidFill>
+                    <a:srgbClr val="FF0000"/>
+                  </a:solidFill>
+                  <a:prstDash val="solid"/>
+                  <a:miter lim="800000"/>
+                </a:ln>
+                <a:effectLst/>
+              </p:spPr>
+              <p:style>
+                <a:lnRef idx="2">
+                  <a:schemeClr val="accent1">
+                    <a:shade val="50000"/>
+                  </a:schemeClr>
+                </a:lnRef>
+                <a:fillRef idx="1">
+                  <a:schemeClr val="accent1"/>
+                </a:fillRef>
+                <a:effectRef idx="0">
+                  <a:schemeClr val="accent1"/>
+                </a:effectRef>
+                <a:fontRef idx="minor">
+                  <a:schemeClr val="lt1"/>
+                </a:fontRef>
+              </p:style>
+              <p:txBody>
+                <a:bodyPr rtlCol="0" anchor="ctr"/>
+                <a:lstStyle/>
+                <a:p>
+                  <a:pPr algn="ctr"/>
+                  <a:endParaRPr lang="en-US" dirty="0"/>
+                </a:p>
+              </p:txBody>
+            </p:sp>
+            <p:sp>
+              <p:nvSpPr>
+                <p:cNvPr id="8" name="Rectangle 7">
+                  <a:extLst>
+                    <a:ext uri="{FF2B5EF4-FFF2-40B4-BE49-F238E27FC236}">
+                      <a16:creationId xmlns:a16="http://schemas.microsoft.com/office/drawing/2014/main" id="{B8372AC8-20B5-5AF3-DB35-A915B993D32C}"/>
+                    </a:ext>
+                  </a:extLst>
+                </p:cNvPr>
+                <p:cNvSpPr/>
+                <p:nvPr/>
+              </p:nvSpPr>
+              <p:spPr>
+                <a:xfrm>
+                  <a:off x="1474361" y="4817696"/>
+                  <a:ext cx="413658" cy="451759"/>
+                </a:xfrm>
+                <a:prstGeom prst="rect">
+                  <a:avLst/>
+                </a:prstGeom>
+                <a:solidFill>
+                  <a:schemeClr val="bg2">
+                    <a:lumMod val="75000"/>
+                  </a:schemeClr>
+                </a:solidFill>
+                <a:ln w="12700" cap="flat" cmpd="sng" algn="ctr">
+                  <a:solidFill>
+                    <a:srgbClr val="FF0000"/>
+                  </a:solidFill>
+                  <a:prstDash val="solid"/>
+                  <a:miter lim="800000"/>
+                </a:ln>
+                <a:effectLst/>
+              </p:spPr>
+              <p:style>
+                <a:lnRef idx="2">
+                  <a:schemeClr val="accent1">
+                    <a:shade val="50000"/>
+                  </a:schemeClr>
+                </a:lnRef>
+                <a:fillRef idx="1">
+                  <a:schemeClr val="accent1"/>
+                </a:fillRef>
+                <a:effectRef idx="0">
+                  <a:schemeClr val="accent1"/>
+                </a:effectRef>
+                <a:fontRef idx="minor">
+                  <a:schemeClr val="lt1"/>
+                </a:fontRef>
+              </p:style>
+              <p:txBody>
+                <a:bodyPr rtlCol="0" anchor="ctr"/>
+                <a:lstStyle/>
+                <a:p>
+                  <a:pPr algn="ctr"/>
+                  <a:endParaRPr lang="en-US" dirty="0"/>
+                </a:p>
+              </p:txBody>
+            </p:sp>
+            <p:sp>
+              <p:nvSpPr>
+                <p:cNvPr id="9" name="Rectangle 8">
+                  <a:extLst>
+                    <a:ext uri="{FF2B5EF4-FFF2-40B4-BE49-F238E27FC236}">
+                      <a16:creationId xmlns:a16="http://schemas.microsoft.com/office/drawing/2014/main" id="{B01BF571-9EBF-7F6A-55EA-2D9729AC1609}"/>
+                    </a:ext>
+                  </a:extLst>
+                </p:cNvPr>
+                <p:cNvSpPr/>
+                <p:nvPr/>
+              </p:nvSpPr>
+              <p:spPr>
+                <a:xfrm>
+                  <a:off x="1474361" y="4365937"/>
+                  <a:ext cx="413658" cy="451759"/>
+                </a:xfrm>
+                <a:prstGeom prst="rect">
+                  <a:avLst/>
+                </a:prstGeom>
+                <a:solidFill>
+                  <a:schemeClr val="accent1">
+                    <a:lumMod val="40000"/>
+                    <a:lumOff val="60000"/>
+                  </a:schemeClr>
+                </a:solidFill>
+                <a:ln w="12700" cap="flat" cmpd="sng" algn="ctr">
+                  <a:solidFill>
+                    <a:srgbClr val="FF0000"/>
+                  </a:solidFill>
+                  <a:prstDash val="solid"/>
+                  <a:miter lim="800000"/>
+                </a:ln>
+                <a:effectLst/>
+              </p:spPr>
+              <p:style>
+                <a:lnRef idx="2">
+                  <a:schemeClr val="accent1">
+                    <a:shade val="50000"/>
+                  </a:schemeClr>
+                </a:lnRef>
+                <a:fillRef idx="1">
+                  <a:schemeClr val="accent1"/>
+                </a:fillRef>
+                <a:effectRef idx="0">
+                  <a:schemeClr val="accent1"/>
+                </a:effectRef>
+                <a:fontRef idx="minor">
+                  <a:schemeClr val="lt1"/>
+                </a:fontRef>
+              </p:style>
+              <p:txBody>
+                <a:bodyPr rtlCol="0" anchor="ctr"/>
+                <a:lstStyle/>
+                <a:p>
+                  <a:pPr algn="ctr"/>
+                  <a:endParaRPr lang="en-US"/>
+                </a:p>
+              </p:txBody>
+            </p:sp>
+            <p:sp>
+              <p:nvSpPr>
+                <p:cNvPr id="11" name="Rectangle 10">
+                  <a:extLst>
+                    <a:ext uri="{FF2B5EF4-FFF2-40B4-BE49-F238E27FC236}">
+                      <a16:creationId xmlns:a16="http://schemas.microsoft.com/office/drawing/2014/main" id="{87C11313-FC6C-2781-A59D-EA8401B0B30D}"/>
+                    </a:ext>
+                  </a:extLst>
+                </p:cNvPr>
+                <p:cNvSpPr/>
+                <p:nvPr/>
+              </p:nvSpPr>
+              <p:spPr>
+                <a:xfrm>
+                  <a:off x="1888019" y="3912999"/>
+                  <a:ext cx="413658" cy="451759"/>
+                </a:xfrm>
+                <a:prstGeom prst="rect">
+                  <a:avLst/>
+                </a:prstGeom>
+                <a:solidFill>
+                  <a:schemeClr val="tx2">
+                    <a:lumMod val="25000"/>
+                    <a:lumOff val="75000"/>
+                  </a:schemeClr>
+                </a:solidFill>
+                <a:ln w="19050" cap="flat" cmpd="sng" algn="ctr">
+                  <a:solidFill>
+                    <a:srgbClr val="FF0000"/>
+                  </a:solidFill>
+                  <a:prstDash val="solid"/>
+                  <a:miter lim="800000"/>
+                </a:ln>
+                <a:effectLst/>
+              </p:spPr>
+              <p:style>
+                <a:lnRef idx="2">
+                  <a:schemeClr val="accent1">
+                    <a:shade val="50000"/>
+                  </a:schemeClr>
+                </a:lnRef>
+                <a:fillRef idx="1">
+                  <a:schemeClr val="accent1"/>
+                </a:fillRef>
+                <a:effectRef idx="0">
+                  <a:schemeClr val="accent1"/>
+                </a:effectRef>
+                <a:fontRef idx="minor">
+                  <a:schemeClr val="lt1"/>
+                </a:fontRef>
+              </p:style>
+              <p:txBody>
+                <a:bodyPr rtlCol="0" anchor="ctr"/>
+                <a:lstStyle/>
+                <a:p>
+                  <a:pPr algn="ctr"/>
+                  <a:endParaRPr lang="en-US" dirty="0"/>
+                </a:p>
+              </p:txBody>
+            </p:sp>
+            <p:sp>
+              <p:nvSpPr>
+                <p:cNvPr id="13" name="Rectangle 12">
+                  <a:extLst>
+                    <a:ext uri="{FF2B5EF4-FFF2-40B4-BE49-F238E27FC236}">
+                      <a16:creationId xmlns:a16="http://schemas.microsoft.com/office/drawing/2014/main" id="{FD0436B8-B797-9DC9-B7B6-CB4E1515EF80}"/>
+                    </a:ext>
+                  </a:extLst>
+                </p:cNvPr>
+                <p:cNvSpPr/>
+                <p:nvPr/>
+              </p:nvSpPr>
+              <p:spPr>
+                <a:xfrm>
+                  <a:off x="1888019" y="4365347"/>
+                  <a:ext cx="413658" cy="451759"/>
+                </a:xfrm>
+                <a:prstGeom prst="rect">
+                  <a:avLst/>
+                </a:prstGeom>
+                <a:solidFill>
+                  <a:srgbClr val="00B050"/>
+                </a:solidFill>
+                <a:ln w="12700" cap="flat" cmpd="sng" algn="ctr">
+                  <a:solidFill>
+                    <a:srgbClr val="FF0000"/>
+                  </a:solidFill>
+                  <a:prstDash val="solid"/>
+                  <a:miter lim="800000"/>
+                </a:ln>
+                <a:effectLst/>
+              </p:spPr>
+              <p:style>
+                <a:lnRef idx="2">
+                  <a:schemeClr val="accent1">
+                    <a:shade val="50000"/>
+                  </a:schemeClr>
+                </a:lnRef>
+                <a:fillRef idx="1">
+                  <a:schemeClr val="accent1"/>
+                </a:fillRef>
+                <a:effectRef idx="0">
+                  <a:schemeClr val="accent1"/>
+                </a:effectRef>
+                <a:fontRef idx="minor">
+                  <a:schemeClr val="lt1"/>
+                </a:fontRef>
+              </p:style>
+              <p:txBody>
+                <a:bodyPr rtlCol="0" anchor="ctr"/>
+                <a:lstStyle/>
+                <a:p>
+                  <a:pPr algn="ctr"/>
+                  <a:endParaRPr lang="en-US" dirty="0"/>
+                </a:p>
+              </p:txBody>
+            </p:sp>
+            <p:sp>
+              <p:nvSpPr>
+                <p:cNvPr id="15" name="Rectangle 14">
+                  <a:extLst>
+                    <a:ext uri="{FF2B5EF4-FFF2-40B4-BE49-F238E27FC236}">
+                      <a16:creationId xmlns:a16="http://schemas.microsoft.com/office/drawing/2014/main" id="{DA728908-ECA5-54C0-DB04-06DC04FF668B}"/>
+                    </a:ext>
+                  </a:extLst>
+                </p:cNvPr>
+                <p:cNvSpPr/>
+                <p:nvPr/>
+              </p:nvSpPr>
+              <p:spPr>
+                <a:xfrm>
+                  <a:off x="1888019" y="4817695"/>
+                  <a:ext cx="413658" cy="451759"/>
+                </a:xfrm>
+                <a:prstGeom prst="rect">
+                  <a:avLst/>
+                </a:prstGeom>
+                <a:solidFill>
+                  <a:schemeClr val="tx1">
+                    <a:lumMod val="50000"/>
+                    <a:lumOff val="50000"/>
+                  </a:schemeClr>
+                </a:solidFill>
+                <a:ln w="12700" cap="flat" cmpd="sng" algn="ctr">
+                  <a:solidFill>
+                    <a:srgbClr val="FF0000"/>
+                  </a:solidFill>
+                  <a:prstDash val="solid"/>
+                  <a:miter lim="800000"/>
+                </a:ln>
+                <a:effectLst/>
+              </p:spPr>
+              <p:style>
+                <a:lnRef idx="2">
+                  <a:schemeClr val="accent1">
+                    <a:shade val="50000"/>
+                  </a:schemeClr>
+                </a:lnRef>
+                <a:fillRef idx="1">
+                  <a:schemeClr val="accent1"/>
+                </a:fillRef>
+                <a:effectRef idx="0">
+                  <a:schemeClr val="accent1"/>
+                </a:effectRef>
+                <a:fontRef idx="minor">
+                  <a:schemeClr val="lt1"/>
+                </a:fontRef>
+              </p:style>
+              <p:txBody>
+                <a:bodyPr rtlCol="0" anchor="ctr"/>
+                <a:lstStyle/>
+                <a:p>
+                  <a:pPr algn="ctr"/>
+                  <a:endParaRPr lang="en-US"/>
+                </a:p>
+              </p:txBody>
+            </p:sp>
+            <p:sp>
+              <p:nvSpPr>
+                <p:cNvPr id="17" name="Rectangle 16">
+                  <a:extLst>
+                    <a:ext uri="{FF2B5EF4-FFF2-40B4-BE49-F238E27FC236}">
+                      <a16:creationId xmlns:a16="http://schemas.microsoft.com/office/drawing/2014/main" id="{7BEBC64D-B8B8-F474-63A1-1FB386D5C933}"/>
+                    </a:ext>
+                  </a:extLst>
+                </p:cNvPr>
+                <p:cNvSpPr/>
+                <p:nvPr/>
+              </p:nvSpPr>
+              <p:spPr>
+                <a:xfrm>
+                  <a:off x="2301677" y="3912410"/>
+                  <a:ext cx="413658" cy="451759"/>
+                </a:xfrm>
+                <a:prstGeom prst="rect">
+                  <a:avLst/>
+                </a:prstGeom>
+                <a:solidFill>
+                  <a:schemeClr val="accent5">
+                    <a:lumMod val="40000"/>
+                    <a:lumOff val="60000"/>
+                  </a:schemeClr>
+                </a:solidFill>
+                <a:ln w="19050" cap="flat" cmpd="sng" algn="ctr">
+                  <a:solidFill>
+                    <a:srgbClr val="FF0000"/>
+                  </a:solidFill>
+                  <a:prstDash val="solid"/>
+                  <a:miter lim="800000"/>
+                </a:ln>
+                <a:effectLst/>
+              </p:spPr>
+              <p:style>
+                <a:lnRef idx="2">
+                  <a:schemeClr val="accent1">
+                    <a:shade val="50000"/>
+                  </a:schemeClr>
+                </a:lnRef>
+                <a:fillRef idx="1">
+                  <a:schemeClr val="accent1"/>
+                </a:fillRef>
+                <a:effectRef idx="0">
+                  <a:schemeClr val="accent1"/>
+                </a:effectRef>
+                <a:fontRef idx="minor">
+                  <a:schemeClr val="lt1"/>
+                </a:fontRef>
+              </p:style>
+              <p:txBody>
+                <a:bodyPr rtlCol="0" anchor="ctr"/>
+                <a:lstStyle/>
+                <a:p>
+                  <a:pPr algn="ctr"/>
+                  <a:endParaRPr lang="en-US" dirty="0"/>
+                </a:p>
+              </p:txBody>
+            </p:sp>
+            <p:sp>
+              <p:nvSpPr>
+                <p:cNvPr id="18" name="Rectangle 17">
+                  <a:extLst>
+                    <a:ext uri="{FF2B5EF4-FFF2-40B4-BE49-F238E27FC236}">
+                      <a16:creationId xmlns:a16="http://schemas.microsoft.com/office/drawing/2014/main" id="{139498C6-4488-FDFC-5CA0-9326816D1872}"/>
+                    </a:ext>
+                  </a:extLst>
+                </p:cNvPr>
+                <p:cNvSpPr/>
+                <p:nvPr/>
+              </p:nvSpPr>
+              <p:spPr>
+                <a:xfrm>
+                  <a:off x="2301677" y="4364758"/>
+                  <a:ext cx="413658" cy="451759"/>
+                </a:xfrm>
+                <a:prstGeom prst="rect">
+                  <a:avLst/>
+                </a:prstGeom>
+                <a:solidFill>
+                  <a:schemeClr val="accent4">
+                    <a:lumMod val="60000"/>
+                    <a:lumOff val="40000"/>
+                  </a:schemeClr>
+                </a:solidFill>
+                <a:ln w="12700" cap="flat" cmpd="sng" algn="ctr">
+                  <a:solidFill>
+                    <a:srgbClr val="FF0000"/>
+                  </a:solidFill>
+                  <a:prstDash val="solid"/>
+                  <a:miter lim="800000"/>
+                </a:ln>
+                <a:effectLst/>
+              </p:spPr>
+              <p:style>
+                <a:lnRef idx="2">
+                  <a:schemeClr val="accent1">
+                    <a:shade val="50000"/>
+                  </a:schemeClr>
+                </a:lnRef>
+                <a:fillRef idx="1">
+                  <a:schemeClr val="accent1"/>
+                </a:fillRef>
+                <a:effectRef idx="0">
+                  <a:schemeClr val="accent1"/>
+                </a:effectRef>
+                <a:fontRef idx="minor">
+                  <a:schemeClr val="lt1"/>
+                </a:fontRef>
+              </p:style>
+              <p:txBody>
+                <a:bodyPr rtlCol="0" anchor="ctr"/>
+                <a:lstStyle/>
+                <a:p>
+                  <a:pPr algn="ctr"/>
+                  <a:endParaRPr lang="en-US"/>
+                </a:p>
+              </p:txBody>
+            </p:sp>
+            <p:sp>
+              <p:nvSpPr>
+                <p:cNvPr id="19" name="Rectangle 18">
+                  <a:extLst>
+                    <a:ext uri="{FF2B5EF4-FFF2-40B4-BE49-F238E27FC236}">
+                      <a16:creationId xmlns:a16="http://schemas.microsoft.com/office/drawing/2014/main" id="{7A5CCD2D-DB4E-CEB6-FEC1-1DBF89DDD8DA}"/>
+                    </a:ext>
+                  </a:extLst>
+                </p:cNvPr>
+                <p:cNvSpPr/>
+                <p:nvPr/>
+              </p:nvSpPr>
+              <p:spPr>
+                <a:xfrm>
+                  <a:off x="2301677" y="4817106"/>
+                  <a:ext cx="413658" cy="451759"/>
+                </a:xfrm>
+                <a:prstGeom prst="rect">
+                  <a:avLst/>
+                </a:prstGeom>
+                <a:solidFill>
+                  <a:srgbClr val="002060"/>
+                </a:solidFill>
+                <a:ln w="12700" cap="flat" cmpd="sng" algn="ctr">
+                  <a:solidFill>
+                    <a:srgbClr val="FF0000"/>
+                  </a:solidFill>
+                  <a:prstDash val="solid"/>
+                  <a:miter lim="800000"/>
+                </a:ln>
+                <a:effectLst/>
+              </p:spPr>
+              <p:style>
+                <a:lnRef idx="2">
+                  <a:schemeClr val="accent1">
+                    <a:shade val="50000"/>
+                  </a:schemeClr>
+                </a:lnRef>
+                <a:fillRef idx="1">
+                  <a:schemeClr val="accent1"/>
+                </a:fillRef>
+                <a:effectRef idx="0">
+                  <a:schemeClr val="accent1"/>
+                </a:effectRef>
+                <a:fontRef idx="minor">
+                  <a:schemeClr val="lt1"/>
+                </a:fontRef>
+              </p:style>
+              <p:txBody>
+                <a:bodyPr rtlCol="0" anchor="ctr"/>
+                <a:lstStyle/>
+                <a:p>
+                  <a:pPr algn="ctr"/>
+                  <a:endParaRPr lang="en-US"/>
+                </a:p>
+              </p:txBody>
+            </p:sp>
+          </p:grpSp>
+          <p:sp>
+            <p:nvSpPr>
+              <p:cNvPr id="20" name="TextBox 19">
+                <a:extLst>
+                  <a:ext uri="{FF2B5EF4-FFF2-40B4-BE49-F238E27FC236}">
+                    <a16:creationId xmlns:a16="http://schemas.microsoft.com/office/drawing/2014/main" id="{1F5C5527-552C-C5C5-FCFF-13038598C6F8}"/>
+                  </a:ext>
+                </a:extLst>
+              </p:cNvPr>
+              <p:cNvSpPr txBox="1"/>
               <p:nvPr/>
             </p:nvSpPr>
             <p:spPr>
               <a:xfrm>
-                <a:off x="1474361" y="3914178"/>
-                <a:ext cx="413658" cy="451759"/>
+                <a:off x="1157273" y="2965360"/>
+                <a:ext cx="197116" cy="276999"/>
               </a:xfrm>
               <a:prstGeom prst="rect">
                 <a:avLst/>
               </a:prstGeom>
-              <a:solidFill>
-                <a:srgbClr val="002060"/>
-              </a:solidFill>
-              <a:ln w="19050" cap="flat" cmpd="sng" algn="ctr">
-                <a:solidFill>
-                  <a:srgbClr val="FF0000"/>
-                </a:solidFill>
-                <a:prstDash val="solid"/>
-                <a:miter lim="800000"/>
-              </a:ln>
-              <a:effectLst/>
+              <a:noFill/>
             </p:spPr>
-            <p:style>
-              <a:lnRef idx="2">
-                <a:schemeClr val="accent1">
-                  <a:shade val="50000"/>
-                </a:schemeClr>
-              </a:lnRef>
-              <a:fillRef idx="1">
-                <a:schemeClr val="accent1"/>
-              </a:fillRef>
-              <a:effectRef idx="0">
-                <a:schemeClr val="accent1"/>
-              </a:effectRef>
-              <a:fontRef idx="minor">
-                <a:schemeClr val="lt1"/>
-              </a:fontRef>
-            </p:style>
             <p:txBody>
-              <a:bodyPr rtlCol="0" anchor="ctr"/>
+              <a:bodyPr wrap="square" rtlCol="0">
+                <a:spAutoFit/>
+              </a:bodyPr>
               <a:lstStyle/>
               <a:p>
-                <a:pPr algn="ctr"/>
-                <a:endParaRPr lang="en-US" dirty="0"/>
+                <a:r>
+                  <a:rPr lang="en-US" sz="1200" dirty="0"/>
+                  <a:t>0</a:t>
+                </a:r>
               </a:p>
             </p:txBody>
           </p:sp>
           <p:sp>
             <p:nvSpPr>
-              <p:cNvPr id="8" name="Rectangle 7">
+              <p:cNvPr id="22" name="TextBox 21">
                 <a:extLst>
                   <a:ext uri="{FF2B5EF4-FFF2-40B4-BE49-F238E27FC236}">
-                    <a16:creationId xmlns:a16="http://schemas.microsoft.com/office/drawing/2014/main" id="{B8372AC8-20B5-5AF3-DB35-A915B993D32C}"/>
+                    <a16:creationId xmlns:a16="http://schemas.microsoft.com/office/drawing/2014/main" id="{02958587-5936-E424-EFC7-F117A3832E56}"/>
                   </a:ext>
                 </a:extLst>
               </p:cNvPr>
-              <p:cNvSpPr/>
+              <p:cNvSpPr txBox="1"/>
               <p:nvPr/>
             </p:nvSpPr>
             <p:spPr>
               <a:xfrm>
-                <a:off x="1474361" y="4817696"/>
-                <a:ext cx="413658" cy="451759"/>
+                <a:off x="1421559" y="2707029"/>
+                <a:ext cx="197116" cy="276999"/>
               </a:xfrm>
               <a:prstGeom prst="rect">
                 <a:avLst/>
               </a:prstGeom>
-              <a:solidFill>
-                <a:srgbClr val="002060"/>
-              </a:solidFill>
-              <a:ln w="12700" cap="flat" cmpd="sng" algn="ctr">
-                <a:solidFill>
-                  <a:srgbClr val="FF0000"/>
-                </a:solidFill>
-                <a:prstDash val="solid"/>
-                <a:miter lim="800000"/>
-              </a:ln>
-              <a:effectLst/>
+              <a:noFill/>
             </p:spPr>
-            <p:style>
-              <a:lnRef idx="2">
-                <a:schemeClr val="accent1">
-                  <a:shade val="50000"/>
-                </a:schemeClr>
-              </a:lnRef>
-              <a:fillRef idx="1">
-                <a:schemeClr val="accent1"/>
-              </a:fillRef>
-              <a:effectRef idx="0">
-                <a:schemeClr val="accent1"/>
-              </a:effectRef>
-              <a:fontRef idx="minor">
-                <a:schemeClr val="lt1"/>
-              </a:fontRef>
-            </p:style>
             <p:txBody>
-              <a:bodyPr rtlCol="0" anchor="ctr"/>
+              <a:bodyPr wrap="square" rtlCol="0">
+                <a:spAutoFit/>
+              </a:bodyPr>
               <a:lstStyle/>
               <a:p>
-                <a:pPr algn="ctr"/>
-                <a:endParaRPr lang="en-US" dirty="0"/>
+                <a:r>
+                  <a:rPr lang="en-US" sz="1200" dirty="0"/>
+                  <a:t>0</a:t>
+                </a:r>
               </a:p>
             </p:txBody>
           </p:sp>
           <p:sp>
             <p:nvSpPr>
-              <p:cNvPr id="9" name="Rectangle 8">
+              <p:cNvPr id="23" name="TextBox 22">
                 <a:extLst>
                   <a:ext uri="{FF2B5EF4-FFF2-40B4-BE49-F238E27FC236}">
-                    <a16:creationId xmlns:a16="http://schemas.microsoft.com/office/drawing/2014/main" id="{B01BF571-9EBF-7F6A-55EA-2D9729AC1609}"/>
+                    <a16:creationId xmlns:a16="http://schemas.microsoft.com/office/drawing/2014/main" id="{019B66AD-9369-D060-C817-C9F6CEEE90B9}"/>
                   </a:ext>
                 </a:extLst>
               </p:cNvPr>
-              <p:cNvSpPr/>
+              <p:cNvSpPr txBox="1"/>
               <p:nvPr/>
             </p:nvSpPr>
             <p:spPr>
               <a:xfrm>
-                <a:off x="1474361" y="4365937"/>
-                <a:ext cx="413658" cy="451759"/>
+                <a:off x="1696308" y="2706314"/>
+                <a:ext cx="197116" cy="276999"/>
               </a:xfrm>
               <a:prstGeom prst="rect">
                 <a:avLst/>
               </a:prstGeom>
-              <a:solidFill>
-                <a:srgbClr val="002060"/>
-              </a:solidFill>
-              <a:ln w="12700" cap="flat" cmpd="sng" algn="ctr">
-                <a:solidFill>
-                  <a:srgbClr val="FF0000"/>
-                </a:solidFill>
-                <a:prstDash val="solid"/>
-                <a:miter lim="800000"/>
-              </a:ln>
-              <a:effectLst/>
+              <a:noFill/>
             </p:spPr>
-            <p:style>
-              <a:lnRef idx="2">
-                <a:schemeClr val="accent1">
-                  <a:shade val="50000"/>
-                </a:schemeClr>
-              </a:lnRef>
-              <a:fillRef idx="1">
-                <a:schemeClr val="accent1"/>
-              </a:fillRef>
-              <a:effectRef idx="0">
-                <a:schemeClr val="accent1"/>
-              </a:effectRef>
-              <a:fontRef idx="minor">
-                <a:schemeClr val="lt1"/>
-              </a:fontRef>
-            </p:style>
             <p:txBody>
-              <a:bodyPr rtlCol="0" anchor="ctr"/>
+              <a:bodyPr wrap="square" rtlCol="0">
+                <a:spAutoFit/>
+              </a:bodyPr>
               <a:lstStyle/>
               <a:p>
-                <a:pPr algn="ctr"/>
-                <a:endParaRPr lang="en-US"/>
+                <a:r>
+                  <a:rPr lang="en-US" sz="1200" dirty="0"/>
+                  <a:t>1</a:t>
+                </a:r>
               </a:p>
             </p:txBody>
           </p:sp>
           <p:sp>
             <p:nvSpPr>
-              <p:cNvPr id="11" name="Rectangle 10">
+              <p:cNvPr id="24" name="TextBox 23">
                 <a:extLst>
                   <a:ext uri="{FF2B5EF4-FFF2-40B4-BE49-F238E27FC236}">
-                    <a16:creationId xmlns:a16="http://schemas.microsoft.com/office/drawing/2014/main" id="{87C11313-FC6C-2781-A59D-EA8401B0B30D}"/>
+                    <a16:creationId xmlns:a16="http://schemas.microsoft.com/office/drawing/2014/main" id="{ABB64FD7-36F2-BF07-9615-D0F9AA1EB0CA}"/>
                   </a:ext>
                 </a:extLst>
               </p:cNvPr>
-              <p:cNvSpPr/>
+              <p:cNvSpPr txBox="1"/>
               <p:nvPr/>
             </p:nvSpPr>
             <p:spPr>
               <a:xfrm>
-                <a:off x="1888019" y="3912999"/>
-                <a:ext cx="413658" cy="451759"/>
+                <a:off x="1975451" y="2704228"/>
+                <a:ext cx="197116" cy="276999"/>
               </a:xfrm>
               <a:prstGeom prst="rect">
                 <a:avLst/>
               </a:prstGeom>
-              <a:solidFill>
-                <a:srgbClr val="002060"/>
-              </a:solidFill>
-              <a:ln w="19050" cap="flat" cmpd="sng" algn="ctr">
-                <a:solidFill>
-                  <a:srgbClr val="FF0000"/>
-                </a:solidFill>
-                <a:prstDash val="solid"/>
-                <a:miter lim="800000"/>
-              </a:ln>
-              <a:effectLst/>
+              <a:noFill/>
             </p:spPr>
-            <p:style>
-              <a:lnRef idx="2">
-                <a:schemeClr val="accent1">
-                  <a:shade val="50000"/>
-                </a:schemeClr>
-              </a:lnRef>
-              <a:fillRef idx="1">
-                <a:schemeClr val="accent1"/>
-              </a:fillRef>
-              <a:effectRef idx="0">
-                <a:schemeClr val="accent1"/>
-              </a:effectRef>
-              <a:fontRef idx="minor">
-                <a:schemeClr val="lt1"/>
-              </a:fontRef>
-            </p:style>
             <p:txBody>
-              <a:bodyPr rtlCol="0" anchor="ctr"/>
+              <a:bodyPr wrap="square" rtlCol="0">
+                <a:spAutoFit/>
+              </a:bodyPr>
               <a:lstStyle/>
               <a:p>
-                <a:pPr algn="ctr"/>
-                <a:endParaRPr lang="en-US" dirty="0"/>
+                <a:r>
+                  <a:rPr lang="en-US" sz="1200" dirty="0"/>
+                  <a:t>2</a:t>
+                </a:r>
               </a:p>
             </p:txBody>
           </p:sp>
           <p:sp>
             <p:nvSpPr>
-              <p:cNvPr id="13" name="Rectangle 12">
+              <p:cNvPr id="25" name="TextBox 24">
                 <a:extLst>
                   <a:ext uri="{FF2B5EF4-FFF2-40B4-BE49-F238E27FC236}">
-                    <a16:creationId xmlns:a16="http://schemas.microsoft.com/office/drawing/2014/main" id="{FD0436B8-B797-9DC9-B7B6-CB4E1515EF80}"/>
+                    <a16:creationId xmlns:a16="http://schemas.microsoft.com/office/drawing/2014/main" id="{E4040D5D-E88F-F916-2A4D-7C6EF20DCADB}"/>
                   </a:ext>
                 </a:extLst>
               </p:cNvPr>
-              <p:cNvSpPr/>
+              <p:cNvSpPr txBox="1"/>
               <p:nvPr/>
             </p:nvSpPr>
             <p:spPr>
               <a:xfrm>
-                <a:off x="1888019" y="4365347"/>
-                <a:ext cx="413658" cy="451759"/>
+                <a:off x="1157273" y="3253463"/>
+                <a:ext cx="197116" cy="276999"/>
               </a:xfrm>
               <a:prstGeom prst="rect">
                 <a:avLst/>
               </a:prstGeom>
-              <a:solidFill>
-                <a:srgbClr val="00B050"/>
-              </a:solidFill>
-              <a:ln w="12700" cap="flat" cmpd="sng" algn="ctr">
-                <a:solidFill>
-                  <a:srgbClr val="FF0000"/>
-                </a:solidFill>
-                <a:prstDash val="solid"/>
-                <a:miter lim="800000"/>
-              </a:ln>
-              <a:effectLst/>
+              <a:noFill/>
             </p:spPr>
-            <p:style>
-              <a:lnRef idx="2">
-                <a:schemeClr val="accent1">
-                  <a:shade val="50000"/>
-                </a:schemeClr>
-              </a:lnRef>
-              <a:fillRef idx="1">
-                <a:schemeClr val="accent1"/>
-              </a:fillRef>
-              <a:effectRef idx="0">
-                <a:schemeClr val="accent1"/>
-              </a:effectRef>
-              <a:fontRef idx="minor">
-                <a:schemeClr val="lt1"/>
-              </a:fontRef>
-            </p:style>
             <p:txBody>
-              <a:bodyPr rtlCol="0" anchor="ctr"/>
+              <a:bodyPr wrap="square" rtlCol="0">
+                <a:spAutoFit/>
+              </a:bodyPr>
               <a:lstStyle/>
               <a:p>
-                <a:pPr algn="ctr"/>
-                <a:endParaRPr lang="en-US"/>
+                <a:r>
+                  <a:rPr lang="en-US" sz="1200" dirty="0"/>
+                  <a:t>1</a:t>
+                </a:r>
               </a:p>
             </p:txBody>
           </p:sp>
           <p:sp>
             <p:nvSpPr>
-              <p:cNvPr id="15" name="Rectangle 14">
+              <p:cNvPr id="26" name="TextBox 25">
                 <a:extLst>
                   <a:ext uri="{FF2B5EF4-FFF2-40B4-BE49-F238E27FC236}">
-                    <a16:creationId xmlns:a16="http://schemas.microsoft.com/office/drawing/2014/main" id="{DA728908-ECA5-54C0-DB04-06DC04FF668B}"/>
+                    <a16:creationId xmlns:a16="http://schemas.microsoft.com/office/drawing/2014/main" id="{B9F45E0B-334F-3E17-FEAE-CDA38EC26256}"/>
                   </a:ext>
                 </a:extLst>
               </p:cNvPr>
-              <p:cNvSpPr/>
+              <p:cNvSpPr txBox="1"/>
               <p:nvPr/>
             </p:nvSpPr>
             <p:spPr>
               <a:xfrm>
-                <a:off x="1888019" y="4817695"/>
-                <a:ext cx="413658" cy="451759"/>
+                <a:off x="1153751" y="3540964"/>
+                <a:ext cx="197116" cy="276999"/>
               </a:xfrm>
               <a:prstGeom prst="rect">
                 <a:avLst/>
               </a:prstGeom>
-              <a:solidFill>
-                <a:srgbClr val="002060"/>
-              </a:solidFill>
-              <a:ln w="12700" cap="flat" cmpd="sng" algn="ctr">
-                <a:solidFill>
-                  <a:srgbClr val="FF0000"/>
-                </a:solidFill>
-                <a:prstDash val="solid"/>
-                <a:miter lim="800000"/>
-              </a:ln>
-              <a:effectLst/>
+              <a:noFill/>
             </p:spPr>
-            <p:style>
-              <a:lnRef idx="2">
-                <a:schemeClr val="accent1">
-                  <a:shade val="50000"/>
-                </a:schemeClr>
-              </a:lnRef>
-              <a:fillRef idx="1">
-                <a:schemeClr val="accent1"/>
-              </a:fillRef>
-              <a:effectRef idx="0">
-                <a:schemeClr val="accent1"/>
-              </a:effectRef>
-              <a:fontRef idx="minor">
-                <a:schemeClr val="lt1"/>
-              </a:fontRef>
-            </p:style>
             <p:txBody>
-              <a:bodyPr rtlCol="0" anchor="ctr"/>
+              <a:bodyPr wrap="square" rtlCol="0">
+                <a:spAutoFit/>
+              </a:bodyPr>
               <a:lstStyle/>
               <a:p>
-                <a:pPr algn="ctr"/>
-                <a:endParaRPr lang="en-US"/>
-              </a:p>
-            </p:txBody>
-          </p:sp>
-          <p:sp>
-            <p:nvSpPr>
-              <p:cNvPr id="17" name="Rectangle 16">
-                <a:extLst>
-                  <a:ext uri="{FF2B5EF4-FFF2-40B4-BE49-F238E27FC236}">
-                    <a16:creationId xmlns:a16="http://schemas.microsoft.com/office/drawing/2014/main" id="{7BEBC64D-B8B8-F474-63A1-1FB386D5C933}"/>
-                  </a:ext>
-                </a:extLst>
-              </p:cNvPr>
-              <p:cNvSpPr/>
-              <p:nvPr/>
-            </p:nvSpPr>
-            <p:spPr>
-              <a:xfrm>
-                <a:off x="2301677" y="3912410"/>
-                <a:ext cx="413658" cy="451759"/>
-              </a:xfrm>
-              <a:prstGeom prst="rect">
-                <a:avLst/>
-              </a:prstGeom>
-              <a:solidFill>
-                <a:srgbClr val="002060"/>
-              </a:solidFill>
-              <a:ln w="19050" cap="flat" cmpd="sng" algn="ctr">
-                <a:solidFill>
-                  <a:srgbClr val="FF0000"/>
-                </a:solidFill>
-                <a:prstDash val="solid"/>
-                <a:miter lim="800000"/>
-              </a:ln>
-              <a:effectLst/>
-            </p:spPr>
-            <p:style>
-              <a:lnRef idx="2">
-                <a:schemeClr val="accent1">
-                  <a:shade val="50000"/>
-                </a:schemeClr>
-              </a:lnRef>
-              <a:fillRef idx="1">
-                <a:schemeClr val="accent1"/>
-              </a:fillRef>
-              <a:effectRef idx="0">
-                <a:schemeClr val="accent1"/>
-              </a:effectRef>
-              <a:fontRef idx="minor">
-                <a:schemeClr val="lt1"/>
-              </a:fontRef>
-            </p:style>
-            <p:txBody>
-              <a:bodyPr rtlCol="0" anchor="ctr"/>
-              <a:lstStyle/>
-              <a:p>
-                <a:pPr algn="ctr"/>
-                <a:endParaRPr lang="en-US" dirty="0"/>
-              </a:p>
-            </p:txBody>
-          </p:sp>
-          <p:sp>
-            <p:nvSpPr>
-              <p:cNvPr id="18" name="Rectangle 17">
-                <a:extLst>
-                  <a:ext uri="{FF2B5EF4-FFF2-40B4-BE49-F238E27FC236}">
-                    <a16:creationId xmlns:a16="http://schemas.microsoft.com/office/drawing/2014/main" id="{139498C6-4488-FDFC-5CA0-9326816D1872}"/>
-                  </a:ext>
-                </a:extLst>
-              </p:cNvPr>
-              <p:cNvSpPr/>
-              <p:nvPr/>
-            </p:nvSpPr>
-            <p:spPr>
-              <a:xfrm>
-                <a:off x="2301677" y="4364758"/>
-                <a:ext cx="413658" cy="451759"/>
-              </a:xfrm>
-              <a:prstGeom prst="rect">
-                <a:avLst/>
-              </a:prstGeom>
-              <a:solidFill>
-                <a:srgbClr val="002060"/>
-              </a:solidFill>
-              <a:ln w="12700" cap="flat" cmpd="sng" algn="ctr">
-                <a:solidFill>
-                  <a:srgbClr val="FF0000"/>
-                </a:solidFill>
-                <a:prstDash val="solid"/>
-                <a:miter lim="800000"/>
-              </a:ln>
-              <a:effectLst/>
-            </p:spPr>
-            <p:style>
-              <a:lnRef idx="2">
-                <a:schemeClr val="accent1">
-                  <a:shade val="50000"/>
-                </a:schemeClr>
-              </a:lnRef>
-              <a:fillRef idx="1">
-                <a:schemeClr val="accent1"/>
-              </a:fillRef>
-              <a:effectRef idx="0">
-                <a:schemeClr val="accent1"/>
-              </a:effectRef>
-              <a:fontRef idx="minor">
-                <a:schemeClr val="lt1"/>
-              </a:fontRef>
-            </p:style>
-            <p:txBody>
-              <a:bodyPr rtlCol="0" anchor="ctr"/>
-              <a:lstStyle/>
-              <a:p>
-                <a:pPr algn="ctr"/>
-                <a:endParaRPr lang="en-US"/>
-              </a:p>
-            </p:txBody>
-          </p:sp>
-          <p:sp>
-            <p:nvSpPr>
-              <p:cNvPr id="19" name="Rectangle 18">
-                <a:extLst>
-                  <a:ext uri="{FF2B5EF4-FFF2-40B4-BE49-F238E27FC236}">
-                    <a16:creationId xmlns:a16="http://schemas.microsoft.com/office/drawing/2014/main" id="{7A5CCD2D-DB4E-CEB6-FEC1-1DBF89DDD8DA}"/>
-                  </a:ext>
-                </a:extLst>
-              </p:cNvPr>
-              <p:cNvSpPr/>
-              <p:nvPr/>
-            </p:nvSpPr>
-            <p:spPr>
-              <a:xfrm>
-                <a:off x="2301677" y="4817106"/>
-                <a:ext cx="413658" cy="451759"/>
-              </a:xfrm>
-              <a:prstGeom prst="rect">
-                <a:avLst/>
-              </a:prstGeom>
-              <a:solidFill>
-                <a:srgbClr val="002060"/>
-              </a:solidFill>
-              <a:ln w="12700" cap="flat" cmpd="sng" algn="ctr">
-                <a:solidFill>
-                  <a:srgbClr val="FF0000"/>
-                </a:solidFill>
-                <a:prstDash val="solid"/>
-                <a:miter lim="800000"/>
-              </a:ln>
-              <a:effectLst/>
-            </p:spPr>
-            <p:style>
-              <a:lnRef idx="2">
-                <a:schemeClr val="accent1">
-                  <a:shade val="50000"/>
-                </a:schemeClr>
-              </a:lnRef>
-              <a:fillRef idx="1">
-                <a:schemeClr val="accent1"/>
-              </a:fillRef>
-              <a:effectRef idx="0">
-                <a:schemeClr val="accent1"/>
-              </a:effectRef>
-              <a:fontRef idx="minor">
-                <a:schemeClr val="lt1"/>
-              </a:fontRef>
-            </p:style>
-            <p:txBody>
-              <a:bodyPr rtlCol="0" anchor="ctr"/>
-              <a:lstStyle/>
-              <a:p>
-                <a:pPr algn="ctr"/>
-                <a:endParaRPr lang="en-US"/>
+                <a:r>
+                  <a:rPr lang="en-US" sz="1200" dirty="0"/>
+                  <a:t>2</a:t>
+                </a:r>
               </a:p>
             </p:txBody>
           </p:sp>
         </p:grpSp>
         <p:sp>
           <p:nvSpPr>
-            <p:cNvPr id="20" name="TextBox 19">
+            <p:cNvPr id="31" name="TextBox 30">
               <a:extLst>
                 <a:ext uri="{FF2B5EF4-FFF2-40B4-BE49-F238E27FC236}">
-                  <a16:creationId xmlns:a16="http://schemas.microsoft.com/office/drawing/2014/main" id="{1F5C5527-552C-C5C5-FCFF-13038598C6F8}"/>
+                  <a16:creationId xmlns:a16="http://schemas.microsoft.com/office/drawing/2014/main" id="{7E9176D1-83D8-1E2D-DCD7-4C9371022B9E}"/>
                 </a:ext>
               </a:extLst>
             </p:cNvPr>
@@ -30669,8 +31131,8 @@
           </p:nvSpPr>
           <p:spPr>
             <a:xfrm>
-              <a:off x="1157273" y="2965360"/>
-              <a:ext cx="197116" cy="276999"/>
+              <a:off x="309642" y="2489510"/>
+              <a:ext cx="1378326" cy="276999"/>
             </a:xfrm>
             <a:prstGeom prst="rect">
               <a:avLst/>
@@ -30678,24 +31140,150 @@
             <a:noFill/>
           </p:spPr>
           <p:txBody>
-            <a:bodyPr wrap="square" rtlCol="0">
+            <a:bodyPr wrap="none" rtlCol="0">
               <a:spAutoFit/>
             </a:bodyPr>
             <a:lstStyle/>
             <a:p>
               <a:r>
                 <a:rPr lang="en-US" sz="1200" dirty="0"/>
-                <a:t>0</a:t>
+                <a:t>Context PE tensor</a:t>
               </a:r>
+            </a:p>
+          </p:txBody>
+        </p:sp>
+      </p:grpSp>
+      <p:sp>
+        <p:nvSpPr>
+          <p:cNvPr id="33" name="Oval 32">
+            <a:extLst>
+              <a:ext uri="{FF2B5EF4-FFF2-40B4-BE49-F238E27FC236}">
+                <a16:creationId xmlns:a16="http://schemas.microsoft.com/office/drawing/2014/main" id="{3AD3E9F3-337E-94BF-B36B-E7B5DACB0AB6}"/>
+              </a:ext>
+            </a:extLst>
+          </p:cNvPr>
+          <p:cNvSpPr/>
+          <p:nvPr/>
+        </p:nvSpPr>
+        <p:spPr>
+          <a:xfrm>
+            <a:off x="2317172" y="4258394"/>
+            <a:ext cx="374073" cy="362005"/>
+          </a:xfrm>
+          <a:prstGeom prst="ellipse">
+            <a:avLst/>
+          </a:prstGeom>
+          <a:ln/>
+        </p:spPr>
+        <p:style>
+          <a:lnRef idx="2">
+            <a:schemeClr val="dk1"/>
+          </a:lnRef>
+          <a:fillRef idx="1">
+            <a:schemeClr val="lt1"/>
+          </a:fillRef>
+          <a:effectRef idx="0">
+            <a:schemeClr val="dk1"/>
+          </a:effectRef>
+          <a:fontRef idx="minor">
+            <a:schemeClr val="dk1"/>
+          </a:fontRef>
+        </p:style>
+        <p:txBody>
+          <a:bodyPr rtlCol="0" anchor="ctr"/>
+          <a:lstStyle/>
+          <a:p>
+            <a:pPr algn="ctr"/>
+            <a:r>
+              <a:rPr lang="en-US" dirty="0"/>
+              <a:t>+</a:t>
+            </a:r>
+          </a:p>
+        </p:txBody>
+      </p:sp>
+      <p:grpSp>
+        <p:nvGrpSpPr>
+          <p:cNvPr id="34" name="Group 33">
+            <a:extLst>
+              <a:ext uri="{FF2B5EF4-FFF2-40B4-BE49-F238E27FC236}">
+                <a16:creationId xmlns:a16="http://schemas.microsoft.com/office/drawing/2014/main" id="{E20D0F1C-132E-26D2-C2FD-CD4741A1938A}"/>
+              </a:ext>
+            </a:extLst>
+          </p:cNvPr>
+          <p:cNvGrpSpPr/>
+          <p:nvPr/>
+        </p:nvGrpSpPr>
+        <p:grpSpPr>
+          <a:xfrm>
+            <a:off x="2003494" y="5070054"/>
+            <a:ext cx="1001428" cy="598310"/>
+            <a:chOff x="2493871" y="2168278"/>
+            <a:chExt cx="1001428" cy="598310"/>
+          </a:xfrm>
+        </p:grpSpPr>
+        <p:sp>
+          <p:nvSpPr>
+            <p:cNvPr id="35" name="Rectangle 34">
+              <a:extLst>
+                <a:ext uri="{FF2B5EF4-FFF2-40B4-BE49-F238E27FC236}">
+                  <a16:creationId xmlns:a16="http://schemas.microsoft.com/office/drawing/2014/main" id="{17781214-F95C-2B9F-C7EB-65443BCE95FF}"/>
+                </a:ext>
+              </a:extLst>
+            </p:cNvPr>
+            <p:cNvSpPr/>
+            <p:nvPr/>
+          </p:nvSpPr>
+          <p:spPr>
+            <a:xfrm>
+              <a:off x="2860194" y="2496532"/>
+              <a:ext cx="268782" cy="270056"/>
+            </a:xfrm>
+            <a:prstGeom prst="rect">
+              <a:avLst/>
+            </a:prstGeom>
+            <a:solidFill>
+              <a:srgbClr val="00B0F0"/>
+            </a:solidFill>
+            <a:ln w="19050" cap="flat" cmpd="sng" algn="ctr">
+              <a:solidFill>
+                <a:srgbClr val="FF0000"/>
+              </a:solidFill>
+              <a:prstDash val="solid"/>
+              <a:miter lim="800000"/>
+            </a:ln>
+            <a:effectLst/>
+          </p:spPr>
+          <p:style>
+            <a:lnRef idx="2">
+              <a:schemeClr val="accent1">
+                <a:shade val="50000"/>
+              </a:schemeClr>
+            </a:lnRef>
+            <a:fillRef idx="1">
+              <a:schemeClr val="accent1"/>
+            </a:fillRef>
+            <a:effectRef idx="0">
+              <a:schemeClr val="accent1"/>
+            </a:effectRef>
+            <a:fontRef idx="minor">
+              <a:schemeClr val="lt1"/>
+            </a:fontRef>
+          </p:style>
+          <p:txBody>
+            <a:bodyPr rtlCol="0" anchor="ctr"/>
+            <a:lstStyle/>
+            <a:p>
+              <a:pPr algn="ctr"/>
+              <a:endParaRPr lang="en-US" dirty="0"/>
             </a:p>
           </p:txBody>
         </p:sp>
         <p:sp>
           <p:nvSpPr>
-            <p:cNvPr id="22" name="TextBox 21">
+            <p:cNvPr id="36" name="TextBox 35">
               <a:extLst>
                 <a:ext uri="{FF2B5EF4-FFF2-40B4-BE49-F238E27FC236}">
-                  <a16:creationId xmlns:a16="http://schemas.microsoft.com/office/drawing/2014/main" id="{02958587-5936-E424-EFC7-F117A3832E56}"/>
+                  <a16:creationId xmlns:a16="http://schemas.microsoft.com/office/drawing/2014/main" id="{575F473D-9C72-FCBD-978E-63E1889A7991}"/>
                 </a:ext>
               </a:extLst>
             </p:cNvPr>
@@ -30704,8 +31292,8 @@
           </p:nvSpPr>
           <p:spPr>
             <a:xfrm>
-              <a:off x="1421559" y="2707029"/>
-              <a:ext cx="197116" cy="276999"/>
+              <a:off x="2493871" y="2168278"/>
+              <a:ext cx="1001428" cy="276999"/>
             </a:xfrm>
             <a:prstGeom prst="rect">
               <a:avLst/>
@@ -30713,165 +31301,244 @@
             <a:noFill/>
           </p:spPr>
           <p:txBody>
-            <a:bodyPr wrap="square" rtlCol="0">
+            <a:bodyPr wrap="none" rtlCol="0">
               <a:spAutoFit/>
             </a:bodyPr>
             <a:lstStyle/>
             <a:p>
               <a:r>
                 <a:rPr lang="en-US" sz="1200" dirty="0"/>
-                <a:t>0</a:t>
-              </a:r>
-            </a:p>
-          </p:txBody>
-        </p:sp>
-        <p:sp>
-          <p:nvSpPr>
-            <p:cNvPr id="23" name="TextBox 22">
-              <a:extLst>
-                <a:ext uri="{FF2B5EF4-FFF2-40B4-BE49-F238E27FC236}">
-                  <a16:creationId xmlns:a16="http://schemas.microsoft.com/office/drawing/2014/main" id="{019B66AD-9369-D060-C817-C9F6CEEE90B9}"/>
-                </a:ext>
-              </a:extLst>
-            </p:cNvPr>
-            <p:cNvSpPr txBox="1"/>
-            <p:nvPr/>
-          </p:nvSpPr>
-          <p:spPr>
-            <a:xfrm>
-              <a:off x="1696308" y="2706314"/>
-              <a:ext cx="197116" cy="276999"/>
-            </a:xfrm>
-            <a:prstGeom prst="rect">
-              <a:avLst/>
-            </a:prstGeom>
-            <a:noFill/>
-          </p:spPr>
-          <p:txBody>
-            <a:bodyPr wrap="square" rtlCol="0">
-              <a:spAutoFit/>
-            </a:bodyPr>
-            <a:lstStyle/>
-            <a:p>
-              <a:r>
-                <a:rPr lang="en-US" sz="1200" dirty="0"/>
-                <a:t>1</a:t>
-              </a:r>
-            </a:p>
-          </p:txBody>
-        </p:sp>
-        <p:sp>
-          <p:nvSpPr>
-            <p:cNvPr id="24" name="TextBox 23">
-              <a:extLst>
-                <a:ext uri="{FF2B5EF4-FFF2-40B4-BE49-F238E27FC236}">
-                  <a16:creationId xmlns:a16="http://schemas.microsoft.com/office/drawing/2014/main" id="{ABB64FD7-36F2-BF07-9615-D0F9AA1EB0CA}"/>
-                </a:ext>
-              </a:extLst>
-            </p:cNvPr>
-            <p:cNvSpPr txBox="1"/>
-            <p:nvPr/>
-          </p:nvSpPr>
-          <p:spPr>
-            <a:xfrm>
-              <a:off x="1975451" y="2704228"/>
-              <a:ext cx="197116" cy="276999"/>
-            </a:xfrm>
-            <a:prstGeom prst="rect">
-              <a:avLst/>
-            </a:prstGeom>
-            <a:noFill/>
-          </p:spPr>
-          <p:txBody>
-            <a:bodyPr wrap="square" rtlCol="0">
-              <a:spAutoFit/>
-            </a:bodyPr>
-            <a:lstStyle/>
-            <a:p>
-              <a:r>
-                <a:rPr lang="en-US" sz="1200" dirty="0"/>
-                <a:t>2</a:t>
-              </a:r>
-            </a:p>
-          </p:txBody>
-        </p:sp>
-        <p:sp>
-          <p:nvSpPr>
-            <p:cNvPr id="25" name="TextBox 24">
-              <a:extLst>
-                <a:ext uri="{FF2B5EF4-FFF2-40B4-BE49-F238E27FC236}">
-                  <a16:creationId xmlns:a16="http://schemas.microsoft.com/office/drawing/2014/main" id="{E4040D5D-E88F-F916-2A4D-7C6EF20DCADB}"/>
-                </a:ext>
-              </a:extLst>
-            </p:cNvPr>
-            <p:cNvSpPr txBox="1"/>
-            <p:nvPr/>
-          </p:nvSpPr>
-          <p:spPr>
-            <a:xfrm>
-              <a:off x="1157273" y="3253463"/>
-              <a:ext cx="197116" cy="276999"/>
-            </a:xfrm>
-            <a:prstGeom prst="rect">
-              <a:avLst/>
-            </a:prstGeom>
-            <a:noFill/>
-          </p:spPr>
-          <p:txBody>
-            <a:bodyPr wrap="square" rtlCol="0">
-              <a:spAutoFit/>
-            </a:bodyPr>
-            <a:lstStyle/>
-            <a:p>
-              <a:r>
-                <a:rPr lang="en-US" sz="1200" dirty="0"/>
-                <a:t>1</a:t>
-              </a:r>
-            </a:p>
-          </p:txBody>
-        </p:sp>
-        <p:sp>
-          <p:nvSpPr>
-            <p:cNvPr id="26" name="TextBox 25">
-              <a:extLst>
-                <a:ext uri="{FF2B5EF4-FFF2-40B4-BE49-F238E27FC236}">
-                  <a16:creationId xmlns:a16="http://schemas.microsoft.com/office/drawing/2014/main" id="{B9F45E0B-334F-3E17-FEAE-CDA38EC26256}"/>
-                </a:ext>
-              </a:extLst>
-            </p:cNvPr>
-            <p:cNvSpPr txBox="1"/>
-            <p:nvPr/>
-          </p:nvSpPr>
-          <p:spPr>
-            <a:xfrm>
-              <a:off x="1153751" y="3540964"/>
-              <a:ext cx="197116" cy="276999"/>
-            </a:xfrm>
-            <a:prstGeom prst="rect">
-              <a:avLst/>
-            </a:prstGeom>
-            <a:noFill/>
-          </p:spPr>
-          <p:txBody>
-            <a:bodyPr wrap="square" rtlCol="0">
-              <a:spAutoFit/>
-            </a:bodyPr>
-            <a:lstStyle/>
-            <a:p>
-              <a:r>
-                <a:rPr lang="en-US" sz="1200" dirty="0"/>
-                <a:t>2</a:t>
+                <a:t>Target token</a:t>
               </a:r>
             </a:p>
           </p:txBody>
         </p:sp>
       </p:grpSp>
+      <p:cxnSp>
+        <p:nvCxnSpPr>
+          <p:cNvPr id="38" name="Straight Arrow Connector 37">
+            <a:extLst>
+              <a:ext uri="{FF2B5EF4-FFF2-40B4-BE49-F238E27FC236}">
+                <a16:creationId xmlns:a16="http://schemas.microsoft.com/office/drawing/2014/main" id="{FB236D3D-56C0-8504-7346-A4557C6833F8}"/>
+              </a:ext>
+            </a:extLst>
+          </p:cNvPr>
+          <p:cNvCxnSpPr>
+            <a:cxnSpLocks/>
+            <a:stCxn id="30" idx="2"/>
+            <a:endCxn id="18" idx="3"/>
+          </p:cNvCxnSpPr>
+          <p:nvPr/>
+        </p:nvCxnSpPr>
+        <p:spPr>
+          <a:xfrm flipH="1">
+            <a:off x="1456470" y="2771240"/>
+            <a:ext cx="1117085" cy="737992"/>
+          </a:xfrm>
+          <a:prstGeom prst="straightConnector1">
+            <a:avLst/>
+          </a:prstGeom>
+          <a:ln w="19050">
+            <a:solidFill>
+              <a:srgbClr val="FF0000"/>
+            </a:solidFill>
+            <a:tailEnd type="triangle"/>
+          </a:ln>
+        </p:spPr>
+        <p:style>
+          <a:lnRef idx="1">
+            <a:schemeClr val="accent1"/>
+          </a:lnRef>
+          <a:fillRef idx="0">
+            <a:schemeClr val="accent1"/>
+          </a:fillRef>
+          <a:effectRef idx="0">
+            <a:schemeClr val="accent1"/>
+          </a:effectRef>
+          <a:fontRef idx="minor">
+            <a:schemeClr val="tx1"/>
+          </a:fontRef>
+        </p:style>
+      </p:cxnSp>
+      <p:cxnSp>
+        <p:nvCxnSpPr>
+          <p:cNvPr id="39" name="Straight Arrow Connector 38">
+            <a:extLst>
+              <a:ext uri="{FF2B5EF4-FFF2-40B4-BE49-F238E27FC236}">
+                <a16:creationId xmlns:a16="http://schemas.microsoft.com/office/drawing/2014/main" id="{02CF6F69-0397-F841-5F62-D8950BC34894}"/>
+              </a:ext>
+            </a:extLst>
+          </p:cNvPr>
+          <p:cNvCxnSpPr>
+            <a:cxnSpLocks/>
+            <a:stCxn id="15" idx="2"/>
+            <a:endCxn id="109" idx="0"/>
+          </p:cNvCxnSpPr>
+          <p:nvPr/>
+        </p:nvCxnSpPr>
+        <p:spPr>
+          <a:xfrm flipH="1">
+            <a:off x="1052570" y="3915020"/>
+            <a:ext cx="726" cy="425729"/>
+          </a:xfrm>
+          <a:prstGeom prst="straightConnector1">
+            <a:avLst/>
+          </a:prstGeom>
+          <a:ln w="19050">
+            <a:solidFill>
+              <a:srgbClr val="FF0000"/>
+            </a:solidFill>
+            <a:tailEnd type="triangle"/>
+          </a:ln>
+        </p:spPr>
+        <p:style>
+          <a:lnRef idx="1">
+            <a:schemeClr val="accent1"/>
+          </a:lnRef>
+          <a:fillRef idx="0">
+            <a:schemeClr val="accent1"/>
+          </a:fillRef>
+          <a:effectRef idx="0">
+            <a:schemeClr val="accent1"/>
+          </a:effectRef>
+          <a:fontRef idx="minor">
+            <a:schemeClr val="tx1"/>
+          </a:fontRef>
+        </p:style>
+      </p:cxnSp>
+      <p:cxnSp>
+        <p:nvCxnSpPr>
+          <p:cNvPr id="42" name="Straight Arrow Connector 41">
+            <a:extLst>
+              <a:ext uri="{FF2B5EF4-FFF2-40B4-BE49-F238E27FC236}">
+                <a16:creationId xmlns:a16="http://schemas.microsoft.com/office/drawing/2014/main" id="{D6D771F9-38F2-F483-7307-52D19DE604D9}"/>
+              </a:ext>
+            </a:extLst>
+          </p:cNvPr>
+          <p:cNvCxnSpPr>
+            <a:cxnSpLocks/>
+            <a:stCxn id="28" idx="2"/>
+            <a:endCxn id="33" idx="6"/>
+          </p:cNvCxnSpPr>
+          <p:nvPr/>
+        </p:nvCxnSpPr>
+        <p:spPr>
+          <a:xfrm flipH="1">
+            <a:off x="2691245" y="3087820"/>
+            <a:ext cx="1482863" cy="1351577"/>
+          </a:xfrm>
+          <a:prstGeom prst="straightConnector1">
+            <a:avLst/>
+          </a:prstGeom>
+          <a:ln w="19050">
+            <a:solidFill>
+              <a:srgbClr val="FF0000"/>
+            </a:solidFill>
+            <a:tailEnd type="triangle"/>
+          </a:ln>
+        </p:spPr>
+        <p:style>
+          <a:lnRef idx="1">
+            <a:schemeClr val="accent1"/>
+          </a:lnRef>
+          <a:fillRef idx="0">
+            <a:schemeClr val="accent1"/>
+          </a:fillRef>
+          <a:effectRef idx="0">
+            <a:schemeClr val="accent1"/>
+          </a:effectRef>
+          <a:fontRef idx="minor">
+            <a:schemeClr val="tx1"/>
+          </a:fontRef>
+        </p:style>
+      </p:cxnSp>
+      <p:cxnSp>
+        <p:nvCxnSpPr>
+          <p:cNvPr id="45" name="Straight Arrow Connector 44">
+            <a:extLst>
+              <a:ext uri="{FF2B5EF4-FFF2-40B4-BE49-F238E27FC236}">
+                <a16:creationId xmlns:a16="http://schemas.microsoft.com/office/drawing/2014/main" id="{88648033-20F3-1ABD-F952-C762DD0947A8}"/>
+              </a:ext>
+            </a:extLst>
+          </p:cNvPr>
+          <p:cNvCxnSpPr>
+            <a:cxnSpLocks/>
+            <a:stCxn id="33" idx="4"/>
+            <a:endCxn id="36" idx="0"/>
+          </p:cNvCxnSpPr>
+          <p:nvPr/>
+        </p:nvCxnSpPr>
+        <p:spPr>
+          <a:xfrm flipH="1">
+            <a:off x="2504208" y="4620399"/>
+            <a:ext cx="1" cy="449655"/>
+          </a:xfrm>
+          <a:prstGeom prst="straightConnector1">
+            <a:avLst/>
+          </a:prstGeom>
+          <a:ln w="19050">
+            <a:solidFill>
+              <a:srgbClr val="FF0000"/>
+            </a:solidFill>
+            <a:tailEnd type="triangle"/>
+          </a:ln>
+        </p:spPr>
+        <p:style>
+          <a:lnRef idx="1">
+            <a:schemeClr val="accent1"/>
+          </a:lnRef>
+          <a:fillRef idx="0">
+            <a:schemeClr val="accent1"/>
+          </a:fillRef>
+          <a:effectRef idx="0">
+            <a:schemeClr val="accent1"/>
+          </a:effectRef>
+          <a:fontRef idx="minor">
+            <a:schemeClr val="tx1"/>
+          </a:fontRef>
+        </p:style>
+      </p:cxnSp>
       <p:sp>
         <p:nvSpPr>
-          <p:cNvPr id="28" name="Rectangle 27">
-            <a:extLst>
-              <a:ext uri="{FF2B5EF4-FFF2-40B4-BE49-F238E27FC236}">
-                <a16:creationId xmlns:a16="http://schemas.microsoft.com/office/drawing/2014/main" id="{C4512132-A9A9-268C-DE7D-5D8DE9670610}"/>
+          <p:cNvPr id="48" name="TextBox 47">
+            <a:extLst>
+              <a:ext uri="{FF2B5EF4-FFF2-40B4-BE49-F238E27FC236}">
+                <a16:creationId xmlns:a16="http://schemas.microsoft.com/office/drawing/2014/main" id="{DED7C7AB-2C83-E8C6-3B9A-C0273653A463}"/>
+              </a:ext>
+            </a:extLst>
+          </p:cNvPr>
+          <p:cNvSpPr txBox="1"/>
+          <p:nvPr/>
+        </p:nvSpPr>
+        <p:spPr>
+          <a:xfrm>
+            <a:off x="1556158" y="2094551"/>
+            <a:ext cx="2270173" cy="369332"/>
+          </a:xfrm>
+          <a:prstGeom prst="rect">
+            <a:avLst/>
+          </a:prstGeom>
+          <a:noFill/>
+        </p:spPr>
+        <p:txBody>
+          <a:bodyPr wrap="none" rtlCol="0">
+            <a:spAutoFit/>
+          </a:bodyPr>
+          <a:lstStyle/>
+          <a:p>
+            <a:r>
+              <a:rPr lang="en-US" dirty="0"/>
+              <a:t>Original Architecture</a:t>
+            </a:r>
+          </a:p>
+        </p:txBody>
+      </p:sp>
+      <p:sp>
+        <p:nvSpPr>
+          <p:cNvPr id="109" name="Rectangle 108">
+            <a:extLst>
+              <a:ext uri="{FF2B5EF4-FFF2-40B4-BE49-F238E27FC236}">
+                <a16:creationId xmlns:a16="http://schemas.microsoft.com/office/drawing/2014/main" id="{5A69A366-79F2-47A6-738B-0E932C74643D}"/>
               </a:ext>
             </a:extLst>
           </p:cNvPr>
@@ -30880,16 +31547,16 @@
         </p:nvSpPr>
         <p:spPr>
           <a:xfrm>
-            <a:off x="1768766" y="2586959"/>
+            <a:off x="918179" y="4340749"/>
             <a:ext cx="268782" cy="270056"/>
           </a:xfrm>
           <a:prstGeom prst="rect">
             <a:avLst/>
           </a:prstGeom>
           <a:solidFill>
-            <a:srgbClr val="00B0F0"/>
+            <a:srgbClr val="00B050"/>
           </a:solidFill>
-          <a:ln w="19050" cap="flat" cmpd="sng" algn="ctr">
+          <a:ln w="12700" cap="flat" cmpd="sng" algn="ctr">
             <a:solidFill>
               <a:srgbClr val="FF0000"/>
             </a:solidFill>
@@ -30923,12 +31590,1262 @@
           </a:p>
         </p:txBody>
       </p:sp>
+      <p:cxnSp>
+        <p:nvCxnSpPr>
+          <p:cNvPr id="112" name="Straight Arrow Connector 111">
+            <a:extLst>
+              <a:ext uri="{FF2B5EF4-FFF2-40B4-BE49-F238E27FC236}">
+                <a16:creationId xmlns:a16="http://schemas.microsoft.com/office/drawing/2014/main" id="{335AC8AB-EFD5-B8C5-A536-3CE66ECECFCD}"/>
+              </a:ext>
+            </a:extLst>
+          </p:cNvPr>
+          <p:cNvCxnSpPr>
+            <a:cxnSpLocks/>
+            <a:stCxn id="109" idx="3"/>
+            <a:endCxn id="33" idx="2"/>
+          </p:cNvCxnSpPr>
+          <p:nvPr/>
+        </p:nvCxnSpPr>
+        <p:spPr>
+          <a:xfrm flipV="1">
+            <a:off x="1186961" y="4439397"/>
+            <a:ext cx="1130211" cy="36380"/>
+          </a:xfrm>
+          <a:prstGeom prst="straightConnector1">
+            <a:avLst/>
+          </a:prstGeom>
+          <a:ln w="19050">
+            <a:solidFill>
+              <a:srgbClr val="FF0000"/>
+            </a:solidFill>
+            <a:tailEnd type="triangle"/>
+          </a:ln>
+        </p:spPr>
+        <p:style>
+          <a:lnRef idx="1">
+            <a:schemeClr val="accent1"/>
+          </a:lnRef>
+          <a:fillRef idx="0">
+            <a:schemeClr val="accent1"/>
+          </a:fillRef>
+          <a:effectRef idx="0">
+            <a:schemeClr val="accent1"/>
+          </a:effectRef>
+          <a:fontRef idx="minor">
+            <a:schemeClr val="tx1"/>
+          </a:fontRef>
+        </p:style>
+      </p:cxnSp>
+      <p:grpSp>
+        <p:nvGrpSpPr>
+          <p:cNvPr id="124" name="Group 123">
+            <a:extLst>
+              <a:ext uri="{FF2B5EF4-FFF2-40B4-BE49-F238E27FC236}">
+                <a16:creationId xmlns:a16="http://schemas.microsoft.com/office/drawing/2014/main" id="{2B4668BF-EF8D-568A-F378-DAF08DB7535F}"/>
+              </a:ext>
+            </a:extLst>
+          </p:cNvPr>
+          <p:cNvGrpSpPr/>
+          <p:nvPr/>
+        </p:nvGrpSpPr>
+        <p:grpSpPr>
+          <a:xfrm>
+            <a:off x="10002884" y="2531535"/>
+            <a:ext cx="1001428" cy="598310"/>
+            <a:chOff x="2493871" y="2168278"/>
+            <a:chExt cx="1001428" cy="598310"/>
+          </a:xfrm>
+        </p:grpSpPr>
+        <p:sp>
+          <p:nvSpPr>
+            <p:cNvPr id="125" name="Rectangle 124">
+              <a:extLst>
+                <a:ext uri="{FF2B5EF4-FFF2-40B4-BE49-F238E27FC236}">
+                  <a16:creationId xmlns:a16="http://schemas.microsoft.com/office/drawing/2014/main" id="{FA3C6892-66E6-DB04-53B4-35BD5AD28CF5}"/>
+                </a:ext>
+              </a:extLst>
+            </p:cNvPr>
+            <p:cNvSpPr/>
+            <p:nvPr/>
+          </p:nvSpPr>
+          <p:spPr>
+            <a:xfrm>
+              <a:off x="2860194" y="2496532"/>
+              <a:ext cx="268782" cy="270056"/>
+            </a:xfrm>
+            <a:prstGeom prst="rect">
+              <a:avLst/>
+            </a:prstGeom>
+            <a:solidFill>
+              <a:srgbClr val="0070C0"/>
+            </a:solidFill>
+            <a:ln w="19050" cap="flat" cmpd="sng" algn="ctr">
+              <a:solidFill>
+                <a:srgbClr val="FF0000"/>
+              </a:solidFill>
+              <a:prstDash val="solid"/>
+              <a:miter lim="800000"/>
+            </a:ln>
+            <a:effectLst/>
+          </p:spPr>
+          <p:style>
+            <a:lnRef idx="2">
+              <a:schemeClr val="accent1">
+                <a:shade val="50000"/>
+              </a:schemeClr>
+            </a:lnRef>
+            <a:fillRef idx="1">
+              <a:schemeClr val="accent1"/>
+            </a:fillRef>
+            <a:effectRef idx="0">
+              <a:schemeClr val="accent1"/>
+            </a:effectRef>
+            <a:fontRef idx="minor">
+              <a:schemeClr val="lt1"/>
+            </a:fontRef>
+          </p:style>
+          <p:txBody>
+            <a:bodyPr rtlCol="0" anchor="ctr"/>
+            <a:lstStyle/>
+            <a:p>
+              <a:pPr algn="ctr"/>
+              <a:endParaRPr lang="en-US" dirty="0"/>
+            </a:p>
+          </p:txBody>
+        </p:sp>
+        <p:sp>
+          <p:nvSpPr>
+            <p:cNvPr id="126" name="TextBox 125">
+              <a:extLst>
+                <a:ext uri="{FF2B5EF4-FFF2-40B4-BE49-F238E27FC236}">
+                  <a16:creationId xmlns:a16="http://schemas.microsoft.com/office/drawing/2014/main" id="{A8D4D84E-C6D0-537E-0170-FB3E6F3BE2B8}"/>
+                </a:ext>
+              </a:extLst>
+            </p:cNvPr>
+            <p:cNvSpPr txBox="1"/>
+            <p:nvPr/>
+          </p:nvSpPr>
+          <p:spPr>
+            <a:xfrm>
+              <a:off x="2493871" y="2168278"/>
+              <a:ext cx="1001428" cy="276999"/>
+            </a:xfrm>
+            <a:prstGeom prst="rect">
+              <a:avLst/>
+            </a:prstGeom>
+            <a:noFill/>
+          </p:spPr>
+          <p:txBody>
+            <a:bodyPr wrap="none" rtlCol="0">
+              <a:spAutoFit/>
+            </a:bodyPr>
+            <a:lstStyle/>
+            <a:p>
+              <a:r>
+                <a:rPr lang="en-US" sz="1200" dirty="0"/>
+                <a:t>Target token</a:t>
+              </a:r>
+            </a:p>
+          </p:txBody>
+        </p:sp>
+      </p:grpSp>
+      <p:grpSp>
+        <p:nvGrpSpPr>
+          <p:cNvPr id="128" name="Group 127">
+            <a:extLst>
+              <a:ext uri="{FF2B5EF4-FFF2-40B4-BE49-F238E27FC236}">
+                <a16:creationId xmlns:a16="http://schemas.microsoft.com/office/drawing/2014/main" id="{8DB8478A-1E2A-F65F-3D5F-9559BED19C33}"/>
+              </a:ext>
+            </a:extLst>
+          </p:cNvPr>
+          <p:cNvGrpSpPr/>
+          <p:nvPr/>
+        </p:nvGrpSpPr>
+        <p:grpSpPr>
+          <a:xfrm>
+            <a:off x="6649690" y="2553691"/>
+            <a:ext cx="1378326" cy="1415689"/>
+            <a:chOff x="320200" y="2511666"/>
+            <a:chExt cx="1378326" cy="1415689"/>
+          </a:xfrm>
+        </p:grpSpPr>
+        <p:grpSp>
+          <p:nvGrpSpPr>
+            <p:cNvPr id="129" name="Group 128">
+              <a:extLst>
+                <a:ext uri="{FF2B5EF4-FFF2-40B4-BE49-F238E27FC236}">
+                  <a16:creationId xmlns:a16="http://schemas.microsoft.com/office/drawing/2014/main" id="{02F5B02C-0707-580D-3365-7A5B8B8D8CC6}"/>
+                </a:ext>
+              </a:extLst>
+            </p:cNvPr>
+            <p:cNvGrpSpPr/>
+            <p:nvPr/>
+          </p:nvGrpSpPr>
+          <p:grpSpPr>
+            <a:xfrm>
+              <a:off x="377805" y="2830690"/>
+              <a:ext cx="1078665" cy="1096665"/>
+              <a:chOff x="1153751" y="2704228"/>
+              <a:chExt cx="1074757" cy="1113735"/>
+            </a:xfrm>
+          </p:grpSpPr>
+          <p:grpSp>
+            <p:nvGrpSpPr>
+              <p:cNvPr id="131" name="Group 130">
+                <a:extLst>
+                  <a:ext uri="{FF2B5EF4-FFF2-40B4-BE49-F238E27FC236}">
+                    <a16:creationId xmlns:a16="http://schemas.microsoft.com/office/drawing/2014/main" id="{63B5B6D1-1C52-AA53-0585-AFCD0F2A0B8A}"/>
+                  </a:ext>
+                </a:extLst>
+              </p:cNvPr>
+              <p:cNvGrpSpPr/>
+              <p:nvPr/>
+            </p:nvGrpSpPr>
+            <p:grpSpPr>
+              <a:xfrm>
+                <a:off x="1425082" y="2981585"/>
+                <a:ext cx="803426" cy="823852"/>
+                <a:chOff x="1474361" y="3912410"/>
+                <a:chExt cx="1240974" cy="1357045"/>
+              </a:xfrm>
+            </p:grpSpPr>
+            <p:sp>
+              <p:nvSpPr>
+                <p:cNvPr id="138" name="Rectangle 137">
+                  <a:extLst>
+                    <a:ext uri="{FF2B5EF4-FFF2-40B4-BE49-F238E27FC236}">
+                      <a16:creationId xmlns:a16="http://schemas.microsoft.com/office/drawing/2014/main" id="{03020F1B-E567-DADA-2CAE-640A12E7C9D4}"/>
+                    </a:ext>
+                  </a:extLst>
+                </p:cNvPr>
+                <p:cNvSpPr/>
+                <p:nvPr/>
+              </p:nvSpPr>
+              <p:spPr>
+                <a:xfrm>
+                  <a:off x="1474361" y="3914178"/>
+                  <a:ext cx="413658" cy="451759"/>
+                </a:xfrm>
+                <a:prstGeom prst="rect">
+                  <a:avLst/>
+                </a:prstGeom>
+                <a:solidFill>
+                  <a:srgbClr val="0070C0"/>
+                </a:solidFill>
+                <a:ln w="19050" cap="flat" cmpd="sng" algn="ctr">
+                  <a:solidFill>
+                    <a:srgbClr val="FF0000"/>
+                  </a:solidFill>
+                  <a:prstDash val="solid"/>
+                  <a:miter lim="800000"/>
+                </a:ln>
+                <a:effectLst/>
+              </p:spPr>
+              <p:style>
+                <a:lnRef idx="2">
+                  <a:schemeClr val="accent1">
+                    <a:shade val="50000"/>
+                  </a:schemeClr>
+                </a:lnRef>
+                <a:fillRef idx="1">
+                  <a:schemeClr val="accent1"/>
+                </a:fillRef>
+                <a:effectRef idx="0">
+                  <a:schemeClr val="accent1"/>
+                </a:effectRef>
+                <a:fontRef idx="minor">
+                  <a:schemeClr val="lt1"/>
+                </a:fontRef>
+              </p:style>
+              <p:txBody>
+                <a:bodyPr rtlCol="0" anchor="ctr"/>
+                <a:lstStyle/>
+                <a:p>
+                  <a:pPr algn="ctr"/>
+                  <a:endParaRPr lang="en-US" dirty="0"/>
+                </a:p>
+              </p:txBody>
+            </p:sp>
+            <p:sp>
+              <p:nvSpPr>
+                <p:cNvPr id="139" name="Rectangle 138">
+                  <a:extLst>
+                    <a:ext uri="{FF2B5EF4-FFF2-40B4-BE49-F238E27FC236}">
+                      <a16:creationId xmlns:a16="http://schemas.microsoft.com/office/drawing/2014/main" id="{41189906-2794-2FFE-DE6D-F821B13A5671}"/>
+                    </a:ext>
+                  </a:extLst>
+                </p:cNvPr>
+                <p:cNvSpPr/>
+                <p:nvPr/>
+              </p:nvSpPr>
+              <p:spPr>
+                <a:xfrm>
+                  <a:off x="1474361" y="4817696"/>
+                  <a:ext cx="413658" cy="451759"/>
+                </a:xfrm>
+                <a:prstGeom prst="rect">
+                  <a:avLst/>
+                </a:prstGeom>
+                <a:solidFill>
+                  <a:schemeClr val="bg2">
+                    <a:lumMod val="75000"/>
+                  </a:schemeClr>
+                </a:solidFill>
+                <a:ln w="12700" cap="flat" cmpd="sng" algn="ctr">
+                  <a:solidFill>
+                    <a:srgbClr val="FF0000"/>
+                  </a:solidFill>
+                  <a:prstDash val="solid"/>
+                  <a:miter lim="800000"/>
+                </a:ln>
+                <a:effectLst/>
+              </p:spPr>
+              <p:style>
+                <a:lnRef idx="2">
+                  <a:schemeClr val="accent1">
+                    <a:shade val="50000"/>
+                  </a:schemeClr>
+                </a:lnRef>
+                <a:fillRef idx="1">
+                  <a:schemeClr val="accent1"/>
+                </a:fillRef>
+                <a:effectRef idx="0">
+                  <a:schemeClr val="accent1"/>
+                </a:effectRef>
+                <a:fontRef idx="minor">
+                  <a:schemeClr val="lt1"/>
+                </a:fontRef>
+              </p:style>
+              <p:txBody>
+                <a:bodyPr rtlCol="0" anchor="ctr"/>
+                <a:lstStyle/>
+                <a:p>
+                  <a:pPr algn="ctr"/>
+                  <a:endParaRPr lang="en-US" dirty="0"/>
+                </a:p>
+              </p:txBody>
+            </p:sp>
+            <p:sp>
+              <p:nvSpPr>
+                <p:cNvPr id="140" name="Rectangle 139">
+                  <a:extLst>
+                    <a:ext uri="{FF2B5EF4-FFF2-40B4-BE49-F238E27FC236}">
+                      <a16:creationId xmlns:a16="http://schemas.microsoft.com/office/drawing/2014/main" id="{B49DDD9F-E650-024C-6D94-C4586F29E11C}"/>
+                    </a:ext>
+                  </a:extLst>
+                </p:cNvPr>
+                <p:cNvSpPr/>
+                <p:nvPr/>
+              </p:nvSpPr>
+              <p:spPr>
+                <a:xfrm>
+                  <a:off x="1474361" y="4365937"/>
+                  <a:ext cx="413658" cy="451759"/>
+                </a:xfrm>
+                <a:prstGeom prst="rect">
+                  <a:avLst/>
+                </a:prstGeom>
+                <a:solidFill>
+                  <a:schemeClr val="accent1">
+                    <a:lumMod val="40000"/>
+                    <a:lumOff val="60000"/>
+                  </a:schemeClr>
+                </a:solidFill>
+                <a:ln w="12700" cap="flat" cmpd="sng" algn="ctr">
+                  <a:solidFill>
+                    <a:srgbClr val="FF0000"/>
+                  </a:solidFill>
+                  <a:prstDash val="solid"/>
+                  <a:miter lim="800000"/>
+                </a:ln>
+                <a:effectLst/>
+              </p:spPr>
+              <p:style>
+                <a:lnRef idx="2">
+                  <a:schemeClr val="accent1">
+                    <a:shade val="50000"/>
+                  </a:schemeClr>
+                </a:lnRef>
+                <a:fillRef idx="1">
+                  <a:schemeClr val="accent1"/>
+                </a:fillRef>
+                <a:effectRef idx="0">
+                  <a:schemeClr val="accent1"/>
+                </a:effectRef>
+                <a:fontRef idx="minor">
+                  <a:schemeClr val="lt1"/>
+                </a:fontRef>
+              </p:style>
+              <p:txBody>
+                <a:bodyPr rtlCol="0" anchor="ctr"/>
+                <a:lstStyle/>
+                <a:p>
+                  <a:pPr algn="ctr"/>
+                  <a:endParaRPr lang="en-US"/>
+                </a:p>
+              </p:txBody>
+            </p:sp>
+            <p:sp>
+              <p:nvSpPr>
+                <p:cNvPr id="141" name="Rectangle 140">
+                  <a:extLst>
+                    <a:ext uri="{FF2B5EF4-FFF2-40B4-BE49-F238E27FC236}">
+                      <a16:creationId xmlns:a16="http://schemas.microsoft.com/office/drawing/2014/main" id="{4ACAEB04-BD63-F2A3-7B3F-3994EFCAB664}"/>
+                    </a:ext>
+                  </a:extLst>
+                </p:cNvPr>
+                <p:cNvSpPr/>
+                <p:nvPr/>
+              </p:nvSpPr>
+              <p:spPr>
+                <a:xfrm>
+                  <a:off x="1888019" y="3912999"/>
+                  <a:ext cx="413658" cy="451759"/>
+                </a:xfrm>
+                <a:prstGeom prst="rect">
+                  <a:avLst/>
+                </a:prstGeom>
+                <a:solidFill>
+                  <a:schemeClr val="tx2">
+                    <a:lumMod val="25000"/>
+                    <a:lumOff val="75000"/>
+                  </a:schemeClr>
+                </a:solidFill>
+                <a:ln w="19050" cap="flat" cmpd="sng" algn="ctr">
+                  <a:solidFill>
+                    <a:srgbClr val="FF0000"/>
+                  </a:solidFill>
+                  <a:prstDash val="solid"/>
+                  <a:miter lim="800000"/>
+                </a:ln>
+                <a:effectLst/>
+              </p:spPr>
+              <p:style>
+                <a:lnRef idx="2">
+                  <a:schemeClr val="accent1">
+                    <a:shade val="50000"/>
+                  </a:schemeClr>
+                </a:lnRef>
+                <a:fillRef idx="1">
+                  <a:schemeClr val="accent1"/>
+                </a:fillRef>
+                <a:effectRef idx="0">
+                  <a:schemeClr val="accent1"/>
+                </a:effectRef>
+                <a:fontRef idx="minor">
+                  <a:schemeClr val="lt1"/>
+                </a:fontRef>
+              </p:style>
+              <p:txBody>
+                <a:bodyPr rtlCol="0" anchor="ctr"/>
+                <a:lstStyle/>
+                <a:p>
+                  <a:pPr algn="ctr"/>
+                  <a:endParaRPr lang="en-US" dirty="0"/>
+                </a:p>
+              </p:txBody>
+            </p:sp>
+            <p:sp>
+              <p:nvSpPr>
+                <p:cNvPr id="142" name="Rectangle 141">
+                  <a:extLst>
+                    <a:ext uri="{FF2B5EF4-FFF2-40B4-BE49-F238E27FC236}">
+                      <a16:creationId xmlns:a16="http://schemas.microsoft.com/office/drawing/2014/main" id="{155E84F3-ACD5-821D-2BD1-4F576AF9F6AD}"/>
+                    </a:ext>
+                  </a:extLst>
+                </p:cNvPr>
+                <p:cNvSpPr/>
+                <p:nvPr/>
+              </p:nvSpPr>
+              <p:spPr>
+                <a:xfrm>
+                  <a:off x="1888019" y="4365347"/>
+                  <a:ext cx="413658" cy="451759"/>
+                </a:xfrm>
+                <a:prstGeom prst="rect">
+                  <a:avLst/>
+                </a:prstGeom>
+                <a:solidFill>
+                  <a:srgbClr val="00B050"/>
+                </a:solidFill>
+                <a:ln w="12700" cap="flat" cmpd="sng" algn="ctr">
+                  <a:solidFill>
+                    <a:srgbClr val="FF0000"/>
+                  </a:solidFill>
+                  <a:prstDash val="solid"/>
+                  <a:miter lim="800000"/>
+                </a:ln>
+                <a:effectLst/>
+              </p:spPr>
+              <p:style>
+                <a:lnRef idx="2">
+                  <a:schemeClr val="accent1">
+                    <a:shade val="50000"/>
+                  </a:schemeClr>
+                </a:lnRef>
+                <a:fillRef idx="1">
+                  <a:schemeClr val="accent1"/>
+                </a:fillRef>
+                <a:effectRef idx="0">
+                  <a:schemeClr val="accent1"/>
+                </a:effectRef>
+                <a:fontRef idx="minor">
+                  <a:schemeClr val="lt1"/>
+                </a:fontRef>
+              </p:style>
+              <p:txBody>
+                <a:bodyPr rtlCol="0" anchor="ctr"/>
+                <a:lstStyle/>
+                <a:p>
+                  <a:pPr algn="ctr"/>
+                  <a:endParaRPr lang="en-US" dirty="0"/>
+                </a:p>
+              </p:txBody>
+            </p:sp>
+            <p:sp>
+              <p:nvSpPr>
+                <p:cNvPr id="143" name="Rectangle 142">
+                  <a:extLst>
+                    <a:ext uri="{FF2B5EF4-FFF2-40B4-BE49-F238E27FC236}">
+                      <a16:creationId xmlns:a16="http://schemas.microsoft.com/office/drawing/2014/main" id="{39D1D00D-8C83-6CCA-8278-8F1C70E7714A}"/>
+                    </a:ext>
+                  </a:extLst>
+                </p:cNvPr>
+                <p:cNvSpPr/>
+                <p:nvPr/>
+              </p:nvSpPr>
+              <p:spPr>
+                <a:xfrm>
+                  <a:off x="1888019" y="4817695"/>
+                  <a:ext cx="413658" cy="451759"/>
+                </a:xfrm>
+                <a:prstGeom prst="rect">
+                  <a:avLst/>
+                </a:prstGeom>
+                <a:solidFill>
+                  <a:schemeClr val="tx1">
+                    <a:lumMod val="50000"/>
+                    <a:lumOff val="50000"/>
+                  </a:schemeClr>
+                </a:solidFill>
+                <a:ln w="12700" cap="flat" cmpd="sng" algn="ctr">
+                  <a:solidFill>
+                    <a:srgbClr val="FF0000"/>
+                  </a:solidFill>
+                  <a:prstDash val="solid"/>
+                  <a:miter lim="800000"/>
+                </a:ln>
+                <a:effectLst/>
+              </p:spPr>
+              <p:style>
+                <a:lnRef idx="2">
+                  <a:schemeClr val="accent1">
+                    <a:shade val="50000"/>
+                  </a:schemeClr>
+                </a:lnRef>
+                <a:fillRef idx="1">
+                  <a:schemeClr val="accent1"/>
+                </a:fillRef>
+                <a:effectRef idx="0">
+                  <a:schemeClr val="accent1"/>
+                </a:effectRef>
+                <a:fontRef idx="minor">
+                  <a:schemeClr val="lt1"/>
+                </a:fontRef>
+              </p:style>
+              <p:txBody>
+                <a:bodyPr rtlCol="0" anchor="ctr"/>
+                <a:lstStyle/>
+                <a:p>
+                  <a:pPr algn="ctr"/>
+                  <a:endParaRPr lang="en-US"/>
+                </a:p>
+              </p:txBody>
+            </p:sp>
+            <p:sp>
+              <p:nvSpPr>
+                <p:cNvPr id="144" name="Rectangle 143">
+                  <a:extLst>
+                    <a:ext uri="{FF2B5EF4-FFF2-40B4-BE49-F238E27FC236}">
+                      <a16:creationId xmlns:a16="http://schemas.microsoft.com/office/drawing/2014/main" id="{E96E777C-43D4-B7E5-00B9-51353116DA00}"/>
+                    </a:ext>
+                  </a:extLst>
+                </p:cNvPr>
+                <p:cNvSpPr/>
+                <p:nvPr/>
+              </p:nvSpPr>
+              <p:spPr>
+                <a:xfrm>
+                  <a:off x="2301677" y="3912410"/>
+                  <a:ext cx="413658" cy="451759"/>
+                </a:xfrm>
+                <a:prstGeom prst="rect">
+                  <a:avLst/>
+                </a:prstGeom>
+                <a:solidFill>
+                  <a:schemeClr val="accent5">
+                    <a:lumMod val="40000"/>
+                    <a:lumOff val="60000"/>
+                  </a:schemeClr>
+                </a:solidFill>
+                <a:ln w="19050" cap="flat" cmpd="sng" algn="ctr">
+                  <a:solidFill>
+                    <a:srgbClr val="FF0000"/>
+                  </a:solidFill>
+                  <a:prstDash val="solid"/>
+                  <a:miter lim="800000"/>
+                </a:ln>
+                <a:effectLst/>
+              </p:spPr>
+              <p:style>
+                <a:lnRef idx="2">
+                  <a:schemeClr val="accent1">
+                    <a:shade val="50000"/>
+                  </a:schemeClr>
+                </a:lnRef>
+                <a:fillRef idx="1">
+                  <a:schemeClr val="accent1"/>
+                </a:fillRef>
+                <a:effectRef idx="0">
+                  <a:schemeClr val="accent1"/>
+                </a:effectRef>
+                <a:fontRef idx="minor">
+                  <a:schemeClr val="lt1"/>
+                </a:fontRef>
+              </p:style>
+              <p:txBody>
+                <a:bodyPr rtlCol="0" anchor="ctr"/>
+                <a:lstStyle/>
+                <a:p>
+                  <a:pPr algn="ctr"/>
+                  <a:endParaRPr lang="en-US" dirty="0"/>
+                </a:p>
+              </p:txBody>
+            </p:sp>
+            <p:sp>
+              <p:nvSpPr>
+                <p:cNvPr id="145" name="Rectangle 144">
+                  <a:extLst>
+                    <a:ext uri="{FF2B5EF4-FFF2-40B4-BE49-F238E27FC236}">
+                      <a16:creationId xmlns:a16="http://schemas.microsoft.com/office/drawing/2014/main" id="{A423EC31-02B7-5A9E-2339-E676D9174C9F}"/>
+                    </a:ext>
+                  </a:extLst>
+                </p:cNvPr>
+                <p:cNvSpPr/>
+                <p:nvPr/>
+              </p:nvSpPr>
+              <p:spPr>
+                <a:xfrm>
+                  <a:off x="2301677" y="4364758"/>
+                  <a:ext cx="413658" cy="451759"/>
+                </a:xfrm>
+                <a:prstGeom prst="rect">
+                  <a:avLst/>
+                </a:prstGeom>
+                <a:solidFill>
+                  <a:schemeClr val="accent4">
+                    <a:lumMod val="60000"/>
+                    <a:lumOff val="40000"/>
+                  </a:schemeClr>
+                </a:solidFill>
+                <a:ln w="12700" cap="flat" cmpd="sng" algn="ctr">
+                  <a:solidFill>
+                    <a:srgbClr val="FF0000"/>
+                  </a:solidFill>
+                  <a:prstDash val="solid"/>
+                  <a:miter lim="800000"/>
+                </a:ln>
+                <a:effectLst/>
+              </p:spPr>
+              <p:style>
+                <a:lnRef idx="2">
+                  <a:schemeClr val="accent1">
+                    <a:shade val="50000"/>
+                  </a:schemeClr>
+                </a:lnRef>
+                <a:fillRef idx="1">
+                  <a:schemeClr val="accent1"/>
+                </a:fillRef>
+                <a:effectRef idx="0">
+                  <a:schemeClr val="accent1"/>
+                </a:effectRef>
+                <a:fontRef idx="minor">
+                  <a:schemeClr val="lt1"/>
+                </a:fontRef>
+              </p:style>
+              <p:txBody>
+                <a:bodyPr rtlCol="0" anchor="ctr"/>
+                <a:lstStyle/>
+                <a:p>
+                  <a:pPr algn="ctr"/>
+                  <a:endParaRPr lang="en-US"/>
+                </a:p>
+              </p:txBody>
+            </p:sp>
+            <p:sp>
+              <p:nvSpPr>
+                <p:cNvPr id="146" name="Rectangle 145">
+                  <a:extLst>
+                    <a:ext uri="{FF2B5EF4-FFF2-40B4-BE49-F238E27FC236}">
+                      <a16:creationId xmlns:a16="http://schemas.microsoft.com/office/drawing/2014/main" id="{D0AEDB37-AE22-5638-00D9-4B2EF3D67A5F}"/>
+                    </a:ext>
+                  </a:extLst>
+                </p:cNvPr>
+                <p:cNvSpPr/>
+                <p:nvPr/>
+              </p:nvSpPr>
+              <p:spPr>
+                <a:xfrm>
+                  <a:off x="2301677" y="4817106"/>
+                  <a:ext cx="413658" cy="451759"/>
+                </a:xfrm>
+                <a:prstGeom prst="rect">
+                  <a:avLst/>
+                </a:prstGeom>
+                <a:solidFill>
+                  <a:srgbClr val="002060"/>
+                </a:solidFill>
+                <a:ln w="12700" cap="flat" cmpd="sng" algn="ctr">
+                  <a:solidFill>
+                    <a:srgbClr val="FF0000"/>
+                  </a:solidFill>
+                  <a:prstDash val="solid"/>
+                  <a:miter lim="800000"/>
+                </a:ln>
+                <a:effectLst/>
+              </p:spPr>
+              <p:style>
+                <a:lnRef idx="2">
+                  <a:schemeClr val="accent1">
+                    <a:shade val="50000"/>
+                  </a:schemeClr>
+                </a:lnRef>
+                <a:fillRef idx="1">
+                  <a:schemeClr val="accent1"/>
+                </a:fillRef>
+                <a:effectRef idx="0">
+                  <a:schemeClr val="accent1"/>
+                </a:effectRef>
+                <a:fontRef idx="minor">
+                  <a:schemeClr val="lt1"/>
+                </a:fontRef>
+              </p:style>
+              <p:txBody>
+                <a:bodyPr rtlCol="0" anchor="ctr"/>
+                <a:lstStyle/>
+                <a:p>
+                  <a:pPr algn="ctr"/>
+                  <a:endParaRPr lang="en-US"/>
+                </a:p>
+              </p:txBody>
+            </p:sp>
+          </p:grpSp>
+          <p:sp>
+            <p:nvSpPr>
+              <p:cNvPr id="132" name="TextBox 131">
+                <a:extLst>
+                  <a:ext uri="{FF2B5EF4-FFF2-40B4-BE49-F238E27FC236}">
+                    <a16:creationId xmlns:a16="http://schemas.microsoft.com/office/drawing/2014/main" id="{6FD8F64D-8EBF-E93B-694C-C00611F3C049}"/>
+                  </a:ext>
+                </a:extLst>
+              </p:cNvPr>
+              <p:cNvSpPr txBox="1"/>
+              <p:nvPr/>
+            </p:nvSpPr>
+            <p:spPr>
+              <a:xfrm>
+                <a:off x="1157273" y="2965360"/>
+                <a:ext cx="197116" cy="276999"/>
+              </a:xfrm>
+              <a:prstGeom prst="rect">
+                <a:avLst/>
+              </a:prstGeom>
+              <a:noFill/>
+            </p:spPr>
+            <p:txBody>
+              <a:bodyPr wrap="square" rtlCol="0">
+                <a:spAutoFit/>
+              </a:bodyPr>
+              <a:lstStyle/>
+              <a:p>
+                <a:r>
+                  <a:rPr lang="en-US" sz="1200" dirty="0"/>
+                  <a:t>0</a:t>
+                </a:r>
+              </a:p>
+            </p:txBody>
+          </p:sp>
+          <p:sp>
+            <p:nvSpPr>
+              <p:cNvPr id="133" name="TextBox 132">
+                <a:extLst>
+                  <a:ext uri="{FF2B5EF4-FFF2-40B4-BE49-F238E27FC236}">
+                    <a16:creationId xmlns:a16="http://schemas.microsoft.com/office/drawing/2014/main" id="{68B08443-6F37-2AEE-2FA5-F04EB094F46C}"/>
+                  </a:ext>
+                </a:extLst>
+              </p:cNvPr>
+              <p:cNvSpPr txBox="1"/>
+              <p:nvPr/>
+            </p:nvSpPr>
+            <p:spPr>
+              <a:xfrm>
+                <a:off x="1421559" y="2707029"/>
+                <a:ext cx="197116" cy="276999"/>
+              </a:xfrm>
+              <a:prstGeom prst="rect">
+                <a:avLst/>
+              </a:prstGeom>
+              <a:noFill/>
+            </p:spPr>
+            <p:txBody>
+              <a:bodyPr wrap="square" rtlCol="0">
+                <a:spAutoFit/>
+              </a:bodyPr>
+              <a:lstStyle/>
+              <a:p>
+                <a:r>
+                  <a:rPr lang="en-US" sz="1200" dirty="0"/>
+                  <a:t>0</a:t>
+                </a:r>
+              </a:p>
+            </p:txBody>
+          </p:sp>
+          <p:sp>
+            <p:nvSpPr>
+              <p:cNvPr id="134" name="TextBox 133">
+                <a:extLst>
+                  <a:ext uri="{FF2B5EF4-FFF2-40B4-BE49-F238E27FC236}">
+                    <a16:creationId xmlns:a16="http://schemas.microsoft.com/office/drawing/2014/main" id="{53B1AFD5-059D-A0C6-2A63-43EBC1363E2D}"/>
+                  </a:ext>
+                </a:extLst>
+              </p:cNvPr>
+              <p:cNvSpPr txBox="1"/>
+              <p:nvPr/>
+            </p:nvSpPr>
+            <p:spPr>
+              <a:xfrm>
+                <a:off x="1696308" y="2706314"/>
+                <a:ext cx="197116" cy="276999"/>
+              </a:xfrm>
+              <a:prstGeom prst="rect">
+                <a:avLst/>
+              </a:prstGeom>
+              <a:noFill/>
+            </p:spPr>
+            <p:txBody>
+              <a:bodyPr wrap="square" rtlCol="0">
+                <a:spAutoFit/>
+              </a:bodyPr>
+              <a:lstStyle/>
+              <a:p>
+                <a:r>
+                  <a:rPr lang="en-US" sz="1200" dirty="0"/>
+                  <a:t>1</a:t>
+                </a:r>
+              </a:p>
+            </p:txBody>
+          </p:sp>
+          <p:sp>
+            <p:nvSpPr>
+              <p:cNvPr id="135" name="TextBox 134">
+                <a:extLst>
+                  <a:ext uri="{FF2B5EF4-FFF2-40B4-BE49-F238E27FC236}">
+                    <a16:creationId xmlns:a16="http://schemas.microsoft.com/office/drawing/2014/main" id="{3D9A15A5-C66E-83C5-ED78-49C5B1E459BE}"/>
+                  </a:ext>
+                </a:extLst>
+              </p:cNvPr>
+              <p:cNvSpPr txBox="1"/>
+              <p:nvPr/>
+            </p:nvSpPr>
+            <p:spPr>
+              <a:xfrm>
+                <a:off x="1975451" y="2704228"/>
+                <a:ext cx="197116" cy="276999"/>
+              </a:xfrm>
+              <a:prstGeom prst="rect">
+                <a:avLst/>
+              </a:prstGeom>
+              <a:noFill/>
+            </p:spPr>
+            <p:txBody>
+              <a:bodyPr wrap="square" rtlCol="0">
+                <a:spAutoFit/>
+              </a:bodyPr>
+              <a:lstStyle/>
+              <a:p>
+                <a:r>
+                  <a:rPr lang="en-US" sz="1200" dirty="0"/>
+                  <a:t>2</a:t>
+                </a:r>
+              </a:p>
+            </p:txBody>
+          </p:sp>
+          <p:sp>
+            <p:nvSpPr>
+              <p:cNvPr id="136" name="TextBox 135">
+                <a:extLst>
+                  <a:ext uri="{FF2B5EF4-FFF2-40B4-BE49-F238E27FC236}">
+                    <a16:creationId xmlns:a16="http://schemas.microsoft.com/office/drawing/2014/main" id="{9A0A8A1D-1E82-9CA0-918E-146DE48B0362}"/>
+                  </a:ext>
+                </a:extLst>
+              </p:cNvPr>
+              <p:cNvSpPr txBox="1"/>
+              <p:nvPr/>
+            </p:nvSpPr>
+            <p:spPr>
+              <a:xfrm>
+                <a:off x="1157273" y="3253463"/>
+                <a:ext cx="197116" cy="276999"/>
+              </a:xfrm>
+              <a:prstGeom prst="rect">
+                <a:avLst/>
+              </a:prstGeom>
+              <a:noFill/>
+            </p:spPr>
+            <p:txBody>
+              <a:bodyPr wrap="square" rtlCol="0">
+                <a:spAutoFit/>
+              </a:bodyPr>
+              <a:lstStyle/>
+              <a:p>
+                <a:r>
+                  <a:rPr lang="en-US" sz="1200" dirty="0"/>
+                  <a:t>1</a:t>
+                </a:r>
+              </a:p>
+            </p:txBody>
+          </p:sp>
+          <p:sp>
+            <p:nvSpPr>
+              <p:cNvPr id="137" name="TextBox 136">
+                <a:extLst>
+                  <a:ext uri="{FF2B5EF4-FFF2-40B4-BE49-F238E27FC236}">
+                    <a16:creationId xmlns:a16="http://schemas.microsoft.com/office/drawing/2014/main" id="{8A648BAE-C856-0165-AE15-AAD4D5C9083B}"/>
+                  </a:ext>
+                </a:extLst>
+              </p:cNvPr>
+              <p:cNvSpPr txBox="1"/>
+              <p:nvPr/>
+            </p:nvSpPr>
+            <p:spPr>
+              <a:xfrm>
+                <a:off x="1153751" y="3540964"/>
+                <a:ext cx="197116" cy="276999"/>
+              </a:xfrm>
+              <a:prstGeom prst="rect">
+                <a:avLst/>
+              </a:prstGeom>
+              <a:noFill/>
+            </p:spPr>
+            <p:txBody>
+              <a:bodyPr wrap="square" rtlCol="0">
+                <a:spAutoFit/>
+              </a:bodyPr>
+              <a:lstStyle/>
+              <a:p>
+                <a:r>
+                  <a:rPr lang="en-US" sz="1200" dirty="0"/>
+                  <a:t>2</a:t>
+                </a:r>
+              </a:p>
+            </p:txBody>
+          </p:sp>
+        </p:grpSp>
+        <p:sp>
+          <p:nvSpPr>
+            <p:cNvPr id="130" name="TextBox 129">
+              <a:extLst>
+                <a:ext uri="{FF2B5EF4-FFF2-40B4-BE49-F238E27FC236}">
+                  <a16:creationId xmlns:a16="http://schemas.microsoft.com/office/drawing/2014/main" id="{4B04B88B-0347-852B-F0EF-B28B19C4CC59}"/>
+                </a:ext>
+              </a:extLst>
+            </p:cNvPr>
+            <p:cNvSpPr txBox="1"/>
+            <p:nvPr/>
+          </p:nvSpPr>
+          <p:spPr>
+            <a:xfrm>
+              <a:off x="320200" y="2511666"/>
+              <a:ext cx="1378326" cy="276999"/>
+            </a:xfrm>
+            <a:prstGeom prst="rect">
+              <a:avLst/>
+            </a:prstGeom>
+            <a:noFill/>
+          </p:spPr>
+          <p:txBody>
+            <a:bodyPr wrap="none" rtlCol="0">
+              <a:spAutoFit/>
+            </a:bodyPr>
+            <a:lstStyle/>
+            <a:p>
+              <a:r>
+                <a:rPr lang="en-US" sz="1200" dirty="0"/>
+                <a:t>Context PE tensor</a:t>
+              </a:r>
+            </a:p>
+          </p:txBody>
+        </p:sp>
+      </p:grpSp>
       <p:sp>
         <p:nvSpPr>
-          <p:cNvPr id="29" name="TextBox 28">
-            <a:extLst>
-              <a:ext uri="{FF2B5EF4-FFF2-40B4-BE49-F238E27FC236}">
-                <a16:creationId xmlns:a16="http://schemas.microsoft.com/office/drawing/2014/main" id="{65E2607D-8C60-B45D-B8E3-435E31CCB800}"/>
+          <p:cNvPr id="147" name="Oval 146">
+            <a:extLst>
+              <a:ext uri="{FF2B5EF4-FFF2-40B4-BE49-F238E27FC236}">
+                <a16:creationId xmlns:a16="http://schemas.microsoft.com/office/drawing/2014/main" id="{ED27A6DF-0248-D144-3CFE-10898A7AD111}"/>
+              </a:ext>
+            </a:extLst>
+          </p:cNvPr>
+          <p:cNvSpPr/>
+          <p:nvPr/>
+        </p:nvSpPr>
+        <p:spPr>
+          <a:xfrm>
+            <a:off x="9647356" y="4828420"/>
+            <a:ext cx="374073" cy="362005"/>
+          </a:xfrm>
+          <a:prstGeom prst="ellipse">
+            <a:avLst/>
+          </a:prstGeom>
+          <a:ln/>
+        </p:spPr>
+        <p:style>
+          <a:lnRef idx="2">
+            <a:schemeClr val="dk1"/>
+          </a:lnRef>
+          <a:fillRef idx="1">
+            <a:schemeClr val="lt1"/>
+          </a:fillRef>
+          <a:effectRef idx="0">
+            <a:schemeClr val="dk1"/>
+          </a:effectRef>
+          <a:fontRef idx="minor">
+            <a:schemeClr val="dk1"/>
+          </a:fontRef>
+        </p:style>
+        <p:txBody>
+          <a:bodyPr rtlCol="0" anchor="ctr"/>
+          <a:lstStyle/>
+          <a:p>
+            <a:pPr algn="ctr"/>
+            <a:r>
+              <a:rPr lang="en-US" dirty="0"/>
+              <a:t>+</a:t>
+            </a:r>
+          </a:p>
+        </p:txBody>
+      </p:sp>
+      <p:grpSp>
+        <p:nvGrpSpPr>
+          <p:cNvPr id="148" name="Group 147">
+            <a:extLst>
+              <a:ext uri="{FF2B5EF4-FFF2-40B4-BE49-F238E27FC236}">
+                <a16:creationId xmlns:a16="http://schemas.microsoft.com/office/drawing/2014/main" id="{1E083B3F-6B17-3547-F815-5EF508713BF8}"/>
+              </a:ext>
+            </a:extLst>
+          </p:cNvPr>
+          <p:cNvGrpSpPr/>
+          <p:nvPr/>
+        </p:nvGrpSpPr>
+        <p:grpSpPr>
+          <a:xfrm>
+            <a:off x="9351286" y="5417552"/>
+            <a:ext cx="1001428" cy="598310"/>
+            <a:chOff x="2493871" y="2168278"/>
+            <a:chExt cx="1001428" cy="598310"/>
+          </a:xfrm>
+        </p:grpSpPr>
+        <p:sp>
+          <p:nvSpPr>
+            <p:cNvPr id="149" name="Rectangle 148">
+              <a:extLst>
+                <a:ext uri="{FF2B5EF4-FFF2-40B4-BE49-F238E27FC236}">
+                  <a16:creationId xmlns:a16="http://schemas.microsoft.com/office/drawing/2014/main" id="{6DC9FD03-E056-6FF7-2971-F66CEE251E81}"/>
+                </a:ext>
+              </a:extLst>
+            </p:cNvPr>
+            <p:cNvSpPr/>
+            <p:nvPr/>
+          </p:nvSpPr>
+          <p:spPr>
+            <a:xfrm>
+              <a:off x="2860194" y="2496532"/>
+              <a:ext cx="268782" cy="270056"/>
+            </a:xfrm>
+            <a:prstGeom prst="rect">
+              <a:avLst/>
+            </a:prstGeom>
+            <a:solidFill>
+              <a:srgbClr val="00B0F0"/>
+            </a:solidFill>
+            <a:ln w="19050" cap="flat" cmpd="sng" algn="ctr">
+              <a:solidFill>
+                <a:srgbClr val="FF0000"/>
+              </a:solidFill>
+              <a:prstDash val="solid"/>
+              <a:miter lim="800000"/>
+            </a:ln>
+            <a:effectLst/>
+          </p:spPr>
+          <p:style>
+            <a:lnRef idx="2">
+              <a:schemeClr val="accent1">
+                <a:shade val="50000"/>
+              </a:schemeClr>
+            </a:lnRef>
+            <a:fillRef idx="1">
+              <a:schemeClr val="accent1"/>
+            </a:fillRef>
+            <a:effectRef idx="0">
+              <a:schemeClr val="accent1"/>
+            </a:effectRef>
+            <a:fontRef idx="minor">
+              <a:schemeClr val="lt1"/>
+            </a:fontRef>
+          </p:style>
+          <p:txBody>
+            <a:bodyPr rtlCol="0" anchor="ctr"/>
+            <a:lstStyle/>
+            <a:p>
+              <a:pPr algn="ctr"/>
+              <a:endParaRPr lang="en-US" dirty="0"/>
+            </a:p>
+          </p:txBody>
+        </p:sp>
+        <p:sp>
+          <p:nvSpPr>
+            <p:cNvPr id="150" name="TextBox 149">
+              <a:extLst>
+                <a:ext uri="{FF2B5EF4-FFF2-40B4-BE49-F238E27FC236}">
+                  <a16:creationId xmlns:a16="http://schemas.microsoft.com/office/drawing/2014/main" id="{7A0A7951-4255-D24E-6BAB-6BDB7004CA1A}"/>
+                </a:ext>
+              </a:extLst>
+            </p:cNvPr>
+            <p:cNvSpPr txBox="1"/>
+            <p:nvPr/>
+          </p:nvSpPr>
+          <p:spPr>
+            <a:xfrm>
+              <a:off x="2493871" y="2168278"/>
+              <a:ext cx="1001428" cy="276999"/>
+            </a:xfrm>
+            <a:prstGeom prst="rect">
+              <a:avLst/>
+            </a:prstGeom>
+            <a:noFill/>
+          </p:spPr>
+          <p:txBody>
+            <a:bodyPr wrap="none" rtlCol="0">
+              <a:spAutoFit/>
+            </a:bodyPr>
+            <a:lstStyle/>
+            <a:p>
+              <a:r>
+                <a:rPr lang="en-US" sz="1200" dirty="0"/>
+                <a:t>Target token</a:t>
+              </a:r>
+            </a:p>
+          </p:txBody>
+        </p:sp>
+      </p:grpSp>
+      <p:cxnSp>
+        <p:nvCxnSpPr>
+          <p:cNvPr id="153" name="Straight Arrow Connector 152">
+            <a:extLst>
+              <a:ext uri="{FF2B5EF4-FFF2-40B4-BE49-F238E27FC236}">
+                <a16:creationId xmlns:a16="http://schemas.microsoft.com/office/drawing/2014/main" id="{1CE370B9-8661-45F3-EB43-3E8288A64027}"/>
+              </a:ext>
+            </a:extLst>
+          </p:cNvPr>
+          <p:cNvCxnSpPr>
+            <a:cxnSpLocks/>
+            <a:stCxn id="125" idx="2"/>
+            <a:endCxn id="147" idx="7"/>
+          </p:cNvCxnSpPr>
+          <p:nvPr/>
+        </p:nvCxnSpPr>
+        <p:spPr>
+          <a:xfrm flipH="1">
+            <a:off x="9966647" y="3129845"/>
+            <a:ext cx="536951" cy="1751589"/>
+          </a:xfrm>
+          <a:prstGeom prst="straightConnector1">
+            <a:avLst/>
+          </a:prstGeom>
+          <a:ln w="19050">
+            <a:solidFill>
+              <a:srgbClr val="FF0000"/>
+            </a:solidFill>
+            <a:tailEnd type="triangle"/>
+          </a:ln>
+        </p:spPr>
+        <p:style>
+          <a:lnRef idx="1">
+            <a:schemeClr val="accent1"/>
+          </a:lnRef>
+          <a:fillRef idx="0">
+            <a:schemeClr val="accent1"/>
+          </a:fillRef>
+          <a:effectRef idx="0">
+            <a:schemeClr val="accent1"/>
+          </a:effectRef>
+          <a:fontRef idx="minor">
+            <a:schemeClr val="tx1"/>
+          </a:fontRef>
+        </p:style>
+      </p:cxnSp>
+      <p:cxnSp>
+        <p:nvCxnSpPr>
+          <p:cNvPr id="154" name="Straight Arrow Connector 153">
+            <a:extLst>
+              <a:ext uri="{FF2B5EF4-FFF2-40B4-BE49-F238E27FC236}">
+                <a16:creationId xmlns:a16="http://schemas.microsoft.com/office/drawing/2014/main" id="{3E7DFF63-D53F-FD26-1981-4FEBA32D0F76}"/>
+              </a:ext>
+            </a:extLst>
+          </p:cNvPr>
+          <p:cNvCxnSpPr>
+            <a:cxnSpLocks/>
+            <a:stCxn id="147" idx="4"/>
+            <a:endCxn id="150" idx="0"/>
+          </p:cNvCxnSpPr>
+          <p:nvPr/>
+        </p:nvCxnSpPr>
+        <p:spPr>
+          <a:xfrm>
+            <a:off x="9834393" y="5190425"/>
+            <a:ext cx="17607" cy="227127"/>
+          </a:xfrm>
+          <a:prstGeom prst="straightConnector1">
+            <a:avLst/>
+          </a:prstGeom>
+          <a:ln w="19050">
+            <a:solidFill>
+              <a:srgbClr val="FF0000"/>
+            </a:solidFill>
+            <a:tailEnd type="triangle"/>
+          </a:ln>
+        </p:spPr>
+        <p:style>
+          <a:lnRef idx="1">
+            <a:schemeClr val="accent1"/>
+          </a:lnRef>
+          <a:fillRef idx="0">
+            <a:schemeClr val="accent1"/>
+          </a:fillRef>
+          <a:effectRef idx="0">
+            <a:schemeClr val="accent1"/>
+          </a:effectRef>
+          <a:fontRef idx="minor">
+            <a:schemeClr val="tx1"/>
+          </a:fontRef>
+        </p:style>
+      </p:cxnSp>
+      <p:sp>
+        <p:nvSpPr>
+          <p:cNvPr id="155" name="TextBox 154">
+            <a:extLst>
+              <a:ext uri="{FF2B5EF4-FFF2-40B4-BE49-F238E27FC236}">
+                <a16:creationId xmlns:a16="http://schemas.microsoft.com/office/drawing/2014/main" id="{7F92343A-7CE5-F700-959B-5666FB8F104D}"/>
               </a:ext>
             </a:extLst>
           </p:cNvPr>
@@ -30937,8 +32854,8 @@
         </p:nvSpPr>
         <p:spPr>
           <a:xfrm>
-            <a:off x="1469962" y="2282585"/>
-            <a:ext cx="1001428" cy="276999"/>
+            <a:off x="7885648" y="2136576"/>
+            <a:ext cx="2363147" cy="369332"/>
           </a:xfrm>
           <a:prstGeom prst="rect">
             <a:avLst/>
@@ -30952,47 +32869,1343 @@
           <a:lstStyle/>
           <a:p>
             <a:r>
-              <a:rPr lang="en-US" sz="1200" dirty="0"/>
-              <a:t>Target token</a:t>
+              <a:rPr lang="en-US" dirty="0"/>
+              <a:t>Modified Architecture</a:t>
             </a:r>
           </a:p>
         </p:txBody>
       </p:sp>
       <p:sp>
         <p:nvSpPr>
-          <p:cNvPr id="30" name="TextBox 29">
-            <a:extLst>
-              <a:ext uri="{FF2B5EF4-FFF2-40B4-BE49-F238E27FC236}">
-                <a16:creationId xmlns:a16="http://schemas.microsoft.com/office/drawing/2014/main" id="{9C45E769-5FBC-AA3C-1E49-5D30F8E6F97C}"/>
-              </a:ext>
-            </a:extLst>
-          </p:cNvPr>
-          <p:cNvSpPr txBox="1"/>
+          <p:cNvPr id="156" name="Rectangle 155">
+            <a:extLst>
+              <a:ext uri="{FF2B5EF4-FFF2-40B4-BE49-F238E27FC236}">
+                <a16:creationId xmlns:a16="http://schemas.microsoft.com/office/drawing/2014/main" id="{A7372CCD-6B1D-6AD8-0D1D-F24DBAA2128F}"/>
+              </a:ext>
+            </a:extLst>
+          </p:cNvPr>
+          <p:cNvSpPr/>
           <p:nvPr/>
         </p:nvSpPr>
         <p:spPr>
           <a:xfrm>
-            <a:off x="1170220" y="3152001"/>
-            <a:ext cx="1001428" cy="276999"/>
+            <a:off x="8874229" y="4890493"/>
+            <a:ext cx="268782" cy="270056"/>
           </a:xfrm>
           <a:prstGeom prst="rect">
             <a:avLst/>
           </a:prstGeom>
-          <a:noFill/>
+          <a:solidFill>
+            <a:srgbClr val="92D050"/>
+          </a:solidFill>
+          <a:ln w="12700" cap="flat" cmpd="sng" algn="ctr">
+            <a:solidFill>
+              <a:srgbClr val="FF0000"/>
+            </a:solidFill>
+            <a:prstDash val="solid"/>
+            <a:miter lim="800000"/>
+          </a:ln>
+          <a:effectLst/>
         </p:spPr>
+        <p:style>
+          <a:lnRef idx="2">
+            <a:schemeClr val="accent1">
+              <a:shade val="50000"/>
+            </a:schemeClr>
+          </a:lnRef>
+          <a:fillRef idx="1">
+            <a:schemeClr val="accent1"/>
+          </a:fillRef>
+          <a:effectRef idx="0">
+            <a:schemeClr val="accent1"/>
+          </a:effectRef>
+          <a:fontRef idx="minor">
+            <a:schemeClr val="lt1"/>
+          </a:fontRef>
+        </p:style>
         <p:txBody>
-          <a:bodyPr wrap="none" rtlCol="0">
-            <a:spAutoFit/>
-          </a:bodyPr>
+          <a:bodyPr rtlCol="0" anchor="ctr"/>
           <a:lstStyle/>
           <a:p>
-            <a:r>
-              <a:rPr lang="en-US" sz="1200" dirty="0"/>
-              <a:t>Target token</a:t>
-            </a:r>
+            <a:pPr algn="ctr"/>
+            <a:endParaRPr lang="en-US" dirty="0"/>
           </a:p>
         </p:txBody>
       </p:sp>
+      <p:cxnSp>
+        <p:nvCxnSpPr>
+          <p:cNvPr id="157" name="Straight Arrow Connector 156">
+            <a:extLst>
+              <a:ext uri="{FF2B5EF4-FFF2-40B4-BE49-F238E27FC236}">
+                <a16:creationId xmlns:a16="http://schemas.microsoft.com/office/drawing/2014/main" id="{A5F24AB6-CBCA-93B7-8F9E-81C5B02F8A30}"/>
+              </a:ext>
+            </a:extLst>
+          </p:cNvPr>
+          <p:cNvCxnSpPr>
+            <a:cxnSpLocks/>
+            <a:stCxn id="156" idx="3"/>
+            <a:endCxn id="147" idx="2"/>
+          </p:cNvCxnSpPr>
+          <p:nvPr/>
+        </p:nvCxnSpPr>
+        <p:spPr>
+          <a:xfrm flipV="1">
+            <a:off x="9143011" y="5009423"/>
+            <a:ext cx="504345" cy="16098"/>
+          </a:xfrm>
+          <a:prstGeom prst="straightConnector1">
+            <a:avLst/>
+          </a:prstGeom>
+          <a:ln w="19050">
+            <a:solidFill>
+              <a:srgbClr val="FF0000"/>
+            </a:solidFill>
+            <a:tailEnd type="triangle"/>
+          </a:ln>
+        </p:spPr>
+        <p:style>
+          <a:lnRef idx="1">
+            <a:schemeClr val="accent1"/>
+          </a:lnRef>
+          <a:fillRef idx="0">
+            <a:schemeClr val="accent1"/>
+          </a:fillRef>
+          <a:effectRef idx="0">
+            <a:schemeClr val="accent1"/>
+          </a:effectRef>
+          <a:fontRef idx="minor">
+            <a:schemeClr val="tx1"/>
+          </a:fontRef>
+        </p:style>
+      </p:cxnSp>
+      <p:grpSp>
+        <p:nvGrpSpPr>
+          <p:cNvPr id="173" name="Group 172">
+            <a:extLst>
+              <a:ext uri="{FF2B5EF4-FFF2-40B4-BE49-F238E27FC236}">
+                <a16:creationId xmlns:a16="http://schemas.microsoft.com/office/drawing/2014/main" id="{908FB5D6-F42E-4C5F-8746-9AA7BB8E2D2C}"/>
+              </a:ext>
+            </a:extLst>
+          </p:cNvPr>
+          <p:cNvGrpSpPr/>
+          <p:nvPr/>
+        </p:nvGrpSpPr>
+        <p:grpSpPr>
+          <a:xfrm>
+            <a:off x="8311836" y="2529949"/>
+            <a:ext cx="1078665" cy="1417749"/>
+            <a:chOff x="377805" y="2509606"/>
+            <a:chExt cx="1078665" cy="1417749"/>
+          </a:xfrm>
+        </p:grpSpPr>
+        <p:grpSp>
+          <p:nvGrpSpPr>
+            <p:cNvPr id="174" name="Group 173">
+              <a:extLst>
+                <a:ext uri="{FF2B5EF4-FFF2-40B4-BE49-F238E27FC236}">
+                  <a16:creationId xmlns:a16="http://schemas.microsoft.com/office/drawing/2014/main" id="{560FBEDA-8B05-24EB-CF2D-D1AF3F93869B}"/>
+                </a:ext>
+              </a:extLst>
+            </p:cNvPr>
+            <p:cNvGrpSpPr/>
+            <p:nvPr/>
+          </p:nvGrpSpPr>
+          <p:grpSpPr>
+            <a:xfrm>
+              <a:off x="377805" y="2830690"/>
+              <a:ext cx="1078665" cy="1096665"/>
+              <a:chOff x="1153751" y="2704228"/>
+              <a:chExt cx="1074757" cy="1113735"/>
+            </a:xfrm>
+          </p:grpSpPr>
+          <p:grpSp>
+            <p:nvGrpSpPr>
+              <p:cNvPr id="176" name="Group 175">
+                <a:extLst>
+                  <a:ext uri="{FF2B5EF4-FFF2-40B4-BE49-F238E27FC236}">
+                    <a16:creationId xmlns:a16="http://schemas.microsoft.com/office/drawing/2014/main" id="{A86431F0-BDC2-1B56-6004-C6E29D3773B8}"/>
+                  </a:ext>
+                </a:extLst>
+              </p:cNvPr>
+              <p:cNvGrpSpPr/>
+              <p:nvPr/>
+            </p:nvGrpSpPr>
+            <p:grpSpPr>
+              <a:xfrm>
+                <a:off x="1425082" y="2981585"/>
+                <a:ext cx="803426" cy="823852"/>
+                <a:chOff x="1474361" y="3912410"/>
+                <a:chExt cx="1240974" cy="1357045"/>
+              </a:xfrm>
+            </p:grpSpPr>
+            <p:sp>
+              <p:nvSpPr>
+                <p:cNvPr id="183" name="Rectangle 182">
+                  <a:extLst>
+                    <a:ext uri="{FF2B5EF4-FFF2-40B4-BE49-F238E27FC236}">
+                      <a16:creationId xmlns:a16="http://schemas.microsoft.com/office/drawing/2014/main" id="{560BA541-6202-7576-B5C2-E478BF8EF169}"/>
+                    </a:ext>
+                  </a:extLst>
+                </p:cNvPr>
+                <p:cNvSpPr/>
+                <p:nvPr/>
+              </p:nvSpPr>
+              <p:spPr>
+                <a:xfrm>
+                  <a:off x="1474361" y="3914178"/>
+                  <a:ext cx="413658" cy="451759"/>
+                </a:xfrm>
+                <a:prstGeom prst="rect">
+                  <a:avLst/>
+                </a:prstGeom>
+                <a:solidFill>
+                  <a:schemeClr val="tx1">
+                    <a:lumMod val="85000"/>
+                    <a:lumOff val="15000"/>
+                  </a:schemeClr>
+                </a:solidFill>
+                <a:ln w="19050" cap="flat" cmpd="sng" algn="ctr">
+                  <a:solidFill>
+                    <a:srgbClr val="FF0000"/>
+                  </a:solidFill>
+                  <a:prstDash val="solid"/>
+                  <a:miter lim="800000"/>
+                </a:ln>
+                <a:effectLst/>
+              </p:spPr>
+              <p:style>
+                <a:lnRef idx="2">
+                  <a:schemeClr val="accent1">
+                    <a:shade val="50000"/>
+                  </a:schemeClr>
+                </a:lnRef>
+                <a:fillRef idx="1">
+                  <a:schemeClr val="accent1"/>
+                </a:fillRef>
+                <a:effectRef idx="0">
+                  <a:schemeClr val="accent1"/>
+                </a:effectRef>
+                <a:fontRef idx="minor">
+                  <a:schemeClr val="lt1"/>
+                </a:fontRef>
+              </p:style>
+              <p:txBody>
+                <a:bodyPr rtlCol="0" anchor="ctr"/>
+                <a:lstStyle/>
+                <a:p>
+                  <a:pPr algn="ctr"/>
+                  <a:endParaRPr lang="en-US" dirty="0"/>
+                </a:p>
+              </p:txBody>
+            </p:sp>
+            <p:sp>
+              <p:nvSpPr>
+                <p:cNvPr id="184" name="Rectangle 183">
+                  <a:extLst>
+                    <a:ext uri="{FF2B5EF4-FFF2-40B4-BE49-F238E27FC236}">
+                      <a16:creationId xmlns:a16="http://schemas.microsoft.com/office/drawing/2014/main" id="{39FF77A7-3FF0-2715-F69C-6A208CEF5BCA}"/>
+                    </a:ext>
+                  </a:extLst>
+                </p:cNvPr>
+                <p:cNvSpPr/>
+                <p:nvPr/>
+              </p:nvSpPr>
+              <p:spPr>
+                <a:xfrm>
+                  <a:off x="1474361" y="4817696"/>
+                  <a:ext cx="413658" cy="451759"/>
+                </a:xfrm>
+                <a:prstGeom prst="rect">
+                  <a:avLst/>
+                </a:prstGeom>
+                <a:solidFill>
+                  <a:schemeClr val="tx1"/>
+                </a:solidFill>
+                <a:ln w="12700" cap="flat" cmpd="sng" algn="ctr">
+                  <a:solidFill>
+                    <a:srgbClr val="FF0000"/>
+                  </a:solidFill>
+                  <a:prstDash val="solid"/>
+                  <a:miter lim="800000"/>
+                </a:ln>
+                <a:effectLst/>
+              </p:spPr>
+              <p:style>
+                <a:lnRef idx="2">
+                  <a:schemeClr val="accent1">
+                    <a:shade val="50000"/>
+                  </a:schemeClr>
+                </a:lnRef>
+                <a:fillRef idx="1">
+                  <a:schemeClr val="accent1"/>
+                </a:fillRef>
+                <a:effectRef idx="0">
+                  <a:schemeClr val="accent1"/>
+                </a:effectRef>
+                <a:fontRef idx="minor">
+                  <a:schemeClr val="lt1"/>
+                </a:fontRef>
+              </p:style>
+              <p:txBody>
+                <a:bodyPr rtlCol="0" anchor="ctr"/>
+                <a:lstStyle/>
+                <a:p>
+                  <a:pPr algn="ctr"/>
+                  <a:endParaRPr lang="en-US" dirty="0"/>
+                </a:p>
+              </p:txBody>
+            </p:sp>
+            <p:sp>
+              <p:nvSpPr>
+                <p:cNvPr id="185" name="Rectangle 184">
+                  <a:extLst>
+                    <a:ext uri="{FF2B5EF4-FFF2-40B4-BE49-F238E27FC236}">
+                      <a16:creationId xmlns:a16="http://schemas.microsoft.com/office/drawing/2014/main" id="{8B42D25C-6AAA-1C51-C13A-ACC74311DB10}"/>
+                    </a:ext>
+                  </a:extLst>
+                </p:cNvPr>
+                <p:cNvSpPr/>
+                <p:nvPr/>
+              </p:nvSpPr>
+              <p:spPr>
+                <a:xfrm>
+                  <a:off x="1474361" y="4365937"/>
+                  <a:ext cx="413658" cy="451759"/>
+                </a:xfrm>
+                <a:prstGeom prst="rect">
+                  <a:avLst/>
+                </a:prstGeom>
+                <a:solidFill>
+                  <a:schemeClr val="tx1">
+                    <a:lumMod val="65000"/>
+                    <a:lumOff val="35000"/>
+                  </a:schemeClr>
+                </a:solidFill>
+                <a:ln w="12700" cap="flat" cmpd="sng" algn="ctr">
+                  <a:solidFill>
+                    <a:srgbClr val="FF0000"/>
+                  </a:solidFill>
+                  <a:prstDash val="solid"/>
+                  <a:miter lim="800000"/>
+                </a:ln>
+                <a:effectLst/>
+              </p:spPr>
+              <p:style>
+                <a:lnRef idx="2">
+                  <a:schemeClr val="accent1">
+                    <a:shade val="50000"/>
+                  </a:schemeClr>
+                </a:lnRef>
+                <a:fillRef idx="1">
+                  <a:schemeClr val="accent1"/>
+                </a:fillRef>
+                <a:effectRef idx="0">
+                  <a:schemeClr val="accent1"/>
+                </a:effectRef>
+                <a:fontRef idx="minor">
+                  <a:schemeClr val="lt1"/>
+                </a:fontRef>
+              </p:style>
+              <p:txBody>
+                <a:bodyPr rtlCol="0" anchor="ctr"/>
+                <a:lstStyle/>
+                <a:p>
+                  <a:pPr algn="ctr"/>
+                  <a:endParaRPr lang="en-US"/>
+                </a:p>
+              </p:txBody>
+            </p:sp>
+            <p:sp>
+              <p:nvSpPr>
+                <p:cNvPr id="186" name="Rectangle 185">
+                  <a:extLst>
+                    <a:ext uri="{FF2B5EF4-FFF2-40B4-BE49-F238E27FC236}">
+                      <a16:creationId xmlns:a16="http://schemas.microsoft.com/office/drawing/2014/main" id="{26C03939-6A80-0BB4-2367-C2DCFB8FFE50}"/>
+                    </a:ext>
+                  </a:extLst>
+                </p:cNvPr>
+                <p:cNvSpPr/>
+                <p:nvPr/>
+              </p:nvSpPr>
+              <p:spPr>
+                <a:xfrm>
+                  <a:off x="1888019" y="3912999"/>
+                  <a:ext cx="413658" cy="451759"/>
+                </a:xfrm>
+                <a:prstGeom prst="rect">
+                  <a:avLst/>
+                </a:prstGeom>
+                <a:solidFill>
+                  <a:schemeClr val="tx1">
+                    <a:lumMod val="50000"/>
+                    <a:lumOff val="50000"/>
+                  </a:schemeClr>
+                </a:solidFill>
+                <a:ln w="19050" cap="flat" cmpd="sng" algn="ctr">
+                  <a:solidFill>
+                    <a:srgbClr val="FF0000"/>
+                  </a:solidFill>
+                  <a:prstDash val="solid"/>
+                  <a:miter lim="800000"/>
+                </a:ln>
+                <a:effectLst/>
+              </p:spPr>
+              <p:style>
+                <a:lnRef idx="2">
+                  <a:schemeClr val="accent1">
+                    <a:shade val="50000"/>
+                  </a:schemeClr>
+                </a:lnRef>
+                <a:fillRef idx="1">
+                  <a:schemeClr val="accent1"/>
+                </a:fillRef>
+                <a:effectRef idx="0">
+                  <a:schemeClr val="accent1"/>
+                </a:effectRef>
+                <a:fontRef idx="minor">
+                  <a:schemeClr val="lt1"/>
+                </a:fontRef>
+              </p:style>
+              <p:txBody>
+                <a:bodyPr rtlCol="0" anchor="ctr"/>
+                <a:lstStyle/>
+                <a:p>
+                  <a:pPr algn="ctr"/>
+                  <a:endParaRPr lang="en-US" dirty="0"/>
+                </a:p>
+              </p:txBody>
+            </p:sp>
+            <p:sp>
+              <p:nvSpPr>
+                <p:cNvPr id="187" name="Rectangle 186">
+                  <a:extLst>
+                    <a:ext uri="{FF2B5EF4-FFF2-40B4-BE49-F238E27FC236}">
+                      <a16:creationId xmlns:a16="http://schemas.microsoft.com/office/drawing/2014/main" id="{955A50CE-B98F-7A8C-4DDD-95C534842179}"/>
+                    </a:ext>
+                  </a:extLst>
+                </p:cNvPr>
+                <p:cNvSpPr/>
+                <p:nvPr/>
+              </p:nvSpPr>
+              <p:spPr>
+                <a:xfrm>
+                  <a:off x="1888019" y="4365347"/>
+                  <a:ext cx="413658" cy="451759"/>
+                </a:xfrm>
+                <a:prstGeom prst="rect">
+                  <a:avLst/>
+                </a:prstGeom>
+                <a:solidFill>
+                  <a:schemeClr val="bg2"/>
+                </a:solidFill>
+                <a:ln w="12700" cap="flat" cmpd="sng" algn="ctr">
+                  <a:solidFill>
+                    <a:srgbClr val="FF0000"/>
+                  </a:solidFill>
+                  <a:prstDash val="solid"/>
+                  <a:miter lim="800000"/>
+                </a:ln>
+                <a:effectLst/>
+              </p:spPr>
+              <p:style>
+                <a:lnRef idx="2">
+                  <a:schemeClr val="accent1">
+                    <a:shade val="50000"/>
+                  </a:schemeClr>
+                </a:lnRef>
+                <a:fillRef idx="1">
+                  <a:schemeClr val="accent1"/>
+                </a:fillRef>
+                <a:effectRef idx="0">
+                  <a:schemeClr val="accent1"/>
+                </a:effectRef>
+                <a:fontRef idx="minor">
+                  <a:schemeClr val="lt1"/>
+                </a:fontRef>
+              </p:style>
+              <p:txBody>
+                <a:bodyPr rtlCol="0" anchor="ctr"/>
+                <a:lstStyle/>
+                <a:p>
+                  <a:pPr algn="ctr"/>
+                  <a:endParaRPr lang="en-US" dirty="0"/>
+                </a:p>
+              </p:txBody>
+            </p:sp>
+            <p:sp>
+              <p:nvSpPr>
+                <p:cNvPr id="188" name="Rectangle 187">
+                  <a:extLst>
+                    <a:ext uri="{FF2B5EF4-FFF2-40B4-BE49-F238E27FC236}">
+                      <a16:creationId xmlns:a16="http://schemas.microsoft.com/office/drawing/2014/main" id="{894A80F6-0F7B-3650-8C82-1C630E99BCF3}"/>
+                    </a:ext>
+                  </a:extLst>
+                </p:cNvPr>
+                <p:cNvSpPr/>
+                <p:nvPr/>
+              </p:nvSpPr>
+              <p:spPr>
+                <a:xfrm>
+                  <a:off x="1888019" y="4817695"/>
+                  <a:ext cx="413658" cy="451759"/>
+                </a:xfrm>
+                <a:prstGeom prst="rect">
+                  <a:avLst/>
+                </a:prstGeom>
+                <a:solidFill>
+                  <a:schemeClr val="tx1">
+                    <a:lumMod val="50000"/>
+                    <a:lumOff val="50000"/>
+                  </a:schemeClr>
+                </a:solidFill>
+                <a:ln w="12700" cap="flat" cmpd="sng" algn="ctr">
+                  <a:solidFill>
+                    <a:srgbClr val="FF0000"/>
+                  </a:solidFill>
+                  <a:prstDash val="solid"/>
+                  <a:miter lim="800000"/>
+                </a:ln>
+                <a:effectLst/>
+              </p:spPr>
+              <p:style>
+                <a:lnRef idx="2">
+                  <a:schemeClr val="accent1">
+                    <a:shade val="50000"/>
+                  </a:schemeClr>
+                </a:lnRef>
+                <a:fillRef idx="1">
+                  <a:schemeClr val="accent1"/>
+                </a:fillRef>
+                <a:effectRef idx="0">
+                  <a:schemeClr val="accent1"/>
+                </a:effectRef>
+                <a:fontRef idx="minor">
+                  <a:schemeClr val="lt1"/>
+                </a:fontRef>
+              </p:style>
+              <p:txBody>
+                <a:bodyPr rtlCol="0" anchor="ctr"/>
+                <a:lstStyle/>
+                <a:p>
+                  <a:pPr algn="ctr"/>
+                  <a:endParaRPr lang="en-US"/>
+                </a:p>
+              </p:txBody>
+            </p:sp>
+            <p:sp>
+              <p:nvSpPr>
+                <p:cNvPr id="189" name="Rectangle 188">
+                  <a:extLst>
+                    <a:ext uri="{FF2B5EF4-FFF2-40B4-BE49-F238E27FC236}">
+                      <a16:creationId xmlns:a16="http://schemas.microsoft.com/office/drawing/2014/main" id="{C3E4B2A4-4807-0388-4F3A-C5BB3850E4CB}"/>
+                    </a:ext>
+                  </a:extLst>
+                </p:cNvPr>
+                <p:cNvSpPr/>
+                <p:nvPr/>
+              </p:nvSpPr>
+              <p:spPr>
+                <a:xfrm>
+                  <a:off x="2301677" y="3912410"/>
+                  <a:ext cx="413658" cy="451759"/>
+                </a:xfrm>
+                <a:prstGeom prst="rect">
+                  <a:avLst/>
+                </a:prstGeom>
+                <a:solidFill>
+                  <a:schemeClr val="tx1">
+                    <a:lumMod val="75000"/>
+                    <a:lumOff val="25000"/>
+                  </a:schemeClr>
+                </a:solidFill>
+                <a:ln w="19050" cap="flat" cmpd="sng" algn="ctr">
+                  <a:solidFill>
+                    <a:srgbClr val="FF0000"/>
+                  </a:solidFill>
+                  <a:prstDash val="solid"/>
+                  <a:miter lim="800000"/>
+                </a:ln>
+                <a:effectLst/>
+              </p:spPr>
+              <p:style>
+                <a:lnRef idx="2">
+                  <a:schemeClr val="accent1">
+                    <a:shade val="50000"/>
+                  </a:schemeClr>
+                </a:lnRef>
+                <a:fillRef idx="1">
+                  <a:schemeClr val="accent1"/>
+                </a:fillRef>
+                <a:effectRef idx="0">
+                  <a:schemeClr val="accent1"/>
+                </a:effectRef>
+                <a:fontRef idx="minor">
+                  <a:schemeClr val="lt1"/>
+                </a:fontRef>
+              </p:style>
+              <p:txBody>
+                <a:bodyPr rtlCol="0" anchor="ctr"/>
+                <a:lstStyle/>
+                <a:p>
+                  <a:pPr algn="ctr"/>
+                  <a:endParaRPr lang="en-US" dirty="0"/>
+                </a:p>
+              </p:txBody>
+            </p:sp>
+            <p:sp>
+              <p:nvSpPr>
+                <p:cNvPr id="190" name="Rectangle 189">
+                  <a:extLst>
+                    <a:ext uri="{FF2B5EF4-FFF2-40B4-BE49-F238E27FC236}">
+                      <a16:creationId xmlns:a16="http://schemas.microsoft.com/office/drawing/2014/main" id="{27859A71-EE10-0CDD-B216-8E497D1D0F67}"/>
+                    </a:ext>
+                  </a:extLst>
+                </p:cNvPr>
+                <p:cNvSpPr/>
+                <p:nvPr/>
+              </p:nvSpPr>
+              <p:spPr>
+                <a:xfrm>
+                  <a:off x="2301677" y="4364758"/>
+                  <a:ext cx="413658" cy="451759"/>
+                </a:xfrm>
+                <a:prstGeom prst="rect">
+                  <a:avLst/>
+                </a:prstGeom>
+                <a:solidFill>
+                  <a:schemeClr val="tx1">
+                    <a:lumMod val="85000"/>
+                    <a:lumOff val="15000"/>
+                  </a:schemeClr>
+                </a:solidFill>
+                <a:ln w="12700" cap="flat" cmpd="sng" algn="ctr">
+                  <a:solidFill>
+                    <a:srgbClr val="FF0000"/>
+                  </a:solidFill>
+                  <a:prstDash val="solid"/>
+                  <a:miter lim="800000"/>
+                </a:ln>
+                <a:effectLst/>
+              </p:spPr>
+              <p:style>
+                <a:lnRef idx="2">
+                  <a:schemeClr val="accent1">
+                    <a:shade val="50000"/>
+                  </a:schemeClr>
+                </a:lnRef>
+                <a:fillRef idx="1">
+                  <a:schemeClr val="accent1"/>
+                </a:fillRef>
+                <a:effectRef idx="0">
+                  <a:schemeClr val="accent1"/>
+                </a:effectRef>
+                <a:fontRef idx="minor">
+                  <a:schemeClr val="lt1"/>
+                </a:fontRef>
+              </p:style>
+              <p:txBody>
+                <a:bodyPr rtlCol="0" anchor="ctr"/>
+                <a:lstStyle/>
+                <a:p>
+                  <a:pPr algn="ctr"/>
+                  <a:endParaRPr lang="en-US"/>
+                </a:p>
+              </p:txBody>
+            </p:sp>
+            <p:sp>
+              <p:nvSpPr>
+                <p:cNvPr id="191" name="Rectangle 190">
+                  <a:extLst>
+                    <a:ext uri="{FF2B5EF4-FFF2-40B4-BE49-F238E27FC236}">
+                      <a16:creationId xmlns:a16="http://schemas.microsoft.com/office/drawing/2014/main" id="{CD1EC371-2643-B6D0-4D75-F07ABE54E612}"/>
+                    </a:ext>
+                  </a:extLst>
+                </p:cNvPr>
+                <p:cNvSpPr/>
+                <p:nvPr/>
+              </p:nvSpPr>
+              <p:spPr>
+                <a:xfrm>
+                  <a:off x="2301677" y="4817106"/>
+                  <a:ext cx="413658" cy="451759"/>
+                </a:xfrm>
+                <a:prstGeom prst="rect">
+                  <a:avLst/>
+                </a:prstGeom>
+                <a:solidFill>
+                  <a:schemeClr val="tx1">
+                    <a:lumMod val="65000"/>
+                    <a:lumOff val="35000"/>
+                  </a:schemeClr>
+                </a:solidFill>
+                <a:ln w="12700" cap="flat" cmpd="sng" algn="ctr">
+                  <a:solidFill>
+                    <a:srgbClr val="FF0000"/>
+                  </a:solidFill>
+                  <a:prstDash val="solid"/>
+                  <a:miter lim="800000"/>
+                </a:ln>
+                <a:effectLst/>
+              </p:spPr>
+              <p:style>
+                <a:lnRef idx="2">
+                  <a:schemeClr val="accent1">
+                    <a:shade val="50000"/>
+                  </a:schemeClr>
+                </a:lnRef>
+                <a:fillRef idx="1">
+                  <a:schemeClr val="accent1"/>
+                </a:fillRef>
+                <a:effectRef idx="0">
+                  <a:schemeClr val="accent1"/>
+                </a:effectRef>
+                <a:fontRef idx="minor">
+                  <a:schemeClr val="lt1"/>
+                </a:fontRef>
+              </p:style>
+              <p:txBody>
+                <a:bodyPr rtlCol="0" anchor="ctr"/>
+                <a:lstStyle/>
+                <a:p>
+                  <a:pPr algn="ctr"/>
+                  <a:endParaRPr lang="en-US"/>
+                </a:p>
+              </p:txBody>
+            </p:sp>
+          </p:grpSp>
+          <p:sp>
+            <p:nvSpPr>
+              <p:cNvPr id="177" name="TextBox 176">
+                <a:extLst>
+                  <a:ext uri="{FF2B5EF4-FFF2-40B4-BE49-F238E27FC236}">
+                    <a16:creationId xmlns:a16="http://schemas.microsoft.com/office/drawing/2014/main" id="{D3E1D777-9774-E992-BEC3-4E8A0E02AA3B}"/>
+                  </a:ext>
+                </a:extLst>
+              </p:cNvPr>
+              <p:cNvSpPr txBox="1"/>
+              <p:nvPr/>
+            </p:nvSpPr>
+            <p:spPr>
+              <a:xfrm>
+                <a:off x="1157273" y="2965360"/>
+                <a:ext cx="197116" cy="276999"/>
+              </a:xfrm>
+              <a:prstGeom prst="rect">
+                <a:avLst/>
+              </a:prstGeom>
+              <a:noFill/>
+            </p:spPr>
+            <p:txBody>
+              <a:bodyPr wrap="square" rtlCol="0">
+                <a:spAutoFit/>
+              </a:bodyPr>
+              <a:lstStyle/>
+              <a:p>
+                <a:r>
+                  <a:rPr lang="en-US" sz="1200" dirty="0"/>
+                  <a:t>0</a:t>
+                </a:r>
+              </a:p>
+            </p:txBody>
+          </p:sp>
+          <p:sp>
+            <p:nvSpPr>
+              <p:cNvPr id="178" name="TextBox 177">
+                <a:extLst>
+                  <a:ext uri="{FF2B5EF4-FFF2-40B4-BE49-F238E27FC236}">
+                    <a16:creationId xmlns:a16="http://schemas.microsoft.com/office/drawing/2014/main" id="{F8E44706-8AED-F5AE-0955-5571A80A17D6}"/>
+                  </a:ext>
+                </a:extLst>
+              </p:cNvPr>
+              <p:cNvSpPr txBox="1"/>
+              <p:nvPr/>
+            </p:nvSpPr>
+            <p:spPr>
+              <a:xfrm>
+                <a:off x="1421559" y="2707029"/>
+                <a:ext cx="197116" cy="276999"/>
+              </a:xfrm>
+              <a:prstGeom prst="rect">
+                <a:avLst/>
+              </a:prstGeom>
+              <a:noFill/>
+            </p:spPr>
+            <p:txBody>
+              <a:bodyPr wrap="square" rtlCol="0">
+                <a:spAutoFit/>
+              </a:bodyPr>
+              <a:lstStyle/>
+              <a:p>
+                <a:r>
+                  <a:rPr lang="en-US" sz="1200" dirty="0"/>
+                  <a:t>0</a:t>
+                </a:r>
+              </a:p>
+            </p:txBody>
+          </p:sp>
+          <p:sp>
+            <p:nvSpPr>
+              <p:cNvPr id="179" name="TextBox 178">
+                <a:extLst>
+                  <a:ext uri="{FF2B5EF4-FFF2-40B4-BE49-F238E27FC236}">
+                    <a16:creationId xmlns:a16="http://schemas.microsoft.com/office/drawing/2014/main" id="{E9B6D3C2-71DC-2C34-24F8-FA92C57B1955}"/>
+                  </a:ext>
+                </a:extLst>
+              </p:cNvPr>
+              <p:cNvSpPr txBox="1"/>
+              <p:nvPr/>
+            </p:nvSpPr>
+            <p:spPr>
+              <a:xfrm>
+                <a:off x="1696308" y="2706314"/>
+                <a:ext cx="197116" cy="276999"/>
+              </a:xfrm>
+              <a:prstGeom prst="rect">
+                <a:avLst/>
+              </a:prstGeom>
+              <a:noFill/>
+            </p:spPr>
+            <p:txBody>
+              <a:bodyPr wrap="square" rtlCol="0">
+                <a:spAutoFit/>
+              </a:bodyPr>
+              <a:lstStyle/>
+              <a:p>
+                <a:r>
+                  <a:rPr lang="en-US" sz="1200" dirty="0"/>
+                  <a:t>1</a:t>
+                </a:r>
+              </a:p>
+            </p:txBody>
+          </p:sp>
+          <p:sp>
+            <p:nvSpPr>
+              <p:cNvPr id="180" name="TextBox 179">
+                <a:extLst>
+                  <a:ext uri="{FF2B5EF4-FFF2-40B4-BE49-F238E27FC236}">
+                    <a16:creationId xmlns:a16="http://schemas.microsoft.com/office/drawing/2014/main" id="{14801583-F597-2C67-792C-1B17A3758235}"/>
+                  </a:ext>
+                </a:extLst>
+              </p:cNvPr>
+              <p:cNvSpPr txBox="1"/>
+              <p:nvPr/>
+            </p:nvSpPr>
+            <p:spPr>
+              <a:xfrm>
+                <a:off x="1975451" y="2704228"/>
+                <a:ext cx="197116" cy="276999"/>
+              </a:xfrm>
+              <a:prstGeom prst="rect">
+                <a:avLst/>
+              </a:prstGeom>
+              <a:noFill/>
+            </p:spPr>
+            <p:txBody>
+              <a:bodyPr wrap="square" rtlCol="0">
+                <a:spAutoFit/>
+              </a:bodyPr>
+              <a:lstStyle/>
+              <a:p>
+                <a:r>
+                  <a:rPr lang="en-US" sz="1200" dirty="0"/>
+                  <a:t>2</a:t>
+                </a:r>
+              </a:p>
+            </p:txBody>
+          </p:sp>
+          <p:sp>
+            <p:nvSpPr>
+              <p:cNvPr id="181" name="TextBox 180">
+                <a:extLst>
+                  <a:ext uri="{FF2B5EF4-FFF2-40B4-BE49-F238E27FC236}">
+                    <a16:creationId xmlns:a16="http://schemas.microsoft.com/office/drawing/2014/main" id="{26A2E691-9616-897C-B680-050DD20273FE}"/>
+                  </a:ext>
+                </a:extLst>
+              </p:cNvPr>
+              <p:cNvSpPr txBox="1"/>
+              <p:nvPr/>
+            </p:nvSpPr>
+            <p:spPr>
+              <a:xfrm>
+                <a:off x="1157273" y="3253463"/>
+                <a:ext cx="197116" cy="276999"/>
+              </a:xfrm>
+              <a:prstGeom prst="rect">
+                <a:avLst/>
+              </a:prstGeom>
+              <a:noFill/>
+            </p:spPr>
+            <p:txBody>
+              <a:bodyPr wrap="square" rtlCol="0">
+                <a:spAutoFit/>
+              </a:bodyPr>
+              <a:lstStyle/>
+              <a:p>
+                <a:r>
+                  <a:rPr lang="en-US" sz="1200" dirty="0"/>
+                  <a:t>1</a:t>
+                </a:r>
+              </a:p>
+            </p:txBody>
+          </p:sp>
+          <p:sp>
+            <p:nvSpPr>
+              <p:cNvPr id="182" name="TextBox 181">
+                <a:extLst>
+                  <a:ext uri="{FF2B5EF4-FFF2-40B4-BE49-F238E27FC236}">
+                    <a16:creationId xmlns:a16="http://schemas.microsoft.com/office/drawing/2014/main" id="{06819533-B9CF-800E-39EA-7B3D332B94A5}"/>
+                  </a:ext>
+                </a:extLst>
+              </p:cNvPr>
+              <p:cNvSpPr txBox="1"/>
+              <p:nvPr/>
+            </p:nvSpPr>
+            <p:spPr>
+              <a:xfrm>
+                <a:off x="1153751" y="3540964"/>
+                <a:ext cx="197116" cy="276999"/>
+              </a:xfrm>
+              <a:prstGeom prst="rect">
+                <a:avLst/>
+              </a:prstGeom>
+              <a:noFill/>
+            </p:spPr>
+            <p:txBody>
+              <a:bodyPr wrap="square" rtlCol="0">
+                <a:spAutoFit/>
+              </a:bodyPr>
+              <a:lstStyle/>
+              <a:p>
+                <a:r>
+                  <a:rPr lang="en-US" sz="1200" dirty="0"/>
+                  <a:t>2</a:t>
+                </a:r>
+              </a:p>
+            </p:txBody>
+          </p:sp>
+        </p:grpSp>
+        <p:sp>
+          <p:nvSpPr>
+            <p:cNvPr id="175" name="TextBox 174">
+              <a:extLst>
+                <a:ext uri="{FF2B5EF4-FFF2-40B4-BE49-F238E27FC236}">
+                  <a16:creationId xmlns:a16="http://schemas.microsoft.com/office/drawing/2014/main" id="{BA5F2DD3-1B51-EF26-7AD0-572DB293DE0A}"/>
+                </a:ext>
+              </a:extLst>
+            </p:cNvPr>
+            <p:cNvSpPr txBox="1"/>
+            <p:nvPr/>
+          </p:nvSpPr>
+          <p:spPr>
+            <a:xfrm>
+              <a:off x="611523" y="2509606"/>
+              <a:ext cx="809837" cy="276999"/>
+            </a:xfrm>
+            <a:prstGeom prst="rect">
+              <a:avLst/>
+            </a:prstGeom>
+            <a:noFill/>
+          </p:spPr>
+          <p:txBody>
+            <a:bodyPr wrap="none" rtlCol="0">
+              <a:spAutoFit/>
+            </a:bodyPr>
+            <a:lstStyle/>
+            <a:p>
+              <a:r>
+                <a:rPr lang="en-US" sz="1200" dirty="0"/>
+                <a:t>Attention</a:t>
+              </a:r>
+            </a:p>
+          </p:txBody>
+        </p:sp>
+      </p:grpSp>
+      <p:grpSp>
+        <p:nvGrpSpPr>
+          <p:cNvPr id="199" name="Group 198">
+            <a:extLst>
+              <a:ext uri="{FF2B5EF4-FFF2-40B4-BE49-F238E27FC236}">
+                <a16:creationId xmlns:a16="http://schemas.microsoft.com/office/drawing/2014/main" id="{E54D0891-7793-6ECC-8224-EDE200D7F14E}"/>
+              </a:ext>
+            </a:extLst>
+          </p:cNvPr>
+          <p:cNvGrpSpPr/>
+          <p:nvPr/>
+        </p:nvGrpSpPr>
+        <p:grpSpPr>
+          <a:xfrm>
+            <a:off x="7891586" y="4223856"/>
+            <a:ext cx="374073" cy="418397"/>
+            <a:chOff x="7310043" y="4227454"/>
+            <a:chExt cx="374073" cy="418397"/>
+          </a:xfrm>
+        </p:grpSpPr>
+        <p:sp>
+          <p:nvSpPr>
+            <p:cNvPr id="197" name="Oval 196">
+              <a:extLst>
+                <a:ext uri="{FF2B5EF4-FFF2-40B4-BE49-F238E27FC236}">
+                  <a16:creationId xmlns:a16="http://schemas.microsoft.com/office/drawing/2014/main" id="{5F2E2D3C-F8BC-B0E1-2D8B-CA41A29BA401}"/>
+                </a:ext>
+              </a:extLst>
+            </p:cNvPr>
+            <p:cNvSpPr/>
+            <p:nvPr/>
+          </p:nvSpPr>
+          <p:spPr>
+            <a:xfrm>
+              <a:off x="7310043" y="4227454"/>
+              <a:ext cx="374073" cy="364394"/>
+            </a:xfrm>
+            <a:prstGeom prst="ellipse">
+              <a:avLst/>
+            </a:prstGeom>
+            <a:ln/>
+          </p:spPr>
+          <p:style>
+            <a:lnRef idx="2">
+              <a:schemeClr val="dk1"/>
+            </a:lnRef>
+            <a:fillRef idx="1">
+              <a:schemeClr val="lt1"/>
+            </a:fillRef>
+            <a:effectRef idx="0">
+              <a:schemeClr val="dk1"/>
+            </a:effectRef>
+            <a:fontRef idx="minor">
+              <a:schemeClr val="dk1"/>
+            </a:fontRef>
+          </p:style>
+          <p:txBody>
+            <a:bodyPr rtlCol="0" anchor="ctr"/>
+            <a:lstStyle/>
+            <a:p>
+              <a:pPr algn="ctr"/>
+              <a:endParaRPr lang="en-US" dirty="0"/>
+            </a:p>
+          </p:txBody>
+        </p:sp>
+        <p:sp>
+          <p:nvSpPr>
+            <p:cNvPr id="198" name="TextBox 197">
+              <a:extLst>
+                <a:ext uri="{FF2B5EF4-FFF2-40B4-BE49-F238E27FC236}">
+                  <a16:creationId xmlns:a16="http://schemas.microsoft.com/office/drawing/2014/main" id="{7F184880-8D38-26BA-B07F-012C71F24C7D}"/>
+                </a:ext>
+              </a:extLst>
+            </p:cNvPr>
+            <p:cNvSpPr txBox="1"/>
+            <p:nvPr/>
+          </p:nvSpPr>
+          <p:spPr>
+            <a:xfrm>
+              <a:off x="7350244" y="4276519"/>
+              <a:ext cx="293670" cy="369332"/>
+            </a:xfrm>
+            <a:prstGeom prst="rect">
+              <a:avLst/>
+            </a:prstGeom>
+            <a:noFill/>
+          </p:spPr>
+          <p:txBody>
+            <a:bodyPr wrap="none" rtlCol="0">
+              <a:spAutoFit/>
+            </a:bodyPr>
+            <a:lstStyle/>
+            <a:p>
+              <a:r>
+                <a:rPr lang="en-US" dirty="0"/>
+                <a:t>*</a:t>
+              </a:r>
+            </a:p>
+          </p:txBody>
+        </p:sp>
+      </p:grpSp>
+      <p:grpSp>
+        <p:nvGrpSpPr>
+          <p:cNvPr id="201" name="Group 200">
+            <a:extLst>
+              <a:ext uri="{FF2B5EF4-FFF2-40B4-BE49-F238E27FC236}">
+                <a16:creationId xmlns:a16="http://schemas.microsoft.com/office/drawing/2014/main" id="{26A9080B-A14B-CBC5-DB7D-F8D03A1D826A}"/>
+              </a:ext>
+            </a:extLst>
+          </p:cNvPr>
+          <p:cNvGrpSpPr/>
+          <p:nvPr/>
+        </p:nvGrpSpPr>
+        <p:grpSpPr>
+          <a:xfrm>
+            <a:off x="7872131" y="4808790"/>
+            <a:ext cx="470838" cy="433461"/>
+            <a:chOff x="7310043" y="4227454"/>
+            <a:chExt cx="408034" cy="380458"/>
+          </a:xfrm>
+        </p:grpSpPr>
+        <p:sp>
+          <p:nvSpPr>
+            <p:cNvPr id="202" name="Oval 201">
+              <a:extLst>
+                <a:ext uri="{FF2B5EF4-FFF2-40B4-BE49-F238E27FC236}">
+                  <a16:creationId xmlns:a16="http://schemas.microsoft.com/office/drawing/2014/main" id="{9F2CDFA9-49BF-7EB9-68DF-6738E4918D4D}"/>
+                </a:ext>
+              </a:extLst>
+            </p:cNvPr>
+            <p:cNvSpPr/>
+            <p:nvPr/>
+          </p:nvSpPr>
+          <p:spPr>
+            <a:xfrm>
+              <a:off x="7310043" y="4227454"/>
+              <a:ext cx="374073" cy="364394"/>
+            </a:xfrm>
+            <a:prstGeom prst="ellipse">
+              <a:avLst/>
+            </a:prstGeom>
+            <a:ln/>
+          </p:spPr>
+          <p:style>
+            <a:lnRef idx="2">
+              <a:schemeClr val="dk1"/>
+            </a:lnRef>
+            <a:fillRef idx="1">
+              <a:schemeClr val="lt1"/>
+            </a:fillRef>
+            <a:effectRef idx="0">
+              <a:schemeClr val="dk1"/>
+            </a:effectRef>
+            <a:fontRef idx="minor">
+              <a:schemeClr val="dk1"/>
+            </a:fontRef>
+          </p:style>
+          <p:txBody>
+            <a:bodyPr rtlCol="0" anchor="ctr"/>
+            <a:lstStyle/>
+            <a:p>
+              <a:pPr algn="ctr"/>
+              <a:endParaRPr lang="en-US" dirty="0"/>
+            </a:p>
+          </p:txBody>
+        </p:sp>
+        <p:sp>
+          <p:nvSpPr>
+            <p:cNvPr id="203" name="TextBox 202">
+              <a:extLst>
+                <a:ext uri="{FF2B5EF4-FFF2-40B4-BE49-F238E27FC236}">
+                  <a16:creationId xmlns:a16="http://schemas.microsoft.com/office/drawing/2014/main" id="{26896540-3595-4350-9A93-56E007E94E35}"/>
+                </a:ext>
+              </a:extLst>
+            </p:cNvPr>
+            <p:cNvSpPr txBox="1"/>
+            <p:nvPr/>
+          </p:nvSpPr>
+          <p:spPr>
+            <a:xfrm>
+              <a:off x="7365095" y="4238580"/>
+              <a:ext cx="352982" cy="369332"/>
+            </a:xfrm>
+            <a:prstGeom prst="rect">
+              <a:avLst/>
+            </a:prstGeom>
+            <a:noFill/>
+          </p:spPr>
+          <p:txBody>
+            <a:bodyPr wrap="none" rtlCol="0">
+              <a:spAutoFit/>
+            </a:bodyPr>
+            <a:lstStyle/>
+            <a:p>
+              <a:r>
+                <a:rPr lang="en-US" dirty="0"/>
+                <a:t>⅀</a:t>
+              </a:r>
+            </a:p>
+          </p:txBody>
+        </p:sp>
+      </p:grpSp>
+      <p:cxnSp>
+        <p:nvCxnSpPr>
+          <p:cNvPr id="210" name="Straight Arrow Connector 209">
+            <a:extLst>
+              <a:ext uri="{FF2B5EF4-FFF2-40B4-BE49-F238E27FC236}">
+                <a16:creationId xmlns:a16="http://schemas.microsoft.com/office/drawing/2014/main" id="{76676649-35FC-60E5-11E9-D5A2147D3ED7}"/>
+              </a:ext>
+            </a:extLst>
+          </p:cNvPr>
+          <p:cNvCxnSpPr>
+            <a:cxnSpLocks/>
+            <a:stCxn id="143" idx="2"/>
+            <a:endCxn id="197" idx="2"/>
+          </p:cNvCxnSpPr>
+          <p:nvPr/>
+        </p:nvCxnSpPr>
+        <p:spPr>
+          <a:xfrm>
+            <a:off x="7382786" y="3957045"/>
+            <a:ext cx="508800" cy="449008"/>
+          </a:xfrm>
+          <a:prstGeom prst="straightConnector1">
+            <a:avLst/>
+          </a:prstGeom>
+          <a:ln w="19050">
+            <a:solidFill>
+              <a:srgbClr val="FF0000"/>
+            </a:solidFill>
+            <a:tailEnd type="triangle"/>
+          </a:ln>
+        </p:spPr>
+        <p:style>
+          <a:lnRef idx="1">
+            <a:schemeClr val="accent1"/>
+          </a:lnRef>
+          <a:fillRef idx="0">
+            <a:schemeClr val="accent1"/>
+          </a:fillRef>
+          <a:effectRef idx="0">
+            <a:schemeClr val="accent1"/>
+          </a:effectRef>
+          <a:fontRef idx="minor">
+            <a:schemeClr val="tx1"/>
+          </a:fontRef>
+        </p:style>
+      </p:cxnSp>
+      <p:cxnSp>
+        <p:nvCxnSpPr>
+          <p:cNvPr id="213" name="Straight Arrow Connector 212">
+            <a:extLst>
+              <a:ext uri="{FF2B5EF4-FFF2-40B4-BE49-F238E27FC236}">
+                <a16:creationId xmlns:a16="http://schemas.microsoft.com/office/drawing/2014/main" id="{69FABE0E-6E67-4245-EC99-A89298504AE8}"/>
+              </a:ext>
+            </a:extLst>
+          </p:cNvPr>
+          <p:cNvCxnSpPr>
+            <a:cxnSpLocks/>
+            <a:stCxn id="188" idx="2"/>
+            <a:endCxn id="197" idx="6"/>
+          </p:cNvCxnSpPr>
+          <p:nvPr/>
+        </p:nvCxnSpPr>
+        <p:spPr>
+          <a:xfrm flipH="1">
+            <a:off x="8265659" y="3935363"/>
+            <a:ext cx="721668" cy="470690"/>
+          </a:xfrm>
+          <a:prstGeom prst="straightConnector1">
+            <a:avLst/>
+          </a:prstGeom>
+          <a:ln w="19050">
+            <a:solidFill>
+              <a:srgbClr val="FF0000"/>
+            </a:solidFill>
+            <a:tailEnd type="triangle"/>
+          </a:ln>
+        </p:spPr>
+        <p:style>
+          <a:lnRef idx="1">
+            <a:schemeClr val="accent1"/>
+          </a:lnRef>
+          <a:fillRef idx="0">
+            <a:schemeClr val="accent1"/>
+          </a:fillRef>
+          <a:effectRef idx="0">
+            <a:schemeClr val="accent1"/>
+          </a:effectRef>
+          <a:fontRef idx="minor">
+            <a:schemeClr val="tx1"/>
+          </a:fontRef>
+        </p:style>
+      </p:cxnSp>
+      <p:cxnSp>
+        <p:nvCxnSpPr>
+          <p:cNvPr id="216" name="Straight Arrow Connector 215">
+            <a:extLst>
+              <a:ext uri="{FF2B5EF4-FFF2-40B4-BE49-F238E27FC236}">
+                <a16:creationId xmlns:a16="http://schemas.microsoft.com/office/drawing/2014/main" id="{EE75315A-45AC-9FB8-A633-8E22D37DB5AB}"/>
+              </a:ext>
+            </a:extLst>
+          </p:cNvPr>
+          <p:cNvCxnSpPr>
+            <a:cxnSpLocks/>
+            <a:stCxn id="197" idx="4"/>
+            <a:endCxn id="202" idx="0"/>
+          </p:cNvCxnSpPr>
+          <p:nvPr/>
+        </p:nvCxnSpPr>
+        <p:spPr>
+          <a:xfrm>
+            <a:off x="8078623" y="4588250"/>
+            <a:ext cx="9333" cy="220540"/>
+          </a:xfrm>
+          <a:prstGeom prst="straightConnector1">
+            <a:avLst/>
+          </a:prstGeom>
+          <a:ln w="19050">
+            <a:solidFill>
+              <a:srgbClr val="FF0000"/>
+            </a:solidFill>
+            <a:tailEnd type="triangle"/>
+          </a:ln>
+        </p:spPr>
+        <p:style>
+          <a:lnRef idx="1">
+            <a:schemeClr val="accent1"/>
+          </a:lnRef>
+          <a:fillRef idx="0">
+            <a:schemeClr val="accent1"/>
+          </a:fillRef>
+          <a:effectRef idx="0">
+            <a:schemeClr val="accent1"/>
+          </a:effectRef>
+          <a:fontRef idx="minor">
+            <a:schemeClr val="tx1"/>
+          </a:fontRef>
+        </p:style>
+      </p:cxnSp>
+      <p:cxnSp>
+        <p:nvCxnSpPr>
+          <p:cNvPr id="224" name="Straight Arrow Connector 223">
+            <a:extLst>
+              <a:ext uri="{FF2B5EF4-FFF2-40B4-BE49-F238E27FC236}">
+                <a16:creationId xmlns:a16="http://schemas.microsoft.com/office/drawing/2014/main" id="{8E27DA63-E812-0439-603E-4437A35E8A43}"/>
+              </a:ext>
+            </a:extLst>
+          </p:cNvPr>
+          <p:cNvCxnSpPr>
+            <a:cxnSpLocks/>
+            <a:stCxn id="202" idx="6"/>
+            <a:endCxn id="156" idx="1"/>
+          </p:cNvCxnSpPr>
+          <p:nvPr/>
+        </p:nvCxnSpPr>
+        <p:spPr>
+          <a:xfrm>
+            <a:off x="8303781" y="5016370"/>
+            <a:ext cx="570448" cy="9151"/>
+          </a:xfrm>
+          <a:prstGeom prst="straightConnector1">
+            <a:avLst/>
+          </a:prstGeom>
+          <a:ln w="19050">
+            <a:solidFill>
+              <a:srgbClr val="FF0000"/>
+            </a:solidFill>
+            <a:tailEnd type="triangle"/>
+          </a:ln>
+        </p:spPr>
+        <p:style>
+          <a:lnRef idx="1">
+            <a:schemeClr val="accent1"/>
+          </a:lnRef>
+          <a:fillRef idx="0">
+            <a:schemeClr val="accent1"/>
+          </a:fillRef>
+          <a:effectRef idx="0">
+            <a:schemeClr val="accent1"/>
+          </a:effectRef>
+          <a:fontRef idx="minor">
+            <a:schemeClr val="tx1"/>
+          </a:fontRef>
+        </p:style>
+      </p:cxnSp>
     </p:spTree>
     <p:extLst>
       <p:ext uri="{BB962C8B-B14F-4D97-AF65-F5344CB8AC3E}">

--- a/Presentation/FYP_NguyenTuan_Presentation.pptx
+++ b/Presentation/FYP_NguyenTuan_Presentation.pptx
@@ -5,7 +5,7 @@
     <p:sldMasterId id="2147483863" r:id="rId1"/>
   </p:sldMasterIdLst>
   <p:notesMasterIdLst>
-    <p:notesMasterId r:id="rId40"/>
+    <p:notesMasterId r:id="rId42"/>
   </p:notesMasterIdLst>
   <p:sldIdLst>
     <p:sldId id="256" r:id="rId2"/>
@@ -46,6 +46,8 @@
     <p:sldId id="292" r:id="rId37"/>
     <p:sldId id="293" r:id="rId38"/>
     <p:sldId id="294" r:id="rId39"/>
+    <p:sldId id="295" r:id="rId40"/>
+    <p:sldId id="296" r:id="rId41"/>
   </p:sldIdLst>
   <p:sldSz cx="12192000" cy="6858000"/>
   <p:notesSz cx="6858000" cy="9144000"/>
@@ -6540,6 +6542,114 @@
 </p:notes>
 </file>
 
+<file path=ppt/notesSlides/notesSlide32.xml><?xml version="1.0" encoding="utf-8"?>
+<p:notes xmlns:a="http://schemas.openxmlformats.org/drawingml/2006/main" xmlns:r="http://schemas.openxmlformats.org/officeDocument/2006/relationships" xmlns:p="http://schemas.openxmlformats.org/presentationml/2006/main">
+  <p:cSld>
+    <p:spTree>
+      <p:nvGrpSpPr>
+        <p:cNvPr id="1" name="">
+          <a:extLst>
+            <a:ext uri="{FF2B5EF4-FFF2-40B4-BE49-F238E27FC236}">
+              <a16:creationId xmlns:a16="http://schemas.microsoft.com/office/drawing/2014/main" id="{C269B938-A59D-FCDF-3C65-DAF51054F0A9}"/>
+            </a:ext>
+          </a:extLst>
+        </p:cNvPr>
+        <p:cNvGrpSpPr/>
+        <p:nvPr/>
+      </p:nvGrpSpPr>
+      <p:grpSpPr>
+        <a:xfrm>
+          <a:off x="0" y="0"/>
+          <a:ext cx="0" cy="0"/>
+          <a:chOff x="0" y="0"/>
+          <a:chExt cx="0" cy="0"/>
+        </a:xfrm>
+      </p:grpSpPr>
+      <p:sp>
+        <p:nvSpPr>
+          <p:cNvPr id="2" name="Slide Image Placeholder 1">
+            <a:extLst>
+              <a:ext uri="{FF2B5EF4-FFF2-40B4-BE49-F238E27FC236}">
+                <a16:creationId xmlns:a16="http://schemas.microsoft.com/office/drawing/2014/main" id="{BE5951F0-C82E-0E73-5A91-D23FB158FB62}"/>
+              </a:ext>
+            </a:extLst>
+          </p:cNvPr>
+          <p:cNvSpPr>
+            <a:spLocks noGrp="1" noRot="1" noChangeAspect="1"/>
+          </p:cNvSpPr>
+          <p:nvPr>
+            <p:ph type="sldImg"/>
+          </p:nvPr>
+        </p:nvSpPr>
+        <p:spPr/>
+      </p:sp>
+      <p:sp>
+        <p:nvSpPr>
+          <p:cNvPr id="3" name="Notes Placeholder 2">
+            <a:extLst>
+              <a:ext uri="{FF2B5EF4-FFF2-40B4-BE49-F238E27FC236}">
+                <a16:creationId xmlns:a16="http://schemas.microsoft.com/office/drawing/2014/main" id="{E7BBEAE5-4339-579D-6F1A-F6DF851F08AF}"/>
+              </a:ext>
+            </a:extLst>
+          </p:cNvPr>
+          <p:cNvSpPr>
+            <a:spLocks noGrp="1"/>
+          </p:cNvSpPr>
+          <p:nvPr>
+            <p:ph type="body" idx="1"/>
+          </p:nvPr>
+        </p:nvSpPr>
+        <p:spPr/>
+        <p:txBody>
+          <a:bodyPr/>
+          <a:lstStyle/>
+          <a:p>
+            <a:endParaRPr lang="en-US" dirty="0"/>
+          </a:p>
+        </p:txBody>
+      </p:sp>
+      <p:sp>
+        <p:nvSpPr>
+          <p:cNvPr id="4" name="Slide Number Placeholder 3">
+            <a:extLst>
+              <a:ext uri="{FF2B5EF4-FFF2-40B4-BE49-F238E27FC236}">
+                <a16:creationId xmlns:a16="http://schemas.microsoft.com/office/drawing/2014/main" id="{469152F4-FFFA-CE39-AE5B-A92C3EFB896D}"/>
+              </a:ext>
+            </a:extLst>
+          </p:cNvPr>
+          <p:cNvSpPr>
+            <a:spLocks noGrp="1"/>
+          </p:cNvSpPr>
+          <p:nvPr>
+            <p:ph type="sldNum" sz="quarter" idx="5"/>
+          </p:nvPr>
+        </p:nvSpPr>
+        <p:spPr/>
+        <p:txBody>
+          <a:bodyPr/>
+          <a:lstStyle/>
+          <a:p>
+            <a:fld id="{7332F5B2-8E9E-A043-910C-D623E320FEF5}" type="slidenum">
+              <a:rPr lang="en-US" smtClean="0"/>
+              <a:t>39</a:t>
+            </a:fld>
+            <a:endParaRPr lang="en-US"/>
+          </a:p>
+        </p:txBody>
+      </p:sp>
+    </p:spTree>
+    <p:extLst>
+      <p:ext uri="{BB962C8B-B14F-4D97-AF65-F5344CB8AC3E}">
+        <p14:creationId xmlns:p14="http://schemas.microsoft.com/office/powerpoint/2010/main" val="2940986296"/>
+      </p:ext>
+    </p:extLst>
+  </p:cSld>
+  <p:clrMapOvr>
+    <a:masterClrMapping/>
+  </p:clrMapOvr>
+</p:notes>
+</file>
+
 <file path=ppt/notesSlides/notesSlide4.xml><?xml version="1.0" encoding="utf-8"?>
 <p:notes xmlns:a="http://schemas.openxmlformats.org/drawingml/2006/main" xmlns:r="http://schemas.openxmlformats.org/officeDocument/2006/relationships" xmlns:p="http://schemas.openxmlformats.org/presentationml/2006/main">
   <p:cSld>
@@ -34231,6 +34341,404 @@
 </p:sld>
 </file>
 
+<file path=ppt/slides/slide39.xml><?xml version="1.0" encoding="utf-8"?>
+<p:sld xmlns:a="http://schemas.openxmlformats.org/drawingml/2006/main" xmlns:r="http://schemas.openxmlformats.org/officeDocument/2006/relationships" xmlns:p="http://schemas.openxmlformats.org/presentationml/2006/main">
+  <p:cSld>
+    <p:bg>
+      <p:bgPr>
+        <a:solidFill>
+          <a:schemeClr val="bg1"/>
+        </a:solidFill>
+        <a:effectLst/>
+      </p:bgPr>
+    </p:bg>
+    <p:spTree>
+      <p:nvGrpSpPr>
+        <p:cNvPr id="1" name="">
+          <a:extLst>
+            <a:ext uri="{FF2B5EF4-FFF2-40B4-BE49-F238E27FC236}">
+              <a16:creationId xmlns:a16="http://schemas.microsoft.com/office/drawing/2014/main" id="{C2CA5BB7-3445-5994-B6FB-D03AE881A823}"/>
+            </a:ext>
+          </a:extLst>
+        </p:cNvPr>
+        <p:cNvGrpSpPr/>
+        <p:nvPr/>
+      </p:nvGrpSpPr>
+      <p:grpSpPr>
+        <a:xfrm>
+          <a:off x="0" y="0"/>
+          <a:ext cx="0" cy="0"/>
+          <a:chOff x="0" y="0"/>
+          <a:chExt cx="0" cy="0"/>
+        </a:xfrm>
+      </p:grpSpPr>
+      <p:cxnSp>
+        <p:nvCxnSpPr>
+          <p:cNvPr id="6" name="Straight Connector 5">
+            <a:extLst>
+              <a:ext uri="{FF2B5EF4-FFF2-40B4-BE49-F238E27FC236}">
+                <a16:creationId xmlns:a16="http://schemas.microsoft.com/office/drawing/2014/main" id="{F64F9B95-9045-48D2-B9F3-2927E98F54AA}"/>
+              </a:ext>
+              <a:ext uri="{C183D7F6-B498-43B3-948B-1728B52AA6E4}">
+                <adec:decorative xmlns:adec="http://schemas.microsoft.com/office/drawing/2017/decorative" val="1"/>
+              </a:ext>
+            </a:extLst>
+          </p:cNvPr>
+          <p:cNvCxnSpPr>
+            <a:cxnSpLocks noGrp="1" noRot="1" noChangeAspect="1" noMove="1" noResize="1" noEditPoints="1" noAdjustHandles="1" noChangeArrowheads="1" noChangeShapeType="1"/>
+          </p:cNvCxnSpPr>
+          <p:nvPr>
+            <p:extLst>
+              <p:ext uri="{386F3935-93C4-4BCD-93E2-E3B085C9AB24}">
+                <p16:designElem xmlns:p16="http://schemas.microsoft.com/office/powerpoint/2015/main" val="1"/>
+              </p:ext>
+            </p:extLst>
+          </p:nvPr>
+        </p:nvCxnSpPr>
+        <p:spPr>
+          <a:xfrm>
+            <a:off x="800100" y="723900"/>
+            <a:ext cx="10591800" cy="0"/>
+          </a:xfrm>
+          <a:prstGeom prst="line">
+            <a:avLst/>
+          </a:prstGeom>
+          <a:ln w="44450">
+            <a:solidFill>
+              <a:schemeClr val="tx1"/>
+            </a:solidFill>
+          </a:ln>
+        </p:spPr>
+        <p:style>
+          <a:lnRef idx="1">
+            <a:schemeClr val="accent1"/>
+          </a:lnRef>
+          <a:fillRef idx="0">
+            <a:schemeClr val="accent1"/>
+          </a:fillRef>
+          <a:effectRef idx="0">
+            <a:schemeClr val="accent1"/>
+          </a:effectRef>
+          <a:fontRef idx="minor">
+            <a:schemeClr val="tx1"/>
+          </a:fontRef>
+        </p:style>
+      </p:cxnSp>
+      <p:cxnSp>
+        <p:nvCxnSpPr>
+          <p:cNvPr id="10" name="Straight Connector 9">
+            <a:extLst>
+              <a:ext uri="{FF2B5EF4-FFF2-40B4-BE49-F238E27FC236}">
+                <a16:creationId xmlns:a16="http://schemas.microsoft.com/office/drawing/2014/main" id="{085AA86F-6A4D-4BCB-A045-D992CDC2959B}"/>
+              </a:ext>
+              <a:ext uri="{C183D7F6-B498-43B3-948B-1728B52AA6E4}">
+                <adec:decorative xmlns:adec="http://schemas.microsoft.com/office/drawing/2017/decorative" val="1"/>
+              </a:ext>
+            </a:extLst>
+          </p:cNvPr>
+          <p:cNvCxnSpPr>
+            <a:cxnSpLocks noGrp="1" noRot="1" noChangeAspect="1" noMove="1" noResize="1" noEditPoints="1" noAdjustHandles="1" noChangeArrowheads="1" noChangeShapeType="1"/>
+          </p:cNvCxnSpPr>
+          <p:nvPr>
+            <p:extLst>
+              <p:ext uri="{386F3935-93C4-4BCD-93E2-E3B085C9AB24}">
+                <p16:designElem xmlns:p16="http://schemas.microsoft.com/office/powerpoint/2015/main" val="1"/>
+              </p:ext>
+            </p:extLst>
+          </p:nvPr>
+        </p:nvCxnSpPr>
+        <p:spPr>
+          <a:xfrm>
+            <a:off x="800100" y="6142781"/>
+            <a:ext cx="10591800" cy="0"/>
+          </a:xfrm>
+          <a:prstGeom prst="line">
+            <a:avLst/>
+          </a:prstGeom>
+          <a:ln w="12700">
+            <a:solidFill>
+              <a:schemeClr val="tx1"/>
+            </a:solidFill>
+          </a:ln>
+        </p:spPr>
+        <p:style>
+          <a:lnRef idx="1">
+            <a:schemeClr val="accent1"/>
+          </a:lnRef>
+          <a:fillRef idx="0">
+            <a:schemeClr val="accent1"/>
+          </a:fillRef>
+          <a:effectRef idx="0">
+            <a:schemeClr val="accent1"/>
+          </a:effectRef>
+          <a:fontRef idx="minor">
+            <a:schemeClr val="tx1"/>
+          </a:fontRef>
+        </p:style>
+      </p:cxnSp>
+      <p:sp useBgFill="1">
+        <p:nvSpPr>
+          <p:cNvPr id="12" name="Rectangle 11">
+            <a:extLst>
+              <a:ext uri="{FF2B5EF4-FFF2-40B4-BE49-F238E27FC236}">
+                <a16:creationId xmlns:a16="http://schemas.microsoft.com/office/drawing/2014/main" id="{33E93247-6229-44AB-A550-739E971E690B}"/>
+              </a:ext>
+              <a:ext uri="{C183D7F6-B498-43B3-948B-1728B52AA6E4}">
+                <adec:decorative xmlns:adec="http://schemas.microsoft.com/office/drawing/2017/decorative" val="1"/>
+              </a:ext>
+            </a:extLst>
+          </p:cNvPr>
+          <p:cNvSpPr>
+            <a:spLocks noGrp="1" noRot="1" noChangeAspect="1" noMove="1" noResize="1" noEditPoints="1" noAdjustHandles="1" noChangeArrowheads="1" noChangeShapeType="1" noTextEdit="1"/>
+          </p:cNvSpPr>
+          <p:nvPr>
+            <p:extLst>
+              <p:ext uri="{386F3935-93C4-4BCD-93E2-E3B085C9AB24}">
+                <p16:designElem xmlns:p16="http://schemas.microsoft.com/office/powerpoint/2015/main" val="1"/>
+              </p:ext>
+            </p:extLst>
+          </p:nvPr>
+        </p:nvSpPr>
+        <p:spPr>
+          <a:xfrm>
+            <a:off x="0" y="0"/>
+            <a:ext cx="12192000" cy="6858000"/>
+          </a:xfrm>
+          <a:prstGeom prst="rect">
+            <a:avLst/>
+          </a:prstGeom>
+          <a:ln w="12700" cap="flat" cmpd="sng" algn="ctr">
+            <a:noFill/>
+            <a:prstDash val="solid"/>
+            <a:miter lim="800000"/>
+          </a:ln>
+          <a:effectLst/>
+          <a:extLst>
+            <a:ext uri="{91240B29-F687-4F45-9708-019B960494DF}">
+              <a14:hiddenLine xmlns:a14="http://schemas.microsoft.com/office/drawing/2010/main" w="12700" cap="flat" cmpd="sng" algn="ctr">
+                <a:solidFill>
+                  <a:schemeClr val="accent1">
+                    <a:shade val="50000"/>
+                  </a:schemeClr>
+                </a:solidFill>
+                <a:prstDash val="solid"/>
+                <a:miter lim="800000"/>
+              </a14:hiddenLine>
+            </a:ext>
+          </a:extLst>
+        </p:spPr>
+        <p:style>
+          <a:lnRef idx="2">
+            <a:schemeClr val="accent1">
+              <a:shade val="50000"/>
+            </a:schemeClr>
+          </a:lnRef>
+          <a:fillRef idx="1">
+            <a:schemeClr val="accent1"/>
+          </a:fillRef>
+          <a:effectRef idx="0">
+            <a:schemeClr val="accent1"/>
+          </a:effectRef>
+          <a:fontRef idx="minor">
+            <a:schemeClr val="lt1"/>
+          </a:fontRef>
+        </p:style>
+        <p:txBody>
+          <a:bodyPr rtlCol="0" anchor="ctr"/>
+          <a:lstStyle/>
+          <a:p>
+            <a:pPr algn="ctr"/>
+            <a:endParaRPr lang="en-US"/>
+          </a:p>
+        </p:txBody>
+      </p:sp>
+      <p:sp>
+        <p:nvSpPr>
+          <p:cNvPr id="3" name="Title 2">
+            <a:extLst>
+              <a:ext uri="{FF2B5EF4-FFF2-40B4-BE49-F238E27FC236}">
+                <a16:creationId xmlns:a16="http://schemas.microsoft.com/office/drawing/2014/main" id="{445D2608-D5F0-26E4-35B7-0E62378221B6}"/>
+              </a:ext>
+            </a:extLst>
+          </p:cNvPr>
+          <p:cNvSpPr>
+            <a:spLocks noGrp="1"/>
+          </p:cNvSpPr>
+          <p:nvPr>
+            <p:ph type="title"/>
+          </p:nvPr>
+        </p:nvSpPr>
+        <p:spPr>
+          <a:xfrm>
+            <a:off x="685800" y="899025"/>
+            <a:ext cx="4177602" cy="1221178"/>
+          </a:xfrm>
+        </p:spPr>
+        <p:txBody>
+          <a:bodyPr vert="horz" lIns="91440" tIns="45720" rIns="91440" bIns="45720" rtlCol="0" anchor="t">
+            <a:normAutofit/>
+          </a:bodyPr>
+          <a:lstStyle/>
+          <a:p>
+            <a:r>
+              <a:rPr lang="en-US" sz="3100" dirty="0"/>
+              <a:t>Global Modulation </a:t>
+            </a:r>
+            <a:br>
+              <a:rPr lang="en-US" sz="3100" dirty="0"/>
+            </a:br>
+            <a:r>
+              <a:rPr lang="en-US" sz="3100" dirty="0"/>
+              <a:t>(TCT architecture)</a:t>
+            </a:r>
+          </a:p>
+        </p:txBody>
+      </p:sp>
+      <p:cxnSp>
+        <p:nvCxnSpPr>
+          <p:cNvPr id="14" name="Straight Connector 13">
+            <a:extLst>
+              <a:ext uri="{FF2B5EF4-FFF2-40B4-BE49-F238E27FC236}">
+                <a16:creationId xmlns:a16="http://schemas.microsoft.com/office/drawing/2014/main" id="{EE2E603F-4A95-4FE8-BB06-211DFD75DBEF}"/>
+              </a:ext>
+              <a:ext uri="{C183D7F6-B498-43B3-948B-1728B52AA6E4}">
+                <adec:decorative xmlns:adec="http://schemas.microsoft.com/office/drawing/2017/decorative" val="1"/>
+              </a:ext>
+            </a:extLst>
+          </p:cNvPr>
+          <p:cNvCxnSpPr>
+            <a:cxnSpLocks noGrp="1" noRot="1" noChangeAspect="1" noMove="1" noResize="1" noEditPoints="1" noAdjustHandles="1" noChangeArrowheads="1" noChangeShapeType="1"/>
+          </p:cNvCxnSpPr>
+          <p:nvPr>
+            <p:extLst>
+              <p:ext uri="{386F3935-93C4-4BCD-93E2-E3B085C9AB24}">
+                <p16:designElem xmlns:p16="http://schemas.microsoft.com/office/powerpoint/2015/main" val="1"/>
+              </p:ext>
+            </p:extLst>
+          </p:nvPr>
+        </p:nvCxnSpPr>
+        <p:spPr>
+          <a:xfrm>
+            <a:off x="800100" y="723900"/>
+            <a:ext cx="1371600" cy="0"/>
+          </a:xfrm>
+          <a:prstGeom prst="line">
+            <a:avLst/>
+          </a:prstGeom>
+          <a:ln w="44450">
+            <a:solidFill>
+              <a:schemeClr val="tx1"/>
+            </a:solidFill>
+          </a:ln>
+        </p:spPr>
+        <p:style>
+          <a:lnRef idx="1">
+            <a:schemeClr val="accent1"/>
+          </a:lnRef>
+          <a:fillRef idx="0">
+            <a:schemeClr val="accent1"/>
+          </a:fillRef>
+          <a:effectRef idx="0">
+            <a:schemeClr val="accent1"/>
+          </a:effectRef>
+          <a:fontRef idx="minor">
+            <a:schemeClr val="tx1"/>
+          </a:fontRef>
+        </p:style>
+      </p:cxnSp>
+      <p:pic>
+        <p:nvPicPr>
+          <p:cNvPr id="4" name="Graphic 2">
+            <a:extLst>
+              <a:ext uri="{FF2B5EF4-FFF2-40B4-BE49-F238E27FC236}">
+                <a16:creationId xmlns:a16="http://schemas.microsoft.com/office/drawing/2014/main" id="{623AD403-D0C9-7281-6ACE-E1ACF93D646D}"/>
+              </a:ext>
+            </a:extLst>
+          </p:cNvPr>
+          <p:cNvPicPr>
+            <a:picLocks noChangeAspect="1"/>
+          </p:cNvPicPr>
+          <p:nvPr/>
+        </p:nvPicPr>
+        <p:blipFill>
+          <a:blip>
+            <a:extLst>
+              <a:ext uri="{96DAC541-7B7A-43D3-8B79-37D633B846F1}">
+                <asvg:svgBlip xmlns:asvg="http://schemas.microsoft.com/office/drawing/2016/SVG/main" r:embed="rId3"/>
+              </a:ext>
+            </a:extLst>
+          </a:blip>
+          <a:stretch>
+            <a:fillRect/>
+          </a:stretch>
+        </p:blipFill>
+        <p:spPr>
+          <a:xfrm>
+            <a:off x="7891159" y="105511"/>
+            <a:ext cx="4300841" cy="6752489"/>
+          </a:xfrm>
+          <a:prstGeom prst="rect">
+            <a:avLst/>
+          </a:prstGeom>
+        </p:spPr>
+      </p:pic>
+      <p:sp>
+        <p:nvSpPr>
+          <p:cNvPr id="37" name="TextBox 36">
+            <a:extLst>
+              <a:ext uri="{FF2B5EF4-FFF2-40B4-BE49-F238E27FC236}">
+                <a16:creationId xmlns:a16="http://schemas.microsoft.com/office/drawing/2014/main" id="{8C07FA85-C3BF-80CC-5023-97FB2E12E14E}"/>
+              </a:ext>
+            </a:extLst>
+          </p:cNvPr>
+          <p:cNvSpPr txBox="1"/>
+          <p:nvPr/>
+        </p:nvSpPr>
+        <p:spPr>
+          <a:xfrm>
+            <a:off x="1947333" y="3513667"/>
+            <a:ext cx="184731" cy="369332"/>
+          </a:xfrm>
+          <a:prstGeom prst="rect">
+            <a:avLst/>
+          </a:prstGeom>
+          <a:noFill/>
+        </p:spPr>
+        <p:txBody>
+          <a:bodyPr wrap="none" rtlCol="0">
+            <a:spAutoFit/>
+          </a:bodyPr>
+          <a:lstStyle/>
+          <a:p>
+            <a:endParaRPr lang="en-US" dirty="0"/>
+          </a:p>
+        </p:txBody>
+      </p:sp>
+    </p:spTree>
+    <p:extLst>
+      <p:ext uri="{BB962C8B-B14F-4D97-AF65-F5344CB8AC3E}">
+        <p14:creationId xmlns:p14="http://schemas.microsoft.com/office/powerpoint/2010/main" val="2585496835"/>
+      </p:ext>
+    </p:extLst>
+  </p:cSld>
+  <p:clrMapOvr>
+    <a:masterClrMapping/>
+  </p:clrMapOvr>
+  <mc:AlternateContent xmlns:mc="http://schemas.openxmlformats.org/markup-compatibility/2006" xmlns:p159="http://schemas.microsoft.com/office/powerpoint/2015/09/main">
+    <mc:Choice Requires="p159">
+      <p:transition xmlns:p14="http://schemas.microsoft.com/office/powerpoint/2010/main" spd="slow" p14:dur="2000">
+        <p159:morph option="byObject"/>
+      </p:transition>
+    </mc:Choice>
+    <mc:Fallback xmlns="">
+      <p:transition spd="slow">
+        <p:fade/>
+      </p:transition>
+    </mc:Fallback>
+  </mc:AlternateContent>
+</p:sld>
+</file>
+
 <file path=ppt/slides/slide4.xml><?xml version="1.0" encoding="utf-8"?>
 <p:sld xmlns:a="http://schemas.openxmlformats.org/drawingml/2006/main" xmlns:r="http://schemas.openxmlformats.org/officeDocument/2006/relationships" xmlns:p="http://schemas.openxmlformats.org/presentationml/2006/main">
   <p:cSld>
@@ -34578,6 +35086,86 @@
     <p:extLst>
       <p:ext uri="{BB962C8B-B14F-4D97-AF65-F5344CB8AC3E}">
         <p14:creationId xmlns:p14="http://schemas.microsoft.com/office/powerpoint/2010/main" val="1173481380"/>
+      </p:ext>
+    </p:extLst>
+  </p:cSld>
+  <p:clrMapOvr>
+    <a:masterClrMapping/>
+  </p:clrMapOvr>
+</p:sld>
+</file>
+
+<file path=ppt/slides/slide40.xml><?xml version="1.0" encoding="utf-8"?>
+<p:sld xmlns:a="http://schemas.openxmlformats.org/drawingml/2006/main" xmlns:r="http://schemas.openxmlformats.org/officeDocument/2006/relationships" xmlns:p="http://schemas.openxmlformats.org/presentationml/2006/main">
+  <p:cSld>
+    <p:spTree>
+      <p:nvGrpSpPr>
+        <p:cNvPr id="1" name=""/>
+        <p:cNvGrpSpPr/>
+        <p:nvPr/>
+      </p:nvGrpSpPr>
+      <p:grpSpPr>
+        <a:xfrm>
+          <a:off x="0" y="0"/>
+          <a:ext cx="0" cy="0"/>
+          <a:chOff x="0" y="0"/>
+          <a:chExt cx="0" cy="0"/>
+        </a:xfrm>
+      </p:grpSpPr>
+      <p:sp>
+        <p:nvSpPr>
+          <p:cNvPr id="2" name="Title 1">
+            <a:extLst>
+              <a:ext uri="{FF2B5EF4-FFF2-40B4-BE49-F238E27FC236}">
+                <a16:creationId xmlns:a16="http://schemas.microsoft.com/office/drawing/2014/main" id="{16730E5A-D9D2-95B4-1B0C-92B95ABA6C26}"/>
+              </a:ext>
+            </a:extLst>
+          </p:cNvPr>
+          <p:cNvSpPr>
+            <a:spLocks noGrp="1"/>
+          </p:cNvSpPr>
+          <p:nvPr>
+            <p:ph type="title"/>
+          </p:nvPr>
+        </p:nvSpPr>
+        <p:spPr/>
+        <p:txBody>
+          <a:bodyPr/>
+          <a:lstStyle/>
+          <a:p>
+            <a:endParaRPr lang="en-US" dirty="0"/>
+          </a:p>
+        </p:txBody>
+      </p:sp>
+      <p:sp>
+        <p:nvSpPr>
+          <p:cNvPr id="3" name="Content Placeholder 2">
+            <a:extLst>
+              <a:ext uri="{FF2B5EF4-FFF2-40B4-BE49-F238E27FC236}">
+                <a16:creationId xmlns:a16="http://schemas.microsoft.com/office/drawing/2014/main" id="{DF859578-2424-9E7D-2B6E-706042D5702C}"/>
+              </a:ext>
+            </a:extLst>
+          </p:cNvPr>
+          <p:cNvSpPr>
+            <a:spLocks noGrp="1"/>
+          </p:cNvSpPr>
+          <p:nvPr>
+            <p:ph idx="1"/>
+          </p:nvPr>
+        </p:nvSpPr>
+        <p:spPr/>
+        <p:txBody>
+          <a:bodyPr/>
+          <a:lstStyle/>
+          <a:p>
+            <a:endParaRPr lang="en-US"/>
+          </a:p>
+        </p:txBody>
+      </p:sp>
+    </p:spTree>
+    <p:extLst>
+      <p:ext uri="{BB962C8B-B14F-4D97-AF65-F5344CB8AC3E}">
+        <p14:creationId xmlns:p14="http://schemas.microsoft.com/office/powerpoint/2010/main" val="1701272085"/>
       </p:ext>
     </p:extLst>
   </p:cSld>

--- a/Presentation/FYP_NguyenTuan_Presentation.pptx
+++ b/Presentation/FYP_NguyenTuan_Presentation.pptx
@@ -3622,7 +3622,7 @@
           <a:p>
             <a:fld id="{9A9C0C59-185E-874E-8468-6092D83992DA}" type="datetimeFigureOut">
               <a:rPr lang="en-US" smtClean="0"/>
-              <a:t>4/15/26</a:t>
+              <a:t>4/30/26</a:t>
             </a:fld>
             <a:endParaRPr lang="en-US"/>
           </a:p>
@@ -7451,7 +7451,7 @@
           <a:p>
             <a:fld id="{D1D1EADE-8E88-4C7C-8AC5-FB148DE4940E}" type="datetime1">
               <a:rPr lang="en-US" smtClean="0"/>
-              <a:t>4/15/26</a:t>
+              <a:t>4/30/26</a:t>
             </a:fld>
             <a:endParaRPr lang="en-US"/>
           </a:p>
@@ -7651,7 +7651,7 @@
           <a:p>
             <a:fld id="{EC3C8B9C-477D-492A-96AD-1FC2CC997A73}" type="datetime1">
               <a:rPr lang="en-US" smtClean="0"/>
-              <a:t>4/15/26</a:t>
+              <a:t>4/30/26</a:t>
             </a:fld>
             <a:endParaRPr lang="en-US"/>
           </a:p>
@@ -7861,7 +7861,7 @@
           <a:p>
             <a:fld id="{42D3AED5-E26D-4E29-B1B3-7847B6779594}" type="datetime1">
               <a:rPr lang="en-US" smtClean="0"/>
-              <a:t>4/15/26</a:t>
+              <a:t>4/30/26</a:t>
             </a:fld>
             <a:endParaRPr lang="en-US"/>
           </a:p>
@@ -8061,7 +8061,7 @@
           <a:p>
             <a:fld id="{157B6794-849E-4626-908B-D15793550EFB}" type="datetime1">
               <a:rPr lang="en-US" smtClean="0"/>
-              <a:t>4/15/26</a:t>
+              <a:t>4/30/26</a:t>
             </a:fld>
             <a:endParaRPr lang="en-US"/>
           </a:p>
@@ -8337,7 +8337,7 @@
           <a:p>
             <a:fld id="{63DB64E7-5594-42A3-ADBF-E95A7ACEAD64}" type="datetime1">
               <a:rPr lang="en-US" smtClean="0"/>
-              <a:t>4/15/26</a:t>
+              <a:t>4/30/26</a:t>
             </a:fld>
             <a:endParaRPr lang="en-US"/>
           </a:p>
@@ -8610,7 +8610,7 @@
           <a:p>
             <a:fld id="{18462B0B-D248-4FFB-8695-AD7FA4B1284A}" type="datetime1">
               <a:rPr lang="en-US" smtClean="0"/>
-              <a:t>4/15/26</a:t>
+              <a:t>4/30/26</a:t>
             </a:fld>
             <a:endParaRPr lang="en-US"/>
           </a:p>
@@ -9033,7 +9033,7 @@
           <a:p>
             <a:fld id="{D0378EFB-9159-4510-B73F-4F0409ADE937}" type="datetime1">
               <a:rPr lang="en-US" smtClean="0"/>
-              <a:t>4/15/26</a:t>
+              <a:t>4/30/26</a:t>
             </a:fld>
             <a:endParaRPr lang="en-US"/>
           </a:p>
@@ -9175,7 +9175,7 @@
           <a:p>
             <a:fld id="{89BC9412-2452-4BED-A324-9D8C115361AD}" type="datetime1">
               <a:rPr lang="en-US" smtClean="0"/>
-              <a:t>4/15/26</a:t>
+              <a:t>4/30/26</a:t>
             </a:fld>
             <a:endParaRPr lang="en-US"/>
           </a:p>
@@ -9288,7 +9288,7 @@
           <a:p>
             <a:fld id="{F5318F62-D251-40E8-A23C-F4CFE9FEAB41}" type="datetime1">
               <a:rPr lang="en-US" smtClean="0"/>
-              <a:t>4/15/26</a:t>
+              <a:t>4/30/26</a:t>
             </a:fld>
             <a:endParaRPr lang="en-US"/>
           </a:p>
@@ -9601,7 +9601,7 @@
           <a:p>
             <a:fld id="{44F76144-149E-4874-93A5-554A0357CF82}" type="datetime1">
               <a:rPr lang="en-US" smtClean="0"/>
-              <a:t>4/15/26</a:t>
+              <a:t>4/30/26</a:t>
             </a:fld>
             <a:endParaRPr lang="en-US"/>
           </a:p>
@@ -9894,7 +9894,7 @@
           <a:p>
             <a:fld id="{50BA65D8-0540-4835-AE5C-25D29DBA01BE}" type="datetime1">
               <a:rPr lang="en-US" smtClean="0"/>
-              <a:t>4/15/26</a:t>
+              <a:t>4/30/26</a:t>
             </a:fld>
             <a:endParaRPr lang="en-US"/>
           </a:p>
@@ -10136,7 +10136,7 @@
           <a:p>
             <a:fld id="{E31BA835-12AC-4E8F-955A-EA3F4DE2791F}" type="datetime1">
               <a:rPr lang="en-US" smtClean="0"/>
-              <a:t>4/15/26</a:t>
+              <a:t>4/30/26</a:t>
             </a:fld>
             <a:endParaRPr lang="en-US"/>
           </a:p>

--- a/Presentation/FYP_NguyenTuan_Presentation.pptx
+++ b/Presentation/FYP_NguyenTuan_Presentation.pptx
@@ -27673,7 +27673,7 @@
             </a:pPr>
             <a:r>
               <a:rPr lang="en-US" dirty="0"/>
-              <a:t>Each image patch is a segment of a picture that behaves similarly to an embedding token in natural language processing.</a:t>
+              <a:t>Each image patch is a segment of a picture that behaves similarly to a singular embedding token in natural language processing.</a:t>
             </a:r>
           </a:p>
         </p:txBody>

--- a/Presentation/FYP_NguyenTuan_Presentation.pptx
+++ b/Presentation/FYP_NguyenTuan_Presentation.pptx
@@ -29044,7 +29044,7 @@
         </p:nvSpPr>
         <p:spPr>
           <a:xfrm>
-            <a:off x="231322" y="2207331"/>
+            <a:off x="454615" y="2154168"/>
             <a:ext cx="4750253" cy="4476497"/>
           </a:xfrm>
           <a:prstGeom prst="rect">
@@ -29230,7 +29230,7 @@
         </p:blipFill>
         <p:spPr>
           <a:xfrm>
-            <a:off x="4981575" y="735286"/>
+            <a:off x="5100404" y="722376"/>
             <a:ext cx="6495042" cy="5419642"/>
           </a:xfrm>
           <a:prstGeom prst="rect">
@@ -34714,6 +34714,159 @@
           </a:p>
         </p:txBody>
       </p:sp>
+      <p:sp>
+        <p:nvSpPr>
+          <p:cNvPr id="2" name="TextBox 1">
+            <a:extLst>
+              <a:ext uri="{FF2B5EF4-FFF2-40B4-BE49-F238E27FC236}">
+                <a16:creationId xmlns:a16="http://schemas.microsoft.com/office/drawing/2014/main" id="{F5BC3452-CE9C-A549-C081-FA6B3B199CC1}"/>
+              </a:ext>
+            </a:extLst>
+          </p:cNvPr>
+          <p:cNvSpPr txBox="1"/>
+          <p:nvPr/>
+        </p:nvSpPr>
+        <p:spPr>
+          <a:xfrm>
+            <a:off x="653903" y="2220676"/>
+            <a:ext cx="6583353" cy="4198522"/>
+          </a:xfrm>
+          <a:prstGeom prst="rect">
+            <a:avLst/>
+          </a:prstGeom>
+          <a:noFill/>
+        </p:spPr>
+        <p:txBody>
+          <a:bodyPr wrap="square" rtlCol="0">
+            <a:spAutoFit/>
+          </a:bodyPr>
+          <a:lstStyle/>
+          <a:p>
+            <a:pPr algn="just">
+              <a:lnSpc>
+                <a:spcPct val="150000"/>
+              </a:lnSpc>
+            </a:pPr>
+            <a:r>
+              <a:rPr lang="en-US" dirty="0"/>
+              <a:t>Global Modulation is an </a:t>
+            </a:r>
+            <a:r>
+              <a:rPr lang="en-US" b="1" dirty="0"/>
+              <a:t>element-wise multiplication</a:t>
+            </a:r>
+            <a:r>
+              <a:rPr lang="en-US" dirty="0"/>
+              <a:t> between the CRT attention output and the second residual output of the </a:t>
+            </a:r>
+            <a:r>
+              <a:rPr lang="en-US" dirty="0" err="1"/>
+              <a:t>ViT</a:t>
+            </a:r>
+            <a:r>
+              <a:rPr lang="en-US" dirty="0"/>
+              <a:t> Transformer Architecture.</a:t>
+            </a:r>
+          </a:p>
+          <a:p>
+            <a:pPr algn="just">
+              <a:lnSpc>
+                <a:spcPct val="150000"/>
+              </a:lnSpc>
+            </a:pPr>
+            <a:r>
+              <a:rPr lang="en-US" dirty="0"/>
+              <a:t>The </a:t>
+            </a:r>
+            <a:r>
+              <a:rPr lang="en-US" b="1" dirty="0"/>
+              <a:t>global modulation output </a:t>
+            </a:r>
+            <a:r>
+              <a:rPr lang="en-US" dirty="0"/>
+              <a:t>is then </a:t>
+            </a:r>
+            <a:r>
+              <a:rPr lang="en-US" b="1" dirty="0"/>
+              <a:t>summed </a:t>
+            </a:r>
+            <a:r>
+              <a:rPr lang="en-US" dirty="0"/>
+              <a:t>with </a:t>
+            </a:r>
+            <a:r>
+              <a:rPr lang="en-US" b="1" dirty="0"/>
+              <a:t>the final feed-forward layer output</a:t>
+            </a:r>
+            <a:r>
+              <a:rPr lang="en-US" dirty="0"/>
+              <a:t>,</a:t>
+            </a:r>
+            <a:r>
+              <a:rPr lang="en-US" b="1" dirty="0"/>
+              <a:t> </a:t>
+            </a:r>
+            <a:r>
+              <a:rPr lang="en-US" dirty="0"/>
+              <a:t>resulting in the final attention map for that encoder block.</a:t>
+            </a:r>
+          </a:p>
+          <a:p>
+            <a:pPr algn="just">
+              <a:lnSpc>
+                <a:spcPct val="150000"/>
+              </a:lnSpc>
+            </a:pPr>
+            <a:endParaRPr lang="en-US" dirty="0"/>
+          </a:p>
+          <a:p>
+            <a:pPr algn="just">
+              <a:lnSpc>
+                <a:spcPct val="150000"/>
+              </a:lnSpc>
+            </a:pPr>
+            <a:r>
+              <a:rPr lang="en-US" i="1" dirty="0"/>
+              <a:t>Note:</a:t>
+            </a:r>
+          </a:p>
+          <a:p>
+            <a:pPr algn="just">
+              <a:lnSpc>
+                <a:spcPct val="150000"/>
+              </a:lnSpc>
+            </a:pPr>
+            <a:r>
+              <a:rPr lang="en-US" dirty="0"/>
+              <a:t>This operation is only applied </a:t>
+            </a:r>
+            <a:r>
+              <a:rPr lang="en-US" b="1" dirty="0"/>
+              <a:t>ONCE</a:t>
+            </a:r>
+            <a:r>
+              <a:rPr lang="en-US" dirty="0"/>
+              <a:t> in a </a:t>
+            </a:r>
+            <a:r>
+              <a:rPr lang="en-US" b="1" dirty="0"/>
+              <a:t>pre-selected</a:t>
+            </a:r>
+            <a:r>
+              <a:rPr lang="en-US" dirty="0"/>
+              <a:t> (user-defined) </a:t>
+            </a:r>
+            <a:r>
+              <a:rPr lang="en-US" dirty="0" err="1"/>
+              <a:t>ViT</a:t>
+            </a:r>
+            <a:r>
+              <a:rPr lang="en-US" dirty="0"/>
+              <a:t> Encoder Block.</a:t>
+            </a:r>
+          </a:p>
+        </p:txBody>
+      </p:sp>
     </p:spTree>
     <p:extLst>
       <p:ext uri="{BB962C8B-B14F-4D97-AF65-F5344CB8AC3E}">

--- a/Presentation/FYP_NguyenTuan_Presentation.pptx
+++ b/Presentation/FYP_NguyenTuan_Presentation.pptx
@@ -13214,7 +13214,7 @@
             </a:pPr>
             <a:r>
               <a:rPr lang="en-US" dirty="0"/>
-              <a:t> Knowledge learned by humans through implicit or explicit learning (context cuing), as discussed by Chun &amp; Jiang (1998).</a:t>
+              <a:t> Knowledge learned by humans through implicit or explicit learning (context cueing), as discussed by Chun &amp; Jiang (1998).</a:t>
             </a:r>
           </a:p>
           <a:p>
@@ -13234,7 +13234,7 @@
             </a:pPr>
             <a:r>
               <a:rPr lang="en-US" dirty="0"/>
-              <a:t> Standardize framework for the development of computational models in the modern stage.</a:t>
+              <a:t> A standardized framework for the development of computational models in the modern stage.</a:t>
             </a:r>
           </a:p>
           <a:p>
@@ -27640,7 +27640,10 @@
                 <a:spcPct val="150000"/>
               </a:lnSpc>
             </a:pPr>
-            <a:endParaRPr lang="en-US" dirty="0"/>
+            <a:r>
+              <a:rPr lang="en-US" i="1" dirty="0"/>
+              <a:t>Intuitively:</a:t>
+            </a:r>
           </a:p>
           <a:p>
             <a:pPr marL="285750" indent="-285750" algn="just">
@@ -29044,7 +29047,7 @@
         </p:nvSpPr>
         <p:spPr>
           <a:xfrm>
-            <a:off x="454615" y="2154168"/>
+            <a:off x="433349" y="2154168"/>
             <a:ext cx="4750253" cy="4476497"/>
           </a:xfrm>
           <a:prstGeom prst="rect">
@@ -35286,7 +35289,10 @@
           <a:bodyPr/>
           <a:lstStyle/>
           <a:p>
-            <a:endParaRPr lang="en-US" dirty="0"/>
+            <a:r>
+              <a:rPr lang="en-US" dirty="0"/>
+              <a:t>Data Augmentation for CRT training</a:t>
+            </a:r>
           </a:p>
         </p:txBody>
       </p:sp>
@@ -35311,7 +35317,7 @@
           <a:bodyPr/>
           <a:lstStyle/>
           <a:p>
-            <a:endParaRPr lang="en-US"/>
+            <a:endParaRPr lang="en-US" dirty="0"/>
           </a:p>
         </p:txBody>
       </p:sp>

--- a/Presentation/FYP_NguyenTuan_Presentation.pptx
+++ b/Presentation/FYP_NguyenTuan_Presentation.pptx
@@ -34731,8 +34731,8 @@
         </p:nvSpPr>
         <p:spPr>
           <a:xfrm>
-            <a:off x="653903" y="2220676"/>
-            <a:ext cx="6583353" cy="4198522"/>
+            <a:off x="653903" y="1948259"/>
+            <a:ext cx="6583353" cy="4614020"/>
           </a:xfrm>
           <a:prstGeom prst="rect">
             <a:avLst/>
@@ -34865,7 +34865,7 @@
             </a:r>
             <a:r>
               <a:rPr lang="en-US" dirty="0"/>
-              <a:t> Encoder Block.</a:t>
+              <a:t> Encoder Block (other encoder blocks do not have a global modulation operation)</a:t>
             </a:r>
           </a:p>
         </p:txBody>
@@ -35317,7 +35317,30 @@
           <a:bodyPr/>
           <a:lstStyle/>
           <a:p>
-            <a:endParaRPr lang="en-US" dirty="0"/>
+            <a:r>
+              <a:rPr lang="en-US" dirty="0"/>
+              <a:t>We select 18 image categories from the COCO dataset </a:t>
+            </a:r>
+            <a:r>
+              <a:rPr lang="en-SG" dirty="0"/>
+              <a:t>(Lin et al., 2015) and conduct augmentation on both context and target images.</a:t>
+            </a:r>
+          </a:p>
+          <a:p>
+            <a:r>
+              <a:rPr lang="en-SG" dirty="0"/>
+              <a:t>There are 3 selections for Context Image and 3 selections for Target Image to form </a:t>
+            </a:r>
+            <a:r>
+              <a:rPr lang="en-SG"/>
+              <a:t>1 image pair:</a:t>
+            </a:r>
+          </a:p>
+          <a:p>
+            <a:pPr marL="0" indent="0">
+              <a:buNone/>
+            </a:pPr>
+            <a:endParaRPr lang="en-SG" dirty="0"/>
           </a:p>
         </p:txBody>
       </p:sp>

--- a/Presentation/FYP_NguyenTuan_Presentation.pptx
+++ b/Presentation/FYP_NguyenTuan_Presentation.pptx
@@ -5,7 +5,7 @@
     <p:sldMasterId id="2147483863" r:id="rId1"/>
   </p:sldMasterIdLst>
   <p:notesMasterIdLst>
-    <p:notesMasterId r:id="rId42"/>
+    <p:notesMasterId r:id="rId43"/>
   </p:notesMasterIdLst>
   <p:sldIdLst>
     <p:sldId id="256" r:id="rId2"/>
@@ -48,6 +48,7 @@
     <p:sldId id="294" r:id="rId39"/>
     <p:sldId id="295" r:id="rId40"/>
     <p:sldId id="296" r:id="rId41"/>
+    <p:sldId id="297" r:id="rId42"/>
   </p:sldIdLst>
   <p:sldSz cx="12192000" cy="6858000"/>
   <p:notesSz cx="6858000" cy="9144000"/>
@@ -3622,7 +3623,7 @@
           <a:p>
             <a:fld id="{9A9C0C59-185E-874E-8468-6092D83992DA}" type="datetimeFigureOut">
               <a:rPr lang="en-US" smtClean="0"/>
-              <a:t>4/30/26</a:t>
+              <a:t>5/3/26</a:t>
             </a:fld>
             <a:endParaRPr lang="en-US"/>
           </a:p>
@@ -7451,7 +7452,7 @@
           <a:p>
             <a:fld id="{D1D1EADE-8E88-4C7C-8AC5-FB148DE4940E}" type="datetime1">
               <a:rPr lang="en-US" smtClean="0"/>
-              <a:t>4/30/26</a:t>
+              <a:t>5/3/26</a:t>
             </a:fld>
             <a:endParaRPr lang="en-US"/>
           </a:p>
@@ -7651,7 +7652,7 @@
           <a:p>
             <a:fld id="{EC3C8B9C-477D-492A-96AD-1FC2CC997A73}" type="datetime1">
               <a:rPr lang="en-US" smtClean="0"/>
-              <a:t>4/30/26</a:t>
+              <a:t>5/3/26</a:t>
             </a:fld>
             <a:endParaRPr lang="en-US"/>
           </a:p>
@@ -7861,7 +7862,7 @@
           <a:p>
             <a:fld id="{42D3AED5-E26D-4E29-B1B3-7847B6779594}" type="datetime1">
               <a:rPr lang="en-US" smtClean="0"/>
-              <a:t>4/30/26</a:t>
+              <a:t>5/3/26</a:t>
             </a:fld>
             <a:endParaRPr lang="en-US"/>
           </a:p>
@@ -8061,7 +8062,7 @@
           <a:p>
             <a:fld id="{157B6794-849E-4626-908B-D15793550EFB}" type="datetime1">
               <a:rPr lang="en-US" smtClean="0"/>
-              <a:t>4/30/26</a:t>
+              <a:t>5/3/26</a:t>
             </a:fld>
             <a:endParaRPr lang="en-US"/>
           </a:p>
@@ -8337,7 +8338,7 @@
           <a:p>
             <a:fld id="{63DB64E7-5594-42A3-ADBF-E95A7ACEAD64}" type="datetime1">
               <a:rPr lang="en-US" smtClean="0"/>
-              <a:t>4/30/26</a:t>
+              <a:t>5/3/26</a:t>
             </a:fld>
             <a:endParaRPr lang="en-US"/>
           </a:p>
@@ -8610,7 +8611,7 @@
           <a:p>
             <a:fld id="{18462B0B-D248-4FFB-8695-AD7FA4B1284A}" type="datetime1">
               <a:rPr lang="en-US" smtClean="0"/>
-              <a:t>4/30/26</a:t>
+              <a:t>5/3/26</a:t>
             </a:fld>
             <a:endParaRPr lang="en-US"/>
           </a:p>
@@ -9033,7 +9034,7 @@
           <a:p>
             <a:fld id="{D0378EFB-9159-4510-B73F-4F0409ADE937}" type="datetime1">
               <a:rPr lang="en-US" smtClean="0"/>
-              <a:t>4/30/26</a:t>
+              <a:t>5/3/26</a:t>
             </a:fld>
             <a:endParaRPr lang="en-US"/>
           </a:p>
@@ -9175,7 +9176,7 @@
           <a:p>
             <a:fld id="{89BC9412-2452-4BED-A324-9D8C115361AD}" type="datetime1">
               <a:rPr lang="en-US" smtClean="0"/>
-              <a:t>4/30/26</a:t>
+              <a:t>5/3/26</a:t>
             </a:fld>
             <a:endParaRPr lang="en-US"/>
           </a:p>
@@ -9288,7 +9289,7 @@
           <a:p>
             <a:fld id="{F5318F62-D251-40E8-A23C-F4CFE9FEAB41}" type="datetime1">
               <a:rPr lang="en-US" smtClean="0"/>
-              <a:t>4/30/26</a:t>
+              <a:t>5/3/26</a:t>
             </a:fld>
             <a:endParaRPr lang="en-US"/>
           </a:p>
@@ -9601,7 +9602,7 @@
           <a:p>
             <a:fld id="{44F76144-149E-4874-93A5-554A0357CF82}" type="datetime1">
               <a:rPr lang="en-US" smtClean="0"/>
-              <a:t>4/30/26</a:t>
+              <a:t>5/3/26</a:t>
             </a:fld>
             <a:endParaRPr lang="en-US"/>
           </a:p>
@@ -9894,7 +9895,7 @@
           <a:p>
             <a:fld id="{50BA65D8-0540-4835-AE5C-25D29DBA01BE}" type="datetime1">
               <a:rPr lang="en-US" smtClean="0"/>
-              <a:t>4/30/26</a:t>
+              <a:t>5/3/26</a:t>
             </a:fld>
             <a:endParaRPr lang="en-US"/>
           </a:p>
@@ -10136,7 +10137,7 @@
           <a:p>
             <a:fld id="{E31BA835-12AC-4E8F-955A-EA3F4DE2791F}" type="datetime1">
               <a:rPr lang="en-US" smtClean="0"/>
-              <a:t>4/30/26</a:t>
+              <a:t>5/3/26</a:t>
             </a:fld>
             <a:endParaRPr lang="en-US"/>
           </a:p>
@@ -35291,7 +35292,23 @@
           <a:p>
             <a:r>
               <a:rPr lang="en-US" dirty="0"/>
-              <a:t>Data Augmentation for CRT training</a:t>
+              <a:t>Data Augmentation for </a:t>
+            </a:r>
+            <a:r>
+              <a:rPr lang="en-US" dirty="0" err="1"/>
+              <a:t>CRTNet</a:t>
+            </a:r>
+            <a:r>
+              <a:rPr lang="en-US" dirty="0"/>
+              <a:t> </a:t>
+            </a:r>
+            <a:r>
+              <a:rPr lang="en-US" dirty="0">
+                <a:solidFill>
+                  <a:srgbClr val="FF0000"/>
+                </a:solidFill>
+              </a:rPr>
+              <a:t>training</a:t>
             </a:r>
           </a:p>
         </p:txBody>
@@ -35302,6 +35319,315 @@
             <a:extLst>
               <a:ext uri="{FF2B5EF4-FFF2-40B4-BE49-F238E27FC236}">
                 <a16:creationId xmlns:a16="http://schemas.microsoft.com/office/drawing/2014/main" id="{DF859578-2424-9E7D-2B6E-706042D5702C}"/>
+              </a:ext>
+            </a:extLst>
+          </p:cNvPr>
+          <p:cNvSpPr>
+            <a:spLocks noGrp="1"/>
+          </p:cNvSpPr>
+          <p:nvPr>
+            <p:ph idx="1"/>
+          </p:nvPr>
+        </p:nvSpPr>
+        <p:spPr>
+          <a:xfrm>
+            <a:off x="700635" y="2221992"/>
+            <a:ext cx="10691265" cy="1701422"/>
+          </a:xfrm>
+        </p:spPr>
+        <p:txBody>
+          <a:bodyPr/>
+          <a:lstStyle/>
+          <a:p>
+            <a:r>
+              <a:rPr lang="en-US" dirty="0"/>
+              <a:t>We select 18 image categories from the COCO dataset </a:t>
+            </a:r>
+            <a:r>
+              <a:rPr lang="en-SG" dirty="0"/>
+              <a:t>(Lin et al., 2015) and conduct augmentation on both context and target images.</a:t>
+            </a:r>
+          </a:p>
+          <a:p>
+            <a:r>
+              <a:rPr lang="en-SG" dirty="0"/>
+              <a:t>There are 3 selections for Context Image and 3 selections for Target Image to form 1 image pair.</a:t>
+            </a:r>
+          </a:p>
+          <a:p>
+            <a:pPr marL="0" indent="0">
+              <a:buNone/>
+            </a:pPr>
+            <a:endParaRPr lang="en-SG" dirty="0"/>
+          </a:p>
+        </p:txBody>
+      </p:sp>
+      <p:sp>
+        <p:nvSpPr>
+          <p:cNvPr id="5" name="TextBox 4">
+            <a:extLst>
+              <a:ext uri="{FF2B5EF4-FFF2-40B4-BE49-F238E27FC236}">
+                <a16:creationId xmlns:a16="http://schemas.microsoft.com/office/drawing/2014/main" id="{95E92041-607D-25AC-6D5E-19F70B7285D7}"/>
+              </a:ext>
+            </a:extLst>
+          </p:cNvPr>
+          <p:cNvSpPr txBox="1"/>
+          <p:nvPr/>
+        </p:nvSpPr>
+        <p:spPr>
+          <a:xfrm>
+            <a:off x="6966985" y="3429000"/>
+            <a:ext cx="4888314" cy="2031325"/>
+          </a:xfrm>
+          <a:prstGeom prst="rect">
+            <a:avLst/>
+          </a:prstGeom>
+          <a:noFill/>
+        </p:spPr>
+        <p:txBody>
+          <a:bodyPr wrap="square">
+            <a:spAutoFit/>
+          </a:bodyPr>
+          <a:lstStyle/>
+          <a:p>
+            <a:pPr marL="0" indent="0">
+              <a:lnSpc>
+                <a:spcPct val="150000"/>
+              </a:lnSpc>
+              <a:buNone/>
+            </a:pPr>
+            <a:r>
+              <a:rPr lang="en-SG" dirty="0"/>
+              <a:t>Target input selections:</a:t>
+            </a:r>
+          </a:p>
+          <a:p>
+            <a:pPr marL="342900" indent="-342900">
+              <a:lnSpc>
+                <a:spcPct val="150000"/>
+              </a:lnSpc>
+              <a:buAutoNum type="arabicParenBoth"/>
+            </a:pPr>
+            <a:r>
+              <a:rPr lang="en-SG" dirty="0"/>
+              <a:t>Original target image.</a:t>
+            </a:r>
+          </a:p>
+          <a:p>
+            <a:pPr marL="342900" indent="-342900">
+              <a:lnSpc>
+                <a:spcPct val="150000"/>
+              </a:lnSpc>
+              <a:buAutoNum type="arabicParenBoth"/>
+            </a:pPr>
+            <a:r>
+              <a:rPr lang="en-SG" dirty="0"/>
+              <a:t>Random target image of the same category.</a:t>
+            </a:r>
+          </a:p>
+          <a:p>
+            <a:pPr marL="342900" indent="-342900">
+              <a:lnSpc>
+                <a:spcPct val="150000"/>
+              </a:lnSpc>
+              <a:buAutoNum type="arabicParenBoth"/>
+            </a:pPr>
+            <a:r>
+              <a:rPr lang="en-SG" dirty="0"/>
+              <a:t>Black rectangle of the target image size.</a:t>
+            </a:r>
+          </a:p>
+          <a:p>
+            <a:pPr marL="342900" indent="-342900">
+              <a:buAutoNum type="arabicParenBoth"/>
+            </a:pPr>
+            <a:endParaRPr lang="en-SG" dirty="0"/>
+          </a:p>
+        </p:txBody>
+      </p:sp>
+      <p:sp>
+        <p:nvSpPr>
+          <p:cNvPr id="6" name="TextBox 5">
+            <a:extLst>
+              <a:ext uri="{FF2B5EF4-FFF2-40B4-BE49-F238E27FC236}">
+                <a16:creationId xmlns:a16="http://schemas.microsoft.com/office/drawing/2014/main" id="{541EBC4E-C588-827E-C1ED-119B33032AEF}"/>
+              </a:ext>
+            </a:extLst>
+          </p:cNvPr>
+          <p:cNvSpPr txBox="1"/>
+          <p:nvPr/>
+        </p:nvSpPr>
+        <p:spPr>
+          <a:xfrm>
+            <a:off x="784924" y="3429000"/>
+            <a:ext cx="6097772" cy="2862322"/>
+          </a:xfrm>
+          <a:prstGeom prst="rect">
+            <a:avLst/>
+          </a:prstGeom>
+          <a:noFill/>
+        </p:spPr>
+        <p:txBody>
+          <a:bodyPr wrap="square">
+            <a:spAutoFit/>
+          </a:bodyPr>
+          <a:lstStyle/>
+          <a:p>
+            <a:pPr marL="0" indent="0">
+              <a:lnSpc>
+                <a:spcPct val="150000"/>
+              </a:lnSpc>
+              <a:buNone/>
+            </a:pPr>
+            <a:r>
+              <a:rPr lang="en-SG" dirty="0"/>
+              <a:t>Context input selections:</a:t>
+            </a:r>
+          </a:p>
+          <a:p>
+            <a:pPr marL="342900" indent="-342900">
+              <a:lnSpc>
+                <a:spcPct val="150000"/>
+              </a:lnSpc>
+              <a:buAutoNum type="arabicParenBoth"/>
+            </a:pPr>
+            <a:r>
+              <a:rPr lang="en-SG" dirty="0"/>
+              <a:t>Original context image with original target image.</a:t>
+            </a:r>
+          </a:p>
+          <a:p>
+            <a:pPr marL="342900" indent="-342900">
+              <a:lnSpc>
+                <a:spcPct val="150000"/>
+              </a:lnSpc>
+              <a:buAutoNum type="arabicParenBoth"/>
+            </a:pPr>
+            <a:r>
+              <a:rPr lang="en-SG" dirty="0"/>
+              <a:t>Original context image with a random target of the same category.</a:t>
+            </a:r>
+          </a:p>
+          <a:p>
+            <a:pPr marL="342900" indent="-342900">
+              <a:lnSpc>
+                <a:spcPct val="150000"/>
+              </a:lnSpc>
+              <a:buAutoNum type="arabicParenBoth"/>
+            </a:pPr>
+            <a:r>
+              <a:rPr lang="en-SG" dirty="0"/>
+              <a:t>Original context image with a black rectangle covering the target region.</a:t>
+            </a:r>
+          </a:p>
+          <a:p>
+            <a:pPr marL="342900" indent="-342900">
+              <a:buAutoNum type="arabicParenBoth"/>
+            </a:pPr>
+            <a:endParaRPr lang="en-SG" dirty="0"/>
+          </a:p>
+        </p:txBody>
+      </p:sp>
+      <p:cxnSp>
+        <p:nvCxnSpPr>
+          <p:cNvPr id="12" name="Straight Connector 11">
+            <a:extLst>
+              <a:ext uri="{FF2B5EF4-FFF2-40B4-BE49-F238E27FC236}">
+                <a16:creationId xmlns:a16="http://schemas.microsoft.com/office/drawing/2014/main" id="{AA2B4E0C-D84B-B27B-CE9D-878B7E0009E1}"/>
+              </a:ext>
+            </a:extLst>
+          </p:cNvPr>
+          <p:cNvCxnSpPr>
+            <a:cxnSpLocks/>
+          </p:cNvCxnSpPr>
+          <p:nvPr/>
+        </p:nvCxnSpPr>
+        <p:spPr>
+          <a:xfrm>
+            <a:off x="6882696" y="3529584"/>
+            <a:ext cx="0" cy="2414016"/>
+          </a:xfrm>
+          <a:prstGeom prst="line">
+            <a:avLst/>
+          </a:prstGeom>
+          <a:ln w="12700"/>
+        </p:spPr>
+        <p:style>
+          <a:lnRef idx="1">
+            <a:schemeClr val="dk1"/>
+          </a:lnRef>
+          <a:fillRef idx="0">
+            <a:schemeClr val="dk1"/>
+          </a:fillRef>
+          <a:effectRef idx="0">
+            <a:schemeClr val="dk1"/>
+          </a:effectRef>
+          <a:fontRef idx="minor">
+            <a:schemeClr val="tx1"/>
+          </a:fontRef>
+        </p:style>
+      </p:cxnSp>
+    </p:spTree>
+    <p:extLst>
+      <p:ext uri="{BB962C8B-B14F-4D97-AF65-F5344CB8AC3E}">
+        <p14:creationId xmlns:p14="http://schemas.microsoft.com/office/powerpoint/2010/main" val="1701272085"/>
+      </p:ext>
+    </p:extLst>
+  </p:cSld>
+  <p:clrMapOvr>
+    <a:masterClrMapping/>
+  </p:clrMapOvr>
+</p:sld>
+</file>
+
+<file path=ppt/slides/slide41.xml><?xml version="1.0" encoding="utf-8"?>
+<p:sld xmlns:a="http://schemas.openxmlformats.org/drawingml/2006/main" xmlns:r="http://schemas.openxmlformats.org/officeDocument/2006/relationships" xmlns:p="http://schemas.openxmlformats.org/presentationml/2006/main">
+  <p:cSld>
+    <p:spTree>
+      <p:nvGrpSpPr>
+        <p:cNvPr id="1" name=""/>
+        <p:cNvGrpSpPr/>
+        <p:nvPr/>
+      </p:nvGrpSpPr>
+      <p:grpSpPr>
+        <a:xfrm>
+          <a:off x="0" y="0"/>
+          <a:ext cx="0" cy="0"/>
+          <a:chOff x="0" y="0"/>
+          <a:chExt cx="0" cy="0"/>
+        </a:xfrm>
+      </p:grpSpPr>
+      <p:sp>
+        <p:nvSpPr>
+          <p:cNvPr id="2" name="Title 1">
+            <a:extLst>
+              <a:ext uri="{FF2B5EF4-FFF2-40B4-BE49-F238E27FC236}">
+                <a16:creationId xmlns:a16="http://schemas.microsoft.com/office/drawing/2014/main" id="{97CC137A-405A-F337-8813-C1DF8DD0173D}"/>
+              </a:ext>
+            </a:extLst>
+          </p:cNvPr>
+          <p:cNvSpPr>
+            <a:spLocks noGrp="1"/>
+          </p:cNvSpPr>
+          <p:nvPr>
+            <p:ph type="title"/>
+          </p:nvPr>
+        </p:nvSpPr>
+        <p:spPr/>
+        <p:txBody>
+          <a:bodyPr/>
+          <a:lstStyle/>
+          <a:p>
+            <a:endParaRPr lang="en-US"/>
+          </a:p>
+        </p:txBody>
+      </p:sp>
+      <p:sp>
+        <p:nvSpPr>
+          <p:cNvPr id="3" name="Content Placeholder 2">
+            <a:extLst>
+              <a:ext uri="{FF2B5EF4-FFF2-40B4-BE49-F238E27FC236}">
+                <a16:creationId xmlns:a16="http://schemas.microsoft.com/office/drawing/2014/main" id="{207B1B8F-A864-80E4-191E-1BAD1C7E9416}"/>
               </a:ext>
             </a:extLst>
           </p:cNvPr>
@@ -35317,37 +35643,14 @@
           <a:bodyPr/>
           <a:lstStyle/>
           <a:p>
-            <a:r>
-              <a:rPr lang="en-US" dirty="0"/>
-              <a:t>We select 18 image categories from the COCO dataset </a:t>
-            </a:r>
-            <a:r>
-              <a:rPr lang="en-SG" dirty="0"/>
-              <a:t>(Lin et al., 2015) and conduct augmentation on both context and target images.</a:t>
-            </a:r>
-          </a:p>
-          <a:p>
-            <a:r>
-              <a:rPr lang="en-SG" dirty="0"/>
-              <a:t>There are 3 selections for Context Image and 3 selections for Target Image to form </a:t>
-            </a:r>
-            <a:r>
-              <a:rPr lang="en-SG"/>
-              <a:t>1 image pair:</a:t>
-            </a:r>
-          </a:p>
-          <a:p>
-            <a:pPr marL="0" indent="0">
-              <a:buNone/>
-            </a:pPr>
-            <a:endParaRPr lang="en-SG" dirty="0"/>
+            <a:endParaRPr lang="en-US"/>
           </a:p>
         </p:txBody>
       </p:sp>
     </p:spTree>
     <p:extLst>
       <p:ext uri="{BB962C8B-B14F-4D97-AF65-F5344CB8AC3E}">
-        <p14:creationId xmlns:p14="http://schemas.microsoft.com/office/powerpoint/2010/main" val="1701272085"/>
+        <p14:creationId xmlns:p14="http://schemas.microsoft.com/office/powerpoint/2010/main" val="867945369"/>
       </p:ext>
     </p:extLst>
   </p:cSld>

--- a/Presentation/FYP_NguyenTuan_Presentation.pptx
+++ b/Presentation/FYP_NguyenTuan_Presentation.pptx
@@ -35597,12 +35597,270 @@
           <a:chExt cx="0" cy="0"/>
         </a:xfrm>
       </p:grpSpPr>
+      <p:pic>
+        <p:nvPicPr>
+          <p:cNvPr id="4" name="Picture 3">
+            <a:extLst>
+              <a:ext uri="{FF2B5EF4-FFF2-40B4-BE49-F238E27FC236}">
+                <a16:creationId xmlns:a16="http://schemas.microsoft.com/office/drawing/2014/main" id="{5A0F446E-EC8E-C33D-5E4E-8390860EEDDC}"/>
+              </a:ext>
+            </a:extLst>
+          </p:cNvPr>
+          <p:cNvPicPr>
+            <a:picLocks noChangeAspect="1"/>
+          </p:cNvPicPr>
+          <p:nvPr/>
+        </p:nvPicPr>
+        <p:blipFill>
+          <a:blip r:embed="rId2"/>
+          <a:stretch>
+            <a:fillRect/>
+          </a:stretch>
+        </p:blipFill>
+        <p:spPr>
+          <a:xfrm>
+            <a:off x="4811652" y="821964"/>
+            <a:ext cx="6043306" cy="4786618"/>
+          </a:xfrm>
+          <a:prstGeom prst="rect">
+            <a:avLst/>
+          </a:prstGeom>
+        </p:spPr>
+      </p:pic>
+      <p:pic>
+        <p:nvPicPr>
+          <p:cNvPr id="5" name="Picture 4">
+            <a:extLst>
+              <a:ext uri="{FF2B5EF4-FFF2-40B4-BE49-F238E27FC236}">
+                <a16:creationId xmlns:a16="http://schemas.microsoft.com/office/drawing/2014/main" id="{88D31A07-A971-0389-CE03-4532E8DB9E43}"/>
+              </a:ext>
+            </a:extLst>
+          </p:cNvPr>
+          <p:cNvPicPr>
+            <a:picLocks noChangeAspect="1"/>
+          </p:cNvPicPr>
+          <p:nvPr/>
+        </p:nvPicPr>
+        <p:blipFill>
+          <a:blip r:embed="rId3"/>
+          <a:stretch>
+            <a:fillRect/>
+          </a:stretch>
+        </p:blipFill>
+        <p:spPr>
+          <a:xfrm>
+            <a:off x="798200" y="1205264"/>
+            <a:ext cx="2164230" cy="2121794"/>
+          </a:xfrm>
+          <a:prstGeom prst="rect">
+            <a:avLst/>
+          </a:prstGeom>
+        </p:spPr>
+      </p:pic>
+      <p:pic>
+        <p:nvPicPr>
+          <p:cNvPr id="6" name="Picture 5">
+            <a:extLst>
+              <a:ext uri="{FF2B5EF4-FFF2-40B4-BE49-F238E27FC236}">
+                <a16:creationId xmlns:a16="http://schemas.microsoft.com/office/drawing/2014/main" id="{A90C33C3-188D-BBD1-AC85-5D613E7A9DE0}"/>
+              </a:ext>
+            </a:extLst>
+          </p:cNvPr>
+          <p:cNvPicPr>
+            <a:picLocks noChangeAspect="1"/>
+          </p:cNvPicPr>
+          <p:nvPr/>
+        </p:nvPicPr>
+        <p:blipFill>
+          <a:blip r:embed="rId4"/>
+          <a:stretch>
+            <a:fillRect/>
+          </a:stretch>
+        </p:blipFill>
+        <p:spPr>
+          <a:xfrm>
+            <a:off x="859637" y="3877912"/>
+            <a:ext cx="2164230" cy="2121794"/>
+          </a:xfrm>
+          <a:prstGeom prst="rect">
+            <a:avLst/>
+          </a:prstGeom>
+        </p:spPr>
+      </p:pic>
       <p:sp>
         <p:nvSpPr>
-          <p:cNvPr id="2" name="Title 1">
-            <a:extLst>
-              <a:ext uri="{FF2B5EF4-FFF2-40B4-BE49-F238E27FC236}">
-                <a16:creationId xmlns:a16="http://schemas.microsoft.com/office/drawing/2014/main" id="{97CC137A-405A-F337-8813-C1DF8DD0173D}"/>
+          <p:cNvPr id="7" name="TextBox 6">
+            <a:extLst>
+              <a:ext uri="{FF2B5EF4-FFF2-40B4-BE49-F238E27FC236}">
+                <a16:creationId xmlns:a16="http://schemas.microsoft.com/office/drawing/2014/main" id="{D07500EC-C86E-6439-A5F4-9FA5833C3C38}"/>
+              </a:ext>
+            </a:extLst>
+          </p:cNvPr>
+          <p:cNvSpPr txBox="1"/>
+          <p:nvPr/>
+        </p:nvSpPr>
+        <p:spPr>
+          <a:xfrm>
+            <a:off x="1061482" y="858294"/>
+            <a:ext cx="1832489" cy="369332"/>
+          </a:xfrm>
+          <a:prstGeom prst="rect">
+            <a:avLst/>
+          </a:prstGeom>
+          <a:noFill/>
+        </p:spPr>
+        <p:txBody>
+          <a:bodyPr wrap="none" rtlCol="0">
+            <a:spAutoFit/>
+          </a:bodyPr>
+          <a:lstStyle/>
+          <a:p>
+            <a:r>
+              <a:rPr lang="en-US" dirty="0"/>
+              <a:t>Original Context</a:t>
+            </a:r>
+          </a:p>
+        </p:txBody>
+      </p:sp>
+      <p:sp>
+        <p:nvSpPr>
+          <p:cNvPr id="8" name="TextBox 7">
+            <a:extLst>
+              <a:ext uri="{FF2B5EF4-FFF2-40B4-BE49-F238E27FC236}">
+                <a16:creationId xmlns:a16="http://schemas.microsoft.com/office/drawing/2014/main" id="{10A1320C-17DD-771E-B42D-9D19B60C0F8F}"/>
+              </a:ext>
+            </a:extLst>
+          </p:cNvPr>
+          <p:cNvSpPr txBox="1"/>
+          <p:nvPr/>
+        </p:nvSpPr>
+        <p:spPr>
+          <a:xfrm>
+            <a:off x="1204584" y="3595338"/>
+            <a:ext cx="1675074" cy="369332"/>
+          </a:xfrm>
+          <a:prstGeom prst="rect">
+            <a:avLst/>
+          </a:prstGeom>
+          <a:noFill/>
+        </p:spPr>
+        <p:txBody>
+          <a:bodyPr wrap="none" rtlCol="0">
+            <a:spAutoFit/>
+          </a:bodyPr>
+          <a:lstStyle/>
+          <a:p>
+            <a:r>
+              <a:rPr lang="en-US" dirty="0"/>
+              <a:t>Original Target</a:t>
+            </a:r>
+          </a:p>
+        </p:txBody>
+      </p:sp>
+      <p:sp>
+        <p:nvSpPr>
+          <p:cNvPr id="9" name="TextBox 8">
+            <a:extLst>
+              <a:ext uri="{FF2B5EF4-FFF2-40B4-BE49-F238E27FC236}">
+                <a16:creationId xmlns:a16="http://schemas.microsoft.com/office/drawing/2014/main" id="{9E3F8AEF-F193-604E-8FB3-426DE57F1E75}"/>
+              </a:ext>
+            </a:extLst>
+          </p:cNvPr>
+          <p:cNvSpPr txBox="1"/>
+          <p:nvPr/>
+        </p:nvSpPr>
+        <p:spPr>
+          <a:xfrm>
+            <a:off x="4920243" y="5666704"/>
+            <a:ext cx="6294224" cy="369332"/>
+          </a:xfrm>
+          <a:prstGeom prst="rect">
+            <a:avLst/>
+          </a:prstGeom>
+          <a:noFill/>
+        </p:spPr>
+        <p:txBody>
+          <a:bodyPr wrap="none" rtlCol="0">
+            <a:spAutoFit/>
+          </a:bodyPr>
+          <a:lstStyle/>
+          <a:p>
+            <a:r>
+              <a:rPr lang="en-US" dirty="0"/>
+              <a:t>All the Target and Context combinations for </a:t>
+            </a:r>
+            <a:r>
+              <a:rPr lang="en-US" dirty="0" err="1"/>
+              <a:t>CRTNet</a:t>
+            </a:r>
+            <a:r>
+              <a:rPr lang="en-US" dirty="0"/>
+              <a:t> Training</a:t>
+            </a:r>
+          </a:p>
+        </p:txBody>
+      </p:sp>
+      <p:sp>
+        <p:nvSpPr>
+          <p:cNvPr id="10" name="Rectangle 9">
+            <a:extLst>
+              <a:ext uri="{FF2B5EF4-FFF2-40B4-BE49-F238E27FC236}">
+                <a16:creationId xmlns:a16="http://schemas.microsoft.com/office/drawing/2014/main" id="{30D5305B-CAAB-1E69-251D-4A9947C4AD5E}"/>
+              </a:ext>
+            </a:extLst>
+          </p:cNvPr>
+          <p:cNvSpPr/>
+          <p:nvPr/>
+        </p:nvSpPr>
+        <p:spPr>
+          <a:xfrm>
+            <a:off x="1337043" y="1285472"/>
+            <a:ext cx="517394" cy="774064"/>
+          </a:xfrm>
+          <a:prstGeom prst="rect">
+            <a:avLst/>
+          </a:prstGeom>
+          <a:noFill/>
+          <a:ln w="38100" cap="flat" cmpd="sng" algn="ctr">
+            <a:solidFill>
+              <a:srgbClr val="FF0000"/>
+            </a:solidFill>
+            <a:prstDash val="solid"/>
+            <a:miter lim="800000"/>
+          </a:ln>
+          <a:effectLst/>
+        </p:spPr>
+        <p:style>
+          <a:lnRef idx="2">
+            <a:schemeClr val="accent1">
+              <a:shade val="50000"/>
+            </a:schemeClr>
+          </a:lnRef>
+          <a:fillRef idx="1">
+            <a:schemeClr val="accent1"/>
+          </a:fillRef>
+          <a:effectRef idx="0">
+            <a:schemeClr val="accent1"/>
+          </a:effectRef>
+          <a:fontRef idx="minor">
+            <a:schemeClr val="lt1"/>
+          </a:fontRef>
+        </p:style>
+        <p:txBody>
+          <a:bodyPr rtlCol="0" anchor="ctr"/>
+          <a:lstStyle/>
+          <a:p>
+            <a:pPr algn="ctr"/>
+            <a:endParaRPr lang="en-US"/>
+          </a:p>
+        </p:txBody>
+      </p:sp>
+      <p:sp>
+        <p:nvSpPr>
+          <p:cNvPr id="11" name="Title 1">
+            <a:extLst>
+              <a:ext uri="{FF2B5EF4-FFF2-40B4-BE49-F238E27FC236}">
+                <a16:creationId xmlns:a16="http://schemas.microsoft.com/office/drawing/2014/main" id="{1C9D962B-6314-B25E-995D-CE0A747644F9}"/>
               </a:ext>
             </a:extLst>
           </p:cNvPr>
@@ -35613,37 +35871,36 @@
             <p:ph type="title"/>
           </p:nvPr>
         </p:nvSpPr>
-        <p:spPr/>
+        <p:spPr>
+          <a:xfrm>
+            <a:off x="702535" y="79649"/>
+            <a:ext cx="10691265" cy="1307592"/>
+          </a:xfrm>
+        </p:spPr>
         <p:txBody>
           <a:bodyPr/>
           <a:lstStyle/>
           <a:p>
-            <a:endParaRPr lang="en-US"/>
-          </a:p>
-        </p:txBody>
-      </p:sp>
-      <p:sp>
-        <p:nvSpPr>
-          <p:cNvPr id="3" name="Content Placeholder 2">
-            <a:extLst>
-              <a:ext uri="{FF2B5EF4-FFF2-40B4-BE49-F238E27FC236}">
-                <a16:creationId xmlns:a16="http://schemas.microsoft.com/office/drawing/2014/main" id="{207B1B8F-A864-80E4-191E-1BAD1C7E9416}"/>
-              </a:ext>
-            </a:extLst>
-          </p:cNvPr>
-          <p:cNvSpPr>
-            <a:spLocks noGrp="1"/>
-          </p:cNvSpPr>
-          <p:nvPr>
-            <p:ph idx="1"/>
-          </p:nvPr>
-        </p:nvSpPr>
-        <p:spPr/>
-        <p:txBody>
-          <a:bodyPr/>
-          <a:lstStyle/>
-          <a:p>
-            <a:endParaRPr lang="en-US"/>
+            <a:r>
+              <a:rPr lang="en-US" dirty="0"/>
+              <a:t>Data Augmentation for </a:t>
+            </a:r>
+            <a:r>
+              <a:rPr lang="en-US" dirty="0" err="1"/>
+              <a:t>CRTNet</a:t>
+            </a:r>
+            <a:r>
+              <a:rPr lang="en-US" dirty="0"/>
+              <a:t> </a:t>
+            </a:r>
+            <a:r>
+              <a:rPr lang="en-US" dirty="0">
+                <a:solidFill>
+                  <a:srgbClr val="FF0000"/>
+                </a:solidFill>
+              </a:rPr>
+              <a:t>training</a:t>
+            </a:r>
           </a:p>
         </p:txBody>
       </p:sp>

--- a/Presentation/FYP_NguyenTuan_Presentation.pptx
+++ b/Presentation/FYP_NguyenTuan_Presentation.pptx
@@ -5,7 +5,7 @@
     <p:sldMasterId id="2147483863" r:id="rId1"/>
   </p:sldMasterIdLst>
   <p:notesMasterIdLst>
-    <p:notesMasterId r:id="rId43"/>
+    <p:notesMasterId r:id="rId44"/>
   </p:notesMasterIdLst>
   <p:sldIdLst>
     <p:sldId id="256" r:id="rId2"/>
@@ -49,6 +49,7 @@
     <p:sldId id="295" r:id="rId40"/>
     <p:sldId id="296" r:id="rId41"/>
     <p:sldId id="297" r:id="rId42"/>
+    <p:sldId id="298" r:id="rId43"/>
   </p:sldIdLst>
   <p:sldSz cx="12192000" cy="6858000"/>
   <p:notesSz cx="6858000" cy="9144000"/>
@@ -35917,6 +35918,110 @@
 </p:sld>
 </file>
 
+<file path=ppt/slides/slide42.xml><?xml version="1.0" encoding="utf-8"?>
+<p:sld xmlns:a="http://schemas.openxmlformats.org/drawingml/2006/main" xmlns:r="http://schemas.openxmlformats.org/officeDocument/2006/relationships" xmlns:p="http://schemas.openxmlformats.org/presentationml/2006/main">
+  <p:cSld>
+    <p:spTree>
+      <p:nvGrpSpPr>
+        <p:cNvPr id="1" name=""/>
+        <p:cNvGrpSpPr/>
+        <p:nvPr/>
+      </p:nvGrpSpPr>
+      <p:grpSpPr>
+        <a:xfrm>
+          <a:off x="0" y="0"/>
+          <a:ext cx="0" cy="0"/>
+          <a:chOff x="0" y="0"/>
+          <a:chExt cx="0" cy="0"/>
+        </a:xfrm>
+      </p:grpSpPr>
+      <p:sp>
+        <p:nvSpPr>
+          <p:cNvPr id="2" name="Title 1">
+            <a:extLst>
+              <a:ext uri="{FF2B5EF4-FFF2-40B4-BE49-F238E27FC236}">
+                <a16:creationId xmlns:a16="http://schemas.microsoft.com/office/drawing/2014/main" id="{9F48316E-43E5-E710-9A3A-56B360BFE660}"/>
+              </a:ext>
+            </a:extLst>
+          </p:cNvPr>
+          <p:cNvSpPr>
+            <a:spLocks noGrp="1"/>
+          </p:cNvSpPr>
+          <p:nvPr>
+            <p:ph type="title"/>
+          </p:nvPr>
+        </p:nvSpPr>
+        <p:spPr/>
+        <p:txBody>
+          <a:bodyPr/>
+          <a:lstStyle/>
+          <a:p>
+            <a:r>
+              <a:rPr lang="en-US" dirty="0" err="1"/>
+              <a:t>CRTNet</a:t>
+            </a:r>
+            <a:r>
+              <a:rPr lang="en-US" dirty="0"/>
+              <a:t> Recognition </a:t>
+            </a:r>
+            <a:r>
+              <a:rPr lang="en-US" dirty="0">
+                <a:solidFill>
+                  <a:srgbClr val="FF0000"/>
+                </a:solidFill>
+              </a:rPr>
+              <a:t>TEST</a:t>
+            </a:r>
+            <a:r>
+              <a:rPr lang="en-US" dirty="0"/>
+              <a:t> Performance</a:t>
+            </a:r>
+          </a:p>
+        </p:txBody>
+      </p:sp>
+      <p:pic>
+        <p:nvPicPr>
+          <p:cNvPr id="5" name="Picture 4">
+            <a:extLst>
+              <a:ext uri="{FF2B5EF4-FFF2-40B4-BE49-F238E27FC236}">
+                <a16:creationId xmlns:a16="http://schemas.microsoft.com/office/drawing/2014/main" id="{45640112-313A-68D2-8595-21050221C548}"/>
+              </a:ext>
+            </a:extLst>
+          </p:cNvPr>
+          <p:cNvPicPr>
+            <a:picLocks noChangeAspect="1"/>
+          </p:cNvPicPr>
+          <p:nvPr/>
+        </p:nvPicPr>
+        <p:blipFill>
+          <a:blip r:embed="rId2"/>
+          <a:stretch>
+            <a:fillRect/>
+          </a:stretch>
+        </p:blipFill>
+        <p:spPr>
+          <a:xfrm>
+            <a:off x="700634" y="1800385"/>
+            <a:ext cx="5653211" cy="4321445"/>
+          </a:xfrm>
+          <a:prstGeom prst="rect">
+            <a:avLst/>
+          </a:prstGeom>
+        </p:spPr>
+      </p:pic>
+    </p:spTree>
+    <p:extLst>
+      <p:ext uri="{BB962C8B-B14F-4D97-AF65-F5344CB8AC3E}">
+        <p14:creationId xmlns:p14="http://schemas.microsoft.com/office/powerpoint/2010/main" val="3430885553"/>
+      </p:ext>
+    </p:extLst>
+  </p:cSld>
+  <p:clrMapOvr>
+    <a:masterClrMapping/>
+  </p:clrMapOvr>
+</p:sld>
+</file>
+
 <file path=ppt/slides/slide5.xml><?xml version="1.0" encoding="utf-8"?>
 <p:sld xmlns:a="http://schemas.openxmlformats.org/drawingml/2006/main" xmlns:r="http://schemas.openxmlformats.org/officeDocument/2006/relationships" xmlns:p="http://schemas.openxmlformats.org/presentationml/2006/main">
   <p:cSld>

--- a/Presentation/FYP_NguyenTuan_Presentation.pptx
+++ b/Presentation/FYP_NguyenTuan_Presentation.pptx
@@ -5,7 +5,7 @@
     <p:sldMasterId id="2147483863" r:id="rId1"/>
   </p:sldMasterIdLst>
   <p:notesMasterIdLst>
-    <p:notesMasterId r:id="rId44"/>
+    <p:notesMasterId r:id="rId46"/>
   </p:notesMasterIdLst>
   <p:sldIdLst>
     <p:sldId id="256" r:id="rId2"/>
@@ -50,6 +50,8 @@
     <p:sldId id="296" r:id="rId41"/>
     <p:sldId id="297" r:id="rId42"/>
     <p:sldId id="298" r:id="rId43"/>
+    <p:sldId id="299" r:id="rId44"/>
+    <p:sldId id="300" r:id="rId45"/>
   </p:sldIdLst>
   <p:sldSz cx="12192000" cy="6858000"/>
   <p:notesSz cx="6858000" cy="9144000"/>
@@ -3624,7 +3626,7 @@
           <a:p>
             <a:fld id="{9A9C0C59-185E-874E-8468-6092D83992DA}" type="datetimeFigureOut">
               <a:rPr lang="en-US" smtClean="0"/>
-              <a:t>5/3/26</a:t>
+              <a:t>5/5/26</a:t>
             </a:fld>
             <a:endParaRPr lang="en-US"/>
           </a:p>
@@ -7453,7 +7455,7 @@
           <a:p>
             <a:fld id="{D1D1EADE-8E88-4C7C-8AC5-FB148DE4940E}" type="datetime1">
               <a:rPr lang="en-US" smtClean="0"/>
-              <a:t>5/3/26</a:t>
+              <a:t>5/5/26</a:t>
             </a:fld>
             <a:endParaRPr lang="en-US"/>
           </a:p>
@@ -7653,7 +7655,7 @@
           <a:p>
             <a:fld id="{EC3C8B9C-477D-492A-96AD-1FC2CC997A73}" type="datetime1">
               <a:rPr lang="en-US" smtClean="0"/>
-              <a:t>5/3/26</a:t>
+              <a:t>5/5/26</a:t>
             </a:fld>
             <a:endParaRPr lang="en-US"/>
           </a:p>
@@ -7863,7 +7865,7 @@
           <a:p>
             <a:fld id="{42D3AED5-E26D-4E29-B1B3-7847B6779594}" type="datetime1">
               <a:rPr lang="en-US" smtClean="0"/>
-              <a:t>5/3/26</a:t>
+              <a:t>5/5/26</a:t>
             </a:fld>
             <a:endParaRPr lang="en-US"/>
           </a:p>
@@ -8063,7 +8065,7 @@
           <a:p>
             <a:fld id="{157B6794-849E-4626-908B-D15793550EFB}" type="datetime1">
               <a:rPr lang="en-US" smtClean="0"/>
-              <a:t>5/3/26</a:t>
+              <a:t>5/5/26</a:t>
             </a:fld>
             <a:endParaRPr lang="en-US"/>
           </a:p>
@@ -8339,7 +8341,7 @@
           <a:p>
             <a:fld id="{63DB64E7-5594-42A3-ADBF-E95A7ACEAD64}" type="datetime1">
               <a:rPr lang="en-US" smtClean="0"/>
-              <a:t>5/3/26</a:t>
+              <a:t>5/5/26</a:t>
             </a:fld>
             <a:endParaRPr lang="en-US"/>
           </a:p>
@@ -8612,7 +8614,7 @@
           <a:p>
             <a:fld id="{18462B0B-D248-4FFB-8695-AD7FA4B1284A}" type="datetime1">
               <a:rPr lang="en-US" smtClean="0"/>
-              <a:t>5/3/26</a:t>
+              <a:t>5/5/26</a:t>
             </a:fld>
             <a:endParaRPr lang="en-US"/>
           </a:p>
@@ -9035,7 +9037,7 @@
           <a:p>
             <a:fld id="{D0378EFB-9159-4510-B73F-4F0409ADE937}" type="datetime1">
               <a:rPr lang="en-US" smtClean="0"/>
-              <a:t>5/3/26</a:t>
+              <a:t>5/5/26</a:t>
             </a:fld>
             <a:endParaRPr lang="en-US"/>
           </a:p>
@@ -9177,7 +9179,7 @@
           <a:p>
             <a:fld id="{89BC9412-2452-4BED-A324-9D8C115361AD}" type="datetime1">
               <a:rPr lang="en-US" smtClean="0"/>
-              <a:t>5/3/26</a:t>
+              <a:t>5/5/26</a:t>
             </a:fld>
             <a:endParaRPr lang="en-US"/>
           </a:p>
@@ -9290,7 +9292,7 @@
           <a:p>
             <a:fld id="{F5318F62-D251-40E8-A23C-F4CFE9FEAB41}" type="datetime1">
               <a:rPr lang="en-US" smtClean="0"/>
-              <a:t>5/3/26</a:t>
+              <a:t>5/5/26</a:t>
             </a:fld>
             <a:endParaRPr lang="en-US"/>
           </a:p>
@@ -9603,7 +9605,7 @@
           <a:p>
             <a:fld id="{44F76144-149E-4874-93A5-554A0357CF82}" type="datetime1">
               <a:rPr lang="en-US" smtClean="0"/>
-              <a:t>5/3/26</a:t>
+              <a:t>5/5/26</a:t>
             </a:fld>
             <a:endParaRPr lang="en-US"/>
           </a:p>
@@ -9896,7 +9898,7 @@
           <a:p>
             <a:fld id="{50BA65D8-0540-4835-AE5C-25D29DBA01BE}" type="datetime1">
               <a:rPr lang="en-US" smtClean="0"/>
-              <a:t>5/3/26</a:t>
+              <a:t>5/5/26</a:t>
             </a:fld>
             <a:endParaRPr lang="en-US"/>
           </a:p>
@@ -10138,7 +10140,7 @@
           <a:p>
             <a:fld id="{E31BA835-12AC-4E8F-955A-EA3F4DE2791F}" type="datetime1">
               <a:rPr lang="en-US" smtClean="0"/>
-              <a:t>5/3/26</a:t>
+              <a:t>5/5/26</a:t>
             </a:fld>
             <a:endParaRPr lang="en-US"/>
           </a:p>
@@ -29257,7 +29259,7 @@
         </p:nvSpPr>
         <p:spPr>
           <a:xfrm>
-            <a:off x="8748408" y="2328152"/>
+            <a:off x="8886632" y="2310724"/>
             <a:ext cx="909941" cy="175017"/>
           </a:xfrm>
           <a:prstGeom prst="roundRect">
@@ -36009,10 +36011,825 @@
           </a:prstGeom>
         </p:spPr>
       </p:pic>
+      <p:graphicFrame>
+        <p:nvGraphicFramePr>
+          <p:cNvPr id="3" name="Table 2">
+            <a:extLst>
+              <a:ext uri="{FF2B5EF4-FFF2-40B4-BE49-F238E27FC236}">
+                <a16:creationId xmlns:a16="http://schemas.microsoft.com/office/drawing/2014/main" id="{BBB7E213-8C6A-FDFB-1C78-982AF1A99CD7}"/>
+              </a:ext>
+            </a:extLst>
+          </p:cNvPr>
+          <p:cNvGraphicFramePr>
+            <a:graphicFrameLocks noGrp="1"/>
+          </p:cNvGraphicFramePr>
+          <p:nvPr>
+            <p:extLst>
+              <p:ext uri="{D42A27DB-BD31-4B8C-83A1-F6EECF244321}">
+                <p14:modId xmlns:p14="http://schemas.microsoft.com/office/powerpoint/2010/main" val="2023623960"/>
+              </p:ext>
+            </p:extLst>
+          </p:nvPr>
+        </p:nvGraphicFramePr>
+        <p:xfrm>
+          <a:off x="6705600" y="1950862"/>
+          <a:ext cx="4686300" cy="1478138"/>
+        </p:xfrm>
+        <a:graphic>
+          <a:graphicData uri="http://schemas.openxmlformats.org/drawingml/2006/table">
+            <a:tbl>
+              <a:tblPr firstRow="1" firstCol="1" bandRow="1">
+                <a:tableStyleId>{5C22544A-7EE6-4342-B048-85BDC9FD1C3A}</a:tableStyleId>
+              </a:tblPr>
+              <a:tblGrid>
+                <a:gridCol w="971550">
+                  <a:extLst>
+                    <a:ext uri="{9D8B030D-6E8A-4147-A177-3AD203B41FA5}">
+                      <a16:colId xmlns:a16="http://schemas.microsoft.com/office/drawing/2014/main" val="1266745552"/>
+                    </a:ext>
+                  </a:extLst>
+                </a:gridCol>
+                <a:gridCol w="1861185">
+                  <a:extLst>
+                    <a:ext uri="{9D8B030D-6E8A-4147-A177-3AD203B41FA5}">
+                      <a16:colId xmlns:a16="http://schemas.microsoft.com/office/drawing/2014/main" val="573536048"/>
+                    </a:ext>
+                  </a:extLst>
+                </a:gridCol>
+                <a:gridCol w="1853565">
+                  <a:extLst>
+                    <a:ext uri="{9D8B030D-6E8A-4147-A177-3AD203B41FA5}">
+                      <a16:colId xmlns:a16="http://schemas.microsoft.com/office/drawing/2014/main" val="3123355784"/>
+                    </a:ext>
+                  </a:extLst>
+                </a:gridCol>
+              </a:tblGrid>
+              <a:tr h="762910">
+                <a:tc>
+                  <a:txBody>
+                    <a:bodyPr/>
+                    <a:lstStyle/>
+                    <a:p>
+                      <a:pPr algn="ctr">
+                        <a:lnSpc>
+                          <a:spcPct val="150000"/>
+                        </a:lnSpc>
+                        <a:buNone/>
+                      </a:pPr>
+                      <a:r>
+                        <a:rPr lang="vi-VN" sz="1200" kern="100">
+                          <a:effectLst/>
+                        </a:rPr>
+                        <a:t>Epoch</a:t>
+                      </a:r>
+                      <a:endParaRPr lang="en-SG" sz="1200" kern="100">
+                        <a:effectLst/>
+                        <a:latin typeface="Times New Roman" panose="02020603050405020304" pitchFamily="18" charset="0"/>
+                        <a:ea typeface="Aptos" panose="020B0004020202020204" pitchFamily="34" charset="0"/>
+                        <a:cs typeface="Times New Roman (Body CS)"/>
+                      </a:endParaRPr>
+                    </a:p>
+                  </a:txBody>
+                  <a:tcPr marL="68580" marR="68580" marT="0" marB="0" anchor="ctr"/>
+                </a:tc>
+                <a:tc>
+                  <a:txBody>
+                    <a:bodyPr/>
+                    <a:lstStyle/>
+                    <a:p>
+                      <a:pPr algn="ctr">
+                        <a:lnSpc>
+                          <a:spcPct val="150000"/>
+                        </a:lnSpc>
+                        <a:buNone/>
+                      </a:pPr>
+                      <a:r>
+                        <a:rPr lang="vi-VN" sz="1200" kern="100">
+                          <a:effectLst/>
+                        </a:rPr>
+                        <a:t>Test Accuracy</a:t>
+                      </a:r>
+                      <a:endParaRPr lang="en-SG" sz="1200" kern="100">
+                        <a:effectLst/>
+                      </a:endParaRPr>
+                    </a:p>
+                    <a:p>
+                      <a:pPr algn="ctr">
+                        <a:lnSpc>
+                          <a:spcPct val="150000"/>
+                        </a:lnSpc>
+                        <a:buNone/>
+                      </a:pPr>
+                      <a:r>
+                        <a:rPr lang="en-US" sz="1200" kern="100">
+                          <a:effectLst/>
+                        </a:rPr>
+                        <a:t>(CRT cross-attention PE)</a:t>
+                      </a:r>
+                      <a:endParaRPr lang="en-SG" sz="1200" kern="100">
+                        <a:effectLst/>
+                        <a:latin typeface="Times New Roman" panose="02020603050405020304" pitchFamily="18" charset="0"/>
+                        <a:ea typeface="Aptos" panose="020B0004020202020204" pitchFamily="34" charset="0"/>
+                        <a:cs typeface="Times New Roman (Body CS)"/>
+                      </a:endParaRPr>
+                    </a:p>
+                  </a:txBody>
+                  <a:tcPr marL="68580" marR="68580" marT="0" marB="0" anchor="ctr"/>
+                </a:tc>
+                <a:tc>
+                  <a:txBody>
+                    <a:bodyPr/>
+                    <a:lstStyle/>
+                    <a:p>
+                      <a:pPr algn="ctr">
+                        <a:lnSpc>
+                          <a:spcPct val="150000"/>
+                        </a:lnSpc>
+                        <a:buNone/>
+                      </a:pPr>
+                      <a:r>
+                        <a:rPr lang="vi-VN" sz="1200" kern="100">
+                          <a:effectLst/>
+                        </a:rPr>
+                        <a:t>Test Accuracy</a:t>
+                      </a:r>
+                      <a:endParaRPr lang="en-SG" sz="1200" kern="100">
+                        <a:effectLst/>
+                      </a:endParaRPr>
+                    </a:p>
+                    <a:p>
+                      <a:pPr algn="ctr">
+                        <a:lnSpc>
+                          <a:spcPct val="150000"/>
+                        </a:lnSpc>
+                        <a:buNone/>
+                      </a:pPr>
+                      <a:r>
+                        <a:rPr lang="en-US" sz="1200" kern="100">
+                          <a:effectLst/>
+                        </a:rPr>
+                        <a:t>(CRT bbox-guided PE)</a:t>
+                      </a:r>
+                      <a:endParaRPr lang="en-SG" sz="1200" kern="100">
+                        <a:effectLst/>
+                        <a:latin typeface="Times New Roman" panose="02020603050405020304" pitchFamily="18" charset="0"/>
+                        <a:ea typeface="Aptos" panose="020B0004020202020204" pitchFamily="34" charset="0"/>
+                        <a:cs typeface="Times New Roman (Body CS)"/>
+                      </a:endParaRPr>
+                    </a:p>
+                  </a:txBody>
+                  <a:tcPr marL="68580" marR="68580" marT="0" marB="0" anchor="ctr"/>
+                </a:tc>
+                <a:extLst>
+                  <a:ext uri="{0D108BD9-81ED-4DB2-BD59-A6C34878D82A}">
+                    <a16:rowId xmlns:a16="http://schemas.microsoft.com/office/drawing/2014/main" val="1794581064"/>
+                  </a:ext>
+                </a:extLst>
+              </a:tr>
+              <a:tr h="357614">
+                <a:tc>
+                  <a:txBody>
+                    <a:bodyPr/>
+                    <a:lstStyle/>
+                    <a:p>
+                      <a:pPr algn="ctr">
+                        <a:lnSpc>
+                          <a:spcPct val="150000"/>
+                        </a:lnSpc>
+                        <a:buNone/>
+                      </a:pPr>
+                      <a:r>
+                        <a:rPr lang="vi-VN" sz="1200" kern="100">
+                          <a:effectLst/>
+                        </a:rPr>
+                        <a:t>7</a:t>
+                      </a:r>
+                      <a:endParaRPr lang="en-SG" sz="1200" kern="100">
+                        <a:effectLst/>
+                        <a:latin typeface="Times New Roman" panose="02020603050405020304" pitchFamily="18" charset="0"/>
+                        <a:ea typeface="Aptos" panose="020B0004020202020204" pitchFamily="34" charset="0"/>
+                        <a:cs typeface="Times New Roman (Body CS)"/>
+                      </a:endParaRPr>
+                    </a:p>
+                  </a:txBody>
+                  <a:tcPr marL="68580" marR="68580" marT="0" marB="0" anchor="ctr"/>
+                </a:tc>
+                <a:tc>
+                  <a:txBody>
+                    <a:bodyPr/>
+                    <a:lstStyle/>
+                    <a:p>
+                      <a:pPr algn="ctr">
+                        <a:lnSpc>
+                          <a:spcPct val="150000"/>
+                        </a:lnSpc>
+                        <a:buNone/>
+                      </a:pPr>
+                      <a:r>
+                        <a:rPr lang="vi-VN" sz="1200" kern="100">
+                          <a:effectLst/>
+                        </a:rPr>
+                        <a:t>7</a:t>
+                      </a:r>
+                      <a:r>
+                        <a:rPr lang="en-US" sz="1200" kern="100">
+                          <a:effectLst/>
+                        </a:rPr>
+                        <a:t>5</a:t>
+                      </a:r>
+                      <a:r>
+                        <a:rPr lang="vi-VN" sz="1200" kern="100">
+                          <a:effectLst/>
+                        </a:rPr>
+                        <a:t>.</a:t>
+                      </a:r>
+                      <a:r>
+                        <a:rPr lang="en-US" sz="1200" kern="100">
+                          <a:effectLst/>
+                        </a:rPr>
+                        <a:t>44</a:t>
+                      </a:r>
+                      <a:r>
+                        <a:rPr lang="vi-VN" sz="1200" kern="100">
+                          <a:effectLst/>
+                        </a:rPr>
+                        <a:t>%</a:t>
+                      </a:r>
+                      <a:endParaRPr lang="en-SG" sz="1200" kern="100">
+                        <a:effectLst/>
+                        <a:latin typeface="Times New Roman" panose="02020603050405020304" pitchFamily="18" charset="0"/>
+                        <a:ea typeface="Aptos" panose="020B0004020202020204" pitchFamily="34" charset="0"/>
+                        <a:cs typeface="Times New Roman (Body CS)"/>
+                      </a:endParaRPr>
+                    </a:p>
+                  </a:txBody>
+                  <a:tcPr marL="68580" marR="68580" marT="0" marB="0" anchor="ctr"/>
+                </a:tc>
+                <a:tc>
+                  <a:txBody>
+                    <a:bodyPr/>
+                    <a:lstStyle/>
+                    <a:p>
+                      <a:pPr algn="ctr">
+                        <a:lnSpc>
+                          <a:spcPct val="150000"/>
+                        </a:lnSpc>
+                        <a:buNone/>
+                      </a:pPr>
+                      <a:r>
+                        <a:rPr lang="vi-VN" sz="1200" kern="100">
+                          <a:effectLst/>
+                        </a:rPr>
+                        <a:t>70.38%</a:t>
+                      </a:r>
+                      <a:endParaRPr lang="en-SG" sz="1200" kern="100">
+                        <a:effectLst/>
+                        <a:latin typeface="Times New Roman" panose="02020603050405020304" pitchFamily="18" charset="0"/>
+                        <a:ea typeface="Aptos" panose="020B0004020202020204" pitchFamily="34" charset="0"/>
+                        <a:cs typeface="Times New Roman (Body CS)"/>
+                      </a:endParaRPr>
+                    </a:p>
+                  </a:txBody>
+                  <a:tcPr marL="68580" marR="68580" marT="0" marB="0"/>
+                </a:tc>
+                <a:extLst>
+                  <a:ext uri="{0D108BD9-81ED-4DB2-BD59-A6C34878D82A}">
+                    <a16:rowId xmlns:a16="http://schemas.microsoft.com/office/drawing/2014/main" val="1412339994"/>
+                  </a:ext>
+                </a:extLst>
+              </a:tr>
+              <a:tr h="357614">
+                <a:tc>
+                  <a:txBody>
+                    <a:bodyPr/>
+                    <a:lstStyle/>
+                    <a:p>
+                      <a:pPr algn="ctr">
+                        <a:lnSpc>
+                          <a:spcPct val="150000"/>
+                        </a:lnSpc>
+                        <a:buNone/>
+                      </a:pPr>
+                      <a:r>
+                        <a:rPr lang="en-US" sz="1200" kern="100">
+                          <a:effectLst/>
+                        </a:rPr>
+                        <a:t>24</a:t>
+                      </a:r>
+                      <a:endParaRPr lang="en-SG" sz="1200" kern="100">
+                        <a:effectLst/>
+                        <a:latin typeface="Times New Roman" panose="02020603050405020304" pitchFamily="18" charset="0"/>
+                        <a:ea typeface="Aptos" panose="020B0004020202020204" pitchFamily="34" charset="0"/>
+                        <a:cs typeface="Times New Roman (Body CS)"/>
+                      </a:endParaRPr>
+                    </a:p>
+                  </a:txBody>
+                  <a:tcPr marL="68580" marR="68580" marT="0" marB="0" anchor="ctr"/>
+                </a:tc>
+                <a:tc>
+                  <a:txBody>
+                    <a:bodyPr/>
+                    <a:lstStyle/>
+                    <a:p>
+                      <a:pPr algn="ctr">
+                        <a:lnSpc>
+                          <a:spcPct val="150000"/>
+                        </a:lnSpc>
+                        <a:buNone/>
+                      </a:pPr>
+                      <a:r>
+                        <a:rPr lang="en-US" sz="1200" kern="100">
+                          <a:effectLst/>
+                        </a:rPr>
+                        <a:t>85.31</a:t>
+                      </a:r>
+                      <a:r>
+                        <a:rPr lang="vi-VN" sz="1200" kern="100">
+                          <a:effectLst/>
+                        </a:rPr>
+                        <a:t>%</a:t>
+                      </a:r>
+                      <a:endParaRPr lang="en-SG" sz="1200" kern="100">
+                        <a:effectLst/>
+                        <a:latin typeface="Times New Roman" panose="02020603050405020304" pitchFamily="18" charset="0"/>
+                        <a:ea typeface="Aptos" panose="020B0004020202020204" pitchFamily="34" charset="0"/>
+                        <a:cs typeface="Times New Roman (Body CS)"/>
+                      </a:endParaRPr>
+                    </a:p>
+                  </a:txBody>
+                  <a:tcPr marL="68580" marR="68580" marT="0" marB="0" anchor="ctr"/>
+                </a:tc>
+                <a:tc>
+                  <a:txBody>
+                    <a:bodyPr/>
+                    <a:lstStyle/>
+                    <a:p>
+                      <a:pPr algn="ctr">
+                        <a:lnSpc>
+                          <a:spcPct val="150000"/>
+                        </a:lnSpc>
+                        <a:buNone/>
+                      </a:pPr>
+                      <a:r>
+                        <a:rPr lang="en-US" sz="1200" kern="100" dirty="0">
+                          <a:effectLst/>
+                        </a:rPr>
+                        <a:t>71.56</a:t>
+                      </a:r>
+                      <a:r>
+                        <a:rPr lang="vi-VN" sz="1200" kern="100" dirty="0">
+                          <a:effectLst/>
+                        </a:rPr>
+                        <a:t>%</a:t>
+                      </a:r>
+                      <a:endParaRPr lang="en-SG" sz="1200" kern="100" dirty="0">
+                        <a:effectLst/>
+                        <a:latin typeface="Times New Roman" panose="02020603050405020304" pitchFamily="18" charset="0"/>
+                        <a:ea typeface="Aptos" panose="020B0004020202020204" pitchFamily="34" charset="0"/>
+                        <a:cs typeface="Times New Roman (Body CS)"/>
+                      </a:endParaRPr>
+                    </a:p>
+                  </a:txBody>
+                  <a:tcPr marL="68580" marR="68580" marT="0" marB="0"/>
+                </a:tc>
+                <a:extLst>
+                  <a:ext uri="{0D108BD9-81ED-4DB2-BD59-A6C34878D82A}">
+                    <a16:rowId xmlns:a16="http://schemas.microsoft.com/office/drawing/2014/main" val="2889946817"/>
+                  </a:ext>
+                </a:extLst>
+              </a:tr>
+            </a:tbl>
+          </a:graphicData>
+        </a:graphic>
+      </p:graphicFrame>
     </p:spTree>
     <p:extLst>
       <p:ext uri="{BB962C8B-B14F-4D97-AF65-F5344CB8AC3E}">
         <p14:creationId xmlns:p14="http://schemas.microsoft.com/office/powerpoint/2010/main" val="3430885553"/>
+      </p:ext>
+    </p:extLst>
+  </p:cSld>
+  <p:clrMapOvr>
+    <a:masterClrMapping/>
+  </p:clrMapOvr>
+</p:sld>
+</file>
+
+<file path=ppt/slides/slide43.xml><?xml version="1.0" encoding="utf-8"?>
+<p:sld xmlns:a="http://schemas.openxmlformats.org/drawingml/2006/main" xmlns:r="http://schemas.openxmlformats.org/officeDocument/2006/relationships" xmlns:p="http://schemas.openxmlformats.org/presentationml/2006/main">
+  <p:cSld>
+    <p:bg>
+      <p:bgPr>
+        <a:solidFill>
+          <a:schemeClr val="bg1"/>
+        </a:solidFill>
+        <a:effectLst/>
+      </p:bgPr>
+    </p:bg>
+    <p:spTree>
+      <p:nvGrpSpPr>
+        <p:cNvPr id="1" name=""/>
+        <p:cNvGrpSpPr/>
+        <p:nvPr/>
+      </p:nvGrpSpPr>
+      <p:grpSpPr>
+        <a:xfrm>
+          <a:off x="0" y="0"/>
+          <a:ext cx="0" cy="0"/>
+          <a:chOff x="0" y="0"/>
+          <a:chExt cx="0" cy="0"/>
+        </a:xfrm>
+      </p:grpSpPr>
+      <p:cxnSp>
+        <p:nvCxnSpPr>
+          <p:cNvPr id="18" name="Straight Connector 17">
+            <a:extLst>
+              <a:ext uri="{FF2B5EF4-FFF2-40B4-BE49-F238E27FC236}">
+                <a16:creationId xmlns:a16="http://schemas.microsoft.com/office/drawing/2014/main" id="{F64F9B95-9045-48D2-B9F3-2927E98F54AA}"/>
+              </a:ext>
+              <a:ext uri="{C183D7F6-B498-43B3-948B-1728B52AA6E4}">
+                <adec:decorative xmlns:adec="http://schemas.microsoft.com/office/drawing/2017/decorative" val="1"/>
+              </a:ext>
+            </a:extLst>
+          </p:cNvPr>
+          <p:cNvCxnSpPr>
+            <a:cxnSpLocks noGrp="1" noRot="1" noChangeAspect="1" noMove="1" noResize="1" noEditPoints="1" noAdjustHandles="1" noChangeArrowheads="1" noChangeShapeType="1"/>
+          </p:cNvCxnSpPr>
+          <p:nvPr>
+            <p:extLst>
+              <p:ext uri="{386F3935-93C4-4BCD-93E2-E3B085C9AB24}">
+                <p16:designElem xmlns:p16="http://schemas.microsoft.com/office/powerpoint/2015/main" val="1"/>
+              </p:ext>
+            </p:extLst>
+          </p:nvPr>
+        </p:nvCxnSpPr>
+        <p:spPr>
+          <a:xfrm>
+            <a:off x="800100" y="723900"/>
+            <a:ext cx="10591800" cy="0"/>
+          </a:xfrm>
+          <a:prstGeom prst="line">
+            <a:avLst/>
+          </a:prstGeom>
+          <a:ln w="44450">
+            <a:solidFill>
+              <a:schemeClr val="tx1"/>
+            </a:solidFill>
+          </a:ln>
+        </p:spPr>
+        <p:style>
+          <a:lnRef idx="1">
+            <a:schemeClr val="accent1"/>
+          </a:lnRef>
+          <a:fillRef idx="0">
+            <a:schemeClr val="accent1"/>
+          </a:fillRef>
+          <a:effectRef idx="0">
+            <a:schemeClr val="accent1"/>
+          </a:effectRef>
+          <a:fontRef idx="minor">
+            <a:schemeClr val="tx1"/>
+          </a:fontRef>
+        </p:style>
+      </p:cxnSp>
+      <p:cxnSp>
+        <p:nvCxnSpPr>
+          <p:cNvPr id="19" name="Straight Connector 18">
+            <a:extLst>
+              <a:ext uri="{FF2B5EF4-FFF2-40B4-BE49-F238E27FC236}">
+                <a16:creationId xmlns:a16="http://schemas.microsoft.com/office/drawing/2014/main" id="{085AA86F-6A4D-4BCB-A045-D992CDC2959B}"/>
+              </a:ext>
+              <a:ext uri="{C183D7F6-B498-43B3-948B-1728B52AA6E4}">
+                <adec:decorative xmlns:adec="http://schemas.microsoft.com/office/drawing/2017/decorative" val="1"/>
+              </a:ext>
+            </a:extLst>
+          </p:cNvPr>
+          <p:cNvCxnSpPr>
+            <a:cxnSpLocks noGrp="1" noRot="1" noChangeAspect="1" noMove="1" noResize="1" noEditPoints="1" noAdjustHandles="1" noChangeArrowheads="1" noChangeShapeType="1"/>
+          </p:cNvCxnSpPr>
+          <p:nvPr>
+            <p:extLst>
+              <p:ext uri="{386F3935-93C4-4BCD-93E2-E3B085C9AB24}">
+                <p16:designElem xmlns:p16="http://schemas.microsoft.com/office/powerpoint/2015/main" val="1"/>
+              </p:ext>
+            </p:extLst>
+          </p:nvPr>
+        </p:nvCxnSpPr>
+        <p:spPr>
+          <a:xfrm>
+            <a:off x="800100" y="6142781"/>
+            <a:ext cx="10591800" cy="0"/>
+          </a:xfrm>
+          <a:prstGeom prst="line">
+            <a:avLst/>
+          </a:prstGeom>
+          <a:ln w="12700">
+            <a:solidFill>
+              <a:schemeClr val="tx1"/>
+            </a:solidFill>
+          </a:ln>
+        </p:spPr>
+        <p:style>
+          <a:lnRef idx="1">
+            <a:schemeClr val="accent1"/>
+          </a:lnRef>
+          <a:fillRef idx="0">
+            <a:schemeClr val="accent1"/>
+          </a:fillRef>
+          <a:effectRef idx="0">
+            <a:schemeClr val="accent1"/>
+          </a:effectRef>
+          <a:fontRef idx="minor">
+            <a:schemeClr val="tx1"/>
+          </a:fontRef>
+        </p:style>
+      </p:cxnSp>
+      <p:sp useBgFill="1">
+        <p:nvSpPr>
+          <p:cNvPr id="20" name="Rectangle 19">
+            <a:extLst>
+              <a:ext uri="{FF2B5EF4-FFF2-40B4-BE49-F238E27FC236}">
+                <a16:creationId xmlns:a16="http://schemas.microsoft.com/office/drawing/2014/main" id="{33E93247-6229-44AB-A550-739E971E690B}"/>
+              </a:ext>
+              <a:ext uri="{C183D7F6-B498-43B3-948B-1728B52AA6E4}">
+                <adec:decorative xmlns:adec="http://schemas.microsoft.com/office/drawing/2017/decorative" val="1"/>
+              </a:ext>
+            </a:extLst>
+          </p:cNvPr>
+          <p:cNvSpPr>
+            <a:spLocks noGrp="1" noRot="1" noChangeAspect="1" noMove="1" noResize="1" noEditPoints="1" noAdjustHandles="1" noChangeArrowheads="1" noChangeShapeType="1" noTextEdit="1"/>
+          </p:cNvSpPr>
+          <p:nvPr>
+            <p:extLst>
+              <p:ext uri="{386F3935-93C4-4BCD-93E2-E3B085C9AB24}">
+                <p16:designElem xmlns:p16="http://schemas.microsoft.com/office/powerpoint/2015/main" val="1"/>
+              </p:ext>
+            </p:extLst>
+          </p:nvPr>
+        </p:nvSpPr>
+        <p:spPr>
+          <a:xfrm>
+            <a:off x="0" y="0"/>
+            <a:ext cx="12192000" cy="6858000"/>
+          </a:xfrm>
+          <a:prstGeom prst="rect">
+            <a:avLst/>
+          </a:prstGeom>
+          <a:ln w="12700" cap="flat" cmpd="sng" algn="ctr">
+            <a:noFill/>
+            <a:prstDash val="solid"/>
+            <a:miter lim="800000"/>
+          </a:ln>
+          <a:effectLst/>
+          <a:extLst>
+            <a:ext uri="{91240B29-F687-4F45-9708-019B960494DF}">
+              <a14:hiddenLine xmlns:a14="http://schemas.microsoft.com/office/drawing/2010/main" w="12700" cap="flat" cmpd="sng" algn="ctr">
+                <a:solidFill>
+                  <a:schemeClr val="accent1">
+                    <a:shade val="50000"/>
+                  </a:schemeClr>
+                </a:solidFill>
+                <a:prstDash val="solid"/>
+                <a:miter lim="800000"/>
+              </a14:hiddenLine>
+            </a:ext>
+          </a:extLst>
+        </p:spPr>
+        <p:style>
+          <a:lnRef idx="2">
+            <a:schemeClr val="accent1">
+              <a:shade val="50000"/>
+            </a:schemeClr>
+          </a:lnRef>
+          <a:fillRef idx="1">
+            <a:schemeClr val="accent1"/>
+          </a:fillRef>
+          <a:effectRef idx="0">
+            <a:schemeClr val="accent1"/>
+          </a:effectRef>
+          <a:fontRef idx="minor">
+            <a:schemeClr val="lt1"/>
+          </a:fontRef>
+        </p:style>
+        <p:txBody>
+          <a:bodyPr rtlCol="0" anchor="ctr"/>
+          <a:lstStyle/>
+          <a:p>
+            <a:pPr algn="ctr"/>
+            <a:endParaRPr lang="en-US"/>
+          </a:p>
+        </p:txBody>
+      </p:sp>
+      <p:sp>
+        <p:nvSpPr>
+          <p:cNvPr id="2" name="Title 1">
+            <a:extLst>
+              <a:ext uri="{FF2B5EF4-FFF2-40B4-BE49-F238E27FC236}">
+                <a16:creationId xmlns:a16="http://schemas.microsoft.com/office/drawing/2014/main" id="{B080C05A-2F8A-DD4B-E8AD-B96737F49F53}"/>
+              </a:ext>
+            </a:extLst>
+          </p:cNvPr>
+          <p:cNvSpPr>
+            <a:spLocks noGrp="1"/>
+          </p:cNvSpPr>
+          <p:nvPr>
+            <p:ph type="title"/>
+          </p:nvPr>
+        </p:nvSpPr>
+        <p:spPr>
+          <a:xfrm>
+            <a:off x="685800" y="899024"/>
+            <a:ext cx="3076032" cy="3914947"/>
+          </a:xfrm>
+        </p:spPr>
+        <p:txBody>
+          <a:bodyPr vert="horz" lIns="91440" tIns="45720" rIns="91440" bIns="45720" rtlCol="0" anchor="t">
+            <a:normAutofit/>
+          </a:bodyPr>
+          <a:lstStyle/>
+          <a:p>
+            <a:r>
+              <a:rPr lang="en-US" dirty="0"/>
+              <a:t>Experiment</a:t>
+            </a:r>
+          </a:p>
+        </p:txBody>
+      </p:sp>
+      <p:cxnSp>
+        <p:nvCxnSpPr>
+          <p:cNvPr id="21" name="Straight Connector 20">
+            <a:extLst>
+              <a:ext uri="{FF2B5EF4-FFF2-40B4-BE49-F238E27FC236}">
+                <a16:creationId xmlns:a16="http://schemas.microsoft.com/office/drawing/2014/main" id="{EE2E603F-4A95-4FE8-BB06-211DFD75DBEF}"/>
+              </a:ext>
+              <a:ext uri="{C183D7F6-B498-43B3-948B-1728B52AA6E4}">
+                <adec:decorative xmlns:adec="http://schemas.microsoft.com/office/drawing/2017/decorative" val="1"/>
+              </a:ext>
+            </a:extLst>
+          </p:cNvPr>
+          <p:cNvCxnSpPr>
+            <a:cxnSpLocks noGrp="1" noRot="1" noChangeAspect="1" noMove="1" noResize="1" noEditPoints="1" noAdjustHandles="1" noChangeArrowheads="1" noChangeShapeType="1"/>
+          </p:cNvCxnSpPr>
+          <p:nvPr>
+            <p:extLst>
+              <p:ext uri="{386F3935-93C4-4BCD-93E2-E3B085C9AB24}">
+                <p16:designElem xmlns:p16="http://schemas.microsoft.com/office/powerpoint/2015/main" val="1"/>
+              </p:ext>
+            </p:extLst>
+          </p:nvPr>
+        </p:nvCxnSpPr>
+        <p:spPr>
+          <a:xfrm>
+            <a:off x="800100" y="723900"/>
+            <a:ext cx="1371600" cy="0"/>
+          </a:xfrm>
+          <a:prstGeom prst="line">
+            <a:avLst/>
+          </a:prstGeom>
+          <a:ln w="44450">
+            <a:solidFill>
+              <a:schemeClr val="tx1"/>
+            </a:solidFill>
+          </a:ln>
+        </p:spPr>
+        <p:style>
+          <a:lnRef idx="1">
+            <a:schemeClr val="accent1"/>
+          </a:lnRef>
+          <a:fillRef idx="0">
+            <a:schemeClr val="accent1"/>
+          </a:fillRef>
+          <a:effectRef idx="0">
+            <a:schemeClr val="accent1"/>
+          </a:effectRef>
+          <a:fontRef idx="minor">
+            <a:schemeClr val="tx1"/>
+          </a:fontRef>
+        </p:style>
+      </p:cxnSp>
+      <p:pic>
+        <p:nvPicPr>
+          <p:cNvPr id="22" name="Graphic 21" descr="Microscope">
+            <a:extLst>
+              <a:ext uri="{FF2B5EF4-FFF2-40B4-BE49-F238E27FC236}">
+                <a16:creationId xmlns:a16="http://schemas.microsoft.com/office/drawing/2014/main" id="{C36D3089-A5FD-63B3-6C54-1F298D05041A}"/>
+              </a:ext>
+            </a:extLst>
+          </p:cNvPr>
+          <p:cNvPicPr>
+            <a:picLocks noChangeAspect="1"/>
+          </p:cNvPicPr>
+          <p:nvPr/>
+        </p:nvPicPr>
+        <p:blipFill>
+          <a:blip>
+            <a:extLst>
+              <a:ext uri="{28A0092B-C50C-407E-A947-70E740481C1C}">
+                <a14:useLocalDpi xmlns:a14="http://schemas.microsoft.com/office/drawing/2010/main" val="0"/>
+              </a:ext>
+              <a:ext uri="{96DAC541-7B7A-43D3-8B79-37D633B846F1}">
+                <asvg:svgBlip xmlns:asvg="http://schemas.microsoft.com/office/drawing/2016/SVG/main" r:embed="rId2"/>
+              </a:ext>
+            </a:extLst>
+          </a:blip>
+          <a:stretch>
+            <a:fillRect/>
+          </a:stretch>
+        </p:blipFill>
+        <p:spPr>
+          <a:xfrm>
+            <a:off x="5010149" y="723901"/>
+            <a:ext cx="5410200" cy="5410200"/>
+          </a:xfrm>
+          <a:prstGeom prst="rect">
+            <a:avLst/>
+          </a:prstGeom>
+        </p:spPr>
+      </p:pic>
+    </p:spTree>
+    <p:extLst>
+      <p:ext uri="{BB962C8B-B14F-4D97-AF65-F5344CB8AC3E}">
+        <p14:creationId xmlns:p14="http://schemas.microsoft.com/office/powerpoint/2010/main" val="1220955107"/>
+      </p:ext>
+    </p:extLst>
+  </p:cSld>
+  <p:clrMapOvr>
+    <a:masterClrMapping/>
+  </p:clrMapOvr>
+</p:sld>
+</file>
+
+<file path=ppt/slides/slide44.xml><?xml version="1.0" encoding="utf-8"?>
+<p:sld xmlns:a="http://schemas.openxmlformats.org/drawingml/2006/main" xmlns:r="http://schemas.openxmlformats.org/officeDocument/2006/relationships" xmlns:p="http://schemas.openxmlformats.org/presentationml/2006/main">
+  <p:cSld>
+    <p:spTree>
+      <p:nvGrpSpPr>
+        <p:cNvPr id="1" name=""/>
+        <p:cNvGrpSpPr/>
+        <p:nvPr/>
+      </p:nvGrpSpPr>
+      <p:grpSpPr>
+        <a:xfrm>
+          <a:off x="0" y="0"/>
+          <a:ext cx="0" cy="0"/>
+          <a:chOff x="0" y="0"/>
+          <a:chExt cx="0" cy="0"/>
+        </a:xfrm>
+      </p:grpSpPr>
+      <p:sp>
+        <p:nvSpPr>
+          <p:cNvPr id="2" name="Title 1">
+            <a:extLst>
+              <a:ext uri="{FF2B5EF4-FFF2-40B4-BE49-F238E27FC236}">
+                <a16:creationId xmlns:a16="http://schemas.microsoft.com/office/drawing/2014/main" id="{E6D3A46F-7EE9-576B-D281-B6196D874675}"/>
+              </a:ext>
+            </a:extLst>
+          </p:cNvPr>
+          <p:cNvSpPr>
+            <a:spLocks noGrp="1"/>
+          </p:cNvSpPr>
+          <p:nvPr>
+            <p:ph type="title"/>
+          </p:nvPr>
+        </p:nvSpPr>
+        <p:spPr/>
+        <p:txBody>
+          <a:bodyPr/>
+          <a:lstStyle/>
+          <a:p>
+            <a:endParaRPr lang="en-US"/>
+          </a:p>
+        </p:txBody>
+      </p:sp>
+      <p:sp>
+        <p:nvSpPr>
+          <p:cNvPr id="3" name="Content Placeholder 2">
+            <a:extLst>
+              <a:ext uri="{FF2B5EF4-FFF2-40B4-BE49-F238E27FC236}">
+                <a16:creationId xmlns:a16="http://schemas.microsoft.com/office/drawing/2014/main" id="{4C269D89-B5CD-7D33-215F-AAEF89DC5305}"/>
+              </a:ext>
+            </a:extLst>
+          </p:cNvPr>
+          <p:cNvSpPr>
+            <a:spLocks noGrp="1"/>
+          </p:cNvSpPr>
+          <p:nvPr>
+            <p:ph idx="1"/>
+          </p:nvPr>
+        </p:nvSpPr>
+        <p:spPr/>
+        <p:txBody>
+          <a:bodyPr/>
+          <a:lstStyle/>
+          <a:p>
+            <a:endParaRPr lang="en-US"/>
+          </a:p>
+        </p:txBody>
+      </p:sp>
+    </p:spTree>
+    <p:extLst>
+      <p:ext uri="{BB962C8B-B14F-4D97-AF65-F5344CB8AC3E}">
+        <p14:creationId xmlns:p14="http://schemas.microsoft.com/office/powerpoint/2010/main" val="2515388836"/>
       </p:ext>
     </p:extLst>
   </p:cSld>

--- a/Presentation/FYP_NguyenTuan_Presentation.pptx
+++ b/Presentation/FYP_NguyenTuan_Presentation.pptx
@@ -5,7 +5,7 @@
     <p:sldMasterId id="2147483863" r:id="rId1"/>
   </p:sldMasterIdLst>
   <p:notesMasterIdLst>
-    <p:notesMasterId r:id="rId46"/>
+    <p:notesMasterId r:id="rId50"/>
   </p:notesMasterIdLst>
   <p:sldIdLst>
     <p:sldId id="256" r:id="rId2"/>
@@ -51,7 +51,11 @@
     <p:sldId id="297" r:id="rId42"/>
     <p:sldId id="298" r:id="rId43"/>
     <p:sldId id="299" r:id="rId44"/>
-    <p:sldId id="300" r:id="rId45"/>
+    <p:sldId id="301" r:id="rId45"/>
+    <p:sldId id="300" r:id="rId46"/>
+    <p:sldId id="302" r:id="rId47"/>
+    <p:sldId id="303" r:id="rId48"/>
+    <p:sldId id="304" r:id="rId49"/>
   </p:sldIdLst>
   <p:sldSz cx="12192000" cy="6858000"/>
   <p:notesSz cx="6858000" cy="9144000"/>
@@ -6654,6 +6658,306 @@
 </p:notes>
 </file>
 
+<file path=ppt/notesSlides/notesSlide33.xml><?xml version="1.0" encoding="utf-8"?>
+<p:notes xmlns:a="http://schemas.openxmlformats.org/drawingml/2006/main" xmlns:r="http://schemas.openxmlformats.org/officeDocument/2006/relationships" xmlns:p="http://schemas.openxmlformats.org/presentationml/2006/main">
+  <p:cSld>
+    <p:spTree>
+      <p:nvGrpSpPr>
+        <p:cNvPr id="1" name=""/>
+        <p:cNvGrpSpPr/>
+        <p:nvPr/>
+      </p:nvGrpSpPr>
+      <p:grpSpPr>
+        <a:xfrm>
+          <a:off x="0" y="0"/>
+          <a:ext cx="0" cy="0"/>
+          <a:chOff x="0" y="0"/>
+          <a:chExt cx="0" cy="0"/>
+        </a:xfrm>
+      </p:grpSpPr>
+      <p:sp>
+        <p:nvSpPr>
+          <p:cNvPr id="2" name="Slide Image Placeholder 1"/>
+          <p:cNvSpPr>
+            <a:spLocks noGrp="1" noRot="1" noChangeAspect="1"/>
+          </p:cNvSpPr>
+          <p:nvPr>
+            <p:ph type="sldImg"/>
+          </p:nvPr>
+        </p:nvSpPr>
+        <p:spPr/>
+      </p:sp>
+      <p:sp>
+        <p:nvSpPr>
+          <p:cNvPr id="3" name="Notes Placeholder 2"/>
+          <p:cNvSpPr>
+            <a:spLocks noGrp="1"/>
+          </p:cNvSpPr>
+          <p:nvPr>
+            <p:ph type="body" idx="1"/>
+          </p:nvPr>
+        </p:nvSpPr>
+        <p:spPr/>
+        <p:txBody>
+          <a:bodyPr/>
+          <a:lstStyle/>
+          <a:p>
+            <a:endParaRPr lang="en-US" dirty="0"/>
+          </a:p>
+        </p:txBody>
+      </p:sp>
+      <p:sp>
+        <p:nvSpPr>
+          <p:cNvPr id="4" name="Slide Number Placeholder 3"/>
+          <p:cNvSpPr>
+            <a:spLocks noGrp="1"/>
+          </p:cNvSpPr>
+          <p:nvPr>
+            <p:ph type="sldNum" sz="quarter" idx="5"/>
+          </p:nvPr>
+        </p:nvSpPr>
+        <p:spPr/>
+        <p:txBody>
+          <a:bodyPr/>
+          <a:lstStyle/>
+          <a:p>
+            <a:fld id="{7332F5B2-8E9E-A043-910C-D623E320FEF5}" type="slidenum">
+              <a:rPr lang="en-US" smtClean="0"/>
+              <a:t>45</a:t>
+            </a:fld>
+            <a:endParaRPr lang="en-US"/>
+          </a:p>
+        </p:txBody>
+      </p:sp>
+    </p:spTree>
+    <p:extLst>
+      <p:ext uri="{BB962C8B-B14F-4D97-AF65-F5344CB8AC3E}">
+        <p14:creationId xmlns:p14="http://schemas.microsoft.com/office/powerpoint/2010/main" val="1902629123"/>
+      </p:ext>
+    </p:extLst>
+  </p:cSld>
+  <p:clrMapOvr>
+    <a:masterClrMapping/>
+  </p:clrMapOvr>
+</p:notes>
+</file>
+
+<file path=ppt/notesSlides/notesSlide34.xml><?xml version="1.0" encoding="utf-8"?>
+<p:notes xmlns:a="http://schemas.openxmlformats.org/drawingml/2006/main" xmlns:r="http://schemas.openxmlformats.org/officeDocument/2006/relationships" xmlns:p="http://schemas.openxmlformats.org/presentationml/2006/main">
+  <p:cSld>
+    <p:spTree>
+      <p:nvGrpSpPr>
+        <p:cNvPr id="1" name="">
+          <a:extLst>
+            <a:ext uri="{FF2B5EF4-FFF2-40B4-BE49-F238E27FC236}">
+              <a16:creationId xmlns:a16="http://schemas.microsoft.com/office/drawing/2014/main" id="{D3335518-F45D-2A8F-0375-A607D2F6D52B}"/>
+            </a:ext>
+          </a:extLst>
+        </p:cNvPr>
+        <p:cNvGrpSpPr/>
+        <p:nvPr/>
+      </p:nvGrpSpPr>
+      <p:grpSpPr>
+        <a:xfrm>
+          <a:off x="0" y="0"/>
+          <a:ext cx="0" cy="0"/>
+          <a:chOff x="0" y="0"/>
+          <a:chExt cx="0" cy="0"/>
+        </a:xfrm>
+      </p:grpSpPr>
+      <p:sp>
+        <p:nvSpPr>
+          <p:cNvPr id="2" name="Slide Image Placeholder 1">
+            <a:extLst>
+              <a:ext uri="{FF2B5EF4-FFF2-40B4-BE49-F238E27FC236}">
+                <a16:creationId xmlns:a16="http://schemas.microsoft.com/office/drawing/2014/main" id="{08EF48DA-C6E4-D54E-984A-834D96808E48}"/>
+              </a:ext>
+            </a:extLst>
+          </p:cNvPr>
+          <p:cNvSpPr>
+            <a:spLocks noGrp="1" noRot="1" noChangeAspect="1"/>
+          </p:cNvSpPr>
+          <p:nvPr>
+            <p:ph type="sldImg"/>
+          </p:nvPr>
+        </p:nvSpPr>
+        <p:spPr/>
+      </p:sp>
+      <p:sp>
+        <p:nvSpPr>
+          <p:cNvPr id="3" name="Notes Placeholder 2">
+            <a:extLst>
+              <a:ext uri="{FF2B5EF4-FFF2-40B4-BE49-F238E27FC236}">
+                <a16:creationId xmlns:a16="http://schemas.microsoft.com/office/drawing/2014/main" id="{3EA1384F-7691-4BB0-598B-5A80CBE6BF06}"/>
+              </a:ext>
+            </a:extLst>
+          </p:cNvPr>
+          <p:cNvSpPr>
+            <a:spLocks noGrp="1"/>
+          </p:cNvSpPr>
+          <p:nvPr>
+            <p:ph type="body" idx="1"/>
+          </p:nvPr>
+        </p:nvSpPr>
+        <p:spPr/>
+        <p:txBody>
+          <a:bodyPr/>
+          <a:lstStyle/>
+          <a:p>
+            <a:endParaRPr lang="en-US" dirty="0"/>
+          </a:p>
+        </p:txBody>
+      </p:sp>
+      <p:sp>
+        <p:nvSpPr>
+          <p:cNvPr id="4" name="Slide Number Placeholder 3">
+            <a:extLst>
+              <a:ext uri="{FF2B5EF4-FFF2-40B4-BE49-F238E27FC236}">
+                <a16:creationId xmlns:a16="http://schemas.microsoft.com/office/drawing/2014/main" id="{8E2E9D7D-E2C1-D514-6477-B60878E42E72}"/>
+              </a:ext>
+            </a:extLst>
+          </p:cNvPr>
+          <p:cNvSpPr>
+            <a:spLocks noGrp="1"/>
+          </p:cNvSpPr>
+          <p:nvPr>
+            <p:ph type="sldNum" sz="quarter" idx="5"/>
+          </p:nvPr>
+        </p:nvSpPr>
+        <p:spPr/>
+        <p:txBody>
+          <a:bodyPr/>
+          <a:lstStyle/>
+          <a:p>
+            <a:fld id="{7332F5B2-8E9E-A043-910C-D623E320FEF5}" type="slidenum">
+              <a:rPr lang="en-US" smtClean="0"/>
+              <a:t>46</a:t>
+            </a:fld>
+            <a:endParaRPr lang="en-US"/>
+          </a:p>
+        </p:txBody>
+      </p:sp>
+    </p:spTree>
+    <p:extLst>
+      <p:ext uri="{BB962C8B-B14F-4D97-AF65-F5344CB8AC3E}">
+        <p14:creationId xmlns:p14="http://schemas.microsoft.com/office/powerpoint/2010/main" val="3947653111"/>
+      </p:ext>
+    </p:extLst>
+  </p:cSld>
+  <p:clrMapOvr>
+    <a:masterClrMapping/>
+  </p:clrMapOvr>
+</p:notes>
+</file>
+
+<file path=ppt/notesSlides/notesSlide35.xml><?xml version="1.0" encoding="utf-8"?>
+<p:notes xmlns:a="http://schemas.openxmlformats.org/drawingml/2006/main" xmlns:r="http://schemas.openxmlformats.org/officeDocument/2006/relationships" xmlns:p="http://schemas.openxmlformats.org/presentationml/2006/main">
+  <p:cSld>
+    <p:spTree>
+      <p:nvGrpSpPr>
+        <p:cNvPr id="1" name="">
+          <a:extLst>
+            <a:ext uri="{FF2B5EF4-FFF2-40B4-BE49-F238E27FC236}">
+              <a16:creationId xmlns:a16="http://schemas.microsoft.com/office/drawing/2014/main" id="{C3628F2E-D6E4-85D8-4D24-EBB2071F6DE8}"/>
+            </a:ext>
+          </a:extLst>
+        </p:cNvPr>
+        <p:cNvGrpSpPr/>
+        <p:nvPr/>
+      </p:nvGrpSpPr>
+      <p:grpSpPr>
+        <a:xfrm>
+          <a:off x="0" y="0"/>
+          <a:ext cx="0" cy="0"/>
+          <a:chOff x="0" y="0"/>
+          <a:chExt cx="0" cy="0"/>
+        </a:xfrm>
+      </p:grpSpPr>
+      <p:sp>
+        <p:nvSpPr>
+          <p:cNvPr id="2" name="Slide Image Placeholder 1">
+            <a:extLst>
+              <a:ext uri="{FF2B5EF4-FFF2-40B4-BE49-F238E27FC236}">
+                <a16:creationId xmlns:a16="http://schemas.microsoft.com/office/drawing/2014/main" id="{D68FAF16-BB65-0863-2889-5D416906AE2A}"/>
+              </a:ext>
+            </a:extLst>
+          </p:cNvPr>
+          <p:cNvSpPr>
+            <a:spLocks noGrp="1" noRot="1" noChangeAspect="1"/>
+          </p:cNvSpPr>
+          <p:nvPr>
+            <p:ph type="sldImg"/>
+          </p:nvPr>
+        </p:nvSpPr>
+        <p:spPr/>
+      </p:sp>
+      <p:sp>
+        <p:nvSpPr>
+          <p:cNvPr id="3" name="Notes Placeholder 2">
+            <a:extLst>
+              <a:ext uri="{FF2B5EF4-FFF2-40B4-BE49-F238E27FC236}">
+                <a16:creationId xmlns:a16="http://schemas.microsoft.com/office/drawing/2014/main" id="{72484FC6-1CF4-BE83-16E6-02A97301584D}"/>
+              </a:ext>
+            </a:extLst>
+          </p:cNvPr>
+          <p:cNvSpPr>
+            <a:spLocks noGrp="1"/>
+          </p:cNvSpPr>
+          <p:nvPr>
+            <p:ph type="body" idx="1"/>
+          </p:nvPr>
+        </p:nvSpPr>
+        <p:spPr/>
+        <p:txBody>
+          <a:bodyPr/>
+          <a:lstStyle/>
+          <a:p>
+            <a:endParaRPr lang="en-US" dirty="0"/>
+          </a:p>
+        </p:txBody>
+      </p:sp>
+      <p:sp>
+        <p:nvSpPr>
+          <p:cNvPr id="4" name="Slide Number Placeholder 3">
+            <a:extLst>
+              <a:ext uri="{FF2B5EF4-FFF2-40B4-BE49-F238E27FC236}">
+                <a16:creationId xmlns:a16="http://schemas.microsoft.com/office/drawing/2014/main" id="{B6E8D5F4-0BE2-69F0-17ED-AD420A1C5B79}"/>
+              </a:ext>
+            </a:extLst>
+          </p:cNvPr>
+          <p:cNvSpPr>
+            <a:spLocks noGrp="1"/>
+          </p:cNvSpPr>
+          <p:nvPr>
+            <p:ph type="sldNum" sz="quarter" idx="5"/>
+          </p:nvPr>
+        </p:nvSpPr>
+        <p:spPr/>
+        <p:txBody>
+          <a:bodyPr/>
+          <a:lstStyle/>
+          <a:p>
+            <a:fld id="{7332F5B2-8E9E-A043-910C-D623E320FEF5}" type="slidenum">
+              <a:rPr lang="en-US" smtClean="0"/>
+              <a:t>47</a:t>
+            </a:fld>
+            <a:endParaRPr lang="en-US"/>
+          </a:p>
+        </p:txBody>
+      </p:sp>
+    </p:spTree>
+    <p:extLst>
+      <p:ext uri="{BB962C8B-B14F-4D97-AF65-F5344CB8AC3E}">
+        <p14:creationId xmlns:p14="http://schemas.microsoft.com/office/powerpoint/2010/main" val="840744565"/>
+      </p:ext>
+    </p:extLst>
+  </p:cSld>
+  <p:clrMapOvr>
+    <a:masterClrMapping/>
+  </p:clrMapOvr>
+</p:notes>
+</file>
+
 <file path=ppt/notesSlides/notesSlide4.xml><?xml version="1.0" encoding="utf-8"?>
 <p:notes xmlns:a="http://schemas.openxmlformats.org/drawingml/2006/main" xmlns:r="http://schemas.openxmlformats.org/officeDocument/2006/relationships" xmlns:p="http://schemas.openxmlformats.org/presentationml/2006/main">
   <p:cSld>
@@ -36638,13 +36942,13 @@
         </p:nvSpPr>
         <p:spPr>
           <a:xfrm>
-            <a:off x="685800" y="899024"/>
-            <a:ext cx="3076032" cy="3914947"/>
+            <a:off x="685799" y="899024"/>
+            <a:ext cx="4928191" cy="954106"/>
           </a:xfrm>
         </p:spPr>
         <p:txBody>
           <a:bodyPr vert="horz" lIns="91440" tIns="45720" rIns="91440" bIns="45720" rtlCol="0" anchor="t">
-            <a:normAutofit/>
+            <a:normAutofit fontScale="90000"/>
           </a:bodyPr>
           <a:lstStyle/>
           <a:p>
@@ -36652,6 +36956,13 @@
               <a:rPr lang="en-US" dirty="0"/>
               <a:t>Experiment</a:t>
             </a:r>
+            <a:br>
+              <a:rPr lang="en-US" dirty="0"/>
+            </a:br>
+            <a:br>
+              <a:rPr lang="en-US" dirty="0"/>
+            </a:br>
+            <a:endParaRPr lang="en-US" dirty="0"/>
           </a:p>
         </p:txBody>
       </p:sp>
@@ -36746,6 +37057,43 @@
           </a:prstGeom>
         </p:spPr>
       </p:pic>
+      <p:sp>
+        <p:nvSpPr>
+          <p:cNvPr id="6" name="TextBox 5">
+            <a:extLst>
+              <a:ext uri="{FF2B5EF4-FFF2-40B4-BE49-F238E27FC236}">
+                <a16:creationId xmlns:a16="http://schemas.microsoft.com/office/drawing/2014/main" id="{1742E718-8580-0A46-F99C-173816424208}"/>
+              </a:ext>
+            </a:extLst>
+          </p:cNvPr>
+          <p:cNvSpPr txBox="1"/>
+          <p:nvPr/>
+        </p:nvSpPr>
+        <p:spPr>
+          <a:xfrm>
+            <a:off x="685798" y="1818166"/>
+            <a:ext cx="4928191" cy="954107"/>
+          </a:xfrm>
+          <a:prstGeom prst="rect">
+            <a:avLst/>
+          </a:prstGeom>
+          <a:noFill/>
+        </p:spPr>
+        <p:txBody>
+          <a:bodyPr wrap="square" rtlCol="0">
+            <a:spAutoFit/>
+          </a:bodyPr>
+          <a:lstStyle/>
+          <a:p>
+            <a:r>
+              <a:rPr lang="en-US" sz="2800" dirty="0">
+                <a:latin typeface="Apple Braille" pitchFamily="2" charset="0"/>
+              </a:rPr>
+              <a:t>TCT model performance on different benchmark datasets</a:t>
+            </a:r>
+          </a:p>
+        </p:txBody>
+      </p:sp>
     </p:spTree>
     <p:extLst>
       <p:ext uri="{BB962C8B-B14F-4D97-AF65-F5344CB8AC3E}">
@@ -36760,6 +37108,107 @@
 </file>
 
 <file path=ppt/slides/slide44.xml><?xml version="1.0" encoding="utf-8"?>
+<p:sld xmlns:a="http://schemas.openxmlformats.org/drawingml/2006/main" xmlns:r="http://schemas.openxmlformats.org/officeDocument/2006/relationships" xmlns:p="http://schemas.openxmlformats.org/presentationml/2006/main">
+  <p:cSld>
+    <p:spTree>
+      <p:nvGrpSpPr>
+        <p:cNvPr id="1" name="">
+          <a:extLst>
+            <a:ext uri="{FF2B5EF4-FFF2-40B4-BE49-F238E27FC236}">
+              <a16:creationId xmlns:a16="http://schemas.microsoft.com/office/drawing/2014/main" id="{895D649B-3E73-6530-FA51-480D87A2CB44}"/>
+            </a:ext>
+          </a:extLst>
+        </p:cNvPr>
+        <p:cNvGrpSpPr/>
+        <p:nvPr/>
+      </p:nvGrpSpPr>
+      <p:grpSpPr>
+        <a:xfrm>
+          <a:off x="0" y="0"/>
+          <a:ext cx="0" cy="0"/>
+          <a:chOff x="0" y="0"/>
+          <a:chExt cx="0" cy="0"/>
+        </a:xfrm>
+      </p:grpSpPr>
+      <p:sp>
+        <p:nvSpPr>
+          <p:cNvPr id="2" name="Title 1">
+            <a:extLst>
+              <a:ext uri="{FF2B5EF4-FFF2-40B4-BE49-F238E27FC236}">
+                <a16:creationId xmlns:a16="http://schemas.microsoft.com/office/drawing/2014/main" id="{B05CE65D-1BD9-1D1E-9E95-712316C07646}"/>
+              </a:ext>
+            </a:extLst>
+          </p:cNvPr>
+          <p:cNvSpPr>
+            <a:spLocks noGrp="1"/>
+          </p:cNvSpPr>
+          <p:nvPr>
+            <p:ph type="title"/>
+          </p:nvPr>
+        </p:nvSpPr>
+        <p:spPr/>
+        <p:txBody>
+          <a:bodyPr>
+            <a:normAutofit fontScale="90000"/>
+          </a:bodyPr>
+          <a:lstStyle/>
+          <a:p>
+            <a:r>
+              <a:rPr lang="en-US" dirty="0"/>
+              <a:t>Benchmark dataset COCO-Search18 (Lin et al., 2015)</a:t>
+            </a:r>
+            <a:r>
+              <a:rPr lang="en-SG" dirty="0"/>
+              <a:t> </a:t>
+            </a:r>
+            <a:endParaRPr lang="en-US" dirty="0"/>
+          </a:p>
+        </p:txBody>
+      </p:sp>
+      <p:pic>
+        <p:nvPicPr>
+          <p:cNvPr id="4" name="Picture 3">
+            <a:extLst>
+              <a:ext uri="{FF2B5EF4-FFF2-40B4-BE49-F238E27FC236}">
+                <a16:creationId xmlns:a16="http://schemas.microsoft.com/office/drawing/2014/main" id="{F95405A4-087E-F6D6-1F4E-0A73F543A635}"/>
+              </a:ext>
+            </a:extLst>
+          </p:cNvPr>
+          <p:cNvPicPr>
+            <a:picLocks noChangeAspect="1"/>
+          </p:cNvPicPr>
+          <p:nvPr/>
+        </p:nvPicPr>
+        <p:blipFill>
+          <a:blip r:embed="rId2"/>
+          <a:stretch>
+            <a:fillRect/>
+          </a:stretch>
+        </p:blipFill>
+        <p:spPr>
+          <a:xfrm>
+            <a:off x="794572" y="2067926"/>
+            <a:ext cx="5072937" cy="3875674"/>
+          </a:xfrm>
+          <a:prstGeom prst="rect">
+            <a:avLst/>
+          </a:prstGeom>
+        </p:spPr>
+      </p:pic>
+    </p:spTree>
+    <p:extLst>
+      <p:ext uri="{BB962C8B-B14F-4D97-AF65-F5344CB8AC3E}">
+        <p14:creationId xmlns:p14="http://schemas.microsoft.com/office/powerpoint/2010/main" val="3077244546"/>
+      </p:ext>
+    </p:extLst>
+  </p:cSld>
+  <p:clrMapOvr>
+    <a:masterClrMapping/>
+  </p:clrMapOvr>
+</p:sld>
+</file>
+
+<file path=ppt/slides/slide45.xml><?xml version="1.0" encoding="utf-8"?>
 <p:sld xmlns:a="http://schemas.openxmlformats.org/drawingml/2006/main" xmlns:r="http://schemas.openxmlformats.org/officeDocument/2006/relationships" xmlns:p="http://schemas.openxmlformats.org/presentationml/2006/main">
   <p:cSld>
     <p:spTree>
@@ -36794,34 +37243,298 @@
         </p:nvSpPr>
         <p:spPr/>
         <p:txBody>
-          <a:bodyPr/>
+          <a:bodyPr>
+            <a:normAutofit fontScale="90000"/>
+          </a:bodyPr>
           <a:lstStyle/>
           <a:p>
-            <a:endParaRPr lang="en-US"/>
+            <a:r>
+              <a:rPr lang="en-US" dirty="0"/>
+              <a:t>Benchmark dataset SCEGRAM </a:t>
+            </a:r>
+            <a:r>
+              <a:rPr lang="en-GB" dirty="0"/>
+              <a:t>(</a:t>
+            </a:r>
+            <a:r>
+              <a:rPr lang="en-GB" dirty="0" err="1"/>
+              <a:t>Öhlschläger</a:t>
+            </a:r>
+            <a:r>
+              <a:rPr lang="en-GB" dirty="0"/>
+              <a:t> &amp; Võ, 2017)</a:t>
+            </a:r>
+            <a:r>
+              <a:rPr lang="en-SG" dirty="0"/>
+              <a:t> </a:t>
+            </a:r>
+            <a:endParaRPr lang="en-US" dirty="0"/>
+          </a:p>
+        </p:txBody>
+      </p:sp>
+      <p:pic>
+        <p:nvPicPr>
+          <p:cNvPr id="6" name="Picture 5">
+            <a:extLst>
+              <a:ext uri="{FF2B5EF4-FFF2-40B4-BE49-F238E27FC236}">
+                <a16:creationId xmlns:a16="http://schemas.microsoft.com/office/drawing/2014/main" id="{4E1A3A3C-C7CB-CE08-AF3E-6CC758EB4215}"/>
+              </a:ext>
+            </a:extLst>
+          </p:cNvPr>
+          <p:cNvPicPr>
+            <a:picLocks noChangeAspect="1"/>
+          </p:cNvPicPr>
+          <p:nvPr/>
+        </p:nvPicPr>
+        <p:blipFill>
+          <a:blip r:embed="rId3"/>
+          <a:stretch>
+            <a:fillRect/>
+          </a:stretch>
+        </p:blipFill>
+        <p:spPr>
+          <a:xfrm>
+            <a:off x="794573" y="2074892"/>
+            <a:ext cx="5072936" cy="3875674"/>
+          </a:xfrm>
+          <a:prstGeom prst="rect">
+            <a:avLst/>
+          </a:prstGeom>
+        </p:spPr>
+      </p:pic>
+    </p:spTree>
+    <p:extLst>
+      <p:ext uri="{BB962C8B-B14F-4D97-AF65-F5344CB8AC3E}">
+        <p14:creationId xmlns:p14="http://schemas.microsoft.com/office/powerpoint/2010/main" val="2515388836"/>
+      </p:ext>
+    </p:extLst>
+  </p:cSld>
+  <p:clrMapOvr>
+    <a:masterClrMapping/>
+  </p:clrMapOvr>
+</p:sld>
+</file>
+
+<file path=ppt/slides/slide46.xml><?xml version="1.0" encoding="utf-8"?>
+<p:sld xmlns:a="http://schemas.openxmlformats.org/drawingml/2006/main" xmlns:r="http://schemas.openxmlformats.org/officeDocument/2006/relationships" xmlns:p="http://schemas.openxmlformats.org/presentationml/2006/main">
+  <p:cSld>
+    <p:spTree>
+      <p:nvGrpSpPr>
+        <p:cNvPr id="1" name="">
+          <a:extLst>
+            <a:ext uri="{FF2B5EF4-FFF2-40B4-BE49-F238E27FC236}">
+              <a16:creationId xmlns:a16="http://schemas.microsoft.com/office/drawing/2014/main" id="{84005912-11B3-D239-2B9A-26FF9D7CB849}"/>
+            </a:ext>
+          </a:extLst>
+        </p:cNvPr>
+        <p:cNvGrpSpPr/>
+        <p:nvPr/>
+      </p:nvGrpSpPr>
+      <p:grpSpPr>
+        <a:xfrm>
+          <a:off x="0" y="0"/>
+          <a:ext cx="0" cy="0"/>
+          <a:chOff x="0" y="0"/>
+          <a:chExt cx="0" cy="0"/>
+        </a:xfrm>
+      </p:grpSpPr>
+      <p:sp>
+        <p:nvSpPr>
+          <p:cNvPr id="2" name="Title 1">
+            <a:extLst>
+              <a:ext uri="{FF2B5EF4-FFF2-40B4-BE49-F238E27FC236}">
+                <a16:creationId xmlns:a16="http://schemas.microsoft.com/office/drawing/2014/main" id="{AC3A04AC-09A8-FC28-A3D9-CCF41AD4E113}"/>
+              </a:ext>
+            </a:extLst>
+          </p:cNvPr>
+          <p:cNvSpPr>
+            <a:spLocks noGrp="1"/>
+          </p:cNvSpPr>
+          <p:nvPr>
+            <p:ph type="title"/>
+          </p:nvPr>
+        </p:nvSpPr>
+        <p:spPr/>
+        <p:txBody>
+          <a:bodyPr>
+            <a:normAutofit fontScale="90000"/>
+          </a:bodyPr>
+          <a:lstStyle/>
+          <a:p>
+            <a:r>
+              <a:rPr lang="en-US" dirty="0"/>
+              <a:t>Benchmark dataset </a:t>
+            </a:r>
+            <a:r>
+              <a:rPr lang="en-US" dirty="0" err="1"/>
+              <a:t>NaturalDesign</a:t>
+            </a:r>
+            <a:r>
+              <a:rPr lang="en-US" dirty="0"/>
+              <a:t> (Zhang et al., 2018)</a:t>
+            </a:r>
+            <a:r>
+              <a:rPr lang="en-SG" dirty="0"/>
+              <a:t> </a:t>
+            </a:r>
+            <a:endParaRPr lang="en-US" dirty="0"/>
+          </a:p>
+        </p:txBody>
+      </p:sp>
+      <p:pic>
+        <p:nvPicPr>
+          <p:cNvPr id="3" name="Picture 2">
+            <a:extLst>
+              <a:ext uri="{FF2B5EF4-FFF2-40B4-BE49-F238E27FC236}">
+                <a16:creationId xmlns:a16="http://schemas.microsoft.com/office/drawing/2014/main" id="{1903B580-1317-2E03-AD3B-7C61E9C442A9}"/>
+              </a:ext>
+            </a:extLst>
+          </p:cNvPr>
+          <p:cNvPicPr>
+            <a:picLocks noChangeAspect="1"/>
+          </p:cNvPicPr>
+          <p:nvPr/>
+        </p:nvPicPr>
+        <p:blipFill>
+          <a:blip r:embed="rId3"/>
+          <a:stretch>
+            <a:fillRect/>
+          </a:stretch>
+        </p:blipFill>
+        <p:spPr>
+          <a:xfrm>
+            <a:off x="794573" y="2074892"/>
+            <a:ext cx="5072937" cy="3875674"/>
+          </a:xfrm>
+          <a:prstGeom prst="rect">
+            <a:avLst/>
+          </a:prstGeom>
+        </p:spPr>
+      </p:pic>
+    </p:spTree>
+    <p:extLst>
+      <p:ext uri="{BB962C8B-B14F-4D97-AF65-F5344CB8AC3E}">
+        <p14:creationId xmlns:p14="http://schemas.microsoft.com/office/powerpoint/2010/main" val="1028765523"/>
+      </p:ext>
+    </p:extLst>
+  </p:cSld>
+  <p:clrMapOvr>
+    <a:masterClrMapping/>
+  </p:clrMapOvr>
+</p:sld>
+</file>
+
+<file path=ppt/slides/slide47.xml><?xml version="1.0" encoding="utf-8"?>
+<p:sld xmlns:a="http://schemas.openxmlformats.org/drawingml/2006/main" xmlns:r="http://schemas.openxmlformats.org/officeDocument/2006/relationships" xmlns:p="http://schemas.openxmlformats.org/presentationml/2006/main">
+  <p:cSld>
+    <p:spTree>
+      <p:nvGrpSpPr>
+        <p:cNvPr id="1" name="">
+          <a:extLst>
+            <a:ext uri="{FF2B5EF4-FFF2-40B4-BE49-F238E27FC236}">
+              <a16:creationId xmlns:a16="http://schemas.microsoft.com/office/drawing/2014/main" id="{4CB458E3-520F-6F1A-0F66-C19763479DD1}"/>
+            </a:ext>
+          </a:extLst>
+        </p:cNvPr>
+        <p:cNvGrpSpPr/>
+        <p:nvPr/>
+      </p:nvGrpSpPr>
+      <p:grpSpPr>
+        <a:xfrm>
+          <a:off x="0" y="0"/>
+          <a:ext cx="0" cy="0"/>
+          <a:chOff x="0" y="0"/>
+          <a:chExt cx="0" cy="0"/>
+        </a:xfrm>
+      </p:grpSpPr>
+      <p:sp>
+        <p:nvSpPr>
+          <p:cNvPr id="2" name="Title 1">
+            <a:extLst>
+              <a:ext uri="{FF2B5EF4-FFF2-40B4-BE49-F238E27FC236}">
+                <a16:creationId xmlns:a16="http://schemas.microsoft.com/office/drawing/2014/main" id="{F81ED400-AC59-ECF2-1BE7-D760E74B84FA}"/>
+              </a:ext>
+            </a:extLst>
+          </p:cNvPr>
+          <p:cNvSpPr>
+            <a:spLocks noGrp="1"/>
+          </p:cNvSpPr>
+          <p:nvPr>
+            <p:ph type="title"/>
+          </p:nvPr>
+        </p:nvSpPr>
+        <p:spPr/>
+        <p:txBody>
+          <a:bodyPr>
+            <a:normAutofit/>
+          </a:bodyPr>
+          <a:lstStyle/>
+          <a:p>
+            <a:r>
+              <a:rPr lang="en-US" dirty="0"/>
+              <a:t>Benchmark dataset </a:t>
+            </a:r>
+            <a:r>
+              <a:rPr lang="en-US" dirty="0" err="1"/>
+              <a:t>ContextBreak</a:t>
+            </a:r>
+            <a:endParaRPr lang="en-US" dirty="0"/>
           </a:p>
         </p:txBody>
       </p:sp>
       <p:sp>
         <p:nvSpPr>
-          <p:cNvPr id="3" name="Content Placeholder 2">
-            <a:extLst>
-              <a:ext uri="{FF2B5EF4-FFF2-40B4-BE49-F238E27FC236}">
-                <a16:creationId xmlns:a16="http://schemas.microsoft.com/office/drawing/2014/main" id="{4C269D89-B5CD-7D33-215F-AAEF89DC5305}"/>
+          <p:cNvPr id="5" name="Rectangle 4">
+            <a:extLst>
+              <a:ext uri="{FF2B5EF4-FFF2-40B4-BE49-F238E27FC236}">
+                <a16:creationId xmlns:a16="http://schemas.microsoft.com/office/drawing/2014/main" id="{D8A97DA7-0B8F-6AE0-41AF-352212D7C6CF}"/>
               </a:ext>
             </a:extLst>
           </p:cNvPr>
           <p:cNvSpPr>
-            <a:spLocks noGrp="1"/>
+            <a:spLocks/>
           </p:cNvSpPr>
-          <p:nvPr>
-            <p:ph idx="1"/>
-          </p:nvPr>
+          <p:nvPr/>
         </p:nvSpPr>
-        <p:spPr/>
+        <p:spPr>
+          <a:xfrm>
+            <a:off x="794573" y="2074892"/>
+            <a:ext cx="5072937" cy="3875674"/>
+          </a:xfrm>
+          <a:prstGeom prst="rect">
+            <a:avLst/>
+          </a:prstGeom>
+          <a:noFill/>
+          <a:ln w="12700" cap="flat" cmpd="sng" algn="ctr">
+            <a:solidFill>
+              <a:schemeClr val="tx1"/>
+            </a:solidFill>
+            <a:prstDash val="solid"/>
+            <a:miter lim="800000"/>
+          </a:ln>
+          <a:effectLst/>
+        </p:spPr>
+        <p:style>
+          <a:lnRef idx="2">
+            <a:schemeClr val="accent1">
+              <a:shade val="50000"/>
+            </a:schemeClr>
+          </a:lnRef>
+          <a:fillRef idx="1">
+            <a:schemeClr val="accent1"/>
+          </a:fillRef>
+          <a:effectRef idx="0">
+            <a:schemeClr val="accent1"/>
+          </a:effectRef>
+          <a:fontRef idx="minor">
+            <a:schemeClr val="lt1"/>
+          </a:fontRef>
+        </p:style>
         <p:txBody>
-          <a:bodyPr/>
+          <a:bodyPr rtlCol="0" anchor="ctr"/>
           <a:lstStyle/>
           <a:p>
+            <a:pPr algn="ctr"/>
             <a:endParaRPr lang="en-US"/>
           </a:p>
         </p:txBody>
@@ -36829,7 +37542,403 @@
     </p:spTree>
     <p:extLst>
       <p:ext uri="{BB962C8B-B14F-4D97-AF65-F5344CB8AC3E}">
-        <p14:creationId xmlns:p14="http://schemas.microsoft.com/office/powerpoint/2010/main" val="2515388836"/>
+        <p14:creationId xmlns:p14="http://schemas.microsoft.com/office/powerpoint/2010/main" val="1779250889"/>
+      </p:ext>
+    </p:extLst>
+  </p:cSld>
+  <p:clrMapOvr>
+    <a:masterClrMapping/>
+  </p:clrMapOvr>
+</p:sld>
+</file>
+
+<file path=ppt/slides/slide48.xml><?xml version="1.0" encoding="utf-8"?>
+<p:sld xmlns:a="http://schemas.openxmlformats.org/drawingml/2006/main" xmlns:r="http://schemas.openxmlformats.org/officeDocument/2006/relationships" xmlns:p="http://schemas.openxmlformats.org/presentationml/2006/main">
+  <p:cSld>
+    <p:bg>
+      <p:bgPr>
+        <a:solidFill>
+          <a:schemeClr val="bg1"/>
+        </a:solidFill>
+        <a:effectLst/>
+      </p:bgPr>
+    </p:bg>
+    <p:spTree>
+      <p:nvGrpSpPr>
+        <p:cNvPr id="1" name=""/>
+        <p:cNvGrpSpPr/>
+        <p:nvPr/>
+      </p:nvGrpSpPr>
+      <p:grpSpPr>
+        <a:xfrm>
+          <a:off x="0" y="0"/>
+          <a:ext cx="0" cy="0"/>
+          <a:chOff x="0" y="0"/>
+          <a:chExt cx="0" cy="0"/>
+        </a:xfrm>
+      </p:grpSpPr>
+      <p:cxnSp>
+        <p:nvCxnSpPr>
+          <p:cNvPr id="10" name="Straight Connector 9">
+            <a:extLst>
+              <a:ext uri="{FF2B5EF4-FFF2-40B4-BE49-F238E27FC236}">
+                <a16:creationId xmlns:a16="http://schemas.microsoft.com/office/drawing/2014/main" id="{F64F9B95-9045-48D2-B9F3-2927E98F54AA}"/>
+              </a:ext>
+              <a:ext uri="{C183D7F6-B498-43B3-948B-1728B52AA6E4}">
+                <adec:decorative xmlns:adec="http://schemas.microsoft.com/office/drawing/2017/decorative" val="1"/>
+              </a:ext>
+            </a:extLst>
+          </p:cNvPr>
+          <p:cNvCxnSpPr>
+            <a:cxnSpLocks noGrp="1" noRot="1" noChangeAspect="1" noMove="1" noResize="1" noEditPoints="1" noAdjustHandles="1" noChangeArrowheads="1" noChangeShapeType="1"/>
+          </p:cNvCxnSpPr>
+          <p:nvPr>
+            <p:extLst>
+              <p:ext uri="{386F3935-93C4-4BCD-93E2-E3B085C9AB24}">
+                <p16:designElem xmlns:p16="http://schemas.microsoft.com/office/powerpoint/2015/main" val="1"/>
+              </p:ext>
+            </p:extLst>
+          </p:nvPr>
+        </p:nvCxnSpPr>
+        <p:spPr>
+          <a:xfrm>
+            <a:off x="800100" y="723900"/>
+            <a:ext cx="10591800" cy="0"/>
+          </a:xfrm>
+          <a:prstGeom prst="line">
+            <a:avLst/>
+          </a:prstGeom>
+          <a:ln w="44450">
+            <a:solidFill>
+              <a:schemeClr val="tx1"/>
+            </a:solidFill>
+          </a:ln>
+        </p:spPr>
+        <p:style>
+          <a:lnRef idx="1">
+            <a:schemeClr val="accent1"/>
+          </a:lnRef>
+          <a:fillRef idx="0">
+            <a:schemeClr val="accent1"/>
+          </a:fillRef>
+          <a:effectRef idx="0">
+            <a:schemeClr val="accent1"/>
+          </a:effectRef>
+          <a:fontRef idx="minor">
+            <a:schemeClr val="tx1"/>
+          </a:fontRef>
+        </p:style>
+      </p:cxnSp>
+      <p:cxnSp>
+        <p:nvCxnSpPr>
+          <p:cNvPr id="12" name="Straight Connector 11">
+            <a:extLst>
+              <a:ext uri="{FF2B5EF4-FFF2-40B4-BE49-F238E27FC236}">
+                <a16:creationId xmlns:a16="http://schemas.microsoft.com/office/drawing/2014/main" id="{085AA86F-6A4D-4BCB-A045-D992CDC2959B}"/>
+              </a:ext>
+              <a:ext uri="{C183D7F6-B498-43B3-948B-1728B52AA6E4}">
+                <adec:decorative xmlns:adec="http://schemas.microsoft.com/office/drawing/2017/decorative" val="1"/>
+              </a:ext>
+            </a:extLst>
+          </p:cNvPr>
+          <p:cNvCxnSpPr>
+            <a:cxnSpLocks noGrp="1" noRot="1" noChangeAspect="1" noMove="1" noResize="1" noEditPoints="1" noAdjustHandles="1" noChangeArrowheads="1" noChangeShapeType="1"/>
+          </p:cNvCxnSpPr>
+          <p:nvPr>
+            <p:extLst>
+              <p:ext uri="{386F3935-93C4-4BCD-93E2-E3B085C9AB24}">
+                <p16:designElem xmlns:p16="http://schemas.microsoft.com/office/powerpoint/2015/main" val="1"/>
+              </p:ext>
+            </p:extLst>
+          </p:nvPr>
+        </p:nvCxnSpPr>
+        <p:spPr>
+          <a:xfrm>
+            <a:off x="800100" y="6142781"/>
+            <a:ext cx="10591800" cy="0"/>
+          </a:xfrm>
+          <a:prstGeom prst="line">
+            <a:avLst/>
+          </a:prstGeom>
+          <a:ln w="12700">
+            <a:solidFill>
+              <a:schemeClr val="tx1"/>
+            </a:solidFill>
+          </a:ln>
+        </p:spPr>
+        <p:style>
+          <a:lnRef idx="1">
+            <a:schemeClr val="accent1"/>
+          </a:lnRef>
+          <a:fillRef idx="0">
+            <a:schemeClr val="accent1"/>
+          </a:fillRef>
+          <a:effectRef idx="0">
+            <a:schemeClr val="accent1"/>
+          </a:effectRef>
+          <a:fontRef idx="minor">
+            <a:schemeClr val="tx1"/>
+          </a:fontRef>
+        </p:style>
+      </p:cxnSp>
+      <p:sp useBgFill="1">
+        <p:nvSpPr>
+          <p:cNvPr id="14" name="Rectangle 13">
+            <a:extLst>
+              <a:ext uri="{FF2B5EF4-FFF2-40B4-BE49-F238E27FC236}">
+                <a16:creationId xmlns:a16="http://schemas.microsoft.com/office/drawing/2014/main" id="{33E93247-6229-44AB-A550-739E971E690B}"/>
+              </a:ext>
+              <a:ext uri="{C183D7F6-B498-43B3-948B-1728B52AA6E4}">
+                <adec:decorative xmlns:adec="http://schemas.microsoft.com/office/drawing/2017/decorative" val="1"/>
+              </a:ext>
+            </a:extLst>
+          </p:cNvPr>
+          <p:cNvSpPr>
+            <a:spLocks noGrp="1" noRot="1" noChangeAspect="1" noMove="1" noResize="1" noEditPoints="1" noAdjustHandles="1" noChangeArrowheads="1" noChangeShapeType="1" noTextEdit="1"/>
+          </p:cNvSpPr>
+          <p:nvPr>
+            <p:extLst>
+              <p:ext uri="{386F3935-93C4-4BCD-93E2-E3B085C9AB24}">
+                <p16:designElem xmlns:p16="http://schemas.microsoft.com/office/powerpoint/2015/main" val="1"/>
+              </p:ext>
+            </p:extLst>
+          </p:nvPr>
+        </p:nvSpPr>
+        <p:spPr>
+          <a:xfrm>
+            <a:off x="0" y="0"/>
+            <a:ext cx="12192000" cy="6858000"/>
+          </a:xfrm>
+          <a:prstGeom prst="rect">
+            <a:avLst/>
+          </a:prstGeom>
+          <a:ln w="12700" cap="flat" cmpd="sng" algn="ctr">
+            <a:noFill/>
+            <a:prstDash val="solid"/>
+            <a:miter lim="800000"/>
+          </a:ln>
+          <a:effectLst/>
+          <a:extLst>
+            <a:ext uri="{91240B29-F687-4F45-9708-019B960494DF}">
+              <a14:hiddenLine xmlns:a14="http://schemas.microsoft.com/office/drawing/2010/main" w="12700" cap="flat" cmpd="sng" algn="ctr">
+                <a:solidFill>
+                  <a:schemeClr val="accent1">
+                    <a:shade val="50000"/>
+                  </a:schemeClr>
+                </a:solidFill>
+                <a:prstDash val="solid"/>
+                <a:miter lim="800000"/>
+              </a14:hiddenLine>
+            </a:ext>
+          </a:extLst>
+        </p:spPr>
+        <p:style>
+          <a:lnRef idx="2">
+            <a:schemeClr val="accent1">
+              <a:shade val="50000"/>
+            </a:schemeClr>
+          </a:lnRef>
+          <a:fillRef idx="1">
+            <a:schemeClr val="accent1"/>
+          </a:fillRef>
+          <a:effectRef idx="0">
+            <a:schemeClr val="accent1"/>
+          </a:effectRef>
+          <a:fontRef idx="minor">
+            <a:schemeClr val="lt1"/>
+          </a:fontRef>
+        </p:style>
+        <p:txBody>
+          <a:bodyPr rtlCol="0" anchor="ctr"/>
+          <a:lstStyle/>
+          <a:p>
+            <a:pPr algn="ctr"/>
+            <a:endParaRPr lang="en-US"/>
+          </a:p>
+        </p:txBody>
+      </p:sp>
+      <p:sp>
+        <p:nvSpPr>
+          <p:cNvPr id="2" name="Title 1">
+            <a:extLst>
+              <a:ext uri="{FF2B5EF4-FFF2-40B4-BE49-F238E27FC236}">
+                <a16:creationId xmlns:a16="http://schemas.microsoft.com/office/drawing/2014/main" id="{0B54BB1D-D247-7916-8C24-9AFA2160F076}"/>
+              </a:ext>
+            </a:extLst>
+          </p:cNvPr>
+          <p:cNvSpPr>
+            <a:spLocks noGrp="1"/>
+          </p:cNvSpPr>
+          <p:nvPr>
+            <p:ph type="title"/>
+          </p:nvPr>
+        </p:nvSpPr>
+        <p:spPr>
+          <a:xfrm>
+            <a:off x="5633343" y="1137215"/>
+            <a:ext cx="5804426" cy="3376766"/>
+          </a:xfrm>
+        </p:spPr>
+        <p:txBody>
+          <a:bodyPr vert="horz" lIns="91440" tIns="45720" rIns="91440" bIns="45720" rtlCol="0" anchor="t">
+            <a:normAutofit/>
+          </a:bodyPr>
+          <a:lstStyle/>
+          <a:p>
+            <a:r>
+              <a:rPr lang="en-US" sz="6600" dirty="0"/>
+              <a:t>Contribution and future direction</a:t>
+            </a:r>
+          </a:p>
+        </p:txBody>
+      </p:sp>
+      <p:pic>
+        <p:nvPicPr>
+          <p:cNvPr id="7" name="Graphic 6" descr="Bullseye">
+            <a:extLst>
+              <a:ext uri="{FF2B5EF4-FFF2-40B4-BE49-F238E27FC236}">
+                <a16:creationId xmlns:a16="http://schemas.microsoft.com/office/drawing/2014/main" id="{C83CB4C3-1C2F-6EF1-754A-F9C5ED76599F}"/>
+              </a:ext>
+            </a:extLst>
+          </p:cNvPr>
+          <p:cNvPicPr>
+            <a:picLocks noChangeAspect="1"/>
+          </p:cNvPicPr>
+          <p:nvPr/>
+        </p:nvPicPr>
+        <p:blipFill>
+          <a:blip>
+            <a:extLst>
+              <a:ext uri="{28A0092B-C50C-407E-A947-70E740481C1C}">
+                <a14:useLocalDpi xmlns:a14="http://schemas.microsoft.com/office/drawing/2010/main" val="0"/>
+              </a:ext>
+              <a:ext uri="{96DAC541-7B7A-43D3-8B79-37D633B846F1}">
+                <asvg:svgBlip xmlns:asvg="http://schemas.microsoft.com/office/drawing/2016/SVG/main" r:embed="rId2"/>
+              </a:ext>
+            </a:extLst>
+          </a:blip>
+          <a:stretch>
+            <a:fillRect/>
+          </a:stretch>
+        </p:blipFill>
+        <p:spPr>
+          <a:xfrm>
+            <a:off x="715383" y="1171349"/>
+            <a:ext cx="4515301" cy="4515301"/>
+          </a:xfrm>
+          <a:prstGeom prst="rect">
+            <a:avLst/>
+          </a:prstGeom>
+        </p:spPr>
+      </p:pic>
+      <p:cxnSp>
+        <p:nvCxnSpPr>
+          <p:cNvPr id="16" name="Straight Connector 15">
+            <a:extLst>
+              <a:ext uri="{FF2B5EF4-FFF2-40B4-BE49-F238E27FC236}">
+                <a16:creationId xmlns:a16="http://schemas.microsoft.com/office/drawing/2014/main" id="{EE2E603F-4A95-4FE8-BB06-211DFD75DBEF}"/>
+              </a:ext>
+              <a:ext uri="{C183D7F6-B498-43B3-948B-1728B52AA6E4}">
+                <adec:decorative xmlns:adec="http://schemas.microsoft.com/office/drawing/2017/decorative" val="1"/>
+              </a:ext>
+            </a:extLst>
+          </p:cNvPr>
+          <p:cNvCxnSpPr>
+            <a:cxnSpLocks noGrp="1" noRot="1" noChangeAspect="1" noMove="1" noResize="1" noEditPoints="1" noAdjustHandles="1" noChangeArrowheads="1" noChangeShapeType="1"/>
+          </p:cNvCxnSpPr>
+          <p:nvPr>
+            <p:extLst>
+              <p:ext uri="{386F3935-93C4-4BCD-93E2-E3B085C9AB24}">
+                <p16:designElem xmlns:p16="http://schemas.microsoft.com/office/powerpoint/2015/main" val="1"/>
+              </p:ext>
+            </p:extLst>
+          </p:nvPr>
+        </p:nvCxnSpPr>
+        <p:spPr>
+          <a:xfrm>
+            <a:off x="5633343" y="723900"/>
+            <a:ext cx="5715000" cy="0"/>
+          </a:xfrm>
+          <a:prstGeom prst="line">
+            <a:avLst/>
+          </a:prstGeom>
+          <a:ln w="44450">
+            <a:solidFill>
+              <a:schemeClr val="tx1"/>
+            </a:solidFill>
+          </a:ln>
+        </p:spPr>
+        <p:style>
+          <a:lnRef idx="1">
+            <a:schemeClr val="accent1"/>
+          </a:lnRef>
+          <a:fillRef idx="0">
+            <a:schemeClr val="accent1"/>
+          </a:fillRef>
+          <a:effectRef idx="0">
+            <a:schemeClr val="accent1"/>
+          </a:effectRef>
+          <a:fontRef idx="minor">
+            <a:schemeClr val="tx1"/>
+          </a:fontRef>
+        </p:style>
+      </p:cxnSp>
+      <p:cxnSp>
+        <p:nvCxnSpPr>
+          <p:cNvPr id="18" name="Straight Connector 17">
+            <a:extLst>
+              <a:ext uri="{FF2B5EF4-FFF2-40B4-BE49-F238E27FC236}">
+                <a16:creationId xmlns:a16="http://schemas.microsoft.com/office/drawing/2014/main" id="{A8E634B8-311A-4810-A5DB-7043D0280410}"/>
+              </a:ext>
+              <a:ext uri="{C183D7F6-B498-43B3-948B-1728B52AA6E4}">
+                <adec:decorative xmlns:adec="http://schemas.microsoft.com/office/drawing/2017/decorative" val="1"/>
+              </a:ext>
+            </a:extLst>
+          </p:cNvPr>
+          <p:cNvCxnSpPr>
+            <a:cxnSpLocks noGrp="1" noRot="1" noChangeAspect="1" noMove="1" noResize="1" noEditPoints="1" noAdjustHandles="1" noChangeArrowheads="1" noChangeShapeType="1"/>
+          </p:cNvCxnSpPr>
+          <p:nvPr>
+            <p:extLst>
+              <p:ext uri="{386F3935-93C4-4BCD-93E2-E3B085C9AB24}">
+                <p16:designElem xmlns:p16="http://schemas.microsoft.com/office/powerpoint/2015/main" val="1"/>
+              </p:ext>
+            </p:extLst>
+          </p:nvPr>
+        </p:nvCxnSpPr>
+        <p:spPr>
+          <a:xfrm>
+            <a:off x="5633343" y="6134100"/>
+            <a:ext cx="5715000" cy="0"/>
+          </a:xfrm>
+          <a:prstGeom prst="line">
+            <a:avLst/>
+          </a:prstGeom>
+          <a:ln w="12700">
+            <a:solidFill>
+              <a:schemeClr val="tx1"/>
+            </a:solidFill>
+          </a:ln>
+        </p:spPr>
+        <p:style>
+          <a:lnRef idx="1">
+            <a:schemeClr val="accent1"/>
+          </a:lnRef>
+          <a:fillRef idx="0">
+            <a:schemeClr val="accent1"/>
+          </a:fillRef>
+          <a:effectRef idx="0">
+            <a:schemeClr val="accent1"/>
+          </a:effectRef>
+          <a:fontRef idx="minor">
+            <a:schemeClr val="tx1"/>
+          </a:fontRef>
+        </p:style>
+      </p:cxnSp>
+    </p:spTree>
+    <p:extLst>
+      <p:ext uri="{BB962C8B-B14F-4D97-AF65-F5344CB8AC3E}">
+        <p14:creationId xmlns:p14="http://schemas.microsoft.com/office/powerpoint/2010/main" val="905392793"/>
       </p:ext>
     </p:extLst>
   </p:cSld>

--- a/Presentation/FYP_NguyenTuan_Presentation.pptx
+++ b/Presentation/FYP_NguyenTuan_Presentation.pptx
@@ -5,7 +5,7 @@
     <p:sldMasterId id="2147483863" r:id="rId1"/>
   </p:sldMasterIdLst>
   <p:notesMasterIdLst>
-    <p:notesMasterId r:id="rId50"/>
+    <p:notesMasterId r:id="rId51"/>
   </p:notesMasterIdLst>
   <p:sldIdLst>
     <p:sldId id="256" r:id="rId2"/>
@@ -56,6 +56,7 @@
     <p:sldId id="302" r:id="rId47"/>
     <p:sldId id="303" r:id="rId48"/>
     <p:sldId id="304" r:id="rId49"/>
+    <p:sldId id="305" r:id="rId50"/>
   </p:sldIdLst>
   <p:sldSz cx="12192000" cy="6858000"/>
   <p:notesSz cx="6858000" cy="9144000"/>
@@ -35716,8 +35717,12 @@
               <a:buAutoNum type="arabicParenBoth"/>
             </a:pPr>
             <a:r>
+              <a:rPr lang="en-SG" b="1" dirty="0"/>
+              <a:t>Original target</a:t>
+            </a:r>
+            <a:r>
               <a:rPr lang="en-SG" dirty="0"/>
-              <a:t>Original target image.</a:t>
+              <a:t> image.</a:t>
             </a:r>
           </a:p>
           <a:p>
@@ -35728,8 +35733,12 @@
               <a:buAutoNum type="arabicParenBoth"/>
             </a:pPr>
             <a:r>
+              <a:rPr lang="en-SG" b="1" dirty="0"/>
+              <a:t>Random target</a:t>
+            </a:r>
+            <a:r>
               <a:rPr lang="en-SG" dirty="0"/>
-              <a:t>Random target image of the same category.</a:t>
+              <a:t> image of the same category.</a:t>
             </a:r>
           </a:p>
           <a:p>
@@ -35740,8 +35749,12 @@
               <a:buAutoNum type="arabicParenBoth"/>
             </a:pPr>
             <a:r>
+              <a:rPr lang="en-SG" b="1" dirty="0"/>
+              <a:t>Black rectangle</a:t>
+            </a:r>
+            <a:r>
               <a:rPr lang="en-SG" dirty="0"/>
-              <a:t>Black rectangle of the target image size.</a:t>
+              <a:t> of the target image size.</a:t>
             </a:r>
           </a:p>
           <a:p>
@@ -35799,8 +35812,20 @@
               <a:buAutoNum type="arabicParenBoth"/>
             </a:pPr>
             <a:r>
+              <a:rPr lang="en-SG" b="1" dirty="0"/>
+              <a:t>Original context</a:t>
+            </a:r>
+            <a:r>
               <a:rPr lang="en-SG" dirty="0"/>
-              <a:t>Original context image with original target image.</a:t>
+              <a:t> image with </a:t>
+            </a:r>
+            <a:r>
+              <a:rPr lang="en-SG" b="1" dirty="0"/>
+              <a:t>original target</a:t>
+            </a:r>
+            <a:r>
+              <a:rPr lang="en-SG" dirty="0"/>
+              <a:t> image.</a:t>
             </a:r>
           </a:p>
           <a:p>
@@ -35811,8 +35836,20 @@
               <a:buAutoNum type="arabicParenBoth"/>
             </a:pPr>
             <a:r>
+              <a:rPr lang="en-SG" b="1" dirty="0"/>
+              <a:t>Original context</a:t>
+            </a:r>
+            <a:r>
               <a:rPr lang="en-SG" dirty="0"/>
-              <a:t>Original context image with a random target of the same category.</a:t>
+              <a:t> image with a </a:t>
+            </a:r>
+            <a:r>
+              <a:rPr lang="en-SG" b="1" dirty="0"/>
+              <a:t>random target</a:t>
+            </a:r>
+            <a:r>
+              <a:rPr lang="en-SG" dirty="0"/>
+              <a:t> of the same category.</a:t>
             </a:r>
           </a:p>
           <a:p>
@@ -35823,8 +35860,20 @@
               <a:buAutoNum type="arabicParenBoth"/>
             </a:pPr>
             <a:r>
+              <a:rPr lang="en-SG" b="1" dirty="0"/>
+              <a:t>Original context</a:t>
+            </a:r>
+            <a:r>
               <a:rPr lang="en-SG" dirty="0"/>
-              <a:t>Original context image with a black rectangle covering the target region.</a:t>
+              <a:t> image with a </a:t>
+            </a:r>
+            <a:r>
+              <a:rPr lang="en-SG" b="1" dirty="0"/>
+              <a:t>black rectangle</a:t>
+            </a:r>
+            <a:r>
+              <a:rPr lang="en-SG" dirty="0"/>
+              <a:t> covering the target region.</a:t>
             </a:r>
           </a:p>
           <a:p>
@@ -37775,8 +37824,8 @@
         </p:nvSpPr>
         <p:spPr>
           <a:xfrm>
-            <a:off x="5633343" y="1137215"/>
-            <a:ext cx="5804426" cy="3376766"/>
+            <a:off x="5633342" y="1137215"/>
+            <a:ext cx="6126857" cy="3376766"/>
           </a:xfrm>
         </p:spPr>
         <p:txBody>
@@ -37787,7 +37836,7 @@
           <a:p>
             <a:r>
               <a:rPr lang="en-US" sz="6600" dirty="0"/>
-              <a:t>Contribution and future direction</a:t>
+              <a:t>Contributions and future directions</a:t>
             </a:r>
           </a:p>
         </p:txBody>
@@ -37939,6 +37988,86 @@
     <p:extLst>
       <p:ext uri="{BB962C8B-B14F-4D97-AF65-F5344CB8AC3E}">
         <p14:creationId xmlns:p14="http://schemas.microsoft.com/office/powerpoint/2010/main" val="905392793"/>
+      </p:ext>
+    </p:extLst>
+  </p:cSld>
+  <p:clrMapOvr>
+    <a:masterClrMapping/>
+  </p:clrMapOvr>
+</p:sld>
+</file>
+
+<file path=ppt/slides/slide49.xml><?xml version="1.0" encoding="utf-8"?>
+<p:sld xmlns:a="http://schemas.openxmlformats.org/drawingml/2006/main" xmlns:r="http://schemas.openxmlformats.org/officeDocument/2006/relationships" xmlns:p="http://schemas.openxmlformats.org/presentationml/2006/main">
+  <p:cSld>
+    <p:spTree>
+      <p:nvGrpSpPr>
+        <p:cNvPr id="1" name=""/>
+        <p:cNvGrpSpPr/>
+        <p:nvPr/>
+      </p:nvGrpSpPr>
+      <p:grpSpPr>
+        <a:xfrm>
+          <a:off x="0" y="0"/>
+          <a:ext cx="0" cy="0"/>
+          <a:chOff x="0" y="0"/>
+          <a:chExt cx="0" cy="0"/>
+        </a:xfrm>
+      </p:grpSpPr>
+      <p:sp>
+        <p:nvSpPr>
+          <p:cNvPr id="2" name="Title 1">
+            <a:extLst>
+              <a:ext uri="{FF2B5EF4-FFF2-40B4-BE49-F238E27FC236}">
+                <a16:creationId xmlns:a16="http://schemas.microsoft.com/office/drawing/2014/main" id="{EBDF2332-689D-45A5-FAF4-D7D544C66EFA}"/>
+              </a:ext>
+            </a:extLst>
+          </p:cNvPr>
+          <p:cNvSpPr>
+            <a:spLocks noGrp="1"/>
+          </p:cNvSpPr>
+          <p:nvPr>
+            <p:ph type="title"/>
+          </p:nvPr>
+        </p:nvSpPr>
+        <p:spPr/>
+        <p:txBody>
+          <a:bodyPr/>
+          <a:lstStyle/>
+          <a:p>
+            <a:endParaRPr lang="en-US"/>
+          </a:p>
+        </p:txBody>
+      </p:sp>
+      <p:sp>
+        <p:nvSpPr>
+          <p:cNvPr id="3" name="Content Placeholder 2">
+            <a:extLst>
+              <a:ext uri="{FF2B5EF4-FFF2-40B4-BE49-F238E27FC236}">
+                <a16:creationId xmlns:a16="http://schemas.microsoft.com/office/drawing/2014/main" id="{564E6363-99E4-B840-9420-675F20837156}"/>
+              </a:ext>
+            </a:extLst>
+          </p:cNvPr>
+          <p:cNvSpPr>
+            <a:spLocks noGrp="1"/>
+          </p:cNvSpPr>
+          <p:nvPr>
+            <p:ph idx="1"/>
+          </p:nvPr>
+        </p:nvSpPr>
+        <p:spPr/>
+        <p:txBody>
+          <a:bodyPr/>
+          <a:lstStyle/>
+          <a:p>
+            <a:endParaRPr lang="en-US"/>
+          </a:p>
+        </p:txBody>
+      </p:sp>
+    </p:spTree>
+    <p:extLst>
+      <p:ext uri="{BB962C8B-B14F-4D97-AF65-F5344CB8AC3E}">
+        <p14:creationId xmlns:p14="http://schemas.microsoft.com/office/powerpoint/2010/main" val="3079785815"/>
       </p:ext>
     </p:extLst>
   </p:cSld>

--- a/Presentation/FYP_NguyenTuan_Presentation.pptx
+++ b/Presentation/FYP_NguyenTuan_Presentation.pptx
@@ -38035,7 +38035,7 @@
           <a:bodyPr/>
           <a:lstStyle/>
           <a:p>
-            <a:endParaRPr lang="en-US"/>
+            <a:endParaRPr lang="en-US" dirty="0"/>
           </a:p>
         </p:txBody>
       </p:sp>

--- a/Presentation/FYP_NguyenTuan_Presentation.pptx
+++ b/Presentation/FYP_NguyenTuan_Presentation.pptx
@@ -3631,7 +3631,7 @@
           <a:p>
             <a:fld id="{9A9C0C59-185E-874E-8468-6092D83992DA}" type="datetimeFigureOut">
               <a:rPr lang="en-US" smtClean="0"/>
-              <a:t>5/5/26</a:t>
+              <a:t>5/6/26</a:t>
             </a:fld>
             <a:endParaRPr lang="en-US"/>
           </a:p>
@@ -7760,7 +7760,7 @@
           <a:p>
             <a:fld id="{D1D1EADE-8E88-4C7C-8AC5-FB148DE4940E}" type="datetime1">
               <a:rPr lang="en-US" smtClean="0"/>
-              <a:t>5/5/26</a:t>
+              <a:t>5/6/26</a:t>
             </a:fld>
             <a:endParaRPr lang="en-US"/>
           </a:p>
@@ -7960,7 +7960,7 @@
           <a:p>
             <a:fld id="{EC3C8B9C-477D-492A-96AD-1FC2CC997A73}" type="datetime1">
               <a:rPr lang="en-US" smtClean="0"/>
-              <a:t>5/5/26</a:t>
+              <a:t>5/6/26</a:t>
             </a:fld>
             <a:endParaRPr lang="en-US"/>
           </a:p>
@@ -8170,7 +8170,7 @@
           <a:p>
             <a:fld id="{42D3AED5-E26D-4E29-B1B3-7847B6779594}" type="datetime1">
               <a:rPr lang="en-US" smtClean="0"/>
-              <a:t>5/5/26</a:t>
+              <a:t>5/6/26</a:t>
             </a:fld>
             <a:endParaRPr lang="en-US"/>
           </a:p>
@@ -8370,7 +8370,7 @@
           <a:p>
             <a:fld id="{157B6794-849E-4626-908B-D15793550EFB}" type="datetime1">
               <a:rPr lang="en-US" smtClean="0"/>
-              <a:t>5/5/26</a:t>
+              <a:t>5/6/26</a:t>
             </a:fld>
             <a:endParaRPr lang="en-US"/>
           </a:p>
@@ -8646,7 +8646,7 @@
           <a:p>
             <a:fld id="{63DB64E7-5594-42A3-ADBF-E95A7ACEAD64}" type="datetime1">
               <a:rPr lang="en-US" smtClean="0"/>
-              <a:t>5/5/26</a:t>
+              <a:t>5/6/26</a:t>
             </a:fld>
             <a:endParaRPr lang="en-US"/>
           </a:p>
@@ -8919,7 +8919,7 @@
           <a:p>
             <a:fld id="{18462B0B-D248-4FFB-8695-AD7FA4B1284A}" type="datetime1">
               <a:rPr lang="en-US" smtClean="0"/>
-              <a:t>5/5/26</a:t>
+              <a:t>5/6/26</a:t>
             </a:fld>
             <a:endParaRPr lang="en-US"/>
           </a:p>
@@ -9342,7 +9342,7 @@
           <a:p>
             <a:fld id="{D0378EFB-9159-4510-B73F-4F0409ADE937}" type="datetime1">
               <a:rPr lang="en-US" smtClean="0"/>
-              <a:t>5/5/26</a:t>
+              <a:t>5/6/26</a:t>
             </a:fld>
             <a:endParaRPr lang="en-US"/>
           </a:p>
@@ -9484,7 +9484,7 @@
           <a:p>
             <a:fld id="{89BC9412-2452-4BED-A324-9D8C115361AD}" type="datetime1">
               <a:rPr lang="en-US" smtClean="0"/>
-              <a:t>5/5/26</a:t>
+              <a:t>5/6/26</a:t>
             </a:fld>
             <a:endParaRPr lang="en-US"/>
           </a:p>
@@ -9597,7 +9597,7 @@
           <a:p>
             <a:fld id="{F5318F62-D251-40E8-A23C-F4CFE9FEAB41}" type="datetime1">
               <a:rPr lang="en-US" smtClean="0"/>
-              <a:t>5/5/26</a:t>
+              <a:t>5/6/26</a:t>
             </a:fld>
             <a:endParaRPr lang="en-US"/>
           </a:p>
@@ -9910,7 +9910,7 @@
           <a:p>
             <a:fld id="{44F76144-149E-4874-93A5-554A0357CF82}" type="datetime1">
               <a:rPr lang="en-US" smtClean="0"/>
-              <a:t>5/5/26</a:t>
+              <a:t>5/6/26</a:t>
             </a:fld>
             <a:endParaRPr lang="en-US"/>
           </a:p>
@@ -10203,7 +10203,7 @@
           <a:p>
             <a:fld id="{50BA65D8-0540-4835-AE5C-25D29DBA01BE}" type="datetime1">
               <a:rPr lang="en-US" smtClean="0"/>
-              <a:t>5/5/26</a:t>
+              <a:t>5/6/26</a:t>
             </a:fld>
             <a:endParaRPr lang="en-US"/>
           </a:p>
@@ -10445,7 +10445,7 @@
           <a:p>
             <a:fld id="{E31BA835-12AC-4E8F-955A-EA3F4DE2791F}" type="datetime1">
               <a:rPr lang="en-US" smtClean="0"/>
-              <a:t>5/5/26</a:t>
+              <a:t>5/6/26</a:t>
             </a:fld>
             <a:endParaRPr lang="en-US"/>
           </a:p>
@@ -37588,6 +37588,36 @@
           </a:p>
         </p:txBody>
       </p:sp>
+      <p:pic>
+        <p:nvPicPr>
+          <p:cNvPr id="3" name="Picture 2">
+            <a:extLst>
+              <a:ext uri="{FF2B5EF4-FFF2-40B4-BE49-F238E27FC236}">
+                <a16:creationId xmlns:a16="http://schemas.microsoft.com/office/drawing/2014/main" id="{D901BF44-95ED-710A-6669-F9C530F536DA}"/>
+              </a:ext>
+            </a:extLst>
+          </p:cNvPr>
+          <p:cNvPicPr>
+            <a:picLocks noChangeAspect="1"/>
+          </p:cNvPicPr>
+          <p:nvPr/>
+        </p:nvPicPr>
+        <p:blipFill>
+          <a:blip r:embed="rId3"/>
+          <a:stretch>
+            <a:fillRect/>
+          </a:stretch>
+        </p:blipFill>
+        <p:spPr>
+          <a:xfrm>
+            <a:off x="794574" y="2074892"/>
+            <a:ext cx="5072936" cy="3875674"/>
+          </a:xfrm>
+          <a:prstGeom prst="rect">
+            <a:avLst/>
+          </a:prstGeom>
+        </p:spPr>
+      </p:pic>
     </p:spTree>
     <p:extLst>
       <p:ext uri="{BB962C8B-B14F-4D97-AF65-F5344CB8AC3E}">
@@ -38035,7 +38065,10 @@
           <a:bodyPr/>
           <a:lstStyle/>
           <a:p>
-            <a:endParaRPr lang="en-US" dirty="0"/>
+            <a:r>
+              <a:rPr lang="en-US" dirty="0"/>
+              <a:t>Possible limitations</a:t>
+            </a:r>
           </a:p>
         </p:txBody>
       </p:sp>
@@ -38060,7 +38093,48 @@
           <a:bodyPr/>
           <a:lstStyle/>
           <a:p>
-            <a:endParaRPr lang="en-US"/>
+            <a:r>
+              <a:rPr lang="en-US" dirty="0"/>
+              <a:t>The TCT model’s performance is not mathematically justified, as its components, </a:t>
+            </a:r>
+            <a:r>
+              <a:rPr lang="en-US" dirty="0" err="1"/>
+              <a:t>ViT</a:t>
+            </a:r>
+            <a:r>
+              <a:rPr lang="en-US" dirty="0"/>
+              <a:t> and </a:t>
+            </a:r>
+            <a:r>
+              <a:rPr lang="en-US" dirty="0" err="1"/>
+              <a:t>CRTNet</a:t>
+            </a:r>
+            <a:r>
+              <a:rPr lang="en-US" dirty="0"/>
+              <a:t>, are trained on different datasets and are linked only through a global modulation operation.</a:t>
+            </a:r>
+          </a:p>
+          <a:p>
+            <a:r>
+              <a:rPr lang="en-US" dirty="0"/>
+              <a:t>The selected </a:t>
+            </a:r>
+            <a:r>
+              <a:rPr lang="en-US" dirty="0" err="1"/>
+              <a:t>last_n_layers</a:t>
+            </a:r>
+            <a:r>
+              <a:rPr lang="en-US" dirty="0"/>
+              <a:t> for the local modulation operation, and the selected encoding layer for global modulation are produced from an iterative process rather than rationally or </a:t>
+            </a:r>
+            <a:r>
+              <a:rPr lang="en-US"/>
+              <a:t>intuitively selected.</a:t>
+            </a:r>
+            <a:endParaRPr lang="en-US" dirty="0"/>
+          </a:p>
+          <a:p>
+            <a:endParaRPr lang="en-US" dirty="0"/>
           </a:p>
         </p:txBody>
       </p:sp>

--- a/Presentation/FYP_NguyenTuan_Presentation.pptx
+++ b/Presentation/FYP_NguyenTuan_Presentation.pptx
@@ -38125,13 +38125,16 @@
             </a:r>
             <a:r>
               <a:rPr lang="en-US" dirty="0"/>
-              <a:t> for the local modulation operation, and the selected encoding layer for global modulation are produced from an iterative process rather than rationally or </a:t>
+              <a:t> for the local modulation operation, and the selected encoding layer for global modulation </a:t>
             </a:r>
             <a:r>
               <a:rPr lang="en-US"/>
-              <a:t>intuitively selected.</a:t>
-            </a:r>
-            <a:endParaRPr lang="en-US" dirty="0"/>
+              <a:t>are chosen </a:t>
+            </a:r>
+            <a:r>
+              <a:rPr lang="en-US" dirty="0"/>
+              <a:t>from an iterative process rather than rationally or intuitively selected.</a:t>
+            </a:r>
           </a:p>
           <a:p>
             <a:endParaRPr lang="en-US" dirty="0"/>

--- a/Presentation/FYP_NguyenTuan_Presentation.pptx
+++ b/Presentation/FYP_NguyenTuan_Presentation.pptx
@@ -5,7 +5,7 @@
     <p:sldMasterId id="2147483863" r:id="rId1"/>
   </p:sldMasterIdLst>
   <p:notesMasterIdLst>
-    <p:notesMasterId r:id="rId51"/>
+    <p:notesMasterId r:id="rId53"/>
   </p:notesMasterIdLst>
   <p:sldIdLst>
     <p:sldId id="256" r:id="rId2"/>
@@ -57,6 +57,8 @@
     <p:sldId id="303" r:id="rId48"/>
     <p:sldId id="304" r:id="rId49"/>
     <p:sldId id="305" r:id="rId50"/>
+    <p:sldId id="306" r:id="rId51"/>
+    <p:sldId id="307" r:id="rId52"/>
   </p:sldIdLst>
   <p:sldSz cx="12192000" cy="6858000"/>
   <p:notesSz cx="6858000" cy="9144000"/>
@@ -38125,15 +38127,7 @@
             </a:r>
             <a:r>
               <a:rPr lang="en-US" dirty="0"/>
-              <a:t> for the local modulation operation, and the selected encoding layer for global modulation </a:t>
-            </a:r>
-            <a:r>
-              <a:rPr lang="en-US"/>
-              <a:t>are chosen </a:t>
-            </a:r>
-            <a:r>
-              <a:rPr lang="en-US" dirty="0"/>
-              <a:t>from an iterative process rather than rationally or intuitively selected.</a:t>
+              <a:t> for the local modulation operation, and the selected encoding layer for global modulation are chosen from an iterative process rather than rationally or intuitively selected.</a:t>
             </a:r>
           </a:p>
           <a:p>
@@ -38490,6 +38484,174 @@
     <p:extLst>
       <p:ext uri="{BB962C8B-B14F-4D97-AF65-F5344CB8AC3E}">
         <p14:creationId xmlns:p14="http://schemas.microsoft.com/office/powerpoint/2010/main" val="3410865117"/>
+      </p:ext>
+    </p:extLst>
+  </p:cSld>
+  <p:clrMapOvr>
+    <a:masterClrMapping/>
+  </p:clrMapOvr>
+</p:sld>
+</file>
+
+<file path=ppt/slides/slide50.xml><?xml version="1.0" encoding="utf-8"?>
+<p:sld xmlns:a="http://schemas.openxmlformats.org/drawingml/2006/main" xmlns:r="http://schemas.openxmlformats.org/officeDocument/2006/relationships" xmlns:p="http://schemas.openxmlformats.org/presentationml/2006/main">
+  <p:cSld>
+    <p:spTree>
+      <p:nvGrpSpPr>
+        <p:cNvPr id="1" name=""/>
+        <p:cNvGrpSpPr/>
+        <p:nvPr/>
+      </p:nvGrpSpPr>
+      <p:grpSpPr>
+        <a:xfrm>
+          <a:off x="0" y="0"/>
+          <a:ext cx="0" cy="0"/>
+          <a:chOff x="0" y="0"/>
+          <a:chExt cx="0" cy="0"/>
+        </a:xfrm>
+      </p:grpSpPr>
+      <p:sp>
+        <p:nvSpPr>
+          <p:cNvPr id="2" name="Title 1">
+            <a:extLst>
+              <a:ext uri="{FF2B5EF4-FFF2-40B4-BE49-F238E27FC236}">
+                <a16:creationId xmlns:a16="http://schemas.microsoft.com/office/drawing/2014/main" id="{C5E9287F-7F7B-3561-9F20-DFD2F7A636EE}"/>
+              </a:ext>
+            </a:extLst>
+          </p:cNvPr>
+          <p:cNvSpPr>
+            <a:spLocks noGrp="1"/>
+          </p:cNvSpPr>
+          <p:nvPr>
+            <p:ph type="title"/>
+          </p:nvPr>
+        </p:nvSpPr>
+        <p:spPr/>
+        <p:txBody>
+          <a:bodyPr/>
+          <a:lstStyle/>
+          <a:p>
+            <a:r>
+              <a:rPr lang="en-US" dirty="0"/>
+              <a:t>Contributions</a:t>
+            </a:r>
+          </a:p>
+        </p:txBody>
+      </p:sp>
+      <p:sp>
+        <p:nvSpPr>
+          <p:cNvPr id="3" name="Content Placeholder 2">
+            <a:extLst>
+              <a:ext uri="{FF2B5EF4-FFF2-40B4-BE49-F238E27FC236}">
+                <a16:creationId xmlns:a16="http://schemas.microsoft.com/office/drawing/2014/main" id="{63C45F31-C064-0B82-959A-2BF82FE23711}"/>
+              </a:ext>
+            </a:extLst>
+          </p:cNvPr>
+          <p:cNvSpPr>
+            <a:spLocks noGrp="1"/>
+          </p:cNvSpPr>
+          <p:nvPr>
+            <p:ph idx="1"/>
+          </p:nvPr>
+        </p:nvSpPr>
+        <p:spPr/>
+        <p:txBody>
+          <a:bodyPr/>
+          <a:lstStyle/>
+          <a:p>
+            <a:endParaRPr lang="en-US" dirty="0"/>
+          </a:p>
+        </p:txBody>
+      </p:sp>
+    </p:spTree>
+    <p:extLst>
+      <p:ext uri="{BB962C8B-B14F-4D97-AF65-F5344CB8AC3E}">
+        <p14:creationId xmlns:p14="http://schemas.microsoft.com/office/powerpoint/2010/main" val="2616107221"/>
+      </p:ext>
+    </p:extLst>
+  </p:cSld>
+  <p:clrMapOvr>
+    <a:masterClrMapping/>
+  </p:clrMapOvr>
+</p:sld>
+</file>
+
+<file path=ppt/slides/slide51.xml><?xml version="1.0" encoding="utf-8"?>
+<p:sld xmlns:a="http://schemas.openxmlformats.org/drawingml/2006/main" xmlns:r="http://schemas.openxmlformats.org/officeDocument/2006/relationships" xmlns:p="http://schemas.openxmlformats.org/presentationml/2006/main">
+  <p:cSld>
+    <p:spTree>
+      <p:nvGrpSpPr>
+        <p:cNvPr id="1" name=""/>
+        <p:cNvGrpSpPr/>
+        <p:nvPr/>
+      </p:nvGrpSpPr>
+      <p:grpSpPr>
+        <a:xfrm>
+          <a:off x="0" y="0"/>
+          <a:ext cx="0" cy="0"/>
+          <a:chOff x="0" y="0"/>
+          <a:chExt cx="0" cy="0"/>
+        </a:xfrm>
+      </p:grpSpPr>
+      <p:sp>
+        <p:nvSpPr>
+          <p:cNvPr id="2" name="Title 1">
+            <a:extLst>
+              <a:ext uri="{FF2B5EF4-FFF2-40B4-BE49-F238E27FC236}">
+                <a16:creationId xmlns:a16="http://schemas.microsoft.com/office/drawing/2014/main" id="{810517D6-91D9-8FCC-8223-6095F765033C}"/>
+              </a:ext>
+            </a:extLst>
+          </p:cNvPr>
+          <p:cNvSpPr>
+            <a:spLocks noGrp="1"/>
+          </p:cNvSpPr>
+          <p:nvPr>
+            <p:ph type="title"/>
+          </p:nvPr>
+        </p:nvSpPr>
+        <p:spPr/>
+        <p:txBody>
+          <a:bodyPr>
+            <a:normAutofit/>
+          </a:bodyPr>
+          <a:lstStyle/>
+          <a:p>
+            <a:r>
+              <a:rPr lang="en-US"/>
+              <a:t>Future directions</a:t>
+            </a:r>
+          </a:p>
+        </p:txBody>
+      </p:sp>
+      <p:sp>
+        <p:nvSpPr>
+          <p:cNvPr id="3" name="Content Placeholder 2">
+            <a:extLst>
+              <a:ext uri="{FF2B5EF4-FFF2-40B4-BE49-F238E27FC236}">
+                <a16:creationId xmlns:a16="http://schemas.microsoft.com/office/drawing/2014/main" id="{ABE5707E-35C8-C2DC-478D-5969AD8C01AC}"/>
+              </a:ext>
+            </a:extLst>
+          </p:cNvPr>
+          <p:cNvSpPr>
+            <a:spLocks noGrp="1"/>
+          </p:cNvSpPr>
+          <p:nvPr>
+            <p:ph idx="1"/>
+          </p:nvPr>
+        </p:nvSpPr>
+        <p:spPr/>
+        <p:txBody>
+          <a:bodyPr/>
+          <a:lstStyle/>
+          <a:p>
+            <a:endParaRPr lang="en-US"/>
+          </a:p>
+        </p:txBody>
+      </p:sp>
+    </p:spTree>
+    <p:extLst>
+      <p:ext uri="{BB962C8B-B14F-4D97-AF65-F5344CB8AC3E}">
+        <p14:creationId xmlns:p14="http://schemas.microsoft.com/office/powerpoint/2010/main" val="1366780318"/>
       </p:ext>
     </p:extLst>
   </p:cSld>

--- a/Presentation/FYP_NguyenTuan_Presentation.pptx
+++ b/Presentation/FYP_NguyenTuan_Presentation.pptx
@@ -38617,7 +38617,7 @@
           <a:lstStyle/>
           <a:p>
             <a:r>
-              <a:rPr lang="en-US"/>
+              <a:rPr lang="en-US" dirty="0"/>
               <a:t>Future directions</a:t>
             </a:r>
           </a:p>
@@ -38644,7 +38644,7 @@
           <a:bodyPr/>
           <a:lstStyle/>
           <a:p>
-            <a:endParaRPr lang="en-US"/>
+            <a:endParaRPr lang="en-US" dirty="0"/>
           </a:p>
         </p:txBody>
       </p:sp>

--- a/Presentation/FYP_NguyenTuan_Presentation.pptx
+++ b/Presentation/FYP_NguyenTuan_Presentation.pptx
@@ -1281,7 +1281,7 @@
   <dgm:whole/>
   <dgm:extLst>
     <a:ext uri="http://schemas.microsoft.com/office/drawing/2008/diagram">
-      <dsp:dataModelExt xmlns:dsp="http://schemas.microsoft.com/office/drawing/2008/diagram" relId="rId6" minVer="http://schemas.openxmlformats.org/drawingml/2006/diagram"/>
+      <dsp:dataModelExt xmlns:dsp="http://schemas.microsoft.com/office/drawing/2008/diagram" relId="rId7" minVer="http://schemas.openxmlformats.org/drawingml/2006/diagram"/>
     </a:ext>
   </dgm:extLst>
 </dgm:dataModel>
@@ -3633,7 +3633,7 @@
           <a:p>
             <a:fld id="{9A9C0C59-185E-874E-8468-6092D83992DA}" type="datetimeFigureOut">
               <a:rPr lang="en-US" smtClean="0"/>
-              <a:t>5/6/26</a:t>
+              <a:t>5/7/26</a:t>
             </a:fld>
             <a:endParaRPr lang="en-US"/>
           </a:p>
@@ -3945,7 +3945,10 @@
           <a:bodyPr/>
           <a:lstStyle/>
           <a:p>
-            <a:endParaRPr lang="en-US" dirty="0"/>
+            <a:r>
+              <a:rPr lang="en-US" dirty="0"/>
+              <a:t>Good Afternoon, Prof. Zhang Mengmi and Prof. Lim Wei Yang Bryan to my FYP presentation about Target and Context Aware Transformer for visual search task</a:t>
+            </a:r>
           </a:p>
         </p:txBody>
       </p:sp>
@@ -3966,7 +3969,7 @@
           <a:p>
             <a:fld id="{7332F5B2-8E9E-A043-910C-D623E320FEF5}" type="slidenum">
               <a:rPr lang="en-US" smtClean="0"/>
-              <a:t>5</a:t>
+              <a:t>1</a:t>
             </a:fld>
             <a:endParaRPr lang="en-US"/>
           </a:p>
@@ -3975,7 +3978,7 @@
     </p:spTree>
     <p:extLst>
       <p:ext uri="{BB962C8B-B14F-4D97-AF65-F5344CB8AC3E}">
-        <p14:creationId xmlns:p14="http://schemas.microsoft.com/office/powerpoint/2010/main" val="2023858777"/>
+        <p14:creationId xmlns:p14="http://schemas.microsoft.com/office/powerpoint/2010/main" val="1069812861"/>
       </p:ext>
     </p:extLst>
   </p:cSld>
@@ -3986,6 +3989,876 @@
 </file>
 
 <file path=ppt/notesSlides/notesSlide10.xml><?xml version="1.0" encoding="utf-8"?>
+<p:notes xmlns:a="http://schemas.openxmlformats.org/drawingml/2006/main" xmlns:r="http://schemas.openxmlformats.org/officeDocument/2006/relationships" xmlns:p="http://schemas.openxmlformats.org/presentationml/2006/main">
+  <p:cSld>
+    <p:spTree>
+      <p:nvGrpSpPr>
+        <p:cNvPr id="1" name="">
+          <a:extLst>
+            <a:ext uri="{FF2B5EF4-FFF2-40B4-BE49-F238E27FC236}">
+              <a16:creationId xmlns:a16="http://schemas.microsoft.com/office/drawing/2014/main" id="{506E42DE-5F9C-0613-96F9-183D0FD015ED}"/>
+            </a:ext>
+          </a:extLst>
+        </p:cNvPr>
+        <p:cNvGrpSpPr/>
+        <p:nvPr/>
+      </p:nvGrpSpPr>
+      <p:grpSpPr>
+        <a:xfrm>
+          <a:off x="0" y="0"/>
+          <a:ext cx="0" cy="0"/>
+          <a:chOff x="0" y="0"/>
+          <a:chExt cx="0" cy="0"/>
+        </a:xfrm>
+      </p:grpSpPr>
+      <p:sp>
+        <p:nvSpPr>
+          <p:cNvPr id="2" name="Slide Image Placeholder 1">
+            <a:extLst>
+              <a:ext uri="{FF2B5EF4-FFF2-40B4-BE49-F238E27FC236}">
+                <a16:creationId xmlns:a16="http://schemas.microsoft.com/office/drawing/2014/main" id="{9746CE30-EA71-0879-EE45-9DBA6960CBB5}"/>
+              </a:ext>
+            </a:extLst>
+          </p:cNvPr>
+          <p:cNvSpPr>
+            <a:spLocks noGrp="1" noRot="1" noChangeAspect="1"/>
+          </p:cNvSpPr>
+          <p:nvPr>
+            <p:ph type="sldImg"/>
+          </p:nvPr>
+        </p:nvSpPr>
+        <p:spPr/>
+      </p:sp>
+      <p:sp>
+        <p:nvSpPr>
+          <p:cNvPr id="3" name="Notes Placeholder 2">
+            <a:extLst>
+              <a:ext uri="{FF2B5EF4-FFF2-40B4-BE49-F238E27FC236}">
+                <a16:creationId xmlns:a16="http://schemas.microsoft.com/office/drawing/2014/main" id="{749E5360-5E8D-4250-DCD5-2E6206E05A88}"/>
+              </a:ext>
+            </a:extLst>
+          </p:cNvPr>
+          <p:cNvSpPr>
+            <a:spLocks noGrp="1"/>
+          </p:cNvSpPr>
+          <p:nvPr>
+            <p:ph type="body" idx="1"/>
+          </p:nvPr>
+        </p:nvSpPr>
+        <p:spPr/>
+        <p:txBody>
+          <a:bodyPr/>
+          <a:lstStyle/>
+          <a:p>
+            <a:r>
+              <a:rPr lang="en-US" dirty="0"/>
+              <a:t>In 1984, Posner and his partner Cohen discovered Inhibition of Return which prevent human from revisiting attended area.</a:t>
+            </a:r>
+          </a:p>
+          <a:p>
+            <a:endParaRPr lang="en-US" dirty="0"/>
+          </a:p>
+          <a:p>
+            <a:r>
+              <a:rPr lang="en-US" dirty="0"/>
+              <a:t>They proposed that the Inhibited area is located in the mental map rather than in the retinotopic coordinates inside our eyes.</a:t>
+            </a:r>
+          </a:p>
+          <a:p>
+            <a:endParaRPr lang="en-US" dirty="0"/>
+          </a:p>
+          <a:p>
+            <a:r>
+              <a:rPr lang="en-US" dirty="0"/>
+              <a:t>Their finding laid the foundation for bio-inspired DNN visual search model</a:t>
+            </a:r>
+          </a:p>
+          <a:p>
+            <a:endParaRPr lang="en-US" dirty="0"/>
+          </a:p>
+          <a:p>
+            <a:r>
+              <a:rPr lang="en-US" dirty="0"/>
+              <a:t>It is regarded as IOR, which is embedded into every visual search model to prevent them from revisiting the attended area.</a:t>
+            </a:r>
+          </a:p>
+        </p:txBody>
+      </p:sp>
+      <p:sp>
+        <p:nvSpPr>
+          <p:cNvPr id="4" name="Slide Number Placeholder 3">
+            <a:extLst>
+              <a:ext uri="{FF2B5EF4-FFF2-40B4-BE49-F238E27FC236}">
+                <a16:creationId xmlns:a16="http://schemas.microsoft.com/office/drawing/2014/main" id="{1A1937DC-7868-5AF0-5F6D-6E8E376073DA}"/>
+              </a:ext>
+            </a:extLst>
+          </p:cNvPr>
+          <p:cNvSpPr>
+            <a:spLocks noGrp="1"/>
+          </p:cNvSpPr>
+          <p:nvPr>
+            <p:ph type="sldNum" sz="quarter" idx="5"/>
+          </p:nvPr>
+        </p:nvSpPr>
+        <p:spPr/>
+        <p:txBody>
+          <a:bodyPr/>
+          <a:lstStyle/>
+          <a:p>
+            <a:fld id="{7332F5B2-8E9E-A043-910C-D623E320FEF5}" type="slidenum">
+              <a:rPr lang="en-US" smtClean="0"/>
+              <a:t>10</a:t>
+            </a:fld>
+            <a:endParaRPr lang="en-US"/>
+          </a:p>
+        </p:txBody>
+      </p:sp>
+    </p:spTree>
+    <p:extLst>
+      <p:ext uri="{BB962C8B-B14F-4D97-AF65-F5344CB8AC3E}">
+        <p14:creationId xmlns:p14="http://schemas.microsoft.com/office/powerpoint/2010/main" val="1056342112"/>
+      </p:ext>
+    </p:extLst>
+  </p:cSld>
+  <p:clrMapOvr>
+    <a:masterClrMapping/>
+  </p:clrMapOvr>
+</p:notes>
+</file>
+
+<file path=ppt/notesSlides/notesSlide11.xml><?xml version="1.0" encoding="utf-8"?>
+<p:notes xmlns:a="http://schemas.openxmlformats.org/drawingml/2006/main" xmlns:r="http://schemas.openxmlformats.org/officeDocument/2006/relationships" xmlns:p="http://schemas.openxmlformats.org/presentationml/2006/main">
+  <p:cSld>
+    <p:spTree>
+      <p:nvGrpSpPr>
+        <p:cNvPr id="1" name="">
+          <a:extLst>
+            <a:ext uri="{FF2B5EF4-FFF2-40B4-BE49-F238E27FC236}">
+              <a16:creationId xmlns:a16="http://schemas.microsoft.com/office/drawing/2014/main" id="{043F1EAC-B71B-FDE6-27B5-1160AB6CF74E}"/>
+            </a:ext>
+          </a:extLst>
+        </p:cNvPr>
+        <p:cNvGrpSpPr/>
+        <p:nvPr/>
+      </p:nvGrpSpPr>
+      <p:grpSpPr>
+        <a:xfrm>
+          <a:off x="0" y="0"/>
+          <a:ext cx="0" cy="0"/>
+          <a:chOff x="0" y="0"/>
+          <a:chExt cx="0" cy="0"/>
+        </a:xfrm>
+      </p:grpSpPr>
+      <p:sp>
+        <p:nvSpPr>
+          <p:cNvPr id="2" name="Slide Image Placeholder 1">
+            <a:extLst>
+              <a:ext uri="{FF2B5EF4-FFF2-40B4-BE49-F238E27FC236}">
+                <a16:creationId xmlns:a16="http://schemas.microsoft.com/office/drawing/2014/main" id="{698D243A-8815-03A6-E882-F43ABEC0C9EC}"/>
+              </a:ext>
+            </a:extLst>
+          </p:cNvPr>
+          <p:cNvSpPr>
+            <a:spLocks noGrp="1" noRot="1" noChangeAspect="1"/>
+          </p:cNvSpPr>
+          <p:nvPr>
+            <p:ph type="sldImg"/>
+          </p:nvPr>
+        </p:nvSpPr>
+        <p:spPr/>
+      </p:sp>
+      <p:sp>
+        <p:nvSpPr>
+          <p:cNvPr id="3" name="Notes Placeholder 2">
+            <a:extLst>
+              <a:ext uri="{FF2B5EF4-FFF2-40B4-BE49-F238E27FC236}">
+                <a16:creationId xmlns:a16="http://schemas.microsoft.com/office/drawing/2014/main" id="{401F77F9-2814-84C2-573F-53A4D07E5FB0}"/>
+              </a:ext>
+            </a:extLst>
+          </p:cNvPr>
+          <p:cNvSpPr>
+            <a:spLocks noGrp="1"/>
+          </p:cNvSpPr>
+          <p:nvPr>
+            <p:ph type="body" idx="1"/>
+          </p:nvPr>
+        </p:nvSpPr>
+        <p:spPr/>
+        <p:txBody>
+          <a:bodyPr/>
+          <a:lstStyle/>
+          <a:p>
+            <a:r>
+              <a:rPr lang="en-US" dirty="0"/>
+              <a:t>In 1994, Wolfe reconstruct a conceptual model to demonstrate the theory of combination of bottom-up and top-down approach</a:t>
+            </a:r>
+          </a:p>
+          <a:p>
+            <a:endParaRPr lang="en-US" dirty="0"/>
+          </a:p>
+          <a:p>
+            <a:r>
+              <a:rPr lang="en-US" dirty="0"/>
+              <a:t>The model can illustrate and emphasis the role of each approach:</a:t>
+            </a:r>
+          </a:p>
+          <a:p>
+            <a:r>
+              <a:rPr lang="en-US" dirty="0"/>
+              <a:t>The bottom-up approach help human to distinguish item from each other</a:t>
+            </a:r>
+          </a:p>
+          <a:p>
+            <a:r>
+              <a:rPr lang="en-US" dirty="0"/>
+              <a:t>The top-down approach help human to find similarity between item and guide the search process</a:t>
+            </a:r>
+          </a:p>
+          <a:p>
+            <a:endParaRPr lang="en-US" dirty="0"/>
+          </a:p>
+          <a:p>
+            <a:r>
+              <a:rPr lang="en-US" dirty="0"/>
+              <a:t>The combination of both build a weighted map rather than equally summed </a:t>
+            </a:r>
+          </a:p>
+        </p:txBody>
+      </p:sp>
+      <p:sp>
+        <p:nvSpPr>
+          <p:cNvPr id="4" name="Slide Number Placeholder 3">
+            <a:extLst>
+              <a:ext uri="{FF2B5EF4-FFF2-40B4-BE49-F238E27FC236}">
+                <a16:creationId xmlns:a16="http://schemas.microsoft.com/office/drawing/2014/main" id="{8FE64EC1-7751-E5EF-DAF8-BAC5868CDAAE}"/>
+              </a:ext>
+            </a:extLst>
+          </p:cNvPr>
+          <p:cNvSpPr>
+            <a:spLocks noGrp="1"/>
+          </p:cNvSpPr>
+          <p:nvPr>
+            <p:ph type="sldNum" sz="quarter" idx="5"/>
+          </p:nvPr>
+        </p:nvSpPr>
+        <p:spPr/>
+        <p:txBody>
+          <a:bodyPr/>
+          <a:lstStyle/>
+          <a:p>
+            <a:fld id="{7332F5B2-8E9E-A043-910C-D623E320FEF5}" type="slidenum">
+              <a:rPr lang="en-US" smtClean="0"/>
+              <a:t>11</a:t>
+            </a:fld>
+            <a:endParaRPr lang="en-US"/>
+          </a:p>
+        </p:txBody>
+      </p:sp>
+    </p:spTree>
+    <p:extLst>
+      <p:ext uri="{BB962C8B-B14F-4D97-AF65-F5344CB8AC3E}">
+        <p14:creationId xmlns:p14="http://schemas.microsoft.com/office/powerpoint/2010/main" val="2802333760"/>
+      </p:ext>
+    </p:extLst>
+  </p:cSld>
+  <p:clrMapOvr>
+    <a:masterClrMapping/>
+  </p:clrMapOvr>
+</p:notes>
+</file>
+
+<file path=ppt/notesSlides/notesSlide12.xml><?xml version="1.0" encoding="utf-8"?>
+<p:notes xmlns:a="http://schemas.openxmlformats.org/drawingml/2006/main" xmlns:r="http://schemas.openxmlformats.org/officeDocument/2006/relationships" xmlns:p="http://schemas.openxmlformats.org/presentationml/2006/main">
+  <p:cSld>
+    <p:spTree>
+      <p:nvGrpSpPr>
+        <p:cNvPr id="1" name="">
+          <a:extLst>
+            <a:ext uri="{FF2B5EF4-FFF2-40B4-BE49-F238E27FC236}">
+              <a16:creationId xmlns:a16="http://schemas.microsoft.com/office/drawing/2014/main" id="{B340B700-F042-2921-1CD0-4E009C048028}"/>
+            </a:ext>
+          </a:extLst>
+        </p:cNvPr>
+        <p:cNvGrpSpPr/>
+        <p:nvPr/>
+      </p:nvGrpSpPr>
+      <p:grpSpPr>
+        <a:xfrm>
+          <a:off x="0" y="0"/>
+          <a:ext cx="0" cy="0"/>
+          <a:chOff x="0" y="0"/>
+          <a:chExt cx="0" cy="0"/>
+        </a:xfrm>
+      </p:grpSpPr>
+      <p:sp>
+        <p:nvSpPr>
+          <p:cNvPr id="2" name="Slide Image Placeholder 1">
+            <a:extLst>
+              <a:ext uri="{FF2B5EF4-FFF2-40B4-BE49-F238E27FC236}">
+                <a16:creationId xmlns:a16="http://schemas.microsoft.com/office/drawing/2014/main" id="{91599BDB-7D43-A81B-32BE-F44845555664}"/>
+              </a:ext>
+            </a:extLst>
+          </p:cNvPr>
+          <p:cNvSpPr>
+            <a:spLocks noGrp="1" noRot="1" noChangeAspect="1"/>
+          </p:cNvSpPr>
+          <p:nvPr>
+            <p:ph type="sldImg"/>
+          </p:nvPr>
+        </p:nvSpPr>
+        <p:spPr/>
+      </p:sp>
+      <p:sp>
+        <p:nvSpPr>
+          <p:cNvPr id="3" name="Notes Placeholder 2">
+            <a:extLst>
+              <a:ext uri="{FF2B5EF4-FFF2-40B4-BE49-F238E27FC236}">
+                <a16:creationId xmlns:a16="http://schemas.microsoft.com/office/drawing/2014/main" id="{FA7184F4-289C-16FC-E762-D4E4A65BD7E6}"/>
+              </a:ext>
+            </a:extLst>
+          </p:cNvPr>
+          <p:cNvSpPr>
+            <a:spLocks noGrp="1"/>
+          </p:cNvSpPr>
+          <p:nvPr>
+            <p:ph type="body" idx="1"/>
+          </p:nvPr>
+        </p:nvSpPr>
+        <p:spPr/>
+        <p:txBody>
+          <a:bodyPr/>
+          <a:lstStyle/>
+          <a:p>
+            <a:r>
+              <a:rPr lang="en-US" dirty="0"/>
+              <a:t>We can clearly see different path but they are combined together to build an attention map to overlay the search scene</a:t>
+            </a:r>
+          </a:p>
+        </p:txBody>
+      </p:sp>
+      <p:sp>
+        <p:nvSpPr>
+          <p:cNvPr id="4" name="Slide Number Placeholder 3">
+            <a:extLst>
+              <a:ext uri="{FF2B5EF4-FFF2-40B4-BE49-F238E27FC236}">
+                <a16:creationId xmlns:a16="http://schemas.microsoft.com/office/drawing/2014/main" id="{0CA0BAF2-F186-03B4-3234-75EBAA42D2BF}"/>
+              </a:ext>
+            </a:extLst>
+          </p:cNvPr>
+          <p:cNvSpPr>
+            <a:spLocks noGrp="1"/>
+          </p:cNvSpPr>
+          <p:nvPr>
+            <p:ph type="sldNum" sz="quarter" idx="5"/>
+          </p:nvPr>
+        </p:nvSpPr>
+        <p:spPr/>
+        <p:txBody>
+          <a:bodyPr/>
+          <a:lstStyle/>
+          <a:p>
+            <a:fld id="{7332F5B2-8E9E-A043-910C-D623E320FEF5}" type="slidenum">
+              <a:rPr lang="en-US" smtClean="0"/>
+              <a:t>12</a:t>
+            </a:fld>
+            <a:endParaRPr lang="en-US"/>
+          </a:p>
+        </p:txBody>
+      </p:sp>
+    </p:spTree>
+    <p:extLst>
+      <p:ext uri="{BB962C8B-B14F-4D97-AF65-F5344CB8AC3E}">
+        <p14:creationId xmlns:p14="http://schemas.microsoft.com/office/powerpoint/2010/main" val="14193327"/>
+      </p:ext>
+    </p:extLst>
+  </p:cSld>
+  <p:clrMapOvr>
+    <a:masterClrMapping/>
+  </p:clrMapOvr>
+</p:notes>
+</file>
+
+<file path=ppt/notesSlides/notesSlide13.xml><?xml version="1.0" encoding="utf-8"?>
+<p:notes xmlns:a="http://schemas.openxmlformats.org/drawingml/2006/main" xmlns:r="http://schemas.openxmlformats.org/officeDocument/2006/relationships" xmlns:p="http://schemas.openxmlformats.org/presentationml/2006/main">
+  <p:cSld>
+    <p:spTree>
+      <p:nvGrpSpPr>
+        <p:cNvPr id="1" name="">
+          <a:extLst>
+            <a:ext uri="{FF2B5EF4-FFF2-40B4-BE49-F238E27FC236}">
+              <a16:creationId xmlns:a16="http://schemas.microsoft.com/office/drawing/2014/main" id="{3E9361E3-A865-728E-7FBF-6F571D5CC1E9}"/>
+            </a:ext>
+          </a:extLst>
+        </p:cNvPr>
+        <p:cNvGrpSpPr/>
+        <p:nvPr/>
+      </p:nvGrpSpPr>
+      <p:grpSpPr>
+        <a:xfrm>
+          <a:off x="0" y="0"/>
+          <a:ext cx="0" cy="0"/>
+          <a:chOff x="0" y="0"/>
+          <a:chExt cx="0" cy="0"/>
+        </a:xfrm>
+      </p:grpSpPr>
+      <p:sp>
+        <p:nvSpPr>
+          <p:cNvPr id="2" name="Slide Image Placeholder 1">
+            <a:extLst>
+              <a:ext uri="{FF2B5EF4-FFF2-40B4-BE49-F238E27FC236}">
+                <a16:creationId xmlns:a16="http://schemas.microsoft.com/office/drawing/2014/main" id="{A2CE31FD-4816-952F-E834-91B942FD4408}"/>
+              </a:ext>
+            </a:extLst>
+          </p:cNvPr>
+          <p:cNvSpPr>
+            <a:spLocks noGrp="1" noRot="1" noChangeAspect="1"/>
+          </p:cNvSpPr>
+          <p:nvPr>
+            <p:ph type="sldImg"/>
+          </p:nvPr>
+        </p:nvSpPr>
+        <p:spPr/>
+      </p:sp>
+      <p:sp>
+        <p:nvSpPr>
+          <p:cNvPr id="3" name="Notes Placeholder 2">
+            <a:extLst>
+              <a:ext uri="{FF2B5EF4-FFF2-40B4-BE49-F238E27FC236}">
+                <a16:creationId xmlns:a16="http://schemas.microsoft.com/office/drawing/2014/main" id="{97441665-3C04-54D7-EB5C-7613BFBE8CC6}"/>
+              </a:ext>
+            </a:extLst>
+          </p:cNvPr>
+          <p:cNvSpPr>
+            <a:spLocks noGrp="1"/>
+          </p:cNvSpPr>
+          <p:nvPr>
+            <p:ph type="body" idx="1"/>
+          </p:nvPr>
+        </p:nvSpPr>
+        <p:spPr/>
+        <p:txBody>
+          <a:bodyPr/>
+          <a:lstStyle/>
+          <a:p>
+            <a:r>
+              <a:rPr lang="en-US" dirty="0"/>
+              <a:t>In 1998, Chun &amp; Jiang proposed human required a visual context to guides the search process</a:t>
+            </a:r>
+          </a:p>
+          <a:p>
+            <a:endParaRPr lang="en-US" dirty="0"/>
+          </a:p>
+          <a:p>
+            <a:r>
+              <a:rPr lang="en-US" dirty="0"/>
+              <a:t>They argue that context could be learned implicitly from historical encounter which optimize the search process</a:t>
+            </a:r>
+          </a:p>
+          <a:p>
+            <a:endParaRPr lang="en-US" dirty="0"/>
+          </a:p>
+          <a:p>
+            <a:r>
+              <a:rPr lang="en-US" dirty="0"/>
+              <a:t>They conclude the model or an intelligence system without any learning mechanism is maladaptive to visual search task.</a:t>
+            </a:r>
+          </a:p>
+        </p:txBody>
+      </p:sp>
+      <p:sp>
+        <p:nvSpPr>
+          <p:cNvPr id="4" name="Slide Number Placeholder 3">
+            <a:extLst>
+              <a:ext uri="{FF2B5EF4-FFF2-40B4-BE49-F238E27FC236}">
+                <a16:creationId xmlns:a16="http://schemas.microsoft.com/office/drawing/2014/main" id="{5FC8637B-06CA-C46A-7E99-FDD289D46734}"/>
+              </a:ext>
+            </a:extLst>
+          </p:cNvPr>
+          <p:cNvSpPr>
+            <a:spLocks noGrp="1"/>
+          </p:cNvSpPr>
+          <p:nvPr>
+            <p:ph type="sldNum" sz="quarter" idx="5"/>
+          </p:nvPr>
+        </p:nvSpPr>
+        <p:spPr/>
+        <p:txBody>
+          <a:bodyPr/>
+          <a:lstStyle/>
+          <a:p>
+            <a:fld id="{7332F5B2-8E9E-A043-910C-D623E320FEF5}" type="slidenum">
+              <a:rPr lang="en-US" smtClean="0"/>
+              <a:t>13</a:t>
+            </a:fld>
+            <a:endParaRPr lang="en-US"/>
+          </a:p>
+        </p:txBody>
+      </p:sp>
+    </p:spTree>
+    <p:extLst>
+      <p:ext uri="{BB962C8B-B14F-4D97-AF65-F5344CB8AC3E}">
+        <p14:creationId xmlns:p14="http://schemas.microsoft.com/office/powerpoint/2010/main" val="2208211803"/>
+      </p:ext>
+    </p:extLst>
+  </p:cSld>
+  <p:clrMapOvr>
+    <a:masterClrMapping/>
+  </p:clrMapOvr>
+</p:notes>
+</file>
+
+<file path=ppt/notesSlides/notesSlide14.xml><?xml version="1.0" encoding="utf-8"?>
+<p:notes xmlns:a="http://schemas.openxmlformats.org/drawingml/2006/main" xmlns:r="http://schemas.openxmlformats.org/officeDocument/2006/relationships" xmlns:p="http://schemas.openxmlformats.org/presentationml/2006/main">
+  <p:cSld>
+    <p:spTree>
+      <p:nvGrpSpPr>
+        <p:cNvPr id="1" name="">
+          <a:extLst>
+            <a:ext uri="{FF2B5EF4-FFF2-40B4-BE49-F238E27FC236}">
+              <a16:creationId xmlns:a16="http://schemas.microsoft.com/office/drawing/2014/main" id="{12603533-2EEF-596A-5F46-9CAB8E8B2EF5}"/>
+            </a:ext>
+          </a:extLst>
+        </p:cNvPr>
+        <p:cNvGrpSpPr/>
+        <p:nvPr/>
+      </p:nvGrpSpPr>
+      <p:grpSpPr>
+        <a:xfrm>
+          <a:off x="0" y="0"/>
+          <a:ext cx="0" cy="0"/>
+          <a:chOff x="0" y="0"/>
+          <a:chExt cx="0" cy="0"/>
+        </a:xfrm>
+      </p:grpSpPr>
+      <p:sp>
+        <p:nvSpPr>
+          <p:cNvPr id="2" name="Slide Image Placeholder 1">
+            <a:extLst>
+              <a:ext uri="{FF2B5EF4-FFF2-40B4-BE49-F238E27FC236}">
+                <a16:creationId xmlns:a16="http://schemas.microsoft.com/office/drawing/2014/main" id="{B95FF3CB-49F5-5EDD-98D0-C5CE2FD027DC}"/>
+              </a:ext>
+            </a:extLst>
+          </p:cNvPr>
+          <p:cNvSpPr>
+            <a:spLocks noGrp="1" noRot="1" noChangeAspect="1"/>
+          </p:cNvSpPr>
+          <p:nvPr>
+            <p:ph type="sldImg"/>
+          </p:nvPr>
+        </p:nvSpPr>
+        <p:spPr/>
+      </p:sp>
+      <p:sp>
+        <p:nvSpPr>
+          <p:cNvPr id="3" name="Notes Placeholder 2">
+            <a:extLst>
+              <a:ext uri="{FF2B5EF4-FFF2-40B4-BE49-F238E27FC236}">
+                <a16:creationId xmlns:a16="http://schemas.microsoft.com/office/drawing/2014/main" id="{6ECCCB77-B320-EDFD-ADD3-8C3543F2D83F}"/>
+              </a:ext>
+            </a:extLst>
+          </p:cNvPr>
+          <p:cNvSpPr>
+            <a:spLocks noGrp="1"/>
+          </p:cNvSpPr>
+          <p:nvPr>
+            <p:ph type="body" idx="1"/>
+          </p:nvPr>
+        </p:nvSpPr>
+        <p:spPr/>
+        <p:txBody>
+          <a:bodyPr/>
+          <a:lstStyle/>
+          <a:p>
+            <a:r>
+              <a:rPr lang="en-US" dirty="0"/>
+              <a:t>Recently in 2021, Wolf refined his previous model and introduced a scene guidance mechanism</a:t>
+            </a:r>
+          </a:p>
+          <a:p>
+            <a:endParaRPr lang="en-US" dirty="0"/>
+          </a:p>
+          <a:p>
+            <a:r>
+              <a:rPr lang="en-US" dirty="0"/>
+              <a:t>There are 2 main types of guidance syntactic guidance and semantic guidance.</a:t>
+            </a:r>
+          </a:p>
+          <a:p>
+            <a:endParaRPr lang="en-US" dirty="0"/>
+          </a:p>
+          <a:p>
+            <a:r>
+              <a:rPr lang="en-US" dirty="0"/>
+              <a:t>We can see that Wolfe leveraged proposal from Chun &amp; Jiang in 1998 to refine his model.</a:t>
+            </a:r>
+          </a:p>
+        </p:txBody>
+      </p:sp>
+      <p:sp>
+        <p:nvSpPr>
+          <p:cNvPr id="4" name="Slide Number Placeholder 3">
+            <a:extLst>
+              <a:ext uri="{FF2B5EF4-FFF2-40B4-BE49-F238E27FC236}">
+                <a16:creationId xmlns:a16="http://schemas.microsoft.com/office/drawing/2014/main" id="{0B2D4B9F-781D-35AF-9C0F-EA0FBD3B2E14}"/>
+              </a:ext>
+            </a:extLst>
+          </p:cNvPr>
+          <p:cNvSpPr>
+            <a:spLocks noGrp="1"/>
+          </p:cNvSpPr>
+          <p:nvPr>
+            <p:ph type="sldNum" sz="quarter" idx="5"/>
+          </p:nvPr>
+        </p:nvSpPr>
+        <p:spPr/>
+        <p:txBody>
+          <a:bodyPr/>
+          <a:lstStyle/>
+          <a:p>
+            <a:fld id="{7332F5B2-8E9E-A043-910C-D623E320FEF5}" type="slidenum">
+              <a:rPr lang="en-US" smtClean="0"/>
+              <a:t>14</a:t>
+            </a:fld>
+            <a:endParaRPr lang="en-US"/>
+          </a:p>
+        </p:txBody>
+      </p:sp>
+    </p:spTree>
+    <p:extLst>
+      <p:ext uri="{BB962C8B-B14F-4D97-AF65-F5344CB8AC3E}">
+        <p14:creationId xmlns:p14="http://schemas.microsoft.com/office/powerpoint/2010/main" val="3690465592"/>
+      </p:ext>
+    </p:extLst>
+  </p:cSld>
+  <p:clrMapOvr>
+    <a:masterClrMapping/>
+  </p:clrMapOvr>
+</p:notes>
+</file>
+
+<file path=ppt/notesSlides/notesSlide15.xml><?xml version="1.0" encoding="utf-8"?>
+<p:notes xmlns:a="http://schemas.openxmlformats.org/drawingml/2006/main" xmlns:r="http://schemas.openxmlformats.org/officeDocument/2006/relationships" xmlns:p="http://schemas.openxmlformats.org/presentationml/2006/main">
+  <p:cSld>
+    <p:spTree>
+      <p:nvGrpSpPr>
+        <p:cNvPr id="1" name="">
+          <a:extLst>
+            <a:ext uri="{FF2B5EF4-FFF2-40B4-BE49-F238E27FC236}">
+              <a16:creationId xmlns:a16="http://schemas.microsoft.com/office/drawing/2014/main" id="{23F8BE03-06A6-4482-4F33-E3F81B0FB85E}"/>
+            </a:ext>
+          </a:extLst>
+        </p:cNvPr>
+        <p:cNvGrpSpPr/>
+        <p:nvPr/>
+      </p:nvGrpSpPr>
+      <p:grpSpPr>
+        <a:xfrm>
+          <a:off x="0" y="0"/>
+          <a:ext cx="0" cy="0"/>
+          <a:chOff x="0" y="0"/>
+          <a:chExt cx="0" cy="0"/>
+        </a:xfrm>
+      </p:grpSpPr>
+      <p:sp>
+        <p:nvSpPr>
+          <p:cNvPr id="2" name="Slide Image Placeholder 1">
+            <a:extLst>
+              <a:ext uri="{FF2B5EF4-FFF2-40B4-BE49-F238E27FC236}">
+                <a16:creationId xmlns:a16="http://schemas.microsoft.com/office/drawing/2014/main" id="{848CD6B8-627D-1A7E-DD33-865AF464F96A}"/>
+              </a:ext>
+            </a:extLst>
+          </p:cNvPr>
+          <p:cNvSpPr>
+            <a:spLocks noGrp="1" noRot="1" noChangeAspect="1"/>
+          </p:cNvSpPr>
+          <p:nvPr>
+            <p:ph type="sldImg"/>
+          </p:nvPr>
+        </p:nvSpPr>
+        <p:spPr/>
+      </p:sp>
+      <p:sp>
+        <p:nvSpPr>
+          <p:cNvPr id="3" name="Notes Placeholder 2">
+            <a:extLst>
+              <a:ext uri="{FF2B5EF4-FFF2-40B4-BE49-F238E27FC236}">
+                <a16:creationId xmlns:a16="http://schemas.microsoft.com/office/drawing/2014/main" id="{B76E0A79-3AED-85DE-4FA9-43540C90FEF3}"/>
+              </a:ext>
+            </a:extLst>
+          </p:cNvPr>
+          <p:cNvSpPr>
+            <a:spLocks noGrp="1"/>
+          </p:cNvSpPr>
+          <p:nvPr>
+            <p:ph type="body" idx="1"/>
+          </p:nvPr>
+        </p:nvSpPr>
+        <p:spPr/>
+        <p:txBody>
+          <a:bodyPr/>
+          <a:lstStyle/>
+          <a:p>
+            <a:r>
+              <a:rPr lang="en-US" dirty="0"/>
+              <a:t>This is an more illustrative image on Wolfe model as we can see, the propose model now have awareness and context guidance to contribute into the visual search process.</a:t>
+            </a:r>
+          </a:p>
+        </p:txBody>
+      </p:sp>
+      <p:sp>
+        <p:nvSpPr>
+          <p:cNvPr id="4" name="Slide Number Placeholder 3">
+            <a:extLst>
+              <a:ext uri="{FF2B5EF4-FFF2-40B4-BE49-F238E27FC236}">
+                <a16:creationId xmlns:a16="http://schemas.microsoft.com/office/drawing/2014/main" id="{6FDC057F-A8E3-D65D-F050-CC97BE314A6E}"/>
+              </a:ext>
+            </a:extLst>
+          </p:cNvPr>
+          <p:cNvSpPr>
+            <a:spLocks noGrp="1"/>
+          </p:cNvSpPr>
+          <p:nvPr>
+            <p:ph type="sldNum" sz="quarter" idx="5"/>
+          </p:nvPr>
+        </p:nvSpPr>
+        <p:spPr/>
+        <p:txBody>
+          <a:bodyPr/>
+          <a:lstStyle/>
+          <a:p>
+            <a:fld id="{7332F5B2-8E9E-A043-910C-D623E320FEF5}" type="slidenum">
+              <a:rPr lang="en-US" smtClean="0"/>
+              <a:t>15</a:t>
+            </a:fld>
+            <a:endParaRPr lang="en-US"/>
+          </a:p>
+        </p:txBody>
+      </p:sp>
+    </p:spTree>
+    <p:extLst>
+      <p:ext uri="{BB962C8B-B14F-4D97-AF65-F5344CB8AC3E}">
+        <p14:creationId xmlns:p14="http://schemas.microsoft.com/office/powerpoint/2010/main" val="788098734"/>
+      </p:ext>
+    </p:extLst>
+  </p:cSld>
+  <p:clrMapOvr>
+    <a:masterClrMapping/>
+  </p:clrMapOvr>
+</p:notes>
+</file>
+
+<file path=ppt/notesSlides/notesSlide16.xml><?xml version="1.0" encoding="utf-8"?>
+<p:notes xmlns:a="http://schemas.openxmlformats.org/drawingml/2006/main" xmlns:r="http://schemas.openxmlformats.org/officeDocument/2006/relationships" xmlns:p="http://schemas.openxmlformats.org/presentationml/2006/main">
+  <p:cSld>
+    <p:spTree>
+      <p:nvGrpSpPr>
+        <p:cNvPr id="1" name="">
+          <a:extLst>
+            <a:ext uri="{FF2B5EF4-FFF2-40B4-BE49-F238E27FC236}">
+              <a16:creationId xmlns:a16="http://schemas.microsoft.com/office/drawing/2014/main" id="{ED73C860-F29F-5484-9868-90E51A3B7908}"/>
+            </a:ext>
+          </a:extLst>
+        </p:cNvPr>
+        <p:cNvGrpSpPr/>
+        <p:nvPr/>
+      </p:nvGrpSpPr>
+      <p:grpSpPr>
+        <a:xfrm>
+          <a:off x="0" y="0"/>
+          <a:ext cx="0" cy="0"/>
+          <a:chOff x="0" y="0"/>
+          <a:chExt cx="0" cy="0"/>
+        </a:xfrm>
+      </p:grpSpPr>
+      <p:sp>
+        <p:nvSpPr>
+          <p:cNvPr id="2" name="Slide Image Placeholder 1">
+            <a:extLst>
+              <a:ext uri="{FF2B5EF4-FFF2-40B4-BE49-F238E27FC236}">
+                <a16:creationId xmlns:a16="http://schemas.microsoft.com/office/drawing/2014/main" id="{9D7FB06F-1333-1535-B2B5-89CBABE4421E}"/>
+              </a:ext>
+            </a:extLst>
+          </p:cNvPr>
+          <p:cNvSpPr>
+            <a:spLocks noGrp="1" noRot="1" noChangeAspect="1"/>
+          </p:cNvSpPr>
+          <p:nvPr>
+            <p:ph type="sldImg"/>
+          </p:nvPr>
+        </p:nvSpPr>
+        <p:spPr/>
+      </p:sp>
+      <p:sp>
+        <p:nvSpPr>
+          <p:cNvPr id="3" name="Notes Placeholder 2">
+            <a:extLst>
+              <a:ext uri="{FF2B5EF4-FFF2-40B4-BE49-F238E27FC236}">
+                <a16:creationId xmlns:a16="http://schemas.microsoft.com/office/drawing/2014/main" id="{7F9AF1DB-03C8-318D-5461-4A8DF215FD74}"/>
+              </a:ext>
+            </a:extLst>
+          </p:cNvPr>
+          <p:cNvSpPr>
+            <a:spLocks noGrp="1"/>
+          </p:cNvSpPr>
+          <p:nvPr>
+            <p:ph type="body" idx="1"/>
+          </p:nvPr>
+        </p:nvSpPr>
+        <p:spPr/>
+        <p:txBody>
+          <a:bodyPr/>
+          <a:lstStyle/>
+          <a:p>
+            <a:r>
+              <a:rPr lang="en-US" dirty="0"/>
+              <a:t>Right after VGG16 model is published in 2018, Dr. Zhang Mengmi and her colleague proposed an bio-inspired model, IVSN which use top-down approach for visual search through first order approximation, the attention map is resize to match the original context image to conduct visual search process.</a:t>
+            </a:r>
+          </a:p>
+        </p:txBody>
+      </p:sp>
+      <p:sp>
+        <p:nvSpPr>
+          <p:cNvPr id="4" name="Slide Number Placeholder 3">
+            <a:extLst>
+              <a:ext uri="{FF2B5EF4-FFF2-40B4-BE49-F238E27FC236}">
+                <a16:creationId xmlns:a16="http://schemas.microsoft.com/office/drawing/2014/main" id="{09FC2005-9544-FB73-3EC3-366C43489E3D}"/>
+              </a:ext>
+            </a:extLst>
+          </p:cNvPr>
+          <p:cNvSpPr>
+            <a:spLocks noGrp="1"/>
+          </p:cNvSpPr>
+          <p:nvPr>
+            <p:ph type="sldNum" sz="quarter" idx="5"/>
+          </p:nvPr>
+        </p:nvSpPr>
+        <p:spPr/>
+        <p:txBody>
+          <a:bodyPr/>
+          <a:lstStyle/>
+          <a:p>
+            <a:fld id="{7332F5B2-8E9E-A043-910C-D623E320FEF5}" type="slidenum">
+              <a:rPr lang="en-US" smtClean="0"/>
+              <a:t>16</a:t>
+            </a:fld>
+            <a:endParaRPr lang="en-US"/>
+          </a:p>
+        </p:txBody>
+      </p:sp>
+    </p:spTree>
+    <p:extLst>
+      <p:ext uri="{BB962C8B-B14F-4D97-AF65-F5344CB8AC3E}">
+        <p14:creationId xmlns:p14="http://schemas.microsoft.com/office/powerpoint/2010/main" val="2635628049"/>
+      </p:ext>
+    </p:extLst>
+  </p:cSld>
+  <p:clrMapOvr>
+    <a:masterClrMapping/>
+  </p:clrMapOvr>
+</p:notes>
+</file>
+
+<file path=ppt/notesSlides/notesSlide17.xml><?xml version="1.0" encoding="utf-8"?>
 <p:notes xmlns:a="http://schemas.openxmlformats.org/drawingml/2006/main" xmlns:r="http://schemas.openxmlformats.org/officeDocument/2006/relationships" xmlns:p="http://schemas.openxmlformats.org/presentationml/2006/main">
   <p:cSld>
     <p:spTree>
@@ -4047,6 +4920,30 @@
           <a:bodyPr/>
           <a:lstStyle/>
           <a:p>
+            <a:r>
+              <a:rPr lang="en-US" dirty="0"/>
+              <a:t>We can take a look into how the IVSN model construct an attention map.</a:t>
+            </a:r>
+          </a:p>
+          <a:p>
+            <a:endParaRPr lang="en-US" dirty="0"/>
+          </a:p>
+          <a:p>
+            <a:r>
+              <a:rPr lang="en-US" dirty="0"/>
+              <a:t>We can see that the model take in both Context and Target image at the same time, and they are both going through the VGG16 model, but at the final layer, in the target side, the model apply a max pool layer while on the context side the model keep the size intact.</a:t>
+            </a:r>
+          </a:p>
+          <a:p>
+            <a:endParaRPr lang="en-US" dirty="0"/>
+          </a:p>
+          <a:p>
+            <a:r>
+              <a:rPr lang="en-US" dirty="0"/>
+              <a:t>On the left-hand side, we can see how it conducts a first-order approximation, the final output of the target side is then dot-product with each entry of the context output side to produce a 1D attention map.</a:t>
+            </a:r>
+          </a:p>
+          <a:p>
             <a:endParaRPr lang="en-US" dirty="0"/>
           </a:p>
         </p:txBody>
@@ -4093,7 +4990,7 @@
 </p:notes>
 </file>
 
-<file path=ppt/notesSlides/notesSlide11.xml><?xml version="1.0" encoding="utf-8"?>
+<file path=ppt/notesSlides/notesSlide18.xml><?xml version="1.0" encoding="utf-8"?>
 <p:notes xmlns:a="http://schemas.openxmlformats.org/drawingml/2006/main" xmlns:r="http://schemas.openxmlformats.org/officeDocument/2006/relationships" xmlns:p="http://schemas.openxmlformats.org/presentationml/2006/main">
   <p:cSld>
     <p:spTree>
@@ -4155,7 +5052,19 @@
           <a:bodyPr/>
           <a:lstStyle/>
           <a:p>
+            <a:r>
+              <a:rPr lang="en-US" dirty="0"/>
+              <a:t>But we do not stop at that point, we still need to find where the target is</a:t>
+            </a:r>
+          </a:p>
+          <a:p>
             <a:endParaRPr lang="en-US" dirty="0"/>
+          </a:p>
+          <a:p>
+            <a:r>
+              <a:rPr lang="en-US" dirty="0"/>
+              <a:t>This algorithm will show how can we find the target with Inhibition of return IOR.</a:t>
+            </a:r>
           </a:p>
         </p:txBody>
       </p:sp>
@@ -4201,7 +5110,7 @@
 </p:notes>
 </file>
 
-<file path=ppt/notesSlides/notesSlide12.xml><?xml version="1.0" encoding="utf-8"?>
+<file path=ppt/notesSlides/notesSlide19.xml><?xml version="1.0" encoding="utf-8"?>
 <p:notes xmlns:a="http://schemas.openxmlformats.org/drawingml/2006/main" xmlns:r="http://schemas.openxmlformats.org/officeDocument/2006/relationships" xmlns:p="http://schemas.openxmlformats.org/presentationml/2006/main">
   <p:cSld>
     <p:spTree>
@@ -4263,7 +5172,10 @@
           <a:bodyPr/>
           <a:lstStyle/>
           <a:p>
-            <a:endParaRPr lang="en-US" dirty="0"/>
+            <a:r>
+              <a:rPr lang="en-US" dirty="0"/>
+              <a:t>First we will find the highest similarity between the target and the context (the brightest spot on the attention map)</a:t>
+            </a:r>
           </a:p>
         </p:txBody>
       </p:sp>
@@ -4300,762 +5212,6 @@
     <p:extLst>
       <p:ext uri="{BB962C8B-B14F-4D97-AF65-F5344CB8AC3E}">
         <p14:creationId xmlns:p14="http://schemas.microsoft.com/office/powerpoint/2010/main" val="2043281949"/>
-      </p:ext>
-    </p:extLst>
-  </p:cSld>
-  <p:clrMapOvr>
-    <a:masterClrMapping/>
-  </p:clrMapOvr>
-</p:notes>
-</file>
-
-<file path=ppt/notesSlides/notesSlide13.xml><?xml version="1.0" encoding="utf-8"?>
-<p:notes xmlns:a="http://schemas.openxmlformats.org/drawingml/2006/main" xmlns:r="http://schemas.openxmlformats.org/officeDocument/2006/relationships" xmlns:p="http://schemas.openxmlformats.org/presentationml/2006/main">
-  <p:cSld>
-    <p:spTree>
-      <p:nvGrpSpPr>
-        <p:cNvPr id="1" name="">
-          <a:extLst>
-            <a:ext uri="{FF2B5EF4-FFF2-40B4-BE49-F238E27FC236}">
-              <a16:creationId xmlns:a16="http://schemas.microsoft.com/office/drawing/2014/main" id="{B3B49AE0-425F-D645-FFA2-ED6A942BA8A4}"/>
-            </a:ext>
-          </a:extLst>
-        </p:cNvPr>
-        <p:cNvGrpSpPr/>
-        <p:nvPr/>
-      </p:nvGrpSpPr>
-      <p:grpSpPr>
-        <a:xfrm>
-          <a:off x="0" y="0"/>
-          <a:ext cx="0" cy="0"/>
-          <a:chOff x="0" y="0"/>
-          <a:chExt cx="0" cy="0"/>
-        </a:xfrm>
-      </p:grpSpPr>
-      <p:sp>
-        <p:nvSpPr>
-          <p:cNvPr id="2" name="Slide Image Placeholder 1">
-            <a:extLst>
-              <a:ext uri="{FF2B5EF4-FFF2-40B4-BE49-F238E27FC236}">
-                <a16:creationId xmlns:a16="http://schemas.microsoft.com/office/drawing/2014/main" id="{0FC446B0-8513-7138-7FEE-3670ABE4327D}"/>
-              </a:ext>
-            </a:extLst>
-          </p:cNvPr>
-          <p:cNvSpPr>
-            <a:spLocks noGrp="1" noRot="1" noChangeAspect="1"/>
-          </p:cNvSpPr>
-          <p:nvPr>
-            <p:ph type="sldImg"/>
-          </p:nvPr>
-        </p:nvSpPr>
-        <p:spPr/>
-      </p:sp>
-      <p:sp>
-        <p:nvSpPr>
-          <p:cNvPr id="3" name="Notes Placeholder 2">
-            <a:extLst>
-              <a:ext uri="{FF2B5EF4-FFF2-40B4-BE49-F238E27FC236}">
-                <a16:creationId xmlns:a16="http://schemas.microsoft.com/office/drawing/2014/main" id="{2784F6F1-241B-6819-0A4C-1F2CD74280E0}"/>
-              </a:ext>
-            </a:extLst>
-          </p:cNvPr>
-          <p:cNvSpPr>
-            <a:spLocks noGrp="1"/>
-          </p:cNvSpPr>
-          <p:nvPr>
-            <p:ph type="body" idx="1"/>
-          </p:nvPr>
-        </p:nvSpPr>
-        <p:spPr/>
-        <p:txBody>
-          <a:bodyPr/>
-          <a:lstStyle/>
-          <a:p>
-            <a:endParaRPr lang="en-US" dirty="0"/>
-          </a:p>
-        </p:txBody>
-      </p:sp>
-      <p:sp>
-        <p:nvSpPr>
-          <p:cNvPr id="4" name="Slide Number Placeholder 3">
-            <a:extLst>
-              <a:ext uri="{FF2B5EF4-FFF2-40B4-BE49-F238E27FC236}">
-                <a16:creationId xmlns:a16="http://schemas.microsoft.com/office/drawing/2014/main" id="{9E78C8A6-8684-7473-BC93-DDF734E14B94}"/>
-              </a:ext>
-            </a:extLst>
-          </p:cNvPr>
-          <p:cNvSpPr>
-            <a:spLocks noGrp="1"/>
-          </p:cNvSpPr>
-          <p:nvPr>
-            <p:ph type="sldNum" sz="quarter" idx="5"/>
-          </p:nvPr>
-        </p:nvSpPr>
-        <p:spPr/>
-        <p:txBody>
-          <a:bodyPr/>
-          <a:lstStyle/>
-          <a:p>
-            <a:fld id="{7332F5B2-8E9E-A043-910C-D623E320FEF5}" type="slidenum">
-              <a:rPr lang="en-US" smtClean="0"/>
-              <a:t>20</a:t>
-            </a:fld>
-            <a:endParaRPr lang="en-US"/>
-          </a:p>
-        </p:txBody>
-      </p:sp>
-    </p:spTree>
-    <p:extLst>
-      <p:ext uri="{BB962C8B-B14F-4D97-AF65-F5344CB8AC3E}">
-        <p14:creationId xmlns:p14="http://schemas.microsoft.com/office/powerpoint/2010/main" val="2527559495"/>
-      </p:ext>
-    </p:extLst>
-  </p:cSld>
-  <p:clrMapOvr>
-    <a:masterClrMapping/>
-  </p:clrMapOvr>
-</p:notes>
-</file>
-
-<file path=ppt/notesSlides/notesSlide14.xml><?xml version="1.0" encoding="utf-8"?>
-<p:notes xmlns:a="http://schemas.openxmlformats.org/drawingml/2006/main" xmlns:r="http://schemas.openxmlformats.org/officeDocument/2006/relationships" xmlns:p="http://schemas.openxmlformats.org/presentationml/2006/main">
-  <p:cSld>
-    <p:spTree>
-      <p:nvGrpSpPr>
-        <p:cNvPr id="1" name="">
-          <a:extLst>
-            <a:ext uri="{FF2B5EF4-FFF2-40B4-BE49-F238E27FC236}">
-              <a16:creationId xmlns:a16="http://schemas.microsoft.com/office/drawing/2014/main" id="{5B436DE6-B0D6-4185-7B92-17DE7761CB3F}"/>
-            </a:ext>
-          </a:extLst>
-        </p:cNvPr>
-        <p:cNvGrpSpPr/>
-        <p:nvPr/>
-      </p:nvGrpSpPr>
-      <p:grpSpPr>
-        <a:xfrm>
-          <a:off x="0" y="0"/>
-          <a:ext cx="0" cy="0"/>
-          <a:chOff x="0" y="0"/>
-          <a:chExt cx="0" cy="0"/>
-        </a:xfrm>
-      </p:grpSpPr>
-      <p:sp>
-        <p:nvSpPr>
-          <p:cNvPr id="2" name="Slide Image Placeholder 1">
-            <a:extLst>
-              <a:ext uri="{FF2B5EF4-FFF2-40B4-BE49-F238E27FC236}">
-                <a16:creationId xmlns:a16="http://schemas.microsoft.com/office/drawing/2014/main" id="{EE920987-4CCA-9195-545B-C262B717AC06}"/>
-              </a:ext>
-            </a:extLst>
-          </p:cNvPr>
-          <p:cNvSpPr>
-            <a:spLocks noGrp="1" noRot="1" noChangeAspect="1"/>
-          </p:cNvSpPr>
-          <p:nvPr>
-            <p:ph type="sldImg"/>
-          </p:nvPr>
-        </p:nvSpPr>
-        <p:spPr/>
-      </p:sp>
-      <p:sp>
-        <p:nvSpPr>
-          <p:cNvPr id="3" name="Notes Placeholder 2">
-            <a:extLst>
-              <a:ext uri="{FF2B5EF4-FFF2-40B4-BE49-F238E27FC236}">
-                <a16:creationId xmlns:a16="http://schemas.microsoft.com/office/drawing/2014/main" id="{7A74A125-BC2B-F44F-6094-868706C80A18}"/>
-              </a:ext>
-            </a:extLst>
-          </p:cNvPr>
-          <p:cNvSpPr>
-            <a:spLocks noGrp="1"/>
-          </p:cNvSpPr>
-          <p:nvPr>
-            <p:ph type="body" idx="1"/>
-          </p:nvPr>
-        </p:nvSpPr>
-        <p:spPr/>
-        <p:txBody>
-          <a:bodyPr/>
-          <a:lstStyle/>
-          <a:p>
-            <a:endParaRPr lang="en-US" dirty="0"/>
-          </a:p>
-        </p:txBody>
-      </p:sp>
-      <p:sp>
-        <p:nvSpPr>
-          <p:cNvPr id="4" name="Slide Number Placeholder 3">
-            <a:extLst>
-              <a:ext uri="{FF2B5EF4-FFF2-40B4-BE49-F238E27FC236}">
-                <a16:creationId xmlns:a16="http://schemas.microsoft.com/office/drawing/2014/main" id="{61191889-DE14-544E-F923-8EB38609B8E8}"/>
-              </a:ext>
-            </a:extLst>
-          </p:cNvPr>
-          <p:cNvSpPr>
-            <a:spLocks noGrp="1"/>
-          </p:cNvSpPr>
-          <p:nvPr>
-            <p:ph type="sldNum" sz="quarter" idx="5"/>
-          </p:nvPr>
-        </p:nvSpPr>
-        <p:spPr/>
-        <p:txBody>
-          <a:bodyPr/>
-          <a:lstStyle/>
-          <a:p>
-            <a:fld id="{7332F5B2-8E9E-A043-910C-D623E320FEF5}" type="slidenum">
-              <a:rPr lang="en-US" smtClean="0"/>
-              <a:t>21</a:t>
-            </a:fld>
-            <a:endParaRPr lang="en-US"/>
-          </a:p>
-        </p:txBody>
-      </p:sp>
-    </p:spTree>
-    <p:extLst>
-      <p:ext uri="{BB962C8B-B14F-4D97-AF65-F5344CB8AC3E}">
-        <p14:creationId xmlns:p14="http://schemas.microsoft.com/office/powerpoint/2010/main" val="4006588869"/>
-      </p:ext>
-    </p:extLst>
-  </p:cSld>
-  <p:clrMapOvr>
-    <a:masterClrMapping/>
-  </p:clrMapOvr>
-</p:notes>
-</file>
-
-<file path=ppt/notesSlides/notesSlide15.xml><?xml version="1.0" encoding="utf-8"?>
-<p:notes xmlns:a="http://schemas.openxmlformats.org/drawingml/2006/main" xmlns:r="http://schemas.openxmlformats.org/officeDocument/2006/relationships" xmlns:p="http://schemas.openxmlformats.org/presentationml/2006/main">
-  <p:cSld>
-    <p:spTree>
-      <p:nvGrpSpPr>
-        <p:cNvPr id="1" name="">
-          <a:extLst>
-            <a:ext uri="{FF2B5EF4-FFF2-40B4-BE49-F238E27FC236}">
-              <a16:creationId xmlns:a16="http://schemas.microsoft.com/office/drawing/2014/main" id="{AA574C87-8855-0B10-3A71-D1A039E85B2A}"/>
-            </a:ext>
-          </a:extLst>
-        </p:cNvPr>
-        <p:cNvGrpSpPr/>
-        <p:nvPr/>
-      </p:nvGrpSpPr>
-      <p:grpSpPr>
-        <a:xfrm>
-          <a:off x="0" y="0"/>
-          <a:ext cx="0" cy="0"/>
-          <a:chOff x="0" y="0"/>
-          <a:chExt cx="0" cy="0"/>
-        </a:xfrm>
-      </p:grpSpPr>
-      <p:sp>
-        <p:nvSpPr>
-          <p:cNvPr id="2" name="Slide Image Placeholder 1">
-            <a:extLst>
-              <a:ext uri="{FF2B5EF4-FFF2-40B4-BE49-F238E27FC236}">
-                <a16:creationId xmlns:a16="http://schemas.microsoft.com/office/drawing/2014/main" id="{448A9F8F-98EF-6F25-A3C7-030EEEF8AF3F}"/>
-              </a:ext>
-            </a:extLst>
-          </p:cNvPr>
-          <p:cNvSpPr>
-            <a:spLocks noGrp="1" noRot="1" noChangeAspect="1"/>
-          </p:cNvSpPr>
-          <p:nvPr>
-            <p:ph type="sldImg"/>
-          </p:nvPr>
-        </p:nvSpPr>
-        <p:spPr/>
-      </p:sp>
-      <p:sp>
-        <p:nvSpPr>
-          <p:cNvPr id="3" name="Notes Placeholder 2">
-            <a:extLst>
-              <a:ext uri="{FF2B5EF4-FFF2-40B4-BE49-F238E27FC236}">
-                <a16:creationId xmlns:a16="http://schemas.microsoft.com/office/drawing/2014/main" id="{5FDF6D4D-682B-3720-D7E1-599E212F6051}"/>
-              </a:ext>
-            </a:extLst>
-          </p:cNvPr>
-          <p:cNvSpPr>
-            <a:spLocks noGrp="1"/>
-          </p:cNvSpPr>
-          <p:nvPr>
-            <p:ph type="body" idx="1"/>
-          </p:nvPr>
-        </p:nvSpPr>
-        <p:spPr/>
-        <p:txBody>
-          <a:bodyPr/>
-          <a:lstStyle/>
-          <a:p>
-            <a:endParaRPr lang="en-US" dirty="0"/>
-          </a:p>
-        </p:txBody>
-      </p:sp>
-      <p:sp>
-        <p:nvSpPr>
-          <p:cNvPr id="4" name="Slide Number Placeholder 3">
-            <a:extLst>
-              <a:ext uri="{FF2B5EF4-FFF2-40B4-BE49-F238E27FC236}">
-                <a16:creationId xmlns:a16="http://schemas.microsoft.com/office/drawing/2014/main" id="{0E87A6FE-17EE-34FD-2121-D50C18B2EF22}"/>
-              </a:ext>
-            </a:extLst>
-          </p:cNvPr>
-          <p:cNvSpPr>
-            <a:spLocks noGrp="1"/>
-          </p:cNvSpPr>
-          <p:nvPr>
-            <p:ph type="sldNum" sz="quarter" idx="5"/>
-          </p:nvPr>
-        </p:nvSpPr>
-        <p:spPr/>
-        <p:txBody>
-          <a:bodyPr/>
-          <a:lstStyle/>
-          <a:p>
-            <a:fld id="{7332F5B2-8E9E-A043-910C-D623E320FEF5}" type="slidenum">
-              <a:rPr lang="en-US" smtClean="0"/>
-              <a:t>22</a:t>
-            </a:fld>
-            <a:endParaRPr lang="en-US"/>
-          </a:p>
-        </p:txBody>
-      </p:sp>
-    </p:spTree>
-    <p:extLst>
-      <p:ext uri="{BB962C8B-B14F-4D97-AF65-F5344CB8AC3E}">
-        <p14:creationId xmlns:p14="http://schemas.microsoft.com/office/powerpoint/2010/main" val="3191517643"/>
-      </p:ext>
-    </p:extLst>
-  </p:cSld>
-  <p:clrMapOvr>
-    <a:masterClrMapping/>
-  </p:clrMapOvr>
-</p:notes>
-</file>
-
-<file path=ppt/notesSlides/notesSlide16.xml><?xml version="1.0" encoding="utf-8"?>
-<p:notes xmlns:a="http://schemas.openxmlformats.org/drawingml/2006/main" xmlns:r="http://schemas.openxmlformats.org/officeDocument/2006/relationships" xmlns:p="http://schemas.openxmlformats.org/presentationml/2006/main">
-  <p:cSld>
-    <p:spTree>
-      <p:nvGrpSpPr>
-        <p:cNvPr id="1" name="">
-          <a:extLst>
-            <a:ext uri="{FF2B5EF4-FFF2-40B4-BE49-F238E27FC236}">
-              <a16:creationId xmlns:a16="http://schemas.microsoft.com/office/drawing/2014/main" id="{1CF2BCBE-DF07-0486-449E-57C64662CE1A}"/>
-            </a:ext>
-          </a:extLst>
-        </p:cNvPr>
-        <p:cNvGrpSpPr/>
-        <p:nvPr/>
-      </p:nvGrpSpPr>
-      <p:grpSpPr>
-        <a:xfrm>
-          <a:off x="0" y="0"/>
-          <a:ext cx="0" cy="0"/>
-          <a:chOff x="0" y="0"/>
-          <a:chExt cx="0" cy="0"/>
-        </a:xfrm>
-      </p:grpSpPr>
-      <p:sp>
-        <p:nvSpPr>
-          <p:cNvPr id="2" name="Slide Image Placeholder 1">
-            <a:extLst>
-              <a:ext uri="{FF2B5EF4-FFF2-40B4-BE49-F238E27FC236}">
-                <a16:creationId xmlns:a16="http://schemas.microsoft.com/office/drawing/2014/main" id="{6EE94138-6ABE-83A3-A165-9F915FB460CE}"/>
-              </a:ext>
-            </a:extLst>
-          </p:cNvPr>
-          <p:cNvSpPr>
-            <a:spLocks noGrp="1" noRot="1" noChangeAspect="1"/>
-          </p:cNvSpPr>
-          <p:nvPr>
-            <p:ph type="sldImg"/>
-          </p:nvPr>
-        </p:nvSpPr>
-        <p:spPr/>
-      </p:sp>
-      <p:sp>
-        <p:nvSpPr>
-          <p:cNvPr id="3" name="Notes Placeholder 2">
-            <a:extLst>
-              <a:ext uri="{FF2B5EF4-FFF2-40B4-BE49-F238E27FC236}">
-                <a16:creationId xmlns:a16="http://schemas.microsoft.com/office/drawing/2014/main" id="{3FF1B68F-CA6C-2E51-27BC-F1B4533CECA4}"/>
-              </a:ext>
-            </a:extLst>
-          </p:cNvPr>
-          <p:cNvSpPr>
-            <a:spLocks noGrp="1"/>
-          </p:cNvSpPr>
-          <p:nvPr>
-            <p:ph type="body" idx="1"/>
-          </p:nvPr>
-        </p:nvSpPr>
-        <p:spPr/>
-        <p:txBody>
-          <a:bodyPr/>
-          <a:lstStyle/>
-          <a:p>
-            <a:endParaRPr lang="en-US" dirty="0"/>
-          </a:p>
-        </p:txBody>
-      </p:sp>
-      <p:sp>
-        <p:nvSpPr>
-          <p:cNvPr id="4" name="Slide Number Placeholder 3">
-            <a:extLst>
-              <a:ext uri="{FF2B5EF4-FFF2-40B4-BE49-F238E27FC236}">
-                <a16:creationId xmlns:a16="http://schemas.microsoft.com/office/drawing/2014/main" id="{941BFF5C-A011-F511-648B-C4C7CAEEBB63}"/>
-              </a:ext>
-            </a:extLst>
-          </p:cNvPr>
-          <p:cNvSpPr>
-            <a:spLocks noGrp="1"/>
-          </p:cNvSpPr>
-          <p:nvPr>
-            <p:ph type="sldNum" sz="quarter" idx="5"/>
-          </p:nvPr>
-        </p:nvSpPr>
-        <p:spPr/>
-        <p:txBody>
-          <a:bodyPr/>
-          <a:lstStyle/>
-          <a:p>
-            <a:fld id="{7332F5B2-8E9E-A043-910C-D623E320FEF5}" type="slidenum">
-              <a:rPr lang="en-US" smtClean="0"/>
-              <a:t>23</a:t>
-            </a:fld>
-            <a:endParaRPr lang="en-US"/>
-          </a:p>
-        </p:txBody>
-      </p:sp>
-    </p:spTree>
-    <p:extLst>
-      <p:ext uri="{BB962C8B-B14F-4D97-AF65-F5344CB8AC3E}">
-        <p14:creationId xmlns:p14="http://schemas.microsoft.com/office/powerpoint/2010/main" val="3276410259"/>
-      </p:ext>
-    </p:extLst>
-  </p:cSld>
-  <p:clrMapOvr>
-    <a:masterClrMapping/>
-  </p:clrMapOvr>
-</p:notes>
-</file>
-
-<file path=ppt/notesSlides/notesSlide17.xml><?xml version="1.0" encoding="utf-8"?>
-<p:notes xmlns:a="http://schemas.openxmlformats.org/drawingml/2006/main" xmlns:r="http://schemas.openxmlformats.org/officeDocument/2006/relationships" xmlns:p="http://schemas.openxmlformats.org/presentationml/2006/main">
-  <p:cSld>
-    <p:spTree>
-      <p:nvGrpSpPr>
-        <p:cNvPr id="1" name="">
-          <a:extLst>
-            <a:ext uri="{FF2B5EF4-FFF2-40B4-BE49-F238E27FC236}">
-              <a16:creationId xmlns:a16="http://schemas.microsoft.com/office/drawing/2014/main" id="{66021DF8-EEFA-8563-4677-7B994660EE28}"/>
-            </a:ext>
-          </a:extLst>
-        </p:cNvPr>
-        <p:cNvGrpSpPr/>
-        <p:nvPr/>
-      </p:nvGrpSpPr>
-      <p:grpSpPr>
-        <a:xfrm>
-          <a:off x="0" y="0"/>
-          <a:ext cx="0" cy="0"/>
-          <a:chOff x="0" y="0"/>
-          <a:chExt cx="0" cy="0"/>
-        </a:xfrm>
-      </p:grpSpPr>
-      <p:sp>
-        <p:nvSpPr>
-          <p:cNvPr id="2" name="Slide Image Placeholder 1">
-            <a:extLst>
-              <a:ext uri="{FF2B5EF4-FFF2-40B4-BE49-F238E27FC236}">
-                <a16:creationId xmlns:a16="http://schemas.microsoft.com/office/drawing/2014/main" id="{2ACCBF27-3A72-0E0C-A640-69735F9A0910}"/>
-              </a:ext>
-            </a:extLst>
-          </p:cNvPr>
-          <p:cNvSpPr>
-            <a:spLocks noGrp="1" noRot="1" noChangeAspect="1"/>
-          </p:cNvSpPr>
-          <p:nvPr>
-            <p:ph type="sldImg"/>
-          </p:nvPr>
-        </p:nvSpPr>
-        <p:spPr/>
-      </p:sp>
-      <p:sp>
-        <p:nvSpPr>
-          <p:cNvPr id="3" name="Notes Placeholder 2">
-            <a:extLst>
-              <a:ext uri="{FF2B5EF4-FFF2-40B4-BE49-F238E27FC236}">
-                <a16:creationId xmlns:a16="http://schemas.microsoft.com/office/drawing/2014/main" id="{7948BD99-0337-DFD8-7EFB-CFBF25350767}"/>
-              </a:ext>
-            </a:extLst>
-          </p:cNvPr>
-          <p:cNvSpPr>
-            <a:spLocks noGrp="1"/>
-          </p:cNvSpPr>
-          <p:nvPr>
-            <p:ph type="body" idx="1"/>
-          </p:nvPr>
-        </p:nvSpPr>
-        <p:spPr/>
-        <p:txBody>
-          <a:bodyPr/>
-          <a:lstStyle/>
-          <a:p>
-            <a:endParaRPr lang="en-US" dirty="0"/>
-          </a:p>
-        </p:txBody>
-      </p:sp>
-      <p:sp>
-        <p:nvSpPr>
-          <p:cNvPr id="4" name="Slide Number Placeholder 3">
-            <a:extLst>
-              <a:ext uri="{FF2B5EF4-FFF2-40B4-BE49-F238E27FC236}">
-                <a16:creationId xmlns:a16="http://schemas.microsoft.com/office/drawing/2014/main" id="{D75C5288-3EB1-40A0-6447-50C02EEC4AB4}"/>
-              </a:ext>
-            </a:extLst>
-          </p:cNvPr>
-          <p:cNvSpPr>
-            <a:spLocks noGrp="1"/>
-          </p:cNvSpPr>
-          <p:nvPr>
-            <p:ph type="sldNum" sz="quarter" idx="5"/>
-          </p:nvPr>
-        </p:nvSpPr>
-        <p:spPr/>
-        <p:txBody>
-          <a:bodyPr/>
-          <a:lstStyle/>
-          <a:p>
-            <a:fld id="{7332F5B2-8E9E-A043-910C-D623E320FEF5}" type="slidenum">
-              <a:rPr lang="en-US" smtClean="0"/>
-              <a:t>24</a:t>
-            </a:fld>
-            <a:endParaRPr lang="en-US"/>
-          </a:p>
-        </p:txBody>
-      </p:sp>
-    </p:spTree>
-    <p:extLst>
-      <p:ext uri="{BB962C8B-B14F-4D97-AF65-F5344CB8AC3E}">
-        <p14:creationId xmlns:p14="http://schemas.microsoft.com/office/powerpoint/2010/main" val="3707092411"/>
-      </p:ext>
-    </p:extLst>
-  </p:cSld>
-  <p:clrMapOvr>
-    <a:masterClrMapping/>
-  </p:clrMapOvr>
-</p:notes>
-</file>
-
-<file path=ppt/notesSlides/notesSlide18.xml><?xml version="1.0" encoding="utf-8"?>
-<p:notes xmlns:a="http://schemas.openxmlformats.org/drawingml/2006/main" xmlns:r="http://schemas.openxmlformats.org/officeDocument/2006/relationships" xmlns:p="http://schemas.openxmlformats.org/presentationml/2006/main">
-  <p:cSld>
-    <p:spTree>
-      <p:nvGrpSpPr>
-        <p:cNvPr id="1" name="">
-          <a:extLst>
-            <a:ext uri="{FF2B5EF4-FFF2-40B4-BE49-F238E27FC236}">
-              <a16:creationId xmlns:a16="http://schemas.microsoft.com/office/drawing/2014/main" id="{79D86D46-D967-564C-0ABD-EE69AE0EB451}"/>
-            </a:ext>
-          </a:extLst>
-        </p:cNvPr>
-        <p:cNvGrpSpPr/>
-        <p:nvPr/>
-      </p:nvGrpSpPr>
-      <p:grpSpPr>
-        <a:xfrm>
-          <a:off x="0" y="0"/>
-          <a:ext cx="0" cy="0"/>
-          <a:chOff x="0" y="0"/>
-          <a:chExt cx="0" cy="0"/>
-        </a:xfrm>
-      </p:grpSpPr>
-      <p:sp>
-        <p:nvSpPr>
-          <p:cNvPr id="2" name="Slide Image Placeholder 1">
-            <a:extLst>
-              <a:ext uri="{FF2B5EF4-FFF2-40B4-BE49-F238E27FC236}">
-                <a16:creationId xmlns:a16="http://schemas.microsoft.com/office/drawing/2014/main" id="{78FDE493-5B62-41AA-497A-09998D392334}"/>
-              </a:ext>
-            </a:extLst>
-          </p:cNvPr>
-          <p:cNvSpPr>
-            <a:spLocks noGrp="1" noRot="1" noChangeAspect="1"/>
-          </p:cNvSpPr>
-          <p:nvPr>
-            <p:ph type="sldImg"/>
-          </p:nvPr>
-        </p:nvSpPr>
-        <p:spPr/>
-      </p:sp>
-      <p:sp>
-        <p:nvSpPr>
-          <p:cNvPr id="3" name="Notes Placeholder 2">
-            <a:extLst>
-              <a:ext uri="{FF2B5EF4-FFF2-40B4-BE49-F238E27FC236}">
-                <a16:creationId xmlns:a16="http://schemas.microsoft.com/office/drawing/2014/main" id="{5B27B9C0-9F15-BD2D-2CDD-D68FADA79C64}"/>
-              </a:ext>
-            </a:extLst>
-          </p:cNvPr>
-          <p:cNvSpPr>
-            <a:spLocks noGrp="1"/>
-          </p:cNvSpPr>
-          <p:nvPr>
-            <p:ph type="body" idx="1"/>
-          </p:nvPr>
-        </p:nvSpPr>
-        <p:spPr/>
-        <p:txBody>
-          <a:bodyPr/>
-          <a:lstStyle/>
-          <a:p>
-            <a:endParaRPr lang="en-US" dirty="0"/>
-          </a:p>
-        </p:txBody>
-      </p:sp>
-      <p:sp>
-        <p:nvSpPr>
-          <p:cNvPr id="4" name="Slide Number Placeholder 3">
-            <a:extLst>
-              <a:ext uri="{FF2B5EF4-FFF2-40B4-BE49-F238E27FC236}">
-                <a16:creationId xmlns:a16="http://schemas.microsoft.com/office/drawing/2014/main" id="{8B3AF785-693A-B074-66DE-DADC83C00F03}"/>
-              </a:ext>
-            </a:extLst>
-          </p:cNvPr>
-          <p:cNvSpPr>
-            <a:spLocks noGrp="1"/>
-          </p:cNvSpPr>
-          <p:nvPr>
-            <p:ph type="sldNum" sz="quarter" idx="5"/>
-          </p:nvPr>
-        </p:nvSpPr>
-        <p:spPr/>
-        <p:txBody>
-          <a:bodyPr/>
-          <a:lstStyle/>
-          <a:p>
-            <a:fld id="{7332F5B2-8E9E-A043-910C-D623E320FEF5}" type="slidenum">
-              <a:rPr lang="en-US" smtClean="0"/>
-              <a:t>25</a:t>
-            </a:fld>
-            <a:endParaRPr lang="en-US"/>
-          </a:p>
-        </p:txBody>
-      </p:sp>
-    </p:spTree>
-    <p:extLst>
-      <p:ext uri="{BB962C8B-B14F-4D97-AF65-F5344CB8AC3E}">
-        <p14:creationId xmlns:p14="http://schemas.microsoft.com/office/powerpoint/2010/main" val="2652456039"/>
-      </p:ext>
-    </p:extLst>
-  </p:cSld>
-  <p:clrMapOvr>
-    <a:masterClrMapping/>
-  </p:clrMapOvr>
-</p:notes>
-</file>
-
-<file path=ppt/notesSlides/notesSlide19.xml><?xml version="1.0" encoding="utf-8"?>
-<p:notes xmlns:a="http://schemas.openxmlformats.org/drawingml/2006/main" xmlns:r="http://schemas.openxmlformats.org/officeDocument/2006/relationships" xmlns:p="http://schemas.openxmlformats.org/presentationml/2006/main">
-  <p:cSld>
-    <p:spTree>
-      <p:nvGrpSpPr>
-        <p:cNvPr id="1" name="">
-          <a:extLst>
-            <a:ext uri="{FF2B5EF4-FFF2-40B4-BE49-F238E27FC236}">
-              <a16:creationId xmlns:a16="http://schemas.microsoft.com/office/drawing/2014/main" id="{22FED86F-A59F-D823-FDB2-813F3E0DA2F5}"/>
-            </a:ext>
-          </a:extLst>
-        </p:cNvPr>
-        <p:cNvGrpSpPr/>
-        <p:nvPr/>
-      </p:nvGrpSpPr>
-      <p:grpSpPr>
-        <a:xfrm>
-          <a:off x="0" y="0"/>
-          <a:ext cx="0" cy="0"/>
-          <a:chOff x="0" y="0"/>
-          <a:chExt cx="0" cy="0"/>
-        </a:xfrm>
-      </p:grpSpPr>
-      <p:sp>
-        <p:nvSpPr>
-          <p:cNvPr id="2" name="Slide Image Placeholder 1">
-            <a:extLst>
-              <a:ext uri="{FF2B5EF4-FFF2-40B4-BE49-F238E27FC236}">
-                <a16:creationId xmlns:a16="http://schemas.microsoft.com/office/drawing/2014/main" id="{B60A5735-758E-66F4-A897-8C3D3548A4B1}"/>
-              </a:ext>
-            </a:extLst>
-          </p:cNvPr>
-          <p:cNvSpPr>
-            <a:spLocks noGrp="1" noRot="1" noChangeAspect="1"/>
-          </p:cNvSpPr>
-          <p:nvPr>
-            <p:ph type="sldImg"/>
-          </p:nvPr>
-        </p:nvSpPr>
-        <p:spPr/>
-      </p:sp>
-      <p:sp>
-        <p:nvSpPr>
-          <p:cNvPr id="3" name="Notes Placeholder 2">
-            <a:extLst>
-              <a:ext uri="{FF2B5EF4-FFF2-40B4-BE49-F238E27FC236}">
-                <a16:creationId xmlns:a16="http://schemas.microsoft.com/office/drawing/2014/main" id="{78A69AE2-96AC-8E27-2CCE-F083B03E0A56}"/>
-              </a:ext>
-            </a:extLst>
-          </p:cNvPr>
-          <p:cNvSpPr>
-            <a:spLocks noGrp="1"/>
-          </p:cNvSpPr>
-          <p:nvPr>
-            <p:ph type="body" idx="1"/>
-          </p:nvPr>
-        </p:nvSpPr>
-        <p:spPr/>
-        <p:txBody>
-          <a:bodyPr/>
-          <a:lstStyle/>
-          <a:p>
-            <a:endParaRPr lang="en-US" dirty="0"/>
-          </a:p>
-        </p:txBody>
-      </p:sp>
-      <p:sp>
-        <p:nvSpPr>
-          <p:cNvPr id="4" name="Slide Number Placeholder 3">
-            <a:extLst>
-              <a:ext uri="{FF2B5EF4-FFF2-40B4-BE49-F238E27FC236}">
-                <a16:creationId xmlns:a16="http://schemas.microsoft.com/office/drawing/2014/main" id="{A57C739D-62E0-0506-0AD8-CD26B0586097}"/>
-              </a:ext>
-            </a:extLst>
-          </p:cNvPr>
-          <p:cNvSpPr>
-            <a:spLocks noGrp="1"/>
-          </p:cNvSpPr>
-          <p:nvPr>
-            <p:ph type="sldNum" sz="quarter" idx="5"/>
-          </p:nvPr>
-        </p:nvSpPr>
-        <p:spPr/>
-        <p:txBody>
-          <a:bodyPr/>
-          <a:lstStyle/>
-          <a:p>
-            <a:fld id="{7332F5B2-8E9E-A043-910C-D623E320FEF5}" type="slidenum">
-              <a:rPr lang="en-US" smtClean="0"/>
-              <a:t>26</a:t>
-            </a:fld>
-            <a:endParaRPr lang="en-US"/>
-          </a:p>
-        </p:txBody>
-      </p:sp>
-    </p:spTree>
-    <p:extLst>
-      <p:ext uri="{BB962C8B-B14F-4D97-AF65-F5344CB8AC3E}">
-        <p14:creationId xmlns:p14="http://schemas.microsoft.com/office/powerpoint/2010/main" val="1243629380"/>
       </p:ext>
     </p:extLst>
   </p:cSld>
@@ -5109,7 +5265,10 @@
           <a:bodyPr/>
           <a:lstStyle/>
           <a:p>
-            <a:endParaRPr lang="en-US" dirty="0"/>
+            <a:r>
+              <a:rPr lang="en-US" dirty="0"/>
+              <a:t>There are 5 main points which will be covered in the presentations</a:t>
+            </a:r>
           </a:p>
         </p:txBody>
       </p:sp>
@@ -5130,7 +5289,7 @@
           <a:p>
             <a:fld id="{7332F5B2-8E9E-A043-910C-D623E320FEF5}" type="slidenum">
               <a:rPr lang="en-US" smtClean="0"/>
-              <a:t>9</a:t>
+              <a:t>2</a:t>
             </a:fld>
             <a:endParaRPr lang="en-US"/>
           </a:p>
@@ -5139,7 +5298,7 @@
     </p:spTree>
     <p:extLst>
       <p:ext uri="{BB962C8B-B14F-4D97-AF65-F5344CB8AC3E}">
-        <p14:creationId xmlns:p14="http://schemas.microsoft.com/office/powerpoint/2010/main" val="569595237"/>
+        <p14:creationId xmlns:p14="http://schemas.microsoft.com/office/powerpoint/2010/main" val="4108695915"/>
       </p:ext>
     </p:extLst>
   </p:cSld>
@@ -5150,6 +5309,792 @@
 </file>
 
 <file path=ppt/notesSlides/notesSlide20.xml><?xml version="1.0" encoding="utf-8"?>
+<p:notes xmlns:a="http://schemas.openxmlformats.org/drawingml/2006/main" xmlns:r="http://schemas.openxmlformats.org/officeDocument/2006/relationships" xmlns:p="http://schemas.openxmlformats.org/presentationml/2006/main">
+  <p:cSld>
+    <p:spTree>
+      <p:nvGrpSpPr>
+        <p:cNvPr id="1" name="">
+          <a:extLst>
+            <a:ext uri="{FF2B5EF4-FFF2-40B4-BE49-F238E27FC236}">
+              <a16:creationId xmlns:a16="http://schemas.microsoft.com/office/drawing/2014/main" id="{B3B49AE0-425F-D645-FFA2-ED6A942BA8A4}"/>
+            </a:ext>
+          </a:extLst>
+        </p:cNvPr>
+        <p:cNvGrpSpPr/>
+        <p:nvPr/>
+      </p:nvGrpSpPr>
+      <p:grpSpPr>
+        <a:xfrm>
+          <a:off x="0" y="0"/>
+          <a:ext cx="0" cy="0"/>
+          <a:chOff x="0" y="0"/>
+          <a:chExt cx="0" cy="0"/>
+        </a:xfrm>
+      </p:grpSpPr>
+      <p:sp>
+        <p:nvSpPr>
+          <p:cNvPr id="2" name="Slide Image Placeholder 1">
+            <a:extLst>
+              <a:ext uri="{FF2B5EF4-FFF2-40B4-BE49-F238E27FC236}">
+                <a16:creationId xmlns:a16="http://schemas.microsoft.com/office/drawing/2014/main" id="{0FC446B0-8513-7138-7FEE-3670ABE4327D}"/>
+              </a:ext>
+            </a:extLst>
+          </p:cNvPr>
+          <p:cNvSpPr>
+            <a:spLocks noGrp="1" noRot="1" noChangeAspect="1"/>
+          </p:cNvSpPr>
+          <p:nvPr>
+            <p:ph type="sldImg"/>
+          </p:nvPr>
+        </p:nvSpPr>
+        <p:spPr/>
+      </p:sp>
+      <p:sp>
+        <p:nvSpPr>
+          <p:cNvPr id="3" name="Notes Placeholder 2">
+            <a:extLst>
+              <a:ext uri="{FF2B5EF4-FFF2-40B4-BE49-F238E27FC236}">
+                <a16:creationId xmlns:a16="http://schemas.microsoft.com/office/drawing/2014/main" id="{2784F6F1-241B-6819-0A4C-1F2CD74280E0}"/>
+              </a:ext>
+            </a:extLst>
+          </p:cNvPr>
+          <p:cNvSpPr>
+            <a:spLocks noGrp="1"/>
+          </p:cNvSpPr>
+          <p:nvPr>
+            <p:ph type="body" idx="1"/>
+          </p:nvPr>
+        </p:nvSpPr>
+        <p:spPr/>
+        <p:txBody>
+          <a:bodyPr/>
+          <a:lstStyle/>
+          <a:p>
+            <a:r>
+              <a:rPr lang="en-US" dirty="0"/>
+              <a:t>If that spot is the desire destination we will return the result</a:t>
+            </a:r>
+          </a:p>
+        </p:txBody>
+      </p:sp>
+      <p:sp>
+        <p:nvSpPr>
+          <p:cNvPr id="4" name="Slide Number Placeholder 3">
+            <a:extLst>
+              <a:ext uri="{FF2B5EF4-FFF2-40B4-BE49-F238E27FC236}">
+                <a16:creationId xmlns:a16="http://schemas.microsoft.com/office/drawing/2014/main" id="{9E78C8A6-8684-7473-BC93-DDF734E14B94}"/>
+              </a:ext>
+            </a:extLst>
+          </p:cNvPr>
+          <p:cNvSpPr>
+            <a:spLocks noGrp="1"/>
+          </p:cNvSpPr>
+          <p:nvPr>
+            <p:ph type="sldNum" sz="quarter" idx="5"/>
+          </p:nvPr>
+        </p:nvSpPr>
+        <p:spPr/>
+        <p:txBody>
+          <a:bodyPr/>
+          <a:lstStyle/>
+          <a:p>
+            <a:fld id="{7332F5B2-8E9E-A043-910C-D623E320FEF5}" type="slidenum">
+              <a:rPr lang="en-US" smtClean="0"/>
+              <a:t>20</a:t>
+            </a:fld>
+            <a:endParaRPr lang="en-US"/>
+          </a:p>
+        </p:txBody>
+      </p:sp>
+    </p:spTree>
+    <p:extLst>
+      <p:ext uri="{BB962C8B-B14F-4D97-AF65-F5344CB8AC3E}">
+        <p14:creationId xmlns:p14="http://schemas.microsoft.com/office/powerpoint/2010/main" val="2527559495"/>
+      </p:ext>
+    </p:extLst>
+  </p:cSld>
+  <p:clrMapOvr>
+    <a:masterClrMapping/>
+  </p:clrMapOvr>
+</p:notes>
+</file>
+
+<file path=ppt/notesSlides/notesSlide21.xml><?xml version="1.0" encoding="utf-8"?>
+<p:notes xmlns:a="http://schemas.openxmlformats.org/drawingml/2006/main" xmlns:r="http://schemas.openxmlformats.org/officeDocument/2006/relationships" xmlns:p="http://schemas.openxmlformats.org/presentationml/2006/main">
+  <p:cSld>
+    <p:spTree>
+      <p:nvGrpSpPr>
+        <p:cNvPr id="1" name="">
+          <a:extLst>
+            <a:ext uri="{FF2B5EF4-FFF2-40B4-BE49-F238E27FC236}">
+              <a16:creationId xmlns:a16="http://schemas.microsoft.com/office/drawing/2014/main" id="{5B436DE6-B0D6-4185-7B92-17DE7761CB3F}"/>
+            </a:ext>
+          </a:extLst>
+        </p:cNvPr>
+        <p:cNvGrpSpPr/>
+        <p:nvPr/>
+      </p:nvGrpSpPr>
+      <p:grpSpPr>
+        <a:xfrm>
+          <a:off x="0" y="0"/>
+          <a:ext cx="0" cy="0"/>
+          <a:chOff x="0" y="0"/>
+          <a:chExt cx="0" cy="0"/>
+        </a:xfrm>
+      </p:grpSpPr>
+      <p:sp>
+        <p:nvSpPr>
+          <p:cNvPr id="2" name="Slide Image Placeholder 1">
+            <a:extLst>
+              <a:ext uri="{FF2B5EF4-FFF2-40B4-BE49-F238E27FC236}">
+                <a16:creationId xmlns:a16="http://schemas.microsoft.com/office/drawing/2014/main" id="{EE920987-4CCA-9195-545B-C262B717AC06}"/>
+              </a:ext>
+            </a:extLst>
+          </p:cNvPr>
+          <p:cNvSpPr>
+            <a:spLocks noGrp="1" noRot="1" noChangeAspect="1"/>
+          </p:cNvSpPr>
+          <p:nvPr>
+            <p:ph type="sldImg"/>
+          </p:nvPr>
+        </p:nvSpPr>
+        <p:spPr/>
+      </p:sp>
+      <p:sp>
+        <p:nvSpPr>
+          <p:cNvPr id="3" name="Notes Placeholder 2">
+            <a:extLst>
+              <a:ext uri="{FF2B5EF4-FFF2-40B4-BE49-F238E27FC236}">
+                <a16:creationId xmlns:a16="http://schemas.microsoft.com/office/drawing/2014/main" id="{7A74A125-BC2B-F44F-6094-868706C80A18}"/>
+              </a:ext>
+            </a:extLst>
+          </p:cNvPr>
+          <p:cNvSpPr>
+            <a:spLocks noGrp="1"/>
+          </p:cNvSpPr>
+          <p:nvPr>
+            <p:ph type="body" idx="1"/>
+          </p:nvPr>
+        </p:nvSpPr>
+        <p:spPr/>
+        <p:txBody>
+          <a:bodyPr/>
+          <a:lstStyle/>
+          <a:p>
+            <a:r>
+              <a:rPr lang="en-US" dirty="0"/>
+              <a:t>Otherwise we will continue with the following steps</a:t>
+            </a:r>
+          </a:p>
+        </p:txBody>
+      </p:sp>
+      <p:sp>
+        <p:nvSpPr>
+          <p:cNvPr id="4" name="Slide Number Placeholder 3">
+            <a:extLst>
+              <a:ext uri="{FF2B5EF4-FFF2-40B4-BE49-F238E27FC236}">
+                <a16:creationId xmlns:a16="http://schemas.microsoft.com/office/drawing/2014/main" id="{61191889-DE14-544E-F923-8EB38609B8E8}"/>
+              </a:ext>
+            </a:extLst>
+          </p:cNvPr>
+          <p:cNvSpPr>
+            <a:spLocks noGrp="1"/>
+          </p:cNvSpPr>
+          <p:nvPr>
+            <p:ph type="sldNum" sz="quarter" idx="5"/>
+          </p:nvPr>
+        </p:nvSpPr>
+        <p:spPr/>
+        <p:txBody>
+          <a:bodyPr/>
+          <a:lstStyle/>
+          <a:p>
+            <a:fld id="{7332F5B2-8E9E-A043-910C-D623E320FEF5}" type="slidenum">
+              <a:rPr lang="en-US" smtClean="0"/>
+              <a:t>21</a:t>
+            </a:fld>
+            <a:endParaRPr lang="en-US"/>
+          </a:p>
+        </p:txBody>
+      </p:sp>
+    </p:spTree>
+    <p:extLst>
+      <p:ext uri="{BB962C8B-B14F-4D97-AF65-F5344CB8AC3E}">
+        <p14:creationId xmlns:p14="http://schemas.microsoft.com/office/powerpoint/2010/main" val="4006588869"/>
+      </p:ext>
+    </p:extLst>
+  </p:cSld>
+  <p:clrMapOvr>
+    <a:masterClrMapping/>
+  </p:clrMapOvr>
+</p:notes>
+</file>
+
+<file path=ppt/notesSlides/notesSlide22.xml><?xml version="1.0" encoding="utf-8"?>
+<p:notes xmlns:a="http://schemas.openxmlformats.org/drawingml/2006/main" xmlns:r="http://schemas.openxmlformats.org/officeDocument/2006/relationships" xmlns:p="http://schemas.openxmlformats.org/presentationml/2006/main">
+  <p:cSld>
+    <p:spTree>
+      <p:nvGrpSpPr>
+        <p:cNvPr id="1" name="">
+          <a:extLst>
+            <a:ext uri="{FF2B5EF4-FFF2-40B4-BE49-F238E27FC236}">
+              <a16:creationId xmlns:a16="http://schemas.microsoft.com/office/drawing/2014/main" id="{AA574C87-8855-0B10-3A71-D1A039E85B2A}"/>
+            </a:ext>
+          </a:extLst>
+        </p:cNvPr>
+        <p:cNvGrpSpPr/>
+        <p:nvPr/>
+      </p:nvGrpSpPr>
+      <p:grpSpPr>
+        <a:xfrm>
+          <a:off x="0" y="0"/>
+          <a:ext cx="0" cy="0"/>
+          <a:chOff x="0" y="0"/>
+          <a:chExt cx="0" cy="0"/>
+        </a:xfrm>
+      </p:grpSpPr>
+      <p:sp>
+        <p:nvSpPr>
+          <p:cNvPr id="2" name="Slide Image Placeholder 1">
+            <a:extLst>
+              <a:ext uri="{FF2B5EF4-FFF2-40B4-BE49-F238E27FC236}">
+                <a16:creationId xmlns:a16="http://schemas.microsoft.com/office/drawing/2014/main" id="{448A9F8F-98EF-6F25-A3C7-030EEEF8AF3F}"/>
+              </a:ext>
+            </a:extLst>
+          </p:cNvPr>
+          <p:cNvSpPr>
+            <a:spLocks noGrp="1" noRot="1" noChangeAspect="1"/>
+          </p:cNvSpPr>
+          <p:nvPr>
+            <p:ph type="sldImg"/>
+          </p:nvPr>
+        </p:nvSpPr>
+        <p:spPr/>
+      </p:sp>
+      <p:sp>
+        <p:nvSpPr>
+          <p:cNvPr id="3" name="Notes Placeholder 2">
+            <a:extLst>
+              <a:ext uri="{FF2B5EF4-FFF2-40B4-BE49-F238E27FC236}">
+                <a16:creationId xmlns:a16="http://schemas.microsoft.com/office/drawing/2014/main" id="{5FDF6D4D-682B-3720-D7E1-599E212F6051}"/>
+              </a:ext>
+            </a:extLst>
+          </p:cNvPr>
+          <p:cNvSpPr>
+            <a:spLocks noGrp="1"/>
+          </p:cNvSpPr>
+          <p:nvPr>
+            <p:ph type="body" idx="1"/>
+          </p:nvPr>
+        </p:nvSpPr>
+        <p:spPr/>
+        <p:txBody>
+          <a:bodyPr/>
+          <a:lstStyle/>
+          <a:p>
+            <a:r>
+              <a:rPr lang="en-US" dirty="0"/>
+              <a:t>We will set them to “0” which effectively means that we will never visit that spot again in the future</a:t>
+            </a:r>
+          </a:p>
+        </p:txBody>
+      </p:sp>
+      <p:sp>
+        <p:nvSpPr>
+          <p:cNvPr id="4" name="Slide Number Placeholder 3">
+            <a:extLst>
+              <a:ext uri="{FF2B5EF4-FFF2-40B4-BE49-F238E27FC236}">
+                <a16:creationId xmlns:a16="http://schemas.microsoft.com/office/drawing/2014/main" id="{0E87A6FE-17EE-34FD-2121-D50C18B2EF22}"/>
+              </a:ext>
+            </a:extLst>
+          </p:cNvPr>
+          <p:cNvSpPr>
+            <a:spLocks noGrp="1"/>
+          </p:cNvSpPr>
+          <p:nvPr>
+            <p:ph type="sldNum" sz="quarter" idx="5"/>
+          </p:nvPr>
+        </p:nvSpPr>
+        <p:spPr/>
+        <p:txBody>
+          <a:bodyPr/>
+          <a:lstStyle/>
+          <a:p>
+            <a:fld id="{7332F5B2-8E9E-A043-910C-D623E320FEF5}" type="slidenum">
+              <a:rPr lang="en-US" smtClean="0"/>
+              <a:t>22</a:t>
+            </a:fld>
+            <a:endParaRPr lang="en-US"/>
+          </a:p>
+        </p:txBody>
+      </p:sp>
+    </p:spTree>
+    <p:extLst>
+      <p:ext uri="{BB962C8B-B14F-4D97-AF65-F5344CB8AC3E}">
+        <p14:creationId xmlns:p14="http://schemas.microsoft.com/office/powerpoint/2010/main" val="3191517643"/>
+      </p:ext>
+    </p:extLst>
+  </p:cSld>
+  <p:clrMapOvr>
+    <a:masterClrMapping/>
+  </p:clrMapOvr>
+</p:notes>
+</file>
+
+<file path=ppt/notesSlides/notesSlide23.xml><?xml version="1.0" encoding="utf-8"?>
+<p:notes xmlns:a="http://schemas.openxmlformats.org/drawingml/2006/main" xmlns:r="http://schemas.openxmlformats.org/officeDocument/2006/relationships" xmlns:p="http://schemas.openxmlformats.org/presentationml/2006/main">
+  <p:cSld>
+    <p:spTree>
+      <p:nvGrpSpPr>
+        <p:cNvPr id="1" name="">
+          <a:extLst>
+            <a:ext uri="{FF2B5EF4-FFF2-40B4-BE49-F238E27FC236}">
+              <a16:creationId xmlns:a16="http://schemas.microsoft.com/office/drawing/2014/main" id="{1CF2BCBE-DF07-0486-449E-57C64662CE1A}"/>
+            </a:ext>
+          </a:extLst>
+        </p:cNvPr>
+        <p:cNvGrpSpPr/>
+        <p:nvPr/>
+      </p:nvGrpSpPr>
+      <p:grpSpPr>
+        <a:xfrm>
+          <a:off x="0" y="0"/>
+          <a:ext cx="0" cy="0"/>
+          <a:chOff x="0" y="0"/>
+          <a:chExt cx="0" cy="0"/>
+        </a:xfrm>
+      </p:grpSpPr>
+      <p:sp>
+        <p:nvSpPr>
+          <p:cNvPr id="2" name="Slide Image Placeholder 1">
+            <a:extLst>
+              <a:ext uri="{FF2B5EF4-FFF2-40B4-BE49-F238E27FC236}">
+                <a16:creationId xmlns:a16="http://schemas.microsoft.com/office/drawing/2014/main" id="{6EE94138-6ABE-83A3-A165-9F915FB460CE}"/>
+              </a:ext>
+            </a:extLst>
+          </p:cNvPr>
+          <p:cNvSpPr>
+            <a:spLocks noGrp="1" noRot="1" noChangeAspect="1"/>
+          </p:cNvSpPr>
+          <p:nvPr>
+            <p:ph type="sldImg"/>
+          </p:nvPr>
+        </p:nvSpPr>
+        <p:spPr/>
+      </p:sp>
+      <p:sp>
+        <p:nvSpPr>
+          <p:cNvPr id="3" name="Notes Placeholder 2">
+            <a:extLst>
+              <a:ext uri="{FF2B5EF4-FFF2-40B4-BE49-F238E27FC236}">
+                <a16:creationId xmlns:a16="http://schemas.microsoft.com/office/drawing/2014/main" id="{3FF1B68F-CA6C-2E51-27BC-F1B4533CECA4}"/>
+              </a:ext>
+            </a:extLst>
+          </p:cNvPr>
+          <p:cNvSpPr>
+            <a:spLocks noGrp="1"/>
+          </p:cNvSpPr>
+          <p:nvPr>
+            <p:ph type="body" idx="1"/>
+          </p:nvPr>
+        </p:nvSpPr>
+        <p:spPr/>
+        <p:txBody>
+          <a:bodyPr/>
+          <a:lstStyle/>
+          <a:p>
+            <a:r>
+              <a:rPr lang="en-US" dirty="0"/>
+              <a:t>And we keep repeating until we find the target</a:t>
+            </a:r>
+          </a:p>
+        </p:txBody>
+      </p:sp>
+      <p:sp>
+        <p:nvSpPr>
+          <p:cNvPr id="4" name="Slide Number Placeholder 3">
+            <a:extLst>
+              <a:ext uri="{FF2B5EF4-FFF2-40B4-BE49-F238E27FC236}">
+                <a16:creationId xmlns:a16="http://schemas.microsoft.com/office/drawing/2014/main" id="{941BFF5C-A011-F511-648B-C4C7CAEEBB63}"/>
+              </a:ext>
+            </a:extLst>
+          </p:cNvPr>
+          <p:cNvSpPr>
+            <a:spLocks noGrp="1"/>
+          </p:cNvSpPr>
+          <p:nvPr>
+            <p:ph type="sldNum" sz="quarter" idx="5"/>
+          </p:nvPr>
+        </p:nvSpPr>
+        <p:spPr/>
+        <p:txBody>
+          <a:bodyPr/>
+          <a:lstStyle/>
+          <a:p>
+            <a:fld id="{7332F5B2-8E9E-A043-910C-D623E320FEF5}" type="slidenum">
+              <a:rPr lang="en-US" smtClean="0"/>
+              <a:t>23</a:t>
+            </a:fld>
+            <a:endParaRPr lang="en-US"/>
+          </a:p>
+        </p:txBody>
+      </p:sp>
+    </p:spTree>
+    <p:extLst>
+      <p:ext uri="{BB962C8B-B14F-4D97-AF65-F5344CB8AC3E}">
+        <p14:creationId xmlns:p14="http://schemas.microsoft.com/office/powerpoint/2010/main" val="3276410259"/>
+      </p:ext>
+    </p:extLst>
+  </p:cSld>
+  <p:clrMapOvr>
+    <a:masterClrMapping/>
+  </p:clrMapOvr>
+</p:notes>
+</file>
+
+<file path=ppt/notesSlides/notesSlide24.xml><?xml version="1.0" encoding="utf-8"?>
+<p:notes xmlns:a="http://schemas.openxmlformats.org/drawingml/2006/main" xmlns:r="http://schemas.openxmlformats.org/officeDocument/2006/relationships" xmlns:p="http://schemas.openxmlformats.org/presentationml/2006/main">
+  <p:cSld>
+    <p:spTree>
+      <p:nvGrpSpPr>
+        <p:cNvPr id="1" name="">
+          <a:extLst>
+            <a:ext uri="{FF2B5EF4-FFF2-40B4-BE49-F238E27FC236}">
+              <a16:creationId xmlns:a16="http://schemas.microsoft.com/office/drawing/2014/main" id="{66021DF8-EEFA-8563-4677-7B994660EE28}"/>
+            </a:ext>
+          </a:extLst>
+        </p:cNvPr>
+        <p:cNvGrpSpPr/>
+        <p:nvPr/>
+      </p:nvGrpSpPr>
+      <p:grpSpPr>
+        <a:xfrm>
+          <a:off x="0" y="0"/>
+          <a:ext cx="0" cy="0"/>
+          <a:chOff x="0" y="0"/>
+          <a:chExt cx="0" cy="0"/>
+        </a:xfrm>
+      </p:grpSpPr>
+      <p:sp>
+        <p:nvSpPr>
+          <p:cNvPr id="2" name="Slide Image Placeholder 1">
+            <a:extLst>
+              <a:ext uri="{FF2B5EF4-FFF2-40B4-BE49-F238E27FC236}">
+                <a16:creationId xmlns:a16="http://schemas.microsoft.com/office/drawing/2014/main" id="{2ACCBF27-3A72-0E0C-A640-69735F9A0910}"/>
+              </a:ext>
+            </a:extLst>
+          </p:cNvPr>
+          <p:cNvSpPr>
+            <a:spLocks noGrp="1" noRot="1" noChangeAspect="1"/>
+          </p:cNvSpPr>
+          <p:nvPr>
+            <p:ph type="sldImg"/>
+          </p:nvPr>
+        </p:nvSpPr>
+        <p:spPr/>
+      </p:sp>
+      <p:sp>
+        <p:nvSpPr>
+          <p:cNvPr id="3" name="Notes Placeholder 2">
+            <a:extLst>
+              <a:ext uri="{FF2B5EF4-FFF2-40B4-BE49-F238E27FC236}">
+                <a16:creationId xmlns:a16="http://schemas.microsoft.com/office/drawing/2014/main" id="{7948BD99-0337-DFD8-7EFB-CFBF25350767}"/>
+              </a:ext>
+            </a:extLst>
+          </p:cNvPr>
+          <p:cNvSpPr>
+            <a:spLocks noGrp="1"/>
+          </p:cNvSpPr>
+          <p:nvPr>
+            <p:ph type="body" idx="1"/>
+          </p:nvPr>
+        </p:nvSpPr>
+        <p:spPr/>
+        <p:txBody>
+          <a:bodyPr/>
+          <a:lstStyle/>
+          <a:p>
+            <a:r>
+              <a:rPr lang="en-US" dirty="0"/>
+              <a:t>Let say this spot is the target</a:t>
+            </a:r>
+          </a:p>
+        </p:txBody>
+      </p:sp>
+      <p:sp>
+        <p:nvSpPr>
+          <p:cNvPr id="4" name="Slide Number Placeholder 3">
+            <a:extLst>
+              <a:ext uri="{FF2B5EF4-FFF2-40B4-BE49-F238E27FC236}">
+                <a16:creationId xmlns:a16="http://schemas.microsoft.com/office/drawing/2014/main" id="{D75C5288-3EB1-40A0-6447-50C02EEC4AB4}"/>
+              </a:ext>
+            </a:extLst>
+          </p:cNvPr>
+          <p:cNvSpPr>
+            <a:spLocks noGrp="1"/>
+          </p:cNvSpPr>
+          <p:nvPr>
+            <p:ph type="sldNum" sz="quarter" idx="5"/>
+          </p:nvPr>
+        </p:nvSpPr>
+        <p:spPr/>
+        <p:txBody>
+          <a:bodyPr/>
+          <a:lstStyle/>
+          <a:p>
+            <a:fld id="{7332F5B2-8E9E-A043-910C-D623E320FEF5}" type="slidenum">
+              <a:rPr lang="en-US" smtClean="0"/>
+              <a:t>24</a:t>
+            </a:fld>
+            <a:endParaRPr lang="en-US"/>
+          </a:p>
+        </p:txBody>
+      </p:sp>
+    </p:spTree>
+    <p:extLst>
+      <p:ext uri="{BB962C8B-B14F-4D97-AF65-F5344CB8AC3E}">
+        <p14:creationId xmlns:p14="http://schemas.microsoft.com/office/powerpoint/2010/main" val="3707092411"/>
+      </p:ext>
+    </p:extLst>
+  </p:cSld>
+  <p:clrMapOvr>
+    <a:masterClrMapping/>
+  </p:clrMapOvr>
+</p:notes>
+</file>
+
+<file path=ppt/notesSlides/notesSlide25.xml><?xml version="1.0" encoding="utf-8"?>
+<p:notes xmlns:a="http://schemas.openxmlformats.org/drawingml/2006/main" xmlns:r="http://schemas.openxmlformats.org/officeDocument/2006/relationships" xmlns:p="http://schemas.openxmlformats.org/presentationml/2006/main">
+  <p:cSld>
+    <p:spTree>
+      <p:nvGrpSpPr>
+        <p:cNvPr id="1" name="">
+          <a:extLst>
+            <a:ext uri="{FF2B5EF4-FFF2-40B4-BE49-F238E27FC236}">
+              <a16:creationId xmlns:a16="http://schemas.microsoft.com/office/drawing/2014/main" id="{79D86D46-D967-564C-0ABD-EE69AE0EB451}"/>
+            </a:ext>
+          </a:extLst>
+        </p:cNvPr>
+        <p:cNvGrpSpPr/>
+        <p:nvPr/>
+      </p:nvGrpSpPr>
+      <p:grpSpPr>
+        <a:xfrm>
+          <a:off x="0" y="0"/>
+          <a:ext cx="0" cy="0"/>
+          <a:chOff x="0" y="0"/>
+          <a:chExt cx="0" cy="0"/>
+        </a:xfrm>
+      </p:grpSpPr>
+      <p:sp>
+        <p:nvSpPr>
+          <p:cNvPr id="2" name="Slide Image Placeholder 1">
+            <a:extLst>
+              <a:ext uri="{FF2B5EF4-FFF2-40B4-BE49-F238E27FC236}">
+                <a16:creationId xmlns:a16="http://schemas.microsoft.com/office/drawing/2014/main" id="{78FDE493-5B62-41AA-497A-09998D392334}"/>
+              </a:ext>
+            </a:extLst>
+          </p:cNvPr>
+          <p:cNvSpPr>
+            <a:spLocks noGrp="1" noRot="1" noChangeAspect="1"/>
+          </p:cNvSpPr>
+          <p:nvPr>
+            <p:ph type="sldImg"/>
+          </p:nvPr>
+        </p:nvSpPr>
+        <p:spPr/>
+      </p:sp>
+      <p:sp>
+        <p:nvSpPr>
+          <p:cNvPr id="3" name="Notes Placeholder 2">
+            <a:extLst>
+              <a:ext uri="{FF2B5EF4-FFF2-40B4-BE49-F238E27FC236}">
+                <a16:creationId xmlns:a16="http://schemas.microsoft.com/office/drawing/2014/main" id="{5B27B9C0-9F15-BD2D-2CDD-D68FADA79C64}"/>
+              </a:ext>
+            </a:extLst>
+          </p:cNvPr>
+          <p:cNvSpPr>
+            <a:spLocks noGrp="1"/>
+          </p:cNvSpPr>
+          <p:nvPr>
+            <p:ph type="body" idx="1"/>
+          </p:nvPr>
+        </p:nvSpPr>
+        <p:spPr/>
+        <p:txBody>
+          <a:bodyPr/>
+          <a:lstStyle/>
+          <a:p>
+            <a:r>
+              <a:rPr lang="en-US" dirty="0"/>
+              <a:t>We return the value</a:t>
+            </a:r>
+          </a:p>
+        </p:txBody>
+      </p:sp>
+      <p:sp>
+        <p:nvSpPr>
+          <p:cNvPr id="4" name="Slide Number Placeholder 3">
+            <a:extLst>
+              <a:ext uri="{FF2B5EF4-FFF2-40B4-BE49-F238E27FC236}">
+                <a16:creationId xmlns:a16="http://schemas.microsoft.com/office/drawing/2014/main" id="{8B3AF785-693A-B074-66DE-DADC83C00F03}"/>
+              </a:ext>
+            </a:extLst>
+          </p:cNvPr>
+          <p:cNvSpPr>
+            <a:spLocks noGrp="1"/>
+          </p:cNvSpPr>
+          <p:nvPr>
+            <p:ph type="sldNum" sz="quarter" idx="5"/>
+          </p:nvPr>
+        </p:nvSpPr>
+        <p:spPr/>
+        <p:txBody>
+          <a:bodyPr/>
+          <a:lstStyle/>
+          <a:p>
+            <a:fld id="{7332F5B2-8E9E-A043-910C-D623E320FEF5}" type="slidenum">
+              <a:rPr lang="en-US" smtClean="0"/>
+              <a:t>25</a:t>
+            </a:fld>
+            <a:endParaRPr lang="en-US"/>
+          </a:p>
+        </p:txBody>
+      </p:sp>
+    </p:spTree>
+    <p:extLst>
+      <p:ext uri="{BB962C8B-B14F-4D97-AF65-F5344CB8AC3E}">
+        <p14:creationId xmlns:p14="http://schemas.microsoft.com/office/powerpoint/2010/main" val="2652456039"/>
+      </p:ext>
+    </p:extLst>
+  </p:cSld>
+  <p:clrMapOvr>
+    <a:masterClrMapping/>
+  </p:clrMapOvr>
+</p:notes>
+</file>
+
+<file path=ppt/notesSlides/notesSlide26.xml><?xml version="1.0" encoding="utf-8"?>
+<p:notes xmlns:a="http://schemas.openxmlformats.org/drawingml/2006/main" xmlns:r="http://schemas.openxmlformats.org/officeDocument/2006/relationships" xmlns:p="http://schemas.openxmlformats.org/presentationml/2006/main">
+  <p:cSld>
+    <p:spTree>
+      <p:nvGrpSpPr>
+        <p:cNvPr id="1" name="">
+          <a:extLst>
+            <a:ext uri="{FF2B5EF4-FFF2-40B4-BE49-F238E27FC236}">
+              <a16:creationId xmlns:a16="http://schemas.microsoft.com/office/drawing/2014/main" id="{22FED86F-A59F-D823-FDB2-813F3E0DA2F5}"/>
+            </a:ext>
+          </a:extLst>
+        </p:cNvPr>
+        <p:cNvGrpSpPr/>
+        <p:nvPr/>
+      </p:nvGrpSpPr>
+      <p:grpSpPr>
+        <a:xfrm>
+          <a:off x="0" y="0"/>
+          <a:ext cx="0" cy="0"/>
+          <a:chOff x="0" y="0"/>
+          <a:chExt cx="0" cy="0"/>
+        </a:xfrm>
+      </p:grpSpPr>
+      <p:sp>
+        <p:nvSpPr>
+          <p:cNvPr id="2" name="Slide Image Placeholder 1">
+            <a:extLst>
+              <a:ext uri="{FF2B5EF4-FFF2-40B4-BE49-F238E27FC236}">
+                <a16:creationId xmlns:a16="http://schemas.microsoft.com/office/drawing/2014/main" id="{B60A5735-758E-66F4-A897-8C3D3548A4B1}"/>
+              </a:ext>
+            </a:extLst>
+          </p:cNvPr>
+          <p:cNvSpPr>
+            <a:spLocks noGrp="1" noRot="1" noChangeAspect="1"/>
+          </p:cNvSpPr>
+          <p:nvPr>
+            <p:ph type="sldImg"/>
+          </p:nvPr>
+        </p:nvSpPr>
+        <p:spPr/>
+      </p:sp>
+      <p:sp>
+        <p:nvSpPr>
+          <p:cNvPr id="3" name="Notes Placeholder 2">
+            <a:extLst>
+              <a:ext uri="{FF2B5EF4-FFF2-40B4-BE49-F238E27FC236}">
+                <a16:creationId xmlns:a16="http://schemas.microsoft.com/office/drawing/2014/main" id="{78A69AE2-96AC-8E27-2CCE-F083B03E0A56}"/>
+              </a:ext>
+            </a:extLst>
+          </p:cNvPr>
+          <p:cNvSpPr>
+            <a:spLocks noGrp="1"/>
+          </p:cNvSpPr>
+          <p:nvPr>
+            <p:ph type="body" idx="1"/>
+          </p:nvPr>
+        </p:nvSpPr>
+        <p:spPr/>
+        <p:txBody>
+          <a:bodyPr/>
+          <a:lstStyle/>
+          <a:p>
+            <a:r>
+              <a:rPr lang="en-US" dirty="0"/>
+              <a:t>Dr. Zhang Mengmi and her colleague research validate the cognitive theory proposed by Wolfe in 1994.</a:t>
+            </a:r>
+          </a:p>
+          <a:p>
+            <a:endParaRPr lang="en-US" dirty="0"/>
+          </a:p>
+          <a:p>
+            <a:r>
+              <a:rPr lang="en-US" dirty="0"/>
+              <a:t>On top of that, the model also show its capability of zero-shot invariant, which allow for searching object of the same categories but with different appearance.</a:t>
+            </a:r>
+          </a:p>
+        </p:txBody>
+      </p:sp>
+      <p:sp>
+        <p:nvSpPr>
+          <p:cNvPr id="4" name="Slide Number Placeholder 3">
+            <a:extLst>
+              <a:ext uri="{FF2B5EF4-FFF2-40B4-BE49-F238E27FC236}">
+                <a16:creationId xmlns:a16="http://schemas.microsoft.com/office/drawing/2014/main" id="{A57C739D-62E0-0506-0AD8-CD26B0586097}"/>
+              </a:ext>
+            </a:extLst>
+          </p:cNvPr>
+          <p:cNvSpPr>
+            <a:spLocks noGrp="1"/>
+          </p:cNvSpPr>
+          <p:nvPr>
+            <p:ph type="sldNum" sz="quarter" idx="5"/>
+          </p:nvPr>
+        </p:nvSpPr>
+        <p:spPr/>
+        <p:txBody>
+          <a:bodyPr/>
+          <a:lstStyle/>
+          <a:p>
+            <a:fld id="{7332F5B2-8E9E-A043-910C-D623E320FEF5}" type="slidenum">
+              <a:rPr lang="en-US" smtClean="0"/>
+              <a:t>26</a:t>
+            </a:fld>
+            <a:endParaRPr lang="en-US"/>
+          </a:p>
+        </p:txBody>
+      </p:sp>
+    </p:spTree>
+    <p:extLst>
+      <p:ext uri="{BB962C8B-B14F-4D97-AF65-F5344CB8AC3E}">
+        <p14:creationId xmlns:p14="http://schemas.microsoft.com/office/powerpoint/2010/main" val="1243629380"/>
+      </p:ext>
+    </p:extLst>
+  </p:cSld>
+  <p:clrMapOvr>
+    <a:masterClrMapping/>
+  </p:clrMapOvr>
+</p:notes>
+</file>
+
+<file path=ppt/notesSlides/notesSlide27.xml><?xml version="1.0" encoding="utf-8"?>
 <p:notes xmlns:a="http://schemas.openxmlformats.org/drawingml/2006/main" xmlns:r="http://schemas.openxmlformats.org/officeDocument/2006/relationships" xmlns:p="http://schemas.openxmlformats.org/presentationml/2006/main">
   <p:cSld>
     <p:spTree>
@@ -5211,7 +6156,10 @@
           <a:bodyPr/>
           <a:lstStyle/>
           <a:p>
-            <a:endParaRPr lang="en-US" dirty="0"/>
+            <a:r>
+              <a:rPr lang="en-US" dirty="0"/>
+              <a:t>Just as Wolfe refined his model, our effort in this FYP is to introduce contextual information to guide the visual search task.</a:t>
+            </a:r>
           </a:p>
         </p:txBody>
       </p:sp>
@@ -5257,7 +6205,7 @@
 </p:notes>
 </file>
 
-<file path=ppt/notesSlides/notesSlide21.xml><?xml version="1.0" encoding="utf-8"?>
+<file path=ppt/notesSlides/notesSlide28.xml><?xml version="1.0" encoding="utf-8"?>
 <p:notes xmlns:a="http://schemas.openxmlformats.org/drawingml/2006/main" xmlns:r="http://schemas.openxmlformats.org/officeDocument/2006/relationships" xmlns:p="http://schemas.openxmlformats.org/presentationml/2006/main">
   <p:cSld>
     <p:spTree>
@@ -5365,7 +6313,7 @@
 </p:notes>
 </file>
 
-<file path=ppt/notesSlides/notesSlide22.xml><?xml version="1.0" encoding="utf-8"?>
+<file path=ppt/notesSlides/notesSlide29.xml><?xml version="1.0" encoding="utf-8"?>
 <p:notes xmlns:a="http://schemas.openxmlformats.org/drawingml/2006/main" xmlns:r="http://schemas.openxmlformats.org/officeDocument/2006/relationships" xmlns:p="http://schemas.openxmlformats.org/presentationml/2006/main">
   <p:cSld>
     <p:spTree>
@@ -5473,7 +6421,94 @@
 </p:notes>
 </file>
 
-<file path=ppt/notesSlides/notesSlide23.xml><?xml version="1.0" encoding="utf-8"?>
+<file path=ppt/notesSlides/notesSlide3.xml><?xml version="1.0" encoding="utf-8"?>
+<p:notes xmlns:a="http://schemas.openxmlformats.org/drawingml/2006/main" xmlns:r="http://schemas.openxmlformats.org/officeDocument/2006/relationships" xmlns:p="http://schemas.openxmlformats.org/presentationml/2006/main">
+  <p:cSld>
+    <p:spTree>
+      <p:nvGrpSpPr>
+        <p:cNvPr id="1" name=""/>
+        <p:cNvGrpSpPr/>
+        <p:nvPr/>
+      </p:nvGrpSpPr>
+      <p:grpSpPr>
+        <a:xfrm>
+          <a:off x="0" y="0"/>
+          <a:ext cx="0" cy="0"/>
+          <a:chOff x="0" y="0"/>
+          <a:chExt cx="0" cy="0"/>
+        </a:xfrm>
+      </p:grpSpPr>
+      <p:sp>
+        <p:nvSpPr>
+          <p:cNvPr id="2" name="Slide Image Placeholder 1"/>
+          <p:cNvSpPr>
+            <a:spLocks noGrp="1" noRot="1" noChangeAspect="1"/>
+          </p:cNvSpPr>
+          <p:nvPr>
+            <p:ph type="sldImg"/>
+          </p:nvPr>
+        </p:nvSpPr>
+        <p:spPr/>
+      </p:sp>
+      <p:sp>
+        <p:nvSpPr>
+          <p:cNvPr id="3" name="Notes Placeholder 2"/>
+          <p:cNvSpPr>
+            <a:spLocks noGrp="1"/>
+          </p:cNvSpPr>
+          <p:nvPr>
+            <p:ph type="body" idx="1"/>
+          </p:nvPr>
+        </p:nvSpPr>
+        <p:spPr/>
+        <p:txBody>
+          <a:bodyPr/>
+          <a:lstStyle/>
+          <a:p>
+            <a:r>
+              <a:rPr lang="en-US" dirty="0"/>
+              <a:t>We will begin with the introduction</a:t>
+            </a:r>
+          </a:p>
+        </p:txBody>
+      </p:sp>
+      <p:sp>
+        <p:nvSpPr>
+          <p:cNvPr id="4" name="Slide Number Placeholder 3"/>
+          <p:cNvSpPr>
+            <a:spLocks noGrp="1"/>
+          </p:cNvSpPr>
+          <p:nvPr>
+            <p:ph type="sldNum" sz="quarter" idx="5"/>
+          </p:nvPr>
+        </p:nvSpPr>
+        <p:spPr/>
+        <p:txBody>
+          <a:bodyPr/>
+          <a:lstStyle/>
+          <a:p>
+            <a:fld id="{7332F5B2-8E9E-A043-910C-D623E320FEF5}" type="slidenum">
+              <a:rPr lang="en-US" smtClean="0"/>
+              <a:t>3</a:t>
+            </a:fld>
+            <a:endParaRPr lang="en-US"/>
+          </a:p>
+        </p:txBody>
+      </p:sp>
+    </p:spTree>
+    <p:extLst>
+      <p:ext uri="{BB962C8B-B14F-4D97-AF65-F5344CB8AC3E}">
+        <p14:creationId xmlns:p14="http://schemas.microsoft.com/office/powerpoint/2010/main" val="3859195179"/>
+      </p:ext>
+    </p:extLst>
+  </p:cSld>
+  <p:clrMapOvr>
+    <a:masterClrMapping/>
+  </p:clrMapOvr>
+</p:notes>
+</file>
+
+<file path=ppt/notesSlides/notesSlide30.xml><?xml version="1.0" encoding="utf-8"?>
 <p:notes xmlns:a="http://schemas.openxmlformats.org/drawingml/2006/main" xmlns:r="http://schemas.openxmlformats.org/officeDocument/2006/relationships" xmlns:p="http://schemas.openxmlformats.org/presentationml/2006/main">
   <p:cSld>
     <p:spTree>
@@ -5581,7 +6616,7 @@
 </p:notes>
 </file>
 
-<file path=ppt/notesSlides/notesSlide24.xml><?xml version="1.0" encoding="utf-8"?>
+<file path=ppt/notesSlides/notesSlide31.xml><?xml version="1.0" encoding="utf-8"?>
 <p:notes xmlns:a="http://schemas.openxmlformats.org/drawingml/2006/main" xmlns:r="http://schemas.openxmlformats.org/officeDocument/2006/relationships" xmlns:p="http://schemas.openxmlformats.org/presentationml/2006/main">
   <p:cSld>
     <p:spTree>
@@ -5689,7 +6724,7 @@
 </p:notes>
 </file>
 
-<file path=ppt/notesSlides/notesSlide25.xml><?xml version="1.0" encoding="utf-8"?>
+<file path=ppt/notesSlides/notesSlide32.xml><?xml version="1.0" encoding="utf-8"?>
 <p:notes xmlns:a="http://schemas.openxmlformats.org/drawingml/2006/main" xmlns:r="http://schemas.openxmlformats.org/officeDocument/2006/relationships" xmlns:p="http://schemas.openxmlformats.org/presentationml/2006/main">
   <p:cSld>
     <p:spTree>
@@ -5797,7 +6832,7 @@
 </p:notes>
 </file>
 
-<file path=ppt/notesSlides/notesSlide26.xml><?xml version="1.0" encoding="utf-8"?>
+<file path=ppt/notesSlides/notesSlide33.xml><?xml version="1.0" encoding="utf-8"?>
 <p:notes xmlns:a="http://schemas.openxmlformats.org/drawingml/2006/main" xmlns:r="http://schemas.openxmlformats.org/officeDocument/2006/relationships" xmlns:p="http://schemas.openxmlformats.org/presentationml/2006/main">
   <p:cSld>
     <p:spTree>
@@ -5905,7 +6940,7 @@
 </p:notes>
 </file>
 
-<file path=ppt/notesSlides/notesSlide27.xml><?xml version="1.0" encoding="utf-8"?>
+<file path=ppt/notesSlides/notesSlide34.xml><?xml version="1.0" encoding="utf-8"?>
 <p:notes xmlns:a="http://schemas.openxmlformats.org/drawingml/2006/main" xmlns:r="http://schemas.openxmlformats.org/officeDocument/2006/relationships" xmlns:p="http://schemas.openxmlformats.org/presentationml/2006/main">
   <p:cSld>
     <p:spTree>
@@ -6013,7 +7048,7 @@
 </p:notes>
 </file>
 
-<file path=ppt/notesSlides/notesSlide28.xml><?xml version="1.0" encoding="utf-8"?>
+<file path=ppt/notesSlides/notesSlide35.xml><?xml version="1.0" encoding="utf-8"?>
 <p:notes xmlns:a="http://schemas.openxmlformats.org/drawingml/2006/main" xmlns:r="http://schemas.openxmlformats.org/officeDocument/2006/relationships" xmlns:p="http://schemas.openxmlformats.org/presentationml/2006/main">
   <p:cSld>
     <p:spTree>
@@ -6121,7 +7156,7 @@
 </p:notes>
 </file>
 
-<file path=ppt/notesSlides/notesSlide29.xml><?xml version="1.0" encoding="utf-8"?>
+<file path=ppt/notesSlides/notesSlide36.xml><?xml version="1.0" encoding="utf-8"?>
 <p:notes xmlns:a="http://schemas.openxmlformats.org/drawingml/2006/main" xmlns:r="http://schemas.openxmlformats.org/officeDocument/2006/relationships" xmlns:p="http://schemas.openxmlformats.org/presentationml/2006/main">
   <p:cSld>
     <p:spTree>
@@ -6229,115 +7264,7 @@
 </p:notes>
 </file>
 
-<file path=ppt/notesSlides/notesSlide3.xml><?xml version="1.0" encoding="utf-8"?>
-<p:notes xmlns:a="http://schemas.openxmlformats.org/drawingml/2006/main" xmlns:r="http://schemas.openxmlformats.org/officeDocument/2006/relationships" xmlns:p="http://schemas.openxmlformats.org/presentationml/2006/main">
-  <p:cSld>
-    <p:spTree>
-      <p:nvGrpSpPr>
-        <p:cNvPr id="1" name="">
-          <a:extLst>
-            <a:ext uri="{FF2B5EF4-FFF2-40B4-BE49-F238E27FC236}">
-              <a16:creationId xmlns:a16="http://schemas.microsoft.com/office/drawing/2014/main" id="{506E42DE-5F9C-0613-96F9-183D0FD015ED}"/>
-            </a:ext>
-          </a:extLst>
-        </p:cNvPr>
-        <p:cNvGrpSpPr/>
-        <p:nvPr/>
-      </p:nvGrpSpPr>
-      <p:grpSpPr>
-        <a:xfrm>
-          <a:off x="0" y="0"/>
-          <a:ext cx="0" cy="0"/>
-          <a:chOff x="0" y="0"/>
-          <a:chExt cx="0" cy="0"/>
-        </a:xfrm>
-      </p:grpSpPr>
-      <p:sp>
-        <p:nvSpPr>
-          <p:cNvPr id="2" name="Slide Image Placeholder 1">
-            <a:extLst>
-              <a:ext uri="{FF2B5EF4-FFF2-40B4-BE49-F238E27FC236}">
-                <a16:creationId xmlns:a16="http://schemas.microsoft.com/office/drawing/2014/main" id="{9746CE30-EA71-0879-EE45-9DBA6960CBB5}"/>
-              </a:ext>
-            </a:extLst>
-          </p:cNvPr>
-          <p:cNvSpPr>
-            <a:spLocks noGrp="1" noRot="1" noChangeAspect="1"/>
-          </p:cNvSpPr>
-          <p:nvPr>
-            <p:ph type="sldImg"/>
-          </p:nvPr>
-        </p:nvSpPr>
-        <p:spPr/>
-      </p:sp>
-      <p:sp>
-        <p:nvSpPr>
-          <p:cNvPr id="3" name="Notes Placeholder 2">
-            <a:extLst>
-              <a:ext uri="{FF2B5EF4-FFF2-40B4-BE49-F238E27FC236}">
-                <a16:creationId xmlns:a16="http://schemas.microsoft.com/office/drawing/2014/main" id="{749E5360-5E8D-4250-DCD5-2E6206E05A88}"/>
-              </a:ext>
-            </a:extLst>
-          </p:cNvPr>
-          <p:cNvSpPr>
-            <a:spLocks noGrp="1"/>
-          </p:cNvSpPr>
-          <p:nvPr>
-            <p:ph type="body" idx="1"/>
-          </p:nvPr>
-        </p:nvSpPr>
-        <p:spPr/>
-        <p:txBody>
-          <a:bodyPr/>
-          <a:lstStyle/>
-          <a:p>
-            <a:endParaRPr lang="en-US" dirty="0"/>
-          </a:p>
-        </p:txBody>
-      </p:sp>
-      <p:sp>
-        <p:nvSpPr>
-          <p:cNvPr id="4" name="Slide Number Placeholder 3">
-            <a:extLst>
-              <a:ext uri="{FF2B5EF4-FFF2-40B4-BE49-F238E27FC236}">
-                <a16:creationId xmlns:a16="http://schemas.microsoft.com/office/drawing/2014/main" id="{1A1937DC-7868-5AF0-5F6D-6E8E376073DA}"/>
-              </a:ext>
-            </a:extLst>
-          </p:cNvPr>
-          <p:cNvSpPr>
-            <a:spLocks noGrp="1"/>
-          </p:cNvSpPr>
-          <p:nvPr>
-            <p:ph type="sldNum" sz="quarter" idx="5"/>
-          </p:nvPr>
-        </p:nvSpPr>
-        <p:spPr/>
-        <p:txBody>
-          <a:bodyPr/>
-          <a:lstStyle/>
-          <a:p>
-            <a:fld id="{7332F5B2-8E9E-A043-910C-D623E320FEF5}" type="slidenum">
-              <a:rPr lang="en-US" smtClean="0"/>
-              <a:t>10</a:t>
-            </a:fld>
-            <a:endParaRPr lang="en-US"/>
-          </a:p>
-        </p:txBody>
-      </p:sp>
-    </p:spTree>
-    <p:extLst>
-      <p:ext uri="{BB962C8B-B14F-4D97-AF65-F5344CB8AC3E}">
-        <p14:creationId xmlns:p14="http://schemas.microsoft.com/office/powerpoint/2010/main" val="1056342112"/>
-      </p:ext>
-    </p:extLst>
-  </p:cSld>
-  <p:clrMapOvr>
-    <a:masterClrMapping/>
-  </p:clrMapOvr>
-</p:notes>
-</file>
-
-<file path=ppt/notesSlides/notesSlide30.xml><?xml version="1.0" encoding="utf-8"?>
+<file path=ppt/notesSlides/notesSlide37.xml><?xml version="1.0" encoding="utf-8"?>
 <p:notes xmlns:a="http://schemas.openxmlformats.org/drawingml/2006/main" xmlns:r="http://schemas.openxmlformats.org/officeDocument/2006/relationships" xmlns:p="http://schemas.openxmlformats.org/presentationml/2006/main">
   <p:cSld>
     <p:spTree>
@@ -6445,7 +7372,7 @@
 </p:notes>
 </file>
 
-<file path=ppt/notesSlides/notesSlide31.xml><?xml version="1.0" encoding="utf-8"?>
+<file path=ppt/notesSlides/notesSlide38.xml><?xml version="1.0" encoding="utf-8"?>
 <p:notes xmlns:a="http://schemas.openxmlformats.org/drawingml/2006/main" xmlns:r="http://schemas.openxmlformats.org/officeDocument/2006/relationships" xmlns:p="http://schemas.openxmlformats.org/presentationml/2006/main">
   <p:cSld>
     <p:spTree>
@@ -6553,7 +7480,7 @@
 </p:notes>
 </file>
 
-<file path=ppt/notesSlides/notesSlide32.xml><?xml version="1.0" encoding="utf-8"?>
+<file path=ppt/notesSlides/notesSlide39.xml><?xml version="1.0" encoding="utf-8"?>
 <p:notes xmlns:a="http://schemas.openxmlformats.org/drawingml/2006/main" xmlns:r="http://schemas.openxmlformats.org/officeDocument/2006/relationships" xmlns:p="http://schemas.openxmlformats.org/presentationml/2006/main">
   <p:cSld>
     <p:spTree>
@@ -6661,7 +7588,7 @@
 </p:notes>
 </file>
 
-<file path=ppt/notesSlides/notesSlide33.xml><?xml version="1.0" encoding="utf-8"?>
+<file path=ppt/notesSlides/notesSlide4.xml><?xml version="1.0" encoding="utf-8"?>
 <p:notes xmlns:a="http://schemas.openxmlformats.org/drawingml/2006/main" xmlns:r="http://schemas.openxmlformats.org/officeDocument/2006/relationships" xmlns:p="http://schemas.openxmlformats.org/presentationml/2006/main">
   <p:cSld>
     <p:spTree>
@@ -6705,6 +7632,102 @@
           <a:bodyPr/>
           <a:lstStyle/>
           <a:p>
+            <a:r>
+              <a:rPr lang="en-US" dirty="0"/>
+              <a:t>Most current existing visual search model are only depend on the context image information to infer the attention map to find the target.  Most of the models are recognition task-based rather than an attention-map-based visual search model.</a:t>
+            </a:r>
+          </a:p>
+          <a:p>
+            <a:endParaRPr lang="en-US" dirty="0"/>
+          </a:p>
+          <a:p>
+            <a:r>
+              <a:rPr lang="en-US" dirty="0"/>
+              <a:t>Therefore, we propose a new attention-map-based and top-down visual search model that mimicking human search behavior</a:t>
+            </a:r>
+          </a:p>
+        </p:txBody>
+      </p:sp>
+      <p:sp>
+        <p:nvSpPr>
+          <p:cNvPr id="4" name="Slide Number Placeholder 3"/>
+          <p:cNvSpPr>
+            <a:spLocks noGrp="1"/>
+          </p:cNvSpPr>
+          <p:nvPr>
+            <p:ph type="sldNum" sz="quarter" idx="5"/>
+          </p:nvPr>
+        </p:nvSpPr>
+        <p:spPr/>
+        <p:txBody>
+          <a:bodyPr/>
+          <a:lstStyle/>
+          <a:p>
+            <a:fld id="{7332F5B2-8E9E-A043-910C-D623E320FEF5}" type="slidenum">
+              <a:rPr lang="en-US" smtClean="0"/>
+              <a:t>4</a:t>
+            </a:fld>
+            <a:endParaRPr lang="en-US"/>
+          </a:p>
+        </p:txBody>
+      </p:sp>
+    </p:spTree>
+    <p:extLst>
+      <p:ext uri="{BB962C8B-B14F-4D97-AF65-F5344CB8AC3E}">
+        <p14:creationId xmlns:p14="http://schemas.microsoft.com/office/powerpoint/2010/main" val="1486947499"/>
+      </p:ext>
+    </p:extLst>
+  </p:cSld>
+  <p:clrMapOvr>
+    <a:masterClrMapping/>
+  </p:clrMapOvr>
+</p:notes>
+</file>
+
+<file path=ppt/notesSlides/notesSlide40.xml><?xml version="1.0" encoding="utf-8"?>
+<p:notes xmlns:a="http://schemas.openxmlformats.org/drawingml/2006/main" xmlns:r="http://schemas.openxmlformats.org/officeDocument/2006/relationships" xmlns:p="http://schemas.openxmlformats.org/presentationml/2006/main">
+  <p:cSld>
+    <p:spTree>
+      <p:nvGrpSpPr>
+        <p:cNvPr id="1" name=""/>
+        <p:cNvGrpSpPr/>
+        <p:nvPr/>
+      </p:nvGrpSpPr>
+      <p:grpSpPr>
+        <a:xfrm>
+          <a:off x="0" y="0"/>
+          <a:ext cx="0" cy="0"/>
+          <a:chOff x="0" y="0"/>
+          <a:chExt cx="0" cy="0"/>
+        </a:xfrm>
+      </p:grpSpPr>
+      <p:sp>
+        <p:nvSpPr>
+          <p:cNvPr id="2" name="Slide Image Placeholder 1"/>
+          <p:cNvSpPr>
+            <a:spLocks noGrp="1" noRot="1" noChangeAspect="1"/>
+          </p:cNvSpPr>
+          <p:nvPr>
+            <p:ph type="sldImg"/>
+          </p:nvPr>
+        </p:nvSpPr>
+        <p:spPr/>
+      </p:sp>
+      <p:sp>
+        <p:nvSpPr>
+          <p:cNvPr id="3" name="Notes Placeholder 2"/>
+          <p:cNvSpPr>
+            <a:spLocks noGrp="1"/>
+          </p:cNvSpPr>
+          <p:nvPr>
+            <p:ph type="body" idx="1"/>
+          </p:nvPr>
+        </p:nvSpPr>
+        <p:spPr/>
+        <p:txBody>
+          <a:bodyPr/>
+          <a:lstStyle/>
+          <a:p>
             <a:endParaRPr lang="en-US" dirty="0"/>
           </a:p>
         </p:txBody>
@@ -6745,7 +7768,7 @@
 </p:notes>
 </file>
 
-<file path=ppt/notesSlides/notesSlide34.xml><?xml version="1.0" encoding="utf-8"?>
+<file path=ppt/notesSlides/notesSlide41.xml><?xml version="1.0" encoding="utf-8"?>
 <p:notes xmlns:a="http://schemas.openxmlformats.org/drawingml/2006/main" xmlns:r="http://schemas.openxmlformats.org/officeDocument/2006/relationships" xmlns:p="http://schemas.openxmlformats.org/presentationml/2006/main">
   <p:cSld>
     <p:spTree>
@@ -6853,7 +7876,7 @@
 </p:notes>
 </file>
 
-<file path=ppt/notesSlides/notesSlide35.xml><?xml version="1.0" encoding="utf-8"?>
+<file path=ppt/notesSlides/notesSlide42.xml><?xml version="1.0" encoding="utf-8"?>
 <p:notes xmlns:a="http://schemas.openxmlformats.org/drawingml/2006/main" xmlns:r="http://schemas.openxmlformats.org/officeDocument/2006/relationships" xmlns:p="http://schemas.openxmlformats.org/presentationml/2006/main">
   <p:cSld>
     <p:spTree>
@@ -6961,18 +7984,12 @@
 </p:notes>
 </file>
 
-<file path=ppt/notesSlides/notesSlide4.xml><?xml version="1.0" encoding="utf-8"?>
+<file path=ppt/notesSlides/notesSlide5.xml><?xml version="1.0" encoding="utf-8"?>
 <p:notes xmlns:a="http://schemas.openxmlformats.org/drawingml/2006/main" xmlns:r="http://schemas.openxmlformats.org/officeDocument/2006/relationships" xmlns:p="http://schemas.openxmlformats.org/presentationml/2006/main">
   <p:cSld>
     <p:spTree>
       <p:nvGrpSpPr>
-        <p:cNvPr id="1" name="">
-          <a:extLst>
-            <a:ext uri="{FF2B5EF4-FFF2-40B4-BE49-F238E27FC236}">
-              <a16:creationId xmlns:a16="http://schemas.microsoft.com/office/drawing/2014/main" id="{043F1EAC-B71B-FDE6-27B5-1160AB6CF74E}"/>
-            </a:ext>
-          </a:extLst>
-        </p:cNvPr>
+        <p:cNvPr id="1" name=""/>
         <p:cNvGrpSpPr/>
         <p:nvPr/>
       </p:nvGrpSpPr>
@@ -6986,13 +8003,7 @@
       </p:grpSpPr>
       <p:sp>
         <p:nvSpPr>
-          <p:cNvPr id="2" name="Slide Image Placeholder 1">
-            <a:extLst>
-              <a:ext uri="{FF2B5EF4-FFF2-40B4-BE49-F238E27FC236}">
-                <a16:creationId xmlns:a16="http://schemas.microsoft.com/office/drawing/2014/main" id="{698D243A-8815-03A6-E882-F43ABEC0C9EC}"/>
-              </a:ext>
-            </a:extLst>
-          </p:cNvPr>
+          <p:cNvPr id="2" name="Slide Image Placeholder 1"/>
           <p:cNvSpPr>
             <a:spLocks noGrp="1" noRot="1" noChangeAspect="1"/>
           </p:cNvSpPr>
@@ -7004,13 +8015,7 @@
       </p:sp>
       <p:sp>
         <p:nvSpPr>
-          <p:cNvPr id="3" name="Notes Placeholder 2">
-            <a:extLst>
-              <a:ext uri="{FF2B5EF4-FFF2-40B4-BE49-F238E27FC236}">
-                <a16:creationId xmlns:a16="http://schemas.microsoft.com/office/drawing/2014/main" id="{401F77F9-2814-84C2-573F-53A4D07E5FB0}"/>
-              </a:ext>
-            </a:extLst>
-          </p:cNvPr>
+          <p:cNvPr id="3" name="Notes Placeholder 2"/>
           <p:cNvSpPr>
             <a:spLocks noGrp="1"/>
           </p:cNvSpPr>
@@ -7023,19 +8028,49 @@
           <a:bodyPr/>
           <a:lstStyle/>
           <a:p>
+            <a:r>
+              <a:rPr lang="en-US" dirty="0"/>
+              <a:t>Before any further deep dive into the topic, we need to understand what is visual search.</a:t>
+            </a:r>
+          </a:p>
+          <a:p>
             <a:endParaRPr lang="en-US" dirty="0"/>
           </a:p>
+          <a:p>
+            <a:r>
+              <a:rPr lang="en-US" dirty="0"/>
+              <a:t>Visual search is academically defined by Treisman and </a:t>
+            </a:r>
+            <a:r>
+              <a:rPr lang="en-US" dirty="0" err="1"/>
+              <a:t>Gelade</a:t>
+            </a:r>
+            <a:r>
+              <a:rPr lang="en-US" dirty="0"/>
+              <a:t> in 1980 is a process of locating a target in a search </a:t>
+            </a:r>
+            <a:r>
+              <a:rPr lang="en-US" dirty="0" err="1"/>
+              <a:t>scence</a:t>
+            </a:r>
+            <a:r>
+              <a:rPr lang="en-US" dirty="0"/>
+              <a:t>, display, images, </a:t>
+            </a:r>
+            <a:r>
+              <a:rPr lang="en-US" dirty="0" err="1"/>
+              <a:t>etc</a:t>
+            </a:r>
+            <a:r>
+              <a:rPr lang="en-US" dirty="0"/>
+              <a:t>, that contain multiple distractors.</a:t>
+            </a:r>
+          </a:p>
         </p:txBody>
       </p:sp>
       <p:sp>
         <p:nvSpPr>
-          <p:cNvPr id="4" name="Slide Number Placeholder 3">
-            <a:extLst>
-              <a:ext uri="{FF2B5EF4-FFF2-40B4-BE49-F238E27FC236}">
-                <a16:creationId xmlns:a16="http://schemas.microsoft.com/office/drawing/2014/main" id="{8FE64EC1-7751-E5EF-DAF8-BAC5868CDAAE}"/>
-              </a:ext>
-            </a:extLst>
-          </p:cNvPr>
+          <p:cNvPr id="4" name="Slide Number Placeholder 3"/>
           <p:cNvSpPr>
             <a:spLocks noGrp="1"/>
           </p:cNvSpPr>
@@ -7050,7 +8085,7 @@
           <a:p>
             <a:fld id="{7332F5B2-8E9E-A043-910C-D623E320FEF5}" type="slidenum">
               <a:rPr lang="en-US" smtClean="0"/>
-              <a:t>11</a:t>
+              <a:t>5</a:t>
             </a:fld>
             <a:endParaRPr lang="en-US"/>
           </a:p>
@@ -7059,115 +8094,7 @@
     </p:spTree>
     <p:extLst>
       <p:ext uri="{BB962C8B-B14F-4D97-AF65-F5344CB8AC3E}">
-        <p14:creationId xmlns:p14="http://schemas.microsoft.com/office/powerpoint/2010/main" val="2802333760"/>
-      </p:ext>
-    </p:extLst>
-  </p:cSld>
-  <p:clrMapOvr>
-    <a:masterClrMapping/>
-  </p:clrMapOvr>
-</p:notes>
-</file>
-
-<file path=ppt/notesSlides/notesSlide5.xml><?xml version="1.0" encoding="utf-8"?>
-<p:notes xmlns:a="http://schemas.openxmlformats.org/drawingml/2006/main" xmlns:r="http://schemas.openxmlformats.org/officeDocument/2006/relationships" xmlns:p="http://schemas.openxmlformats.org/presentationml/2006/main">
-  <p:cSld>
-    <p:spTree>
-      <p:nvGrpSpPr>
-        <p:cNvPr id="1" name="">
-          <a:extLst>
-            <a:ext uri="{FF2B5EF4-FFF2-40B4-BE49-F238E27FC236}">
-              <a16:creationId xmlns:a16="http://schemas.microsoft.com/office/drawing/2014/main" id="{B340B700-F042-2921-1CD0-4E009C048028}"/>
-            </a:ext>
-          </a:extLst>
-        </p:cNvPr>
-        <p:cNvGrpSpPr/>
-        <p:nvPr/>
-      </p:nvGrpSpPr>
-      <p:grpSpPr>
-        <a:xfrm>
-          <a:off x="0" y="0"/>
-          <a:ext cx="0" cy="0"/>
-          <a:chOff x="0" y="0"/>
-          <a:chExt cx="0" cy="0"/>
-        </a:xfrm>
-      </p:grpSpPr>
-      <p:sp>
-        <p:nvSpPr>
-          <p:cNvPr id="2" name="Slide Image Placeholder 1">
-            <a:extLst>
-              <a:ext uri="{FF2B5EF4-FFF2-40B4-BE49-F238E27FC236}">
-                <a16:creationId xmlns:a16="http://schemas.microsoft.com/office/drawing/2014/main" id="{91599BDB-7D43-A81B-32BE-F44845555664}"/>
-              </a:ext>
-            </a:extLst>
-          </p:cNvPr>
-          <p:cNvSpPr>
-            <a:spLocks noGrp="1" noRot="1" noChangeAspect="1"/>
-          </p:cNvSpPr>
-          <p:nvPr>
-            <p:ph type="sldImg"/>
-          </p:nvPr>
-        </p:nvSpPr>
-        <p:spPr/>
-      </p:sp>
-      <p:sp>
-        <p:nvSpPr>
-          <p:cNvPr id="3" name="Notes Placeholder 2">
-            <a:extLst>
-              <a:ext uri="{FF2B5EF4-FFF2-40B4-BE49-F238E27FC236}">
-                <a16:creationId xmlns:a16="http://schemas.microsoft.com/office/drawing/2014/main" id="{FA7184F4-289C-16FC-E762-D4E4A65BD7E6}"/>
-              </a:ext>
-            </a:extLst>
-          </p:cNvPr>
-          <p:cNvSpPr>
-            <a:spLocks noGrp="1"/>
-          </p:cNvSpPr>
-          <p:nvPr>
-            <p:ph type="body" idx="1"/>
-          </p:nvPr>
-        </p:nvSpPr>
-        <p:spPr/>
-        <p:txBody>
-          <a:bodyPr/>
-          <a:lstStyle/>
-          <a:p>
-            <a:endParaRPr lang="en-US" dirty="0"/>
-          </a:p>
-        </p:txBody>
-      </p:sp>
-      <p:sp>
-        <p:nvSpPr>
-          <p:cNvPr id="4" name="Slide Number Placeholder 3">
-            <a:extLst>
-              <a:ext uri="{FF2B5EF4-FFF2-40B4-BE49-F238E27FC236}">
-                <a16:creationId xmlns:a16="http://schemas.microsoft.com/office/drawing/2014/main" id="{0CA0BAF2-F186-03B4-3234-75EBAA42D2BF}"/>
-              </a:ext>
-            </a:extLst>
-          </p:cNvPr>
-          <p:cNvSpPr>
-            <a:spLocks noGrp="1"/>
-          </p:cNvSpPr>
-          <p:nvPr>
-            <p:ph type="sldNum" sz="quarter" idx="5"/>
-          </p:nvPr>
-        </p:nvSpPr>
-        <p:spPr/>
-        <p:txBody>
-          <a:bodyPr/>
-          <a:lstStyle/>
-          <a:p>
-            <a:fld id="{7332F5B2-8E9E-A043-910C-D623E320FEF5}" type="slidenum">
-              <a:rPr lang="en-US" smtClean="0"/>
-              <a:t>12</a:t>
-            </a:fld>
-            <a:endParaRPr lang="en-US"/>
-          </a:p>
-        </p:txBody>
-      </p:sp>
-    </p:spTree>
-    <p:extLst>
-      <p:ext uri="{BB962C8B-B14F-4D97-AF65-F5344CB8AC3E}">
-        <p14:creationId xmlns:p14="http://schemas.microsoft.com/office/powerpoint/2010/main" val="14193327"/>
+        <p14:creationId xmlns:p14="http://schemas.microsoft.com/office/powerpoint/2010/main" val="2023858777"/>
       </p:ext>
     </p:extLst>
   </p:cSld>
@@ -7182,13 +8109,7 @@
   <p:cSld>
     <p:spTree>
       <p:nvGrpSpPr>
-        <p:cNvPr id="1" name="">
-          <a:extLst>
-            <a:ext uri="{FF2B5EF4-FFF2-40B4-BE49-F238E27FC236}">
-              <a16:creationId xmlns:a16="http://schemas.microsoft.com/office/drawing/2014/main" id="{3E9361E3-A865-728E-7FBF-6F571D5CC1E9}"/>
-            </a:ext>
-          </a:extLst>
-        </p:cNvPr>
+        <p:cNvPr id="1" name=""/>
         <p:cNvGrpSpPr/>
         <p:nvPr/>
       </p:nvGrpSpPr>
@@ -7202,13 +8123,7 @@
       </p:grpSpPr>
       <p:sp>
         <p:nvSpPr>
-          <p:cNvPr id="2" name="Slide Image Placeholder 1">
-            <a:extLst>
-              <a:ext uri="{FF2B5EF4-FFF2-40B4-BE49-F238E27FC236}">
-                <a16:creationId xmlns:a16="http://schemas.microsoft.com/office/drawing/2014/main" id="{A2CE31FD-4816-952F-E834-91B942FD4408}"/>
-              </a:ext>
-            </a:extLst>
-          </p:cNvPr>
+          <p:cNvPr id="2" name="Slide Image Placeholder 1"/>
           <p:cNvSpPr>
             <a:spLocks noGrp="1" noRot="1" noChangeAspect="1"/>
           </p:cNvSpPr>
@@ -7220,13 +8135,7 @@
       </p:sp>
       <p:sp>
         <p:nvSpPr>
-          <p:cNvPr id="3" name="Notes Placeholder 2">
-            <a:extLst>
-              <a:ext uri="{FF2B5EF4-FFF2-40B4-BE49-F238E27FC236}">
-                <a16:creationId xmlns:a16="http://schemas.microsoft.com/office/drawing/2014/main" id="{97441665-3C04-54D7-EB5C-7613BFBE8CC6}"/>
-              </a:ext>
-            </a:extLst>
-          </p:cNvPr>
+          <p:cNvPr id="3" name="Notes Placeholder 2"/>
           <p:cNvSpPr>
             <a:spLocks noGrp="1"/>
           </p:cNvSpPr>
@@ -7245,13 +8154,7 @@
       </p:sp>
       <p:sp>
         <p:nvSpPr>
-          <p:cNvPr id="4" name="Slide Number Placeholder 3">
-            <a:extLst>
-              <a:ext uri="{FF2B5EF4-FFF2-40B4-BE49-F238E27FC236}">
-                <a16:creationId xmlns:a16="http://schemas.microsoft.com/office/drawing/2014/main" id="{5FC8637B-06CA-C46A-7E99-FDD289D46734}"/>
-              </a:ext>
-            </a:extLst>
-          </p:cNvPr>
+          <p:cNvPr id="4" name="Slide Number Placeholder 3"/>
           <p:cNvSpPr>
             <a:spLocks noGrp="1"/>
           </p:cNvSpPr>
@@ -7266,7 +8169,7 @@
           <a:p>
             <a:fld id="{7332F5B2-8E9E-A043-910C-D623E320FEF5}" type="slidenum">
               <a:rPr lang="en-US" smtClean="0"/>
-              <a:t>13</a:t>
+              <a:t>6</a:t>
             </a:fld>
             <a:endParaRPr lang="en-US"/>
           </a:p>
@@ -7275,7 +8178,7 @@
     </p:spTree>
     <p:extLst>
       <p:ext uri="{BB962C8B-B14F-4D97-AF65-F5344CB8AC3E}">
-        <p14:creationId xmlns:p14="http://schemas.microsoft.com/office/powerpoint/2010/main" val="2208211803"/>
+        <p14:creationId xmlns:p14="http://schemas.microsoft.com/office/powerpoint/2010/main" val="2196602246"/>
       </p:ext>
     </p:extLst>
   </p:cSld>
@@ -7290,13 +8193,7 @@
   <p:cSld>
     <p:spTree>
       <p:nvGrpSpPr>
-        <p:cNvPr id="1" name="">
-          <a:extLst>
-            <a:ext uri="{FF2B5EF4-FFF2-40B4-BE49-F238E27FC236}">
-              <a16:creationId xmlns:a16="http://schemas.microsoft.com/office/drawing/2014/main" id="{12603533-2EEF-596A-5F46-9CAB8E8B2EF5}"/>
-            </a:ext>
-          </a:extLst>
-        </p:cNvPr>
+        <p:cNvPr id="1" name=""/>
         <p:cNvGrpSpPr/>
         <p:nvPr/>
       </p:nvGrpSpPr>
@@ -7310,13 +8207,7 @@
       </p:grpSpPr>
       <p:sp>
         <p:nvSpPr>
-          <p:cNvPr id="2" name="Slide Image Placeholder 1">
-            <a:extLst>
-              <a:ext uri="{FF2B5EF4-FFF2-40B4-BE49-F238E27FC236}">
-                <a16:creationId xmlns:a16="http://schemas.microsoft.com/office/drawing/2014/main" id="{B95FF3CB-49F5-5EDD-98D0-C5CE2FD027DC}"/>
-              </a:ext>
-            </a:extLst>
-          </p:cNvPr>
+          <p:cNvPr id="2" name="Slide Image Placeholder 1"/>
           <p:cNvSpPr>
             <a:spLocks noGrp="1" noRot="1" noChangeAspect="1"/>
           </p:cNvSpPr>
@@ -7328,13 +8219,7 @@
       </p:sp>
       <p:sp>
         <p:nvSpPr>
-          <p:cNvPr id="3" name="Notes Placeholder 2">
-            <a:extLst>
-              <a:ext uri="{FF2B5EF4-FFF2-40B4-BE49-F238E27FC236}">
-                <a16:creationId xmlns:a16="http://schemas.microsoft.com/office/drawing/2014/main" id="{6ECCCB77-B320-EDFD-ADD3-8C3543F2D83F}"/>
-              </a:ext>
-            </a:extLst>
-          </p:cNvPr>
+          <p:cNvPr id="3" name="Notes Placeholder 2"/>
           <p:cNvSpPr>
             <a:spLocks noGrp="1"/>
           </p:cNvSpPr>
@@ -7347,19 +8232,16 @@
           <a:bodyPr/>
           <a:lstStyle/>
           <a:p>
-            <a:endParaRPr lang="en-US" dirty="0"/>
+            <a:r>
+              <a:rPr lang="en-US" dirty="0"/>
+              <a:t>We then move on to literature review to understand more on the cognitive search theory to understand how human conduct visual search and how it can be transformed into computational model</a:t>
+            </a:r>
           </a:p>
         </p:txBody>
       </p:sp>
       <p:sp>
         <p:nvSpPr>
-          <p:cNvPr id="4" name="Slide Number Placeholder 3">
-            <a:extLst>
-              <a:ext uri="{FF2B5EF4-FFF2-40B4-BE49-F238E27FC236}">
-                <a16:creationId xmlns:a16="http://schemas.microsoft.com/office/drawing/2014/main" id="{0B2D4B9F-781D-35AF-9C0F-EA0FBD3B2E14}"/>
-              </a:ext>
-            </a:extLst>
-          </p:cNvPr>
+          <p:cNvPr id="4" name="Slide Number Placeholder 3"/>
           <p:cNvSpPr>
             <a:spLocks noGrp="1"/>
           </p:cNvSpPr>
@@ -7374,7 +8256,7 @@
           <a:p>
             <a:fld id="{7332F5B2-8E9E-A043-910C-D623E320FEF5}" type="slidenum">
               <a:rPr lang="en-US" smtClean="0"/>
-              <a:t>14</a:t>
+              <a:t>7</a:t>
             </a:fld>
             <a:endParaRPr lang="en-US"/>
           </a:p>
@@ -7383,7 +8265,7 @@
     </p:spTree>
     <p:extLst>
       <p:ext uri="{BB962C8B-B14F-4D97-AF65-F5344CB8AC3E}">
-        <p14:creationId xmlns:p14="http://schemas.microsoft.com/office/powerpoint/2010/main" val="3690465592"/>
+        <p14:creationId xmlns:p14="http://schemas.microsoft.com/office/powerpoint/2010/main" val="3531833438"/>
       </p:ext>
     </p:extLst>
   </p:cSld>
@@ -7398,13 +8280,7 @@
   <p:cSld>
     <p:spTree>
       <p:nvGrpSpPr>
-        <p:cNvPr id="1" name="">
-          <a:extLst>
-            <a:ext uri="{FF2B5EF4-FFF2-40B4-BE49-F238E27FC236}">
-              <a16:creationId xmlns:a16="http://schemas.microsoft.com/office/drawing/2014/main" id="{23F8BE03-06A6-4482-4F33-E3F81B0FB85E}"/>
-            </a:ext>
-          </a:extLst>
-        </p:cNvPr>
+        <p:cNvPr id="1" name=""/>
         <p:cNvGrpSpPr/>
         <p:nvPr/>
       </p:nvGrpSpPr>
@@ -7418,13 +8294,7 @@
       </p:grpSpPr>
       <p:sp>
         <p:nvSpPr>
-          <p:cNvPr id="2" name="Slide Image Placeholder 1">
-            <a:extLst>
-              <a:ext uri="{FF2B5EF4-FFF2-40B4-BE49-F238E27FC236}">
-                <a16:creationId xmlns:a16="http://schemas.microsoft.com/office/drawing/2014/main" id="{848CD6B8-627D-1A7E-DD33-865AF464F96A}"/>
-              </a:ext>
-            </a:extLst>
-          </p:cNvPr>
+          <p:cNvPr id="2" name="Slide Image Placeholder 1"/>
           <p:cNvSpPr>
             <a:spLocks noGrp="1" noRot="1" noChangeAspect="1"/>
           </p:cNvSpPr>
@@ -7436,13 +8306,7 @@
       </p:sp>
       <p:sp>
         <p:nvSpPr>
-          <p:cNvPr id="3" name="Notes Placeholder 2">
-            <a:extLst>
-              <a:ext uri="{FF2B5EF4-FFF2-40B4-BE49-F238E27FC236}">
-                <a16:creationId xmlns:a16="http://schemas.microsoft.com/office/drawing/2014/main" id="{B76E0A79-3AED-85DE-4FA9-43540C90FEF3}"/>
-              </a:ext>
-            </a:extLst>
-          </p:cNvPr>
+          <p:cNvPr id="3" name="Notes Placeholder 2"/>
           <p:cNvSpPr>
             <a:spLocks noGrp="1"/>
           </p:cNvSpPr>
@@ -7455,19 +8319,63 @@
           <a:bodyPr/>
           <a:lstStyle/>
           <a:p>
+            <a:r>
+              <a:rPr lang="en-US" dirty="0"/>
+              <a:t>In 1980, Treisman and Gelade proposed an Feature Integration Theory that human require attention map to overlay a scene to conduct a sequence of searching.</a:t>
+            </a:r>
+          </a:p>
+          <a:p>
             <a:endParaRPr lang="en-US" dirty="0"/>
           </a:p>
+          <a:p>
+            <a:r>
+              <a:rPr lang="en-US" dirty="0"/>
+              <a:t>There are 3 main approach</a:t>
+            </a:r>
+          </a:p>
+          <a:p>
+            <a:pPr marL="171450" indent="-171450">
+              <a:buFontTx/>
+              <a:buChar char="-"/>
+            </a:pPr>
+            <a:r>
+              <a:rPr lang="en-US" dirty="0"/>
+              <a:t>Bottom-up: we focus on the </a:t>
+            </a:r>
+            <a:r>
+              <a:rPr lang="en-US" dirty="0" err="1"/>
+              <a:t>scence</a:t>
+            </a:r>
+            <a:r>
+              <a:rPr lang="en-US" dirty="0"/>
+              <a:t> saliency</a:t>
+            </a:r>
+          </a:p>
+          <a:p>
+            <a:pPr marL="171450" indent="-171450">
+              <a:buFontTx/>
+              <a:buChar char="-"/>
+            </a:pPr>
+            <a:r>
+              <a:rPr lang="en-US" dirty="0"/>
+              <a:t>Top-down: which is goal driven</a:t>
+            </a:r>
+          </a:p>
+          <a:p>
+            <a:pPr marL="171450" indent="-171450">
+              <a:buFontTx/>
+              <a:buChar char="-"/>
+            </a:pPr>
+            <a:r>
+              <a:rPr lang="en-US" dirty="0"/>
+              <a:t>Or the combination of both</a:t>
+            </a:r>
+          </a:p>
         </p:txBody>
       </p:sp>
       <p:sp>
         <p:nvSpPr>
-          <p:cNvPr id="4" name="Slide Number Placeholder 3">
-            <a:extLst>
-              <a:ext uri="{FF2B5EF4-FFF2-40B4-BE49-F238E27FC236}">
-                <a16:creationId xmlns:a16="http://schemas.microsoft.com/office/drawing/2014/main" id="{6FDC057F-A8E3-D65D-F050-CC97BE314A6E}"/>
-              </a:ext>
-            </a:extLst>
-          </p:cNvPr>
+          <p:cNvPr id="4" name="Slide Number Placeholder 3"/>
           <p:cNvSpPr>
             <a:spLocks noGrp="1"/>
           </p:cNvSpPr>
@@ -7482,7 +8390,7 @@
           <a:p>
             <a:fld id="{7332F5B2-8E9E-A043-910C-D623E320FEF5}" type="slidenum">
               <a:rPr lang="en-US" smtClean="0"/>
-              <a:t>15</a:t>
+              <a:t>8</a:t>
             </a:fld>
             <a:endParaRPr lang="en-US"/>
           </a:p>
@@ -7491,7 +8399,7 @@
     </p:spTree>
     <p:extLst>
       <p:ext uri="{BB962C8B-B14F-4D97-AF65-F5344CB8AC3E}">
-        <p14:creationId xmlns:p14="http://schemas.microsoft.com/office/powerpoint/2010/main" val="788098734"/>
+        <p14:creationId xmlns:p14="http://schemas.microsoft.com/office/powerpoint/2010/main" val="3574829820"/>
       </p:ext>
     </p:extLst>
   </p:cSld>
@@ -7506,13 +8414,7 @@
   <p:cSld>
     <p:spTree>
       <p:nvGrpSpPr>
-        <p:cNvPr id="1" name="">
-          <a:extLst>
-            <a:ext uri="{FF2B5EF4-FFF2-40B4-BE49-F238E27FC236}">
-              <a16:creationId xmlns:a16="http://schemas.microsoft.com/office/drawing/2014/main" id="{ED73C860-F29F-5484-9868-90E51A3B7908}"/>
-            </a:ext>
-          </a:extLst>
-        </p:cNvPr>
+        <p:cNvPr id="1" name=""/>
         <p:cNvGrpSpPr/>
         <p:nvPr/>
       </p:nvGrpSpPr>
@@ -7526,13 +8428,7 @@
       </p:grpSpPr>
       <p:sp>
         <p:nvSpPr>
-          <p:cNvPr id="2" name="Slide Image Placeholder 1">
-            <a:extLst>
-              <a:ext uri="{FF2B5EF4-FFF2-40B4-BE49-F238E27FC236}">
-                <a16:creationId xmlns:a16="http://schemas.microsoft.com/office/drawing/2014/main" id="{9D7FB06F-1333-1535-B2B5-89CBABE4421E}"/>
-              </a:ext>
-            </a:extLst>
-          </p:cNvPr>
+          <p:cNvPr id="2" name="Slide Image Placeholder 1"/>
           <p:cNvSpPr>
             <a:spLocks noGrp="1" noRot="1" noChangeAspect="1"/>
           </p:cNvSpPr>
@@ -7544,13 +8440,7 @@
       </p:sp>
       <p:sp>
         <p:nvSpPr>
-          <p:cNvPr id="3" name="Notes Placeholder 2">
-            <a:extLst>
-              <a:ext uri="{FF2B5EF4-FFF2-40B4-BE49-F238E27FC236}">
-                <a16:creationId xmlns:a16="http://schemas.microsoft.com/office/drawing/2014/main" id="{7F9AF1DB-03C8-318D-5461-4A8DF215FD74}"/>
-              </a:ext>
-            </a:extLst>
-          </p:cNvPr>
+          <p:cNvPr id="3" name="Notes Placeholder 2"/>
           <p:cNvSpPr>
             <a:spLocks noGrp="1"/>
           </p:cNvSpPr>
@@ -7563,19 +8453,62 @@
           <a:bodyPr/>
           <a:lstStyle/>
           <a:p>
+            <a:r>
+              <a:rPr lang="en-US" dirty="0"/>
+              <a:t>Later in the 1980, Posner conducted many various experiments to formalize the relationship between the eye movement and the attention map</a:t>
+            </a:r>
+          </a:p>
+          <a:p>
             <a:endParaRPr lang="en-US" dirty="0"/>
           </a:p>
+          <a:p>
+            <a:r>
+              <a:rPr lang="en-US" dirty="0"/>
+              <a:t>There are 2 types of attention:</a:t>
+            </a:r>
+          </a:p>
+          <a:p>
+            <a:pPr marL="171450" indent="-171450">
+              <a:buFontTx/>
+              <a:buChar char="-"/>
+            </a:pPr>
+            <a:r>
+              <a:rPr lang="en-US" dirty="0"/>
+              <a:t>Covert Attention: which require no head or eye movement, the attention are produced from the the current scene.</a:t>
+            </a:r>
+          </a:p>
+          <a:p>
+            <a:pPr marL="171450" indent="-171450">
+              <a:buFontTx/>
+              <a:buChar char="-"/>
+            </a:pPr>
+            <a:r>
+              <a:rPr lang="en-US" dirty="0"/>
+              <a:t>The other one is the overt attention which requires head and eye movement, producing an attention shift</a:t>
+            </a:r>
+          </a:p>
+          <a:p>
+            <a:pPr marL="171450" indent="-171450">
+              <a:buFontTx/>
+              <a:buChar char="-"/>
+            </a:pPr>
+            <a:endParaRPr lang="en-US" dirty="0"/>
+          </a:p>
+          <a:p>
+            <a:pPr marL="171450" indent="-171450">
+              <a:buFontTx/>
+              <a:buChar char="-"/>
+            </a:pPr>
+            <a:r>
+              <a:rPr lang="en-US" dirty="0"/>
+              <a:t>=&gt;He discovered that Covert attention is the means of routing information and controlling search priority.</a:t>
+            </a:r>
+          </a:p>
         </p:txBody>
       </p:sp>
       <p:sp>
         <p:nvSpPr>
-          <p:cNvPr id="4" name="Slide Number Placeholder 3">
-            <a:extLst>
-              <a:ext uri="{FF2B5EF4-FFF2-40B4-BE49-F238E27FC236}">
-                <a16:creationId xmlns:a16="http://schemas.microsoft.com/office/drawing/2014/main" id="{09FC2005-9544-FB73-3EC3-366C43489E3D}"/>
-              </a:ext>
-            </a:extLst>
-          </p:cNvPr>
+          <p:cNvPr id="4" name="Slide Number Placeholder 3"/>
           <p:cNvSpPr>
             <a:spLocks noGrp="1"/>
           </p:cNvSpPr>
@@ -7590,7 +8523,7 @@
           <a:p>
             <a:fld id="{7332F5B2-8E9E-A043-910C-D623E320FEF5}" type="slidenum">
               <a:rPr lang="en-US" smtClean="0"/>
-              <a:t>16</a:t>
+              <a:t>9</a:t>
             </a:fld>
             <a:endParaRPr lang="en-US"/>
           </a:p>
@@ -7599,7 +8532,7 @@
     </p:spTree>
     <p:extLst>
       <p:ext uri="{BB962C8B-B14F-4D97-AF65-F5344CB8AC3E}">
-        <p14:creationId xmlns:p14="http://schemas.microsoft.com/office/powerpoint/2010/main" val="2635628049"/>
+        <p14:creationId xmlns:p14="http://schemas.microsoft.com/office/powerpoint/2010/main" val="569595237"/>
       </p:ext>
     </p:extLst>
   </p:cSld>
@@ -7762,7 +8695,7 @@
           <a:p>
             <a:fld id="{D1D1EADE-8E88-4C7C-8AC5-FB148DE4940E}" type="datetime1">
               <a:rPr lang="en-US" smtClean="0"/>
-              <a:t>5/6/26</a:t>
+              <a:t>5/7/26</a:t>
             </a:fld>
             <a:endParaRPr lang="en-US"/>
           </a:p>
@@ -7962,7 +8895,7 @@
           <a:p>
             <a:fld id="{EC3C8B9C-477D-492A-96AD-1FC2CC997A73}" type="datetime1">
               <a:rPr lang="en-US" smtClean="0"/>
-              <a:t>5/6/26</a:t>
+              <a:t>5/7/26</a:t>
             </a:fld>
             <a:endParaRPr lang="en-US"/>
           </a:p>
@@ -8172,7 +9105,7 @@
           <a:p>
             <a:fld id="{42D3AED5-E26D-4E29-B1B3-7847B6779594}" type="datetime1">
               <a:rPr lang="en-US" smtClean="0"/>
-              <a:t>5/6/26</a:t>
+              <a:t>5/7/26</a:t>
             </a:fld>
             <a:endParaRPr lang="en-US"/>
           </a:p>
@@ -8372,7 +9305,7 @@
           <a:p>
             <a:fld id="{157B6794-849E-4626-908B-D15793550EFB}" type="datetime1">
               <a:rPr lang="en-US" smtClean="0"/>
-              <a:t>5/6/26</a:t>
+              <a:t>5/7/26</a:t>
             </a:fld>
             <a:endParaRPr lang="en-US"/>
           </a:p>
@@ -8648,7 +9581,7 @@
           <a:p>
             <a:fld id="{63DB64E7-5594-42A3-ADBF-E95A7ACEAD64}" type="datetime1">
               <a:rPr lang="en-US" smtClean="0"/>
-              <a:t>5/6/26</a:t>
+              <a:t>5/7/26</a:t>
             </a:fld>
             <a:endParaRPr lang="en-US"/>
           </a:p>
@@ -8921,7 +9854,7 @@
           <a:p>
             <a:fld id="{18462B0B-D248-4FFB-8695-AD7FA4B1284A}" type="datetime1">
               <a:rPr lang="en-US" smtClean="0"/>
-              <a:t>5/6/26</a:t>
+              <a:t>5/7/26</a:t>
             </a:fld>
             <a:endParaRPr lang="en-US"/>
           </a:p>
@@ -9344,7 +10277,7 @@
           <a:p>
             <a:fld id="{D0378EFB-9159-4510-B73F-4F0409ADE937}" type="datetime1">
               <a:rPr lang="en-US" smtClean="0"/>
-              <a:t>5/6/26</a:t>
+              <a:t>5/7/26</a:t>
             </a:fld>
             <a:endParaRPr lang="en-US"/>
           </a:p>
@@ -9486,7 +10419,7 @@
           <a:p>
             <a:fld id="{89BC9412-2452-4BED-A324-9D8C115361AD}" type="datetime1">
               <a:rPr lang="en-US" smtClean="0"/>
-              <a:t>5/6/26</a:t>
+              <a:t>5/7/26</a:t>
             </a:fld>
             <a:endParaRPr lang="en-US"/>
           </a:p>
@@ -9599,7 +10532,7 @@
           <a:p>
             <a:fld id="{F5318F62-D251-40E8-A23C-F4CFE9FEAB41}" type="datetime1">
               <a:rPr lang="en-US" smtClean="0"/>
-              <a:t>5/6/26</a:t>
+              <a:t>5/7/26</a:t>
             </a:fld>
             <a:endParaRPr lang="en-US"/>
           </a:p>
@@ -9912,7 +10845,7 @@
           <a:p>
             <a:fld id="{44F76144-149E-4874-93A5-554A0357CF82}" type="datetime1">
               <a:rPr lang="en-US" smtClean="0"/>
-              <a:t>5/6/26</a:t>
+              <a:t>5/7/26</a:t>
             </a:fld>
             <a:endParaRPr lang="en-US"/>
           </a:p>
@@ -10205,7 +11138,7 @@
           <a:p>
             <a:fld id="{50BA65D8-0540-4835-AE5C-25D29DBA01BE}" type="datetime1">
               <a:rPr lang="en-US" smtClean="0"/>
-              <a:t>5/6/26</a:t>
+              <a:t>5/7/26</a:t>
             </a:fld>
             <a:endParaRPr lang="en-US"/>
           </a:p>
@@ -10447,7 +11380,7 @@
           <a:p>
             <a:fld id="{E31BA835-12AC-4E8F-955A-EA3F4DE2791F}" type="datetime1">
               <a:rPr lang="en-US" smtClean="0"/>
-              <a:t>5/6/26</a:t>
+              <a:t>5/7/26</a:t>
             </a:fld>
             <a:endParaRPr lang="en-US"/>
           </a:p>
@@ -11201,7 +12134,7 @@
           <p:nvPr/>
         </p:nvPicPr>
         <p:blipFill>
-          <a:blip r:embed="rId2"/>
+          <a:blip r:embed="rId3"/>
           <a:srcRect l="17551" r="27281" b="-1"/>
           <a:stretch>
             <a:fillRect/>
@@ -11955,7 +12888,7 @@
         </p:spPr>
         <p:txBody>
           <a:bodyPr>
-            <a:normAutofit fontScale="85000" lnSpcReduction="10000"/>
+            <a:normAutofit fontScale="92500"/>
           </a:bodyPr>
           <a:lstStyle/>
           <a:p>
@@ -12019,25 +12952,7 @@
             </a:pPr>
             <a:r>
               <a:rPr lang="en-US" dirty="0"/>
-              <a:t>The combination of both creates a weighted activation map rather than a uniformly summed, equally contributed one.</a:t>
-            </a:r>
-          </a:p>
-          <a:p>
-            <a:pPr>
-              <a:buFont typeface="Symbol" pitchFamily="2" charset="2"/>
-              <a:buChar char="Þ"/>
-            </a:pPr>
-            <a:r>
-              <a:rPr lang="en-US" dirty="0"/>
-              <a:t>Proposed </a:t>
-            </a:r>
-            <a:r>
-              <a:rPr lang="en-US" dirty="0" err="1"/>
-              <a:t>Guilded</a:t>
-            </a:r>
-            <a:r>
-              <a:rPr lang="en-US" dirty="0"/>
-              <a:t> Search Version 2.0</a:t>
+              <a:t>The combination of both creates a weighted activation map rather than a uniformly summed one.</a:t>
             </a:r>
           </a:p>
           <a:p>
@@ -17231,7 +18146,7 @@
         </p:xfrm>
         <a:graphic>
           <a:graphicData uri="http://schemas.openxmlformats.org/drawingml/2006/diagram">
-            <dgm:relIds xmlns:dgm="http://schemas.openxmlformats.org/drawingml/2006/diagram" xmlns:r="http://schemas.openxmlformats.org/officeDocument/2006/relationships" r:dm="rId2" r:lo="rId3" r:qs="rId4" r:cs="rId5"/>
+            <dgm:relIds xmlns:dgm="http://schemas.openxmlformats.org/drawingml/2006/diagram" xmlns:r="http://schemas.openxmlformats.org/officeDocument/2006/relationships" r:dm="rId3" r:lo="rId4" r:qs="rId5" r:cs="rId6"/>
           </a:graphicData>
         </a:graphic>
       </p:graphicFrame>
@@ -27611,7 +28526,7 @@
           <p:nvPr/>
         </p:nvPicPr>
         <p:blipFill>
-          <a:blip r:embed="rId2"/>
+          <a:blip r:embed="rId3"/>
           <a:srcRect t="4553" b="20447"/>
           <a:stretch>
             <a:fillRect/>
@@ -35415,7 +36330,7 @@
                 <a14:useLocalDpi xmlns:a14="http://schemas.microsoft.com/office/drawing/2010/main" val="0"/>
               </a:ext>
               <a:ext uri="{96DAC541-7B7A-43D3-8B79-37D633B846F1}">
-                <asvg:svgBlip xmlns:asvg="http://schemas.microsoft.com/office/drawing/2016/SVG/main" r:embed="rId2"/>
+                <asvg:svgBlip xmlns:asvg="http://schemas.microsoft.com/office/drawing/2016/SVG/main" r:embed="rId3"/>
               </a:ext>
             </a:extLst>
           </a:blip>
@@ -35457,7 +36372,7 @@
         </p:spPr>
         <p:txBody>
           <a:bodyPr anchor="b">
-            <a:normAutofit lnSpcReduction="10000"/>
+            <a:normAutofit fontScale="92500" lnSpcReduction="20000"/>
           </a:bodyPr>
           <a:lstStyle/>
           <a:p>
@@ -35466,6 +36381,34 @@
               <a:rPr lang="en-US" dirty="0"/>
               <a:t>The current existing visual search models are limited to the context image and neglect the target image.</a:t>
             </a:r>
+          </a:p>
+          <a:p>
+            <a:pPr algn="just"/>
+            <a:r>
+              <a:rPr lang="en-US" dirty="0"/>
+              <a:t>E.g. </a:t>
+            </a:r>
+            <a:r>
+              <a:rPr lang="en-US" dirty="0" err="1"/>
+              <a:t>DeepGazeIII</a:t>
+            </a:r>
+            <a:r>
+              <a:rPr lang="en-US" dirty="0"/>
+              <a:t> </a:t>
+            </a:r>
+            <a:r>
+              <a:rPr lang="en-SG" dirty="0"/>
+              <a:t>(</a:t>
+            </a:r>
+            <a:r>
+              <a:rPr lang="en-SG" dirty="0" err="1"/>
+              <a:t>Kümmerer</a:t>
+            </a:r>
+            <a:r>
+              <a:rPr lang="en-SG" dirty="0"/>
+              <a:t> et al., 2022)</a:t>
+            </a:r>
+            <a:endParaRPr lang="en-US" dirty="0"/>
           </a:p>
           <a:p>
             <a:pPr algn="just"/>
@@ -38559,7 +39502,52 @@
           <a:bodyPr/>
           <a:lstStyle/>
           <a:p>
-            <a:endParaRPr lang="en-US" dirty="0"/>
+            <a:r>
+              <a:rPr lang="en-US" dirty="0"/>
+              <a:t>Rebuild the </a:t>
+            </a:r>
+            <a:r>
+              <a:rPr lang="en-US" dirty="0" err="1"/>
+              <a:t>CRTNet</a:t>
+            </a:r>
+            <a:r>
+              <a:rPr lang="en-US" dirty="0"/>
+              <a:t> architecture through code inspection and modify the PE layer for the visual search task by introducing a light-weight attention layer.</a:t>
+            </a:r>
+          </a:p>
+          <a:p>
+            <a:r>
+              <a:rPr lang="en-US" dirty="0"/>
+              <a:t>Modify the </a:t>
+            </a:r>
+            <a:r>
+              <a:rPr lang="en-US" dirty="0" err="1"/>
+              <a:t>ViT</a:t>
+            </a:r>
+            <a:r>
+              <a:rPr lang="en-US" dirty="0"/>
+              <a:t> structure by introducing the local modulation operation inside the encoder architecture.</a:t>
+            </a:r>
+          </a:p>
+          <a:p>
+            <a:r>
+              <a:rPr lang="en-US" dirty="0"/>
+              <a:t>Conduct image augmentation for the </a:t>
+            </a:r>
+            <a:r>
+              <a:rPr lang="en-US" dirty="0" err="1"/>
+              <a:t>CRTNet</a:t>
+            </a:r>
+            <a:r>
+              <a:rPr lang="en-US" dirty="0"/>
+              <a:t> recognition task training to “encourage” the model to leverage the attention mechanism of the decoder layer.</a:t>
+            </a:r>
+          </a:p>
+          <a:p>
+            <a:r>
+              <a:rPr lang="en-US" dirty="0"/>
+              <a:t>Perform a visual search task using the TCT model on different benchmark datasets with different attribute to evaluate the model performance.</a:t>
+            </a:r>
           </a:p>
         </p:txBody>
       </p:sp>
@@ -38644,7 +39632,44 @@
           <a:bodyPr/>
           <a:lstStyle/>
           <a:p>
-            <a:endParaRPr lang="en-US" dirty="0"/>
+            <a:r>
+              <a:rPr lang="en-US" dirty="0"/>
+              <a:t>Explore the replaceability of the building blocks of the TCT model (</a:t>
+            </a:r>
+            <a:r>
+              <a:rPr lang="en-US" dirty="0" err="1"/>
+              <a:t>ViT</a:t>
+            </a:r>
+            <a:r>
+              <a:rPr lang="en-US" dirty="0"/>
+              <a:t>, </a:t>
+            </a:r>
+            <a:r>
+              <a:rPr lang="en-US" dirty="0" err="1"/>
+              <a:t>CRTNet</a:t>
+            </a:r>
+            <a:r>
+              <a:rPr lang="en-US" dirty="0"/>
+              <a:t>).</a:t>
+            </a:r>
+          </a:p>
+          <a:p>
+            <a:r>
+              <a:rPr lang="en-US" dirty="0"/>
+              <a:t>Discover a more complex architecture, e.g., waterfall global modulation, local modulation in building block for both Transformer Architecture instead of only one, etc.</a:t>
+            </a:r>
+          </a:p>
+          <a:p>
+            <a:r>
+              <a:rPr lang="en-US" dirty="0"/>
+              <a:t>Reconsider training the whole TCT model on the recognition task and transferring it to the visual search task.</a:t>
+            </a:r>
+          </a:p>
+          <a:p>
+            <a:r>
+              <a:rPr lang="en-US" dirty="0"/>
+              <a:t>Build an application that leverages such an effective model for tasks like satellite detection, human face detection, etc.</a:t>
+            </a:r>
           </a:p>
         </p:txBody>
       </p:sp>
@@ -38662,7 +39687,7 @@
 </file>
 
 <file path=ppt/slides/slide6.xml><?xml version="1.0" encoding="utf-8"?>
-<p:sld xmlns:a="http://schemas.openxmlformats.org/drawingml/2006/main" xmlns:r="http://schemas.openxmlformats.org/officeDocument/2006/relationships" xmlns:p="http://schemas.openxmlformats.org/presentationml/2006/main">
+<p:sld xmlns:a="http://schemas.openxmlformats.org/drawingml/2006/main" xmlns:r="http://schemas.openxmlformats.org/officeDocument/2006/relationships" xmlns:p="http://schemas.openxmlformats.org/presentationml/2006/main" show="0">
   <p:cSld>
     <p:bg>
       <p:bgPr>
@@ -39445,7 +40470,7 @@
                 <a14:useLocalDpi xmlns:a14="http://schemas.microsoft.com/office/drawing/2010/main" val="0"/>
               </a:ext>
               <a:ext uri="{96DAC541-7B7A-43D3-8B79-37D633B846F1}">
-                <asvg:svgBlip xmlns:asvg="http://schemas.microsoft.com/office/drawing/2016/SVG/main" r:embed="rId2"/>
+                <asvg:svgBlip xmlns:asvg="http://schemas.microsoft.com/office/drawing/2016/SVG/main" r:embed="rId3"/>
               </a:ext>
             </a:extLst>
           </a:blip>
@@ -40368,15 +41393,7 @@
             </a:pPr>
             <a:r>
               <a:rPr lang="en-US" dirty="0"/>
-              <a:t>Shortly after the FIT publication, </a:t>
-            </a:r>
-            <a:r>
-              <a:rPr lang="en-US" dirty="0" err="1"/>
-              <a:t>Postner</a:t>
-            </a:r>
-            <a:r>
-              <a:rPr lang="en-US" dirty="0"/>
-              <a:t> conducted different experiments to formalize the relationship between eye movement and the attention map.</a:t>
+              <a:t>Shortly after the FIT publication, Posner conducted different experiments to formalize the relationship between eye movement and the attention map.</a:t>
             </a:r>
           </a:p>
           <a:p>

--- a/Presentation/FYP_NguyenTuan_Presentation.pptx
+++ b/Presentation/FYP_NguyenTuan_Presentation.pptx
@@ -3633,7 +3633,7 @@
           <a:p>
             <a:fld id="{9A9C0C59-185E-874E-8468-6092D83992DA}" type="datetimeFigureOut">
               <a:rPr lang="en-US" smtClean="0"/>
-              <a:t>5/7/26</a:t>
+              <a:t>5/8/26</a:t>
             </a:fld>
             <a:endParaRPr lang="en-US"/>
           </a:p>
@@ -6158,7 +6158,7 @@
           <a:p>
             <a:r>
               <a:rPr lang="en-US" dirty="0"/>
-              <a:t>Just as Wolfe refined his model, our effort in this FYP is to introduce contextual information to guide the visual search task.</a:t>
+              <a:t>Just as Wolfe refined his model, our effort in this FYP is to introduce contextual information to guide the visual search task through the TCT architecture.</a:t>
             </a:r>
           </a:p>
         </p:txBody>
@@ -6267,7 +6267,44 @@
           <a:bodyPr/>
           <a:lstStyle/>
           <a:p>
+            <a:r>
+              <a:rPr lang="en-US" dirty="0"/>
+              <a:t>We can take a look at the overall structure of the TCT model:</a:t>
+            </a:r>
+          </a:p>
+          <a:p>
             <a:endParaRPr lang="en-US" dirty="0"/>
+          </a:p>
+          <a:p>
+            <a:r>
+              <a:rPr lang="en-US" dirty="0"/>
+              <a:t>The model take both target and context as inputs in to both channels to process.</a:t>
+            </a:r>
+          </a:p>
+          <a:p>
+            <a:endParaRPr lang="en-US" dirty="0"/>
+          </a:p>
+          <a:p>
+            <a:r>
+              <a:rPr lang="en-US" dirty="0"/>
+              <a:t>Then, the final result of </a:t>
+            </a:r>
+            <a:r>
+              <a:rPr lang="en-US" dirty="0" err="1"/>
+              <a:t>CRTNet</a:t>
+            </a:r>
+            <a:r>
+              <a:rPr lang="en-US" dirty="0"/>
+              <a:t> is passed in the </a:t>
+            </a:r>
+            <a:r>
+              <a:rPr lang="en-US" dirty="0" err="1"/>
+              <a:t>ViT</a:t>
+            </a:r>
+            <a:r>
+              <a:rPr lang="en-US" dirty="0"/>
+              <a:t> model through the Global modulation process for further processing before outputting the attention map.</a:t>
+            </a:r>
           </a:p>
         </p:txBody>
       </p:sp>
@@ -6375,7 +6412,44 @@
           <a:bodyPr/>
           <a:lstStyle/>
           <a:p>
+            <a:r>
+              <a:rPr lang="en-US" dirty="0"/>
+              <a:t>We now take a closer look inside the </a:t>
+            </a:r>
+            <a:r>
+              <a:rPr lang="en-US" dirty="0" err="1"/>
+              <a:t>ViT</a:t>
+            </a:r>
+            <a:r>
+              <a:rPr lang="en-US" dirty="0"/>
+              <a:t> model architecture</a:t>
+            </a:r>
+          </a:p>
+          <a:p>
             <a:endParaRPr lang="en-US" dirty="0"/>
+          </a:p>
+          <a:p>
+            <a:r>
+              <a:rPr lang="en-US" dirty="0"/>
+              <a:t>We can see one very unique feature inside this </a:t>
+            </a:r>
+            <a:r>
+              <a:rPr lang="en-US" dirty="0" err="1"/>
+              <a:t>ViT</a:t>
+            </a:r>
+            <a:r>
+              <a:rPr lang="en-US" dirty="0"/>
+              <a:t> model is that it takes both target Query and Context Query into the Cross Attention layer and apply an keep max only operation before apply the local modulation operation.</a:t>
+            </a:r>
+          </a:p>
+          <a:p>
+            <a:endParaRPr lang="en-US" dirty="0"/>
+          </a:p>
+          <a:p>
+            <a:r>
+              <a:rPr lang="en-US" dirty="0"/>
+              <a:t>This sequence of operations represents the top-down approach where they try to find the similarity of both the target and context information.</a:t>
+            </a:r>
           </a:p>
         </p:txBody>
       </p:sp>
@@ -6570,7 +6644,19 @@
           <a:bodyPr/>
           <a:lstStyle/>
           <a:p>
+            <a:r>
+              <a:rPr lang="en-US" dirty="0"/>
+              <a:t>Let’s see what does keep max only operation do.</a:t>
+            </a:r>
+          </a:p>
+          <a:p>
             <a:endParaRPr lang="en-US" dirty="0"/>
+          </a:p>
+          <a:p>
+            <a:r>
+              <a:rPr lang="en-US" dirty="0"/>
+              <a:t>The keep-max operation intuitively will try to keep the highest similarity of the target features in each context image patch. (each visual window)</a:t>
+            </a:r>
           </a:p>
         </p:txBody>
       </p:sp>
@@ -6678,7 +6764,10 @@
           <a:bodyPr/>
           <a:lstStyle/>
           <a:p>
-            <a:endParaRPr lang="en-US" dirty="0"/>
+            <a:r>
+              <a:rPr lang="en-US" dirty="0"/>
+              <a:t>Through the keep max operation the L_T will collapse to 1 and only keep the context sequence length.</a:t>
+            </a:r>
           </a:p>
         </p:txBody>
       </p:sp>
@@ -6786,7 +6875,43 @@
           <a:bodyPr/>
           <a:lstStyle/>
           <a:p>
+            <a:r>
+              <a:rPr lang="en-US" dirty="0"/>
+              <a:t>The previous output is regarded as query relevant is then passed into </a:t>
+            </a:r>
+            <a:r>
+              <a:rPr lang="en-US" dirty="0" err="1"/>
+              <a:t>locl</a:t>
+            </a:r>
+            <a:r>
+              <a:rPr lang="en-US" dirty="0"/>
+              <a:t> modulation operation which will be scale along the target sequence length dimension to guide the top-down search process.</a:t>
+            </a:r>
+          </a:p>
+          <a:p>
             <a:endParaRPr lang="en-US" dirty="0"/>
+          </a:p>
+          <a:p>
+            <a:r>
+              <a:rPr lang="en-US" dirty="0"/>
+              <a:t>This operation is only applied in the last n layers of the </a:t>
+            </a:r>
+            <a:r>
+              <a:rPr lang="en-US" dirty="0" err="1"/>
+              <a:t>ViT</a:t>
+            </a:r>
+            <a:r>
+              <a:rPr lang="en-US" dirty="0"/>
+              <a:t> Encoder block rather than applied to all the Encoders in the </a:t>
+            </a:r>
+            <a:r>
+              <a:rPr lang="en-US" dirty="0" err="1"/>
+              <a:t>ViT</a:t>
+            </a:r>
+            <a:r>
+              <a:rPr lang="en-US" dirty="0"/>
+              <a:t>.</a:t>
+            </a:r>
           </a:p>
         </p:txBody>
       </p:sp>
@@ -6894,7 +7019,35 @@
           <a:bodyPr/>
           <a:lstStyle/>
           <a:p>
+            <a:r>
+              <a:rPr lang="en-US" dirty="0"/>
+              <a:t>We now move on to the </a:t>
+            </a:r>
+            <a:r>
+              <a:rPr lang="en-US" dirty="0" err="1"/>
+              <a:t>CRTNet</a:t>
+            </a:r>
+            <a:r>
+              <a:rPr lang="en-US" dirty="0"/>
+              <a:t> Architecture of the TCT model.</a:t>
+            </a:r>
+          </a:p>
+          <a:p>
             <a:endParaRPr lang="en-US" dirty="0"/>
+          </a:p>
+          <a:p>
+            <a:r>
+              <a:rPr lang="en-US" dirty="0"/>
+              <a:t>We can see that the original model from the original paper takes both the target and context image into 2 separate channels to process them. The context token output and the target token output from the DNN are then placed into the decoder sequence to predict the label of the object. The target also has an independent prediction path. The </a:t>
+            </a:r>
+            <a:r>
+              <a:rPr lang="en-US" dirty="0" err="1"/>
+              <a:t>CRTNet</a:t>
+            </a:r>
+            <a:r>
+              <a:rPr lang="en-US" dirty="0"/>
+              <a:t> is then takes the weighted guest by summing up both prediction paths.</a:t>
+            </a:r>
           </a:p>
         </p:txBody>
       </p:sp>
@@ -7002,7 +7155,10 @@
           <a:bodyPr/>
           <a:lstStyle/>
           <a:p>
-            <a:endParaRPr lang="en-US" dirty="0"/>
+            <a:r>
+              <a:rPr lang="en-US" dirty="0"/>
+              <a:t>Since attention is important in visual search we will incentivize the model to take more learning in the decoder path, therefore we will remove the independent path from the target token.</a:t>
+            </a:r>
           </a:p>
         </p:txBody>
       </p:sp>
@@ -7110,7 +7266,18 @@
           <a:bodyPr/>
           <a:lstStyle/>
           <a:p>
-            <a:endParaRPr lang="en-US" dirty="0"/>
+            <a:r>
+              <a:rPr lang="en-US" dirty="0"/>
+              <a:t>However, in the development process, we figured out that the original model take </a:t>
+            </a:r>
+            <a:r>
+              <a:rPr lang="en-US" dirty="0" err="1"/>
+              <a:t>bouding</a:t>
+            </a:r>
+            <a:r>
+              <a:rPr lang="en-US" dirty="0"/>
+              <a:t> box coordinate as an input to guide the model where is the object in the image to help the model perform better in object recognition task, it is a fundamental issue for visual search task since we already provide the destination in which the model purpose is to find it.</a:t>
+            </a:r>
           </a:p>
         </p:txBody>
       </p:sp>
@@ -7218,7 +7385,19 @@
           <a:bodyPr/>
           <a:lstStyle/>
           <a:p>
+            <a:r>
+              <a:rPr lang="en-US" dirty="0"/>
+              <a:t>To resolve it, the naïve way is just to remove it and does not apply any Positional encoding on the target token.</a:t>
+            </a:r>
+          </a:p>
+          <a:p>
             <a:endParaRPr lang="en-US" dirty="0"/>
+          </a:p>
+          <a:p>
+            <a:r>
+              <a:rPr lang="en-US" dirty="0"/>
+              <a:t>However, the model could be struggle to find the target in the context scene due to discrepancy from the positional encoding.</a:t>
+            </a:r>
           </a:p>
         </p:txBody>
       </p:sp>
@@ -7326,7 +7505,19 @@
           <a:bodyPr/>
           <a:lstStyle/>
           <a:p>
+            <a:r>
+              <a:rPr lang="en-US" dirty="0"/>
+              <a:t>We then come up with the more innovative solution:</a:t>
+            </a:r>
+          </a:p>
+          <a:p>
             <a:endParaRPr lang="en-US" dirty="0"/>
+          </a:p>
+          <a:p>
+            <a:r>
+              <a:rPr lang="en-US" dirty="0"/>
+              <a:t>We decided to add a light-weight attention layer which take in target token as a query, context PE as Key, and context PE again as a value tensor and we try to output a weighted attention to summed the context PE and produced a target PE.</a:t>
+            </a:r>
           </a:p>
         </p:txBody>
       </p:sp>
@@ -7434,7 +7625,36 @@
           <a:bodyPr/>
           <a:lstStyle/>
           <a:p>
+            <a:r>
+              <a:rPr lang="en-US" dirty="0"/>
+              <a:t>This is visualize comparison between the original PE and our innovative solution</a:t>
+            </a:r>
+          </a:p>
+          <a:p>
             <a:endParaRPr lang="en-US" dirty="0"/>
+          </a:p>
+          <a:p>
+            <a:r>
+              <a:rPr lang="en-US" dirty="0"/>
+              <a:t>On the left hand side, the original </a:t>
+            </a:r>
+            <a:r>
+              <a:rPr lang="en-US" dirty="0" err="1"/>
+              <a:t>CRTNet</a:t>
+            </a:r>
+            <a:r>
+              <a:rPr lang="en-US" dirty="0"/>
+              <a:t> just select the Context PE and add it to the target token.</a:t>
+            </a:r>
+          </a:p>
+          <a:p>
+            <a:endParaRPr lang="en-US" dirty="0"/>
+          </a:p>
+          <a:p>
+            <a:r>
+              <a:rPr lang="en-US" dirty="0"/>
+              <a:t>While ours on the right hand side take the weighted sum of the context PE and add the result to the target token.</a:t>
+            </a:r>
           </a:p>
         </p:txBody>
       </p:sp>
@@ -7542,7 +7762,44 @@
           <a:bodyPr/>
           <a:lstStyle/>
           <a:p>
+            <a:r>
+              <a:rPr lang="en-US" dirty="0"/>
+              <a:t>We now take a look at global modulation.</a:t>
+            </a:r>
+          </a:p>
+          <a:p>
             <a:endParaRPr lang="en-US" dirty="0"/>
+          </a:p>
+          <a:p>
+            <a:r>
+              <a:rPr lang="en-US" dirty="0"/>
+              <a:t>Global modulation is just a element-wise multiplication between the </a:t>
+            </a:r>
+            <a:r>
+              <a:rPr lang="en-US" dirty="0" err="1"/>
+              <a:t>CRTNet</a:t>
+            </a:r>
+            <a:r>
+              <a:rPr lang="en-US" dirty="0"/>
+              <a:t> attention output and the second residual of the </a:t>
+            </a:r>
+            <a:r>
+              <a:rPr lang="en-US" dirty="0" err="1"/>
+              <a:t>ViT</a:t>
+            </a:r>
+            <a:r>
+              <a:rPr lang="en-US" dirty="0"/>
+              <a:t> Transformer architecture.</a:t>
+            </a:r>
+          </a:p>
+          <a:p>
+            <a:endParaRPr lang="en-US" dirty="0"/>
+          </a:p>
+          <a:p>
+            <a:r>
+              <a:rPr lang="en-US" dirty="0"/>
+              <a:t>This operation is only applied ONCE in the pre-defined manner.</a:t>
+            </a:r>
           </a:p>
         </p:txBody>
       </p:sp>
@@ -7728,7 +7985,505 @@
           <a:bodyPr/>
           <a:lstStyle/>
           <a:p>
+            <a:r>
+              <a:rPr lang="en-US" dirty="0"/>
+              <a:t>To further encourage the </a:t>
+            </a:r>
+            <a:r>
+              <a:rPr lang="en-US" dirty="0" err="1"/>
+              <a:t>CRTNet</a:t>
+            </a:r>
+            <a:r>
+              <a:rPr lang="en-US" dirty="0"/>
+              <a:t> to leverage its decoder attention mechanism, we introduce some more augmentation in the training process</a:t>
+            </a:r>
+          </a:p>
+          <a:p>
             <a:endParaRPr lang="en-US" dirty="0"/>
+          </a:p>
+          <a:p>
+            <a:r>
+              <a:rPr lang="en-US" dirty="0"/>
+              <a:t>From the COCO dataset, there are 3 selection for Context Image and 3 selection for target image.</a:t>
+            </a:r>
+          </a:p>
+          <a:p>
+            <a:endParaRPr lang="en-US" dirty="0"/>
+          </a:p>
+          <a:p>
+            <a:r>
+              <a:rPr lang="en-US" dirty="0"/>
+              <a:t>So there are 9 combinations of selection is total to form an image pair</a:t>
+            </a:r>
+          </a:p>
+        </p:txBody>
+      </p:sp>
+      <p:sp>
+        <p:nvSpPr>
+          <p:cNvPr id="4" name="Slide Number Placeholder 3"/>
+          <p:cNvSpPr>
+            <a:spLocks noGrp="1"/>
+          </p:cNvSpPr>
+          <p:nvPr>
+            <p:ph type="sldNum" sz="quarter" idx="5"/>
+          </p:nvPr>
+        </p:nvSpPr>
+        <p:spPr/>
+        <p:txBody>
+          <a:bodyPr/>
+          <a:lstStyle/>
+          <a:p>
+            <a:fld id="{7332F5B2-8E9E-A043-910C-D623E320FEF5}" type="slidenum">
+              <a:rPr lang="en-US" smtClean="0"/>
+              <a:t>40</a:t>
+            </a:fld>
+            <a:endParaRPr lang="en-US"/>
+          </a:p>
+        </p:txBody>
+      </p:sp>
+    </p:spTree>
+    <p:extLst>
+      <p:ext uri="{BB962C8B-B14F-4D97-AF65-F5344CB8AC3E}">
+        <p14:creationId xmlns:p14="http://schemas.microsoft.com/office/powerpoint/2010/main" val="985304680"/>
+      </p:ext>
+    </p:extLst>
+  </p:cSld>
+  <p:clrMapOvr>
+    <a:masterClrMapping/>
+  </p:clrMapOvr>
+</p:notes>
+</file>
+
+<file path=ppt/notesSlides/notesSlide41.xml><?xml version="1.0" encoding="utf-8"?>
+<p:notes xmlns:a="http://schemas.openxmlformats.org/drawingml/2006/main" xmlns:r="http://schemas.openxmlformats.org/officeDocument/2006/relationships" xmlns:p="http://schemas.openxmlformats.org/presentationml/2006/main">
+  <p:cSld>
+    <p:spTree>
+      <p:nvGrpSpPr>
+        <p:cNvPr id="1" name=""/>
+        <p:cNvGrpSpPr/>
+        <p:nvPr/>
+      </p:nvGrpSpPr>
+      <p:grpSpPr>
+        <a:xfrm>
+          <a:off x="0" y="0"/>
+          <a:ext cx="0" cy="0"/>
+          <a:chOff x="0" y="0"/>
+          <a:chExt cx="0" cy="0"/>
+        </a:xfrm>
+      </p:grpSpPr>
+      <p:sp>
+        <p:nvSpPr>
+          <p:cNvPr id="2" name="Slide Image Placeholder 1"/>
+          <p:cNvSpPr>
+            <a:spLocks noGrp="1" noRot="1" noChangeAspect="1"/>
+          </p:cNvSpPr>
+          <p:nvPr>
+            <p:ph type="sldImg"/>
+          </p:nvPr>
+        </p:nvSpPr>
+        <p:spPr/>
+      </p:sp>
+      <p:sp>
+        <p:nvSpPr>
+          <p:cNvPr id="3" name="Notes Placeholder 2"/>
+          <p:cNvSpPr>
+            <a:spLocks noGrp="1"/>
+          </p:cNvSpPr>
+          <p:nvPr>
+            <p:ph type="body" idx="1"/>
+          </p:nvPr>
+        </p:nvSpPr>
+        <p:spPr/>
+        <p:txBody>
+          <a:bodyPr/>
+          <a:lstStyle/>
+          <a:p>
+            <a:r>
+              <a:rPr lang="en-US" dirty="0"/>
+              <a:t>This is a visualization of how the data augmentation that are used in the training process</a:t>
+            </a:r>
+          </a:p>
+        </p:txBody>
+      </p:sp>
+      <p:sp>
+        <p:nvSpPr>
+          <p:cNvPr id="4" name="Slide Number Placeholder 3"/>
+          <p:cNvSpPr>
+            <a:spLocks noGrp="1"/>
+          </p:cNvSpPr>
+          <p:nvPr>
+            <p:ph type="sldNum" sz="quarter" idx="5"/>
+          </p:nvPr>
+        </p:nvSpPr>
+        <p:spPr/>
+        <p:txBody>
+          <a:bodyPr/>
+          <a:lstStyle/>
+          <a:p>
+            <a:fld id="{7332F5B2-8E9E-A043-910C-D623E320FEF5}" type="slidenum">
+              <a:rPr lang="en-US" smtClean="0"/>
+              <a:t>41</a:t>
+            </a:fld>
+            <a:endParaRPr lang="en-US"/>
+          </a:p>
+        </p:txBody>
+      </p:sp>
+    </p:spTree>
+    <p:extLst>
+      <p:ext uri="{BB962C8B-B14F-4D97-AF65-F5344CB8AC3E}">
+        <p14:creationId xmlns:p14="http://schemas.microsoft.com/office/powerpoint/2010/main" val="2575081637"/>
+      </p:ext>
+    </p:extLst>
+  </p:cSld>
+  <p:clrMapOvr>
+    <a:masterClrMapping/>
+  </p:clrMapOvr>
+</p:notes>
+</file>
+
+<file path=ppt/notesSlides/notesSlide42.xml><?xml version="1.0" encoding="utf-8"?>
+<p:notes xmlns:a="http://schemas.openxmlformats.org/drawingml/2006/main" xmlns:r="http://schemas.openxmlformats.org/officeDocument/2006/relationships" xmlns:p="http://schemas.openxmlformats.org/presentationml/2006/main">
+  <p:cSld>
+    <p:spTree>
+      <p:nvGrpSpPr>
+        <p:cNvPr id="1" name=""/>
+        <p:cNvGrpSpPr/>
+        <p:nvPr/>
+      </p:nvGrpSpPr>
+      <p:grpSpPr>
+        <a:xfrm>
+          <a:off x="0" y="0"/>
+          <a:ext cx="0" cy="0"/>
+          <a:chOff x="0" y="0"/>
+          <a:chExt cx="0" cy="0"/>
+        </a:xfrm>
+      </p:grpSpPr>
+      <p:sp>
+        <p:nvSpPr>
+          <p:cNvPr id="2" name="Slide Image Placeholder 1"/>
+          <p:cNvSpPr>
+            <a:spLocks noGrp="1" noRot="1" noChangeAspect="1"/>
+          </p:cNvSpPr>
+          <p:nvPr>
+            <p:ph type="sldImg"/>
+          </p:nvPr>
+        </p:nvSpPr>
+        <p:spPr/>
+      </p:sp>
+      <p:sp>
+        <p:nvSpPr>
+          <p:cNvPr id="3" name="Notes Placeholder 2"/>
+          <p:cNvSpPr>
+            <a:spLocks noGrp="1"/>
+          </p:cNvSpPr>
+          <p:nvPr>
+            <p:ph type="body" idx="1"/>
+          </p:nvPr>
+        </p:nvSpPr>
+        <p:spPr/>
+        <p:txBody>
+          <a:bodyPr/>
+          <a:lstStyle/>
+          <a:p>
+            <a:r>
+              <a:rPr lang="en-US" dirty="0"/>
+              <a:t>After testing and benchmark both the </a:t>
+            </a:r>
+            <a:r>
+              <a:rPr lang="en-US" dirty="0" err="1"/>
+              <a:t>bbox</a:t>
+            </a:r>
+            <a:r>
+              <a:rPr lang="en-US" dirty="0"/>
+              <a:t> PE model and the innovative PE version we find out that the innovative PE version learn faster and perform better in recognition task.</a:t>
+            </a:r>
+          </a:p>
+        </p:txBody>
+      </p:sp>
+      <p:sp>
+        <p:nvSpPr>
+          <p:cNvPr id="4" name="Slide Number Placeholder 3"/>
+          <p:cNvSpPr>
+            <a:spLocks noGrp="1"/>
+          </p:cNvSpPr>
+          <p:nvPr>
+            <p:ph type="sldNum" sz="quarter" idx="5"/>
+          </p:nvPr>
+        </p:nvSpPr>
+        <p:spPr/>
+        <p:txBody>
+          <a:bodyPr/>
+          <a:lstStyle/>
+          <a:p>
+            <a:fld id="{7332F5B2-8E9E-A043-910C-D623E320FEF5}" type="slidenum">
+              <a:rPr lang="en-US" smtClean="0"/>
+              <a:t>42</a:t>
+            </a:fld>
+            <a:endParaRPr lang="en-US"/>
+          </a:p>
+        </p:txBody>
+      </p:sp>
+    </p:spTree>
+    <p:extLst>
+      <p:ext uri="{BB962C8B-B14F-4D97-AF65-F5344CB8AC3E}">
+        <p14:creationId xmlns:p14="http://schemas.microsoft.com/office/powerpoint/2010/main" val="3676094284"/>
+      </p:ext>
+    </p:extLst>
+  </p:cSld>
+  <p:clrMapOvr>
+    <a:masterClrMapping/>
+  </p:clrMapOvr>
+</p:notes>
+</file>
+
+<file path=ppt/notesSlides/notesSlide43.xml><?xml version="1.0" encoding="utf-8"?>
+<p:notes xmlns:a="http://schemas.openxmlformats.org/drawingml/2006/main" xmlns:r="http://schemas.openxmlformats.org/officeDocument/2006/relationships" xmlns:p="http://schemas.openxmlformats.org/presentationml/2006/main">
+  <p:cSld>
+    <p:spTree>
+      <p:nvGrpSpPr>
+        <p:cNvPr id="1" name=""/>
+        <p:cNvGrpSpPr/>
+        <p:nvPr/>
+      </p:nvGrpSpPr>
+      <p:grpSpPr>
+        <a:xfrm>
+          <a:off x="0" y="0"/>
+          <a:ext cx="0" cy="0"/>
+          <a:chOff x="0" y="0"/>
+          <a:chExt cx="0" cy="0"/>
+        </a:xfrm>
+      </p:grpSpPr>
+      <p:sp>
+        <p:nvSpPr>
+          <p:cNvPr id="2" name="Slide Image Placeholder 1"/>
+          <p:cNvSpPr>
+            <a:spLocks noGrp="1" noRot="1" noChangeAspect="1"/>
+          </p:cNvSpPr>
+          <p:nvPr>
+            <p:ph type="sldImg"/>
+          </p:nvPr>
+        </p:nvSpPr>
+        <p:spPr/>
+      </p:sp>
+      <p:sp>
+        <p:nvSpPr>
+          <p:cNvPr id="3" name="Notes Placeholder 2"/>
+          <p:cNvSpPr>
+            <a:spLocks noGrp="1"/>
+          </p:cNvSpPr>
+          <p:nvPr>
+            <p:ph type="body" idx="1"/>
+          </p:nvPr>
+        </p:nvSpPr>
+        <p:spPr/>
+        <p:txBody>
+          <a:bodyPr/>
+          <a:lstStyle/>
+          <a:p>
+            <a:r>
+              <a:rPr lang="en-US" dirty="0"/>
+              <a:t>Now, let’s move on to the experiment where we will see how TCT model perform on different benchmark datasets</a:t>
+            </a:r>
+          </a:p>
+        </p:txBody>
+      </p:sp>
+      <p:sp>
+        <p:nvSpPr>
+          <p:cNvPr id="4" name="Slide Number Placeholder 3"/>
+          <p:cNvSpPr>
+            <a:spLocks noGrp="1"/>
+          </p:cNvSpPr>
+          <p:nvPr>
+            <p:ph type="sldNum" sz="quarter" idx="5"/>
+          </p:nvPr>
+        </p:nvSpPr>
+        <p:spPr/>
+        <p:txBody>
+          <a:bodyPr/>
+          <a:lstStyle/>
+          <a:p>
+            <a:fld id="{7332F5B2-8E9E-A043-910C-D623E320FEF5}" type="slidenum">
+              <a:rPr lang="en-US" smtClean="0"/>
+              <a:t>43</a:t>
+            </a:fld>
+            <a:endParaRPr lang="en-US"/>
+          </a:p>
+        </p:txBody>
+      </p:sp>
+    </p:spTree>
+    <p:extLst>
+      <p:ext uri="{BB962C8B-B14F-4D97-AF65-F5344CB8AC3E}">
+        <p14:creationId xmlns:p14="http://schemas.microsoft.com/office/powerpoint/2010/main" val="4079252949"/>
+      </p:ext>
+    </p:extLst>
+  </p:cSld>
+  <p:clrMapOvr>
+    <a:masterClrMapping/>
+  </p:clrMapOvr>
+</p:notes>
+</file>
+
+<file path=ppt/notesSlides/notesSlide44.xml><?xml version="1.0" encoding="utf-8"?>
+<p:notes xmlns:a="http://schemas.openxmlformats.org/drawingml/2006/main" xmlns:r="http://schemas.openxmlformats.org/officeDocument/2006/relationships" xmlns:p="http://schemas.openxmlformats.org/presentationml/2006/main">
+  <p:cSld>
+    <p:spTree>
+      <p:nvGrpSpPr>
+        <p:cNvPr id="1" name=""/>
+        <p:cNvGrpSpPr/>
+        <p:nvPr/>
+      </p:nvGrpSpPr>
+      <p:grpSpPr>
+        <a:xfrm>
+          <a:off x="0" y="0"/>
+          <a:ext cx="0" cy="0"/>
+          <a:chOff x="0" y="0"/>
+          <a:chExt cx="0" cy="0"/>
+        </a:xfrm>
+      </p:grpSpPr>
+      <p:sp>
+        <p:nvSpPr>
+          <p:cNvPr id="2" name="Slide Image Placeholder 1"/>
+          <p:cNvSpPr>
+            <a:spLocks noGrp="1" noRot="1" noChangeAspect="1"/>
+          </p:cNvSpPr>
+          <p:nvPr>
+            <p:ph type="sldImg"/>
+          </p:nvPr>
+        </p:nvSpPr>
+        <p:spPr/>
+      </p:sp>
+      <p:sp>
+        <p:nvSpPr>
+          <p:cNvPr id="3" name="Notes Placeholder 2"/>
+          <p:cNvSpPr>
+            <a:spLocks noGrp="1"/>
+          </p:cNvSpPr>
+          <p:nvPr>
+            <p:ph type="body" idx="1"/>
+          </p:nvPr>
+        </p:nvSpPr>
+        <p:spPr/>
+        <p:txBody>
+          <a:bodyPr/>
+          <a:lstStyle/>
+          <a:p>
+            <a:r>
+              <a:rPr lang="en-US" dirty="0"/>
+              <a:t>In the COCO-Search18 dataset, we can see that our final model (Orange line) performs better than other benchmark models, it is also expected since the model is also trained on the same set of the dataset, so it is expected to perform better on the same distribution. </a:t>
+            </a:r>
+          </a:p>
+          <a:p>
+            <a:endParaRPr lang="en-US" dirty="0"/>
+          </a:p>
+          <a:p>
+            <a:r>
+              <a:rPr lang="en-US" dirty="0"/>
+              <a:t>One notable point is that our model performs as well as the “cheat” model, where a bounding box is provided in the positional encoding layer.</a:t>
+            </a:r>
+          </a:p>
+        </p:txBody>
+      </p:sp>
+      <p:sp>
+        <p:nvSpPr>
+          <p:cNvPr id="4" name="Slide Number Placeholder 3"/>
+          <p:cNvSpPr>
+            <a:spLocks noGrp="1"/>
+          </p:cNvSpPr>
+          <p:nvPr>
+            <p:ph type="sldNum" sz="quarter" idx="5"/>
+          </p:nvPr>
+        </p:nvSpPr>
+        <p:spPr/>
+        <p:txBody>
+          <a:bodyPr/>
+          <a:lstStyle/>
+          <a:p>
+            <a:fld id="{7332F5B2-8E9E-A043-910C-D623E320FEF5}" type="slidenum">
+              <a:rPr lang="en-US" smtClean="0"/>
+              <a:t>44</a:t>
+            </a:fld>
+            <a:endParaRPr lang="en-US"/>
+          </a:p>
+        </p:txBody>
+      </p:sp>
+    </p:spTree>
+    <p:extLst>
+      <p:ext uri="{BB962C8B-B14F-4D97-AF65-F5344CB8AC3E}">
+        <p14:creationId xmlns:p14="http://schemas.microsoft.com/office/powerpoint/2010/main" val="1541361363"/>
+      </p:ext>
+    </p:extLst>
+  </p:cSld>
+  <p:clrMapOvr>
+    <a:masterClrMapping/>
+  </p:clrMapOvr>
+</p:notes>
+</file>
+
+<file path=ppt/notesSlides/notesSlide45.xml><?xml version="1.0" encoding="utf-8"?>
+<p:notes xmlns:a="http://schemas.openxmlformats.org/drawingml/2006/main" xmlns:r="http://schemas.openxmlformats.org/officeDocument/2006/relationships" xmlns:p="http://schemas.openxmlformats.org/presentationml/2006/main">
+  <p:cSld>
+    <p:spTree>
+      <p:nvGrpSpPr>
+        <p:cNvPr id="1" name=""/>
+        <p:cNvGrpSpPr/>
+        <p:nvPr/>
+      </p:nvGrpSpPr>
+      <p:grpSpPr>
+        <a:xfrm>
+          <a:off x="0" y="0"/>
+          <a:ext cx="0" cy="0"/>
+          <a:chOff x="0" y="0"/>
+          <a:chExt cx="0" cy="0"/>
+        </a:xfrm>
+      </p:grpSpPr>
+      <p:sp>
+        <p:nvSpPr>
+          <p:cNvPr id="2" name="Slide Image Placeholder 1"/>
+          <p:cNvSpPr>
+            <a:spLocks noGrp="1" noRot="1" noChangeAspect="1"/>
+          </p:cNvSpPr>
+          <p:nvPr>
+            <p:ph type="sldImg"/>
+          </p:nvPr>
+        </p:nvSpPr>
+        <p:spPr/>
+      </p:sp>
+      <p:sp>
+        <p:nvSpPr>
+          <p:cNvPr id="3" name="Notes Placeholder 2"/>
+          <p:cNvSpPr>
+            <a:spLocks noGrp="1"/>
+          </p:cNvSpPr>
+          <p:nvPr>
+            <p:ph type="body" idx="1"/>
+          </p:nvPr>
+        </p:nvSpPr>
+        <p:spPr/>
+        <p:txBody>
+          <a:bodyPr/>
+          <a:lstStyle/>
+          <a:p>
+            <a:r>
+              <a:rPr lang="en-US" dirty="0"/>
+              <a:t>In the SCEGRAM dataset, where objects with same category but have different appearance, our model tend to perform worse than Dr. Zhang Mengmi IVSN model. </a:t>
+            </a:r>
+          </a:p>
+          <a:p>
+            <a:endParaRPr lang="en-US" dirty="0"/>
+          </a:p>
+          <a:p>
+            <a:r>
+              <a:rPr lang="en-US" dirty="0"/>
+              <a:t>However, it is also important to note that our model outperforms the </a:t>
+            </a:r>
+            <a:r>
+              <a:rPr lang="en-US" dirty="0" err="1"/>
+              <a:t>bbox</a:t>
+            </a:r>
+            <a:r>
+              <a:rPr lang="en-US" dirty="0"/>
+              <a:t> CRT model and is comparable to the IVSN model.</a:t>
+            </a:r>
           </a:p>
         </p:txBody>
       </p:sp>
@@ -7768,7 +8523,7 @@
 </p:notes>
 </file>
 
-<file path=ppt/notesSlides/notesSlide41.xml><?xml version="1.0" encoding="utf-8"?>
+<file path=ppt/notesSlides/notesSlide46.xml><?xml version="1.0" encoding="utf-8"?>
 <p:notes xmlns:a="http://schemas.openxmlformats.org/drawingml/2006/main" xmlns:r="http://schemas.openxmlformats.org/officeDocument/2006/relationships" xmlns:p="http://schemas.openxmlformats.org/presentationml/2006/main">
   <p:cSld>
     <p:spTree>
@@ -7830,7 +8585,35 @@
           <a:bodyPr/>
           <a:lstStyle/>
           <a:p>
+            <a:r>
+              <a:rPr lang="en-US" dirty="0"/>
+              <a:t>In the natural design dataset introduced in the IVSN paper, the dataset challenges the model's ability to find targets in the surroundings with similar shapes and </a:t>
+            </a:r>
+            <a:r>
+              <a:rPr lang="en-US" dirty="0" err="1"/>
+              <a:t>colours</a:t>
+            </a:r>
+            <a:r>
+              <a:rPr lang="en-US" dirty="0"/>
+              <a:t> like faces and small objects.</a:t>
+            </a:r>
+          </a:p>
+          <a:p>
             <a:endParaRPr lang="en-US" dirty="0"/>
+          </a:p>
+          <a:p>
+            <a:r>
+              <a:rPr lang="en-US" dirty="0"/>
+              <a:t>TCT model then to underperform IVSN model in this dataset, but over perform RANDOM searching and </a:t>
+            </a:r>
+            <a:r>
+              <a:rPr lang="en-US" dirty="0" err="1"/>
+              <a:t>DeepGaze</a:t>
+            </a:r>
+            <a:r>
+              <a:rPr lang="en-US" dirty="0"/>
+              <a:t> model which only depends on Context image and log searching algorithm.</a:t>
+            </a:r>
           </a:p>
         </p:txBody>
       </p:sp>
@@ -7876,7 +8659,7 @@
 </p:notes>
 </file>
 
-<file path=ppt/notesSlides/notesSlide42.xml><?xml version="1.0" encoding="utf-8"?>
+<file path=ppt/notesSlides/notesSlide47.xml><?xml version="1.0" encoding="utf-8"?>
 <p:notes xmlns:a="http://schemas.openxmlformats.org/drawingml/2006/main" xmlns:r="http://schemas.openxmlformats.org/officeDocument/2006/relationships" xmlns:p="http://schemas.openxmlformats.org/presentationml/2006/main">
   <p:cSld>
     <p:spTree>
@@ -7938,7 +8721,18 @@
           <a:bodyPr/>
           <a:lstStyle/>
           <a:p>
-            <a:endParaRPr lang="en-US" dirty="0"/>
+            <a:r>
+              <a:rPr lang="en-US" dirty="0"/>
+              <a:t>Finally, we introduce </a:t>
+            </a:r>
+            <a:r>
+              <a:rPr lang="en-US" dirty="0" err="1"/>
+              <a:t>ContextBreak</a:t>
+            </a:r>
+            <a:r>
+              <a:rPr lang="en-US" dirty="0"/>
+              <a:t> dataset, this dataset contain 24000 images with some images is of the same context scene but in different contexts visual angle to simulate human search behavior in reality “over attention”. Our model over perform random search by a large margin and overperform all benchmark models.</a:t>
+            </a:r>
           </a:p>
         </p:txBody>
       </p:sp>
@@ -7975,6 +8769,197 @@
     <p:extLst>
       <p:ext uri="{BB962C8B-B14F-4D97-AF65-F5344CB8AC3E}">
         <p14:creationId xmlns:p14="http://schemas.microsoft.com/office/powerpoint/2010/main" val="840744565"/>
+      </p:ext>
+    </p:extLst>
+  </p:cSld>
+  <p:clrMapOvr>
+    <a:masterClrMapping/>
+  </p:clrMapOvr>
+</p:notes>
+</file>
+
+<file path=ppt/notesSlides/notesSlide48.xml><?xml version="1.0" encoding="utf-8"?>
+<p:notes xmlns:a="http://schemas.openxmlformats.org/drawingml/2006/main" xmlns:r="http://schemas.openxmlformats.org/officeDocument/2006/relationships" xmlns:p="http://schemas.openxmlformats.org/presentationml/2006/main">
+  <p:cSld>
+    <p:spTree>
+      <p:nvGrpSpPr>
+        <p:cNvPr id="1" name=""/>
+        <p:cNvGrpSpPr/>
+        <p:nvPr/>
+      </p:nvGrpSpPr>
+      <p:grpSpPr>
+        <a:xfrm>
+          <a:off x="0" y="0"/>
+          <a:ext cx="0" cy="0"/>
+          <a:chOff x="0" y="0"/>
+          <a:chExt cx="0" cy="0"/>
+        </a:xfrm>
+      </p:grpSpPr>
+      <p:sp>
+        <p:nvSpPr>
+          <p:cNvPr id="2" name="Slide Image Placeholder 1"/>
+          <p:cNvSpPr>
+            <a:spLocks noGrp="1" noRot="1" noChangeAspect="1"/>
+          </p:cNvSpPr>
+          <p:nvPr>
+            <p:ph type="sldImg"/>
+          </p:nvPr>
+        </p:nvSpPr>
+        <p:spPr/>
+      </p:sp>
+      <p:sp>
+        <p:nvSpPr>
+          <p:cNvPr id="3" name="Notes Placeholder 2"/>
+          <p:cNvSpPr>
+            <a:spLocks noGrp="1"/>
+          </p:cNvSpPr>
+          <p:nvPr>
+            <p:ph type="body" idx="1"/>
+          </p:nvPr>
+        </p:nvSpPr>
+        <p:spPr/>
+        <p:txBody>
+          <a:bodyPr/>
+          <a:lstStyle/>
+          <a:p>
+            <a:r>
+              <a:rPr lang="en-US" dirty="0"/>
+              <a:t>Finally, we conclude by summarizing what is possible </a:t>
+            </a:r>
+            <a:r>
+              <a:rPr lang="en-US" dirty="0" err="1"/>
+              <a:t>limitaitons</a:t>
+            </a:r>
+            <a:r>
+              <a:rPr lang="en-US" dirty="0"/>
+              <a:t>, our contributions and future directions</a:t>
+            </a:r>
+          </a:p>
+        </p:txBody>
+      </p:sp>
+      <p:sp>
+        <p:nvSpPr>
+          <p:cNvPr id="4" name="Slide Number Placeholder 3"/>
+          <p:cNvSpPr>
+            <a:spLocks noGrp="1"/>
+          </p:cNvSpPr>
+          <p:nvPr>
+            <p:ph type="sldNum" sz="quarter" idx="5"/>
+          </p:nvPr>
+        </p:nvSpPr>
+        <p:spPr/>
+        <p:txBody>
+          <a:bodyPr/>
+          <a:lstStyle/>
+          <a:p>
+            <a:fld id="{7332F5B2-8E9E-A043-910C-D623E320FEF5}" type="slidenum">
+              <a:rPr lang="en-US" smtClean="0"/>
+              <a:t>48</a:t>
+            </a:fld>
+            <a:endParaRPr lang="en-US"/>
+          </a:p>
+        </p:txBody>
+      </p:sp>
+    </p:spTree>
+    <p:extLst>
+      <p:ext uri="{BB962C8B-B14F-4D97-AF65-F5344CB8AC3E}">
+        <p14:creationId xmlns:p14="http://schemas.microsoft.com/office/powerpoint/2010/main" val="977797510"/>
+      </p:ext>
+    </p:extLst>
+  </p:cSld>
+  <p:clrMapOvr>
+    <a:masterClrMapping/>
+  </p:clrMapOvr>
+</p:notes>
+</file>
+
+<file path=ppt/notesSlides/notesSlide49.xml><?xml version="1.0" encoding="utf-8"?>
+<p:notes xmlns:a="http://schemas.openxmlformats.org/drawingml/2006/main" xmlns:r="http://schemas.openxmlformats.org/officeDocument/2006/relationships" xmlns:p="http://schemas.openxmlformats.org/presentationml/2006/main">
+  <p:cSld>
+    <p:spTree>
+      <p:nvGrpSpPr>
+        <p:cNvPr id="1" name=""/>
+        <p:cNvGrpSpPr/>
+        <p:nvPr/>
+      </p:nvGrpSpPr>
+      <p:grpSpPr>
+        <a:xfrm>
+          <a:off x="0" y="0"/>
+          <a:ext cx="0" cy="0"/>
+          <a:chOff x="0" y="0"/>
+          <a:chExt cx="0" cy="0"/>
+        </a:xfrm>
+      </p:grpSpPr>
+      <p:sp>
+        <p:nvSpPr>
+          <p:cNvPr id="2" name="Slide Image Placeholder 1"/>
+          <p:cNvSpPr>
+            <a:spLocks noGrp="1" noRot="1" noChangeAspect="1"/>
+          </p:cNvSpPr>
+          <p:nvPr>
+            <p:ph type="sldImg"/>
+          </p:nvPr>
+        </p:nvSpPr>
+        <p:spPr/>
+      </p:sp>
+      <p:sp>
+        <p:nvSpPr>
+          <p:cNvPr id="3" name="Notes Placeholder 2"/>
+          <p:cNvSpPr>
+            <a:spLocks noGrp="1"/>
+          </p:cNvSpPr>
+          <p:nvPr>
+            <p:ph type="body" idx="1"/>
+          </p:nvPr>
+        </p:nvSpPr>
+        <p:spPr/>
+        <p:txBody>
+          <a:bodyPr/>
+          <a:lstStyle/>
+          <a:p>
+            <a:r>
+              <a:rPr lang="en-US" dirty="0"/>
+              <a:t>Even with such impressive performance, it is not mathematically justify since both Transformer components inside the TCT are refined on different dataset and are linked only through global modulation operation</a:t>
+            </a:r>
+          </a:p>
+          <a:p>
+            <a:endParaRPr lang="en-US" dirty="0"/>
+          </a:p>
+          <a:p>
+            <a:r>
+              <a:rPr lang="en-US" dirty="0"/>
+              <a:t>Moreover, every user-defined variable chosen for the TCT model are through iterative process rather than rationally or intuitively selected or explain which make the model unstable for further scaling and enhancement.</a:t>
+            </a:r>
+          </a:p>
+        </p:txBody>
+      </p:sp>
+      <p:sp>
+        <p:nvSpPr>
+          <p:cNvPr id="4" name="Slide Number Placeholder 3"/>
+          <p:cNvSpPr>
+            <a:spLocks noGrp="1"/>
+          </p:cNvSpPr>
+          <p:nvPr>
+            <p:ph type="sldNum" sz="quarter" idx="5"/>
+          </p:nvPr>
+        </p:nvSpPr>
+        <p:spPr/>
+        <p:txBody>
+          <a:bodyPr/>
+          <a:lstStyle/>
+          <a:p>
+            <a:fld id="{7332F5B2-8E9E-A043-910C-D623E320FEF5}" type="slidenum">
+              <a:rPr lang="en-US" smtClean="0"/>
+              <a:t>49</a:t>
+            </a:fld>
+            <a:endParaRPr lang="en-US"/>
+          </a:p>
+        </p:txBody>
+      </p:sp>
+    </p:spTree>
+    <p:extLst>
+      <p:ext uri="{BB962C8B-B14F-4D97-AF65-F5344CB8AC3E}">
+        <p14:creationId xmlns:p14="http://schemas.microsoft.com/office/powerpoint/2010/main" val="549710858"/>
       </p:ext>
     </p:extLst>
   </p:cSld>
@@ -8095,6 +9080,302 @@
     <p:extLst>
       <p:ext uri="{BB962C8B-B14F-4D97-AF65-F5344CB8AC3E}">
         <p14:creationId xmlns:p14="http://schemas.microsoft.com/office/powerpoint/2010/main" val="2023858777"/>
+      </p:ext>
+    </p:extLst>
+  </p:cSld>
+  <p:clrMapOvr>
+    <a:masterClrMapping/>
+  </p:clrMapOvr>
+</p:notes>
+</file>
+
+<file path=ppt/notesSlides/notesSlide50.xml><?xml version="1.0" encoding="utf-8"?>
+<p:notes xmlns:a="http://schemas.openxmlformats.org/drawingml/2006/main" xmlns:r="http://schemas.openxmlformats.org/officeDocument/2006/relationships" xmlns:p="http://schemas.openxmlformats.org/presentationml/2006/main">
+  <p:cSld>
+    <p:spTree>
+      <p:nvGrpSpPr>
+        <p:cNvPr id="1" name=""/>
+        <p:cNvGrpSpPr/>
+        <p:nvPr/>
+      </p:nvGrpSpPr>
+      <p:grpSpPr>
+        <a:xfrm>
+          <a:off x="0" y="0"/>
+          <a:ext cx="0" cy="0"/>
+          <a:chOff x="0" y="0"/>
+          <a:chExt cx="0" cy="0"/>
+        </a:xfrm>
+      </p:grpSpPr>
+      <p:sp>
+        <p:nvSpPr>
+          <p:cNvPr id="2" name="Slide Image Placeholder 1"/>
+          <p:cNvSpPr>
+            <a:spLocks noGrp="1" noRot="1" noChangeAspect="1"/>
+          </p:cNvSpPr>
+          <p:nvPr>
+            <p:ph type="sldImg"/>
+          </p:nvPr>
+        </p:nvSpPr>
+        <p:spPr/>
+      </p:sp>
+      <p:sp>
+        <p:nvSpPr>
+          <p:cNvPr id="3" name="Notes Placeholder 2"/>
+          <p:cNvSpPr>
+            <a:spLocks noGrp="1"/>
+          </p:cNvSpPr>
+          <p:nvPr>
+            <p:ph type="body" idx="1"/>
+          </p:nvPr>
+        </p:nvSpPr>
+        <p:spPr/>
+        <p:txBody>
+          <a:bodyPr/>
+          <a:lstStyle/>
+          <a:p>
+            <a:r>
+              <a:rPr lang="en-US" dirty="0"/>
+              <a:t>The contribution of my FYP is as follows:</a:t>
+            </a:r>
+          </a:p>
+          <a:p>
+            <a:endParaRPr lang="en-US" dirty="0"/>
+          </a:p>
+          <a:p>
+            <a:pPr marL="171450" indent="-171450">
+              <a:buFontTx/>
+              <a:buChar char="-"/>
+            </a:pPr>
+            <a:r>
+              <a:rPr lang="en-US" dirty="0"/>
+              <a:t>We reconstruct the </a:t>
+            </a:r>
+            <a:r>
+              <a:rPr lang="en-US" dirty="0" err="1"/>
+              <a:t>CRTNet</a:t>
+            </a:r>
+            <a:r>
+              <a:rPr lang="en-US" dirty="0"/>
+              <a:t> and modified the PE layer to make it suitable for the visual search task</a:t>
+            </a:r>
+          </a:p>
+          <a:p>
+            <a:pPr marL="171450" indent="-171450">
+              <a:buFontTx/>
+              <a:buChar char="-"/>
+            </a:pPr>
+            <a:r>
+              <a:rPr lang="en-US" dirty="0"/>
+              <a:t>We also modify the </a:t>
+            </a:r>
+            <a:r>
+              <a:rPr lang="en-US" dirty="0" err="1"/>
+              <a:t>ViT</a:t>
+            </a:r>
+            <a:r>
+              <a:rPr lang="en-US" dirty="0"/>
+              <a:t> structure by introducing the local modulation.</a:t>
+            </a:r>
+          </a:p>
+          <a:p>
+            <a:pPr marL="171450" indent="-171450">
+              <a:buFontTx/>
+              <a:buChar char="-"/>
+            </a:pPr>
+            <a:r>
+              <a:rPr lang="en-US" dirty="0"/>
+              <a:t>Introducing image augmentation to encourage </a:t>
+            </a:r>
+            <a:r>
+              <a:rPr lang="en-US" dirty="0" err="1"/>
+              <a:t>CRTNet</a:t>
+            </a:r>
+            <a:r>
+              <a:rPr lang="en-US" dirty="0"/>
+              <a:t> to leverage its decoder attention mechanism</a:t>
+            </a:r>
+          </a:p>
+          <a:p>
+            <a:pPr marL="171450" indent="-171450">
+              <a:buFontTx/>
+              <a:buChar char="-"/>
+            </a:pPr>
+            <a:r>
+              <a:rPr lang="en-US" dirty="0"/>
+              <a:t>Finally. Perform visual search task using TCT model on different benchmark datasets</a:t>
+            </a:r>
+          </a:p>
+        </p:txBody>
+      </p:sp>
+      <p:sp>
+        <p:nvSpPr>
+          <p:cNvPr id="4" name="Slide Number Placeholder 3"/>
+          <p:cNvSpPr>
+            <a:spLocks noGrp="1"/>
+          </p:cNvSpPr>
+          <p:nvPr>
+            <p:ph type="sldNum" sz="quarter" idx="5"/>
+          </p:nvPr>
+        </p:nvSpPr>
+        <p:spPr/>
+        <p:txBody>
+          <a:bodyPr/>
+          <a:lstStyle/>
+          <a:p>
+            <a:fld id="{7332F5B2-8E9E-A043-910C-D623E320FEF5}" type="slidenum">
+              <a:rPr lang="en-US" smtClean="0"/>
+              <a:t>50</a:t>
+            </a:fld>
+            <a:endParaRPr lang="en-US"/>
+          </a:p>
+        </p:txBody>
+      </p:sp>
+    </p:spTree>
+    <p:extLst>
+      <p:ext uri="{BB962C8B-B14F-4D97-AF65-F5344CB8AC3E}">
+        <p14:creationId xmlns:p14="http://schemas.microsoft.com/office/powerpoint/2010/main" val="3963237319"/>
+      </p:ext>
+    </p:extLst>
+  </p:cSld>
+  <p:clrMapOvr>
+    <a:masterClrMapping/>
+  </p:clrMapOvr>
+</p:notes>
+</file>
+
+<file path=ppt/notesSlides/notesSlide51.xml><?xml version="1.0" encoding="utf-8"?>
+<p:notes xmlns:a="http://schemas.openxmlformats.org/drawingml/2006/main" xmlns:r="http://schemas.openxmlformats.org/officeDocument/2006/relationships" xmlns:p="http://schemas.openxmlformats.org/presentationml/2006/main">
+  <p:cSld>
+    <p:spTree>
+      <p:nvGrpSpPr>
+        <p:cNvPr id="1" name=""/>
+        <p:cNvGrpSpPr/>
+        <p:nvPr/>
+      </p:nvGrpSpPr>
+      <p:grpSpPr>
+        <a:xfrm>
+          <a:off x="0" y="0"/>
+          <a:ext cx="0" cy="0"/>
+          <a:chOff x="0" y="0"/>
+          <a:chExt cx="0" cy="0"/>
+        </a:xfrm>
+      </p:grpSpPr>
+      <p:sp>
+        <p:nvSpPr>
+          <p:cNvPr id="2" name="Slide Image Placeholder 1"/>
+          <p:cNvSpPr>
+            <a:spLocks noGrp="1" noRot="1" noChangeAspect="1"/>
+          </p:cNvSpPr>
+          <p:nvPr>
+            <p:ph type="sldImg"/>
+          </p:nvPr>
+        </p:nvSpPr>
+        <p:spPr/>
+      </p:sp>
+      <p:sp>
+        <p:nvSpPr>
+          <p:cNvPr id="3" name="Notes Placeholder 2"/>
+          <p:cNvSpPr>
+            <a:spLocks noGrp="1"/>
+          </p:cNvSpPr>
+          <p:nvPr>
+            <p:ph type="body" idx="1"/>
+          </p:nvPr>
+        </p:nvSpPr>
+        <p:spPr/>
+        <p:txBody>
+          <a:bodyPr/>
+          <a:lstStyle/>
+          <a:p>
+            <a:r>
+              <a:rPr lang="en-US" dirty="0"/>
+              <a:t>For future direction:</a:t>
+            </a:r>
+          </a:p>
+          <a:p>
+            <a:endParaRPr lang="en-US" dirty="0"/>
+          </a:p>
+          <a:p>
+            <a:pPr marL="171450" indent="-171450">
+              <a:buFontTx/>
+              <a:buChar char="-"/>
+            </a:pPr>
+            <a:r>
+              <a:rPr lang="en-US" dirty="0"/>
+              <a:t>It is possible to experiment with the </a:t>
+            </a:r>
+            <a:r>
+              <a:rPr lang="en-US" dirty="0" err="1"/>
+              <a:t>replacability</a:t>
+            </a:r>
+            <a:r>
+              <a:rPr lang="en-US" dirty="0"/>
+              <a:t> of each building blocks of the TCT models or we can try to advance the model through a more complex architecture like water fall global modulation or waterfall local modulation, etc.</a:t>
+            </a:r>
+          </a:p>
+          <a:p>
+            <a:pPr marL="171450" indent="-171450">
+              <a:buFontTx/>
+              <a:buChar char="-"/>
+            </a:pPr>
+            <a:endParaRPr lang="en-US" dirty="0"/>
+          </a:p>
+          <a:p>
+            <a:pPr marL="171450" indent="-171450">
+              <a:buFontTx/>
+              <a:buChar char="-"/>
+            </a:pPr>
+            <a:r>
+              <a:rPr lang="en-US" dirty="0"/>
+              <a:t>When computational resources is available, we can also try to train the whole TCT model on the recognition task and transferring it to the visual search task</a:t>
+            </a:r>
+          </a:p>
+          <a:p>
+            <a:pPr marL="171450" indent="-171450">
+              <a:buFontTx/>
+              <a:buChar char="-"/>
+            </a:pPr>
+            <a:endParaRPr lang="en-US" dirty="0"/>
+          </a:p>
+          <a:p>
+            <a:pPr marL="171450" indent="-171450">
+              <a:buFontTx/>
+              <a:buChar char="-"/>
+            </a:pPr>
+            <a:r>
+              <a:rPr lang="en-US" dirty="0"/>
+              <a:t>To end the presentation, we can suggest leveraging our model to build application like satellite finding to help to find people in danger or human face searching, etc.</a:t>
+            </a:r>
+          </a:p>
+        </p:txBody>
+      </p:sp>
+      <p:sp>
+        <p:nvSpPr>
+          <p:cNvPr id="4" name="Slide Number Placeholder 3"/>
+          <p:cNvSpPr>
+            <a:spLocks noGrp="1"/>
+          </p:cNvSpPr>
+          <p:nvPr>
+            <p:ph type="sldNum" sz="quarter" idx="5"/>
+          </p:nvPr>
+        </p:nvSpPr>
+        <p:spPr/>
+        <p:txBody>
+          <a:bodyPr/>
+          <a:lstStyle/>
+          <a:p>
+            <a:fld id="{7332F5B2-8E9E-A043-910C-D623E320FEF5}" type="slidenum">
+              <a:rPr lang="en-US" smtClean="0"/>
+              <a:t>51</a:t>
+            </a:fld>
+            <a:endParaRPr lang="en-US"/>
+          </a:p>
+        </p:txBody>
+      </p:sp>
+    </p:spTree>
+    <p:extLst>
+      <p:ext uri="{BB962C8B-B14F-4D97-AF65-F5344CB8AC3E}">
+        <p14:creationId xmlns:p14="http://schemas.microsoft.com/office/powerpoint/2010/main" val="2117838795"/>
       </p:ext>
     </p:extLst>
   </p:cSld>
@@ -8695,7 +9976,7 @@
           <a:p>
             <a:fld id="{D1D1EADE-8E88-4C7C-8AC5-FB148DE4940E}" type="datetime1">
               <a:rPr lang="en-US" smtClean="0"/>
-              <a:t>5/7/26</a:t>
+              <a:t>5/8/26</a:t>
             </a:fld>
             <a:endParaRPr lang="en-US"/>
           </a:p>
@@ -8895,7 +10176,7 @@
           <a:p>
             <a:fld id="{EC3C8B9C-477D-492A-96AD-1FC2CC997A73}" type="datetime1">
               <a:rPr lang="en-US" smtClean="0"/>
-              <a:t>5/7/26</a:t>
+              <a:t>5/8/26</a:t>
             </a:fld>
             <a:endParaRPr lang="en-US"/>
           </a:p>
@@ -9105,7 +10386,7 @@
           <a:p>
             <a:fld id="{42D3AED5-E26D-4E29-B1B3-7847B6779594}" type="datetime1">
               <a:rPr lang="en-US" smtClean="0"/>
-              <a:t>5/7/26</a:t>
+              <a:t>5/8/26</a:t>
             </a:fld>
             <a:endParaRPr lang="en-US"/>
           </a:p>
@@ -9305,7 +10586,7 @@
           <a:p>
             <a:fld id="{157B6794-849E-4626-908B-D15793550EFB}" type="datetime1">
               <a:rPr lang="en-US" smtClean="0"/>
-              <a:t>5/7/26</a:t>
+              <a:t>5/8/26</a:t>
             </a:fld>
             <a:endParaRPr lang="en-US"/>
           </a:p>
@@ -9581,7 +10862,7 @@
           <a:p>
             <a:fld id="{63DB64E7-5594-42A3-ADBF-E95A7ACEAD64}" type="datetime1">
               <a:rPr lang="en-US" smtClean="0"/>
-              <a:t>5/7/26</a:t>
+              <a:t>5/8/26</a:t>
             </a:fld>
             <a:endParaRPr lang="en-US"/>
           </a:p>
@@ -9854,7 +11135,7 @@
           <a:p>
             <a:fld id="{18462B0B-D248-4FFB-8695-AD7FA4B1284A}" type="datetime1">
               <a:rPr lang="en-US" smtClean="0"/>
-              <a:t>5/7/26</a:t>
+              <a:t>5/8/26</a:t>
             </a:fld>
             <a:endParaRPr lang="en-US"/>
           </a:p>
@@ -10277,7 +11558,7 @@
           <a:p>
             <a:fld id="{D0378EFB-9159-4510-B73F-4F0409ADE937}" type="datetime1">
               <a:rPr lang="en-US" smtClean="0"/>
-              <a:t>5/7/26</a:t>
+              <a:t>5/8/26</a:t>
             </a:fld>
             <a:endParaRPr lang="en-US"/>
           </a:p>
@@ -10419,7 +11700,7 @@
           <a:p>
             <a:fld id="{89BC9412-2452-4BED-A324-9D8C115361AD}" type="datetime1">
               <a:rPr lang="en-US" smtClean="0"/>
-              <a:t>5/7/26</a:t>
+              <a:t>5/8/26</a:t>
             </a:fld>
             <a:endParaRPr lang="en-US"/>
           </a:p>
@@ -10532,7 +11813,7 @@
           <a:p>
             <a:fld id="{F5318F62-D251-40E8-A23C-F4CFE9FEAB41}" type="datetime1">
               <a:rPr lang="en-US" smtClean="0"/>
-              <a:t>5/7/26</a:t>
+              <a:t>5/8/26</a:t>
             </a:fld>
             <a:endParaRPr lang="en-US"/>
           </a:p>
@@ -10845,7 +12126,7 @@
           <a:p>
             <a:fld id="{44F76144-149E-4874-93A5-554A0357CF82}" type="datetime1">
               <a:rPr lang="en-US" smtClean="0"/>
-              <a:t>5/7/26</a:t>
+              <a:t>5/8/26</a:t>
             </a:fld>
             <a:endParaRPr lang="en-US"/>
           </a:p>
@@ -11138,7 +12419,7 @@
           <a:p>
             <a:fld id="{50BA65D8-0540-4835-AE5C-25D29DBA01BE}" type="datetime1">
               <a:rPr lang="en-US" smtClean="0"/>
-              <a:t>5/7/26</a:t>
+              <a:t>5/8/26</a:t>
             </a:fld>
             <a:endParaRPr lang="en-US"/>
           </a:p>
@@ -11380,7 +12661,7 @@
           <a:p>
             <a:fld id="{E31BA835-12AC-4E8F-955A-EA3F4DE2791F}" type="datetime1">
               <a:rPr lang="en-US" smtClean="0"/>
-              <a:t>5/7/26</a:t>
+              <a:t>5/8/26</a:t>
             </a:fld>
             <a:endParaRPr lang="en-US"/>
           </a:p>
@@ -36913,7 +38194,7 @@
           <p:nvPr/>
         </p:nvPicPr>
         <p:blipFill>
-          <a:blip r:embed="rId2"/>
+          <a:blip r:embed="rId3"/>
           <a:stretch>
             <a:fillRect/>
           </a:stretch>
@@ -36943,7 +38224,7 @@
           <p:nvPr/>
         </p:nvPicPr>
         <p:blipFill>
-          <a:blip r:embed="rId3"/>
+          <a:blip r:embed="rId4"/>
           <a:stretch>
             <a:fillRect/>
           </a:stretch>
@@ -36973,7 +38254,7 @@
           <p:nvPr/>
         </p:nvPicPr>
         <p:blipFill>
-          <a:blip r:embed="rId4"/>
+          <a:blip r:embed="rId5"/>
           <a:stretch>
             <a:fillRect/>
           </a:stretch>
@@ -37294,7 +38575,7 @@
           <p:nvPr/>
         </p:nvPicPr>
         <p:blipFill>
-          <a:blip r:embed="rId2"/>
+          <a:blip r:embed="rId3"/>
           <a:stretch>
             <a:fillRect/>
           </a:stretch>
@@ -38033,7 +39314,7 @@
                 <a14:useLocalDpi xmlns:a14="http://schemas.microsoft.com/office/drawing/2010/main" val="0"/>
               </a:ext>
               <a:ext uri="{96DAC541-7B7A-43D3-8B79-37D633B846F1}">
-                <asvg:svgBlip xmlns:asvg="http://schemas.microsoft.com/office/drawing/2016/SVG/main" r:embed="rId2"/>
+                <asvg:svgBlip xmlns:asvg="http://schemas.microsoft.com/office/drawing/2016/SVG/main" r:embed="rId3"/>
               </a:ext>
             </a:extLst>
           </a:blip>
@@ -38174,7 +39455,7 @@
           <p:nvPr/>
         </p:nvPicPr>
         <p:blipFill>
-          <a:blip r:embed="rId2"/>
+          <a:blip r:embed="rId3"/>
           <a:stretch>
             <a:fillRect/>
           </a:stretch>
@@ -38476,69 +39757,12 @@
           </a:p>
         </p:txBody>
       </p:sp>
-      <p:sp>
-        <p:nvSpPr>
-          <p:cNvPr id="5" name="Rectangle 4">
-            <a:extLst>
-              <a:ext uri="{FF2B5EF4-FFF2-40B4-BE49-F238E27FC236}">
-                <a16:creationId xmlns:a16="http://schemas.microsoft.com/office/drawing/2014/main" id="{D8A97DA7-0B8F-6AE0-41AF-352212D7C6CF}"/>
-              </a:ext>
-            </a:extLst>
-          </p:cNvPr>
-          <p:cNvSpPr>
-            <a:spLocks/>
-          </p:cNvSpPr>
-          <p:nvPr/>
-        </p:nvSpPr>
-        <p:spPr>
-          <a:xfrm>
-            <a:off x="794573" y="2074892"/>
-            <a:ext cx="5072937" cy="3875674"/>
-          </a:xfrm>
-          <a:prstGeom prst="rect">
-            <a:avLst/>
-          </a:prstGeom>
-          <a:noFill/>
-          <a:ln w="12700" cap="flat" cmpd="sng" algn="ctr">
-            <a:solidFill>
-              <a:schemeClr val="tx1"/>
-            </a:solidFill>
-            <a:prstDash val="solid"/>
-            <a:miter lim="800000"/>
-          </a:ln>
-          <a:effectLst/>
-        </p:spPr>
-        <p:style>
-          <a:lnRef idx="2">
-            <a:schemeClr val="accent1">
-              <a:shade val="50000"/>
-            </a:schemeClr>
-          </a:lnRef>
-          <a:fillRef idx="1">
-            <a:schemeClr val="accent1"/>
-          </a:fillRef>
-          <a:effectRef idx="0">
-            <a:schemeClr val="accent1"/>
-          </a:effectRef>
-          <a:fontRef idx="minor">
-            <a:schemeClr val="lt1"/>
-          </a:fontRef>
-        </p:style>
-        <p:txBody>
-          <a:bodyPr rtlCol="0" anchor="ctr"/>
-          <a:lstStyle/>
-          <a:p>
-            <a:pPr algn="ctr"/>
-            <a:endParaRPr lang="en-US"/>
-          </a:p>
-        </p:txBody>
-      </p:sp>
       <p:pic>
         <p:nvPicPr>
-          <p:cNvPr id="3" name="Picture 2">
-            <a:extLst>
-              <a:ext uri="{FF2B5EF4-FFF2-40B4-BE49-F238E27FC236}">
-                <a16:creationId xmlns:a16="http://schemas.microsoft.com/office/drawing/2014/main" id="{D901BF44-95ED-710A-6669-F9C530F536DA}"/>
+          <p:cNvPr id="4" name="Picture 3">
+            <a:extLst>
+              <a:ext uri="{FF2B5EF4-FFF2-40B4-BE49-F238E27FC236}">
+                <a16:creationId xmlns:a16="http://schemas.microsoft.com/office/drawing/2014/main" id="{96382938-4891-F1CD-CFFA-54E4F6A87F1B}"/>
               </a:ext>
             </a:extLst>
           </p:cNvPr>
@@ -38555,8 +39779,8 @@
         </p:blipFill>
         <p:spPr>
           <a:xfrm>
-            <a:off x="794574" y="2074892"/>
-            <a:ext cx="5072936" cy="3875674"/>
+            <a:off x="800155" y="2074892"/>
+            <a:ext cx="5063818" cy="3868708"/>
           </a:xfrm>
           <a:prstGeom prst="rect">
             <a:avLst/>
@@ -38837,7 +40061,7 @@
                 <a14:useLocalDpi xmlns:a14="http://schemas.microsoft.com/office/drawing/2010/main" val="0"/>
               </a:ext>
               <a:ext uri="{96DAC541-7B7A-43D3-8B79-37D633B846F1}">
-                <asvg:svgBlip xmlns:asvg="http://schemas.microsoft.com/office/drawing/2016/SVG/main" r:embed="rId2"/>
+                <asvg:svgBlip xmlns:asvg="http://schemas.microsoft.com/office/drawing/2016/SVG/main" r:embed="rId3"/>
               </a:ext>
             </a:extLst>
           </a:blip>
@@ -39668,7 +40892,7 @@
           <a:p>
             <a:r>
               <a:rPr lang="en-US" dirty="0"/>
-              <a:t>Build an application that leverages such an effective model for tasks like satellite detection, human face detection, etc.</a:t>
+              <a:t>Build an application that leverages such an effective model for tasks like satellite searching, human face searching, etc.</a:t>
             </a:r>
           </a:p>
         </p:txBody>

--- a/Presentation/FYP_NguyenTuan_Presentation.pptx
+++ b/Presentation/FYP_NguyenTuan_Presentation.pptx
@@ -5,7 +5,7 @@
     <p:sldMasterId id="2147483863" r:id="rId1"/>
   </p:sldMasterIdLst>
   <p:notesMasterIdLst>
-    <p:notesMasterId r:id="rId53"/>
+    <p:notesMasterId r:id="rId54"/>
   </p:notesMasterIdLst>
   <p:sldIdLst>
     <p:sldId id="256" r:id="rId2"/>
@@ -59,6 +59,7 @@
     <p:sldId id="305" r:id="rId50"/>
     <p:sldId id="306" r:id="rId51"/>
     <p:sldId id="307" r:id="rId52"/>
+    <p:sldId id="308" r:id="rId53"/>
   </p:sldIdLst>
   <p:sldSz cx="12192000" cy="6858000"/>
   <p:notesSz cx="6858000" cy="9144000"/>
@@ -8482,7 +8483,7 @@
             </a:r>
             <a:r>
               <a:rPr lang="en-US" dirty="0"/>
-              <a:t> CRT model and is comparable to the IVSN model.</a:t>
+              <a:t> TCT model and is comparable to the IVSN model.</a:t>
             </a:r>
           </a:p>
         </p:txBody>
@@ -8604,7 +8605,7 @@
           <a:p>
             <a:r>
               <a:rPr lang="en-US" dirty="0"/>
-              <a:t>TCT model then to underperform IVSN model in this dataset, but over perform RANDOM searching and </a:t>
+              <a:t>TCT model tends to underperform IVSN model in this dataset, but overperform RANDOM searching and </a:t>
             </a:r>
             <a:r>
               <a:rPr lang="en-US" dirty="0" err="1"/>
@@ -9376,6 +9377,90 @@
     <p:extLst>
       <p:ext uri="{BB962C8B-B14F-4D97-AF65-F5344CB8AC3E}">
         <p14:creationId xmlns:p14="http://schemas.microsoft.com/office/powerpoint/2010/main" val="2117838795"/>
+      </p:ext>
+    </p:extLst>
+  </p:cSld>
+  <p:clrMapOvr>
+    <a:masterClrMapping/>
+  </p:clrMapOvr>
+</p:notes>
+</file>
+
+<file path=ppt/notesSlides/notesSlide52.xml><?xml version="1.0" encoding="utf-8"?>
+<p:notes xmlns:a="http://schemas.openxmlformats.org/drawingml/2006/main" xmlns:r="http://schemas.openxmlformats.org/officeDocument/2006/relationships" xmlns:p="http://schemas.openxmlformats.org/presentationml/2006/main">
+  <p:cSld>
+    <p:spTree>
+      <p:nvGrpSpPr>
+        <p:cNvPr id="1" name=""/>
+        <p:cNvGrpSpPr/>
+        <p:nvPr/>
+      </p:nvGrpSpPr>
+      <p:grpSpPr>
+        <a:xfrm>
+          <a:off x="0" y="0"/>
+          <a:ext cx="0" cy="0"/>
+          <a:chOff x="0" y="0"/>
+          <a:chExt cx="0" cy="0"/>
+        </a:xfrm>
+      </p:grpSpPr>
+      <p:sp>
+        <p:nvSpPr>
+          <p:cNvPr id="2" name="Slide Image Placeholder 1"/>
+          <p:cNvSpPr>
+            <a:spLocks noGrp="1" noRot="1" noChangeAspect="1"/>
+          </p:cNvSpPr>
+          <p:nvPr>
+            <p:ph type="sldImg"/>
+          </p:nvPr>
+        </p:nvSpPr>
+        <p:spPr/>
+      </p:sp>
+      <p:sp>
+        <p:nvSpPr>
+          <p:cNvPr id="3" name="Notes Placeholder 2"/>
+          <p:cNvSpPr>
+            <a:spLocks noGrp="1"/>
+          </p:cNvSpPr>
+          <p:nvPr>
+            <p:ph type="body" idx="1"/>
+          </p:nvPr>
+        </p:nvSpPr>
+        <p:spPr/>
+        <p:txBody>
+          <a:bodyPr/>
+          <a:lstStyle/>
+          <a:p>
+            <a:endParaRPr lang="en-US" dirty="0"/>
+          </a:p>
+        </p:txBody>
+      </p:sp>
+      <p:sp>
+        <p:nvSpPr>
+          <p:cNvPr id="4" name="Slide Number Placeholder 3"/>
+          <p:cNvSpPr>
+            <a:spLocks noGrp="1"/>
+          </p:cNvSpPr>
+          <p:nvPr>
+            <p:ph type="sldNum" sz="quarter" idx="5"/>
+          </p:nvPr>
+        </p:nvSpPr>
+        <p:spPr/>
+        <p:txBody>
+          <a:bodyPr/>
+          <a:lstStyle/>
+          <a:p>
+            <a:fld id="{7332F5B2-8E9E-A043-910C-D623E320FEF5}" type="slidenum">
+              <a:rPr lang="en-US" smtClean="0"/>
+              <a:t>52</a:t>
+            </a:fld>
+            <a:endParaRPr lang="en-US"/>
+          </a:p>
+        </p:txBody>
+      </p:sp>
+    </p:spTree>
+    <p:extLst>
+      <p:ext uri="{BB962C8B-B14F-4D97-AF65-F5344CB8AC3E}">
+        <p14:creationId xmlns:p14="http://schemas.microsoft.com/office/powerpoint/2010/main" val="3831225669"/>
       </p:ext>
     </p:extLst>
   </p:cSld>
@@ -40910,6 +40995,611 @@
 </p:sld>
 </file>
 
+<file path=ppt/slides/slide52.xml><?xml version="1.0" encoding="utf-8"?>
+<p:sld xmlns:a="http://schemas.openxmlformats.org/drawingml/2006/main" xmlns:r="http://schemas.openxmlformats.org/officeDocument/2006/relationships" xmlns:p="http://schemas.openxmlformats.org/presentationml/2006/main">
+  <p:cSld>
+    <p:spTree>
+      <p:nvGrpSpPr>
+        <p:cNvPr id="1" name=""/>
+        <p:cNvGrpSpPr/>
+        <p:nvPr/>
+      </p:nvGrpSpPr>
+      <p:grpSpPr>
+        <a:xfrm>
+          <a:off x="0" y="0"/>
+          <a:ext cx="0" cy="0"/>
+          <a:chOff x="0" y="0"/>
+          <a:chExt cx="0" cy="0"/>
+        </a:xfrm>
+      </p:grpSpPr>
+      <p:sp>
+        <p:nvSpPr>
+          <p:cNvPr id="2" name="Title 1">
+            <a:extLst>
+              <a:ext uri="{FF2B5EF4-FFF2-40B4-BE49-F238E27FC236}">
+                <a16:creationId xmlns:a16="http://schemas.microsoft.com/office/drawing/2014/main" id="{9E8A0211-A789-ED7A-D064-37905CFA4AF3}"/>
+              </a:ext>
+            </a:extLst>
+          </p:cNvPr>
+          <p:cNvSpPr>
+            <a:spLocks noGrp="1"/>
+          </p:cNvSpPr>
+          <p:nvPr>
+            <p:ph type="title"/>
+          </p:nvPr>
+        </p:nvSpPr>
+        <p:spPr/>
+        <p:txBody>
+          <a:bodyPr>
+            <a:normAutofit/>
+          </a:bodyPr>
+          <a:lstStyle/>
+          <a:p>
+            <a:r>
+              <a:rPr lang="en-US" dirty="0"/>
+              <a:t>References</a:t>
+            </a:r>
+          </a:p>
+        </p:txBody>
+      </p:sp>
+      <p:sp>
+        <p:nvSpPr>
+          <p:cNvPr id="3" name="Content Placeholder 2">
+            <a:extLst>
+              <a:ext uri="{FF2B5EF4-FFF2-40B4-BE49-F238E27FC236}">
+                <a16:creationId xmlns:a16="http://schemas.microsoft.com/office/drawing/2014/main" id="{CAD71826-8D3B-63DD-285A-E80B77069B29}"/>
+              </a:ext>
+            </a:extLst>
+          </p:cNvPr>
+          <p:cNvSpPr>
+            <a:spLocks noGrp="1"/>
+          </p:cNvSpPr>
+          <p:nvPr>
+            <p:ph idx="1"/>
+          </p:nvPr>
+        </p:nvSpPr>
+        <p:spPr/>
+        <p:txBody>
+          <a:bodyPr>
+            <a:normAutofit fontScale="40000" lnSpcReduction="20000"/>
+          </a:bodyPr>
+          <a:lstStyle/>
+          <a:p>
+            <a:r>
+              <a:rPr lang="en-GB" dirty="0" err="1"/>
+              <a:t>Bomatter</a:t>
+            </a:r>
+            <a:r>
+              <a:rPr lang="en-GB" dirty="0"/>
+              <a:t>, P., Zhang, M., Karev, D., Madan, S., Tseng, C., &amp; Kreiman, G. (2021). When Pigs Fly: Contextual Reasoning in Synthetic and Natural Scenes. </a:t>
+            </a:r>
+            <a:r>
+              <a:rPr lang="en-GB" i="1" dirty="0"/>
+              <a:t>2021 IEEE/CVF International Conference on Computer Vision (ICCV)</a:t>
+            </a:r>
+            <a:r>
+              <a:rPr lang="en-GB" dirty="0"/>
+              <a:t>, 255–264. https://</a:t>
+            </a:r>
+            <a:r>
+              <a:rPr lang="en-GB" dirty="0" err="1"/>
+              <a:t>doi.org</a:t>
+            </a:r>
+            <a:r>
+              <a:rPr lang="en-GB" dirty="0"/>
+              <a:t>/10.1109/ICCV48922.2021.00032</a:t>
+            </a:r>
+            <a:endParaRPr lang="en-SG" dirty="0"/>
+          </a:p>
+          <a:p>
+            <a:r>
+              <a:rPr lang="en-GB" dirty="0"/>
+              <a:t>Chun, M. M., &amp; Jiang, Y. (1998). Contextual Cueing: Implicit Learning and Memory of Visual Context Guides Spatial Attention. </a:t>
+            </a:r>
+            <a:r>
+              <a:rPr lang="en-GB" i="1" dirty="0"/>
+              <a:t>Cognitive Psychology</a:t>
+            </a:r>
+            <a:r>
+              <a:rPr lang="en-GB" dirty="0"/>
+              <a:t>, </a:t>
+            </a:r>
+            <a:r>
+              <a:rPr lang="en-GB" i="1" dirty="0"/>
+              <a:t>36</a:t>
+            </a:r>
+            <a:r>
+              <a:rPr lang="en-GB" dirty="0"/>
+              <a:t>(1), 28–71. https://</a:t>
+            </a:r>
+            <a:r>
+              <a:rPr lang="en-GB" dirty="0" err="1"/>
+              <a:t>doi.org</a:t>
+            </a:r>
+            <a:r>
+              <a:rPr lang="en-GB" dirty="0"/>
+              <a:t>/10.1006/cogp.1998.0681</a:t>
+            </a:r>
+            <a:endParaRPr lang="en-SG" dirty="0"/>
+          </a:p>
+          <a:p>
+            <a:r>
+              <a:rPr lang="en-GB" dirty="0"/>
+              <a:t>Dosovitskiy, A., Beyer, L., Kolesnikov, A., Weissenborn, D., Zhai, X., </a:t>
+            </a:r>
+            <a:r>
+              <a:rPr lang="en-GB" dirty="0" err="1"/>
+              <a:t>Unterthiner</a:t>
+            </a:r>
+            <a:r>
+              <a:rPr lang="en-GB" dirty="0"/>
+              <a:t>, T., Dehghani, M., </a:t>
+            </a:r>
+            <a:r>
+              <a:rPr lang="en-GB" dirty="0" err="1"/>
+              <a:t>Minderer</a:t>
+            </a:r>
+            <a:r>
+              <a:rPr lang="en-GB" dirty="0"/>
+              <a:t>, M., </a:t>
+            </a:r>
+            <a:r>
+              <a:rPr lang="en-GB" dirty="0" err="1"/>
+              <a:t>Heigold</a:t>
+            </a:r>
+            <a:r>
+              <a:rPr lang="en-GB" dirty="0"/>
+              <a:t>, G., Gelly, S., </a:t>
+            </a:r>
+            <a:r>
+              <a:rPr lang="en-GB" dirty="0" err="1"/>
+              <a:t>Uszkoreit</a:t>
+            </a:r>
+            <a:r>
+              <a:rPr lang="en-GB" dirty="0"/>
+              <a:t>, J., &amp; </a:t>
+            </a:r>
+            <a:r>
+              <a:rPr lang="en-GB" dirty="0" err="1"/>
+              <a:t>Houlsby</a:t>
+            </a:r>
+            <a:r>
+              <a:rPr lang="en-GB" dirty="0"/>
+              <a:t>, N. (2021). </a:t>
+            </a:r>
+            <a:r>
+              <a:rPr lang="en-GB" i="1" dirty="0"/>
+              <a:t>An Image is Worth 16x16 Words: Transformers for Image Recognition at Scale</a:t>
+            </a:r>
+            <a:r>
+              <a:rPr lang="en-GB" dirty="0"/>
+              <a:t> (arXiv:2010.11929). </a:t>
+            </a:r>
+            <a:r>
+              <a:rPr lang="en-GB" dirty="0" err="1"/>
+              <a:t>arXiv</a:t>
+            </a:r>
+            <a:r>
+              <a:rPr lang="en-GB" dirty="0"/>
+              <a:t>. https://</a:t>
+            </a:r>
+            <a:r>
+              <a:rPr lang="en-GB" dirty="0" err="1"/>
+              <a:t>doi.org</a:t>
+            </a:r>
+            <a:r>
+              <a:rPr lang="en-GB" dirty="0"/>
+              <a:t>/10.48550/arXiv.2010.11929</a:t>
+            </a:r>
+            <a:endParaRPr lang="en-SG" dirty="0"/>
+          </a:p>
+          <a:p>
+            <a:r>
+              <a:rPr lang="en-GB" dirty="0"/>
+              <a:t>Lin, T.-Y., Maire, M., Belongie, S., </a:t>
+            </a:r>
+            <a:r>
+              <a:rPr lang="en-GB" dirty="0" err="1"/>
+              <a:t>Bourdev</a:t>
+            </a:r>
+            <a:r>
+              <a:rPr lang="en-GB" dirty="0"/>
+              <a:t>, L., </a:t>
+            </a:r>
+            <a:r>
+              <a:rPr lang="en-GB" dirty="0" err="1"/>
+              <a:t>Girshick</a:t>
+            </a:r>
+            <a:r>
+              <a:rPr lang="en-GB" dirty="0"/>
+              <a:t>, R., Hays, J., Perona, P., Ramanan, D., </a:t>
+            </a:r>
+            <a:r>
+              <a:rPr lang="en-GB" dirty="0" err="1"/>
+              <a:t>Zitnick</a:t>
+            </a:r>
+            <a:r>
+              <a:rPr lang="en-GB" dirty="0"/>
+              <a:t>, C. L., &amp; </a:t>
+            </a:r>
+            <a:r>
+              <a:rPr lang="en-GB" dirty="0" err="1"/>
+              <a:t>Dollár</a:t>
+            </a:r>
+            <a:r>
+              <a:rPr lang="en-GB" dirty="0"/>
+              <a:t>, P. (2015). </a:t>
+            </a:r>
+            <a:r>
+              <a:rPr lang="en-GB" i="1" dirty="0"/>
+              <a:t>Microsoft COCO: Common Objects in Context</a:t>
+            </a:r>
+            <a:r>
+              <a:rPr lang="en-GB" dirty="0"/>
+              <a:t> (arXiv:1405.0312). </a:t>
+            </a:r>
+            <a:r>
+              <a:rPr lang="en-GB" dirty="0" err="1"/>
+              <a:t>arXiv</a:t>
+            </a:r>
+            <a:r>
+              <a:rPr lang="en-GB" dirty="0"/>
+              <a:t>. https://</a:t>
+            </a:r>
+            <a:r>
+              <a:rPr lang="en-GB" dirty="0" err="1"/>
+              <a:t>doi.org</a:t>
+            </a:r>
+            <a:r>
+              <a:rPr lang="en-GB" dirty="0"/>
+              <a:t>/10.48550/arXiv.1405.0312</a:t>
+            </a:r>
+            <a:endParaRPr lang="en-SG" dirty="0"/>
+          </a:p>
+          <a:p>
+            <a:r>
+              <a:rPr lang="en-GB" dirty="0" err="1"/>
+              <a:t>Öhlschläger</a:t>
+            </a:r>
+            <a:r>
+              <a:rPr lang="en-GB" dirty="0"/>
+              <a:t>, S., &amp; Võ, M. L.-H. (2017). SCEGRAM: An image database for semantic and syntactic inconsistencies in scenes. </a:t>
+            </a:r>
+            <a:r>
+              <a:rPr lang="en-GB" i="1" dirty="0" err="1"/>
+              <a:t>Behavior</a:t>
+            </a:r>
+            <a:r>
+              <a:rPr lang="en-GB" i="1" dirty="0"/>
+              <a:t> Research Methods</a:t>
+            </a:r>
+            <a:r>
+              <a:rPr lang="en-GB" dirty="0"/>
+              <a:t>, </a:t>
+            </a:r>
+            <a:r>
+              <a:rPr lang="en-GB" i="1" dirty="0"/>
+              <a:t>49</a:t>
+            </a:r>
+            <a:r>
+              <a:rPr lang="en-GB" dirty="0"/>
+              <a:t>(5), 1780–1791. https://</a:t>
+            </a:r>
+            <a:r>
+              <a:rPr lang="en-GB" dirty="0" err="1"/>
+              <a:t>doi.org</a:t>
+            </a:r>
+            <a:r>
+              <a:rPr lang="en-GB" dirty="0"/>
+              <a:t>/10.3758/s13428-016-0820-3</a:t>
+            </a:r>
+            <a:endParaRPr lang="en-SG" dirty="0"/>
+          </a:p>
+          <a:p>
+            <a:r>
+              <a:rPr lang="en-GB" dirty="0"/>
+              <a:t>Posner, M. I. (1980). Orienting of Attention. </a:t>
+            </a:r>
+            <a:r>
+              <a:rPr lang="en-GB" i="1" dirty="0"/>
+              <a:t>Quarterly Journal of Experimental Psychology</a:t>
+            </a:r>
+            <a:r>
+              <a:rPr lang="en-GB" dirty="0"/>
+              <a:t>, </a:t>
+            </a:r>
+            <a:r>
+              <a:rPr lang="en-GB" i="1" dirty="0"/>
+              <a:t>32</a:t>
+            </a:r>
+            <a:r>
+              <a:rPr lang="en-GB" dirty="0"/>
+              <a:t>(1), 3–25. https://</a:t>
+            </a:r>
+            <a:r>
+              <a:rPr lang="en-GB" dirty="0" err="1"/>
+              <a:t>doi.org</a:t>
+            </a:r>
+            <a:r>
+              <a:rPr lang="en-GB" dirty="0"/>
+              <a:t>/10.1080/00335558008248231</a:t>
+            </a:r>
+            <a:endParaRPr lang="en-SG" dirty="0"/>
+          </a:p>
+          <a:p>
+            <a:r>
+              <a:rPr lang="en-GB" dirty="0"/>
+              <a:t>Posner, M. I., &amp; Cohen, Y. (1984). Components of Visual Orienting. In H. Bouma &amp; D. G. Bouwhuis (Eds.), </a:t>
+            </a:r>
+            <a:r>
+              <a:rPr lang="en-GB" i="1" dirty="0"/>
+              <a:t>Attention and Performance X</a:t>
+            </a:r>
+            <a:r>
+              <a:rPr lang="en-GB" dirty="0"/>
+              <a:t> (pp. 531–556). Lawrence Erlbaum Associates.</a:t>
+            </a:r>
+            <a:endParaRPr lang="en-SG" dirty="0"/>
+          </a:p>
+          <a:p>
+            <a:r>
+              <a:rPr lang="en-GB" dirty="0"/>
+              <a:t>Simonyan, K., &amp; Zisserman, A. (2014). </a:t>
+            </a:r>
+            <a:r>
+              <a:rPr lang="en-GB" i="1" dirty="0"/>
+              <a:t>Very Deep Convolutional Networks for Large-Scale Image Recognition</a:t>
+            </a:r>
+            <a:r>
+              <a:rPr lang="en-GB" dirty="0"/>
+              <a:t> (Version 6). </a:t>
+            </a:r>
+            <a:r>
+              <a:rPr lang="en-GB" dirty="0" err="1"/>
+              <a:t>arXiv</a:t>
+            </a:r>
+            <a:r>
+              <a:rPr lang="en-GB" dirty="0"/>
+              <a:t>. https://</a:t>
+            </a:r>
+            <a:r>
+              <a:rPr lang="en-GB" dirty="0" err="1"/>
+              <a:t>doi.org</a:t>
+            </a:r>
+            <a:r>
+              <a:rPr lang="en-GB" dirty="0"/>
+              <a:t>/10.48550/ARXIV.1409.1556</a:t>
+            </a:r>
+            <a:endParaRPr lang="en-SG" dirty="0"/>
+          </a:p>
+          <a:p>
+            <a:r>
+              <a:rPr lang="en-GB" dirty="0"/>
+              <a:t>Treisman, A. M., &amp; </a:t>
+            </a:r>
+            <a:r>
+              <a:rPr lang="en-GB" dirty="0" err="1"/>
+              <a:t>Gelade</a:t>
+            </a:r>
+            <a:r>
+              <a:rPr lang="en-GB" dirty="0"/>
+              <a:t>, G. (1980). A feature-integration theory of attention. </a:t>
+            </a:r>
+            <a:r>
+              <a:rPr lang="en-GB" i="1" dirty="0"/>
+              <a:t>Cognitive Psychology</a:t>
+            </a:r>
+            <a:r>
+              <a:rPr lang="en-GB" dirty="0"/>
+              <a:t>, </a:t>
+            </a:r>
+            <a:r>
+              <a:rPr lang="en-GB" i="1" dirty="0"/>
+              <a:t>12</a:t>
+            </a:r>
+            <a:r>
+              <a:rPr lang="en-GB" dirty="0"/>
+              <a:t>(1), 97–136. https://</a:t>
+            </a:r>
+            <a:r>
+              <a:rPr lang="en-GB" dirty="0" err="1"/>
+              <a:t>doi.org</a:t>
+            </a:r>
+            <a:r>
+              <a:rPr lang="en-GB" dirty="0"/>
+              <a:t>/10.1016/0010-0285(80)90005-5</a:t>
+            </a:r>
+            <a:endParaRPr lang="en-SG" dirty="0"/>
+          </a:p>
+          <a:p>
+            <a:r>
+              <a:rPr lang="en-GB" dirty="0"/>
+              <a:t>Vaswani, A., </a:t>
+            </a:r>
+            <a:r>
+              <a:rPr lang="en-GB" dirty="0" err="1"/>
+              <a:t>Shazeer</a:t>
+            </a:r>
+            <a:r>
+              <a:rPr lang="en-GB" dirty="0"/>
+              <a:t>, N., Parmar, N., </a:t>
+            </a:r>
+            <a:r>
+              <a:rPr lang="en-GB" dirty="0" err="1"/>
+              <a:t>Uszkoreit</a:t>
+            </a:r>
+            <a:r>
+              <a:rPr lang="en-GB" dirty="0"/>
+              <a:t>, J., Jones, L., Gomez, A. N., Kaiser, L., &amp; </a:t>
+            </a:r>
+            <a:r>
+              <a:rPr lang="en-GB" dirty="0" err="1"/>
+              <a:t>Polosukhin</a:t>
+            </a:r>
+            <a:r>
+              <a:rPr lang="en-GB" dirty="0"/>
+              <a:t>, I. (2023). </a:t>
+            </a:r>
+            <a:r>
+              <a:rPr lang="en-GB" i="1" dirty="0"/>
+              <a:t>Attention Is All You Need</a:t>
+            </a:r>
+            <a:r>
+              <a:rPr lang="en-GB" dirty="0"/>
+              <a:t> (arXiv:1706.03762). </a:t>
+            </a:r>
+            <a:r>
+              <a:rPr lang="en-GB" dirty="0" err="1"/>
+              <a:t>arXiv</a:t>
+            </a:r>
+            <a:r>
+              <a:rPr lang="en-GB" dirty="0"/>
+              <a:t>. https://</a:t>
+            </a:r>
+            <a:r>
+              <a:rPr lang="en-GB" dirty="0" err="1"/>
+              <a:t>doi.org</a:t>
+            </a:r>
+            <a:r>
+              <a:rPr lang="en-GB" dirty="0"/>
+              <a:t>/10.48550/arXiv.1706.03762</a:t>
+            </a:r>
+            <a:endParaRPr lang="en-SG" dirty="0"/>
+          </a:p>
+          <a:p>
+            <a:r>
+              <a:rPr lang="en-GB" dirty="0"/>
+              <a:t>Wolfe, J. M. (1994). Guided Search 2.0 A revised model of visual search. </a:t>
+            </a:r>
+            <a:r>
+              <a:rPr lang="en-GB" i="1" dirty="0"/>
+              <a:t>Psychonomic Bulletin &amp; Review</a:t>
+            </a:r>
+            <a:r>
+              <a:rPr lang="en-GB" dirty="0"/>
+              <a:t>, </a:t>
+            </a:r>
+            <a:r>
+              <a:rPr lang="en-GB" i="1" dirty="0"/>
+              <a:t>1</a:t>
+            </a:r>
+            <a:r>
+              <a:rPr lang="en-GB" dirty="0"/>
+              <a:t>(2), 202–238. https://</a:t>
+            </a:r>
+            <a:r>
+              <a:rPr lang="en-GB" dirty="0" err="1"/>
+              <a:t>doi.org</a:t>
+            </a:r>
+            <a:r>
+              <a:rPr lang="en-GB" dirty="0"/>
+              <a:t>/10.3758/BF03200774</a:t>
+            </a:r>
+            <a:endParaRPr lang="en-SG" dirty="0"/>
+          </a:p>
+          <a:p>
+            <a:r>
+              <a:rPr lang="en-GB" dirty="0"/>
+              <a:t>Wolfe, J. M. (2021). Guided Search 6.0: An updated model of visual search. </a:t>
+            </a:r>
+            <a:r>
+              <a:rPr lang="en-GB" i="1" dirty="0"/>
+              <a:t>Psychonomic Bulletin &amp; Review</a:t>
+            </a:r>
+            <a:r>
+              <a:rPr lang="en-GB" dirty="0"/>
+              <a:t>, </a:t>
+            </a:r>
+            <a:r>
+              <a:rPr lang="en-GB" i="1" dirty="0"/>
+              <a:t>28</a:t>
+            </a:r>
+            <a:r>
+              <a:rPr lang="en-GB" dirty="0"/>
+              <a:t>(4), 1060–1092. https://</a:t>
+            </a:r>
+            <a:r>
+              <a:rPr lang="en-GB" dirty="0" err="1"/>
+              <a:t>doi.org</a:t>
+            </a:r>
+            <a:r>
+              <a:rPr lang="en-GB" dirty="0"/>
+              <a:t>/10.3758/s13423-020-01859-9</a:t>
+            </a:r>
+            <a:endParaRPr lang="en-SG" dirty="0"/>
+          </a:p>
+          <a:p>
+            <a:r>
+              <a:rPr lang="en-GB" dirty="0"/>
+              <a:t>Yang, Z., Huang, L., Chen, Y., Wei, Z., Ahn, S., Zelinsky, G., Samaras, D., &amp; Hoai, M. (2020). Predicting Goal-Directed Human Attention Using Inverse Reinforcement Learning. </a:t>
+            </a:r>
+            <a:r>
+              <a:rPr lang="en-GB" i="1" dirty="0"/>
+              <a:t>2020 IEEE/CVF Conference on Computer Vision and Pattern Recognition (CVPR)</a:t>
+            </a:r>
+            <a:r>
+              <a:rPr lang="en-GB" dirty="0"/>
+              <a:t>, 190–199. https://</a:t>
+            </a:r>
+            <a:r>
+              <a:rPr lang="en-GB" dirty="0" err="1"/>
+              <a:t>doi.org</a:t>
+            </a:r>
+            <a:r>
+              <a:rPr lang="en-GB" dirty="0"/>
+              <a:t>/10.1109/CVPR42600.2020.00027</a:t>
+            </a:r>
+            <a:endParaRPr lang="en-SG" dirty="0"/>
+          </a:p>
+          <a:p>
+            <a:r>
+              <a:rPr lang="en-GB" dirty="0"/>
+              <a:t>Zhang, M., Feng, J., Ma, K. T., Lim, J. H., Zhao, Q., &amp; Kreiman, G. (2018). Finding any Waldo with zero-shot invariant and efficient visual search. </a:t>
+            </a:r>
+            <a:r>
+              <a:rPr lang="en-GB" i="1" dirty="0"/>
+              <a:t>Nature Communications</a:t>
+            </a:r>
+            <a:r>
+              <a:rPr lang="en-GB" dirty="0"/>
+              <a:t>, </a:t>
+            </a:r>
+            <a:r>
+              <a:rPr lang="en-GB" i="1" dirty="0"/>
+              <a:t>9</a:t>
+            </a:r>
+            <a:r>
+              <a:rPr lang="en-GB" dirty="0"/>
+              <a:t>(1), 3730. https://</a:t>
+            </a:r>
+            <a:r>
+              <a:rPr lang="en-GB" dirty="0" err="1"/>
+              <a:t>doi.org</a:t>
+            </a:r>
+            <a:r>
+              <a:rPr lang="en-GB" dirty="0"/>
+              <a:t>/10.1038/s41467-018-06217-x</a:t>
+            </a:r>
+            <a:endParaRPr lang="en-SG" dirty="0"/>
+          </a:p>
+          <a:p>
+            <a:endParaRPr lang="en-US" dirty="0"/>
+          </a:p>
+        </p:txBody>
+      </p:sp>
+    </p:spTree>
+    <p:extLst>
+      <p:ext uri="{BB962C8B-B14F-4D97-AF65-F5344CB8AC3E}">
+        <p14:creationId xmlns:p14="http://schemas.microsoft.com/office/powerpoint/2010/main" val="2926140879"/>
+      </p:ext>
+    </p:extLst>
+  </p:cSld>
+  <p:clrMapOvr>
+    <a:masterClrMapping/>
+  </p:clrMapOvr>
+</p:sld>
+</file>
+
 <file path=ppt/slides/slide6.xml><?xml version="1.0" encoding="utf-8"?>
 <p:sld xmlns:a="http://schemas.openxmlformats.org/drawingml/2006/main" xmlns:r="http://schemas.openxmlformats.org/officeDocument/2006/relationships" xmlns:p="http://schemas.openxmlformats.org/presentationml/2006/main" show="0">
   <p:cSld>
